--- a/docs/pmr_daily.pptx
+++ b/docs/pmr_daily.pptx
@@ -3197,7 +3197,7 @@
                 </a:solidFill>
                 <a:latin typeface="Segoe UI"/>
               </a:rPr>
-              <a:t>Thursday, 16 Jul 2026 11:51 SGT</a:t>
+              <a:t>Thursday, 16 Jul 2026 15:00 SGT</a:t>
             </a:r>
           </a:p>
         </p:txBody>
@@ -3227,11 +3227,11 @@
             <a:r>
               <a:rPr sz="2000" b="1">
                 <a:solidFill>
-                  <a:srgbClr val="EF4444"/>
-                </a:solidFill>
-                <a:latin typeface="Segoe UI"/>
-              </a:rPr>
-              <a:t>Market tone: RISK-OFF</a:t>
+                  <a:srgbClr val="F59E0B"/>
+                </a:solidFill>
+                <a:latin typeface="Segoe UI"/>
+              </a:rPr>
+              <a:t>Market tone: MIXED</a:t>
             </a:r>
           </a:p>
         </p:txBody>
@@ -3265,7 +3265,7 @@
                 </a:solidFill>
                 <a:latin typeface="Segoe UI"/>
               </a:rPr>
-              <a:t>RAG 20R / 11A / 16G   ·   68.1% above 200DMA   ·   Portfolio ₹517,773 (-70.6%)</a:t>
+              <a:t>RAG 15R / 12A / 19G   ·   50.0% above 200DMA   ·   Portfolio ₹1,747,294 (+0.4%)</a:t>
             </a:r>
           </a:p>
         </p:txBody>
@@ -3461,7 +3461,7 @@
                 </a:solidFill>
                 <a:latin typeface="Segoe UI"/>
               </a:rPr>
-              <a:t>HDFC Bank</a:t>
+              <a:t>Ethereum</a:t>
             </a:r>
           </a:p>
         </p:txBody>
@@ -3491,11 +3491,11 @@
             <a:r>
               <a:rPr sz="900" b="0">
                 <a:solidFill>
-                  <a:srgbClr val="22C55E"/>
-                </a:solidFill>
-                <a:latin typeface="Segoe UI"/>
-              </a:rPr>
-              <a:t>HDFCBANK.NS · GREEN</a:t>
+                  <a:srgbClr val="EF4444"/>
+                </a:solidFill>
+                <a:latin typeface="Segoe UI"/>
+              </a:rPr>
+              <a:t>ETH-USD · RED</a:t>
             </a:r>
           </a:p>
         </p:txBody>
@@ -3529,7 +3529,7 @@
                 </a:solidFill>
                 <a:latin typeface="Segoe UI"/>
               </a:rPr>
-              <a:t>+20.2%</a:t>
+              <a:t>+22.3%</a:t>
             </a:r>
           </a:p>
         </p:txBody>
@@ -3587,7 +3587,7 @@
                 </a:solidFill>
                 <a:latin typeface="Segoe UI"/>
               </a:rPr>
-              <a:t>Straits Times</a:t>
+              <a:t>Crude Oil WTI</a:t>
             </a:r>
           </a:p>
         </p:txBody>
@@ -3621,7 +3621,7 @@
                 </a:solidFill>
                 <a:latin typeface="Segoe UI"/>
               </a:rPr>
-              <a:t>^STI · RED</a:t>
+              <a:t>CL=F · RED</a:t>
             </a:r>
           </a:p>
         </p:txBody>
@@ -3655,7 +3655,7 @@
                 </a:solidFill>
                 <a:latin typeface="Segoe UI"/>
               </a:rPr>
-              <a:t>+16.9%</a:t>
+              <a:t>+14.1%</a:t>
             </a:r>
           </a:p>
         </p:txBody>
@@ -3713,7 +3713,7 @@
                 </a:solidFill>
                 <a:latin typeface="Segoe UI"/>
               </a:rPr>
-              <a:t>Infosys</a:t>
+              <a:t>Apple</a:t>
             </a:r>
           </a:p>
         </p:txBody>
@@ -3743,11 +3743,11 @@
             <a:r>
               <a:rPr sz="900" b="0">
                 <a:solidFill>
-                  <a:srgbClr val="EF4444"/>
-                </a:solidFill>
-                <a:latin typeface="Segoe UI"/>
-              </a:rPr>
-              <a:t>INFY.NS · RED</a:t>
+                  <a:srgbClr val="22C55E"/>
+                </a:solidFill>
+                <a:latin typeface="Segoe UI"/>
+              </a:rPr>
+              <a:t>AAPL · GREEN</a:t>
             </a:r>
           </a:p>
         </p:txBody>
@@ -3781,7 +3781,7 @@
                 </a:solidFill>
                 <a:latin typeface="Segoe UI"/>
               </a:rPr>
-              <a:t>+12.3%</a:t>
+              <a:t>+13.2%</a:t>
             </a:r>
           </a:p>
         </p:txBody>
@@ -3839,7 +3839,7 @@
                 </a:solidFill>
                 <a:latin typeface="Segoe UI"/>
               </a:rPr>
-              <a:t>SENSEX</a:t>
+              <a:t>Bitcoin</a:t>
             </a:r>
           </a:p>
         </p:txBody>
@@ -3873,7 +3873,7 @@
                 </a:solidFill>
                 <a:latin typeface="Segoe UI"/>
               </a:rPr>
-              <a:t>^BSESN · RED</a:t>
+              <a:t>BTC-USD · RED</a:t>
             </a:r>
           </a:p>
         </p:txBody>
@@ -3907,7 +3907,7 @@
                 </a:solidFill>
                 <a:latin typeface="Segoe UI"/>
               </a:rPr>
-              <a:t>+9.5%</a:t>
+              <a:t>+10.5%</a:t>
             </a:r>
           </a:p>
         </p:txBody>
@@ -3965,7 +3965,7 @@
                 </a:solidFill>
                 <a:latin typeface="Segoe UI"/>
               </a:rPr>
-              <a:t>Nvidia</a:t>
+              <a:t>TCS</a:t>
             </a:r>
           </a:p>
         </p:txBody>
@@ -3995,11 +3995,11 @@
             <a:r>
               <a:rPr sz="900" b="0">
                 <a:solidFill>
-                  <a:srgbClr val="22C55E"/>
-                </a:solidFill>
-                <a:latin typeface="Segoe UI"/>
-              </a:rPr>
-              <a:t>NVDA · GREEN</a:t>
+                  <a:srgbClr val="EF4444"/>
+                </a:solidFill>
+                <a:latin typeface="Segoe UI"/>
+              </a:rPr>
+              <a:t>TCS.NS · RED</a:t>
             </a:r>
           </a:p>
         </p:txBody>
@@ -4033,7 +4033,7 @@
                 </a:solidFill>
                 <a:latin typeface="Segoe UI"/>
               </a:rPr>
-              <a:t>+9.1%</a:t>
+              <a:t>+10.1%</a:t>
             </a:r>
           </a:p>
         </p:txBody>
@@ -4125,7 +4125,7 @@
                 </a:solidFill>
                 <a:latin typeface="Segoe UI"/>
               </a:rPr>
-              <a:t>Copper</a:t>
+              <a:t>Natural Gas</a:t>
             </a:r>
           </a:p>
         </p:txBody>
@@ -4159,7 +4159,7 @@
                 </a:solidFill>
                 <a:latin typeface="Segoe UI"/>
               </a:rPr>
-              <a:t>HG=F · RED</a:t>
+              <a:t>NG=F · RED</a:t>
             </a:r>
           </a:p>
         </p:txBody>
@@ -4193,7 +4193,7 @@
                 </a:solidFill>
                 <a:latin typeface="Segoe UI"/>
               </a:rPr>
-              <a:t>-20.6%</a:t>
+              <a:t>-11.8%</a:t>
             </a:r>
           </a:p>
         </p:txBody>
@@ -4251,7 +4251,7 @@
                 </a:solidFill>
                 <a:latin typeface="Segoe UI"/>
               </a:rPr>
-              <a:t>Natural Gas</a:t>
+              <a:t>Clean Energy</a:t>
             </a:r>
           </a:p>
         </p:txBody>
@@ -4285,7 +4285,7 @@
                 </a:solidFill>
                 <a:latin typeface="Segoe UI"/>
               </a:rPr>
-              <a:t>NG=F · RED</a:t>
+              <a:t>ICLN · RED</a:t>
             </a:r>
           </a:p>
         </p:txBody>
@@ -4319,7 +4319,7 @@
                 </a:solidFill>
                 <a:latin typeface="Segoe UI"/>
               </a:rPr>
-              <a:t>-15.0%</a:t>
+              <a:t>-6.9%</a:t>
             </a:r>
           </a:p>
         </p:txBody>
@@ -4377,7 +4377,7 @@
                 </a:solidFill>
                 <a:latin typeface="Segoe UI"/>
               </a:rPr>
-              <a:t>S&amp;P 500</a:t>
+              <a:t>Tesla</a:t>
             </a:r>
           </a:p>
         </p:txBody>
@@ -4407,11 +4407,11 @@
             <a:r>
               <a:rPr sz="900" b="0">
                 <a:solidFill>
-                  <a:srgbClr val="F59E0B"/>
-                </a:solidFill>
-                <a:latin typeface="Segoe UI"/>
-              </a:rPr>
-              <a:t>^GSPC · AMBER</a:t>
+                  <a:srgbClr val="EF4444"/>
+                </a:solidFill>
+                <a:latin typeface="Segoe UI"/>
+              </a:rPr>
+              <a:t>TSLA · RED</a:t>
             </a:r>
           </a:p>
         </p:txBody>
@@ -4445,7 +4445,7 @@
                 </a:solidFill>
                 <a:latin typeface="Segoe UI"/>
               </a:rPr>
-              <a:t>-10.5%</a:t>
+              <a:t>-6.2%</a:t>
             </a:r>
           </a:p>
         </p:txBody>
@@ -4503,7 +4503,7 @@
                 </a:solidFill>
                 <a:latin typeface="Segoe UI"/>
               </a:rPr>
-              <a:t>Nikkei 225</a:t>
+              <a:t>US Technology</a:t>
             </a:r>
           </a:p>
         </p:txBody>
@@ -4533,11 +4533,11 @@
             <a:r>
               <a:rPr sz="900" b="0">
                 <a:solidFill>
-                  <a:srgbClr val="EF4444"/>
-                </a:solidFill>
-                <a:latin typeface="Segoe UI"/>
-              </a:rPr>
-              <a:t>^N225 · RED</a:t>
+                  <a:srgbClr val="F59E0B"/>
+                </a:solidFill>
+                <a:latin typeface="Segoe UI"/>
+              </a:rPr>
+              <a:t>XLK · AMBER</a:t>
             </a:r>
           </a:p>
         </p:txBody>
@@ -4571,7 +4571,7 @@
                 </a:solidFill>
                 <a:latin typeface="Segoe UI"/>
               </a:rPr>
-              <a:t>-9.9%</a:t>
+              <a:t>-4.7%</a:t>
             </a:r>
           </a:p>
         </p:txBody>
@@ -4629,7 +4629,7 @@
                 </a:solidFill>
                 <a:latin typeface="Segoe UI"/>
               </a:rPr>
-              <a:t>US 7-10Y Treasury</a:t>
+              <a:t>Nikkei 225</a:t>
             </a:r>
           </a:p>
         </p:txBody>
@@ -4659,11 +4659,11 @@
             <a:r>
               <a:rPr sz="900" b="0">
                 <a:solidFill>
-                  <a:srgbClr val="EF4444"/>
-                </a:solidFill>
-                <a:latin typeface="Segoe UI"/>
-              </a:rPr>
-              <a:t>IEF · RED</a:t>
+                  <a:srgbClr val="F59E0B"/>
+                </a:solidFill>
+                <a:latin typeface="Segoe UI"/>
+              </a:rPr>
+              <a:t>^N225 · AMBER</a:t>
             </a:r>
           </a:p>
         </p:txBody>
@@ -4697,7 +4697,7 @@
                 </a:solidFill>
                 <a:latin typeface="Segoe UI"/>
               </a:rPr>
-              <a:t>-9.2%</a:t>
+              <a:t>-4.6%</a:t>
             </a:r>
           </a:p>
         </p:txBody>
@@ -4837,7 +4837,7 @@
         <p:spPr>
           <a:xfrm>
             <a:off x="457200" y="1188720"/>
-            <a:ext cx="11247120" cy="5602458"/>
+            <a:ext cx="11247120" cy="5513499"/>
           </a:xfrm>
           <a:prstGeom prst="rect">
             <a:avLst/>
@@ -4967,7 +4967,7 @@
                 </a:solidFill>
                 <a:latin typeface="Segoe UI"/>
               </a:rPr>
-              <a:t>Bitcoin</a:t>
+              <a:t>ICICI Bank</a:t>
             </a:r>
           </a:p>
         </p:txBody>
@@ -5035,7 +5035,7 @@
                 </a:solidFill>
                 <a:latin typeface="Segoe UI"/>
               </a:rPr>
-              <a:t>93%</a:t>
+              <a:t>91%</a:t>
             </a:r>
           </a:p>
         </p:txBody>
@@ -5069,7 +5069,7 @@
                 </a:solidFill>
                 <a:latin typeface="Segoe UI"/>
               </a:rPr>
-              <a:t>above 200DMA · golden cross (50&gt;200) · 3M momentum +41.6%</a:t>
+              <a:t>above 200DMA · golden cross (50&gt;200) · 3M momentum +13.6%</a:t>
             </a:r>
           </a:p>
         </p:txBody>
@@ -5103,7 +5103,7 @@
                 </a:solidFill>
                 <a:latin typeface="Segoe UI"/>
               </a:rPr>
-              <a:t>Silver</a:t>
+              <a:t>Dow Jones</a:t>
             </a:r>
           </a:p>
         </p:txBody>
@@ -5171,7 +5171,7 @@
                 </a:solidFill>
                 <a:latin typeface="Segoe UI"/>
               </a:rPr>
-              <a:t>93%</a:t>
+              <a:t>91%</a:t>
             </a:r>
           </a:p>
         </p:txBody>
@@ -5205,7 +5205,7 @@
                 </a:solidFill>
                 <a:latin typeface="Segoe UI"/>
               </a:rPr>
-              <a:t>above 200DMA · golden cross (50&gt;200) · 3M momentum +35.3%</a:t>
+              <a:t>above 200DMA · golden cross (50&gt;200) · 3M momentum +5.2%</a:t>
             </a:r>
           </a:p>
         </p:txBody>
@@ -5239,7 +5239,7 @@
                 </a:solidFill>
                 <a:latin typeface="Segoe UI"/>
               </a:rPr>
-              <a:t>S&amp;P 500</a:t>
+              <a:t>Russell 2000</a:t>
             </a:r>
           </a:p>
         </p:txBody>
@@ -5307,7 +5307,7 @@
                 </a:solidFill>
                 <a:latin typeface="Segoe UI"/>
               </a:rPr>
-              <a:t>84%</a:t>
+              <a:t>91%</a:t>
             </a:r>
           </a:p>
         </p:txBody>
@@ -5341,7 +5341,7 @@
                 </a:solidFill>
                 <a:latin typeface="Segoe UI"/>
               </a:rPr>
-              <a:t>above 200DMA · golden cross (50&gt;200) · 3M momentum +23.6%</a:t>
+              <a:t>above 200DMA · golden cross (50&gt;200) · 3M momentum +4.0%</a:t>
             </a:r>
           </a:p>
         </p:txBody>
@@ -5375,7 +5375,7 @@
                 </a:solidFill>
                 <a:latin typeface="Segoe UI"/>
               </a:rPr>
-              <a:t>Tesla</a:t>
+              <a:t>USD/JPY</a:t>
             </a:r>
           </a:p>
         </p:txBody>
@@ -5443,7 +5443,7 @@
                 </a:solidFill>
                 <a:latin typeface="Segoe UI"/>
               </a:rPr>
-              <a:t>91%</a:t>
+              <a:t>89%</a:t>
             </a:r>
           </a:p>
         </p:txBody>
@@ -5477,7 +5477,7 @@
                 </a:solidFill>
                 <a:latin typeface="Segoe UI"/>
               </a:rPr>
-              <a:t>above 200DMA · golden cross (50&gt;200) · 3M momentum +19.4%</a:t>
+              <a:t>above 200DMA · golden cross (50&gt;200) · 3M momentum +2.7%</a:t>
             </a:r>
           </a:p>
         </p:txBody>
@@ -5511,7 +5511,7 @@
                 </a:solidFill>
                 <a:latin typeface="Segoe UI"/>
               </a:rPr>
-              <a:t>US 1-3Y Treasury</a:t>
+              <a:t>S&amp;P 500</a:t>
             </a:r>
           </a:p>
         </p:txBody>
@@ -5579,7 +5579,7 @@
                 </a:solidFill>
                 <a:latin typeface="Segoe UI"/>
               </a:rPr>
-              <a:t>91%</a:t>
+              <a:t>89%</a:t>
             </a:r>
           </a:p>
         </p:txBody>
@@ -5613,7 +5613,7 @@
                 </a:solidFill>
                 <a:latin typeface="Segoe UI"/>
               </a:rPr>
-              <a:t>above 200DMA · golden cross (50&gt;200) · 3M momentum +8.9%</a:t>
+              <a:t>above 200DMA · golden cross (50&gt;200) · 3M momentum +0.9%</a:t>
             </a:r>
           </a:p>
         </p:txBody>
@@ -5647,7 +5647,7 @@
                 </a:solidFill>
                 <a:latin typeface="Segoe UI"/>
               </a:rPr>
-              <a:t>Microsoft</a:t>
+              <a:t>US Financials</a:t>
             </a:r>
           </a:p>
         </p:txBody>
@@ -5681,7 +5681,7 @@
                 </a:solidFill>
                 <a:latin typeface="Segoe UI"/>
               </a:rPr>
-              <a:t>STRONG BUY</a:t>
+              <a:t>BUY</a:t>
             </a:r>
           </a:p>
         </p:txBody>
@@ -5715,7 +5715,7 @@
                 </a:solidFill>
                 <a:latin typeface="Segoe UI"/>
               </a:rPr>
-              <a:t>82%</a:t>
+              <a:t>84%</a:t>
             </a:r>
           </a:p>
         </p:txBody>
@@ -5749,7 +5749,7 @@
                 </a:solidFill>
                 <a:latin typeface="Segoe UI"/>
               </a:rPr>
-              <a:t>above 200DMA · golden cross (50&gt;200) · 3M momentum +31.6%</a:t>
+              <a:t>above 200DMA · golden cross (50&gt;200) · 3M momentum +10.7%</a:t>
             </a:r>
           </a:p>
         </p:txBody>
@@ -5783,7 +5783,7 @@
                 </a:solidFill>
                 <a:latin typeface="Segoe UI"/>
               </a:rPr>
-              <a:t>Gold</a:t>
+              <a:t>Apple</a:t>
             </a:r>
           </a:p>
         </p:txBody>
@@ -5817,7 +5817,7 @@
                 </a:solidFill>
                 <a:latin typeface="Segoe UI"/>
               </a:rPr>
-              <a:t>STRONG BUY</a:t>
+              <a:t>BUY</a:t>
             </a:r>
           </a:p>
         </p:txBody>
@@ -5851,7 +5851,7 @@
                 </a:solidFill>
                 <a:latin typeface="Segoe UI"/>
               </a:rPr>
-              <a:t>90%</a:t>
+              <a:t>84%</a:t>
             </a:r>
           </a:p>
         </p:txBody>
@@ -5885,7 +5885,7 @@
                 </a:solidFill>
                 <a:latin typeface="Segoe UI"/>
               </a:rPr>
-              <a:t>above 200DMA · golden cross (50&gt;200) · 3M momentum +10.0%</a:t>
+              <a:t>above 200DMA · golden cross (50&gt;200) · 3M momentum +9.8%</a:t>
             </a:r>
           </a:p>
         </p:txBody>
@@ -5919,7 +5919,7 @@
                 </a:solidFill>
                 <a:latin typeface="Segoe UI"/>
               </a:rPr>
-              <a:t>US 20Y+ Treasury</a:t>
+              <a:t>Straits Times</a:t>
             </a:r>
           </a:p>
         </p:txBody>
@@ -5953,7 +5953,7 @@
                 </a:solidFill>
                 <a:latin typeface="Segoe UI"/>
               </a:rPr>
-              <a:t>STRONG BUY</a:t>
+              <a:t>BUY</a:t>
             </a:r>
           </a:p>
         </p:txBody>
@@ -5987,7 +5987,7 @@
                 </a:solidFill>
                 <a:latin typeface="Segoe UI"/>
               </a:rPr>
-              <a:t>90%</a:t>
+              <a:t>84%</a:t>
             </a:r>
           </a:p>
         </p:txBody>
@@ -6021,7 +6021,7 @@
                 </a:solidFill>
                 <a:latin typeface="Segoe UI"/>
               </a:rPr>
-              <a:t>above 200DMA · golden cross (50&gt;200) · 3M momentum +13.2%</a:t>
+              <a:t>above 200DMA · golden cross (50&gt;200) · 3M momentum +10.5%</a:t>
             </a:r>
           </a:p>
         </p:txBody>
@@ -6055,7 +6055,7 @@
                 </a:solidFill>
                 <a:latin typeface="Segoe UI"/>
               </a:rPr>
-              <a:t>NIFTY IT</a:t>
+              <a:t>DAX</a:t>
             </a:r>
           </a:p>
         </p:txBody>
@@ -6089,7 +6089,7 @@
                 </a:solidFill>
                 <a:latin typeface="Segoe UI"/>
               </a:rPr>
-              <a:t>STRONG BUY</a:t>
+              <a:t>BUY</a:t>
             </a:r>
           </a:p>
         </p:txBody>
@@ -6123,7 +6123,7 @@
                 </a:solidFill>
                 <a:latin typeface="Segoe UI"/>
               </a:rPr>
-              <a:t>88%</a:t>
+              <a:t>87%</a:t>
             </a:r>
           </a:p>
         </p:txBody>
@@ -6157,7 +6157,7 @@
                 </a:solidFill>
                 <a:latin typeface="Segoe UI"/>
               </a:rPr>
-              <a:t>above 200DMA · golden cross (50&gt;200) · 3M momentum +10.6%</a:t>
+              <a:t>above 200DMA · golden cross (50&gt;200) · 3M momentum +2.2%</a:t>
             </a:r>
           </a:p>
         </p:txBody>
@@ -6191,7 +6191,7 @@
                 </a:solidFill>
                 <a:latin typeface="Segoe UI"/>
               </a:rPr>
-              <a:t>USD/INR</a:t>
+              <a:t>US 1-3Y Treasury</a:t>
             </a:r>
           </a:p>
         </p:txBody>
@@ -6225,7 +6225,7 @@
                 </a:solidFill>
                 <a:latin typeface="Segoe UI"/>
               </a:rPr>
-              <a:t>STRONG BUY</a:t>
+              <a:t>BUY</a:t>
             </a:r>
           </a:p>
         </p:txBody>
@@ -6259,7 +6259,7 @@
                 </a:solidFill>
                 <a:latin typeface="Segoe UI"/>
               </a:rPr>
-              <a:t>80%</a:t>
+              <a:t>87%</a:t>
             </a:r>
           </a:p>
         </p:txBody>
@@ -6293,7 +6293,7 @@
                 </a:solidFill>
                 <a:latin typeface="Segoe UI"/>
               </a:rPr>
-              <a:t>above 200DMA · golden cross (50&gt;200) · 3M momentum +3.9%</a:t>
+              <a:t>above 200DMA · golden cross (50&gt;200) · 3M momentum +0.4%</a:t>
             </a:r>
           </a:p>
         </p:txBody>
@@ -6327,7 +6327,7 @@
                 </a:solidFill>
                 <a:latin typeface="Segoe UI"/>
               </a:rPr>
-              <a:t>HDFC Bank</a:t>
+              <a:t>US Technology</a:t>
             </a:r>
           </a:p>
         </p:txBody>
@@ -6395,7 +6395,7 @@
                 </a:solidFill>
                 <a:latin typeface="Segoe UI"/>
               </a:rPr>
-              <a:t>83%</a:t>
+              <a:t>79%</a:t>
             </a:r>
           </a:p>
         </p:txBody>
@@ -6429,7 +6429,7 @@
                 </a:solidFill>
                 <a:latin typeface="Segoe UI"/>
               </a:rPr>
-              <a:t>above 200DMA · golden cross (50&gt;200) · 3M momentum +18.7%</a:t>
+              <a:t>above 200DMA · golden cross (50&gt;200) · 3M momentum +1.3%</a:t>
             </a:r>
           </a:p>
         </p:txBody>
@@ -6463,7 +6463,7 @@
                 </a:solidFill>
                 <a:latin typeface="Segoe UI"/>
               </a:rPr>
-              <a:t>NIFTY 50</a:t>
+              <a:t>Dollar Index</a:t>
             </a:r>
           </a:p>
         </p:txBody>
@@ -6531,7 +6531,7 @@
                 </a:solidFill>
                 <a:latin typeface="Segoe UI"/>
               </a:rPr>
-              <a:t>83%</a:t>
+              <a:t>87%</a:t>
             </a:r>
           </a:p>
         </p:txBody>
@@ -6565,7 +6565,7 @@
                 </a:solidFill>
                 <a:latin typeface="Segoe UI"/>
               </a:rPr>
-              <a:t>above 200DMA · golden cross (50&gt;200) · 3M momentum +21.0%</a:t>
+              <a:t>above 200DMA · golden cross (50&gt;200) · 3M momentum +1.6%</a:t>
             </a:r>
           </a:p>
         </p:txBody>
@@ -6659,7 +6659,7 @@
                 </a:solidFill>
                 <a:latin typeface="Segoe UI"/>
               </a:rPr>
-              <a:t>Base currency INR · USD/INR 97.93</a:t>
+              <a:t>Base currency INR · USD/INR 96.29</a:t>
             </a:r>
           </a:p>
         </p:txBody>
@@ -6965,7 +6965,7 @@
                 </a:solidFill>
                 <a:latin typeface="Segoe UI"/>
               </a:rPr>
-              <a:t>NVDA</a:t>
+              <a:t>BTC-USD</a:t>
             </a:r>
           </a:p>
         </p:txBody>
@@ -6999,7 +6999,7 @@
                 </a:solidFill>
                 <a:latin typeface="Segoe UI"/>
               </a:rPr>
-              <a:t>8</a:t>
+              <a:t>0.1</a:t>
             </a:r>
           </a:p>
         </p:txBody>
@@ -7033,7 +7033,7 @@
                 </a:solidFill>
                 <a:latin typeface="Segoe UI"/>
               </a:rPr>
-              <a:t>450</a:t>
+              <a:t>60,000</a:t>
             </a:r>
           </a:p>
         </p:txBody>
@@ -7067,7 +7067,7 @@
                 </a:solidFill>
                 <a:latin typeface="Segoe UI"/>
               </a:rPr>
-              <a:t>476</a:t>
+              <a:t>64,687</a:t>
             </a:r>
           </a:p>
         </p:txBody>
@@ -7101,7 +7101,7 @@
                 </a:solidFill>
                 <a:latin typeface="Segoe UI"/>
               </a:rPr>
-              <a:t>₹373,159</a:t>
+              <a:t>₹622,890</a:t>
             </a:r>
           </a:p>
         </p:txBody>
@@ -7135,7 +7135,7 @@
                 </a:solidFill>
                 <a:latin typeface="Segoe UI"/>
               </a:rPr>
-              <a:t>₹20,601</a:t>
+              <a:t>₹45,135</a:t>
             </a:r>
           </a:p>
         </p:txBody>
@@ -7169,7 +7169,7 @@
                 </a:solidFill>
                 <a:latin typeface="Segoe UI"/>
               </a:rPr>
-              <a:t>+5.8%</a:t>
+              <a:t>+7.8%</a:t>
             </a:r>
           </a:p>
         </p:txBody>
@@ -7199,11 +7199,11 @@
             <a:r>
               <a:rPr sz="1000" b="0">
                 <a:solidFill>
-                  <a:srgbClr val="22C55E"/>
-                </a:solidFill>
-                <a:latin typeface="Segoe UI"/>
-              </a:rPr>
-              <a:t>+2.9%</a:t>
+                  <a:srgbClr val="EF4444"/>
+                </a:solidFill>
+                <a:latin typeface="Segoe UI"/>
+              </a:rPr>
+              <a:t>-0.0%</a:t>
             </a:r>
           </a:p>
         </p:txBody>
@@ -7237,7 +7237,7 @@
                 </a:solidFill>
                 <a:latin typeface="Segoe UI"/>
               </a:rPr>
-              <a:t>AAPL</a:t>
+              <a:t>GC=F</a:t>
             </a:r>
           </a:p>
         </p:txBody>
@@ -7271,7 +7271,7 @@
                 </a:solidFill>
                 <a:latin typeface="Segoe UI"/>
               </a:rPr>
-              <a:t>10</a:t>
+              <a:t>1</a:t>
             </a:r>
           </a:p>
         </p:txBody>
@@ -7305,7 +7305,7 @@
                 </a:solidFill>
                 <a:latin typeface="Segoe UI"/>
               </a:rPr>
-              <a:t>185</a:t>
+              <a:t>2,300</a:t>
             </a:r>
           </a:p>
         </p:txBody>
@@ -7339,7 +7339,7 @@
                 </a:solidFill>
                 <a:latin typeface="Segoe UI"/>
               </a:rPr>
-              <a:t>88</a:t>
+              <a:t>4,033</a:t>
             </a:r>
           </a:p>
         </p:txBody>
@@ -7373,7 +7373,7 @@
                 </a:solidFill>
                 <a:latin typeface="Segoe UI"/>
               </a:rPr>
-              <a:t>₹86,076</a:t>
+              <a:t>₹388,367</a:t>
             </a:r>
           </a:p>
         </p:txBody>
@@ -7403,11 +7403,11 @@
             <a:r>
               <a:rPr sz="1000" b="0">
                 <a:solidFill>
-                  <a:srgbClr val="EF4444"/>
-                </a:solidFill>
-                <a:latin typeface="Segoe UI"/>
-              </a:rPr>
-              <a:t>₹-95,100</a:t>
+                  <a:srgbClr val="22C55E"/>
+                </a:solidFill>
+                <a:latin typeface="Segoe UI"/>
+              </a:rPr>
+              <a:t>₹166,894</a:t>
             </a:r>
           </a:p>
         </p:txBody>
@@ -7437,11 +7437,11 @@
             <a:r>
               <a:rPr sz="1000" b="0">
                 <a:solidFill>
-                  <a:srgbClr val="EF4444"/>
-                </a:solidFill>
-                <a:latin typeface="Segoe UI"/>
-              </a:rPr>
-              <a:t>-52.5%</a:t>
+                  <a:srgbClr val="22C55E"/>
+                </a:solidFill>
+                <a:latin typeface="Segoe UI"/>
+              </a:rPr>
+              <a:t>+75.4%</a:t>
             </a:r>
           </a:p>
         </p:txBody>
@@ -7471,11 +7471,11 @@
             <a:r>
               <a:rPr sz="1000" b="0">
                 <a:solidFill>
-                  <a:srgbClr val="22C55E"/>
-                </a:solidFill>
-                <a:latin typeface="Segoe UI"/>
-              </a:rPr>
-              <a:t>+1.6%</a:t>
+                  <a:srgbClr val="EF4444"/>
+                </a:solidFill>
+                <a:latin typeface="Segoe UI"/>
+              </a:rPr>
+              <a:t>-0.3%</a:t>
             </a:r>
           </a:p>
         </p:txBody>
@@ -7509,7 +7509,7 @@
                 </a:solidFill>
                 <a:latin typeface="Segoe UI"/>
               </a:rPr>
-              <a:t>GC=F</a:t>
+              <a:t>AAPL</a:t>
             </a:r>
           </a:p>
         </p:txBody>
@@ -7543,7 +7543,7 @@
                 </a:solidFill>
                 <a:latin typeface="Segoe UI"/>
               </a:rPr>
-              <a:t>1</a:t>
+              <a:t>10</a:t>
             </a:r>
           </a:p>
         </p:txBody>
@@ -7577,7 +7577,7 @@
                 </a:solidFill>
                 <a:latin typeface="Segoe UI"/>
               </a:rPr>
-              <a:t>2,300</a:t>
+              <a:t>185</a:t>
             </a:r>
           </a:p>
         </p:txBody>
@@ -7611,7 +7611,7 @@
                 </a:solidFill>
                 <a:latin typeface="Segoe UI"/>
               </a:rPr>
-              <a:t>276</a:t>
+              <a:t>328</a:t>
             </a:r>
           </a:p>
         </p:txBody>
@@ -7645,7 +7645,7 @@
                 </a:solidFill>
                 <a:latin typeface="Segoe UI"/>
               </a:rPr>
-              <a:t>₹27,013</a:t>
+              <a:t>₹315,358</a:t>
             </a:r>
           </a:p>
         </p:txBody>
@@ -7675,11 +7675,11 @@
             <a:r>
               <a:rPr sz="1000" b="0">
                 <a:solidFill>
-                  <a:srgbClr val="EF4444"/>
-                </a:solidFill>
-                <a:latin typeface="Segoe UI"/>
-              </a:rPr>
-              <a:t>₹-198,233</a:t>
+                  <a:srgbClr val="22C55E"/>
+                </a:solidFill>
+                <a:latin typeface="Segoe UI"/>
+              </a:rPr>
+              <a:t>₹137,217</a:t>
             </a:r>
           </a:p>
         </p:txBody>
@@ -7709,11 +7709,11 @@
             <a:r>
               <a:rPr sz="1000" b="0">
                 <a:solidFill>
-                  <a:srgbClr val="EF4444"/>
-                </a:solidFill>
-                <a:latin typeface="Segoe UI"/>
-              </a:rPr>
-              <a:t>-88.0%</a:t>
+                  <a:srgbClr val="22C55E"/>
+                </a:solidFill>
+                <a:latin typeface="Segoe UI"/>
+              </a:rPr>
+              <a:t>+77.0%</a:t>
             </a:r>
           </a:p>
         </p:txBody>
@@ -7743,11 +7743,11 @@
             <a:r>
               <a:rPr sz="1000" b="0">
                 <a:solidFill>
-                  <a:srgbClr val="EF4444"/>
-                </a:solidFill>
-                <a:latin typeface="Segoe UI"/>
-              </a:rPr>
-              <a:t>-1.0%</a:t>
+                  <a:srgbClr val="22C55E"/>
+                </a:solidFill>
+                <a:latin typeface="Segoe UI"/>
+              </a:rPr>
+              <a:t>+0.0%</a:t>
             </a:r>
           </a:p>
         </p:txBody>
@@ -7781,7 +7781,7 @@
                 </a:solidFill>
                 <a:latin typeface="Segoe UI"/>
               </a:rPr>
-              <a:t>RELIANCE.NS</a:t>
+              <a:t>NVDA</a:t>
             </a:r>
           </a:p>
         </p:txBody>
@@ -7815,7 +7815,7 @@
                 </a:solidFill>
                 <a:latin typeface="Segoe UI"/>
               </a:rPr>
-              <a:t>50</a:t>
+              <a:t>8</a:t>
             </a:r>
           </a:p>
         </p:txBody>
@@ -7849,7 +7849,7 @@
                 </a:solidFill>
                 <a:latin typeface="Segoe UI"/>
               </a:rPr>
-              <a:t>2,450</a:t>
+              <a:t>450</a:t>
             </a:r>
           </a:p>
         </p:txBody>
@@ -7883,7 +7883,7 @@
                 </a:solidFill>
                 <a:latin typeface="Segoe UI"/>
               </a:rPr>
-              <a:t>174</a:t>
+              <a:t>212</a:t>
             </a:r>
           </a:p>
         </p:txBody>
@@ -7917,7 +7917,7 @@
                 </a:solidFill>
                 <a:latin typeface="Segoe UI"/>
               </a:rPr>
-              <a:t>₹8,725</a:t>
+              <a:t>₹163,697</a:t>
             </a:r>
           </a:p>
         </p:txBody>
@@ -7951,7 +7951,7 @@
                 </a:solidFill>
                 <a:latin typeface="Segoe UI"/>
               </a:rPr>
-              <a:t>₹-113,775</a:t>
+              <a:t>₹-182,956</a:t>
             </a:r>
           </a:p>
         </p:txBody>
@@ -7985,7 +7985,7 @@
                 </a:solidFill>
                 <a:latin typeface="Segoe UI"/>
               </a:rPr>
-              <a:t>-92.9%</a:t>
+              <a:t>-52.8%</a:t>
             </a:r>
           </a:p>
         </p:txBody>
@@ -8015,11 +8015,11 @@
             <a:r>
               <a:rPr sz="1000" b="0">
                 <a:solidFill>
-                  <a:srgbClr val="EF4444"/>
-                </a:solidFill>
-                <a:latin typeface="Segoe UI"/>
-              </a:rPr>
-              <a:t>-1.6%</a:t>
+                  <a:srgbClr val="22C55E"/>
+                </a:solidFill>
+                <a:latin typeface="Segoe UI"/>
+              </a:rPr>
+              <a:t>+0.0%</a:t>
             </a:r>
           </a:p>
         </p:txBody>
@@ -8053,7 +8053,7 @@
                 </a:solidFill>
                 <a:latin typeface="Segoe UI"/>
               </a:rPr>
-              <a:t>HDFCBANK.NS</a:t>
+              <a:t>INFY.NS</a:t>
             </a:r>
           </a:p>
         </p:txBody>
@@ -8087,7 +8087,7 @@
                 </a:solidFill>
                 <a:latin typeface="Segoe UI"/>
               </a:rPr>
-              <a:t>60</a:t>
+              <a:t>80</a:t>
             </a:r>
           </a:p>
         </p:txBody>
@@ -8121,7 +8121,7 @@
                 </a:solidFill>
                 <a:latin typeface="Segoe UI"/>
               </a:rPr>
-              <a:t>1,520</a:t>
+              <a:t>1,400</a:t>
             </a:r>
           </a:p>
         </p:txBody>
@@ -8155,7 +8155,7 @@
                 </a:solidFill>
                 <a:latin typeface="Segoe UI"/>
               </a:rPr>
-              <a:t>134</a:t>
+              <a:t>1,092</a:t>
             </a:r>
           </a:p>
         </p:txBody>
@@ -8189,7 +8189,7 @@
                 </a:solidFill>
                 <a:latin typeface="Segoe UI"/>
               </a:rPr>
-              <a:t>₹8,020</a:t>
+              <a:t>₹87,352</a:t>
             </a:r>
           </a:p>
         </p:txBody>
@@ -8223,7 +8223,7 @@
                 </a:solidFill>
                 <a:latin typeface="Segoe UI"/>
               </a:rPr>
-              <a:t>₹-83,180</a:t>
+              <a:t>₹-24,648</a:t>
             </a:r>
           </a:p>
         </p:txBody>
@@ -8257,7 +8257,7 @@
                 </a:solidFill>
                 <a:latin typeface="Segoe UI"/>
               </a:rPr>
-              <a:t>-91.2%</a:t>
+              <a:t>-22.0%</a:t>
             </a:r>
           </a:p>
         </p:txBody>
@@ -8287,11 +8287,11 @@
             <a:r>
               <a:rPr sz="1000" b="0">
                 <a:solidFill>
-                  <a:srgbClr val="EF4444"/>
-                </a:solidFill>
-                <a:latin typeface="Segoe UI"/>
-              </a:rPr>
-              <a:t>-0.1%</a:t>
+                  <a:srgbClr val="22C55E"/>
+                </a:solidFill>
+                <a:latin typeface="Segoe UI"/>
+              </a:rPr>
+              <a:t>+1.4%</a:t>
             </a:r>
           </a:p>
         </p:txBody>
@@ -8325,7 +8325,7 @@
                 </a:solidFill>
                 <a:latin typeface="Segoe UI"/>
               </a:rPr>
-              <a:t>INFY.NS</a:t>
+              <a:t>RELIANCE.NS</a:t>
             </a:r>
           </a:p>
         </p:txBody>
@@ -8359,7 +8359,7 @@
                 </a:solidFill>
                 <a:latin typeface="Segoe UI"/>
               </a:rPr>
-              <a:t>80</a:t>
+              <a:t>50</a:t>
             </a:r>
           </a:p>
         </p:txBody>
@@ -8393,7 +8393,7 @@
                 </a:solidFill>
                 <a:latin typeface="Segoe UI"/>
               </a:rPr>
-              <a:t>1,400</a:t>
+              <a:t>2,450</a:t>
             </a:r>
           </a:p>
         </p:txBody>
@@ -8427,7 +8427,7 @@
                 </a:solidFill>
                 <a:latin typeface="Segoe UI"/>
               </a:rPr>
-              <a:t>92</a:t>
+              <a:t>1,305</a:t>
             </a:r>
           </a:p>
         </p:txBody>
@@ -8461,7 +8461,7 @@
                 </a:solidFill>
                 <a:latin typeface="Segoe UI"/>
               </a:rPr>
-              <a:t>₹7,332</a:t>
+              <a:t>₹65,265</a:t>
             </a:r>
           </a:p>
         </p:txBody>
@@ -8495,7 +8495,7 @@
                 </a:solidFill>
                 <a:latin typeface="Segoe UI"/>
               </a:rPr>
-              <a:t>₹-104,668</a:t>
+              <a:t>₹-57,235</a:t>
             </a:r>
           </a:p>
         </p:txBody>
@@ -8529,7 +8529,7 @@
                 </a:solidFill>
                 <a:latin typeface="Segoe UI"/>
               </a:rPr>
-              <a:t>-93.5%</a:t>
+              <a:t>-46.7%</a:t>
             </a:r>
           </a:p>
         </p:txBody>
@@ -8563,7 +8563,7 @@
                 </a:solidFill>
                 <a:latin typeface="Segoe UI"/>
               </a:rPr>
-              <a:t>+0.4%</a:t>
+              <a:t>+0.8%</a:t>
             </a:r>
           </a:p>
         </p:txBody>
@@ -8597,7 +8597,7 @@
                 </a:solidFill>
                 <a:latin typeface="Segoe UI"/>
               </a:rPr>
-              <a:t>BTC-USD</a:t>
+              <a:t>TCS.NS</a:t>
             </a:r>
           </a:p>
         </p:txBody>
@@ -8631,7 +8631,7 @@
                 </a:solidFill>
                 <a:latin typeface="Segoe UI"/>
               </a:rPr>
-              <a:t>0.1</a:t>
+              <a:t>25</a:t>
             </a:r>
           </a:p>
         </p:txBody>
@@ -8665,7 +8665,7 @@
                 </a:solidFill>
                 <a:latin typeface="Segoe UI"/>
               </a:rPr>
-              <a:t>60,000</a:t>
+              <a:t>3,600</a:t>
             </a:r>
           </a:p>
         </p:txBody>
@@ -8699,7 +8699,7 @@
                 </a:solidFill>
                 <a:latin typeface="Segoe UI"/>
               </a:rPr>
-              <a:t>488</a:t>
+              <a:t>2,225</a:t>
             </a:r>
           </a:p>
         </p:txBody>
@@ -8733,7 +8733,7 @@
                 </a:solidFill>
                 <a:latin typeface="Segoe UI"/>
               </a:rPr>
-              <a:t>₹4,781</a:t>
+              <a:t>₹55,633</a:t>
             </a:r>
           </a:p>
         </p:txBody>
@@ -8767,7 +8767,7 @@
                 </a:solidFill>
                 <a:latin typeface="Segoe UI"/>
               </a:rPr>
-              <a:t>₹-582,816</a:t>
+              <a:t>₹-34,367</a:t>
             </a:r>
           </a:p>
         </p:txBody>
@@ -8801,7 +8801,7 @@
                 </a:solidFill>
                 <a:latin typeface="Segoe UI"/>
               </a:rPr>
-              <a:t>-99.2%</a:t>
+              <a:t>-38.2%</a:t>
             </a:r>
           </a:p>
         </p:txBody>
@@ -8835,7 +8835,7 @@
                 </a:solidFill>
                 <a:latin typeface="Segoe UI"/>
               </a:rPr>
-              <a:t>+1.8%</a:t>
+              <a:t>+1.6%</a:t>
             </a:r>
           </a:p>
         </p:txBody>
@@ -8869,7 +8869,7 @@
                 </a:solidFill>
                 <a:latin typeface="Segoe UI"/>
               </a:rPr>
-              <a:t>TCS.NS</a:t>
+              <a:t>HDFCBANK.NS</a:t>
             </a:r>
           </a:p>
         </p:txBody>
@@ -8903,7 +8903,7 @@
                 </a:solidFill>
                 <a:latin typeface="Segoe UI"/>
               </a:rPr>
-              <a:t>25</a:t>
+              <a:t>60</a:t>
             </a:r>
           </a:p>
         </p:txBody>
@@ -8937,7 +8937,7 @@
                 </a:solidFill>
                 <a:latin typeface="Segoe UI"/>
               </a:rPr>
-              <a:t>3,600</a:t>
+              <a:t>1,520</a:t>
             </a:r>
           </a:p>
         </p:txBody>
@@ -8971,7 +8971,7 @@
                 </a:solidFill>
                 <a:latin typeface="Segoe UI"/>
               </a:rPr>
-              <a:t>107</a:t>
+              <a:t>812</a:t>
             </a:r>
           </a:p>
         </p:txBody>
@@ -9005,7 +9005,7 @@
                 </a:solidFill>
                 <a:latin typeface="Segoe UI"/>
               </a:rPr>
-              <a:t>₹2,668</a:t>
+              <a:t>₹48,732</a:t>
             </a:r>
           </a:p>
         </p:txBody>
@@ -9039,7 +9039,7 @@
                 </a:solidFill>
                 <a:latin typeface="Segoe UI"/>
               </a:rPr>
-              <a:t>₹-87,332</a:t>
+              <a:t>₹-42,468</a:t>
             </a:r>
           </a:p>
         </p:txBody>
@@ -9073,7 +9073,7 @@
                 </a:solidFill>
                 <a:latin typeface="Segoe UI"/>
               </a:rPr>
-              <a:t>-97.0%</a:t>
+              <a:t>-46.6%</a:t>
             </a:r>
           </a:p>
         </p:txBody>
@@ -9107,7 +9107,7 @@
                 </a:solidFill>
                 <a:latin typeface="Segoe UI"/>
               </a:rPr>
-              <a:t>-0.3%</a:t>
+              <a:t>-0.4%</a:t>
             </a:r>
           </a:p>
         </p:txBody>
@@ -9141,7 +9141,7 @@
                 </a:solidFill>
                 <a:latin typeface="Segoe UI"/>
               </a:rPr>
-              <a:t>Total ₹517,773 · P&amp;L ₹-1,244,504 (-70.6%) · Sharpe 1.19 · Vol 19.49% · VaR95 -2.0%/day</a:t>
+              <a:t>Total ₹1,747,294 · P&amp;L ₹7,572 (+0.4%) · Sharpe -0.53 · Vol 18.13% · VaR95 -1.9%/day</a:t>
             </a:r>
           </a:p>
         </p:txBody>

--- a/docs/pmr_daily.pptx
+++ b/docs/pmr_daily.pptx
@@ -3163,7 +3163,7 @@
                 </a:solidFill>
                 <a:latin typeface="Segoe UI"/>
               </a:rPr>
-              <a:t>Daily Market Intelligence · Praveen · Moulya · Risha</a:t>
+              <a:t>Daily Market Intelligence · by Praveen</a:t>
             </a:r>
           </a:p>
         </p:txBody>
@@ -3197,7 +3197,7 @@
                 </a:solidFill>
                 <a:latin typeface="Segoe UI"/>
               </a:rPr>
-              <a:t>Thursday, 16 Jul 2026 15:00 SGT</a:t>
+              <a:t>Thursday, 16 Jul 2026 16:39 SGT</a:t>
             </a:r>
           </a:p>
         </p:txBody>
@@ -3265,7 +3265,7 @@
                 </a:solidFill>
                 <a:latin typeface="Segoe UI"/>
               </a:rPr>
-              <a:t>RAG 15R / 12A / 19G   ·   50.0% above 200DMA   ·   Portfolio ₹1,747,294 (+0.4%)</a:t>
+              <a:t>RAG 15R / 12A / 19G   |   50.0% above 200DMA   |   Portfolio Rs 1,743,170 (+0.2%)</a:t>
             </a:r>
           </a:p>
         </p:txBody>
@@ -3299,7 +3299,7 @@
                 </a:solidFill>
                 <a:latin typeface="Segoe UI"/>
               </a:rPr>
-              <a:t>Educational analytics — not investment advice.</a:t>
+              <a:t>Educational analytics - not investment advice.</a:t>
             </a:r>
           </a:p>
         </p:txBody>
@@ -3529,7 +3529,7 @@
                 </a:solidFill>
                 <a:latin typeface="Segoe UI"/>
               </a:rPr>
-              <a:t>+22.3%</a:t>
+              <a:t>+20.6%</a:t>
             </a:r>
           </a:p>
         </p:txBody>
@@ -3655,7 +3655,7 @@
                 </a:solidFill>
                 <a:latin typeface="Segoe UI"/>
               </a:rPr>
-              <a:t>+14.1%</a:t>
+              <a:t>+14.3%</a:t>
             </a:r>
           </a:p>
         </p:txBody>
@@ -3907,7 +3907,7 @@
                 </a:solidFill>
                 <a:latin typeface="Segoe UI"/>
               </a:rPr>
-              <a:t>+10.5%</a:t>
+              <a:t>+9.7%</a:t>
             </a:r>
           </a:p>
         </p:txBody>
@@ -3965,7 +3965,7 @@
                 </a:solidFill>
                 <a:latin typeface="Segoe UI"/>
               </a:rPr>
-              <a:t>TCS</a:t>
+              <a:t>NIFTY IT</a:t>
             </a:r>
           </a:p>
         </p:txBody>
@@ -3999,7 +3999,7 @@
                 </a:solidFill>
                 <a:latin typeface="Segoe UI"/>
               </a:rPr>
-              <a:t>TCS.NS · RED</a:t>
+              <a:t>^CNXIT · RED</a:t>
             </a:r>
           </a:p>
         </p:txBody>
@@ -4033,7 +4033,7 @@
                 </a:solidFill>
                 <a:latin typeface="Segoe UI"/>
               </a:rPr>
-              <a:t>+10.1%</a:t>
+              <a:t>+9.7%</a:t>
             </a:r>
           </a:p>
         </p:txBody>
@@ -4193,7 +4193,7 @@
                 </a:solidFill>
                 <a:latin typeface="Segoe UI"/>
               </a:rPr>
-              <a:t>-11.8%</a:t>
+              <a:t>-11.3%</a:t>
             </a:r>
           </a:p>
         </p:txBody>
@@ -4933,7 +4933,7 @@
                 </a:solidFill>
                 <a:latin typeface="Segoe UI"/>
               </a:rPr>
-              <a:t>Buy/Sell engine — top conviction calls</a:t>
+              <a:t>Buy/Sell engine - top conviction calls</a:t>
             </a:r>
           </a:p>
         </p:txBody>
@@ -5035,7 +5035,7 @@
                 </a:solidFill>
                 <a:latin typeface="Segoe UI"/>
               </a:rPr>
-              <a:t>91%</a:t>
+              <a:t>85%</a:t>
             </a:r>
           </a:p>
         </p:txBody>
@@ -5069,7 +5069,7 @@
                 </a:solidFill>
                 <a:latin typeface="Segoe UI"/>
               </a:rPr>
-              <a:t>above 200DMA · golden cross (50&gt;200) · 3M momentum +13.6%</a:t>
+              <a:t>above 200DMA · golden cross (50&gt;200) · MACD bearish</a:t>
             </a:r>
           </a:p>
         </p:txBody>
@@ -5171,7 +5171,7 @@
                 </a:solidFill>
                 <a:latin typeface="Segoe UI"/>
               </a:rPr>
-              <a:t>91%</a:t>
+              <a:t>84%</a:t>
             </a:r>
           </a:p>
         </p:txBody>
@@ -5205,7 +5205,7 @@
                 </a:solidFill>
                 <a:latin typeface="Segoe UI"/>
               </a:rPr>
-              <a:t>above 200DMA · golden cross (50&gt;200) · 3M momentum +5.2%</a:t>
+              <a:t>above 200DMA · golden cross (50&gt;200) · MACD bearish</a:t>
             </a:r>
           </a:p>
         </p:txBody>
@@ -5307,7 +5307,7 @@
                 </a:solidFill>
                 <a:latin typeface="Segoe UI"/>
               </a:rPr>
-              <a:t>91%</a:t>
+              <a:t>82%</a:t>
             </a:r>
           </a:p>
         </p:txBody>
@@ -5341,7 +5341,7 @@
                 </a:solidFill>
                 <a:latin typeface="Segoe UI"/>
               </a:rPr>
-              <a:t>above 200DMA · golden cross (50&gt;200) · 3M momentum +4.0%</a:t>
+              <a:t>above 200DMA · golden cross (50&gt;200) · MACD bearish</a:t>
             </a:r>
           </a:p>
         </p:txBody>
@@ -5375,7 +5375,7 @@
                 </a:solidFill>
                 <a:latin typeface="Segoe UI"/>
               </a:rPr>
-              <a:t>USD/JPY</a:t>
+              <a:t>S&amp;P 500</a:t>
             </a:r>
           </a:p>
         </p:txBody>
@@ -5443,7 +5443,7 @@
                 </a:solidFill>
                 <a:latin typeface="Segoe UI"/>
               </a:rPr>
-              <a:t>89%</a:t>
+              <a:t>82%</a:t>
             </a:r>
           </a:p>
         </p:txBody>
@@ -5477,7 +5477,7 @@
                 </a:solidFill>
                 <a:latin typeface="Segoe UI"/>
               </a:rPr>
-              <a:t>above 200DMA · golden cross (50&gt;200) · 3M momentum +2.7%</a:t>
+              <a:t>above 200DMA · golden cross (50&gt;200) · MACD bullish</a:t>
             </a:r>
           </a:p>
         </p:txBody>
@@ -5511,7 +5511,7 @@
                 </a:solidFill>
                 <a:latin typeface="Segoe UI"/>
               </a:rPr>
-              <a:t>S&amp;P 500</a:t>
+              <a:t>USD/JPY</a:t>
             </a:r>
           </a:p>
         </p:txBody>
@@ -5579,7 +5579,7 @@
                 </a:solidFill>
                 <a:latin typeface="Segoe UI"/>
               </a:rPr>
-              <a:t>89%</a:t>
+              <a:t>81%</a:t>
             </a:r>
           </a:p>
         </p:txBody>
@@ -5613,7 +5613,7 @@
                 </a:solidFill>
                 <a:latin typeface="Segoe UI"/>
               </a:rPr>
-              <a:t>above 200DMA · golden cross (50&gt;200) · 3M momentum +0.9%</a:t>
+              <a:t>above 200DMA · golden cross (50&gt;200) · MACD bearish</a:t>
             </a:r>
           </a:p>
         </p:txBody>
@@ -5647,7 +5647,7 @@
                 </a:solidFill>
                 <a:latin typeface="Segoe UI"/>
               </a:rPr>
-              <a:t>US Financials</a:t>
+              <a:t>USD/INR</a:t>
             </a:r>
           </a:p>
         </p:txBody>
@@ -5681,7 +5681,7 @@
                 </a:solidFill>
                 <a:latin typeface="Segoe UI"/>
               </a:rPr>
-              <a:t>BUY</a:t>
+              <a:t>STRONG BUY</a:t>
             </a:r>
           </a:p>
         </p:txBody>
@@ -5715,7 +5715,7 @@
                 </a:solidFill>
                 <a:latin typeface="Segoe UI"/>
               </a:rPr>
-              <a:t>84%</a:t>
+              <a:t>80%</a:t>
             </a:r>
           </a:p>
         </p:txBody>
@@ -5749,7 +5749,7 @@
                 </a:solidFill>
                 <a:latin typeface="Segoe UI"/>
               </a:rPr>
-              <a:t>above 200DMA · golden cross (50&gt;200) · 3M momentum +10.7%</a:t>
+              <a:t>above 200DMA · golden cross (50&gt;200) · MACD bullish</a:t>
             </a:r>
           </a:p>
         </p:txBody>
@@ -5783,7 +5783,7 @@
                 </a:solidFill>
                 <a:latin typeface="Segoe UI"/>
               </a:rPr>
-              <a:t>Apple</a:t>
+              <a:t>US Financials</a:t>
             </a:r>
           </a:p>
         </p:txBody>
@@ -5851,7 +5851,7 @@
                 </a:solidFill>
                 <a:latin typeface="Segoe UI"/>
               </a:rPr>
-              <a:t>84%</a:t>
+              <a:t>94%</a:t>
             </a:r>
           </a:p>
         </p:txBody>
@@ -5885,7 +5885,7 @@
                 </a:solidFill>
                 <a:latin typeface="Segoe UI"/>
               </a:rPr>
-              <a:t>above 200DMA · golden cross (50&gt;200) · 3M momentum +9.8%</a:t>
+              <a:t>above 200DMA · golden cross (50&gt;200) · MACD bullish</a:t>
             </a:r>
           </a:p>
         </p:txBody>
@@ -5919,7 +5919,7 @@
                 </a:solidFill>
                 <a:latin typeface="Segoe UI"/>
               </a:rPr>
-              <a:t>Straits Times</a:t>
+              <a:t>Apple</a:t>
             </a:r>
           </a:p>
         </p:txBody>
@@ -5987,7 +5987,7 @@
                 </a:solidFill>
                 <a:latin typeface="Segoe UI"/>
               </a:rPr>
-              <a:t>84%</a:t>
+              <a:t>93%</a:t>
             </a:r>
           </a:p>
         </p:txBody>
@@ -6021,7 +6021,7 @@
                 </a:solidFill>
                 <a:latin typeface="Segoe UI"/>
               </a:rPr>
-              <a:t>above 200DMA · golden cross (50&gt;200) · 3M momentum +10.5%</a:t>
+              <a:t>above 200DMA · golden cross (50&gt;200) · MACD bullish</a:t>
             </a:r>
           </a:p>
         </p:txBody>
@@ -6055,7 +6055,7 @@
                 </a:solidFill>
                 <a:latin typeface="Segoe UI"/>
               </a:rPr>
-              <a:t>DAX</a:t>
+              <a:t>Straits Times</a:t>
             </a:r>
           </a:p>
         </p:txBody>
@@ -6123,7 +6123,7 @@
                 </a:solidFill>
                 <a:latin typeface="Segoe UI"/>
               </a:rPr>
-              <a:t>87%</a:t>
+              <a:t>79%</a:t>
             </a:r>
           </a:p>
         </p:txBody>
@@ -6157,7 +6157,7 @@
                 </a:solidFill>
                 <a:latin typeface="Segoe UI"/>
               </a:rPr>
-              <a:t>above 200DMA · golden cross (50&gt;200) · 3M momentum +2.2%</a:t>
+              <a:t>above 200DMA · golden cross (50&gt;200) · MACD bullish</a:t>
             </a:r>
           </a:p>
         </p:txBody>
@@ -6191,7 +6191,7 @@
                 </a:solidFill>
                 <a:latin typeface="Segoe UI"/>
               </a:rPr>
-              <a:t>US 1-3Y Treasury</a:t>
+              <a:t>Bharti Airtel</a:t>
             </a:r>
           </a:p>
         </p:txBody>
@@ -6259,7 +6259,7 @@
                 </a:solidFill>
                 <a:latin typeface="Segoe UI"/>
               </a:rPr>
-              <a:t>87%</a:t>
+              <a:t>74%</a:t>
             </a:r>
           </a:p>
         </p:txBody>
@@ -6293,7 +6293,7 @@
                 </a:solidFill>
                 <a:latin typeface="Segoe UI"/>
               </a:rPr>
-              <a:t>above 200DMA · golden cross (50&gt;200) · 3M momentum +0.4%</a:t>
+              <a:t>above 200DMA · death cross (50&lt;200) · MACD bullish</a:t>
             </a:r>
           </a:p>
         </p:txBody>
@@ -6327,7 +6327,7 @@
                 </a:solidFill>
                 <a:latin typeface="Segoe UI"/>
               </a:rPr>
-              <a:t>US Technology</a:t>
+              <a:t>US 1-3Y Treasury</a:t>
             </a:r>
           </a:p>
         </p:txBody>
@@ -6395,7 +6395,7 @@
                 </a:solidFill>
                 <a:latin typeface="Segoe UI"/>
               </a:rPr>
-              <a:t>79%</a:t>
+              <a:t>80%</a:t>
             </a:r>
           </a:p>
         </p:txBody>
@@ -6429,7 +6429,7 @@
                 </a:solidFill>
                 <a:latin typeface="Segoe UI"/>
               </a:rPr>
-              <a:t>above 200DMA · golden cross (50&gt;200) · 3M momentum +1.3%</a:t>
+              <a:t>above 200DMA · golden cross (50&gt;200) · MACD bullish</a:t>
             </a:r>
           </a:p>
         </p:txBody>
@@ -6531,7 +6531,7 @@
                 </a:solidFill>
                 <a:latin typeface="Segoe UI"/>
               </a:rPr>
-              <a:t>87%</a:t>
+              <a:t>79%</a:t>
             </a:r>
           </a:p>
         </p:txBody>
@@ -6565,7 +6565,7 @@
                 </a:solidFill>
                 <a:latin typeface="Segoe UI"/>
               </a:rPr>
-              <a:t>above 200DMA · golden cross (50&gt;200) · 3M momentum +1.6%</a:t>
+              <a:t>above 200DMA · golden cross (50&gt;200) · MACD bearish</a:t>
             </a:r>
           </a:p>
         </p:txBody>
@@ -6659,7 +6659,7 @@
                 </a:solidFill>
                 <a:latin typeface="Segoe UI"/>
               </a:rPr>
-              <a:t>Base currency INR · USD/INR 96.29</a:t>
+              <a:t>Base currency INR · USD/INR 96.32</a:t>
             </a:r>
           </a:p>
         </p:txBody>
@@ -7067,7 +7067,7 @@
                 </a:solidFill>
                 <a:latin typeface="Segoe UI"/>
               </a:rPr>
-              <a:t>64,687</a:t>
+              <a:t>64,264</a:t>
             </a:r>
           </a:p>
         </p:txBody>
@@ -7101,7 +7101,7 @@
                 </a:solidFill>
                 <a:latin typeface="Segoe UI"/>
               </a:rPr>
-              <a:t>₹622,890</a:t>
+              <a:t>Rs 619,006</a:t>
             </a:r>
           </a:p>
         </p:txBody>
@@ -7135,7 +7135,7 @@
                 </a:solidFill>
                 <a:latin typeface="Segoe UI"/>
               </a:rPr>
-              <a:t>₹45,135</a:t>
+              <a:t>Rs 41,071</a:t>
             </a:r>
           </a:p>
         </p:txBody>
@@ -7169,7 +7169,7 @@
                 </a:solidFill>
                 <a:latin typeface="Segoe UI"/>
               </a:rPr>
-              <a:t>+7.8%</a:t>
+              <a:t>+7.1%</a:t>
             </a:r>
           </a:p>
         </p:txBody>
@@ -7203,7 +7203,7 @@
                 </a:solidFill>
                 <a:latin typeface="Segoe UI"/>
               </a:rPr>
-              <a:t>-0.0%</a:t>
+              <a:t>-0.7%</a:t>
             </a:r>
           </a:p>
         </p:txBody>
@@ -7339,7 +7339,7 @@
                 </a:solidFill>
                 <a:latin typeface="Segoe UI"/>
               </a:rPr>
-              <a:t>4,033</a:t>
+              <a:t>4,037</a:t>
             </a:r>
           </a:p>
         </p:txBody>
@@ -7373,7 +7373,7 @@
                 </a:solidFill>
                 <a:latin typeface="Segoe UI"/>
               </a:rPr>
-              <a:t>₹388,367</a:t>
+              <a:t>Rs 388,844</a:t>
             </a:r>
           </a:p>
         </p:txBody>
@@ -7407,7 +7407,7 @@
                 </a:solidFill>
                 <a:latin typeface="Segoe UI"/>
               </a:rPr>
-              <a:t>₹166,894</a:t>
+              <a:t>Rs 167,303</a:t>
             </a:r>
           </a:p>
         </p:txBody>
@@ -7441,7 +7441,7 @@
                 </a:solidFill>
                 <a:latin typeface="Segoe UI"/>
               </a:rPr>
-              <a:t>+75.4%</a:t>
+              <a:t>+75.5%</a:t>
             </a:r>
           </a:p>
         </p:txBody>
@@ -7475,7 +7475,7 @@
                 </a:solidFill>
                 <a:latin typeface="Segoe UI"/>
               </a:rPr>
-              <a:t>-0.3%</a:t>
+              <a:t>-0.2%</a:t>
             </a:r>
           </a:p>
         </p:txBody>
@@ -7645,7 +7645,7 @@
                 </a:solidFill>
                 <a:latin typeface="Segoe UI"/>
               </a:rPr>
-              <a:t>₹315,358</a:t>
+              <a:t>Rs 315,456</a:t>
             </a:r>
           </a:p>
         </p:txBody>
@@ -7679,7 +7679,7 @@
                 </a:solidFill>
                 <a:latin typeface="Segoe UI"/>
               </a:rPr>
-              <a:t>₹137,217</a:t>
+              <a:t>Rs 137,260</a:t>
             </a:r>
           </a:p>
         </p:txBody>
@@ -7917,7 +7917,7 @@
                 </a:solidFill>
                 <a:latin typeface="Segoe UI"/>
               </a:rPr>
-              <a:t>₹163,697</a:t>
+              <a:t>Rs 163,748</a:t>
             </a:r>
           </a:p>
         </p:txBody>
@@ -7951,7 +7951,7 @@
                 </a:solidFill>
                 <a:latin typeface="Segoe UI"/>
               </a:rPr>
-              <a:t>₹-182,956</a:t>
+              <a:t>Rs -183,013</a:t>
             </a:r>
           </a:p>
         </p:txBody>
@@ -8155,7 +8155,7 @@
                 </a:solidFill>
                 <a:latin typeface="Segoe UI"/>
               </a:rPr>
-              <a:t>1,092</a:t>
+              <a:t>1,089</a:t>
             </a:r>
           </a:p>
         </p:txBody>
@@ -8189,7 +8189,7 @@
                 </a:solidFill>
                 <a:latin typeface="Segoe UI"/>
               </a:rPr>
-              <a:t>₹87,352</a:t>
+              <a:t>Rs 87,120</a:t>
             </a:r>
           </a:p>
         </p:txBody>
@@ -8223,7 +8223,7 @@
                 </a:solidFill>
                 <a:latin typeface="Segoe UI"/>
               </a:rPr>
-              <a:t>₹-24,648</a:t>
+              <a:t>Rs -24,880</a:t>
             </a:r>
           </a:p>
         </p:txBody>
@@ -8257,7 +8257,7 @@
                 </a:solidFill>
                 <a:latin typeface="Segoe UI"/>
               </a:rPr>
-              <a:t>-22.0%</a:t>
+              <a:t>-22.2%</a:t>
             </a:r>
           </a:p>
         </p:txBody>
@@ -8291,7 +8291,7 @@
                 </a:solidFill>
                 <a:latin typeface="Segoe UI"/>
               </a:rPr>
-              <a:t>+1.4%</a:t>
+              <a:t>+1.2%</a:t>
             </a:r>
           </a:p>
         </p:txBody>
@@ -8427,7 +8427,7 @@
                 </a:solidFill>
                 <a:latin typeface="Segoe UI"/>
               </a:rPr>
-              <a:t>1,305</a:t>
+              <a:t>1,302</a:t>
             </a:r>
           </a:p>
         </p:txBody>
@@ -8461,7 +8461,7 @@
                 </a:solidFill>
                 <a:latin typeface="Segoe UI"/>
               </a:rPr>
-              <a:t>₹65,265</a:t>
+              <a:t>Rs 65,110</a:t>
             </a:r>
           </a:p>
         </p:txBody>
@@ -8495,7 +8495,7 @@
                 </a:solidFill>
                 <a:latin typeface="Segoe UI"/>
               </a:rPr>
-              <a:t>₹-57,235</a:t>
+              <a:t>Rs -57,390</a:t>
             </a:r>
           </a:p>
         </p:txBody>
@@ -8529,7 +8529,7 @@
                 </a:solidFill>
                 <a:latin typeface="Segoe UI"/>
               </a:rPr>
-              <a:t>-46.7%</a:t>
+              <a:t>-46.9%</a:t>
             </a:r>
           </a:p>
         </p:txBody>
@@ -8563,7 +8563,7 @@
                 </a:solidFill>
                 <a:latin typeface="Segoe UI"/>
               </a:rPr>
-              <a:t>+0.8%</a:t>
+              <a:t>+0.5%</a:t>
             </a:r>
           </a:p>
         </p:txBody>
@@ -8699,7 +8699,7 @@
                 </a:solidFill>
                 <a:latin typeface="Segoe UI"/>
               </a:rPr>
-              <a:t>2,225</a:t>
+              <a:t>2,214</a:t>
             </a:r>
           </a:p>
         </p:txBody>
@@ -8733,7 +8733,7 @@
                 </a:solidFill>
                 <a:latin typeface="Segoe UI"/>
               </a:rPr>
-              <a:t>₹55,633</a:t>
+              <a:t>Rs 55,342</a:t>
             </a:r>
           </a:p>
         </p:txBody>
@@ -8767,7 +8767,7 @@
                 </a:solidFill>
                 <a:latin typeface="Segoe UI"/>
               </a:rPr>
-              <a:t>₹-34,367</a:t>
+              <a:t>Rs -34,658</a:t>
             </a:r>
           </a:p>
         </p:txBody>
@@ -8801,7 +8801,7 @@
                 </a:solidFill>
                 <a:latin typeface="Segoe UI"/>
               </a:rPr>
-              <a:t>-38.2%</a:t>
+              <a:t>-38.5%</a:t>
             </a:r>
           </a:p>
         </p:txBody>
@@ -8835,7 +8835,7 @@
                 </a:solidFill>
                 <a:latin typeface="Segoe UI"/>
               </a:rPr>
-              <a:t>+1.6%</a:t>
+              <a:t>+1.1%</a:t>
             </a:r>
           </a:p>
         </p:txBody>
@@ -8971,7 +8971,7 @@
                 </a:solidFill>
                 <a:latin typeface="Segoe UI"/>
               </a:rPr>
-              <a:t>812</a:t>
+              <a:t>809</a:t>
             </a:r>
           </a:p>
         </p:txBody>
@@ -9005,7 +9005,7 @@
                 </a:solidFill>
                 <a:latin typeface="Segoe UI"/>
               </a:rPr>
-              <a:t>₹48,732</a:t>
+              <a:t>Rs 48,543</a:t>
             </a:r>
           </a:p>
         </p:txBody>
@@ -9039,7 +9039,7 @@
                 </a:solidFill>
                 <a:latin typeface="Segoe UI"/>
               </a:rPr>
-              <a:t>₹-42,468</a:t>
+              <a:t>Rs -42,657</a:t>
             </a:r>
           </a:p>
         </p:txBody>
@@ -9073,7 +9073,7 @@
                 </a:solidFill>
                 <a:latin typeface="Segoe UI"/>
               </a:rPr>
-              <a:t>-46.6%</a:t>
+              <a:t>-46.8%</a:t>
             </a:r>
           </a:p>
         </p:txBody>
@@ -9107,7 +9107,7 @@
                 </a:solidFill>
                 <a:latin typeface="Segoe UI"/>
               </a:rPr>
-              <a:t>-0.4%</a:t>
+              <a:t>-0.8%</a:t>
             </a:r>
           </a:p>
         </p:txBody>
@@ -9141,7 +9141,7 @@
                 </a:solidFill>
                 <a:latin typeface="Segoe UI"/>
               </a:rPr>
-              <a:t>Total ₹1,747,294 · P&amp;L ₹7,572 (+0.4%) · Sharpe -0.53 · Vol 18.13% · VaR95 -1.9%/day</a:t>
+              <a:t>Total Rs 1,743,170 | P&amp;L Rs 3,036 (+0.2%) | Sharpe -0.54 | Vol 18.1% | VaR95 -1.9%/day</a:t>
             </a:r>
           </a:p>
         </p:txBody>

--- a/docs/pmr_daily.pptx
+++ b/docs/pmr_daily.pptx
@@ -3197,7 +3197,7 @@
                 </a:solidFill>
                 <a:latin typeface="Segoe UI"/>
               </a:rPr>
-              <a:t>Thursday, 16 Jul 2026 16:39 SGT</a:t>
+              <a:t>Friday, 17 Jul 2026 15:30 SGT</a:t>
             </a:r>
           </a:p>
         </p:txBody>
@@ -3265,7 +3265,7 @@
                 </a:solidFill>
                 <a:latin typeface="Segoe UI"/>
               </a:rPr>
-              <a:t>RAG 15R / 12A / 19G   |   50.0% above 200DMA   |   Portfolio Rs 1,743,170 (+0.2%)</a:t>
+              <a:t>RAG 15R / 16A / 15G   |   50.0% above 200DMA   |   Portfolio Rs 1,732,595 (-0.5%)</a:t>
             </a:r>
           </a:p>
         </p:txBody>
@@ -3529,7 +3529,7 @@
                 </a:solidFill>
                 <a:latin typeface="Segoe UI"/>
               </a:rPr>
-              <a:t>+20.6%</a:t>
+              <a:t>+16.6%</a:t>
             </a:r>
           </a:p>
         </p:txBody>
@@ -3587,7 +3587,7 @@
                 </a:solidFill>
                 <a:latin typeface="Segoe UI"/>
               </a:rPr>
-              <a:t>Crude Oil WTI</a:t>
+              <a:t>Apple</a:t>
             </a:r>
           </a:p>
         </p:txBody>
@@ -3617,11 +3617,11 @@
             <a:r>
               <a:rPr sz="900" b="0">
                 <a:solidFill>
-                  <a:srgbClr val="EF4444"/>
-                </a:solidFill>
-                <a:latin typeface="Segoe UI"/>
-              </a:rPr>
-              <a:t>CL=F · RED</a:t>
+                  <a:srgbClr val="22C55E"/>
+                </a:solidFill>
+                <a:latin typeface="Segoe UI"/>
+              </a:rPr>
+              <a:t>AAPL · GREEN</a:t>
             </a:r>
           </a:p>
         </p:txBody>
@@ -3655,7 +3655,7 @@
                 </a:solidFill>
                 <a:latin typeface="Segoe UI"/>
               </a:rPr>
-              <a:t>+14.3%</a:t>
+              <a:t>+15.2%</a:t>
             </a:r>
           </a:p>
         </p:txBody>
@@ -3713,7 +3713,7 @@
                 </a:solidFill>
                 <a:latin typeface="Segoe UI"/>
               </a:rPr>
-              <a:t>Apple</a:t>
+              <a:t>Crude Oil WTI</a:t>
             </a:r>
           </a:p>
         </p:txBody>
@@ -3743,11 +3743,11 @@
             <a:r>
               <a:rPr sz="900" b="0">
                 <a:solidFill>
-                  <a:srgbClr val="22C55E"/>
-                </a:solidFill>
-                <a:latin typeface="Segoe UI"/>
-              </a:rPr>
-              <a:t>AAPL · GREEN</a:t>
+                  <a:srgbClr val="EF4444"/>
+                </a:solidFill>
+                <a:latin typeface="Segoe UI"/>
+              </a:rPr>
+              <a:t>CL=F · RED</a:t>
             </a:r>
           </a:p>
         </p:txBody>
@@ -3781,7 +3781,7 @@
                 </a:solidFill>
                 <a:latin typeface="Segoe UI"/>
               </a:rPr>
-              <a:t>+13.2%</a:t>
+              <a:t>+13.7%</a:t>
             </a:r>
           </a:p>
         </p:txBody>
@@ -3839,7 +3839,7 @@
                 </a:solidFill>
                 <a:latin typeface="Segoe UI"/>
               </a:rPr>
-              <a:t>Bitcoin</a:t>
+              <a:t>TCS</a:t>
             </a:r>
           </a:p>
         </p:txBody>
@@ -3873,7 +3873,7 @@
                 </a:solidFill>
                 <a:latin typeface="Segoe UI"/>
               </a:rPr>
-              <a:t>BTC-USD · RED</a:t>
+              <a:t>TCS.NS · RED</a:t>
             </a:r>
           </a:p>
         </p:txBody>
@@ -3907,7 +3907,7 @@
                 </a:solidFill>
                 <a:latin typeface="Segoe UI"/>
               </a:rPr>
-              <a:t>+9.7%</a:t>
+              <a:t>+12.2%</a:t>
             </a:r>
           </a:p>
         </p:txBody>
@@ -4033,7 +4033,7 @@
                 </a:solidFill>
                 <a:latin typeface="Segoe UI"/>
               </a:rPr>
-              <a:t>+9.7%</a:t>
+              <a:t>+11.2%</a:t>
             </a:r>
           </a:p>
         </p:txBody>
@@ -4193,7 +4193,7 @@
                 </a:solidFill>
                 <a:latin typeface="Segoe UI"/>
               </a:rPr>
-              <a:t>-11.3%</a:t>
+              <a:t>-12.6%</a:t>
             </a:r>
           </a:p>
         </p:txBody>
@@ -4319,7 +4319,7 @@
                 </a:solidFill>
                 <a:latin typeface="Segoe UI"/>
               </a:rPr>
-              <a:t>-6.9%</a:t>
+              <a:t>-10.4%</a:t>
             </a:r>
           </a:p>
         </p:txBody>
@@ -4377,7 +4377,7 @@
                 </a:solidFill>
                 <a:latin typeface="Segoe UI"/>
               </a:rPr>
-              <a:t>Tesla</a:t>
+              <a:t>Nikkei 225</a:t>
             </a:r>
           </a:p>
         </p:txBody>
@@ -4407,11 +4407,11 @@
             <a:r>
               <a:rPr sz="900" b="0">
                 <a:solidFill>
-                  <a:srgbClr val="EF4444"/>
-                </a:solidFill>
-                <a:latin typeface="Segoe UI"/>
-              </a:rPr>
-              <a:t>TSLA · RED</a:t>
+                  <a:srgbClr val="F59E0B"/>
+                </a:solidFill>
+                <a:latin typeface="Segoe UI"/>
+              </a:rPr>
+              <a:t>^N225 · AMBER</a:t>
             </a:r>
           </a:p>
         </p:txBody>
@@ -4445,7 +4445,7 @@
                 </a:solidFill>
                 <a:latin typeface="Segoe UI"/>
               </a:rPr>
-              <a:t>-6.2%</a:t>
+              <a:t>-8.5%</a:t>
             </a:r>
           </a:p>
         </p:txBody>
@@ -4503,7 +4503,7 @@
                 </a:solidFill>
                 <a:latin typeface="Segoe UI"/>
               </a:rPr>
-              <a:t>US Technology</a:t>
+              <a:t>Tesla</a:t>
             </a:r>
           </a:p>
         </p:txBody>
@@ -4533,11 +4533,11 @@
             <a:r>
               <a:rPr sz="900" b="0">
                 <a:solidFill>
-                  <a:srgbClr val="F59E0B"/>
-                </a:solidFill>
-                <a:latin typeface="Segoe UI"/>
-              </a:rPr>
-              <a:t>XLK · AMBER</a:t>
+                  <a:srgbClr val="EF4444"/>
+                </a:solidFill>
+                <a:latin typeface="Segoe UI"/>
+              </a:rPr>
+              <a:t>TSLA · RED</a:t>
             </a:r>
           </a:p>
         </p:txBody>
@@ -4571,7 +4571,7 @@
                 </a:solidFill>
                 <a:latin typeface="Segoe UI"/>
               </a:rPr>
-              <a:t>-4.7%</a:t>
+              <a:t>-7.0%</a:t>
             </a:r>
           </a:p>
         </p:txBody>
@@ -4629,7 +4629,7 @@
                 </a:solidFill>
                 <a:latin typeface="Segoe UI"/>
               </a:rPr>
-              <a:t>Nikkei 225</a:t>
+              <a:t>US Technology</a:t>
             </a:r>
           </a:p>
         </p:txBody>
@@ -4663,7 +4663,7 @@
                 </a:solidFill>
                 <a:latin typeface="Segoe UI"/>
               </a:rPr>
-              <a:t>^N225 · AMBER</a:t>
+              <a:t>XLK · AMBER</a:t>
             </a:r>
           </a:p>
         </p:txBody>
@@ -4697,7 +4697,7 @@
                 </a:solidFill>
                 <a:latin typeface="Segoe UI"/>
               </a:rPr>
-              <a:t>-4.6%</a:t>
+              <a:t>-6.8%</a:t>
             </a:r>
           </a:p>
         </p:txBody>
@@ -4837,7 +4837,7 @@
         <p:spPr>
           <a:xfrm>
             <a:off x="457200" y="1188720"/>
-            <a:ext cx="11247120" cy="5513499"/>
+            <a:ext cx="11247120" cy="5498127"/>
           </a:xfrm>
           <a:prstGeom prst="rect">
             <a:avLst/>
@@ -4967,7 +4967,7 @@
                 </a:solidFill>
                 <a:latin typeface="Segoe UI"/>
               </a:rPr>
-              <a:t>ICICI Bank</a:t>
+              <a:t>Dow Jones</a:t>
             </a:r>
           </a:p>
         </p:txBody>
@@ -5035,7 +5035,7 @@
                 </a:solidFill>
                 <a:latin typeface="Segoe UI"/>
               </a:rPr>
-              <a:t>85%</a:t>
+              <a:t>84%</a:t>
             </a:r>
           </a:p>
         </p:txBody>
@@ -5103,7 +5103,7 @@
                 </a:solidFill>
                 <a:latin typeface="Segoe UI"/>
               </a:rPr>
-              <a:t>Dow Jones</a:t>
+              <a:t>Russell 2000</a:t>
             </a:r>
           </a:p>
         </p:txBody>
@@ -5171,7 +5171,7 @@
                 </a:solidFill>
                 <a:latin typeface="Segoe UI"/>
               </a:rPr>
-              <a:t>84%</a:t>
+              <a:t>83%</a:t>
             </a:r>
           </a:p>
         </p:txBody>
@@ -5239,7 +5239,7 @@
                 </a:solidFill>
                 <a:latin typeface="Segoe UI"/>
               </a:rPr>
-              <a:t>Russell 2000</a:t>
+              <a:t>S&amp;P 500</a:t>
             </a:r>
           </a:p>
         </p:txBody>
@@ -5341,7 +5341,7 @@
                 </a:solidFill>
                 <a:latin typeface="Segoe UI"/>
               </a:rPr>
-              <a:t>above 200DMA · golden cross (50&gt;200) · MACD bearish</a:t>
+              <a:t>above 200DMA · golden cross (50&gt;200) · MACD bullish</a:t>
             </a:r>
           </a:p>
         </p:txBody>
@@ -5375,7 +5375,7 @@
                 </a:solidFill>
                 <a:latin typeface="Segoe UI"/>
               </a:rPr>
-              <a:t>S&amp;P 500</a:t>
+              <a:t>USD/JPY</a:t>
             </a:r>
           </a:p>
         </p:txBody>
@@ -5443,7 +5443,7 @@
                 </a:solidFill>
                 <a:latin typeface="Segoe UI"/>
               </a:rPr>
-              <a:t>82%</a:t>
+              <a:t>81%</a:t>
             </a:r>
           </a:p>
         </p:txBody>
@@ -5477,7 +5477,7 @@
                 </a:solidFill>
                 <a:latin typeface="Segoe UI"/>
               </a:rPr>
-              <a:t>above 200DMA · golden cross (50&gt;200) · MACD bullish</a:t>
+              <a:t>above 200DMA · golden cross (50&gt;200) · MACD bearish</a:t>
             </a:r>
           </a:p>
         </p:txBody>
@@ -5511,7 +5511,7 @@
                 </a:solidFill>
                 <a:latin typeface="Segoe UI"/>
               </a:rPr>
-              <a:t>USD/JPY</a:t>
+              <a:t>US Financials</a:t>
             </a:r>
           </a:p>
         </p:txBody>
@@ -5545,7 +5545,7 @@
                 </a:solidFill>
                 <a:latin typeface="Segoe UI"/>
               </a:rPr>
-              <a:t>STRONG BUY</a:t>
+              <a:t>BUY</a:t>
             </a:r>
           </a:p>
         </p:txBody>
@@ -5579,7 +5579,7 @@
                 </a:solidFill>
                 <a:latin typeface="Segoe UI"/>
               </a:rPr>
-              <a:t>81%</a:t>
+              <a:t>94%</a:t>
             </a:r>
           </a:p>
         </p:txBody>
@@ -5613,7 +5613,7 @@
                 </a:solidFill>
                 <a:latin typeface="Segoe UI"/>
               </a:rPr>
-              <a:t>above 200DMA · golden cross (50&gt;200) · MACD bearish</a:t>
+              <a:t>above 200DMA · golden cross (50&gt;200) · MACD bullish</a:t>
             </a:r>
           </a:p>
         </p:txBody>
@@ -5647,7 +5647,7 @@
                 </a:solidFill>
                 <a:latin typeface="Segoe UI"/>
               </a:rPr>
-              <a:t>USD/INR</a:t>
+              <a:t>Apple</a:t>
             </a:r>
           </a:p>
         </p:txBody>
@@ -5681,7 +5681,7 @@
                 </a:solidFill>
                 <a:latin typeface="Segoe UI"/>
               </a:rPr>
-              <a:t>STRONG BUY</a:t>
+              <a:t>BUY</a:t>
             </a:r>
           </a:p>
         </p:txBody>
@@ -5715,7 +5715,7 @@
                 </a:solidFill>
                 <a:latin typeface="Segoe UI"/>
               </a:rPr>
-              <a:t>80%</a:t>
+              <a:t>93%</a:t>
             </a:r>
           </a:p>
         </p:txBody>
@@ -5783,7 +5783,7 @@
                 </a:solidFill>
                 <a:latin typeface="Segoe UI"/>
               </a:rPr>
-              <a:t>US Financials</a:t>
+              <a:t>ICICI Bank</a:t>
             </a:r>
           </a:p>
         </p:txBody>
@@ -5851,7 +5851,7 @@
                 </a:solidFill>
                 <a:latin typeface="Segoe UI"/>
               </a:rPr>
-              <a:t>94%</a:t>
+              <a:t>81%</a:t>
             </a:r>
           </a:p>
         </p:txBody>
@@ -5885,7 +5885,7 @@
                 </a:solidFill>
                 <a:latin typeface="Segoe UI"/>
               </a:rPr>
-              <a:t>above 200DMA · golden cross (50&gt;200) · MACD bullish</a:t>
+              <a:t>above 200DMA · golden cross (50&gt;200) · MACD bearish</a:t>
             </a:r>
           </a:p>
         </p:txBody>
@@ -5919,7 +5919,7 @@
                 </a:solidFill>
                 <a:latin typeface="Segoe UI"/>
               </a:rPr>
-              <a:t>Apple</a:t>
+              <a:t>Straits Times</a:t>
             </a:r>
           </a:p>
         </p:txBody>
@@ -5987,7 +5987,7 @@
                 </a:solidFill>
                 <a:latin typeface="Segoe UI"/>
               </a:rPr>
-              <a:t>93%</a:t>
+              <a:t>79%</a:t>
             </a:r>
           </a:p>
         </p:txBody>
@@ -6055,7 +6055,7 @@
                 </a:solidFill>
                 <a:latin typeface="Segoe UI"/>
               </a:rPr>
-              <a:t>Straits Times</a:t>
+              <a:t>FTSE 100</a:t>
             </a:r>
           </a:p>
         </p:txBody>
@@ -6123,7 +6123,7 @@
                 </a:solidFill>
                 <a:latin typeface="Segoe UI"/>
               </a:rPr>
-              <a:t>79%</a:t>
+              <a:t>68%</a:t>
             </a:r>
           </a:p>
         </p:txBody>
@@ -6157,7 +6157,7 @@
                 </a:solidFill>
                 <a:latin typeface="Segoe UI"/>
               </a:rPr>
-              <a:t>above 200DMA · golden cross (50&gt;200) · MACD bullish</a:t>
+              <a:t>above 200DMA · golden cross (50&gt;200) · MACD bearish</a:t>
             </a:r>
           </a:p>
         </p:txBody>
@@ -6191,7 +6191,7 @@
                 </a:solidFill>
                 <a:latin typeface="Segoe UI"/>
               </a:rPr>
-              <a:t>Bharti Airtel</a:t>
+              <a:t>USD/INR</a:t>
             </a:r>
           </a:p>
         </p:txBody>
@@ -6259,7 +6259,7 @@
                 </a:solidFill>
                 <a:latin typeface="Segoe UI"/>
               </a:rPr>
-              <a:t>74%</a:t>
+              <a:t>80%</a:t>
             </a:r>
           </a:p>
         </p:txBody>
@@ -6293,7 +6293,7 @@
                 </a:solidFill>
                 <a:latin typeface="Segoe UI"/>
               </a:rPr>
-              <a:t>above 200DMA · death cross (50&lt;200) · MACD bullish</a:t>
+              <a:t>above 200DMA · golden cross (50&gt;200) · MACD bullish</a:t>
             </a:r>
           </a:p>
         </p:txBody>
@@ -6531,7 +6531,7 @@
                 </a:solidFill>
                 <a:latin typeface="Segoe UI"/>
               </a:rPr>
-              <a:t>79%</a:t>
+              <a:t>66%</a:t>
             </a:r>
           </a:p>
         </p:txBody>
@@ -6659,7 +6659,7 @@
                 </a:solidFill>
                 <a:latin typeface="Segoe UI"/>
               </a:rPr>
-              <a:t>Base currency INR · USD/INR 96.32</a:t>
+              <a:t>Base currency INR · USD/INR 96.38</a:t>
             </a:r>
           </a:p>
         </p:txBody>
@@ -7067,7 +7067,7 @@
                 </a:solidFill>
                 <a:latin typeface="Segoe UI"/>
               </a:rPr>
-              <a:t>64,264</a:t>
+              <a:t>62,873</a:t>
             </a:r>
           </a:p>
         </p:txBody>
@@ -7101,7 +7101,7 @@
                 </a:solidFill>
                 <a:latin typeface="Segoe UI"/>
               </a:rPr>
-              <a:t>Rs 619,006</a:t>
+              <a:t>Rs 605,967</a:t>
             </a:r>
           </a:p>
         </p:txBody>
@@ -7135,7 +7135,7 @@
                 </a:solidFill>
                 <a:latin typeface="Segoe UI"/>
               </a:rPr>
-              <a:t>Rs 41,071</a:t>
+              <a:t>Rs 27,687</a:t>
             </a:r>
           </a:p>
         </p:txBody>
@@ -7169,7 +7169,7 @@
                 </a:solidFill>
                 <a:latin typeface="Segoe UI"/>
               </a:rPr>
-              <a:t>+7.1%</a:t>
+              <a:t>+4.8%</a:t>
             </a:r>
           </a:p>
         </p:txBody>
@@ -7203,7 +7203,7 @@
                 </a:solidFill>
                 <a:latin typeface="Segoe UI"/>
               </a:rPr>
-              <a:t>-0.7%</a:t>
+              <a:t>-1.4%</a:t>
             </a:r>
           </a:p>
         </p:txBody>
@@ -7339,7 +7339,7 @@
                 </a:solidFill>
                 <a:latin typeface="Segoe UI"/>
               </a:rPr>
-              <a:t>4,037</a:t>
+              <a:t>4,000</a:t>
             </a:r>
           </a:p>
         </p:txBody>
@@ -7373,7 +7373,7 @@
                 </a:solidFill>
                 <a:latin typeface="Segoe UI"/>
               </a:rPr>
-              <a:t>Rs 388,844</a:t>
+              <a:t>Rs 385,520</a:t>
             </a:r>
           </a:p>
         </p:txBody>
@@ -7407,7 +7407,7 @@
                 </a:solidFill>
                 <a:latin typeface="Segoe UI"/>
               </a:rPr>
-              <a:t>Rs 167,303</a:t>
+              <a:t>Rs 163,846</a:t>
             </a:r>
           </a:p>
         </p:txBody>
@@ -7441,7 +7441,7 @@
                 </a:solidFill>
                 <a:latin typeface="Segoe UI"/>
               </a:rPr>
-              <a:t>+75.5%</a:t>
+              <a:t>+73.9%</a:t>
             </a:r>
           </a:p>
         </p:txBody>
@@ -7471,11 +7471,11 @@
             <a:r>
               <a:rPr sz="1000" b="0">
                 <a:solidFill>
-                  <a:srgbClr val="EF4444"/>
-                </a:solidFill>
-                <a:latin typeface="Segoe UI"/>
-              </a:rPr>
-              <a:t>-0.2%</a:t>
+                  <a:srgbClr val="22C55E"/>
+                </a:solidFill>
+                <a:latin typeface="Segoe UI"/>
+              </a:rPr>
+              <a:t>+0.4%</a:t>
             </a:r>
           </a:p>
         </p:txBody>
@@ -7611,7 +7611,7 @@
                 </a:solidFill>
                 <a:latin typeface="Segoe UI"/>
               </a:rPr>
-              <a:t>328</a:t>
+              <a:t>333</a:t>
             </a:r>
           </a:p>
         </p:txBody>
@@ -7645,7 +7645,7 @@
                 </a:solidFill>
                 <a:latin typeface="Segoe UI"/>
               </a:rPr>
-              <a:t>Rs 315,456</a:t>
+              <a:t>Rs 321,196</a:t>
             </a:r>
           </a:p>
         </p:txBody>
@@ -7679,7 +7679,7 @@
                 </a:solidFill>
                 <a:latin typeface="Segoe UI"/>
               </a:rPr>
-              <a:t>Rs 137,260</a:t>
+              <a:t>Rs 142,893</a:t>
             </a:r>
           </a:p>
         </p:txBody>
@@ -7713,7 +7713,7 @@
                 </a:solidFill>
                 <a:latin typeface="Segoe UI"/>
               </a:rPr>
-              <a:t>+77.0%</a:t>
+              <a:t>+80.1%</a:t>
             </a:r>
           </a:p>
         </p:txBody>
@@ -7883,7 +7883,7 @@
                 </a:solidFill>
                 <a:latin typeface="Segoe UI"/>
               </a:rPr>
-              <a:t>212</a:t>
+              <a:t>207</a:t>
             </a:r>
           </a:p>
         </p:txBody>
@@ -7917,7 +7917,7 @@
                 </a:solidFill>
                 <a:latin typeface="Segoe UI"/>
               </a:rPr>
-              <a:t>Rs 163,748</a:t>
+              <a:t>Rs 159,914</a:t>
             </a:r>
           </a:p>
         </p:txBody>
@@ -7951,7 +7951,7 @@
                 </a:solidFill>
                 <a:latin typeface="Segoe UI"/>
               </a:rPr>
-              <a:t>Rs -183,013</a:t>
+              <a:t>Rs -187,054</a:t>
             </a:r>
           </a:p>
         </p:txBody>
@@ -7985,7 +7985,7 @@
                 </a:solidFill>
                 <a:latin typeface="Segoe UI"/>
               </a:rPr>
-              <a:t>-52.8%</a:t>
+              <a:t>-53.9%</a:t>
             </a:r>
           </a:p>
         </p:txBody>
@@ -8155,7 +8155,7 @@
                 </a:solidFill>
                 <a:latin typeface="Segoe UI"/>
               </a:rPr>
-              <a:t>1,089</a:t>
+              <a:t>1,102</a:t>
             </a:r>
           </a:p>
         </p:txBody>
@@ -8189,7 +8189,7 @@
                 </a:solidFill>
                 <a:latin typeface="Segoe UI"/>
               </a:rPr>
-              <a:t>Rs 87,120</a:t>
+              <a:t>Rs 88,184</a:t>
             </a:r>
           </a:p>
         </p:txBody>
@@ -8223,7 +8223,7 @@
                 </a:solidFill>
                 <a:latin typeface="Segoe UI"/>
               </a:rPr>
-              <a:t>Rs -24,880</a:t>
+              <a:t>Rs -23,816</a:t>
             </a:r>
           </a:p>
         </p:txBody>
@@ -8257,7 +8257,7 @@
                 </a:solidFill>
                 <a:latin typeface="Segoe UI"/>
               </a:rPr>
-              <a:t>-22.2%</a:t>
+              <a:t>-21.3%</a:t>
             </a:r>
           </a:p>
         </p:txBody>
@@ -8291,7 +8291,7 @@
                 </a:solidFill>
                 <a:latin typeface="Segoe UI"/>
               </a:rPr>
-              <a:t>+1.2%</a:t>
+              <a:t>+1.8%</a:t>
             </a:r>
           </a:p>
         </p:txBody>
@@ -8427,7 +8427,7 @@
                 </a:solidFill>
                 <a:latin typeface="Segoe UI"/>
               </a:rPr>
-              <a:t>1,302</a:t>
+              <a:t>1,321</a:t>
             </a:r>
           </a:p>
         </p:txBody>
@@ -8461,7 +8461,7 @@
                 </a:solidFill>
                 <a:latin typeface="Segoe UI"/>
               </a:rPr>
-              <a:t>Rs 65,110</a:t>
+              <a:t>Rs 66,045</a:t>
             </a:r>
           </a:p>
         </p:txBody>
@@ -8495,7 +8495,7 @@
                 </a:solidFill>
                 <a:latin typeface="Segoe UI"/>
               </a:rPr>
-              <a:t>Rs -57,390</a:t>
+              <a:t>Rs -56,455</a:t>
             </a:r>
           </a:p>
         </p:txBody>
@@ -8529,7 +8529,7 @@
                 </a:solidFill>
                 <a:latin typeface="Segoe UI"/>
               </a:rPr>
-              <a:t>-46.9%</a:t>
+              <a:t>-46.1%</a:t>
             </a:r>
           </a:p>
         </p:txBody>
@@ -8563,7 +8563,7 @@
                 </a:solidFill>
                 <a:latin typeface="Segoe UI"/>
               </a:rPr>
-              <a:t>+0.5%</a:t>
+              <a:t>+1.9%</a:t>
             </a:r>
           </a:p>
         </p:txBody>
@@ -8699,7 +8699,7 @@
                 </a:solidFill>
                 <a:latin typeface="Segoe UI"/>
               </a:rPr>
-              <a:t>2,214</a:t>
+              <a:t>2,266</a:t>
             </a:r>
           </a:p>
         </p:txBody>
@@ -8733,7 +8733,7 @@
                 </a:solidFill>
                 <a:latin typeface="Segoe UI"/>
               </a:rPr>
-              <a:t>Rs 55,342</a:t>
+              <a:t>Rs 56,660</a:t>
             </a:r>
           </a:p>
         </p:txBody>
@@ -8767,7 +8767,7 @@
                 </a:solidFill>
                 <a:latin typeface="Segoe UI"/>
               </a:rPr>
-              <a:t>Rs -34,658</a:t>
+              <a:t>Rs -33,340</a:t>
             </a:r>
           </a:p>
         </p:txBody>
@@ -8801,7 +8801,7 @@
                 </a:solidFill>
                 <a:latin typeface="Segoe UI"/>
               </a:rPr>
-              <a:t>-38.5%</a:t>
+              <a:t>-37.0%</a:t>
             </a:r>
           </a:p>
         </p:txBody>
@@ -8835,7 +8835,7 @@
                 </a:solidFill>
                 <a:latin typeface="Segoe UI"/>
               </a:rPr>
-              <a:t>+1.1%</a:t>
+              <a:t>+3.0%</a:t>
             </a:r>
           </a:p>
         </p:txBody>
@@ -8971,7 +8971,7 @@
                 </a:solidFill>
                 <a:latin typeface="Segoe UI"/>
               </a:rPr>
-              <a:t>809</a:t>
+              <a:t>818</a:t>
             </a:r>
           </a:p>
         </p:txBody>
@@ -9005,7 +9005,7 @@
                 </a:solidFill>
                 <a:latin typeface="Segoe UI"/>
               </a:rPr>
-              <a:t>Rs 48,543</a:t>
+              <a:t>Rs 49,110</a:t>
             </a:r>
           </a:p>
         </p:txBody>
@@ -9039,7 +9039,7 @@
                 </a:solidFill>
                 <a:latin typeface="Segoe UI"/>
               </a:rPr>
-              <a:t>Rs -42,657</a:t>
+              <a:t>Rs -42,090</a:t>
             </a:r>
           </a:p>
         </p:txBody>
@@ -9073,7 +9073,7 @@
                 </a:solidFill>
                 <a:latin typeface="Segoe UI"/>
               </a:rPr>
-              <a:t>-46.8%</a:t>
+              <a:t>-46.1%</a:t>
             </a:r>
           </a:p>
         </p:txBody>
@@ -9103,11 +9103,11 @@
             <a:r>
               <a:rPr sz="1000" b="0">
                 <a:solidFill>
-                  <a:srgbClr val="EF4444"/>
-                </a:solidFill>
-                <a:latin typeface="Segoe UI"/>
-              </a:rPr>
-              <a:t>-0.8%</a:t>
+                  <a:srgbClr val="22C55E"/>
+                </a:solidFill>
+                <a:latin typeface="Segoe UI"/>
+              </a:rPr>
+              <a:t>+1.3%</a:t>
             </a:r>
           </a:p>
         </p:txBody>
@@ -9141,7 +9141,7 @@
                 </a:solidFill>
                 <a:latin typeface="Segoe UI"/>
               </a:rPr>
-              <a:t>Total Rs 1,743,170 | P&amp;L Rs 3,036 (+0.2%) | Sharpe -0.54 | Vol 18.1% | VaR95 -1.9%/day</a:t>
+              <a:t>Total Rs 1,732,595 | P&amp;L Rs -8,330 (-0.5%) | Sharpe -0.61 | Vol 17.93% | VaR95 -1.9%/day</a:t>
             </a:r>
           </a:p>
         </p:txBody>

--- a/docs/pmr_daily.pptx
+++ b/docs/pmr_daily.pptx
@@ -3197,7 +3197,7 @@
                 </a:solidFill>
                 <a:latin typeface="Segoe UI"/>
               </a:rPr>
-              <a:t>Friday, 17 Jul 2026 15:30 SGT</a:t>
+              <a:t>Monday, 20 Jul 2026 18:25 SGT</a:t>
             </a:r>
           </a:p>
         </p:txBody>
@@ -3265,7 +3265,7 @@
                 </a:solidFill>
                 <a:latin typeface="Segoe UI"/>
               </a:rPr>
-              <a:t>RAG 15R / 16A / 15G   |   50.0% above 200DMA   |   Portfolio Rs 1,732,595 (-0.5%)</a:t>
+              <a:t>RAG 15R / 15A / 16G   |   50.0% above 200DMA   |   Portfolio Rs 1,743,260 (+0.1%)</a:t>
             </a:r>
           </a:p>
         </p:txBody>
@@ -3529,7 +3529,7 @@
                 </a:solidFill>
                 <a:latin typeface="Segoe UI"/>
               </a:rPr>
-              <a:t>+16.6%</a:t>
+              <a:t>+19.1%</a:t>
             </a:r>
           </a:p>
         </p:txBody>
@@ -3587,7 +3587,7 @@
                 </a:solidFill>
                 <a:latin typeface="Segoe UI"/>
               </a:rPr>
-              <a:t>Apple</a:t>
+              <a:t>Crude Oil WTI</a:t>
             </a:r>
           </a:p>
         </p:txBody>
@@ -3617,11 +3617,11 @@
             <a:r>
               <a:rPr sz="900" b="0">
                 <a:solidFill>
-                  <a:srgbClr val="22C55E"/>
-                </a:solidFill>
-                <a:latin typeface="Segoe UI"/>
-              </a:rPr>
-              <a:t>AAPL · GREEN</a:t>
+                  <a:srgbClr val="EF4444"/>
+                </a:solidFill>
+                <a:latin typeface="Segoe UI"/>
+              </a:rPr>
+              <a:t>CL=F · RED</a:t>
             </a:r>
           </a:p>
         </p:txBody>
@@ -3655,7 +3655,7 @@
                 </a:solidFill>
                 <a:latin typeface="Segoe UI"/>
               </a:rPr>
-              <a:t>+15.2%</a:t>
+              <a:t>+17.1%</a:t>
             </a:r>
           </a:p>
         </p:txBody>
@@ -3713,7 +3713,7 @@
                 </a:solidFill>
                 <a:latin typeface="Segoe UI"/>
               </a:rPr>
-              <a:t>Crude Oil WTI</a:t>
+              <a:t>Apple</a:t>
             </a:r>
           </a:p>
         </p:txBody>
@@ -3743,11 +3743,11 @@
             <a:r>
               <a:rPr sz="900" b="0">
                 <a:solidFill>
-                  <a:srgbClr val="EF4444"/>
-                </a:solidFill>
-                <a:latin typeface="Segoe UI"/>
-              </a:rPr>
-              <a:t>CL=F · RED</a:t>
+                  <a:srgbClr val="22C55E"/>
+                </a:solidFill>
+                <a:latin typeface="Segoe UI"/>
+              </a:rPr>
+              <a:t>AAPL · GREEN</a:t>
             </a:r>
           </a:p>
         </p:txBody>
@@ -3781,7 +3781,7 @@
                 </a:solidFill>
                 <a:latin typeface="Segoe UI"/>
               </a:rPr>
-              <a:t>+13.7%</a:t>
+              <a:t>+15.3%</a:t>
             </a:r>
           </a:p>
         </p:txBody>
@@ -3907,7 +3907,7 @@
                 </a:solidFill>
                 <a:latin typeface="Segoe UI"/>
               </a:rPr>
-              <a:t>+12.2%</a:t>
+              <a:t>+11.4%</a:t>
             </a:r>
           </a:p>
         </p:txBody>
@@ -4033,7 +4033,7 @@
                 </a:solidFill>
                 <a:latin typeface="Segoe UI"/>
               </a:rPr>
-              <a:t>+11.2%</a:t>
+              <a:t>+10.9%</a:t>
             </a:r>
           </a:p>
         </p:txBody>
@@ -4193,7 +4193,7 @@
                 </a:solidFill>
                 <a:latin typeface="Segoe UI"/>
               </a:rPr>
-              <a:t>-12.6%</a:t>
+              <a:t>-12.7%</a:t>
             </a:r>
           </a:p>
         </p:txBody>
@@ -4319,7 +4319,7 @@
                 </a:solidFill>
                 <a:latin typeface="Segoe UI"/>
               </a:rPr>
-              <a:t>-10.4%</a:t>
+              <a:t>-10.3%</a:t>
             </a:r>
           </a:p>
         </p:txBody>
@@ -4377,7 +4377,7 @@
                 </a:solidFill>
                 <a:latin typeface="Segoe UI"/>
               </a:rPr>
-              <a:t>Nikkei 225</a:t>
+              <a:t>Tesla</a:t>
             </a:r>
           </a:p>
         </p:txBody>
@@ -4407,11 +4407,11 @@
             <a:r>
               <a:rPr sz="900" b="0">
                 <a:solidFill>
-                  <a:srgbClr val="F59E0B"/>
-                </a:solidFill>
-                <a:latin typeface="Segoe UI"/>
-              </a:rPr>
-              <a:t>^N225 · AMBER</a:t>
+                  <a:srgbClr val="EF4444"/>
+                </a:solidFill>
+                <a:latin typeface="Segoe UI"/>
+              </a:rPr>
+              <a:t>TSLA · RED</a:t>
             </a:r>
           </a:p>
         </p:txBody>
@@ -4445,7 +4445,7 @@
                 </a:solidFill>
                 <a:latin typeface="Segoe UI"/>
               </a:rPr>
-              <a:t>-8.5%</a:t>
+              <a:t>-9.5%</a:t>
             </a:r>
           </a:p>
         </p:txBody>
@@ -4503,7 +4503,7 @@
                 </a:solidFill>
                 <a:latin typeface="Segoe UI"/>
               </a:rPr>
-              <a:t>Tesla</a:t>
+              <a:t>Nikkei 225</a:t>
             </a:r>
           </a:p>
         </p:txBody>
@@ -4533,11 +4533,11 @@
             <a:r>
               <a:rPr sz="900" b="0">
                 <a:solidFill>
-                  <a:srgbClr val="EF4444"/>
-                </a:solidFill>
-                <a:latin typeface="Segoe UI"/>
-              </a:rPr>
-              <a:t>TSLA · RED</a:t>
+                  <a:srgbClr val="F59E0B"/>
+                </a:solidFill>
+                <a:latin typeface="Segoe UI"/>
+              </a:rPr>
+              <a:t>^N225 · AMBER</a:t>
             </a:r>
           </a:p>
         </p:txBody>
@@ -4571,7 +4571,7 @@
                 </a:solidFill>
                 <a:latin typeface="Segoe UI"/>
               </a:rPr>
-              <a:t>-7.0%</a:t>
+              <a:t>-8.5%</a:t>
             </a:r>
           </a:p>
         </p:txBody>
@@ -4697,7 +4697,7 @@
                 </a:solidFill>
                 <a:latin typeface="Segoe UI"/>
               </a:rPr>
-              <a:t>-6.8%</a:t>
+              <a:t>-7.8%</a:t>
             </a:r>
           </a:p>
         </p:txBody>
@@ -4837,7 +4837,7 @@
         <p:spPr>
           <a:xfrm>
             <a:off x="457200" y="1188720"/>
-            <a:ext cx="11247120" cy="5498127"/>
+            <a:ext cx="11247120" cy="5513499"/>
           </a:xfrm>
           <a:prstGeom prst="rect">
             <a:avLst/>
@@ -4967,7 +4967,7 @@
                 </a:solidFill>
                 <a:latin typeface="Segoe UI"/>
               </a:rPr>
-              <a:t>Dow Jones</a:t>
+              <a:t>US Financials</a:t>
             </a:r>
           </a:p>
         </p:txBody>
@@ -5035,7 +5035,7 @@
                 </a:solidFill>
                 <a:latin typeface="Segoe UI"/>
               </a:rPr>
-              <a:t>84%</a:t>
+              <a:t>86%</a:t>
             </a:r>
           </a:p>
         </p:txBody>
@@ -5171,7 +5171,7 @@
                 </a:solidFill>
                 <a:latin typeface="Segoe UI"/>
               </a:rPr>
-              <a:t>83%</a:t>
+              <a:t>84%</a:t>
             </a:r>
           </a:p>
         </p:txBody>
@@ -5239,7 +5239,7 @@
                 </a:solidFill>
                 <a:latin typeface="Segoe UI"/>
               </a:rPr>
-              <a:t>S&amp;P 500</a:t>
+              <a:t>Dow Jones</a:t>
             </a:r>
           </a:p>
         </p:txBody>
@@ -5307,7 +5307,7 @@
                 </a:solidFill>
                 <a:latin typeface="Segoe UI"/>
               </a:rPr>
-              <a:t>82%</a:t>
+              <a:t>83%</a:t>
             </a:r>
           </a:p>
         </p:txBody>
@@ -5341,7 +5341,7 @@
                 </a:solidFill>
                 <a:latin typeface="Segoe UI"/>
               </a:rPr>
-              <a:t>above 200DMA · golden cross (50&gt;200) · MACD bullish</a:t>
+              <a:t>above 200DMA · golden cross (50&gt;200) · MACD bearish</a:t>
             </a:r>
           </a:p>
         </p:txBody>
@@ -5443,7 +5443,7 @@
                 </a:solidFill>
                 <a:latin typeface="Segoe UI"/>
               </a:rPr>
-              <a:t>81%</a:t>
+              <a:t>82%</a:t>
             </a:r>
           </a:p>
         </p:txBody>
@@ -5511,7 +5511,7 @@
                 </a:solidFill>
                 <a:latin typeface="Segoe UI"/>
               </a:rPr>
-              <a:t>US Financials</a:t>
+              <a:t>Dollar Index</a:t>
             </a:r>
           </a:p>
         </p:txBody>
@@ -5545,7 +5545,7 @@
                 </a:solidFill>
                 <a:latin typeface="Segoe UI"/>
               </a:rPr>
-              <a:t>BUY</a:t>
+              <a:t>STRONG BUY</a:t>
             </a:r>
           </a:p>
         </p:txBody>
@@ -5579,7 +5579,7 @@
                 </a:solidFill>
                 <a:latin typeface="Segoe UI"/>
               </a:rPr>
-              <a:t>94%</a:t>
+              <a:t>81%</a:t>
             </a:r>
           </a:p>
         </p:txBody>
@@ -5613,7 +5613,7 @@
                 </a:solidFill>
                 <a:latin typeface="Segoe UI"/>
               </a:rPr>
-              <a:t>above 200DMA · golden cross (50&gt;200) · MACD bullish</a:t>
+              <a:t>above 200DMA · golden cross (50&gt;200) · MACD bearish</a:t>
             </a:r>
           </a:p>
         </p:txBody>
@@ -5647,7 +5647,7 @@
                 </a:solidFill>
                 <a:latin typeface="Segoe UI"/>
               </a:rPr>
-              <a:t>Apple</a:t>
+              <a:t>USD/INR</a:t>
             </a:r>
           </a:p>
         </p:txBody>
@@ -5681,7 +5681,7 @@
                 </a:solidFill>
                 <a:latin typeface="Segoe UI"/>
               </a:rPr>
-              <a:t>BUY</a:t>
+              <a:t>STRONG BUY</a:t>
             </a:r>
           </a:p>
         </p:txBody>
@@ -5715,7 +5715,7 @@
                 </a:solidFill>
                 <a:latin typeface="Segoe UI"/>
               </a:rPr>
-              <a:t>93%</a:t>
+              <a:t>80%</a:t>
             </a:r>
           </a:p>
         </p:txBody>
@@ -5783,7 +5783,7 @@
                 </a:solidFill>
                 <a:latin typeface="Segoe UI"/>
               </a:rPr>
-              <a:t>ICICI Bank</a:t>
+              <a:t>Copper</a:t>
             </a:r>
           </a:p>
         </p:txBody>
@@ -5817,7 +5817,7 @@
                 </a:solidFill>
                 <a:latin typeface="Segoe UI"/>
               </a:rPr>
-              <a:t>BUY</a:t>
+              <a:t>STRONG BUY</a:t>
             </a:r>
           </a:p>
         </p:txBody>
@@ -5851,7 +5851,7 @@
                 </a:solidFill>
                 <a:latin typeface="Segoe UI"/>
               </a:rPr>
-              <a:t>81%</a:t>
+              <a:t>80%</a:t>
             </a:r>
           </a:p>
         </p:txBody>
@@ -5885,7 +5885,7 @@
                 </a:solidFill>
                 <a:latin typeface="Segoe UI"/>
               </a:rPr>
-              <a:t>above 200DMA · golden cross (50&gt;200) · MACD bearish</a:t>
+              <a:t>above 200DMA · golden cross (50&gt;200) · MACD bullish</a:t>
             </a:r>
           </a:p>
         </p:txBody>
@@ -5919,7 +5919,7 @@
                 </a:solidFill>
                 <a:latin typeface="Segoe UI"/>
               </a:rPr>
-              <a:t>Straits Times</a:t>
+              <a:t>ICICI Bank</a:t>
             </a:r>
           </a:p>
         </p:txBody>
@@ -5987,7 +5987,7 @@
                 </a:solidFill>
                 <a:latin typeface="Segoe UI"/>
               </a:rPr>
-              <a:t>79%</a:t>
+              <a:t>94%</a:t>
             </a:r>
           </a:p>
         </p:txBody>
@@ -6055,7 +6055,7 @@
                 </a:solidFill>
                 <a:latin typeface="Segoe UI"/>
               </a:rPr>
-              <a:t>FTSE 100</a:t>
+              <a:t>Apple</a:t>
             </a:r>
           </a:p>
         </p:txBody>
@@ -6123,7 +6123,7 @@
                 </a:solidFill>
                 <a:latin typeface="Segoe UI"/>
               </a:rPr>
-              <a:t>68%</a:t>
+              <a:t>94%</a:t>
             </a:r>
           </a:p>
         </p:txBody>
@@ -6157,7 +6157,7 @@
                 </a:solidFill>
                 <a:latin typeface="Segoe UI"/>
               </a:rPr>
-              <a:t>above 200DMA · golden cross (50&gt;200) · MACD bearish</a:t>
+              <a:t>above 200DMA · golden cross (50&gt;200) · MACD bullish</a:t>
             </a:r>
           </a:p>
         </p:txBody>
@@ -6191,7 +6191,7 @@
                 </a:solidFill>
                 <a:latin typeface="Segoe UI"/>
               </a:rPr>
-              <a:t>USD/INR</a:t>
+              <a:t>NIFTY Bank</a:t>
             </a:r>
           </a:p>
         </p:txBody>
@@ -6259,7 +6259,7 @@
                 </a:solidFill>
                 <a:latin typeface="Segoe UI"/>
               </a:rPr>
-              <a:t>80%</a:t>
+              <a:t>78%</a:t>
             </a:r>
           </a:p>
         </p:txBody>
@@ -6293,7 +6293,7 @@
                 </a:solidFill>
                 <a:latin typeface="Segoe UI"/>
               </a:rPr>
-              <a:t>above 200DMA · golden cross (50&gt;200) · MACD bullish</a:t>
+              <a:t>above 200DMA · golden cross (50&gt;200) · MACD bearish</a:t>
             </a:r>
           </a:p>
         </p:txBody>
@@ -6463,7 +6463,7 @@
                 </a:solidFill>
                 <a:latin typeface="Segoe UI"/>
               </a:rPr>
-              <a:t>Dollar Index</a:t>
+              <a:t>FTSE 100</a:t>
             </a:r>
           </a:p>
         </p:txBody>
@@ -6531,7 +6531,7 @@
                 </a:solidFill>
                 <a:latin typeface="Segoe UI"/>
               </a:rPr>
-              <a:t>66%</a:t>
+              <a:t>67%</a:t>
             </a:r>
           </a:p>
         </p:txBody>
@@ -6659,7 +6659,7 @@
                 </a:solidFill>
                 <a:latin typeface="Segoe UI"/>
               </a:rPr>
-              <a:t>Base currency INR · USD/INR 96.38</a:t>
+              <a:t>Base currency INR · USD/INR 96.44</a:t>
             </a:r>
           </a:p>
         </p:txBody>
@@ -7067,7 +7067,7 @@
                 </a:solidFill>
                 <a:latin typeface="Segoe UI"/>
               </a:rPr>
-              <a:t>62,873</a:t>
+              <a:t>64,351</a:t>
             </a:r>
           </a:p>
         </p:txBody>
@@ -7101,7 +7101,7 @@
                 </a:solidFill>
                 <a:latin typeface="Segoe UI"/>
               </a:rPr>
-              <a:t>Rs 605,967</a:t>
+              <a:t>Rs 620,637</a:t>
             </a:r>
           </a:p>
         </p:txBody>
@@ -7135,7 +7135,7 @@
                 </a:solidFill>
                 <a:latin typeface="Segoe UI"/>
               </a:rPr>
-              <a:t>Rs 27,687</a:t>
+              <a:t>Rs 41,967</a:t>
             </a:r>
           </a:p>
         </p:txBody>
@@ -7169,7 +7169,7 @@
                 </a:solidFill>
                 <a:latin typeface="Segoe UI"/>
               </a:rPr>
-              <a:t>+4.8%</a:t>
+              <a:t>+7.2%</a:t>
             </a:r>
           </a:p>
         </p:txBody>
@@ -7203,7 +7203,7 @@
                 </a:solidFill>
                 <a:latin typeface="Segoe UI"/>
               </a:rPr>
-              <a:t>-1.4%</a:t>
+              <a:t>-0.5%</a:t>
             </a:r>
           </a:p>
         </p:txBody>
@@ -7339,7 +7339,7 @@
                 </a:solidFill>
                 <a:latin typeface="Segoe UI"/>
               </a:rPr>
-              <a:t>4,000</a:t>
+              <a:t>4,025</a:t>
             </a:r>
           </a:p>
         </p:txBody>
@@ -7373,7 +7373,7 @@
                 </a:solidFill>
                 <a:latin typeface="Segoe UI"/>
               </a:rPr>
-              <a:t>Rs 385,520</a:t>
+              <a:t>Rs 388,210</a:t>
             </a:r>
           </a:p>
         </p:txBody>
@@ -7407,7 +7407,7 @@
                 </a:solidFill>
                 <a:latin typeface="Segoe UI"/>
               </a:rPr>
-              <a:t>Rs 163,846</a:t>
+              <a:t>Rs 166,387</a:t>
             </a:r>
           </a:p>
         </p:txBody>
@@ -7441,7 +7441,7 @@
                 </a:solidFill>
                 <a:latin typeface="Segoe UI"/>
               </a:rPr>
-              <a:t>+73.9%</a:t>
+              <a:t>+75.0%</a:t>
             </a:r>
           </a:p>
         </p:txBody>
@@ -7475,7 +7475,7 @@
                 </a:solidFill>
                 <a:latin typeface="Segoe UI"/>
               </a:rPr>
-              <a:t>+0.4%</a:t>
+              <a:t>+0.3%</a:t>
             </a:r>
           </a:p>
         </p:txBody>
@@ -7611,7 +7611,7 @@
                 </a:solidFill>
                 <a:latin typeface="Segoe UI"/>
               </a:rPr>
-              <a:t>333</a:t>
+              <a:t>334</a:t>
             </a:r>
           </a:p>
         </p:txBody>
@@ -7645,7 +7645,7 @@
                 </a:solidFill>
                 <a:latin typeface="Segoe UI"/>
               </a:rPr>
-              <a:t>Rs 321,196</a:t>
+              <a:t>Rs 321,876</a:t>
             </a:r>
           </a:p>
         </p:txBody>
@@ -7679,7 +7679,7 @@
                 </a:solidFill>
                 <a:latin typeface="Segoe UI"/>
               </a:rPr>
-              <a:t>Rs 142,893</a:t>
+              <a:t>Rs 143,452</a:t>
             </a:r>
           </a:p>
         </p:txBody>
@@ -7713,7 +7713,7 @@
                 </a:solidFill>
                 <a:latin typeface="Segoe UI"/>
               </a:rPr>
-              <a:t>+80.1%</a:t>
+              <a:t>+80.4%</a:t>
             </a:r>
           </a:p>
         </p:txBody>
@@ -7883,7 +7883,7 @@
                 </a:solidFill>
                 <a:latin typeface="Segoe UI"/>
               </a:rPr>
-              <a:t>207</a:t>
+              <a:t>203</a:t>
             </a:r>
           </a:p>
         </p:txBody>
@@ -7917,7 +7917,7 @@
                 </a:solidFill>
                 <a:latin typeface="Segoe UI"/>
               </a:rPr>
-              <a:t>Rs 159,914</a:t>
+              <a:t>Rs 156,480</a:t>
             </a:r>
           </a:p>
         </p:txBody>
@@ -7951,7 +7951,7 @@
                 </a:solidFill>
                 <a:latin typeface="Segoe UI"/>
               </a:rPr>
-              <a:t>Rs -187,054</a:t>
+              <a:t>Rs -190,722</a:t>
             </a:r>
           </a:p>
         </p:txBody>
@@ -7985,7 +7985,7 @@
                 </a:solidFill>
                 <a:latin typeface="Segoe UI"/>
               </a:rPr>
-              <a:t>-53.9%</a:t>
+              <a:t>-54.9%</a:t>
             </a:r>
           </a:p>
         </p:txBody>
@@ -8155,7 +8155,7 @@
                 </a:solidFill>
                 <a:latin typeface="Segoe UI"/>
               </a:rPr>
-              <a:t>1,102</a:t>
+              <a:t>1,087</a:t>
             </a:r>
           </a:p>
         </p:txBody>
@@ -8189,7 +8189,7 @@
                 </a:solidFill>
                 <a:latin typeface="Segoe UI"/>
               </a:rPr>
-              <a:t>Rs 88,184</a:t>
+              <a:t>Rs 86,968</a:t>
             </a:r>
           </a:p>
         </p:txBody>
@@ -8223,7 +8223,7 @@
                 </a:solidFill>
                 <a:latin typeface="Segoe UI"/>
               </a:rPr>
-              <a:t>Rs -23,816</a:t>
+              <a:t>Rs -25,032</a:t>
             </a:r>
           </a:p>
         </p:txBody>
@@ -8257,7 +8257,7 @@
                 </a:solidFill>
                 <a:latin typeface="Segoe UI"/>
               </a:rPr>
-              <a:t>-21.3%</a:t>
+              <a:t>-22.4%</a:t>
             </a:r>
           </a:p>
         </p:txBody>
@@ -8287,11 +8287,11 @@
             <a:r>
               <a:rPr sz="1000" b="0">
                 <a:solidFill>
-                  <a:srgbClr val="22C55E"/>
-                </a:solidFill>
-                <a:latin typeface="Segoe UI"/>
-              </a:rPr>
-              <a:t>+1.8%</a:t>
+                  <a:srgbClr val="EF4444"/>
+                </a:solidFill>
+                <a:latin typeface="Segoe UI"/>
+              </a:rPr>
+              <a:t>-0.9%</a:t>
             </a:r>
           </a:p>
         </p:txBody>
@@ -8427,7 +8427,7 @@
                 </a:solidFill>
                 <a:latin typeface="Segoe UI"/>
               </a:rPr>
-              <a:t>1,321</a:t>
+              <a:t>1,323</a:t>
             </a:r>
           </a:p>
         </p:txBody>
@@ -8461,7 +8461,7 @@
                 </a:solidFill>
                 <a:latin typeface="Segoe UI"/>
               </a:rPr>
-              <a:t>Rs 66,045</a:t>
+              <a:t>Rs 66,155</a:t>
             </a:r>
           </a:p>
         </p:txBody>
@@ -8495,7 +8495,7 @@
                 </a:solidFill>
                 <a:latin typeface="Segoe UI"/>
               </a:rPr>
-              <a:t>Rs -56,455</a:t>
+              <a:t>Rs -56,345</a:t>
             </a:r>
           </a:p>
         </p:txBody>
@@ -8529,7 +8529,7 @@
                 </a:solidFill>
                 <a:latin typeface="Segoe UI"/>
               </a:rPr>
-              <a:t>-46.1%</a:t>
+              <a:t>-46.0%</a:t>
             </a:r>
           </a:p>
         </p:txBody>
@@ -8559,11 +8559,11 @@
             <a:r>
               <a:rPr sz="1000" b="0">
                 <a:solidFill>
-                  <a:srgbClr val="22C55E"/>
-                </a:solidFill>
-                <a:latin typeface="Segoe UI"/>
-              </a:rPr>
-              <a:t>+1.9%</a:t>
+                  <a:srgbClr val="EF4444"/>
+                </a:solidFill>
+                <a:latin typeface="Segoe UI"/>
+              </a:rPr>
+              <a:t>-0.3%</a:t>
             </a:r>
           </a:p>
         </p:txBody>
@@ -8699,7 +8699,7 @@
                 </a:solidFill>
                 <a:latin typeface="Segoe UI"/>
               </a:rPr>
-              <a:t>2,266</a:t>
+              <a:t>2,251</a:t>
             </a:r>
           </a:p>
         </p:txBody>
@@ -8733,7 +8733,7 @@
                 </a:solidFill>
                 <a:latin typeface="Segoe UI"/>
               </a:rPr>
-              <a:t>Rs 56,660</a:t>
+              <a:t>Rs 56,278</a:t>
             </a:r>
           </a:p>
         </p:txBody>
@@ -8767,7 +8767,7 @@
                 </a:solidFill>
                 <a:latin typeface="Segoe UI"/>
               </a:rPr>
-              <a:t>Rs -33,340</a:t>
+              <a:t>Rs -33,722</a:t>
             </a:r>
           </a:p>
         </p:txBody>
@@ -8801,7 +8801,7 @@
                 </a:solidFill>
                 <a:latin typeface="Segoe UI"/>
               </a:rPr>
-              <a:t>-37.0%</a:t>
+              <a:t>-37.5%</a:t>
             </a:r>
           </a:p>
         </p:txBody>
@@ -8831,11 +8831,11 @@
             <a:r>
               <a:rPr sz="1000" b="0">
                 <a:solidFill>
-                  <a:srgbClr val="22C55E"/>
-                </a:solidFill>
-                <a:latin typeface="Segoe UI"/>
-              </a:rPr>
-              <a:t>+3.0%</a:t>
+                  <a:srgbClr val="EF4444"/>
+                </a:solidFill>
+                <a:latin typeface="Segoe UI"/>
+              </a:rPr>
+              <a:t>-0.8%</a:t>
             </a:r>
           </a:p>
         </p:txBody>
@@ -8971,7 +8971,7 @@
                 </a:solidFill>
                 <a:latin typeface="Segoe UI"/>
               </a:rPr>
-              <a:t>818</a:t>
+              <a:t>778</a:t>
             </a:r>
           </a:p>
         </p:txBody>
@@ -9005,7 +9005,7 @@
                 </a:solidFill>
                 <a:latin typeface="Segoe UI"/>
               </a:rPr>
-              <a:t>Rs 49,110</a:t>
+              <a:t>Rs 46,656</a:t>
             </a:r>
           </a:p>
         </p:txBody>
@@ -9039,7 +9039,7 @@
                 </a:solidFill>
                 <a:latin typeface="Segoe UI"/>
               </a:rPr>
-              <a:t>Rs -42,090</a:t>
+              <a:t>Rs -44,544</a:t>
             </a:r>
           </a:p>
         </p:txBody>
@@ -9073,7 +9073,7 @@
                 </a:solidFill>
                 <a:latin typeface="Segoe UI"/>
               </a:rPr>
-              <a:t>-46.1%</a:t>
+              <a:t>-48.8%</a:t>
             </a:r>
           </a:p>
         </p:txBody>
@@ -9103,11 +9103,11 @@
             <a:r>
               <a:rPr sz="1000" b="0">
                 <a:solidFill>
-                  <a:srgbClr val="22C55E"/>
-                </a:solidFill>
-                <a:latin typeface="Segoe UI"/>
-              </a:rPr>
-              <a:t>+1.3%</a:t>
+                  <a:srgbClr val="EF4444"/>
+                </a:solidFill>
+                <a:latin typeface="Segoe UI"/>
+              </a:rPr>
+              <a:t>-5.1%</a:t>
             </a:r>
           </a:p>
         </p:txBody>
@@ -9141,7 +9141,7 @@
                 </a:solidFill>
                 <a:latin typeface="Segoe UI"/>
               </a:rPr>
-              <a:t>Total Rs 1,732,595 | P&amp;L Rs -8,330 (-0.5%) | Sharpe -0.61 | Vol 17.93% | VaR95 -1.9%/day</a:t>
+              <a:t>Total Rs 1,743,260 | P&amp;L Rs 1,441 (+0.1%) | Sharpe -0.72 | Vol 17.98% | VaR95 -1.9%/day</a:t>
             </a:r>
           </a:p>
         </p:txBody>

--- a/docs/pmr_daily.pptx
+++ b/docs/pmr_daily.pptx
@@ -3197,7 +3197,7 @@
                 </a:solidFill>
                 <a:latin typeface="Segoe UI"/>
               </a:rPr>
-              <a:t>Monday, 20 Jul 2026 18:25 SGT</a:t>
+              <a:t>Tuesday, 21 Jul 2026 15:57 SGT</a:t>
             </a:r>
           </a:p>
         </p:txBody>
@@ -3265,7 +3265,7 @@
                 </a:solidFill>
                 <a:latin typeface="Segoe UI"/>
               </a:rPr>
-              <a:t>RAG 15R / 15A / 16G   |   50.0% above 200DMA   |   Portfolio Rs 1,743,260 (+0.1%)</a:t>
+              <a:t>RAG 15R / 15A / 16G   |   52.2% above 200DMA   |   Portfolio Rs 1,751,638 (+0.8%)</a:t>
             </a:r>
           </a:p>
         </p:txBody>
@@ -3529,7 +3529,7 @@
                 </a:solidFill>
                 <a:latin typeface="Segoe UI"/>
               </a:rPr>
-              <a:t>+19.1%</a:t>
+              <a:t>+23.2%</a:t>
             </a:r>
           </a:p>
         </p:txBody>
@@ -3655,7 +3655,7 @@
                 </a:solidFill>
                 <a:latin typeface="Segoe UI"/>
               </a:rPr>
-              <a:t>+17.1%</a:t>
+              <a:t>+18.1%</a:t>
             </a:r>
           </a:p>
         </p:txBody>
@@ -3713,7 +3713,7 @@
                 </a:solidFill>
                 <a:latin typeface="Segoe UI"/>
               </a:rPr>
-              <a:t>Apple</a:t>
+              <a:t>Bitcoin</a:t>
             </a:r>
           </a:p>
         </p:txBody>
@@ -3743,11 +3743,11 @@
             <a:r>
               <a:rPr sz="900" b="0">
                 <a:solidFill>
-                  <a:srgbClr val="22C55E"/>
-                </a:solidFill>
-                <a:latin typeface="Segoe UI"/>
-              </a:rPr>
-              <a:t>AAPL · GREEN</a:t>
+                  <a:srgbClr val="EF4444"/>
+                </a:solidFill>
+                <a:latin typeface="Segoe UI"/>
+              </a:rPr>
+              <a:t>BTC-USD · RED</a:t>
             </a:r>
           </a:p>
         </p:txBody>
@@ -3781,7 +3781,7 @@
                 </a:solidFill>
                 <a:latin typeface="Segoe UI"/>
               </a:rPr>
-              <a:t>+15.3%</a:t>
+              <a:t>+12.9%</a:t>
             </a:r>
           </a:p>
         </p:txBody>
@@ -3839,7 +3839,7 @@
                 </a:solidFill>
                 <a:latin typeface="Segoe UI"/>
               </a:rPr>
-              <a:t>TCS</a:t>
+              <a:t>Apple</a:t>
             </a:r>
           </a:p>
         </p:txBody>
@@ -3869,11 +3869,11 @@
             <a:r>
               <a:rPr sz="900" b="0">
                 <a:solidFill>
-                  <a:srgbClr val="EF4444"/>
-                </a:solidFill>
-                <a:latin typeface="Segoe UI"/>
-              </a:rPr>
-              <a:t>TCS.NS · RED</a:t>
+                  <a:srgbClr val="22C55E"/>
+                </a:solidFill>
+                <a:latin typeface="Segoe UI"/>
+              </a:rPr>
+              <a:t>AAPL · GREEN</a:t>
             </a:r>
           </a:p>
         </p:txBody>
@@ -3907,7 +3907,7 @@
                 </a:solidFill>
                 <a:latin typeface="Segoe UI"/>
               </a:rPr>
-              <a:t>+11.4%</a:t>
+              <a:t>+12.9%</a:t>
             </a:r>
           </a:p>
         </p:txBody>
@@ -4033,7 +4033,7 @@
                 </a:solidFill>
                 <a:latin typeface="Segoe UI"/>
               </a:rPr>
-              <a:t>+10.9%</a:t>
+              <a:t>+10.1%</a:t>
             </a:r>
           </a:p>
         </p:txBody>
@@ -4193,7 +4193,7 @@
                 </a:solidFill>
                 <a:latin typeface="Segoe UI"/>
               </a:rPr>
-              <a:t>-12.7%</a:t>
+              <a:t>-12.5%</a:t>
             </a:r>
           </a:p>
         </p:txBody>
@@ -4251,7 +4251,7 @@
                 </a:solidFill>
                 <a:latin typeface="Segoe UI"/>
               </a:rPr>
-              <a:t>Clean Energy</a:t>
+              <a:t>Tesla</a:t>
             </a:r>
           </a:p>
         </p:txBody>
@@ -4285,7 +4285,7 @@
                 </a:solidFill>
                 <a:latin typeface="Segoe UI"/>
               </a:rPr>
-              <a:t>ICLN · RED</a:t>
+              <a:t>TSLA · RED</a:t>
             </a:r>
           </a:p>
         </p:txBody>
@@ -4319,7 +4319,7 @@
                 </a:solidFill>
                 <a:latin typeface="Segoe UI"/>
               </a:rPr>
-              <a:t>-10.3%</a:t>
+              <a:t>-12.1%</a:t>
             </a:r>
           </a:p>
         </p:txBody>
@@ -4377,7 +4377,7 @@
                 </a:solidFill>
                 <a:latin typeface="Segoe UI"/>
               </a:rPr>
-              <a:t>Tesla</a:t>
+              <a:t>Clean Energy</a:t>
             </a:r>
           </a:p>
         </p:txBody>
@@ -4411,7 +4411,7 @@
                 </a:solidFill>
                 <a:latin typeface="Segoe UI"/>
               </a:rPr>
-              <a:t>TSLA · RED</a:t>
+              <a:t>ICLN · RED</a:t>
             </a:r>
           </a:p>
         </p:txBody>
@@ -4445,7 +4445,7 @@
                 </a:solidFill>
                 <a:latin typeface="Segoe UI"/>
               </a:rPr>
-              <a:t>-9.5%</a:t>
+              <a:t>-11.5%</a:t>
             </a:r>
           </a:p>
         </p:txBody>
@@ -4503,7 +4503,7 @@
                 </a:solidFill>
                 <a:latin typeface="Segoe UI"/>
               </a:rPr>
-              <a:t>Nikkei 225</a:t>
+              <a:t>US Technology</a:t>
             </a:r>
           </a:p>
         </p:txBody>
@@ -4537,7 +4537,7 @@
                 </a:solidFill>
                 <a:latin typeface="Segoe UI"/>
               </a:rPr>
-              <a:t>^N225 · AMBER</a:t>
+              <a:t>XLK · AMBER</a:t>
             </a:r>
           </a:p>
         </p:txBody>
@@ -4571,7 +4571,7 @@
                 </a:solidFill>
                 <a:latin typeface="Segoe UI"/>
               </a:rPr>
-              <a:t>-8.5%</a:t>
+              <a:t>-7.8%</a:t>
             </a:r>
           </a:p>
         </p:txBody>
@@ -4629,7 +4629,7 @@
                 </a:solidFill>
                 <a:latin typeface="Segoe UI"/>
               </a:rPr>
-              <a:t>US Technology</a:t>
+              <a:t>Nasdaq 100</a:t>
             </a:r>
           </a:p>
         </p:txBody>
@@ -4663,7 +4663,7 @@
                 </a:solidFill>
                 <a:latin typeface="Segoe UI"/>
               </a:rPr>
-              <a:t>XLK · AMBER</a:t>
+              <a:t>^NDX · AMBER</a:t>
             </a:r>
           </a:p>
         </p:txBody>
@@ -4697,7 +4697,7 @@
                 </a:solidFill>
                 <a:latin typeface="Segoe UI"/>
               </a:rPr>
-              <a:t>-7.8%</a:t>
+              <a:t>-5.5%</a:t>
             </a:r>
           </a:p>
         </p:txBody>
@@ -4967,7 +4967,7 @@
                 </a:solidFill>
                 <a:latin typeface="Segoe UI"/>
               </a:rPr>
-              <a:t>US Financials</a:t>
+              <a:t>Apple</a:t>
             </a:r>
           </a:p>
         </p:txBody>
@@ -5035,7 +5035,7 @@
                 </a:solidFill>
                 <a:latin typeface="Segoe UI"/>
               </a:rPr>
-              <a:t>86%</a:t>
+              <a:t>95%</a:t>
             </a:r>
           </a:p>
         </p:txBody>
@@ -5069,7 +5069,7 @@
                 </a:solidFill>
                 <a:latin typeface="Segoe UI"/>
               </a:rPr>
-              <a:t>above 200DMA · golden cross (50&gt;200) · MACD bearish</a:t>
+              <a:t>above 200DMA · golden cross (50&gt;200) · MACD bullish</a:t>
             </a:r>
           </a:p>
         </p:txBody>
@@ -5103,7 +5103,7 @@
                 </a:solidFill>
                 <a:latin typeface="Segoe UI"/>
               </a:rPr>
-              <a:t>Russell 2000</a:t>
+              <a:t>US Financials</a:t>
             </a:r>
           </a:p>
         </p:txBody>
@@ -5171,7 +5171,7 @@
                 </a:solidFill>
                 <a:latin typeface="Segoe UI"/>
               </a:rPr>
-              <a:t>84%</a:t>
+              <a:t>86%</a:t>
             </a:r>
           </a:p>
         </p:txBody>
@@ -5239,7 +5239,7 @@
                 </a:solidFill>
                 <a:latin typeface="Segoe UI"/>
               </a:rPr>
-              <a:t>Dow Jones</a:t>
+              <a:t>Copper</a:t>
             </a:r>
           </a:p>
         </p:txBody>
@@ -5307,7 +5307,7 @@
                 </a:solidFill>
                 <a:latin typeface="Segoe UI"/>
               </a:rPr>
-              <a:t>83%</a:t>
+              <a:t>95%</a:t>
             </a:r>
           </a:p>
         </p:txBody>
@@ -5341,7 +5341,7 @@
                 </a:solidFill>
                 <a:latin typeface="Segoe UI"/>
               </a:rPr>
-              <a:t>above 200DMA · golden cross (50&gt;200) · MACD bearish</a:t>
+              <a:t>above 200DMA · golden cross (50&gt;200) · MACD bullish</a:t>
             </a:r>
           </a:p>
         </p:txBody>
@@ -5443,7 +5443,7 @@
                 </a:solidFill>
                 <a:latin typeface="Segoe UI"/>
               </a:rPr>
-              <a:t>82%</a:t>
+              <a:t>83%</a:t>
             </a:r>
           </a:p>
         </p:txBody>
@@ -5511,7 +5511,7 @@
                 </a:solidFill>
                 <a:latin typeface="Segoe UI"/>
               </a:rPr>
-              <a:t>Dollar Index</a:t>
+              <a:t>Russell 2000</a:t>
             </a:r>
           </a:p>
         </p:txBody>
@@ -5647,7 +5647,7 @@
                 </a:solidFill>
                 <a:latin typeface="Segoe UI"/>
               </a:rPr>
-              <a:t>USD/INR</a:t>
+              <a:t>Dollar Index</a:t>
             </a:r>
           </a:p>
         </p:txBody>
@@ -5715,7 +5715,7 @@
                 </a:solidFill>
                 <a:latin typeface="Segoe UI"/>
               </a:rPr>
-              <a:t>80%</a:t>
+              <a:t>81%</a:t>
             </a:r>
           </a:p>
         </p:txBody>
@@ -5749,7 +5749,7 @@
                 </a:solidFill>
                 <a:latin typeface="Segoe UI"/>
               </a:rPr>
-              <a:t>above 200DMA · golden cross (50&gt;200) · MACD bullish</a:t>
+              <a:t>above 200DMA · golden cross (50&gt;200) · MACD bearish</a:t>
             </a:r>
           </a:p>
         </p:txBody>
@@ -5783,7 +5783,7 @@
                 </a:solidFill>
                 <a:latin typeface="Segoe UI"/>
               </a:rPr>
-              <a:t>Copper</a:t>
+              <a:t>Dow Jones</a:t>
             </a:r>
           </a:p>
         </p:txBody>
@@ -5851,7 +5851,7 @@
                 </a:solidFill>
                 <a:latin typeface="Segoe UI"/>
               </a:rPr>
-              <a:t>80%</a:t>
+              <a:t>81%</a:t>
             </a:r>
           </a:p>
         </p:txBody>
@@ -5885,7 +5885,7 @@
                 </a:solidFill>
                 <a:latin typeface="Segoe UI"/>
               </a:rPr>
-              <a:t>above 200DMA · golden cross (50&gt;200) · MACD bullish</a:t>
+              <a:t>above 200DMA · golden cross (50&gt;200) · MACD bearish</a:t>
             </a:r>
           </a:p>
         </p:txBody>
@@ -5919,7 +5919,7 @@
                 </a:solidFill>
                 <a:latin typeface="Segoe UI"/>
               </a:rPr>
-              <a:t>ICICI Bank</a:t>
+              <a:t>US 1-3Y Treasury</a:t>
             </a:r>
           </a:p>
         </p:txBody>
@@ -5953,7 +5953,7 @@
                 </a:solidFill>
                 <a:latin typeface="Segoe UI"/>
               </a:rPr>
-              <a:t>BUY</a:t>
+              <a:t>STRONG BUY</a:t>
             </a:r>
           </a:p>
         </p:txBody>
@@ -5987,7 +5987,7 @@
                 </a:solidFill>
                 <a:latin typeface="Segoe UI"/>
               </a:rPr>
-              <a:t>94%</a:t>
+              <a:t>80%</a:t>
             </a:r>
           </a:p>
         </p:txBody>
@@ -6055,7 +6055,7 @@
                 </a:solidFill>
                 <a:latin typeface="Segoe UI"/>
               </a:rPr>
-              <a:t>Apple</a:t>
+              <a:t>ICICI Bank</a:t>
             </a:r>
           </a:p>
         </p:txBody>
@@ -6259,7 +6259,7 @@
                 </a:solidFill>
                 <a:latin typeface="Segoe UI"/>
               </a:rPr>
-              <a:t>78%</a:t>
+              <a:t>77%</a:t>
             </a:r>
           </a:p>
         </p:txBody>
@@ -6327,7 +6327,7 @@
                 </a:solidFill>
                 <a:latin typeface="Segoe UI"/>
               </a:rPr>
-              <a:t>US 1-3Y Treasury</a:t>
+              <a:t>USD/INR</a:t>
             </a:r>
           </a:p>
         </p:txBody>
@@ -6395,7 +6395,7 @@
                 </a:solidFill>
                 <a:latin typeface="Segoe UI"/>
               </a:rPr>
-              <a:t>80%</a:t>
+              <a:t>67%</a:t>
             </a:r>
           </a:p>
         </p:txBody>
@@ -6531,7 +6531,7 @@
                 </a:solidFill>
                 <a:latin typeface="Segoe UI"/>
               </a:rPr>
-              <a:t>67%</a:t>
+              <a:t>66%</a:t>
             </a:r>
           </a:p>
         </p:txBody>
@@ -6659,7 +6659,7 @@
                 </a:solidFill>
                 <a:latin typeface="Segoe UI"/>
               </a:rPr>
-              <a:t>Base currency INR · USD/INR 96.44</a:t>
+              <a:t>Base currency INR · USD/INR 96.21</a:t>
             </a:r>
           </a:p>
         </p:txBody>
@@ -7067,7 +7067,7 @@
                 </a:solidFill>
                 <a:latin typeface="Segoe UI"/>
               </a:rPr>
-              <a:t>64,351</a:t>
+              <a:t>66,140</a:t>
             </a:r>
           </a:p>
         </p:txBody>
@@ -7101,7 +7101,7 @@
                 </a:solidFill>
                 <a:latin typeface="Segoe UI"/>
               </a:rPr>
-              <a:t>Rs 620,637</a:t>
+              <a:t>Rs 636,369</a:t>
             </a:r>
           </a:p>
         </p:txBody>
@@ -7135,7 +7135,7 @@
                 </a:solidFill>
                 <a:latin typeface="Segoe UI"/>
               </a:rPr>
-              <a:t>Rs 41,967</a:t>
+              <a:t>Rs 59,079</a:t>
             </a:r>
           </a:p>
         </p:txBody>
@@ -7169,7 +7169,7 @@
                 </a:solidFill>
                 <a:latin typeface="Segoe UI"/>
               </a:rPr>
-              <a:t>+7.2%</a:t>
+              <a:t>+10.2%</a:t>
             </a:r>
           </a:p>
         </p:txBody>
@@ -7199,11 +7199,11 @@
             <a:r>
               <a:rPr sz="1000" b="0">
                 <a:solidFill>
-                  <a:srgbClr val="EF4444"/>
-                </a:solidFill>
-                <a:latin typeface="Segoe UI"/>
-              </a:rPr>
-              <a:t>-0.5%</a:t>
+                  <a:srgbClr val="22C55E"/>
+                </a:solidFill>
+                <a:latin typeface="Segoe UI"/>
+              </a:rPr>
+              <a:t>+1.4%</a:t>
             </a:r>
           </a:p>
         </p:txBody>
@@ -7339,7 +7339,7 @@
                 </a:solidFill>
                 <a:latin typeface="Segoe UI"/>
               </a:rPr>
-              <a:t>4,025</a:t>
+              <a:t>4,075</a:t>
             </a:r>
           </a:p>
         </p:txBody>
@@ -7373,7 +7373,7 @@
                 </a:solidFill>
                 <a:latin typeface="Segoe UI"/>
               </a:rPr>
-              <a:t>Rs 388,210</a:t>
+              <a:t>Rs 392,076</a:t>
             </a:r>
           </a:p>
         </p:txBody>
@@ -7407,7 +7407,7 @@
                 </a:solidFill>
                 <a:latin typeface="Segoe UI"/>
               </a:rPr>
-              <a:t>Rs 166,387</a:t>
+              <a:t>Rs 170,782</a:t>
             </a:r>
           </a:p>
         </p:txBody>
@@ -7441,7 +7441,7 @@
                 </a:solidFill>
                 <a:latin typeface="Segoe UI"/>
               </a:rPr>
-              <a:t>+75.0%</a:t>
+              <a:t>+77.2%</a:t>
             </a:r>
           </a:p>
         </p:txBody>
@@ -7475,7 +7475,7 @@
                 </a:solidFill>
                 <a:latin typeface="Segoe UI"/>
               </a:rPr>
-              <a:t>+0.3%</a:t>
+              <a:t>+1.6%</a:t>
             </a:r>
           </a:p>
         </p:txBody>
@@ -7611,7 +7611,7 @@
                 </a:solidFill>
                 <a:latin typeface="Segoe UI"/>
               </a:rPr>
-              <a:t>334</a:t>
+              <a:t>327</a:t>
             </a:r>
           </a:p>
         </p:txBody>
@@ -7645,7 +7645,7 @@
                 </a:solidFill>
                 <a:latin typeface="Segoe UI"/>
               </a:rPr>
-              <a:t>Rs 321,876</a:t>
+              <a:t>Rs 314,229</a:t>
             </a:r>
           </a:p>
         </p:txBody>
@@ -7679,7 +7679,7 @@
                 </a:solidFill>
                 <a:latin typeface="Segoe UI"/>
               </a:rPr>
-              <a:t>Rs 143,452</a:t>
+              <a:t>Rs 136,231</a:t>
             </a:r>
           </a:p>
         </p:txBody>
@@ -7713,7 +7713,7 @@
                 </a:solidFill>
                 <a:latin typeface="Segoe UI"/>
               </a:rPr>
-              <a:t>+80.4%</a:t>
+              <a:t>+76.5%</a:t>
             </a:r>
           </a:p>
         </p:txBody>
@@ -7917,7 +7917,7 @@
                 </a:solidFill>
                 <a:latin typeface="Segoe UI"/>
               </a:rPr>
-              <a:t>Rs 156,480</a:t>
+              <a:t>Rs 156,469</a:t>
             </a:r>
           </a:p>
         </p:txBody>
@@ -7951,7 +7951,7 @@
                 </a:solidFill>
                 <a:latin typeface="Segoe UI"/>
               </a:rPr>
-              <a:t>Rs -190,722</a:t>
+              <a:t>Rs -189,905</a:t>
             </a:r>
           </a:p>
         </p:txBody>
@@ -7985,7 +7985,7 @@
                 </a:solidFill>
                 <a:latin typeface="Segoe UI"/>
               </a:rPr>
-              <a:t>-54.9%</a:t>
+              <a:t>-54.8%</a:t>
             </a:r>
           </a:p>
         </p:txBody>
@@ -8155,7 +8155,7 @@
                 </a:solidFill>
                 <a:latin typeface="Segoe UI"/>
               </a:rPr>
-              <a:t>1,087</a:t>
+              <a:t>1,070</a:t>
             </a:r>
           </a:p>
         </p:txBody>
@@ -8189,7 +8189,7 @@
                 </a:solidFill>
                 <a:latin typeface="Segoe UI"/>
               </a:rPr>
-              <a:t>Rs 86,968</a:t>
+              <a:t>Rs 85,600</a:t>
             </a:r>
           </a:p>
         </p:txBody>
@@ -8223,7 +8223,7 @@
                 </a:solidFill>
                 <a:latin typeface="Segoe UI"/>
               </a:rPr>
-              <a:t>Rs -25,032</a:t>
+              <a:t>Rs -26,400</a:t>
             </a:r>
           </a:p>
         </p:txBody>
@@ -8257,7 +8257,7 @@
                 </a:solidFill>
                 <a:latin typeface="Segoe UI"/>
               </a:rPr>
-              <a:t>-22.4%</a:t>
+              <a:t>-23.6%</a:t>
             </a:r>
           </a:p>
         </p:txBody>
@@ -8291,7 +8291,7 @@
                 </a:solidFill>
                 <a:latin typeface="Segoe UI"/>
               </a:rPr>
-              <a:t>-0.9%</a:t>
+              <a:t>-1.6%</a:t>
             </a:r>
           </a:p>
         </p:txBody>
@@ -8427,7 +8427,7 @@
                 </a:solidFill>
                 <a:latin typeface="Segoe UI"/>
               </a:rPr>
-              <a:t>1,323</a:t>
+              <a:t>1,308</a:t>
             </a:r>
           </a:p>
         </p:txBody>
@@ -8461,7 +8461,7 @@
                 </a:solidFill>
                 <a:latin typeface="Segoe UI"/>
               </a:rPr>
-              <a:t>Rs 66,155</a:t>
+              <a:t>Rs 65,385</a:t>
             </a:r>
           </a:p>
         </p:txBody>
@@ -8495,7 +8495,7 @@
                 </a:solidFill>
                 <a:latin typeface="Segoe UI"/>
               </a:rPr>
-              <a:t>Rs -56,345</a:t>
+              <a:t>Rs -57,115</a:t>
             </a:r>
           </a:p>
         </p:txBody>
@@ -8529,7 +8529,7 @@
                 </a:solidFill>
                 <a:latin typeface="Segoe UI"/>
               </a:rPr>
-              <a:t>-46.0%</a:t>
+              <a:t>-46.6%</a:t>
             </a:r>
           </a:p>
         </p:txBody>
@@ -8563,7 +8563,7 @@
                 </a:solidFill>
                 <a:latin typeface="Segoe UI"/>
               </a:rPr>
-              <a:t>-0.3%</a:t>
+              <a:t>-1.2%</a:t>
             </a:r>
           </a:p>
         </p:txBody>
@@ -8699,7 +8699,7 @@
                 </a:solidFill>
                 <a:latin typeface="Segoe UI"/>
               </a:rPr>
-              <a:t>2,251</a:t>
+              <a:t>2,222</a:t>
             </a:r>
           </a:p>
         </p:txBody>
@@ -8733,7 +8733,7 @@
                 </a:solidFill>
                 <a:latin typeface="Segoe UI"/>
               </a:rPr>
-              <a:t>Rs 56,278</a:t>
+              <a:t>Rs 55,547</a:t>
             </a:r>
           </a:p>
         </p:txBody>
@@ -8767,7 +8767,7 @@
                 </a:solidFill>
                 <a:latin typeface="Segoe UI"/>
               </a:rPr>
-              <a:t>Rs -33,722</a:t>
+              <a:t>Rs -34,453</a:t>
             </a:r>
           </a:p>
         </p:txBody>
@@ -8801,7 +8801,7 @@
                 </a:solidFill>
                 <a:latin typeface="Segoe UI"/>
               </a:rPr>
-              <a:t>-37.5%</a:t>
+              <a:t>-38.3%</a:t>
             </a:r>
           </a:p>
         </p:txBody>
@@ -8835,7 +8835,7 @@
                 </a:solidFill>
                 <a:latin typeface="Segoe UI"/>
               </a:rPr>
-              <a:t>-0.8%</a:t>
+              <a:t>-1.3%</a:t>
             </a:r>
           </a:p>
         </p:txBody>
@@ -8971,7 +8971,7 @@
                 </a:solidFill>
                 <a:latin typeface="Segoe UI"/>
               </a:rPr>
-              <a:t>778</a:t>
+              <a:t>766</a:t>
             </a:r>
           </a:p>
         </p:txBody>
@@ -9005,7 +9005,7 @@
                 </a:solidFill>
                 <a:latin typeface="Segoe UI"/>
               </a:rPr>
-              <a:t>Rs 46,656</a:t>
+              <a:t>Rs 45,963</a:t>
             </a:r>
           </a:p>
         </p:txBody>
@@ -9039,7 +9039,7 @@
                 </a:solidFill>
                 <a:latin typeface="Segoe UI"/>
               </a:rPr>
-              <a:t>Rs -44,544</a:t>
+              <a:t>Rs -45,237</a:t>
             </a:r>
           </a:p>
         </p:txBody>
@@ -9073,7 +9073,7 @@
                 </a:solidFill>
                 <a:latin typeface="Segoe UI"/>
               </a:rPr>
-              <a:t>-48.8%</a:t>
+              <a:t>-49.6%</a:t>
             </a:r>
           </a:p>
         </p:txBody>
@@ -9107,7 +9107,7 @@
                 </a:solidFill>
                 <a:latin typeface="Segoe UI"/>
               </a:rPr>
-              <a:t>-5.1%</a:t>
+              <a:t>-1.5%</a:t>
             </a:r>
           </a:p>
         </p:txBody>
@@ -9141,7 +9141,7 @@
                 </a:solidFill>
                 <a:latin typeface="Segoe UI"/>
               </a:rPr>
-              <a:t>Total Rs 1,743,260 | P&amp;L Rs 1,441 (+0.1%) | Sharpe -0.72 | Vol 17.98% | VaR95 -1.9%/day</a:t>
+              <a:t>Total Rs 1,751,638 | P&amp;L Rs 12,982 (+0.8%) | Sharpe -0.65 | Vol 18.18% | VaR95 -1.9%/day</a:t>
             </a:r>
           </a:p>
         </p:txBody>

--- a/docs/pmr_daily.pptx
+++ b/docs/pmr_daily.pptx
@@ -3197,7 +3197,7 @@
                 </a:solidFill>
                 <a:latin typeface="Segoe UI"/>
               </a:rPr>
-              <a:t>Tuesday, 21 Jul 2026 15:57 SGT</a:t>
+              <a:t>Wednesday, 22 Jul 2026 15:57 SGT</a:t>
             </a:r>
           </a:p>
         </p:txBody>
@@ -3227,11 +3227,11 @@
             <a:r>
               <a:rPr sz="2000" b="1">
                 <a:solidFill>
-                  <a:srgbClr val="F59E0B"/>
-                </a:solidFill>
-                <a:latin typeface="Segoe UI"/>
-              </a:rPr>
-              <a:t>Market tone: MIXED</a:t>
+                  <a:srgbClr val="EF4444"/>
+                </a:solidFill>
+                <a:latin typeface="Segoe UI"/>
+              </a:rPr>
+              <a:t>Market tone: RISK-OFF</a:t>
             </a:r>
           </a:p>
         </p:txBody>
@@ -3265,7 +3265,7 @@
                 </a:solidFill>
                 <a:latin typeface="Segoe UI"/>
               </a:rPr>
-              <a:t>RAG 15R / 15A / 16G   |   52.2% above 200DMA   |   Portfolio Rs 1,751,638 (+0.8%)</a:t>
+              <a:t>RAG 17R / 12A / 17G   |   52.2% above 200DMA   |   Portfolio Rs 1,757,280 (+0.8%)</a:t>
             </a:r>
           </a:p>
         </p:txBody>
@@ -3461,7 +3461,7 @@
                 </a:solidFill>
                 <a:latin typeface="Segoe UI"/>
               </a:rPr>
-              <a:t>Ethereum</a:t>
+              <a:t>Crude Oil WTI</a:t>
             </a:r>
           </a:p>
         </p:txBody>
@@ -3495,7 +3495,7 @@
                 </a:solidFill>
                 <a:latin typeface="Segoe UI"/>
               </a:rPr>
-              <a:t>ETH-USD · RED</a:t>
+              <a:t>CL=F · RED</a:t>
             </a:r>
           </a:p>
         </p:txBody>
@@ -3529,7 +3529,7 @@
                 </a:solidFill>
                 <a:latin typeface="Segoe UI"/>
               </a:rPr>
-              <a:t>+23.2%</a:t>
+              <a:t>+26.1%</a:t>
             </a:r>
           </a:p>
         </p:txBody>
@@ -3587,7 +3587,7 @@
                 </a:solidFill>
                 <a:latin typeface="Segoe UI"/>
               </a:rPr>
-              <a:t>Crude Oil WTI</a:t>
+              <a:t>Ethereum</a:t>
             </a:r>
           </a:p>
         </p:txBody>
@@ -3621,7 +3621,7 @@
                 </a:solidFill>
                 <a:latin typeface="Segoe UI"/>
               </a:rPr>
-              <a:t>CL=F · RED</a:t>
+              <a:t>ETH-USD · RED</a:t>
             </a:r>
           </a:p>
         </p:txBody>
@@ -3655,7 +3655,7 @@
                 </a:solidFill>
                 <a:latin typeface="Segoe UI"/>
               </a:rPr>
-              <a:t>+18.1%</a:t>
+              <a:t>+21.9%</a:t>
             </a:r>
           </a:p>
         </p:txBody>
@@ -3713,7 +3713,7 @@
                 </a:solidFill>
                 <a:latin typeface="Segoe UI"/>
               </a:rPr>
-              <a:t>Bitcoin</a:t>
+              <a:t>Apple</a:t>
             </a:r>
           </a:p>
         </p:txBody>
@@ -3743,11 +3743,11 @@
             <a:r>
               <a:rPr sz="900" b="0">
                 <a:solidFill>
-                  <a:srgbClr val="EF4444"/>
-                </a:solidFill>
-                <a:latin typeface="Segoe UI"/>
-              </a:rPr>
-              <a:t>BTC-USD · RED</a:t>
+                  <a:srgbClr val="22C55E"/>
+                </a:solidFill>
+                <a:latin typeface="Segoe UI"/>
+              </a:rPr>
+              <a:t>AAPL · GREEN</a:t>
             </a:r>
           </a:p>
         </p:txBody>
@@ -3781,7 +3781,7 @@
                 </a:solidFill>
                 <a:latin typeface="Segoe UI"/>
               </a:rPr>
-              <a:t>+12.9%</a:t>
+              <a:t>+13.3%</a:t>
             </a:r>
           </a:p>
         </p:txBody>
@@ -3839,7 +3839,7 @@
                 </a:solidFill>
                 <a:latin typeface="Segoe UI"/>
               </a:rPr>
-              <a:t>Apple</a:t>
+              <a:t>Bitcoin</a:t>
             </a:r>
           </a:p>
         </p:txBody>
@@ -3869,11 +3869,11 @@
             <a:r>
               <a:rPr sz="900" b="0">
                 <a:solidFill>
-                  <a:srgbClr val="22C55E"/>
-                </a:solidFill>
-                <a:latin typeface="Segoe UI"/>
-              </a:rPr>
-              <a:t>AAPL · GREEN</a:t>
+                  <a:srgbClr val="EF4444"/>
+                </a:solidFill>
+                <a:latin typeface="Segoe UI"/>
+              </a:rPr>
+              <a:t>BTC-USD · RED</a:t>
             </a:r>
           </a:p>
         </p:txBody>
@@ -3907,7 +3907,7 @@
                 </a:solidFill>
                 <a:latin typeface="Segoe UI"/>
               </a:rPr>
-              <a:t>+12.9%</a:t>
+              <a:t>+12.4%</a:t>
             </a:r>
           </a:p>
         </p:txBody>
@@ -3965,7 +3965,7 @@
                 </a:solidFill>
                 <a:latin typeface="Segoe UI"/>
               </a:rPr>
-              <a:t>NIFTY IT</a:t>
+              <a:t>US Energy</a:t>
             </a:r>
           </a:p>
         </p:txBody>
@@ -3995,11 +3995,11 @@
             <a:r>
               <a:rPr sz="900" b="0">
                 <a:solidFill>
-                  <a:srgbClr val="EF4444"/>
-                </a:solidFill>
-                <a:latin typeface="Segoe UI"/>
-              </a:rPr>
-              <a:t>^CNXIT · RED</a:t>
+                  <a:srgbClr val="22C55E"/>
+                </a:solidFill>
+                <a:latin typeface="Segoe UI"/>
+              </a:rPr>
+              <a:t>XLE · GREEN</a:t>
             </a:r>
           </a:p>
         </p:txBody>
@@ -4193,7 +4193,7 @@
                 </a:solidFill>
                 <a:latin typeface="Segoe UI"/>
               </a:rPr>
-              <a:t>-12.5%</a:t>
+              <a:t>-11.9%</a:t>
             </a:r>
           </a:p>
         </p:txBody>
@@ -4319,7 +4319,7 @@
                 </a:solidFill>
                 <a:latin typeface="Segoe UI"/>
               </a:rPr>
-              <a:t>-12.1%</a:t>
+              <a:t>-9.9%</a:t>
             </a:r>
           </a:p>
         </p:txBody>
@@ -4445,7 +4445,7 @@
                 </a:solidFill>
                 <a:latin typeface="Segoe UI"/>
               </a:rPr>
-              <a:t>-11.5%</a:t>
+              <a:t>-9.6%</a:t>
             </a:r>
           </a:p>
         </p:txBody>
@@ -4503,7 +4503,7 @@
                 </a:solidFill>
                 <a:latin typeface="Segoe UI"/>
               </a:rPr>
-              <a:t>US Technology</a:t>
+              <a:t>HDFC Bank</a:t>
             </a:r>
           </a:p>
         </p:txBody>
@@ -4533,11 +4533,11 @@
             <a:r>
               <a:rPr sz="900" b="0">
                 <a:solidFill>
-                  <a:srgbClr val="F59E0B"/>
-                </a:solidFill>
-                <a:latin typeface="Segoe UI"/>
-              </a:rPr>
-              <a:t>XLK · AMBER</a:t>
+                  <a:srgbClr val="EF4444"/>
+                </a:solidFill>
+                <a:latin typeface="Segoe UI"/>
+              </a:rPr>
+              <a:t>HDFCBANK.NS · RED</a:t>
             </a:r>
           </a:p>
         </p:txBody>
@@ -4571,7 +4571,7 @@
                 </a:solidFill>
                 <a:latin typeface="Segoe UI"/>
               </a:rPr>
-              <a:t>-7.8%</a:t>
+              <a:t>-5.8%</a:t>
             </a:r>
           </a:p>
         </p:txBody>
@@ -4629,7 +4629,7 @@
                 </a:solidFill>
                 <a:latin typeface="Segoe UI"/>
               </a:rPr>
-              <a:t>Nasdaq 100</a:t>
+              <a:t>Nikkei 225</a:t>
             </a:r>
           </a:p>
         </p:txBody>
@@ -4663,7 +4663,7 @@
                 </a:solidFill>
                 <a:latin typeface="Segoe UI"/>
               </a:rPr>
-              <a:t>^NDX · AMBER</a:t>
+              <a:t>^N225 · AMBER</a:t>
             </a:r>
           </a:p>
         </p:txBody>
@@ -4697,7 +4697,7 @@
                 </a:solidFill>
                 <a:latin typeface="Segoe UI"/>
               </a:rPr>
-              <a:t>-5.5%</a:t>
+              <a:t>-5.6%</a:t>
             </a:r>
           </a:p>
         </p:txBody>
@@ -4967,7 +4967,7 @@
                 </a:solidFill>
                 <a:latin typeface="Segoe UI"/>
               </a:rPr>
-              <a:t>Apple</a:t>
+              <a:t>ICICI Bank</a:t>
             </a:r>
           </a:p>
         </p:txBody>
@@ -5103,7 +5103,7 @@
                 </a:solidFill>
                 <a:latin typeface="Segoe UI"/>
               </a:rPr>
-              <a:t>US Financials</a:t>
+              <a:t>Apple</a:t>
             </a:r>
           </a:p>
         </p:txBody>
@@ -5171,7 +5171,7 @@
                 </a:solidFill>
                 <a:latin typeface="Segoe UI"/>
               </a:rPr>
-              <a:t>86%</a:t>
+              <a:t>95%</a:t>
             </a:r>
           </a:p>
         </p:txBody>
@@ -5205,7 +5205,7 @@
                 </a:solidFill>
                 <a:latin typeface="Segoe UI"/>
               </a:rPr>
-              <a:t>above 200DMA · golden cross (50&gt;200) · MACD bearish</a:t>
+              <a:t>above 200DMA · golden cross (50&gt;200) · MACD bullish</a:t>
             </a:r>
           </a:p>
         </p:txBody>
@@ -5239,7 +5239,7 @@
                 </a:solidFill>
                 <a:latin typeface="Segoe UI"/>
               </a:rPr>
-              <a:t>Copper</a:t>
+              <a:t>US Financials</a:t>
             </a:r>
           </a:p>
         </p:txBody>
@@ -5307,7 +5307,7 @@
                 </a:solidFill>
                 <a:latin typeface="Segoe UI"/>
               </a:rPr>
-              <a:t>95%</a:t>
+              <a:t>85%</a:t>
             </a:r>
           </a:p>
         </p:txBody>
@@ -5341,7 +5341,7 @@
                 </a:solidFill>
                 <a:latin typeface="Segoe UI"/>
               </a:rPr>
-              <a:t>above 200DMA · golden cross (50&gt;200) · MACD bullish</a:t>
+              <a:t>above 200DMA · golden cross (50&gt;200) · MACD bearish</a:t>
             </a:r>
           </a:p>
         </p:txBody>
@@ -5375,7 +5375,7 @@
                 </a:solidFill>
                 <a:latin typeface="Segoe UI"/>
               </a:rPr>
-              <a:t>USD/JPY</a:t>
+              <a:t>Russell 2000</a:t>
             </a:r>
           </a:p>
         </p:txBody>
@@ -5443,7 +5443,7 @@
                 </a:solidFill>
                 <a:latin typeface="Segoe UI"/>
               </a:rPr>
-              <a:t>83%</a:t>
+              <a:t>84%</a:t>
             </a:r>
           </a:p>
         </p:txBody>
@@ -5511,7 +5511,7 @@
                 </a:solidFill>
                 <a:latin typeface="Segoe UI"/>
               </a:rPr>
-              <a:t>Russell 2000</a:t>
+              <a:t>Copper</a:t>
             </a:r>
           </a:p>
         </p:txBody>
@@ -5579,7 +5579,7 @@
                 </a:solidFill>
                 <a:latin typeface="Segoe UI"/>
               </a:rPr>
-              <a:t>81%</a:t>
+              <a:t>95%</a:t>
             </a:r>
           </a:p>
         </p:txBody>
@@ -5613,7 +5613,7 @@
                 </a:solidFill>
                 <a:latin typeface="Segoe UI"/>
               </a:rPr>
-              <a:t>above 200DMA · golden cross (50&gt;200) · MACD bearish</a:t>
+              <a:t>above 200DMA · golden cross (50&gt;200) · MACD bullish</a:t>
             </a:r>
           </a:p>
         </p:txBody>
@@ -5647,7 +5647,7 @@
                 </a:solidFill>
                 <a:latin typeface="Segoe UI"/>
               </a:rPr>
-              <a:t>Dollar Index</a:t>
+              <a:t>Dow Jones</a:t>
             </a:r>
           </a:p>
         </p:txBody>
@@ -5715,7 +5715,7 @@
                 </a:solidFill>
                 <a:latin typeface="Segoe UI"/>
               </a:rPr>
-              <a:t>81%</a:t>
+              <a:t>83%</a:t>
             </a:r>
           </a:p>
         </p:txBody>
@@ -5783,7 +5783,7 @@
                 </a:solidFill>
                 <a:latin typeface="Segoe UI"/>
               </a:rPr>
-              <a:t>Dow Jones</a:t>
+              <a:t>USD/JPY</a:t>
             </a:r>
           </a:p>
         </p:txBody>
@@ -5851,7 +5851,7 @@
                 </a:solidFill>
                 <a:latin typeface="Segoe UI"/>
               </a:rPr>
-              <a:t>81%</a:t>
+              <a:t>82%</a:t>
             </a:r>
           </a:p>
         </p:txBody>
@@ -5919,7 +5919,7 @@
                 </a:solidFill>
                 <a:latin typeface="Segoe UI"/>
               </a:rPr>
-              <a:t>US 1-3Y Treasury</a:t>
+              <a:t>Dollar Index</a:t>
             </a:r>
           </a:p>
         </p:txBody>
@@ -5987,7 +5987,7 @@
                 </a:solidFill>
                 <a:latin typeface="Segoe UI"/>
               </a:rPr>
-              <a:t>80%</a:t>
+              <a:t>81%</a:t>
             </a:r>
           </a:p>
         </p:txBody>
@@ -6021,7 +6021,7 @@
                 </a:solidFill>
                 <a:latin typeface="Segoe UI"/>
               </a:rPr>
-              <a:t>above 200DMA · golden cross (50&gt;200) · MACD bullish</a:t>
+              <a:t>above 200DMA · golden cross (50&gt;200) · MACD bearish</a:t>
             </a:r>
           </a:p>
         </p:txBody>
@@ -6055,7 +6055,7 @@
                 </a:solidFill>
                 <a:latin typeface="Segoe UI"/>
               </a:rPr>
-              <a:t>ICICI Bank</a:t>
+              <a:t>Bharti Airtel</a:t>
             </a:r>
           </a:p>
         </p:txBody>
@@ -6123,7 +6123,7 @@
                 </a:solidFill>
                 <a:latin typeface="Segoe UI"/>
               </a:rPr>
-              <a:t>94%</a:t>
+              <a:t>75%</a:t>
             </a:r>
           </a:p>
         </p:txBody>
@@ -6157,7 +6157,7 @@
                 </a:solidFill>
                 <a:latin typeface="Segoe UI"/>
               </a:rPr>
-              <a:t>above 200DMA · golden cross (50&gt;200) · MACD bullish</a:t>
+              <a:t>above 200DMA · death cross (50&lt;200) · MACD bullish</a:t>
             </a:r>
           </a:p>
         </p:txBody>
@@ -6191,7 +6191,7 @@
                 </a:solidFill>
                 <a:latin typeface="Segoe UI"/>
               </a:rPr>
-              <a:t>NIFTY Bank</a:t>
+              <a:t>S&amp;P 500</a:t>
             </a:r>
           </a:p>
         </p:txBody>
@@ -6259,7 +6259,7 @@
                 </a:solidFill>
                 <a:latin typeface="Segoe UI"/>
               </a:rPr>
-              <a:t>77%</a:t>
+              <a:t>68%</a:t>
             </a:r>
           </a:p>
         </p:txBody>
@@ -6395,7 +6395,7 @@
                 </a:solidFill>
                 <a:latin typeface="Segoe UI"/>
               </a:rPr>
-              <a:t>67%</a:t>
+              <a:t>68%</a:t>
             </a:r>
           </a:p>
         </p:txBody>
@@ -6531,7 +6531,7 @@
                 </a:solidFill>
                 <a:latin typeface="Segoe UI"/>
               </a:rPr>
-              <a:t>66%</a:t>
+              <a:t>67%</a:t>
             </a:r>
           </a:p>
         </p:txBody>
@@ -6659,7 +6659,7 @@
                 </a:solidFill>
                 <a:latin typeface="Segoe UI"/>
               </a:rPr>
-              <a:t>Base currency INR · USD/INR 96.21</a:t>
+              <a:t>Base currency INR · USD/INR 96.52</a:t>
             </a:r>
           </a:p>
         </p:txBody>
@@ -7067,7 +7067,7 @@
                 </a:solidFill>
                 <a:latin typeface="Segoe UI"/>
               </a:rPr>
-              <a:t>66,140</a:t>
+              <a:t>65,808</a:t>
             </a:r>
           </a:p>
         </p:txBody>
@@ -7101,7 +7101,7 @@
                 </a:solidFill>
                 <a:latin typeface="Segoe UI"/>
               </a:rPr>
-              <a:t>Rs 636,369</a:t>
+              <a:t>Rs 635,179</a:t>
             </a:r>
           </a:p>
         </p:txBody>
@@ -7135,7 +7135,7 @@
                 </a:solidFill>
                 <a:latin typeface="Segoe UI"/>
               </a:rPr>
-              <a:t>Rs 59,079</a:t>
+              <a:t>Rs 56,059</a:t>
             </a:r>
           </a:p>
         </p:txBody>
@@ -7169,7 +7169,7 @@
                 </a:solidFill>
                 <a:latin typeface="Segoe UI"/>
               </a:rPr>
-              <a:t>+10.2%</a:t>
+              <a:t>+9.7%</a:t>
             </a:r>
           </a:p>
         </p:txBody>
@@ -7199,11 +7199,11 @@
             <a:r>
               <a:rPr sz="1000" b="0">
                 <a:solidFill>
-                  <a:srgbClr val="22C55E"/>
-                </a:solidFill>
-                <a:latin typeface="Segoe UI"/>
-              </a:rPr>
-              <a:t>+1.4%</a:t>
+                  <a:srgbClr val="EF4444"/>
+                </a:solidFill>
+                <a:latin typeface="Segoe UI"/>
+              </a:rPr>
+              <a:t>-1.1%</a:t>
             </a:r>
           </a:p>
         </p:txBody>
@@ -7339,7 +7339,7 @@
                 </a:solidFill>
                 <a:latin typeface="Segoe UI"/>
               </a:rPr>
-              <a:t>4,075</a:t>
+              <a:t>4,116</a:t>
             </a:r>
           </a:p>
         </p:txBody>
@@ -7373,7 +7373,7 @@
                 </a:solidFill>
                 <a:latin typeface="Segoe UI"/>
               </a:rPr>
-              <a:t>Rs 392,076</a:t>
+              <a:t>Rs 397,247</a:t>
             </a:r>
           </a:p>
         </p:txBody>
@@ -7407,7 +7407,7 @@
                 </a:solidFill>
                 <a:latin typeface="Segoe UI"/>
               </a:rPr>
-              <a:t>Rs 170,782</a:t>
+              <a:t>Rs 175,251</a:t>
             </a:r>
           </a:p>
         </p:txBody>
@@ -7441,7 +7441,7 @@
                 </a:solidFill>
                 <a:latin typeface="Segoe UI"/>
               </a:rPr>
-              <a:t>+77.2%</a:t>
+              <a:t>+78.9%</a:t>
             </a:r>
           </a:p>
         </p:txBody>
@@ -7475,7 +7475,7 @@
                 </a:solidFill>
                 <a:latin typeface="Segoe UI"/>
               </a:rPr>
-              <a:t>+1.6%</a:t>
+              <a:t>+1.1%</a:t>
             </a:r>
           </a:p>
         </p:txBody>
@@ -7611,7 +7611,7 @@
                 </a:solidFill>
                 <a:latin typeface="Segoe UI"/>
               </a:rPr>
-              <a:t>327</a:t>
+              <a:t>328</a:t>
             </a:r>
           </a:p>
         </p:txBody>
@@ -7645,7 +7645,7 @@
                 </a:solidFill>
                 <a:latin typeface="Segoe UI"/>
               </a:rPr>
-              <a:t>Rs 314,229</a:t>
+              <a:t>Rs 316,335</a:t>
             </a:r>
           </a:p>
         </p:txBody>
@@ -7679,7 +7679,7 @@
                 </a:solidFill>
                 <a:latin typeface="Segoe UI"/>
               </a:rPr>
-              <a:t>Rs 136,231</a:t>
+              <a:t>Rs 137,773</a:t>
             </a:r>
           </a:p>
         </p:txBody>
@@ -7713,7 +7713,7 @@
                 </a:solidFill>
                 <a:latin typeface="Segoe UI"/>
               </a:rPr>
-              <a:t>+76.5%</a:t>
+              <a:t>+77.2%</a:t>
             </a:r>
           </a:p>
         </p:txBody>
@@ -7883,7 +7883,7 @@
                 </a:solidFill>
                 <a:latin typeface="Segoe UI"/>
               </a:rPr>
-              <a:t>203</a:t>
+              <a:t>207</a:t>
             </a:r>
           </a:p>
         </p:txBody>
@@ -7917,7 +7917,7 @@
                 </a:solidFill>
                 <a:latin typeface="Segoe UI"/>
               </a:rPr>
-              <a:t>Rs 156,469</a:t>
+              <a:t>Rs 160,061</a:t>
             </a:r>
           </a:p>
         </p:txBody>
@@ -7951,7 +7951,7 @@
                 </a:solidFill>
                 <a:latin typeface="Segoe UI"/>
               </a:rPr>
-              <a:t>Rs -189,905</a:t>
+              <a:t>Rs -187,411</a:t>
             </a:r>
           </a:p>
         </p:txBody>
@@ -7985,7 +7985,7 @@
                 </a:solidFill>
                 <a:latin typeface="Segoe UI"/>
               </a:rPr>
-              <a:t>-54.8%</a:t>
+              <a:t>-53.9%</a:t>
             </a:r>
           </a:p>
         </p:txBody>
@@ -8155,7 +8155,7 @@
                 </a:solidFill>
                 <a:latin typeface="Segoe UI"/>
               </a:rPr>
-              <a:t>1,070</a:t>
+              <a:t>1,047</a:t>
             </a:r>
           </a:p>
         </p:txBody>
@@ -8189,7 +8189,7 @@
                 </a:solidFill>
                 <a:latin typeface="Segoe UI"/>
               </a:rPr>
-              <a:t>Rs 85,600</a:t>
+              <a:t>Rs 83,736</a:t>
             </a:r>
           </a:p>
         </p:txBody>
@@ -8223,7 +8223,7 @@
                 </a:solidFill>
                 <a:latin typeface="Segoe UI"/>
               </a:rPr>
-              <a:t>Rs -26,400</a:t>
+              <a:t>Rs -28,264</a:t>
             </a:r>
           </a:p>
         </p:txBody>
@@ -8257,7 +8257,7 @@
                 </a:solidFill>
                 <a:latin typeface="Segoe UI"/>
               </a:rPr>
-              <a:t>-23.6%</a:t>
+              <a:t>-25.2%</a:t>
             </a:r>
           </a:p>
         </p:txBody>
@@ -8291,7 +8291,7 @@
                 </a:solidFill>
                 <a:latin typeface="Segoe UI"/>
               </a:rPr>
-              <a:t>-1.6%</a:t>
+              <a:t>-2.5%</a:t>
             </a:r>
           </a:p>
         </p:txBody>
@@ -8427,7 +8427,7 @@
                 </a:solidFill>
                 <a:latin typeface="Segoe UI"/>
               </a:rPr>
-              <a:t>1,308</a:t>
+              <a:t>1,289</a:t>
             </a:r>
           </a:p>
         </p:txBody>
@@ -8461,7 +8461,7 @@
                 </a:solidFill>
                 <a:latin typeface="Segoe UI"/>
               </a:rPr>
-              <a:t>Rs 65,385</a:t>
+              <a:t>Rs 64,470</a:t>
             </a:r>
           </a:p>
         </p:txBody>
@@ -8495,7 +8495,7 @@
                 </a:solidFill>
                 <a:latin typeface="Segoe UI"/>
               </a:rPr>
-              <a:t>Rs -57,115</a:t>
+              <a:t>Rs -58,030</a:t>
             </a:r>
           </a:p>
         </p:txBody>
@@ -8529,7 +8529,7 @@
                 </a:solidFill>
                 <a:latin typeface="Segoe UI"/>
               </a:rPr>
-              <a:t>-46.6%</a:t>
+              <a:t>-47.4%</a:t>
             </a:r>
           </a:p>
         </p:txBody>
@@ -8563,7 +8563,7 @@
                 </a:solidFill>
                 <a:latin typeface="Segoe UI"/>
               </a:rPr>
-              <a:t>-1.2%</a:t>
+              <a:t>-1.1%</a:t>
             </a:r>
           </a:p>
         </p:txBody>
@@ -8699,7 +8699,7 @@
                 </a:solidFill>
                 <a:latin typeface="Segoe UI"/>
               </a:rPr>
-              <a:t>2,222</a:t>
+              <a:t>2,205</a:t>
             </a:r>
           </a:p>
         </p:txBody>
@@ -8733,7 +8733,7 @@
                 </a:solidFill>
                 <a:latin typeface="Segoe UI"/>
               </a:rPr>
-              <a:t>Rs 55,547</a:t>
+              <a:t>Rs 55,133</a:t>
             </a:r>
           </a:p>
         </p:txBody>
@@ -8767,7 +8767,7 @@
                 </a:solidFill>
                 <a:latin typeface="Segoe UI"/>
               </a:rPr>
-              <a:t>Rs -34,453</a:t>
+              <a:t>Rs -34,867</a:t>
             </a:r>
           </a:p>
         </p:txBody>
@@ -8801,7 +8801,7 @@
                 </a:solidFill>
                 <a:latin typeface="Segoe UI"/>
               </a:rPr>
-              <a:t>-38.3%</a:t>
+              <a:t>-38.7%</a:t>
             </a:r>
           </a:p>
         </p:txBody>
@@ -8835,7 +8835,7 @@
                 </a:solidFill>
                 <a:latin typeface="Segoe UI"/>
               </a:rPr>
-              <a:t>-1.3%</a:t>
+              <a:t>-0.7%</a:t>
             </a:r>
           </a:p>
         </p:txBody>
@@ -8971,7 +8971,7 @@
                 </a:solidFill>
                 <a:latin typeface="Segoe UI"/>
               </a:rPr>
-              <a:t>766</a:t>
+              <a:t>752</a:t>
             </a:r>
           </a:p>
         </p:txBody>
@@ -9005,7 +9005,7 @@
                 </a:solidFill>
                 <a:latin typeface="Segoe UI"/>
               </a:rPr>
-              <a:t>Rs 45,963</a:t>
+              <a:t>Rs 45,120</a:t>
             </a:r>
           </a:p>
         </p:txBody>
@@ -9039,7 +9039,7 @@
                 </a:solidFill>
                 <a:latin typeface="Segoe UI"/>
               </a:rPr>
-              <a:t>Rs -45,237</a:t>
+              <a:t>Rs -46,080</a:t>
             </a:r>
           </a:p>
         </p:txBody>
@@ -9073,7 +9073,7 @@
                 </a:solidFill>
                 <a:latin typeface="Segoe UI"/>
               </a:rPr>
-              <a:t>-49.6%</a:t>
+              <a:t>-50.5%</a:t>
             </a:r>
           </a:p>
         </p:txBody>
@@ -9107,7 +9107,7 @@
                 </a:solidFill>
                 <a:latin typeface="Segoe UI"/>
               </a:rPr>
-              <a:t>-1.5%</a:t>
+              <a:t>-1.2%</a:t>
             </a:r>
           </a:p>
         </p:txBody>
@@ -9141,7 +9141,7 @@
                 </a:solidFill>
                 <a:latin typeface="Segoe UI"/>
               </a:rPr>
-              <a:t>Total Rs 1,751,638 | P&amp;L Rs 12,982 (+0.8%) | Sharpe -0.65 | Vol 18.18% | VaR95 -1.9%/day</a:t>
+              <a:t>Total Rs 1,757,280 | P&amp;L Rs 14,430 (+0.8%) | Sharpe -0.64 | Vol 18.19% | VaR95 -1.9%/day</a:t>
             </a:r>
           </a:p>
         </p:txBody>

--- a/docs/pmr_daily.pptx
+++ b/docs/pmr_daily.pptx
@@ -3197,7 +3197,7 @@
                 </a:solidFill>
                 <a:latin typeface="Segoe UI"/>
               </a:rPr>
-              <a:t>Wednesday, 22 Jul 2026 15:57 SGT</a:t>
+              <a:t>Thursday, 23 Jul 2026 16:00 SGT</a:t>
             </a:r>
           </a:p>
         </p:txBody>
@@ -3227,11 +3227,11 @@
             <a:r>
               <a:rPr sz="2000" b="1">
                 <a:solidFill>
-                  <a:srgbClr val="EF4444"/>
-                </a:solidFill>
-                <a:latin typeface="Segoe UI"/>
-              </a:rPr>
-              <a:t>Market tone: RISK-OFF</a:t>
+                  <a:srgbClr val="F59E0B"/>
+                </a:solidFill>
+                <a:latin typeface="Segoe UI"/>
+              </a:rPr>
+              <a:t>Market tone: MIXED</a:t>
             </a:r>
           </a:p>
         </p:txBody>
@@ -3265,7 +3265,7 @@
                 </a:solidFill>
                 <a:latin typeface="Segoe UI"/>
               </a:rPr>
-              <a:t>RAG 17R / 12A / 17G   |   52.2% above 200DMA   |   Portfolio Rs 1,757,280 (+0.8%)</a:t>
+              <a:t>RAG 16R / 14A / 16G   |   50.0% above 200DMA   |   Portfolio Rs 1,752,468 (+0.6%)</a:t>
             </a:r>
           </a:p>
         </p:txBody>
@@ -3529,7 +3529,7 @@
                 </a:solidFill>
                 <a:latin typeface="Segoe UI"/>
               </a:rPr>
-              <a:t>+26.1%</a:t>
+              <a:t>+29.0%</a:t>
             </a:r>
           </a:p>
         </p:txBody>
@@ -3655,7 +3655,7 @@
                 </a:solidFill>
                 <a:latin typeface="Segoe UI"/>
               </a:rPr>
-              <a:t>+21.9%</a:t>
+              <a:t>+22.0%</a:t>
             </a:r>
           </a:p>
         </p:txBody>
@@ -3781,7 +3781,7 @@
                 </a:solidFill>
                 <a:latin typeface="Segoe UI"/>
               </a:rPr>
-              <a:t>+13.3%</a:t>
+              <a:t>+12.6%</a:t>
             </a:r>
           </a:p>
         </p:txBody>
@@ -3907,7 +3907,7 @@
                 </a:solidFill>
                 <a:latin typeface="Segoe UI"/>
               </a:rPr>
-              <a:t>+12.4%</a:t>
+              <a:t>+11.7%</a:t>
             </a:r>
           </a:p>
         </p:txBody>
@@ -4033,7 +4033,7 @@
                 </a:solidFill>
                 <a:latin typeface="Segoe UI"/>
               </a:rPr>
-              <a:t>+10.1%</a:t>
+              <a:t>+11.5%</a:t>
             </a:r>
           </a:p>
         </p:txBody>
@@ -4125,7 +4125,7 @@
                 </a:solidFill>
                 <a:latin typeface="Segoe UI"/>
               </a:rPr>
-              <a:t>Natural Gas</a:t>
+              <a:t>Tesla</a:t>
             </a:r>
           </a:p>
         </p:txBody>
@@ -4159,7 +4159,7 @@
                 </a:solidFill>
                 <a:latin typeface="Segoe UI"/>
               </a:rPr>
-              <a:t>NG=F · RED</a:t>
+              <a:t>TSLA · RED</a:t>
             </a:r>
           </a:p>
         </p:txBody>
@@ -4193,7 +4193,7 @@
                 </a:solidFill>
                 <a:latin typeface="Segoe UI"/>
               </a:rPr>
-              <a:t>-11.9%</a:t>
+              <a:t>-11.1%</a:t>
             </a:r>
           </a:p>
         </p:txBody>
@@ -4251,7 +4251,7 @@
                 </a:solidFill>
                 <a:latin typeface="Segoe UI"/>
               </a:rPr>
-              <a:t>Tesla</a:t>
+              <a:t>Natural Gas</a:t>
             </a:r>
           </a:p>
         </p:txBody>
@@ -4285,7 +4285,7 @@
                 </a:solidFill>
                 <a:latin typeface="Segoe UI"/>
               </a:rPr>
-              <a:t>TSLA · RED</a:t>
+              <a:t>NG=F · RED</a:t>
             </a:r>
           </a:p>
         </p:txBody>
@@ -4319,7 +4319,7 @@
                 </a:solidFill>
                 <a:latin typeface="Segoe UI"/>
               </a:rPr>
-              <a:t>-9.9%</a:t>
+              <a:t>-10.1%</a:t>
             </a:r>
           </a:p>
         </p:txBody>
@@ -4445,7 +4445,7 @@
                 </a:solidFill>
                 <a:latin typeface="Segoe UI"/>
               </a:rPr>
-              <a:t>-9.6%</a:t>
+              <a:t>-9.5%</a:t>
             </a:r>
           </a:p>
         </p:txBody>
@@ -4571,7 +4571,7 @@
                 </a:solidFill>
                 <a:latin typeface="Segoe UI"/>
               </a:rPr>
-              <a:t>-5.8%</a:t>
+              <a:t>-6.8%</a:t>
             </a:r>
           </a:p>
         </p:txBody>
@@ -4629,7 +4629,7 @@
                 </a:solidFill>
                 <a:latin typeface="Segoe UI"/>
               </a:rPr>
-              <a:t>Nikkei 225</a:t>
+              <a:t>US Technology</a:t>
             </a:r>
           </a:p>
         </p:txBody>
@@ -4663,7 +4663,7 @@
                 </a:solidFill>
                 <a:latin typeface="Segoe UI"/>
               </a:rPr>
-              <a:t>^N225 · AMBER</a:t>
+              <a:t>XLK · AMBER</a:t>
             </a:r>
           </a:p>
         </p:txBody>
@@ -4697,7 +4697,7 @@
                 </a:solidFill>
                 <a:latin typeface="Segoe UI"/>
               </a:rPr>
-              <a:t>-5.6%</a:t>
+              <a:t>-5.4%</a:t>
             </a:r>
           </a:p>
         </p:txBody>
@@ -5035,7 +5035,7 @@
                 </a:solidFill>
                 <a:latin typeface="Segoe UI"/>
               </a:rPr>
-              <a:t>95%</a:t>
+              <a:t>85%</a:t>
             </a:r>
           </a:p>
         </p:txBody>
@@ -5069,7 +5069,7 @@
                 </a:solidFill>
                 <a:latin typeface="Segoe UI"/>
               </a:rPr>
-              <a:t>above 200DMA · golden cross (50&gt;200) · MACD bullish</a:t>
+              <a:t>above 200DMA · golden cross (50&gt;200) · MACD bearish</a:t>
             </a:r>
           </a:p>
         </p:txBody>
@@ -5103,7 +5103,7 @@
                 </a:solidFill>
                 <a:latin typeface="Segoe UI"/>
               </a:rPr>
-              <a:t>Apple</a:t>
+              <a:t>US Financials</a:t>
             </a:r>
           </a:p>
         </p:txBody>
@@ -5171,7 +5171,7 @@
                 </a:solidFill>
                 <a:latin typeface="Segoe UI"/>
               </a:rPr>
-              <a:t>95%</a:t>
+              <a:t>85%</a:t>
             </a:r>
           </a:p>
         </p:txBody>
@@ -5205,7 +5205,7 @@
                 </a:solidFill>
                 <a:latin typeface="Segoe UI"/>
               </a:rPr>
-              <a:t>above 200DMA · golden cross (50&gt;200) · MACD bullish</a:t>
+              <a:t>above 200DMA · golden cross (50&gt;200) · MACD bearish</a:t>
             </a:r>
           </a:p>
         </p:txBody>
@@ -5239,7 +5239,7 @@
                 </a:solidFill>
                 <a:latin typeface="Segoe UI"/>
               </a:rPr>
-              <a:t>US Financials</a:t>
+              <a:t>Apple</a:t>
             </a:r>
           </a:p>
         </p:txBody>
@@ -5375,7 +5375,7 @@
                 </a:solidFill>
                 <a:latin typeface="Segoe UI"/>
               </a:rPr>
-              <a:t>Russell 2000</a:t>
+              <a:t>Copper</a:t>
             </a:r>
           </a:p>
         </p:txBody>
@@ -5443,7 +5443,7 @@
                 </a:solidFill>
                 <a:latin typeface="Segoe UI"/>
               </a:rPr>
-              <a:t>84%</a:t>
+              <a:t>95%</a:t>
             </a:r>
           </a:p>
         </p:txBody>
@@ -5477,7 +5477,7 @@
                 </a:solidFill>
                 <a:latin typeface="Segoe UI"/>
               </a:rPr>
-              <a:t>above 200DMA · golden cross (50&gt;200) · MACD bearish</a:t>
+              <a:t>above 200DMA · golden cross (50&gt;200) · MACD bullish</a:t>
             </a:r>
           </a:p>
         </p:txBody>
@@ -5511,7 +5511,7 @@
                 </a:solidFill>
                 <a:latin typeface="Segoe UI"/>
               </a:rPr>
-              <a:t>Copper</a:t>
+              <a:t>Dow Jones</a:t>
             </a:r>
           </a:p>
         </p:txBody>
@@ -5579,7 +5579,7 @@
                 </a:solidFill>
                 <a:latin typeface="Segoe UI"/>
               </a:rPr>
-              <a:t>95%</a:t>
+              <a:t>83%</a:t>
             </a:r>
           </a:p>
         </p:txBody>
@@ -5613,7 +5613,7 @@
                 </a:solidFill>
                 <a:latin typeface="Segoe UI"/>
               </a:rPr>
-              <a:t>above 200DMA · golden cross (50&gt;200) · MACD bullish</a:t>
+              <a:t>above 200DMA · golden cross (50&gt;200) · MACD bearish</a:t>
             </a:r>
           </a:p>
         </p:txBody>
@@ -5647,7 +5647,7 @@
                 </a:solidFill>
                 <a:latin typeface="Segoe UI"/>
               </a:rPr>
-              <a:t>Dow Jones</a:t>
+              <a:t>FTSE 100</a:t>
             </a:r>
           </a:p>
         </p:txBody>
@@ -5715,7 +5715,7 @@
                 </a:solidFill>
                 <a:latin typeface="Segoe UI"/>
               </a:rPr>
-              <a:t>83%</a:t>
+              <a:t>82%</a:t>
             </a:r>
           </a:p>
         </p:txBody>
@@ -5749,7 +5749,7 @@
                 </a:solidFill>
                 <a:latin typeface="Segoe UI"/>
               </a:rPr>
-              <a:t>above 200DMA · golden cross (50&gt;200) · MACD bearish</a:t>
+              <a:t>above 200DMA · golden cross (50&gt;200) · MACD bullish</a:t>
             </a:r>
           </a:p>
         </p:txBody>
@@ -5783,7 +5783,7 @@
                 </a:solidFill>
                 <a:latin typeface="Segoe UI"/>
               </a:rPr>
-              <a:t>USD/JPY</a:t>
+              <a:t>Russell 2000</a:t>
             </a:r>
           </a:p>
         </p:txBody>
@@ -5987,7 +5987,7 @@
                 </a:solidFill>
                 <a:latin typeface="Segoe UI"/>
               </a:rPr>
-              <a:t>81%</a:t>
+              <a:t>82%</a:t>
             </a:r>
           </a:p>
         </p:txBody>
@@ -6055,7 +6055,7 @@
                 </a:solidFill>
                 <a:latin typeface="Segoe UI"/>
               </a:rPr>
-              <a:t>Bharti Airtel</a:t>
+              <a:t>USD/JPY</a:t>
             </a:r>
           </a:p>
         </p:txBody>
@@ -6123,7 +6123,7 @@
                 </a:solidFill>
                 <a:latin typeface="Segoe UI"/>
               </a:rPr>
-              <a:t>75%</a:t>
+              <a:t>91%</a:t>
             </a:r>
           </a:p>
         </p:txBody>
@@ -6157,7 +6157,7 @@
                 </a:solidFill>
                 <a:latin typeface="Segoe UI"/>
               </a:rPr>
-              <a:t>above 200DMA · death cross (50&lt;200) · MACD bullish</a:t>
+              <a:t>above 200DMA · golden cross (50&gt;200) · MACD bullish</a:t>
             </a:r>
           </a:p>
         </p:txBody>
@@ -6191,7 +6191,7 @@
                 </a:solidFill>
                 <a:latin typeface="Segoe UI"/>
               </a:rPr>
-              <a:t>S&amp;P 500</a:t>
+              <a:t>US Energy</a:t>
             </a:r>
           </a:p>
         </p:txBody>
@@ -6259,7 +6259,7 @@
                 </a:solidFill>
                 <a:latin typeface="Segoe UI"/>
               </a:rPr>
-              <a:t>68%</a:t>
+              <a:t>89%</a:t>
             </a:r>
           </a:p>
         </p:txBody>
@@ -6293,7 +6293,7 @@
                 </a:solidFill>
                 <a:latin typeface="Segoe UI"/>
               </a:rPr>
-              <a:t>above 200DMA · golden cross (50&gt;200) · MACD bearish</a:t>
+              <a:t>above 200DMA · golden cross (50&gt;200) · MACD bullish</a:t>
             </a:r>
           </a:p>
         </p:txBody>
@@ -6327,7 +6327,7 @@
                 </a:solidFill>
                 <a:latin typeface="Segoe UI"/>
               </a:rPr>
-              <a:t>USD/INR</a:t>
+              <a:t>Bharti Airtel</a:t>
             </a:r>
           </a:p>
         </p:txBody>
@@ -6395,7 +6395,7 @@
                 </a:solidFill>
                 <a:latin typeface="Segoe UI"/>
               </a:rPr>
-              <a:t>68%</a:t>
+              <a:t>75%</a:t>
             </a:r>
           </a:p>
         </p:txBody>
@@ -6429,7 +6429,7 @@
                 </a:solidFill>
                 <a:latin typeface="Segoe UI"/>
               </a:rPr>
-              <a:t>above 200DMA · golden cross (50&gt;200) · MACD bullish</a:t>
+              <a:t>above 200DMA · death cross (50&lt;200) · MACD bullish</a:t>
             </a:r>
           </a:p>
         </p:txBody>
@@ -6463,7 +6463,7 @@
                 </a:solidFill>
                 <a:latin typeface="Segoe UI"/>
               </a:rPr>
-              <a:t>FTSE 100</a:t>
+              <a:t>S&amp;P 500</a:t>
             </a:r>
           </a:p>
         </p:txBody>
@@ -6531,7 +6531,7 @@
                 </a:solidFill>
                 <a:latin typeface="Segoe UI"/>
               </a:rPr>
-              <a:t>67%</a:t>
+              <a:t>69%</a:t>
             </a:r>
           </a:p>
         </p:txBody>
@@ -6659,7 +6659,7 @@
                 </a:solidFill>
                 <a:latin typeface="Segoe UI"/>
               </a:rPr>
-              <a:t>Base currency INR · USD/INR 96.52</a:t>
+              <a:t>Base currency INR · USD/INR 96.53</a:t>
             </a:r>
           </a:p>
         </p:txBody>
@@ -7067,7 +7067,7 @@
                 </a:solidFill>
                 <a:latin typeface="Segoe UI"/>
               </a:rPr>
-              <a:t>65,808</a:t>
+              <a:t>65,393</a:t>
             </a:r>
           </a:p>
         </p:txBody>
@@ -7101,7 +7101,7 @@
                 </a:solidFill>
                 <a:latin typeface="Segoe UI"/>
               </a:rPr>
-              <a:t>Rs 635,179</a:t>
+              <a:t>Rs 631,218</a:t>
             </a:r>
           </a:p>
         </p:txBody>
@@ -7135,7 +7135,7 @@
                 </a:solidFill>
                 <a:latin typeface="Segoe UI"/>
               </a:rPr>
-              <a:t>Rs 56,059</a:t>
+              <a:t>Rs 52,053</a:t>
             </a:r>
           </a:p>
         </p:txBody>
@@ -7169,7 +7169,7 @@
                 </a:solidFill>
                 <a:latin typeface="Segoe UI"/>
               </a:rPr>
-              <a:t>+9.7%</a:t>
+              <a:t>+9.0%</a:t>
             </a:r>
           </a:p>
         </p:txBody>
@@ -7339,7 +7339,7 @@
                 </a:solidFill>
                 <a:latin typeface="Segoe UI"/>
               </a:rPr>
-              <a:t>4,116</a:t>
+              <a:t>4,096</a:t>
             </a:r>
           </a:p>
         </p:txBody>
@@ -7373,7 +7373,7 @@
                 </a:solidFill>
                 <a:latin typeface="Segoe UI"/>
               </a:rPr>
-              <a:t>Rs 397,247</a:t>
+              <a:t>Rs 395,328</a:t>
             </a:r>
           </a:p>
         </p:txBody>
@@ -7407,7 +7407,7 @@
                 </a:solidFill>
                 <a:latin typeface="Segoe UI"/>
               </a:rPr>
-              <a:t>Rs 175,251</a:t>
+              <a:t>Rs 173,315</a:t>
             </a:r>
           </a:p>
         </p:txBody>
@@ -7441,7 +7441,7 @@
                 </a:solidFill>
                 <a:latin typeface="Segoe UI"/>
               </a:rPr>
-              <a:t>+78.9%</a:t>
+              <a:t>+78.1%</a:t>
             </a:r>
           </a:p>
         </p:txBody>
@@ -7471,11 +7471,11 @@
             <a:r>
               <a:rPr sz="1000" b="0">
                 <a:solidFill>
-                  <a:srgbClr val="22C55E"/>
-                </a:solidFill>
-                <a:latin typeface="Segoe UI"/>
-              </a:rPr>
-              <a:t>+1.1%</a:t>
+                  <a:srgbClr val="EF4444"/>
+                </a:solidFill>
+                <a:latin typeface="Segoe UI"/>
+              </a:rPr>
+              <a:t>-1.2%</a:t>
             </a:r>
           </a:p>
         </p:txBody>
@@ -7611,7 +7611,7 @@
                 </a:solidFill>
                 <a:latin typeface="Segoe UI"/>
               </a:rPr>
-              <a:t>328</a:t>
+              <a:t>326</a:t>
             </a:r>
           </a:p>
         </p:txBody>
@@ -7645,7 +7645,7 @@
                 </a:solidFill>
                 <a:latin typeface="Segoe UI"/>
               </a:rPr>
-              <a:t>Rs 316,335</a:t>
+              <a:t>Rs 314,573</a:t>
             </a:r>
           </a:p>
         </p:txBody>
@@ -7679,7 +7679,7 @@
                 </a:solidFill>
                 <a:latin typeface="Segoe UI"/>
               </a:rPr>
-              <a:t>Rs 137,773</a:t>
+              <a:t>Rs 135,998</a:t>
             </a:r>
           </a:p>
         </p:txBody>
@@ -7713,7 +7713,7 @@
                 </a:solidFill>
                 <a:latin typeface="Segoe UI"/>
               </a:rPr>
-              <a:t>+77.2%</a:t>
+              <a:t>+76.2%</a:t>
             </a:r>
           </a:p>
         </p:txBody>
@@ -7883,7 +7883,7 @@
                 </a:solidFill>
                 <a:latin typeface="Segoe UI"/>
               </a:rPr>
-              <a:t>207</a:t>
+              <a:t>212</a:t>
             </a:r>
           </a:p>
         </p:txBody>
@@ -7917,7 +7917,7 @@
                 </a:solidFill>
                 <a:latin typeface="Segoe UI"/>
               </a:rPr>
-              <a:t>Rs 160,061</a:t>
+              <a:t>Rs 163,757</a:t>
             </a:r>
           </a:p>
         </p:txBody>
@@ -7951,7 +7951,7 @@
                 </a:solidFill>
                 <a:latin typeface="Segoe UI"/>
               </a:rPr>
-              <a:t>Rs -187,411</a:t>
+              <a:t>Rs -183,742</a:t>
             </a:r>
           </a:p>
         </p:txBody>
@@ -7985,7 +7985,7 @@
                 </a:solidFill>
                 <a:latin typeface="Segoe UI"/>
               </a:rPr>
-              <a:t>-53.9%</a:t>
+              <a:t>-52.9%</a:t>
             </a:r>
           </a:p>
         </p:txBody>
@@ -8155,7 +8155,7 @@
                 </a:solidFill>
                 <a:latin typeface="Segoe UI"/>
               </a:rPr>
-              <a:t>1,047</a:t>
+              <a:t>1,043</a:t>
             </a:r>
           </a:p>
         </p:txBody>
@@ -8189,7 +8189,7 @@
                 </a:solidFill>
                 <a:latin typeface="Segoe UI"/>
               </a:rPr>
-              <a:t>Rs 83,736</a:t>
+              <a:t>Rs 83,456</a:t>
             </a:r>
           </a:p>
         </p:txBody>
@@ -8223,7 +8223,7 @@
                 </a:solidFill>
                 <a:latin typeface="Segoe UI"/>
               </a:rPr>
-              <a:t>Rs -28,264</a:t>
+              <a:t>Rs -28,544</a:t>
             </a:r>
           </a:p>
         </p:txBody>
@@ -8257,7 +8257,7 @@
                 </a:solidFill>
                 <a:latin typeface="Segoe UI"/>
               </a:rPr>
-              <a:t>-25.2%</a:t>
+              <a:t>-25.5%</a:t>
             </a:r>
           </a:p>
         </p:txBody>
@@ -8291,7 +8291,7 @@
                 </a:solidFill>
                 <a:latin typeface="Segoe UI"/>
               </a:rPr>
-              <a:t>-2.5%</a:t>
+              <a:t>-0.8%</a:t>
             </a:r>
           </a:p>
         </p:txBody>
@@ -8427,7 +8427,7 @@
                 </a:solidFill>
                 <a:latin typeface="Segoe UI"/>
               </a:rPr>
-              <a:t>1,289</a:t>
+              <a:t>1,273</a:t>
             </a:r>
           </a:p>
         </p:txBody>
@@ -8461,7 +8461,7 @@
                 </a:solidFill>
                 <a:latin typeface="Segoe UI"/>
               </a:rPr>
-              <a:t>Rs 64,470</a:t>
+              <a:t>Rs 63,650</a:t>
             </a:r>
           </a:p>
         </p:txBody>
@@ -8495,7 +8495,7 @@
                 </a:solidFill>
                 <a:latin typeface="Segoe UI"/>
               </a:rPr>
-              <a:t>Rs -58,030</a:t>
+              <a:t>Rs -58,850</a:t>
             </a:r>
           </a:p>
         </p:txBody>
@@ -8529,7 +8529,7 @@
                 </a:solidFill>
                 <a:latin typeface="Segoe UI"/>
               </a:rPr>
-              <a:t>-47.4%</a:t>
+              <a:t>-48.0%</a:t>
             </a:r>
           </a:p>
         </p:txBody>
@@ -8563,7 +8563,7 @@
                 </a:solidFill>
                 <a:latin typeface="Segoe UI"/>
               </a:rPr>
-              <a:t>-1.1%</a:t>
+              <a:t>-1.2%</a:t>
             </a:r>
           </a:p>
         </p:txBody>
@@ -8699,7 +8699,7 @@
                 </a:solidFill>
                 <a:latin typeface="Segoe UI"/>
               </a:rPr>
-              <a:t>2,205</a:t>
+              <a:t>2,234</a:t>
             </a:r>
           </a:p>
         </p:txBody>
@@ -8733,7 +8733,7 @@
                 </a:solidFill>
                 <a:latin typeface="Segoe UI"/>
               </a:rPr>
-              <a:t>Rs 55,133</a:t>
+              <a:t>Rs 55,845</a:t>
             </a:r>
           </a:p>
         </p:txBody>
@@ -8767,7 +8767,7 @@
                 </a:solidFill>
                 <a:latin typeface="Segoe UI"/>
               </a:rPr>
-              <a:t>Rs -34,867</a:t>
+              <a:t>Rs -34,155</a:t>
             </a:r>
           </a:p>
         </p:txBody>
@@ -8801,7 +8801,7 @@
                 </a:solidFill>
                 <a:latin typeface="Segoe UI"/>
               </a:rPr>
-              <a:t>-38.7%</a:t>
+              <a:t>-38.0%</a:t>
             </a:r>
           </a:p>
         </p:txBody>
@@ -8831,11 +8831,11 @@
             <a:r>
               <a:rPr sz="1000" b="0">
                 <a:solidFill>
-                  <a:srgbClr val="EF4444"/>
-                </a:solidFill>
-                <a:latin typeface="Segoe UI"/>
-              </a:rPr>
-              <a:t>-0.7%</a:t>
+                  <a:srgbClr val="22C55E"/>
+                </a:solidFill>
+                <a:latin typeface="Segoe UI"/>
+              </a:rPr>
+              <a:t>+1.1%</a:t>
             </a:r>
           </a:p>
         </p:txBody>
@@ -8971,7 +8971,7 @@
                 </a:solidFill>
                 <a:latin typeface="Segoe UI"/>
               </a:rPr>
-              <a:t>752</a:t>
+              <a:t>744</a:t>
             </a:r>
           </a:p>
         </p:txBody>
@@ -9005,7 +9005,7 @@
                 </a:solidFill>
                 <a:latin typeface="Segoe UI"/>
               </a:rPr>
-              <a:t>Rs 45,120</a:t>
+              <a:t>Rs 44,640</a:t>
             </a:r>
           </a:p>
         </p:txBody>
@@ -9039,7 +9039,7 @@
                 </a:solidFill>
                 <a:latin typeface="Segoe UI"/>
               </a:rPr>
-              <a:t>Rs -46,080</a:t>
+              <a:t>Rs -46,560</a:t>
             </a:r>
           </a:p>
         </p:txBody>
@@ -9073,7 +9073,7 @@
                 </a:solidFill>
                 <a:latin typeface="Segoe UI"/>
               </a:rPr>
-              <a:t>-50.5%</a:t>
+              <a:t>-51.0%</a:t>
             </a:r>
           </a:p>
         </p:txBody>
@@ -9141,7 +9141,7 @@
                 </a:solidFill>
                 <a:latin typeface="Segoe UI"/>
               </a:rPr>
-              <a:t>Total Rs 1,757,280 | P&amp;L Rs 14,430 (+0.8%) | Sharpe -0.64 | Vol 18.19% | VaR95 -1.9%/day</a:t>
+              <a:t>Total Rs 1,752,468 | P&amp;L Rs 9,515 (+0.6%) | Sharpe -0.59 | Vol 18.15% | VaR95 -1.9%/day</a:t>
             </a:r>
           </a:p>
         </p:txBody>

--- a/docs/pmr_daily.pptx
+++ b/docs/pmr_daily.pptx
@@ -3197,7 +3197,7 @@
                 </a:solidFill>
                 <a:latin typeface="Segoe UI"/>
               </a:rPr>
-              <a:t>Thursday, 23 Jul 2026 16:00 SGT</a:t>
+              <a:t>Friday, 24 Jul 2026 15:57 SGT</a:t>
             </a:r>
           </a:p>
         </p:txBody>
@@ -3227,11 +3227,11 @@
             <a:r>
               <a:rPr sz="2000" b="1">
                 <a:solidFill>
-                  <a:srgbClr val="F59E0B"/>
-                </a:solidFill>
-                <a:latin typeface="Segoe UI"/>
-              </a:rPr>
-              <a:t>Market tone: MIXED</a:t>
+                  <a:srgbClr val="EF4444"/>
+                </a:solidFill>
+                <a:latin typeface="Segoe UI"/>
+              </a:rPr>
+              <a:t>Market tone: RISK-OFF</a:t>
             </a:r>
           </a:p>
         </p:txBody>
@@ -3265,7 +3265,7 @@
                 </a:solidFill>
                 <a:latin typeface="Segoe UI"/>
               </a:rPr>
-              <a:t>RAG 16R / 14A / 16G   |   50.0% above 200DMA   |   Portfolio Rs 1,752,468 (+0.6%)</a:t>
+              <a:t>RAG 18R / 13A / 15G   |   43.5% above 200DMA   |   Portfolio Rs 1,741,026 (-0.1%)</a:t>
             </a:r>
           </a:p>
         </p:txBody>
@@ -3529,7 +3529,7 @@
                 </a:solidFill>
                 <a:latin typeface="Segoe UI"/>
               </a:rPr>
-              <a:t>+29.0%</a:t>
+              <a:t>+30.3%</a:t>
             </a:r>
           </a:p>
         </p:txBody>
@@ -3655,7 +3655,7 @@
                 </a:solidFill>
                 <a:latin typeface="Segoe UI"/>
               </a:rPr>
-              <a:t>+22.0%</a:t>
+              <a:t>+20.7%</a:t>
             </a:r>
           </a:p>
         </p:txBody>
@@ -3713,7 +3713,7 @@
                 </a:solidFill>
                 <a:latin typeface="Segoe UI"/>
               </a:rPr>
-              <a:t>Apple</a:t>
+              <a:t>US Energy</a:t>
             </a:r>
           </a:p>
         </p:txBody>
@@ -3747,7 +3747,7 @@
                 </a:solidFill>
                 <a:latin typeface="Segoe UI"/>
               </a:rPr>
-              <a:t>AAPL · GREEN</a:t>
+              <a:t>XLE · GREEN</a:t>
             </a:r>
           </a:p>
         </p:txBody>
@@ -3781,7 +3781,7 @@
                 </a:solidFill>
                 <a:latin typeface="Segoe UI"/>
               </a:rPr>
-              <a:t>+12.6%</a:t>
+              <a:t>+11.8%</a:t>
             </a:r>
           </a:p>
         </p:txBody>
@@ -3907,7 +3907,7 @@
                 </a:solidFill>
                 <a:latin typeface="Segoe UI"/>
               </a:rPr>
-              <a:t>+11.7%</a:t>
+              <a:t>+11.8%</a:t>
             </a:r>
           </a:p>
         </p:txBody>
@@ -3965,7 +3965,7 @@
                 </a:solidFill>
                 <a:latin typeface="Segoe UI"/>
               </a:rPr>
-              <a:t>US Energy</a:t>
+              <a:t>TCS</a:t>
             </a:r>
           </a:p>
         </p:txBody>
@@ -3995,11 +3995,11 @@
             <a:r>
               <a:rPr sz="900" b="0">
                 <a:solidFill>
-                  <a:srgbClr val="22C55E"/>
-                </a:solidFill>
-                <a:latin typeface="Segoe UI"/>
-              </a:rPr>
-              <a:t>XLE · GREEN</a:t>
+                  <a:srgbClr val="EF4444"/>
+                </a:solidFill>
+                <a:latin typeface="Segoe UI"/>
+              </a:rPr>
+              <a:t>TCS.NS · RED</a:t>
             </a:r>
           </a:p>
         </p:txBody>
@@ -4033,7 +4033,7 @@
                 </a:solidFill>
                 <a:latin typeface="Segoe UI"/>
               </a:rPr>
-              <a:t>+11.5%</a:t>
+              <a:t>+11.4%</a:t>
             </a:r>
           </a:p>
         </p:txBody>
@@ -4193,7 +4193,7 @@
                 </a:solidFill>
                 <a:latin typeface="Segoe UI"/>
               </a:rPr>
-              <a:t>-11.1%</a:t>
+              <a:t>-24.0%</a:t>
             </a:r>
           </a:p>
         </p:txBody>
@@ -4319,7 +4319,7 @@
                 </a:solidFill>
                 <a:latin typeface="Segoe UI"/>
               </a:rPr>
-              <a:t>-10.1%</a:t>
+              <a:t>-11.2%</a:t>
             </a:r>
           </a:p>
         </p:txBody>
@@ -4377,7 +4377,7 @@
                 </a:solidFill>
                 <a:latin typeface="Segoe UI"/>
               </a:rPr>
-              <a:t>Clean Energy</a:t>
+              <a:t>Alphabet</a:t>
             </a:r>
           </a:p>
         </p:txBody>
@@ -4411,7 +4411,7 @@
                 </a:solidFill>
                 <a:latin typeface="Segoe UI"/>
               </a:rPr>
-              <a:t>ICLN · RED</a:t>
+              <a:t>GOOGL · RED</a:t>
             </a:r>
           </a:p>
         </p:txBody>
@@ -4445,7 +4445,7 @@
                 </a:solidFill>
                 <a:latin typeface="Segoe UI"/>
               </a:rPr>
-              <a:t>-9.5%</a:t>
+              <a:t>-11.1%</a:t>
             </a:r>
           </a:p>
         </p:txBody>
@@ -4503,7 +4503,7 @@
                 </a:solidFill>
                 <a:latin typeface="Segoe UI"/>
               </a:rPr>
-              <a:t>HDFC Bank</a:t>
+              <a:t>Clean Energy</a:t>
             </a:r>
           </a:p>
         </p:txBody>
@@ -4537,7 +4537,7 @@
                 </a:solidFill>
                 <a:latin typeface="Segoe UI"/>
               </a:rPr>
-              <a:t>HDFCBANK.NS · RED</a:t>
+              <a:t>ICLN · RED</a:t>
             </a:r>
           </a:p>
         </p:txBody>
@@ -4571,7 +4571,7 @@
                 </a:solidFill>
                 <a:latin typeface="Segoe UI"/>
               </a:rPr>
-              <a:t>-6.8%</a:t>
+              <a:t>-10.3%</a:t>
             </a:r>
           </a:p>
         </p:txBody>
@@ -4629,7 +4629,7 @@
                 </a:solidFill>
                 <a:latin typeface="Segoe UI"/>
               </a:rPr>
-              <a:t>US Technology</a:t>
+              <a:t>Nikkei 225</a:t>
             </a:r>
           </a:p>
         </p:txBody>
@@ -4663,7 +4663,7 @@
                 </a:solidFill>
                 <a:latin typeface="Segoe UI"/>
               </a:rPr>
-              <a:t>XLK · AMBER</a:t>
+              <a:t>^N225 · AMBER</a:t>
             </a:r>
           </a:p>
         </p:txBody>
@@ -4697,7 +4697,7 @@
                 </a:solidFill>
                 <a:latin typeface="Segoe UI"/>
               </a:rPr>
-              <a:t>-5.4%</a:t>
+              <a:t>-7.8%</a:t>
             </a:r>
           </a:p>
         </p:txBody>
@@ -4837,7 +4837,7 @@
         <p:spPr>
           <a:xfrm>
             <a:off x="457200" y="1188720"/>
-            <a:ext cx="11247120" cy="5513499"/>
+            <a:ext cx="11247120" cy="5544503"/>
           </a:xfrm>
           <a:prstGeom prst="rect">
             <a:avLst/>
@@ -5035,7 +5035,7 @@
                 </a:solidFill>
                 <a:latin typeface="Segoe UI"/>
               </a:rPr>
-              <a:t>85%</a:t>
+              <a:t>86%</a:t>
             </a:r>
           </a:p>
         </p:txBody>
@@ -5307,7 +5307,7 @@
                 </a:solidFill>
                 <a:latin typeface="Segoe UI"/>
               </a:rPr>
-              <a:t>85%</a:t>
+              <a:t>84%</a:t>
             </a:r>
           </a:p>
         </p:txBody>
@@ -5375,7 +5375,7 @@
                 </a:solidFill>
                 <a:latin typeface="Segoe UI"/>
               </a:rPr>
-              <a:t>Copper</a:t>
+              <a:t>Dollar Index</a:t>
             </a:r>
           </a:p>
         </p:txBody>
@@ -5511,7 +5511,7 @@
                 </a:solidFill>
                 <a:latin typeface="Segoe UI"/>
               </a:rPr>
-              <a:t>Dow Jones</a:t>
+              <a:t>USD/INR</a:t>
             </a:r>
           </a:p>
         </p:txBody>
@@ -5579,7 +5579,7 @@
                 </a:solidFill>
                 <a:latin typeface="Segoe UI"/>
               </a:rPr>
-              <a:t>83%</a:t>
+              <a:t>95%</a:t>
             </a:r>
           </a:p>
         </p:txBody>
@@ -5613,7 +5613,7 @@
                 </a:solidFill>
                 <a:latin typeface="Segoe UI"/>
               </a:rPr>
-              <a:t>above 200DMA · golden cross (50&gt;200) · MACD bearish</a:t>
+              <a:t>above 200DMA · golden cross (50&gt;200) · MACD bullish</a:t>
             </a:r>
           </a:p>
         </p:txBody>
@@ -5919,7 +5919,7 @@
                 </a:solidFill>
                 <a:latin typeface="Segoe UI"/>
               </a:rPr>
-              <a:t>Dollar Index</a:t>
+              <a:t>Copper</a:t>
             </a:r>
           </a:p>
         </p:txBody>
@@ -5987,7 +5987,7 @@
                 </a:solidFill>
                 <a:latin typeface="Segoe UI"/>
               </a:rPr>
-              <a:t>82%</a:t>
+              <a:t>94%</a:t>
             </a:r>
           </a:p>
         </p:txBody>
@@ -6021,7 +6021,7 @@
                 </a:solidFill>
                 <a:latin typeface="Segoe UI"/>
               </a:rPr>
-              <a:t>above 200DMA · golden cross (50&gt;200) · MACD bearish</a:t>
+              <a:t>above 200DMA · golden cross (50&gt;200) · MACD bullish</a:t>
             </a:r>
           </a:p>
         </p:txBody>
@@ -6055,7 +6055,7 @@
                 </a:solidFill>
                 <a:latin typeface="Segoe UI"/>
               </a:rPr>
-              <a:t>USD/JPY</a:t>
+              <a:t>Dow Jones</a:t>
             </a:r>
           </a:p>
         </p:txBody>
@@ -6089,7 +6089,7 @@
                 </a:solidFill>
                 <a:latin typeface="Segoe UI"/>
               </a:rPr>
-              <a:t>BUY</a:t>
+              <a:t>STRONG BUY</a:t>
             </a:r>
           </a:p>
         </p:txBody>
@@ -6123,7 +6123,7 @@
                 </a:solidFill>
                 <a:latin typeface="Segoe UI"/>
               </a:rPr>
-              <a:t>91%</a:t>
+              <a:t>82%</a:t>
             </a:r>
           </a:p>
         </p:txBody>
@@ -6157,7 +6157,7 @@
                 </a:solidFill>
                 <a:latin typeface="Segoe UI"/>
               </a:rPr>
-              <a:t>above 200DMA · golden cross (50&gt;200) · MACD bullish</a:t>
+              <a:t>above 200DMA · golden cross (50&gt;200) · MACD bearish</a:t>
             </a:r>
           </a:p>
         </p:txBody>
@@ -6191,7 +6191,7 @@
                 </a:solidFill>
                 <a:latin typeface="Segoe UI"/>
               </a:rPr>
-              <a:t>US Energy</a:t>
+              <a:t>USD/JPY</a:t>
             </a:r>
           </a:p>
         </p:txBody>
@@ -6259,7 +6259,7 @@
                 </a:solidFill>
                 <a:latin typeface="Segoe UI"/>
               </a:rPr>
-              <a:t>89%</a:t>
+              <a:t>92%</a:t>
             </a:r>
           </a:p>
         </p:txBody>
@@ -6327,7 +6327,7 @@
                 </a:solidFill>
                 <a:latin typeface="Segoe UI"/>
               </a:rPr>
-              <a:t>Bharti Airtel</a:t>
+              <a:t>US Energy</a:t>
             </a:r>
           </a:p>
         </p:txBody>
@@ -6395,7 +6395,7 @@
                 </a:solidFill>
                 <a:latin typeface="Segoe UI"/>
               </a:rPr>
-              <a:t>75%</a:t>
+              <a:t>90%</a:t>
             </a:r>
           </a:p>
         </p:txBody>
@@ -6429,7 +6429,7 @@
                 </a:solidFill>
                 <a:latin typeface="Segoe UI"/>
               </a:rPr>
-              <a:t>above 200DMA · death cross (50&lt;200) · MACD bullish</a:t>
+              <a:t>above 200DMA · golden cross (50&gt;200) · MACD bullish</a:t>
             </a:r>
           </a:p>
         </p:txBody>
@@ -6463,7 +6463,7 @@
                 </a:solidFill>
                 <a:latin typeface="Segoe UI"/>
               </a:rPr>
-              <a:t>S&amp;P 500</a:t>
+              <a:t>US 1-3Y Treasury</a:t>
             </a:r>
           </a:p>
         </p:txBody>
@@ -6531,7 +6531,7 @@
                 </a:solidFill>
                 <a:latin typeface="Segoe UI"/>
               </a:rPr>
-              <a:t>69%</a:t>
+              <a:t>80%</a:t>
             </a:r>
           </a:p>
         </p:txBody>
@@ -6659,7 +6659,7 @@
                 </a:solidFill>
                 <a:latin typeface="Segoe UI"/>
               </a:rPr>
-              <a:t>Base currency INR · USD/INR 96.53</a:t>
+              <a:t>Base currency INR · USD/INR 96.47</a:t>
             </a:r>
           </a:p>
         </p:txBody>
@@ -7067,7 +7067,7 @@
                 </a:solidFill>
                 <a:latin typeface="Segoe UI"/>
               </a:rPr>
-              <a:t>65,393</a:t>
+              <a:t>65,454</a:t>
             </a:r>
           </a:p>
         </p:txBody>
@@ -7101,7 +7101,7 @@
                 </a:solidFill>
                 <a:latin typeface="Segoe UI"/>
               </a:rPr>
-              <a:t>Rs 631,218</a:t>
+              <a:t>Rs 631,416</a:t>
             </a:r>
           </a:p>
         </p:txBody>
@@ -7135,7 +7135,7 @@
                 </a:solidFill>
                 <a:latin typeface="Segoe UI"/>
               </a:rPr>
-              <a:t>Rs 52,053</a:t>
+              <a:t>Rs 52,611</a:t>
             </a:r>
           </a:p>
         </p:txBody>
@@ -7169,7 +7169,7 @@
                 </a:solidFill>
                 <a:latin typeface="Segoe UI"/>
               </a:rPr>
-              <a:t>+9.0%</a:t>
+              <a:t>+9.1%</a:t>
             </a:r>
           </a:p>
         </p:txBody>
@@ -7199,11 +7199,11 @@
             <a:r>
               <a:rPr sz="1000" b="0">
                 <a:solidFill>
-                  <a:srgbClr val="EF4444"/>
-                </a:solidFill>
-                <a:latin typeface="Segoe UI"/>
-              </a:rPr>
-              <a:t>-1.1%</a:t>
+                  <a:srgbClr val="22C55E"/>
+                </a:solidFill>
+                <a:latin typeface="Segoe UI"/>
+              </a:rPr>
+              <a:t>+0.6%</a:t>
             </a:r>
           </a:p>
         </p:txBody>
@@ -7339,7 +7339,7 @@
                 </a:solidFill>
                 <a:latin typeface="Segoe UI"/>
               </a:rPr>
-              <a:t>4,096</a:t>
+              <a:t>4,050</a:t>
             </a:r>
           </a:p>
         </p:txBody>
@@ -7373,7 +7373,7 @@
                 </a:solidFill>
                 <a:latin typeface="Segoe UI"/>
               </a:rPr>
-              <a:t>Rs 395,328</a:t>
+              <a:t>Rs 390,703</a:t>
             </a:r>
           </a:p>
         </p:txBody>
@@ -7407,7 +7407,7 @@
                 </a:solidFill>
                 <a:latin typeface="Segoe UI"/>
               </a:rPr>
-              <a:t>Rs 173,315</a:t>
+              <a:t>Rs 168,828</a:t>
             </a:r>
           </a:p>
         </p:txBody>
@@ -7441,7 +7441,7 @@
                 </a:solidFill>
                 <a:latin typeface="Segoe UI"/>
               </a:rPr>
-              <a:t>+78.1%</a:t>
+              <a:t>+76.1%</a:t>
             </a:r>
           </a:p>
         </p:txBody>
@@ -7471,11 +7471,11 @@
             <a:r>
               <a:rPr sz="1000" b="0">
                 <a:solidFill>
-                  <a:srgbClr val="EF4444"/>
-                </a:solidFill>
-                <a:latin typeface="Segoe UI"/>
-              </a:rPr>
-              <a:t>-1.2%</a:t>
+                  <a:srgbClr val="22C55E"/>
+                </a:solidFill>
+                <a:latin typeface="Segoe UI"/>
+              </a:rPr>
+              <a:t>+0.1%</a:t>
             </a:r>
           </a:p>
         </p:txBody>
@@ -7611,7 +7611,7 @@
                 </a:solidFill>
                 <a:latin typeface="Segoe UI"/>
               </a:rPr>
-              <a:t>326</a:t>
+              <a:t>322</a:t>
             </a:r>
           </a:p>
         </p:txBody>
@@ -7645,7 +7645,7 @@
                 </a:solidFill>
                 <a:latin typeface="Segoe UI"/>
               </a:rPr>
-              <a:t>Rs 314,573</a:t>
+              <a:t>Rs 310,297</a:t>
             </a:r>
           </a:p>
         </p:txBody>
@@ -7679,7 +7679,7 @@
                 </a:solidFill>
                 <a:latin typeface="Segoe UI"/>
               </a:rPr>
-              <a:t>Rs 135,998</a:t>
+              <a:t>Rs 131,832</a:t>
             </a:r>
           </a:p>
         </p:txBody>
@@ -7713,7 +7713,7 @@
                 </a:solidFill>
                 <a:latin typeface="Segoe UI"/>
               </a:rPr>
-              <a:t>+76.2%</a:t>
+              <a:t>+73.9%</a:t>
             </a:r>
           </a:p>
         </p:txBody>
@@ -7883,7 +7883,7 @@
                 </a:solidFill>
                 <a:latin typeface="Segoe UI"/>
               </a:rPr>
-              <a:t>212</a:t>
+              <a:t>209</a:t>
             </a:r>
           </a:p>
         </p:txBody>
@@ -7917,7 +7917,7 @@
                 </a:solidFill>
                 <a:latin typeface="Segoe UI"/>
               </a:rPr>
-              <a:t>Rs 163,757</a:t>
+              <a:t>Rs 161,108</a:t>
             </a:r>
           </a:p>
         </p:txBody>
@@ -7951,7 +7951,7 @@
                 </a:solidFill>
                 <a:latin typeface="Segoe UI"/>
               </a:rPr>
-              <a:t>Rs -183,742</a:t>
+              <a:t>Rs -186,175</a:t>
             </a:r>
           </a:p>
         </p:txBody>
@@ -7985,7 +7985,7 @@
                 </a:solidFill>
                 <a:latin typeface="Segoe UI"/>
               </a:rPr>
-              <a:t>-52.9%</a:t>
+              <a:t>-53.6%</a:t>
             </a:r>
           </a:p>
         </p:txBody>
@@ -8155,7 +8155,7 @@
                 </a:solidFill>
                 <a:latin typeface="Segoe UI"/>
               </a:rPr>
-              <a:t>1,043</a:t>
+              <a:t>1,030</a:t>
             </a:r>
           </a:p>
         </p:txBody>
@@ -8189,7 +8189,7 @@
                 </a:solidFill>
                 <a:latin typeface="Segoe UI"/>
               </a:rPr>
-              <a:t>Rs 83,456</a:t>
+              <a:t>Rs 82,384</a:t>
             </a:r>
           </a:p>
         </p:txBody>
@@ -8223,7 +8223,7 @@
                 </a:solidFill>
                 <a:latin typeface="Segoe UI"/>
               </a:rPr>
-              <a:t>Rs -28,544</a:t>
+              <a:t>Rs -29,616</a:t>
             </a:r>
           </a:p>
         </p:txBody>
@@ -8257,7 +8257,7 @@
                 </a:solidFill>
                 <a:latin typeface="Segoe UI"/>
               </a:rPr>
-              <a:t>-25.5%</a:t>
+              <a:t>-26.4%</a:t>
             </a:r>
           </a:p>
         </p:txBody>
@@ -8291,7 +8291,7 @@
                 </a:solidFill>
                 <a:latin typeface="Segoe UI"/>
               </a:rPr>
-              <a:t>-0.8%</a:t>
+              <a:t>-1.7%</a:t>
             </a:r>
           </a:p>
         </p:txBody>
@@ -8427,7 +8427,7 @@
                 </a:solidFill>
                 <a:latin typeface="Segoe UI"/>
               </a:rPr>
-              <a:t>1,273</a:t>
+              <a:t>1,281</a:t>
             </a:r>
           </a:p>
         </p:txBody>
@@ -8461,7 +8461,7 @@
                 </a:solidFill>
                 <a:latin typeface="Segoe UI"/>
               </a:rPr>
-              <a:t>Rs 63,650</a:t>
+              <a:t>Rs 64,050</a:t>
             </a:r>
           </a:p>
         </p:txBody>
@@ -8495,7 +8495,7 @@
                 </a:solidFill>
                 <a:latin typeface="Segoe UI"/>
               </a:rPr>
-              <a:t>Rs -58,850</a:t>
+              <a:t>Rs -58,450</a:t>
             </a:r>
           </a:p>
         </p:txBody>
@@ -8529,7 +8529,7 @@
                 </a:solidFill>
                 <a:latin typeface="Segoe UI"/>
               </a:rPr>
-              <a:t>-48.0%</a:t>
+              <a:t>-47.7%</a:t>
             </a:r>
           </a:p>
         </p:txBody>
@@ -8559,11 +8559,11 @@
             <a:r>
               <a:rPr sz="1000" b="0">
                 <a:solidFill>
-                  <a:srgbClr val="EF4444"/>
-                </a:solidFill>
-                <a:latin typeface="Segoe UI"/>
-              </a:rPr>
-              <a:t>-1.2%</a:t>
+                  <a:srgbClr val="22C55E"/>
+                </a:solidFill>
+                <a:latin typeface="Segoe UI"/>
+              </a:rPr>
+              <a:t>+0.7%</a:t>
             </a:r>
           </a:p>
         </p:txBody>
@@ -8699,7 +8699,7 @@
                 </a:solidFill>
                 <a:latin typeface="Segoe UI"/>
               </a:rPr>
-              <a:t>2,234</a:t>
+              <a:t>2,252</a:t>
             </a:r>
           </a:p>
         </p:txBody>
@@ -8733,7 +8733,7 @@
                 </a:solidFill>
                 <a:latin typeface="Segoe UI"/>
               </a:rPr>
-              <a:t>Rs 55,845</a:t>
+              <a:t>Rs 56,292</a:t>
             </a:r>
           </a:p>
         </p:txBody>
@@ -8767,7 +8767,7 @@
                 </a:solidFill>
                 <a:latin typeface="Segoe UI"/>
               </a:rPr>
-              <a:t>Rs -34,155</a:t>
+              <a:t>Rs -33,708</a:t>
             </a:r>
           </a:p>
         </p:txBody>
@@ -8801,7 +8801,7 @@
                 </a:solidFill>
                 <a:latin typeface="Segoe UI"/>
               </a:rPr>
-              <a:t>-38.0%</a:t>
+              <a:t>-37.5%</a:t>
             </a:r>
           </a:p>
         </p:txBody>
@@ -8835,7 +8835,7 @@
                 </a:solidFill>
                 <a:latin typeface="Segoe UI"/>
               </a:rPr>
-              <a:t>+1.1%</a:t>
+              <a:t>+0.4%</a:t>
             </a:r>
           </a:p>
         </p:txBody>
@@ -8971,7 +8971,7 @@
                 </a:solidFill>
                 <a:latin typeface="Segoe UI"/>
               </a:rPr>
-              <a:t>744</a:t>
+              <a:t>746</a:t>
             </a:r>
           </a:p>
         </p:txBody>
@@ -9005,7 +9005,7 @@
                 </a:solidFill>
                 <a:latin typeface="Segoe UI"/>
               </a:rPr>
-              <a:t>Rs 44,640</a:t>
+              <a:t>Rs 44,775</a:t>
             </a:r>
           </a:p>
         </p:txBody>
@@ -9039,7 +9039,7 @@
                 </a:solidFill>
                 <a:latin typeface="Segoe UI"/>
               </a:rPr>
-              <a:t>Rs -46,560</a:t>
+              <a:t>Rs -46,425</a:t>
             </a:r>
           </a:p>
         </p:txBody>
@@ -9073,7 +9073,7 @@
                 </a:solidFill>
                 <a:latin typeface="Segoe UI"/>
               </a:rPr>
-              <a:t>-51.0%</a:t>
+              <a:t>-50.9%</a:t>
             </a:r>
           </a:p>
         </p:txBody>
@@ -9107,7 +9107,7 @@
                 </a:solidFill>
                 <a:latin typeface="Segoe UI"/>
               </a:rPr>
-              <a:t>-1.2%</a:t>
+              <a:t>-0.1%</a:t>
             </a:r>
           </a:p>
         </p:txBody>
@@ -9141,7 +9141,7 @@
                 </a:solidFill>
                 <a:latin typeface="Segoe UI"/>
               </a:rPr>
-              <a:t>Total Rs 1,752,468 | P&amp;L Rs 9,515 (+0.6%) | Sharpe -0.59 | Vol 18.15% | VaR95 -1.9%/day</a:t>
+              <a:t>Total Rs 1,741,026 | P&amp;L Rs -1,102 (-0.1%) | Sharpe -0.5 | Vol 18.09% | VaR95 -1.87%/day</a:t>
             </a:r>
           </a:p>
         </p:txBody>

--- a/docs/pmr_daily.pptx
+++ b/docs/pmr_daily.pptx
@@ -3197,7 +3197,7 @@
                 </a:solidFill>
                 <a:latin typeface="Segoe UI"/>
               </a:rPr>
-              <a:t>Friday, 24 Jul 2026 15:57 SGT</a:t>
+              <a:t>Monday, 27 Jul 2026 18:58 SGT</a:t>
             </a:r>
           </a:p>
         </p:txBody>
@@ -3265,7 +3265,7 @@
                 </a:solidFill>
                 <a:latin typeface="Segoe UI"/>
               </a:rPr>
-              <a:t>RAG 18R / 13A / 15G   |   43.5% above 200DMA   |   Portfolio Rs 1,741,026 (-0.1%)</a:t>
+              <a:t>RAG 18R / 13A / 15G   |   47.8% above 200DMA   |   Portfolio Rs 1,740,359 (+0.3%)</a:t>
             </a:r>
           </a:p>
         </p:txBody>
@@ -3461,7 +3461,7 @@
                 </a:solidFill>
                 <a:latin typeface="Segoe UI"/>
               </a:rPr>
-              <a:t>Crude Oil WTI</a:t>
+              <a:t>Ethereum</a:t>
             </a:r>
           </a:p>
         </p:txBody>
@@ -3495,7 +3495,7 @@
                 </a:solidFill>
                 <a:latin typeface="Segoe UI"/>
               </a:rPr>
-              <a:t>CL=F · RED</a:t>
+              <a:t>ETH-USD · RED</a:t>
             </a:r>
           </a:p>
         </p:txBody>
@@ -3529,7 +3529,7 @@
                 </a:solidFill>
                 <a:latin typeface="Segoe UI"/>
               </a:rPr>
-              <a:t>+30.3%</a:t>
+              <a:t>+25.2%</a:t>
             </a:r>
           </a:p>
         </p:txBody>
@@ -3587,7 +3587,7 @@
                 </a:solidFill>
                 <a:latin typeface="Segoe UI"/>
               </a:rPr>
-              <a:t>Ethereum</a:t>
+              <a:t>Crude Oil WTI</a:t>
             </a:r>
           </a:p>
         </p:txBody>
@@ -3621,7 +3621,7 @@
                 </a:solidFill>
                 <a:latin typeface="Segoe UI"/>
               </a:rPr>
-              <a:t>ETH-USD · RED</a:t>
+              <a:t>CL=F · RED</a:t>
             </a:r>
           </a:p>
         </p:txBody>
@@ -3655,7 +3655,7 @@
                 </a:solidFill>
                 <a:latin typeface="Segoe UI"/>
               </a:rPr>
-              <a:t>+20.7%</a:t>
+              <a:t>+19.7%</a:t>
             </a:r>
           </a:p>
         </p:txBody>
@@ -3713,7 +3713,7 @@
                 </a:solidFill>
                 <a:latin typeface="Segoe UI"/>
               </a:rPr>
-              <a:t>US Energy</a:t>
+              <a:t>TCS</a:t>
             </a:r>
           </a:p>
         </p:txBody>
@@ -3743,11 +3743,11 @@
             <a:r>
               <a:rPr sz="900" b="0">
                 <a:solidFill>
-                  <a:srgbClr val="22C55E"/>
-                </a:solidFill>
-                <a:latin typeface="Segoe UI"/>
-              </a:rPr>
-              <a:t>XLE · GREEN</a:t>
+                  <a:srgbClr val="EF4444"/>
+                </a:solidFill>
+                <a:latin typeface="Segoe UI"/>
+              </a:rPr>
+              <a:t>TCS.NS · RED</a:t>
             </a:r>
           </a:p>
         </p:txBody>
@@ -3781,7 +3781,7 @@
                 </a:solidFill>
                 <a:latin typeface="Segoe UI"/>
               </a:rPr>
-              <a:t>+11.8%</a:t>
+              <a:t>+13.6%</a:t>
             </a:r>
           </a:p>
         </p:txBody>
@@ -3839,7 +3839,7 @@
                 </a:solidFill>
                 <a:latin typeface="Segoe UI"/>
               </a:rPr>
-              <a:t>Bitcoin</a:t>
+              <a:t>NIFTY IT</a:t>
             </a:r>
           </a:p>
         </p:txBody>
@@ -3873,7 +3873,7 @@
                 </a:solidFill>
                 <a:latin typeface="Segoe UI"/>
               </a:rPr>
-              <a:t>BTC-USD · RED</a:t>
+              <a:t>^CNXIT · RED</a:t>
             </a:r>
           </a:p>
         </p:txBody>
@@ -3907,7 +3907,7 @@
                 </a:solidFill>
                 <a:latin typeface="Segoe UI"/>
               </a:rPr>
-              <a:t>+11.8%</a:t>
+              <a:t>+12.0%</a:t>
             </a:r>
           </a:p>
         </p:txBody>
@@ -3965,7 +3965,7 @@
                 </a:solidFill>
                 <a:latin typeface="Segoe UI"/>
               </a:rPr>
-              <a:t>TCS</a:t>
+              <a:t>US Energy</a:t>
             </a:r>
           </a:p>
         </p:txBody>
@@ -3995,11 +3995,11 @@
             <a:r>
               <a:rPr sz="900" b="0">
                 <a:solidFill>
-                  <a:srgbClr val="EF4444"/>
-                </a:solidFill>
-                <a:latin typeface="Segoe UI"/>
-              </a:rPr>
-              <a:t>TCS.NS · RED</a:t>
+                  <a:srgbClr val="22C55E"/>
+                </a:solidFill>
+                <a:latin typeface="Segoe UI"/>
+              </a:rPr>
+              <a:t>XLE · GREEN</a:t>
             </a:r>
           </a:p>
         </p:txBody>
@@ -4033,7 +4033,7 @@
                 </a:solidFill>
                 <a:latin typeface="Segoe UI"/>
               </a:rPr>
-              <a:t>+11.4%</a:t>
+              <a:t>+11.8%</a:t>
             </a:r>
           </a:p>
         </p:txBody>
@@ -4319,7 +4319,7 @@
                 </a:solidFill>
                 <a:latin typeface="Segoe UI"/>
               </a:rPr>
-              <a:t>-11.2%</a:t>
+              <a:t>-14.8%</a:t>
             </a:r>
           </a:p>
         </p:txBody>
@@ -4697,7 +4697,7 @@
                 </a:solidFill>
                 <a:latin typeface="Segoe UI"/>
               </a:rPr>
-              <a:t>-7.8%</a:t>
+              <a:t>-7.3%</a:t>
             </a:r>
           </a:p>
         </p:txBody>
@@ -5103,7 +5103,7 @@
                 </a:solidFill>
                 <a:latin typeface="Segoe UI"/>
               </a:rPr>
-              <a:t>US Financials</a:t>
+              <a:t>USD/JPY</a:t>
             </a:r>
           </a:p>
         </p:txBody>
@@ -5171,7 +5171,7 @@
                 </a:solidFill>
                 <a:latin typeface="Segoe UI"/>
               </a:rPr>
-              <a:t>85%</a:t>
+              <a:t>95%</a:t>
             </a:r>
           </a:p>
         </p:txBody>
@@ -5205,7 +5205,7 @@
                 </a:solidFill>
                 <a:latin typeface="Segoe UI"/>
               </a:rPr>
-              <a:t>above 200DMA · golden cross (50&gt;200) · MACD bearish</a:t>
+              <a:t>above 200DMA · golden cross (50&gt;200) · MACD bullish</a:t>
             </a:r>
           </a:p>
         </p:txBody>
@@ -5239,7 +5239,7 @@
                 </a:solidFill>
                 <a:latin typeface="Segoe UI"/>
               </a:rPr>
-              <a:t>Apple</a:t>
+              <a:t>US Financials</a:t>
             </a:r>
           </a:p>
         </p:txBody>
@@ -5307,7 +5307,7 @@
                 </a:solidFill>
                 <a:latin typeface="Segoe UI"/>
               </a:rPr>
-              <a:t>84%</a:t>
+              <a:t>85%</a:t>
             </a:r>
           </a:p>
         </p:txBody>
@@ -5375,7 +5375,7 @@
                 </a:solidFill>
                 <a:latin typeface="Segoe UI"/>
               </a:rPr>
-              <a:t>Dollar Index</a:t>
+              <a:t>Apple</a:t>
             </a:r>
           </a:p>
         </p:txBody>
@@ -5443,7 +5443,7 @@
                 </a:solidFill>
                 <a:latin typeface="Segoe UI"/>
               </a:rPr>
-              <a:t>95%</a:t>
+              <a:t>84%</a:t>
             </a:r>
           </a:p>
         </p:txBody>
@@ -5477,7 +5477,7 @@
                 </a:solidFill>
                 <a:latin typeface="Segoe UI"/>
               </a:rPr>
-              <a:t>above 200DMA · golden cross (50&gt;200) · MACD bullish</a:t>
+              <a:t>above 200DMA · golden cross (50&gt;200) · MACD bearish</a:t>
             </a:r>
           </a:p>
         </p:txBody>
@@ -5511,7 +5511,7 @@
                 </a:solidFill>
                 <a:latin typeface="Segoe UI"/>
               </a:rPr>
-              <a:t>USD/INR</a:t>
+              <a:t>FTSE 100</a:t>
             </a:r>
           </a:p>
         </p:txBody>
@@ -5579,7 +5579,7 @@
                 </a:solidFill>
                 <a:latin typeface="Segoe UI"/>
               </a:rPr>
-              <a:t>95%</a:t>
+              <a:t>83%</a:t>
             </a:r>
           </a:p>
         </p:txBody>
@@ -5647,7 +5647,7 @@
                 </a:solidFill>
                 <a:latin typeface="Segoe UI"/>
               </a:rPr>
-              <a:t>FTSE 100</a:t>
+              <a:t>Dollar Index</a:t>
             </a:r>
           </a:p>
         </p:txBody>
@@ -5715,7 +5715,7 @@
                 </a:solidFill>
                 <a:latin typeface="Segoe UI"/>
               </a:rPr>
-              <a:t>82%</a:t>
+              <a:t>95%</a:t>
             </a:r>
           </a:p>
         </p:txBody>
@@ -5783,7 +5783,7 @@
                 </a:solidFill>
                 <a:latin typeface="Segoe UI"/>
               </a:rPr>
-              <a:t>Russell 2000</a:t>
+              <a:t>Copper</a:t>
             </a:r>
           </a:p>
         </p:txBody>
@@ -5851,7 +5851,7 @@
                 </a:solidFill>
                 <a:latin typeface="Segoe UI"/>
               </a:rPr>
-              <a:t>82%</a:t>
+              <a:t>95%</a:t>
             </a:r>
           </a:p>
         </p:txBody>
@@ -5885,7 +5885,7 @@
                 </a:solidFill>
                 <a:latin typeface="Segoe UI"/>
               </a:rPr>
-              <a:t>above 200DMA · golden cross (50&gt;200) · MACD bearish</a:t>
+              <a:t>above 200DMA · golden cross (50&gt;200) · MACD bullish</a:t>
             </a:r>
           </a:p>
         </p:txBody>
@@ -5919,7 +5919,7 @@
                 </a:solidFill>
                 <a:latin typeface="Segoe UI"/>
               </a:rPr>
-              <a:t>Copper</a:t>
+              <a:t>Russell 2000</a:t>
             </a:r>
           </a:p>
         </p:txBody>
@@ -5987,7 +5987,7 @@
                 </a:solidFill>
                 <a:latin typeface="Segoe UI"/>
               </a:rPr>
-              <a:t>94%</a:t>
+              <a:t>81%</a:t>
             </a:r>
           </a:p>
         </p:txBody>
@@ -6021,7 +6021,7 @@
                 </a:solidFill>
                 <a:latin typeface="Segoe UI"/>
               </a:rPr>
-              <a:t>above 200DMA · golden cross (50&gt;200) · MACD bullish</a:t>
+              <a:t>above 200DMA · golden cross (50&gt;200) · MACD bearish</a:t>
             </a:r>
           </a:p>
         </p:txBody>
@@ -6123,7 +6123,7 @@
                 </a:solidFill>
                 <a:latin typeface="Segoe UI"/>
               </a:rPr>
-              <a:t>82%</a:t>
+              <a:t>80%</a:t>
             </a:r>
           </a:p>
         </p:txBody>
@@ -6191,7 +6191,7 @@
                 </a:solidFill>
                 <a:latin typeface="Segoe UI"/>
               </a:rPr>
-              <a:t>USD/JPY</a:t>
+              <a:t>USD/INR</a:t>
             </a:r>
           </a:p>
         </p:txBody>
@@ -6225,7 +6225,7 @@
                 </a:solidFill>
                 <a:latin typeface="Segoe UI"/>
               </a:rPr>
-              <a:t>BUY</a:t>
+              <a:t>STRONG BUY</a:t>
             </a:r>
           </a:p>
         </p:txBody>
@@ -6259,7 +6259,7 @@
                 </a:solidFill>
                 <a:latin typeface="Segoe UI"/>
               </a:rPr>
-              <a:t>92%</a:t>
+              <a:t>80%</a:t>
             </a:r>
           </a:p>
         </p:txBody>
@@ -6293,7 +6293,7 @@
                 </a:solidFill>
                 <a:latin typeface="Segoe UI"/>
               </a:rPr>
-              <a:t>above 200DMA · golden cross (50&gt;200) · MACD bullish</a:t>
+              <a:t>above 200DMA · golden cross (50&gt;200) · MACD bearish</a:t>
             </a:r>
           </a:p>
         </p:txBody>
@@ -6463,7 +6463,7 @@
                 </a:solidFill>
                 <a:latin typeface="Segoe UI"/>
               </a:rPr>
-              <a:t>US 1-3Y Treasury</a:t>
+              <a:t>NIFTY Bank</a:t>
             </a:r>
           </a:p>
         </p:txBody>
@@ -6531,7 +6531,7 @@
                 </a:solidFill>
                 <a:latin typeface="Segoe UI"/>
               </a:rPr>
-              <a:t>80%</a:t>
+              <a:t>74%</a:t>
             </a:r>
           </a:p>
         </p:txBody>
@@ -6659,7 +6659,7 @@
                 </a:solidFill>
                 <a:latin typeface="Segoe UI"/>
               </a:rPr>
-              <a:t>Base currency INR · USD/INR 96.47</a:t>
+              <a:t>Base currency INR · USD/INR 95.9</a:t>
             </a:r>
           </a:p>
         </p:txBody>
@@ -7067,7 +7067,7 @@
                 </a:solidFill>
                 <a:latin typeface="Segoe UI"/>
               </a:rPr>
-              <a:t>65,454</a:t>
+              <a:t>65,281</a:t>
             </a:r>
           </a:p>
         </p:txBody>
@@ -7101,7 +7101,7 @@
                 </a:solidFill>
                 <a:latin typeface="Segoe UI"/>
               </a:rPr>
-              <a:t>Rs 631,416</a:t>
+              <a:t>Rs 626,044</a:t>
             </a:r>
           </a:p>
         </p:txBody>
@@ -7135,7 +7135,7 @@
                 </a:solidFill>
                 <a:latin typeface="Segoe UI"/>
               </a:rPr>
-              <a:t>Rs 52,611</a:t>
+              <a:t>Rs 50,644</a:t>
             </a:r>
           </a:p>
         </p:txBody>
@@ -7169,7 +7169,7 @@
                 </a:solidFill>
                 <a:latin typeface="Segoe UI"/>
               </a:rPr>
-              <a:t>+9.1%</a:t>
+              <a:t>+8.8%</a:t>
             </a:r>
           </a:p>
         </p:txBody>
@@ -7199,11 +7199,11 @@
             <a:r>
               <a:rPr sz="1000" b="0">
                 <a:solidFill>
-                  <a:srgbClr val="22C55E"/>
-                </a:solidFill>
-                <a:latin typeface="Segoe UI"/>
-              </a:rPr>
-              <a:t>+0.6%</a:t>
+                  <a:srgbClr val="EF4444"/>
+                </a:solidFill>
+                <a:latin typeface="Segoe UI"/>
+              </a:rPr>
+              <a:t>-0.1%</a:t>
             </a:r>
           </a:p>
         </p:txBody>
@@ -7339,7 +7339,7 @@
                 </a:solidFill>
                 <a:latin typeface="Segoe UI"/>
               </a:rPr>
-              <a:t>4,050</a:t>
+              <a:t>4,104</a:t>
             </a:r>
           </a:p>
         </p:txBody>
@@ -7373,7 +7373,7 @@
                 </a:solidFill>
                 <a:latin typeface="Segoe UI"/>
               </a:rPr>
-              <a:t>Rs 390,703</a:t>
+              <a:t>Rs 393,583</a:t>
             </a:r>
           </a:p>
         </p:txBody>
@@ -7407,7 +7407,7 @@
                 </a:solidFill>
                 <a:latin typeface="Segoe UI"/>
               </a:rPr>
-              <a:t>Rs 168,828</a:t>
+              <a:t>Rs 173,013</a:t>
             </a:r>
           </a:p>
         </p:txBody>
@@ -7441,7 +7441,7 @@
                 </a:solidFill>
                 <a:latin typeface="Segoe UI"/>
               </a:rPr>
-              <a:t>+76.1%</a:t>
+              <a:t>+78.4%</a:t>
             </a:r>
           </a:p>
         </p:txBody>
@@ -7475,7 +7475,7 @@
                 </a:solidFill>
                 <a:latin typeface="Segoe UI"/>
               </a:rPr>
-              <a:t>+0.1%</a:t>
+              <a:t>+0.9%</a:t>
             </a:r>
           </a:p>
         </p:txBody>
@@ -7645,7 +7645,7 @@
                 </a:solidFill>
                 <a:latin typeface="Segoe UI"/>
               </a:rPr>
-              <a:t>Rs 310,297</a:t>
+              <a:t>Rs 308,472</a:t>
             </a:r>
           </a:p>
         </p:txBody>
@@ -7679,7 +7679,7 @@
                 </a:solidFill>
                 <a:latin typeface="Segoe UI"/>
               </a:rPr>
-              <a:t>Rs 131,832</a:t>
+              <a:t>Rs 131,057</a:t>
             </a:r>
           </a:p>
         </p:txBody>
@@ -7917,7 +7917,7 @@
                 </a:solidFill>
                 <a:latin typeface="Segoe UI"/>
               </a:rPr>
-              <a:t>Rs 161,108</a:t>
+              <a:t>Rs 160,161</a:t>
             </a:r>
           </a:p>
         </p:txBody>
@@ -7951,7 +7951,7 @@
                 </a:solidFill>
                 <a:latin typeface="Segoe UI"/>
               </a:rPr>
-              <a:t>Rs -186,175</a:t>
+              <a:t>Rs -185,079</a:t>
             </a:r>
           </a:p>
         </p:txBody>
@@ -8155,7 +8155,7 @@
                 </a:solidFill>
                 <a:latin typeface="Segoe UI"/>
               </a:rPr>
-              <a:t>1,030</a:t>
+              <a:t>1,079</a:t>
             </a:r>
           </a:p>
         </p:txBody>
@@ -8189,7 +8189,7 @@
                 </a:solidFill>
                 <a:latin typeface="Segoe UI"/>
               </a:rPr>
-              <a:t>Rs 82,384</a:t>
+              <a:t>Rs 86,336</a:t>
             </a:r>
           </a:p>
         </p:txBody>
@@ -8223,7 +8223,7 @@
                 </a:solidFill>
                 <a:latin typeface="Segoe UI"/>
               </a:rPr>
-              <a:t>Rs -29,616</a:t>
+              <a:t>Rs -25,664</a:t>
             </a:r>
           </a:p>
         </p:txBody>
@@ -8257,7 +8257,7 @@
                 </a:solidFill>
                 <a:latin typeface="Segoe UI"/>
               </a:rPr>
-              <a:t>-26.4%</a:t>
+              <a:t>-22.9%</a:t>
             </a:r>
           </a:p>
         </p:txBody>
@@ -8287,11 +8287,11 @@
             <a:r>
               <a:rPr sz="1000" b="0">
                 <a:solidFill>
-                  <a:srgbClr val="EF4444"/>
-                </a:solidFill>
-                <a:latin typeface="Segoe UI"/>
-              </a:rPr>
-              <a:t>-1.7%</a:t>
+                  <a:srgbClr val="22C55E"/>
+                </a:solidFill>
+                <a:latin typeface="Segoe UI"/>
+              </a:rPr>
+              <a:t>+3.7%</a:t>
             </a:r>
           </a:p>
         </p:txBody>
@@ -8427,7 +8427,7 @@
                 </a:solidFill>
                 <a:latin typeface="Segoe UI"/>
               </a:rPr>
-              <a:t>1,281</a:t>
+              <a:t>1,280</a:t>
             </a:r>
           </a:p>
         </p:txBody>
@@ -8461,7 +8461,7 @@
                 </a:solidFill>
                 <a:latin typeface="Segoe UI"/>
               </a:rPr>
-              <a:t>Rs 64,050</a:t>
+              <a:t>Rs 64,000</a:t>
             </a:r>
           </a:p>
         </p:txBody>
@@ -8495,7 +8495,7 @@
                 </a:solidFill>
                 <a:latin typeface="Segoe UI"/>
               </a:rPr>
-              <a:t>Rs -58,450</a:t>
+              <a:t>Rs -58,500</a:t>
             </a:r>
           </a:p>
         </p:txBody>
@@ -8529,7 +8529,7 @@
                 </a:solidFill>
                 <a:latin typeface="Segoe UI"/>
               </a:rPr>
-              <a:t>-47.7%</a:t>
+              <a:t>-47.8%</a:t>
             </a:r>
           </a:p>
         </p:txBody>
@@ -8563,7 +8563,7 @@
                 </a:solidFill>
                 <a:latin typeface="Segoe UI"/>
               </a:rPr>
-              <a:t>+0.7%</a:t>
+              <a:t>+0.2%</a:t>
             </a:r>
           </a:p>
         </p:txBody>
@@ -8699,7 +8699,7 @@
                 </a:solidFill>
                 <a:latin typeface="Segoe UI"/>
               </a:rPr>
-              <a:t>2,252</a:t>
+              <a:t>2,296</a:t>
             </a:r>
           </a:p>
         </p:txBody>
@@ -8733,7 +8733,7 @@
                 </a:solidFill>
                 <a:latin typeface="Segoe UI"/>
               </a:rPr>
-              <a:t>Rs 56,292</a:t>
+              <a:t>Rs 57,390</a:t>
             </a:r>
           </a:p>
         </p:txBody>
@@ -8767,7 +8767,7 @@
                 </a:solidFill>
                 <a:latin typeface="Segoe UI"/>
               </a:rPr>
-              <a:t>Rs -33,708</a:t>
+              <a:t>Rs -32,610</a:t>
             </a:r>
           </a:p>
         </p:txBody>
@@ -8801,7 +8801,7 @@
                 </a:solidFill>
                 <a:latin typeface="Segoe UI"/>
               </a:rPr>
-              <a:t>-37.5%</a:t>
+              <a:t>-36.2%</a:t>
             </a:r>
           </a:p>
         </p:txBody>
@@ -8835,7 +8835,7 @@
                 </a:solidFill>
                 <a:latin typeface="Segoe UI"/>
               </a:rPr>
-              <a:t>+0.4%</a:t>
+              <a:t>+1.8%</a:t>
             </a:r>
           </a:p>
         </p:txBody>
@@ -8971,7 +8971,7 @@
                 </a:solidFill>
                 <a:latin typeface="Segoe UI"/>
               </a:rPr>
-              <a:t>746</a:t>
+              <a:t>740</a:t>
             </a:r>
           </a:p>
         </p:txBody>
@@ -9005,7 +9005,7 @@
                 </a:solidFill>
                 <a:latin typeface="Segoe UI"/>
               </a:rPr>
-              <a:t>Rs 44,775</a:t>
+              <a:t>Rs 44,373</a:t>
             </a:r>
           </a:p>
         </p:txBody>
@@ -9039,7 +9039,7 @@
                 </a:solidFill>
                 <a:latin typeface="Segoe UI"/>
               </a:rPr>
-              <a:t>Rs -46,425</a:t>
+              <a:t>Rs -46,827</a:t>
             </a:r>
           </a:p>
         </p:txBody>
@@ -9073,7 +9073,7 @@
                 </a:solidFill>
                 <a:latin typeface="Segoe UI"/>
               </a:rPr>
-              <a:t>-50.9%</a:t>
+              <a:t>-51.4%</a:t>
             </a:r>
           </a:p>
         </p:txBody>
@@ -9107,7 +9107,7 @@
                 </a:solidFill>
                 <a:latin typeface="Segoe UI"/>
               </a:rPr>
-              <a:t>-0.1%</a:t>
+              <a:t>-0.4%</a:t>
             </a:r>
           </a:p>
         </p:txBody>
@@ -9141,7 +9141,7 @@
                 </a:solidFill>
                 <a:latin typeface="Segoe UI"/>
               </a:rPr>
-              <a:t>Total Rs 1,741,026 | P&amp;L Rs -1,102 (-0.1%) | Sharpe -0.5 | Vol 18.09% | VaR95 -1.87%/day</a:t>
+              <a:t>Total Rs 1,740,359 | P&amp;L Rs 6,034 (+0.3%) | Sharpe -0.39 | Vol 17.96% | VaR95 -1.86%/day</a:t>
             </a:r>
           </a:p>
         </p:txBody>

--- a/docs/pmr_daily.pptx
+++ b/docs/pmr_daily.pptx
@@ -3197,7 +3197,7 @@
                 </a:solidFill>
                 <a:latin typeface="Segoe UI"/>
               </a:rPr>
-              <a:t>Monday, 27 Jul 2026 18:58 SGT</a:t>
+              <a:t>Tuesday, 28 Jul 2026 16:06 SGT</a:t>
             </a:r>
           </a:p>
         </p:txBody>
@@ -3265,7 +3265,7 @@
                 </a:solidFill>
                 <a:latin typeface="Segoe UI"/>
               </a:rPr>
-              <a:t>RAG 18R / 13A / 15G   |   47.8% above 200DMA   |   Portfolio Rs 1,740,359 (+0.3%)</a:t>
+              <a:t>RAG 19R / 12A / 15G   |   45.7% above 200DMA   |   Portfolio Rs 1,725,580 (-0.4%)</a:t>
             </a:r>
           </a:p>
         </p:txBody>
@@ -3529,7 +3529,7 @@
                 </a:solidFill>
                 <a:latin typeface="Segoe UI"/>
               </a:rPr>
-              <a:t>+25.2%</a:t>
+              <a:t>+19.9%</a:t>
             </a:r>
           </a:p>
         </p:txBody>
@@ -3587,7 +3587,7 @@
                 </a:solidFill>
                 <a:latin typeface="Segoe UI"/>
               </a:rPr>
-              <a:t>Crude Oil WTI</a:t>
+              <a:t>TCS</a:t>
             </a:r>
           </a:p>
         </p:txBody>
@@ -3621,7 +3621,7 @@
                 </a:solidFill>
                 <a:latin typeface="Segoe UI"/>
               </a:rPr>
-              <a:t>CL=F · RED</a:t>
+              <a:t>TCS.NS · RED</a:t>
             </a:r>
           </a:p>
         </p:txBody>
@@ -3655,7 +3655,7 @@
                 </a:solidFill>
                 <a:latin typeface="Segoe UI"/>
               </a:rPr>
-              <a:t>+19.7%</a:t>
+              <a:t>+18.8%</a:t>
             </a:r>
           </a:p>
         </p:txBody>
@@ -3713,7 +3713,7 @@
                 </a:solidFill>
                 <a:latin typeface="Segoe UI"/>
               </a:rPr>
-              <a:t>TCS</a:t>
+              <a:t>Apple</a:t>
             </a:r>
           </a:p>
         </p:txBody>
@@ -3743,11 +3743,11 @@
             <a:r>
               <a:rPr sz="900" b="0">
                 <a:solidFill>
-                  <a:srgbClr val="EF4444"/>
-                </a:solidFill>
-                <a:latin typeface="Segoe UI"/>
-              </a:rPr>
-              <a:t>TCS.NS · RED</a:t>
+                  <a:srgbClr val="22C55E"/>
+                </a:solidFill>
+                <a:latin typeface="Segoe UI"/>
+              </a:rPr>
+              <a:t>AAPL · GREEN</a:t>
             </a:r>
           </a:p>
         </p:txBody>
@@ -3781,7 +3781,7 @@
                 </a:solidFill>
                 <a:latin typeface="Segoe UI"/>
               </a:rPr>
-              <a:t>+13.6%</a:t>
+              <a:t>+16.4%</a:t>
             </a:r>
           </a:p>
         </p:txBody>
@@ -3839,7 +3839,7 @@
                 </a:solidFill>
                 <a:latin typeface="Segoe UI"/>
               </a:rPr>
-              <a:t>NIFTY IT</a:t>
+              <a:t>Crude Oil WTI</a:t>
             </a:r>
           </a:p>
         </p:txBody>
@@ -3873,7 +3873,7 @@
                 </a:solidFill>
                 <a:latin typeface="Segoe UI"/>
               </a:rPr>
-              <a:t>^CNXIT · RED</a:t>
+              <a:t>CL=F · RED</a:t>
             </a:r>
           </a:p>
         </p:txBody>
@@ -3907,7 +3907,7 @@
                 </a:solidFill>
                 <a:latin typeface="Segoe UI"/>
               </a:rPr>
-              <a:t>+12.0%</a:t>
+              <a:t>+16.0%</a:t>
             </a:r>
           </a:p>
         </p:txBody>
@@ -3965,7 +3965,7 @@
                 </a:solidFill>
                 <a:latin typeface="Segoe UI"/>
               </a:rPr>
-              <a:t>US Energy</a:t>
+              <a:t>NIFTY IT</a:t>
             </a:r>
           </a:p>
         </p:txBody>
@@ -3995,11 +3995,11 @@
             <a:r>
               <a:rPr sz="900" b="0">
                 <a:solidFill>
-                  <a:srgbClr val="22C55E"/>
-                </a:solidFill>
-                <a:latin typeface="Segoe UI"/>
-              </a:rPr>
-              <a:t>XLE · GREEN</a:t>
+                  <a:srgbClr val="EF4444"/>
+                </a:solidFill>
+                <a:latin typeface="Segoe UI"/>
+              </a:rPr>
+              <a:t>^CNXIT · RED</a:t>
             </a:r>
           </a:p>
         </p:txBody>
@@ -4033,7 +4033,7 @@
                 </a:solidFill>
                 <a:latin typeface="Segoe UI"/>
               </a:rPr>
-              <a:t>+11.8%</a:t>
+              <a:t>+15.8%</a:t>
             </a:r>
           </a:p>
         </p:txBody>
@@ -4193,7 +4193,7 @@
                 </a:solidFill>
                 <a:latin typeface="Segoe UI"/>
               </a:rPr>
-              <a:t>-24.0%</a:t>
+              <a:t>-26.5%</a:t>
             </a:r>
           </a:p>
         </p:txBody>
@@ -4319,7 +4319,7 @@
                 </a:solidFill>
                 <a:latin typeface="Segoe UI"/>
               </a:rPr>
-              <a:t>-14.8%</a:t>
+              <a:t>-16.0%</a:t>
             </a:r>
           </a:p>
         </p:txBody>
@@ -4377,7 +4377,7 @@
                 </a:solidFill>
                 <a:latin typeface="Segoe UI"/>
               </a:rPr>
-              <a:t>Alphabet</a:t>
+              <a:t>Clean Energy</a:t>
             </a:r>
           </a:p>
         </p:txBody>
@@ -4411,7 +4411,7 @@
                 </a:solidFill>
                 <a:latin typeface="Segoe UI"/>
               </a:rPr>
-              <a:t>GOOGL · RED</a:t>
+              <a:t>ICLN · RED</a:t>
             </a:r>
           </a:p>
         </p:txBody>
@@ -4445,7 +4445,7 @@
                 </a:solidFill>
                 <a:latin typeface="Segoe UI"/>
               </a:rPr>
-              <a:t>-11.1%</a:t>
+              <a:t>-13.1%</a:t>
             </a:r>
           </a:p>
         </p:txBody>
@@ -4503,7 +4503,7 @@
                 </a:solidFill>
                 <a:latin typeface="Segoe UI"/>
               </a:rPr>
-              <a:t>Clean Energy</a:t>
+              <a:t>Nikkei 225</a:t>
             </a:r>
           </a:p>
         </p:txBody>
@@ -4537,7 +4537,7 @@
                 </a:solidFill>
                 <a:latin typeface="Segoe UI"/>
               </a:rPr>
-              <a:t>ICLN · RED</a:t>
+              <a:t>^N225 · RED</a:t>
             </a:r>
           </a:p>
         </p:txBody>
@@ -4571,7 +4571,7 @@
                 </a:solidFill>
                 <a:latin typeface="Segoe UI"/>
               </a:rPr>
-              <a:t>-10.3%</a:t>
+              <a:t>-11.0%</a:t>
             </a:r>
           </a:p>
         </p:txBody>
@@ -4629,7 +4629,7 @@
                 </a:solidFill>
                 <a:latin typeface="Segoe UI"/>
               </a:rPr>
-              <a:t>Nikkei 225</a:t>
+              <a:t>Alphabet</a:t>
             </a:r>
           </a:p>
         </p:txBody>
@@ -4659,11 +4659,11 @@
             <a:r>
               <a:rPr sz="900" b="0">
                 <a:solidFill>
-                  <a:srgbClr val="F59E0B"/>
-                </a:solidFill>
-                <a:latin typeface="Segoe UI"/>
-              </a:rPr>
-              <a:t>^N225 · AMBER</a:t>
+                  <a:srgbClr val="EF4444"/>
+                </a:solidFill>
+                <a:latin typeface="Segoe UI"/>
+              </a:rPr>
+              <a:t>GOOGL · RED</a:t>
             </a:r>
           </a:p>
         </p:txBody>
@@ -4697,7 +4697,7 @@
                 </a:solidFill>
                 <a:latin typeface="Segoe UI"/>
               </a:rPr>
-              <a:t>-7.3%</a:t>
+              <a:t>-8.6%</a:t>
             </a:r>
           </a:p>
         </p:txBody>
@@ -4967,7 +4967,7 @@
                 </a:solidFill>
                 <a:latin typeface="Segoe UI"/>
               </a:rPr>
-              <a:t>ICICI Bank</a:t>
+              <a:t>Apple</a:t>
             </a:r>
           </a:p>
         </p:txBody>
@@ -5035,7 +5035,7 @@
                 </a:solidFill>
                 <a:latin typeface="Segoe UI"/>
               </a:rPr>
-              <a:t>86%</a:t>
+              <a:t>95%</a:t>
             </a:r>
           </a:p>
         </p:txBody>
@@ -5069,7 +5069,7 @@
                 </a:solidFill>
                 <a:latin typeface="Segoe UI"/>
               </a:rPr>
-              <a:t>above 200DMA · golden cross (50&gt;200) · MACD bearish</a:t>
+              <a:t>above 200DMA · golden cross (50&gt;200) · MACD bullish</a:t>
             </a:r>
           </a:p>
         </p:txBody>
@@ -5103,7 +5103,7 @@
                 </a:solidFill>
                 <a:latin typeface="Segoe UI"/>
               </a:rPr>
-              <a:t>USD/JPY</a:t>
+              <a:t>US Financials</a:t>
             </a:r>
           </a:p>
         </p:txBody>
@@ -5171,7 +5171,7 @@
                 </a:solidFill>
                 <a:latin typeface="Segoe UI"/>
               </a:rPr>
-              <a:t>95%</a:t>
+              <a:t>87%</a:t>
             </a:r>
           </a:p>
         </p:txBody>
@@ -5205,7 +5205,7 @@
                 </a:solidFill>
                 <a:latin typeface="Segoe UI"/>
               </a:rPr>
-              <a:t>above 200DMA · golden cross (50&gt;200) · MACD bullish</a:t>
+              <a:t>above 200DMA · golden cross (50&gt;200) · MACD bearish</a:t>
             </a:r>
           </a:p>
         </p:txBody>
@@ -5239,7 +5239,7 @@
                 </a:solidFill>
                 <a:latin typeface="Segoe UI"/>
               </a:rPr>
-              <a:t>US Financials</a:t>
+              <a:t>ICICI Bank</a:t>
             </a:r>
           </a:p>
         </p:txBody>
@@ -5375,7 +5375,7 @@
                 </a:solidFill>
                 <a:latin typeface="Segoe UI"/>
               </a:rPr>
-              <a:t>Apple</a:t>
+              <a:t>Dollar Index</a:t>
             </a:r>
           </a:p>
         </p:txBody>
@@ -5443,7 +5443,7 @@
                 </a:solidFill>
                 <a:latin typeface="Segoe UI"/>
               </a:rPr>
-              <a:t>84%</a:t>
+              <a:t>95%</a:t>
             </a:r>
           </a:p>
         </p:txBody>
@@ -5477,7 +5477,7 @@
                 </a:solidFill>
                 <a:latin typeface="Segoe UI"/>
               </a:rPr>
-              <a:t>above 200DMA · golden cross (50&gt;200) · MACD bearish</a:t>
+              <a:t>above 200DMA · golden cross (50&gt;200) · MACD bullish</a:t>
             </a:r>
           </a:p>
         </p:txBody>
@@ -5511,7 +5511,7 @@
                 </a:solidFill>
                 <a:latin typeface="Segoe UI"/>
               </a:rPr>
-              <a:t>FTSE 100</a:t>
+              <a:t>Dow Jones</a:t>
             </a:r>
           </a:p>
         </p:txBody>
@@ -5579,7 +5579,7 @@
                 </a:solidFill>
                 <a:latin typeface="Segoe UI"/>
               </a:rPr>
-              <a:t>83%</a:t>
+              <a:t>84%</a:t>
             </a:r>
           </a:p>
         </p:txBody>
@@ -5613,7 +5613,7 @@
                 </a:solidFill>
                 <a:latin typeface="Segoe UI"/>
               </a:rPr>
-              <a:t>above 200DMA · golden cross (50&gt;200) · MACD bullish</a:t>
+              <a:t>above 200DMA · golden cross (50&gt;200) · MACD bearish</a:t>
             </a:r>
           </a:p>
         </p:txBody>
@@ -5647,7 +5647,7 @@
                 </a:solidFill>
                 <a:latin typeface="Segoe UI"/>
               </a:rPr>
-              <a:t>Dollar Index</a:t>
+              <a:t>FTSE 100</a:t>
             </a:r>
           </a:p>
         </p:txBody>
@@ -5715,7 +5715,7 @@
                 </a:solidFill>
                 <a:latin typeface="Segoe UI"/>
               </a:rPr>
-              <a:t>95%</a:t>
+              <a:t>83%</a:t>
             </a:r>
           </a:p>
         </p:txBody>
@@ -5783,7 +5783,7 @@
                 </a:solidFill>
                 <a:latin typeface="Segoe UI"/>
               </a:rPr>
-              <a:t>Copper</a:t>
+              <a:t>US Energy</a:t>
             </a:r>
           </a:p>
         </p:txBody>
@@ -5851,7 +5851,7 @@
                 </a:solidFill>
                 <a:latin typeface="Segoe UI"/>
               </a:rPr>
-              <a:t>95%</a:t>
+              <a:t>88%</a:t>
             </a:r>
           </a:p>
         </p:txBody>
@@ -5919,7 +5919,7 @@
                 </a:solidFill>
                 <a:latin typeface="Segoe UI"/>
               </a:rPr>
-              <a:t>Russell 2000</a:t>
+              <a:t>Copper</a:t>
             </a:r>
           </a:p>
         </p:txBody>
@@ -6021,7 +6021,7 @@
                 </a:solidFill>
                 <a:latin typeface="Segoe UI"/>
               </a:rPr>
-              <a:t>above 200DMA · golden cross (50&gt;200) · MACD bearish</a:t>
+              <a:t>above 200DMA · golden cross (50&gt;200) · MACD bullish</a:t>
             </a:r>
           </a:p>
         </p:txBody>
@@ -6055,7 +6055,7 @@
                 </a:solidFill>
                 <a:latin typeface="Segoe UI"/>
               </a:rPr>
-              <a:t>Dow Jones</a:t>
+              <a:t>DAX</a:t>
             </a:r>
           </a:p>
         </p:txBody>
@@ -6123,7 +6123,7 @@
                 </a:solidFill>
                 <a:latin typeface="Segoe UI"/>
               </a:rPr>
-              <a:t>80%</a:t>
+              <a:t>81%</a:t>
             </a:r>
           </a:p>
         </p:txBody>
@@ -6157,7 +6157,7 @@
                 </a:solidFill>
                 <a:latin typeface="Segoe UI"/>
               </a:rPr>
-              <a:t>above 200DMA · golden cross (50&gt;200) · MACD bearish</a:t>
+              <a:t>above 200DMA · golden cross (50&gt;200) · MACD bullish</a:t>
             </a:r>
           </a:p>
         </p:txBody>
@@ -6327,7 +6327,7 @@
                 </a:solidFill>
                 <a:latin typeface="Segoe UI"/>
               </a:rPr>
-              <a:t>US Energy</a:t>
+              <a:t>US 1-3Y Treasury</a:t>
             </a:r>
           </a:p>
         </p:txBody>
@@ -6361,7 +6361,7 @@
                 </a:solidFill>
                 <a:latin typeface="Segoe UI"/>
               </a:rPr>
-              <a:t>BUY</a:t>
+              <a:t>STRONG BUY</a:t>
             </a:r>
           </a:p>
         </p:txBody>
@@ -6395,7 +6395,7 @@
                 </a:solidFill>
                 <a:latin typeface="Segoe UI"/>
               </a:rPr>
-              <a:t>90%</a:t>
+              <a:t>80%</a:t>
             </a:r>
           </a:p>
         </p:txBody>
@@ -6429,7 +6429,7 @@
                 </a:solidFill>
                 <a:latin typeface="Segoe UI"/>
               </a:rPr>
-              <a:t>above 200DMA · golden cross (50&gt;200) · MACD bullish</a:t>
+              <a:t>above 200DMA · golden cross (50&gt;200) · MACD bearish</a:t>
             </a:r>
           </a:p>
         </p:txBody>
@@ -6463,7 +6463,7 @@
                 </a:solidFill>
                 <a:latin typeface="Segoe UI"/>
               </a:rPr>
-              <a:t>NIFTY Bank</a:t>
+              <a:t>Russell 2000</a:t>
             </a:r>
           </a:p>
         </p:txBody>
@@ -6497,7 +6497,7 @@
                 </a:solidFill>
                 <a:latin typeface="Segoe UI"/>
               </a:rPr>
-              <a:t>BUY</a:t>
+              <a:t>STRONG BUY</a:t>
             </a:r>
           </a:p>
         </p:txBody>
@@ -6531,7 +6531,7 @@
                 </a:solidFill>
                 <a:latin typeface="Segoe UI"/>
               </a:rPr>
-              <a:t>74%</a:t>
+              <a:t>80%</a:t>
             </a:r>
           </a:p>
         </p:txBody>
@@ -6659,7 +6659,7 @@
                 </a:solidFill>
                 <a:latin typeface="Segoe UI"/>
               </a:rPr>
-              <a:t>Base currency INR · USD/INR 95.9</a:t>
+              <a:t>Base currency INR · USD/INR 95.79</a:t>
             </a:r>
           </a:p>
         </p:txBody>
@@ -7067,7 +7067,7 @@
                 </a:solidFill>
                 <a:latin typeface="Segoe UI"/>
               </a:rPr>
-              <a:t>65,281</a:t>
+              <a:t>63,456</a:t>
             </a:r>
           </a:p>
         </p:txBody>
@@ -7101,7 +7101,7 @@
                 </a:solidFill>
                 <a:latin typeface="Segoe UI"/>
               </a:rPr>
-              <a:t>Rs 626,044</a:t>
+              <a:t>Rs 607,863</a:t>
             </a:r>
           </a:p>
         </p:txBody>
@@ -7135,7 +7135,7 @@
                 </a:solidFill>
                 <a:latin typeface="Segoe UI"/>
               </a:rPr>
-              <a:t>Rs 50,644</a:t>
+              <a:t>Rs 33,108</a:t>
             </a:r>
           </a:p>
         </p:txBody>
@@ -7169,7 +7169,7 @@
                 </a:solidFill>
                 <a:latin typeface="Segoe UI"/>
               </a:rPr>
-              <a:t>+8.8%</a:t>
+              <a:t>+5.8%</a:t>
             </a:r>
           </a:p>
         </p:txBody>
@@ -7203,7 +7203,7 @@
                 </a:solidFill>
                 <a:latin typeface="Segoe UI"/>
               </a:rPr>
-              <a:t>-0.1%</a:t>
+              <a:t>-0.4%</a:t>
             </a:r>
           </a:p>
         </p:txBody>
@@ -7339,7 +7339,7 @@
                 </a:solidFill>
                 <a:latin typeface="Segoe UI"/>
               </a:rPr>
-              <a:t>4,104</a:t>
+              <a:t>4,049</a:t>
             </a:r>
           </a:p>
         </p:txBody>
@@ -7373,7 +7373,7 @@
                 </a:solidFill>
                 <a:latin typeface="Segoe UI"/>
               </a:rPr>
-              <a:t>Rs 393,583</a:t>
+              <a:t>Rs 387,873</a:t>
             </a:r>
           </a:p>
         </p:txBody>
@@ -7407,7 +7407,7 @@
                 </a:solidFill>
                 <a:latin typeface="Segoe UI"/>
               </a:rPr>
-              <a:t>Rs 173,013</a:t>
+              <a:t>Rs 167,551</a:t>
             </a:r>
           </a:p>
         </p:txBody>
@@ -7441,7 +7441,7 @@
                 </a:solidFill>
                 <a:latin typeface="Segoe UI"/>
               </a:rPr>
-              <a:t>+78.4%</a:t>
+              <a:t>+76.0%</a:t>
             </a:r>
           </a:p>
         </p:txBody>
@@ -7471,11 +7471,11 @@
             <a:r>
               <a:rPr sz="1000" b="0">
                 <a:solidFill>
-                  <a:srgbClr val="22C55E"/>
-                </a:solidFill>
-                <a:latin typeface="Segoe UI"/>
-              </a:rPr>
-              <a:t>+0.9%</a:t>
+                  <a:srgbClr val="EF4444"/>
+                </a:solidFill>
+                <a:latin typeface="Segoe UI"/>
+              </a:rPr>
+              <a:t>-0.6%</a:t>
             </a:r>
           </a:p>
         </p:txBody>
@@ -7611,7 +7611,7 @@
                 </a:solidFill>
                 <a:latin typeface="Segoe UI"/>
               </a:rPr>
-              <a:t>322</a:t>
+              <a:t>337</a:t>
             </a:r>
           </a:p>
         </p:txBody>
@@ -7645,7 +7645,7 @@
                 </a:solidFill>
                 <a:latin typeface="Segoe UI"/>
               </a:rPr>
-              <a:t>Rs 308,472</a:t>
+              <a:t>Rs 322,735</a:t>
             </a:r>
           </a:p>
         </p:txBody>
@@ -7679,7 +7679,7 @@
                 </a:solidFill>
                 <a:latin typeface="Segoe UI"/>
               </a:rPr>
-              <a:t>Rs 131,057</a:t>
+              <a:t>Rs 145,518</a:t>
             </a:r>
           </a:p>
         </p:txBody>
@@ -7713,7 +7713,7 @@
                 </a:solidFill>
                 <a:latin typeface="Segoe UI"/>
               </a:rPr>
-              <a:t>+73.9%</a:t>
+              <a:t>+82.1%</a:t>
             </a:r>
           </a:p>
         </p:txBody>
@@ -7883,7 +7883,7 @@
                 </a:solidFill>
                 <a:latin typeface="Segoe UI"/>
               </a:rPr>
-              <a:t>209</a:t>
+              <a:t>197</a:t>
             </a:r>
           </a:p>
         </p:txBody>
@@ -7917,7 +7917,7 @@
                 </a:solidFill>
                 <a:latin typeface="Segoe UI"/>
               </a:rPr>
-              <a:t>Rs 160,161</a:t>
+              <a:t>Rs 150,593</a:t>
             </a:r>
           </a:p>
         </p:txBody>
@@ -7951,7 +7951,7 @@
                 </a:solidFill>
                 <a:latin typeface="Segoe UI"/>
               </a:rPr>
-              <a:t>Rs -185,079</a:t>
+              <a:t>Rs -194,260</a:t>
             </a:r>
           </a:p>
         </p:txBody>
@@ -7985,7 +7985,7 @@
                 </a:solidFill>
                 <a:latin typeface="Segoe UI"/>
               </a:rPr>
-              <a:t>-53.6%</a:t>
+              <a:t>-56.3%</a:t>
             </a:r>
           </a:p>
         </p:txBody>
@@ -8155,7 +8155,7 @@
                 </a:solidFill>
                 <a:latin typeface="Segoe UI"/>
               </a:rPr>
-              <a:t>1,079</a:t>
+              <a:t>1,108</a:t>
             </a:r>
           </a:p>
         </p:txBody>
@@ -8189,7 +8189,7 @@
                 </a:solidFill>
                 <a:latin typeface="Segoe UI"/>
               </a:rPr>
-              <a:t>Rs 86,336</a:t>
+              <a:t>Rs 88,640</a:t>
             </a:r>
           </a:p>
         </p:txBody>
@@ -8223,7 +8223,7 @@
                 </a:solidFill>
                 <a:latin typeface="Segoe UI"/>
               </a:rPr>
-              <a:t>Rs -25,664</a:t>
+              <a:t>Rs -23,360</a:t>
             </a:r>
           </a:p>
         </p:txBody>
@@ -8257,7 +8257,7 @@
                 </a:solidFill>
                 <a:latin typeface="Segoe UI"/>
               </a:rPr>
-              <a:t>-22.9%</a:t>
+              <a:t>-20.9%</a:t>
             </a:r>
           </a:p>
         </p:txBody>
@@ -8291,7 +8291,7 @@
                 </a:solidFill>
                 <a:latin typeface="Segoe UI"/>
               </a:rPr>
-              <a:t>+3.7%</a:t>
+              <a:t>+2.7%</a:t>
             </a:r>
           </a:p>
         </p:txBody>
@@ -8427,7 +8427,7 @@
                 </a:solidFill>
                 <a:latin typeface="Segoe UI"/>
               </a:rPr>
-              <a:t>1,280</a:t>
+              <a:t>1,272</a:t>
             </a:r>
           </a:p>
         </p:txBody>
@@ -8461,7 +8461,7 @@
                 </a:solidFill>
                 <a:latin typeface="Segoe UI"/>
               </a:rPr>
-              <a:t>Rs 64,000</a:t>
+              <a:t>Rs 63,600</a:t>
             </a:r>
           </a:p>
         </p:txBody>
@@ -8495,7 +8495,7 @@
                 </a:solidFill>
                 <a:latin typeface="Segoe UI"/>
               </a:rPr>
-              <a:t>Rs -58,500</a:t>
+              <a:t>Rs -58,900</a:t>
             </a:r>
           </a:p>
         </p:txBody>
@@ -8529,7 +8529,7 @@
                 </a:solidFill>
                 <a:latin typeface="Segoe UI"/>
               </a:rPr>
-              <a:t>-47.8%</a:t>
+              <a:t>-48.1%</a:t>
             </a:r>
           </a:p>
         </p:txBody>
@@ -8559,11 +8559,11 @@
             <a:r>
               <a:rPr sz="1000" b="0">
                 <a:solidFill>
-                  <a:srgbClr val="22C55E"/>
-                </a:solidFill>
-                <a:latin typeface="Segoe UI"/>
-              </a:rPr>
-              <a:t>+0.2%</a:t>
+                  <a:srgbClr val="EF4444"/>
+                </a:solidFill>
+                <a:latin typeface="Segoe UI"/>
+              </a:rPr>
+              <a:t>-0.5%</a:t>
             </a:r>
           </a:p>
         </p:txBody>
@@ -8699,7 +8699,7 @@
                 </a:solidFill>
                 <a:latin typeface="Segoe UI"/>
               </a:rPr>
-              <a:t>2,296</a:t>
+              <a:t>2,400</a:t>
             </a:r>
           </a:p>
         </p:txBody>
@@ -8733,7 +8733,7 @@
                 </a:solidFill>
                 <a:latin typeface="Segoe UI"/>
               </a:rPr>
-              <a:t>Rs 57,390</a:t>
+              <a:t>Rs 59,992</a:t>
             </a:r>
           </a:p>
         </p:txBody>
@@ -8767,7 +8767,7 @@
                 </a:solidFill>
                 <a:latin typeface="Segoe UI"/>
               </a:rPr>
-              <a:t>Rs -32,610</a:t>
+              <a:t>Rs -30,008</a:t>
             </a:r>
           </a:p>
         </p:txBody>
@@ -8801,7 +8801,7 @@
                 </a:solidFill>
                 <a:latin typeface="Segoe UI"/>
               </a:rPr>
-              <a:t>-36.2%</a:t>
+              <a:t>-33.3%</a:t>
             </a:r>
           </a:p>
         </p:txBody>
@@ -8835,7 +8835,7 @@
                 </a:solidFill>
                 <a:latin typeface="Segoe UI"/>
               </a:rPr>
-              <a:t>+1.8%</a:t>
+              <a:t>+4.5%</a:t>
             </a:r>
           </a:p>
         </p:txBody>
@@ -8971,7 +8971,7 @@
                 </a:solidFill>
                 <a:latin typeface="Segoe UI"/>
               </a:rPr>
-              <a:t>740</a:t>
+              <a:t>738</a:t>
             </a:r>
           </a:p>
         </p:txBody>
@@ -9005,7 +9005,7 @@
                 </a:solidFill>
                 <a:latin typeface="Segoe UI"/>
               </a:rPr>
-              <a:t>Rs 44,373</a:t>
+              <a:t>Rs 44,283</a:t>
             </a:r>
           </a:p>
         </p:txBody>
@@ -9039,7 +9039,7 @@
                 </a:solidFill>
                 <a:latin typeface="Segoe UI"/>
               </a:rPr>
-              <a:t>Rs -46,827</a:t>
+              <a:t>Rs -46,917</a:t>
             </a:r>
           </a:p>
         </p:txBody>
@@ -9107,7 +9107,7 @@
                 </a:solidFill>
                 <a:latin typeface="Segoe UI"/>
               </a:rPr>
-              <a:t>-0.4%</a:t>
+              <a:t>-0.2%</a:t>
             </a:r>
           </a:p>
         </p:txBody>
@@ -9141,7 +9141,7 @@
                 </a:solidFill>
                 <a:latin typeface="Segoe UI"/>
               </a:rPr>
-              <a:t>Total Rs 1,740,359 | P&amp;L Rs 6,034 (+0.3%) | Sharpe -0.39 | Vol 17.96% | VaR95 -1.86%/day</a:t>
+              <a:t>Total Rs 1,725,580 | P&amp;L Rs -7,267 (-0.4%) | Sharpe -0.42 | Vol 17.72% | VaR95 -1.88%/day</a:t>
             </a:r>
           </a:p>
         </p:txBody>

--- a/docs/pmr_daily.pptx
+++ b/docs/pmr_daily.pptx
@@ -3197,7 +3197,7 @@
                 </a:solidFill>
                 <a:latin typeface="Segoe UI"/>
               </a:rPr>
-              <a:t>Tuesday, 28 Jul 2026 16:06 SGT</a:t>
+              <a:t>Wednesday, 29 Jul 2026 16:11 SGT</a:t>
             </a:r>
           </a:p>
         </p:txBody>
@@ -3265,7 +3265,7 @@
                 </a:solidFill>
                 <a:latin typeface="Segoe UI"/>
               </a:rPr>
-              <a:t>RAG 19R / 12A / 15G   |   45.7% above 200DMA   |   Portfolio Rs 1,725,580 (-0.4%)</a:t>
+              <a:t>RAG 19R / 12A / 15G   |   54.3% above 200DMA   |   Portfolio Rs 1,741,834 (+0.7%)</a:t>
             </a:r>
           </a:p>
         </p:txBody>
@@ -3529,7 +3529,7 @@
                 </a:solidFill>
                 <a:latin typeface="Segoe UI"/>
               </a:rPr>
-              <a:t>+19.9%</a:t>
+              <a:t>+21.9%</a:t>
             </a:r>
           </a:p>
         </p:txBody>
@@ -3655,7 +3655,7 @@
                 </a:solidFill>
                 <a:latin typeface="Segoe UI"/>
               </a:rPr>
-              <a:t>+18.8%</a:t>
+              <a:t>+21.3%</a:t>
             </a:r>
           </a:p>
         </p:txBody>
@@ -3713,7 +3713,7 @@
                 </a:solidFill>
                 <a:latin typeface="Segoe UI"/>
               </a:rPr>
-              <a:t>Apple</a:t>
+              <a:t>NIFTY IT</a:t>
             </a:r>
           </a:p>
         </p:txBody>
@@ -3743,11 +3743,11 @@
             <a:r>
               <a:rPr sz="900" b="0">
                 <a:solidFill>
-                  <a:srgbClr val="22C55E"/>
-                </a:solidFill>
-                <a:latin typeface="Segoe UI"/>
-              </a:rPr>
-              <a:t>AAPL · GREEN</a:t>
+                  <a:srgbClr val="EF4444"/>
+                </a:solidFill>
+                <a:latin typeface="Segoe UI"/>
+              </a:rPr>
+              <a:t>^CNXIT · RED</a:t>
             </a:r>
           </a:p>
         </p:txBody>
@@ -3781,7 +3781,7 @@
                 </a:solidFill>
                 <a:latin typeface="Segoe UI"/>
               </a:rPr>
-              <a:t>+16.4%</a:t>
+              <a:t>+18.6%</a:t>
             </a:r>
           </a:p>
         </p:txBody>
@@ -3907,7 +3907,7 @@
                 </a:solidFill>
                 <a:latin typeface="Segoe UI"/>
               </a:rPr>
-              <a:t>+16.0%</a:t>
+              <a:t>+18.2%</a:t>
             </a:r>
           </a:p>
         </p:txBody>
@@ -3965,7 +3965,7 @@
                 </a:solidFill>
                 <a:latin typeface="Segoe UI"/>
               </a:rPr>
-              <a:t>NIFTY IT</a:t>
+              <a:t>Apple</a:t>
             </a:r>
           </a:p>
         </p:txBody>
@@ -3995,11 +3995,11 @@
             <a:r>
               <a:rPr sz="900" b="0">
                 <a:solidFill>
-                  <a:srgbClr val="EF4444"/>
-                </a:solidFill>
-                <a:latin typeface="Segoe UI"/>
-              </a:rPr>
-              <a:t>^CNXIT · RED</a:t>
+                  <a:srgbClr val="22C55E"/>
+                </a:solidFill>
+                <a:latin typeface="Segoe UI"/>
+              </a:rPr>
+              <a:t>AAPL · GREEN</a:t>
             </a:r>
           </a:p>
         </p:txBody>
@@ -4033,7 +4033,7 @@
                 </a:solidFill>
                 <a:latin typeface="Segoe UI"/>
               </a:rPr>
-              <a:t>+15.8%</a:t>
+              <a:t>+16.4%</a:t>
             </a:r>
           </a:p>
         </p:txBody>
@@ -4319,7 +4319,7 @@
                 </a:solidFill>
                 <a:latin typeface="Segoe UI"/>
               </a:rPr>
-              <a:t>-16.0%</a:t>
+              <a:t>-18.1%</a:t>
             </a:r>
           </a:p>
         </p:txBody>
@@ -4571,7 +4571,7 @@
                 </a:solidFill>
                 <a:latin typeface="Segoe UI"/>
               </a:rPr>
-              <a:t>-11.0%</a:t>
+              <a:t>-12.3%</a:t>
             </a:r>
           </a:p>
         </p:txBody>
@@ -5171,7 +5171,7 @@
                 </a:solidFill>
                 <a:latin typeface="Segoe UI"/>
               </a:rPr>
-              <a:t>87%</a:t>
+              <a:t>86%</a:t>
             </a:r>
           </a:p>
         </p:txBody>
@@ -5375,7 +5375,7 @@
                 </a:solidFill>
                 <a:latin typeface="Segoe UI"/>
               </a:rPr>
-              <a:t>Dollar Index</a:t>
+              <a:t>Bharti Airtel</a:t>
             </a:r>
           </a:p>
         </p:txBody>
@@ -5443,7 +5443,7 @@
                 </a:solidFill>
                 <a:latin typeface="Segoe UI"/>
               </a:rPr>
-              <a:t>95%</a:t>
+              <a:t>91%</a:t>
             </a:r>
           </a:p>
         </p:txBody>
@@ -5511,7 +5511,7 @@
                 </a:solidFill>
                 <a:latin typeface="Segoe UI"/>
               </a:rPr>
-              <a:t>Dow Jones</a:t>
+              <a:t>USD/JPY</a:t>
             </a:r>
           </a:p>
         </p:txBody>
@@ -5579,7 +5579,7 @@
                 </a:solidFill>
                 <a:latin typeface="Segoe UI"/>
               </a:rPr>
-              <a:t>84%</a:t>
+              <a:t>95%</a:t>
             </a:r>
           </a:p>
         </p:txBody>
@@ -5613,7 +5613,7 @@
                 </a:solidFill>
                 <a:latin typeface="Segoe UI"/>
               </a:rPr>
-              <a:t>above 200DMA · golden cross (50&gt;200) · MACD bearish</a:t>
+              <a:t>above 200DMA · golden cross (50&gt;200) · MACD bullish</a:t>
             </a:r>
           </a:p>
         </p:txBody>
@@ -5647,7 +5647,7 @@
                 </a:solidFill>
                 <a:latin typeface="Segoe UI"/>
               </a:rPr>
-              <a:t>FTSE 100</a:t>
+              <a:t>Dollar Index</a:t>
             </a:r>
           </a:p>
         </p:txBody>
@@ -5715,7 +5715,7 @@
                 </a:solidFill>
                 <a:latin typeface="Segoe UI"/>
               </a:rPr>
-              <a:t>83%</a:t>
+              <a:t>94%</a:t>
             </a:r>
           </a:p>
         </p:txBody>
@@ -5783,7 +5783,7 @@
                 </a:solidFill>
                 <a:latin typeface="Segoe UI"/>
               </a:rPr>
-              <a:t>US Energy</a:t>
+              <a:t>Dow Jones</a:t>
             </a:r>
           </a:p>
         </p:txBody>
@@ -5851,7 +5851,7 @@
                 </a:solidFill>
                 <a:latin typeface="Segoe UI"/>
               </a:rPr>
-              <a:t>88%</a:t>
+              <a:t>82%</a:t>
             </a:r>
           </a:p>
         </p:txBody>
@@ -5885,7 +5885,7 @@
                 </a:solidFill>
                 <a:latin typeface="Segoe UI"/>
               </a:rPr>
-              <a:t>above 200DMA · golden cross (50&gt;200) · MACD bullish</a:t>
+              <a:t>above 200DMA · golden cross (50&gt;200) · MACD bearish</a:t>
             </a:r>
           </a:p>
         </p:txBody>
@@ -5987,7 +5987,7 @@
                 </a:solidFill>
                 <a:latin typeface="Segoe UI"/>
               </a:rPr>
-              <a:t>81%</a:t>
+              <a:t>93%</a:t>
             </a:r>
           </a:p>
         </p:txBody>
@@ -6123,7 +6123,7 @@
                 </a:solidFill>
                 <a:latin typeface="Segoe UI"/>
               </a:rPr>
-              <a:t>81%</a:t>
+              <a:t>80%</a:t>
             </a:r>
           </a:p>
         </p:txBody>
@@ -6191,7 +6191,7 @@
                 </a:solidFill>
                 <a:latin typeface="Segoe UI"/>
               </a:rPr>
-              <a:t>USD/INR</a:t>
+              <a:t>Straits Times</a:t>
             </a:r>
           </a:p>
         </p:txBody>
@@ -6225,7 +6225,7 @@
                 </a:solidFill>
                 <a:latin typeface="Segoe UI"/>
               </a:rPr>
-              <a:t>STRONG BUY</a:t>
+              <a:t>BUY</a:t>
             </a:r>
           </a:p>
         </p:txBody>
@@ -6259,7 +6259,7 @@
                 </a:solidFill>
                 <a:latin typeface="Segoe UI"/>
               </a:rPr>
-              <a:t>80%</a:t>
+              <a:t>79%</a:t>
             </a:r>
           </a:p>
         </p:txBody>
@@ -6293,7 +6293,7 @@
                 </a:solidFill>
                 <a:latin typeface="Segoe UI"/>
               </a:rPr>
-              <a:t>above 200DMA · golden cross (50&gt;200) · MACD bearish</a:t>
+              <a:t>above 200DMA · golden cross (50&gt;200) · MACD bullish</a:t>
             </a:r>
           </a:p>
         </p:txBody>
@@ -6327,7 +6327,7 @@
                 </a:solidFill>
                 <a:latin typeface="Segoe UI"/>
               </a:rPr>
-              <a:t>US 1-3Y Treasury</a:t>
+              <a:t>FTSE 100</a:t>
             </a:r>
           </a:p>
         </p:txBody>
@@ -6361,7 +6361,7 @@
                 </a:solidFill>
                 <a:latin typeface="Segoe UI"/>
               </a:rPr>
-              <a:t>STRONG BUY</a:t>
+              <a:t>BUY</a:t>
             </a:r>
           </a:p>
         </p:txBody>
@@ -6395,7 +6395,7 @@
                 </a:solidFill>
                 <a:latin typeface="Segoe UI"/>
               </a:rPr>
-              <a:t>80%</a:t>
+              <a:t>77%</a:t>
             </a:r>
           </a:p>
         </p:txBody>
@@ -6429,7 +6429,7 @@
                 </a:solidFill>
                 <a:latin typeface="Segoe UI"/>
               </a:rPr>
-              <a:t>above 200DMA · golden cross (50&gt;200) · MACD bearish</a:t>
+              <a:t>above 200DMA · golden cross (50&gt;200) · MACD bullish</a:t>
             </a:r>
           </a:p>
         </p:txBody>
@@ -6463,7 +6463,7 @@
                 </a:solidFill>
                 <a:latin typeface="Segoe UI"/>
               </a:rPr>
-              <a:t>Russell 2000</a:t>
+              <a:t>Hang Seng</a:t>
             </a:r>
           </a:p>
         </p:txBody>
@@ -6497,7 +6497,7 @@
                 </a:solidFill>
                 <a:latin typeface="Segoe UI"/>
               </a:rPr>
-              <a:t>STRONG BUY</a:t>
+              <a:t>BUY</a:t>
             </a:r>
           </a:p>
         </p:txBody>
@@ -6531,7 +6531,7 @@
                 </a:solidFill>
                 <a:latin typeface="Segoe UI"/>
               </a:rPr>
-              <a:t>80%</a:t>
+              <a:t>70%</a:t>
             </a:r>
           </a:p>
         </p:txBody>
@@ -6565,7 +6565,7 @@
                 </a:solidFill>
                 <a:latin typeface="Segoe UI"/>
               </a:rPr>
-              <a:t>above 200DMA · golden cross (50&gt;200) · MACD bearish</a:t>
+              <a:t>above 200DMA · death cross (50&lt;200) · MACD bullish</a:t>
             </a:r>
           </a:p>
         </p:txBody>
@@ -6659,7 +6659,7 @@
                 </a:solidFill>
                 <a:latin typeface="Segoe UI"/>
               </a:rPr>
-              <a:t>Base currency INR · USD/INR 95.79</a:t>
+              <a:t>Base currency INR · USD/INR 95.6</a:t>
             </a:r>
           </a:p>
         </p:txBody>
@@ -7067,7 +7067,7 @@
                 </a:solidFill>
                 <a:latin typeface="Segoe UI"/>
               </a:rPr>
-              <a:t>63,456</a:t>
+              <a:t>64,302</a:t>
             </a:r>
           </a:p>
         </p:txBody>
@@ -7101,7 +7101,7 @@
                 </a:solidFill>
                 <a:latin typeface="Segoe UI"/>
               </a:rPr>
-              <a:t>Rs 607,863</a:t>
+              <a:t>Rs 614,696</a:t>
             </a:r>
           </a:p>
         </p:txBody>
@@ -7135,7 +7135,7 @@
                 </a:solidFill>
                 <a:latin typeface="Segoe UI"/>
               </a:rPr>
-              <a:t>Rs 33,108</a:t>
+              <a:t>Rs 41,126</a:t>
             </a:r>
           </a:p>
         </p:txBody>
@@ -7169,7 +7169,7 @@
                 </a:solidFill>
                 <a:latin typeface="Segoe UI"/>
               </a:rPr>
-              <a:t>+5.8%</a:t>
+              <a:t>+7.2%</a:t>
             </a:r>
           </a:p>
         </p:txBody>
@@ -7199,11 +7199,11 @@
             <a:r>
               <a:rPr sz="1000" b="0">
                 <a:solidFill>
-                  <a:srgbClr val="EF4444"/>
-                </a:solidFill>
-                <a:latin typeface="Segoe UI"/>
-              </a:rPr>
-              <a:t>-0.4%</a:t>
+                  <a:srgbClr val="22C55E"/>
+                </a:solidFill>
+                <a:latin typeface="Segoe UI"/>
+              </a:rPr>
+              <a:t>+0.7%</a:t>
             </a:r>
           </a:p>
         </p:txBody>
@@ -7339,7 +7339,7 @@
                 </a:solidFill>
                 <a:latin typeface="Segoe UI"/>
               </a:rPr>
-              <a:t>4,049</a:t>
+              <a:t>4,102</a:t>
             </a:r>
           </a:p>
         </p:txBody>
@@ -7373,7 +7373,7 @@
                 </a:solidFill>
                 <a:latin typeface="Segoe UI"/>
               </a:rPr>
-              <a:t>Rs 387,873</a:t>
+              <a:t>Rs 392,169</a:t>
             </a:r>
           </a:p>
         </p:txBody>
@@ -7407,7 +7407,7 @@
                 </a:solidFill>
                 <a:latin typeface="Segoe UI"/>
               </a:rPr>
-              <a:t>Rs 167,551</a:t>
+              <a:t>Rs 172,300</a:t>
             </a:r>
           </a:p>
         </p:txBody>
@@ -7441,7 +7441,7 @@
                 </a:solidFill>
                 <a:latin typeface="Segoe UI"/>
               </a:rPr>
-              <a:t>+76.0%</a:t>
+              <a:t>+78.4%</a:t>
             </a:r>
           </a:p>
         </p:txBody>
@@ -7471,11 +7471,11 @@
             <a:r>
               <a:rPr sz="1000" b="0">
                 <a:solidFill>
-                  <a:srgbClr val="EF4444"/>
-                </a:solidFill>
-                <a:latin typeface="Segoe UI"/>
-              </a:rPr>
-              <a:t>-0.6%</a:t>
+                  <a:srgbClr val="22C55E"/>
+                </a:solidFill>
+                <a:latin typeface="Segoe UI"/>
+              </a:rPr>
+              <a:t>+1.6%</a:t>
             </a:r>
           </a:p>
         </p:txBody>
@@ -7645,7 +7645,7 @@
                 </a:solidFill>
                 <a:latin typeface="Segoe UI"/>
               </a:rPr>
-              <a:t>Rs 322,735</a:t>
+              <a:t>Rs 322,069</a:t>
             </a:r>
           </a:p>
         </p:txBody>
@@ -7679,7 +7679,7 @@
                 </a:solidFill>
                 <a:latin typeface="Segoe UI"/>
               </a:rPr>
-              <a:t>Rs 145,518</a:t>
+              <a:t>Rs 145,218</a:t>
             </a:r>
           </a:p>
         </p:txBody>
@@ -7917,7 +7917,7 @@
                 </a:solidFill>
                 <a:latin typeface="Segoe UI"/>
               </a:rPr>
-              <a:t>Rs 150,593</a:t>
+              <a:t>Rs 150,283</a:t>
             </a:r>
           </a:p>
         </p:txBody>
@@ -7951,7 +7951,7 @@
                 </a:solidFill>
                 <a:latin typeface="Segoe UI"/>
               </a:rPr>
-              <a:t>Rs -194,260</a:t>
+              <a:t>Rs -193,859</a:t>
             </a:r>
           </a:p>
         </p:txBody>
@@ -8155,7 +8155,7 @@
                 </a:solidFill>
                 <a:latin typeface="Segoe UI"/>
               </a:rPr>
-              <a:t>1,108</a:t>
+              <a:t>1,156</a:t>
             </a:r>
           </a:p>
         </p:txBody>
@@ -8189,7 +8189,7 @@
                 </a:solidFill>
                 <a:latin typeface="Segoe UI"/>
               </a:rPr>
-              <a:t>Rs 88,640</a:t>
+              <a:t>Rs 92,472</a:t>
             </a:r>
           </a:p>
         </p:txBody>
@@ -8223,7 +8223,7 @@
                 </a:solidFill>
                 <a:latin typeface="Segoe UI"/>
               </a:rPr>
-              <a:t>Rs -23,360</a:t>
+              <a:t>Rs -19,528</a:t>
             </a:r>
           </a:p>
         </p:txBody>
@@ -8257,7 +8257,7 @@
                 </a:solidFill>
                 <a:latin typeface="Segoe UI"/>
               </a:rPr>
-              <a:t>-20.9%</a:t>
+              <a:t>-17.4%</a:t>
             </a:r>
           </a:p>
         </p:txBody>
@@ -8291,7 +8291,7 @@
                 </a:solidFill>
                 <a:latin typeface="Segoe UI"/>
               </a:rPr>
-              <a:t>+2.7%</a:t>
+              <a:t>+4.5%</a:t>
             </a:r>
           </a:p>
         </p:txBody>
@@ -8427,7 +8427,7 @@
                 </a:solidFill>
                 <a:latin typeface="Segoe UI"/>
               </a:rPr>
-              <a:t>1,272</a:t>
+              <a:t>1,278</a:t>
             </a:r>
           </a:p>
         </p:txBody>
@@ -8461,7 +8461,7 @@
                 </a:solidFill>
                 <a:latin typeface="Segoe UI"/>
               </a:rPr>
-              <a:t>Rs 63,600</a:t>
+              <a:t>Rs 63,915</a:t>
             </a:r>
           </a:p>
         </p:txBody>
@@ -8495,7 +8495,7 @@
                 </a:solidFill>
                 <a:latin typeface="Segoe UI"/>
               </a:rPr>
-              <a:t>Rs -58,900</a:t>
+              <a:t>Rs -58,585</a:t>
             </a:r>
           </a:p>
         </p:txBody>
@@ -8529,7 +8529,7 @@
                 </a:solidFill>
                 <a:latin typeface="Segoe UI"/>
               </a:rPr>
-              <a:t>-48.1%</a:t>
+              <a:t>-47.8%</a:t>
             </a:r>
           </a:p>
         </p:txBody>
@@ -8563,7 +8563,7 @@
                 </a:solidFill>
                 <a:latin typeface="Segoe UI"/>
               </a:rPr>
-              <a:t>-0.5%</a:t>
+              <a:t>-0.1%</a:t>
             </a:r>
           </a:p>
         </p:txBody>
@@ -8699,7 +8699,7 @@
                 </a:solidFill>
                 <a:latin typeface="Segoe UI"/>
               </a:rPr>
-              <a:t>2,400</a:t>
+              <a:t>2,450</a:t>
             </a:r>
           </a:p>
         </p:txBody>
@@ -8733,7 +8733,7 @@
                 </a:solidFill>
                 <a:latin typeface="Segoe UI"/>
               </a:rPr>
-              <a:t>Rs 59,992</a:t>
+              <a:t>Rs 61,260</a:t>
             </a:r>
           </a:p>
         </p:txBody>
@@ -8767,7 +8767,7 @@
                 </a:solidFill>
                 <a:latin typeface="Segoe UI"/>
               </a:rPr>
-              <a:t>Rs -30,008</a:t>
+              <a:t>Rs -28,740</a:t>
             </a:r>
           </a:p>
         </p:txBody>
@@ -8801,7 +8801,7 @@
                 </a:solidFill>
                 <a:latin typeface="Segoe UI"/>
               </a:rPr>
-              <a:t>-33.3%</a:t>
+              <a:t>-31.9%</a:t>
             </a:r>
           </a:p>
         </p:txBody>
@@ -8835,7 +8835,7 @@
                 </a:solidFill>
                 <a:latin typeface="Segoe UI"/>
               </a:rPr>
-              <a:t>+4.5%</a:t>
+              <a:t>+2.2%</a:t>
             </a:r>
           </a:p>
         </p:txBody>
@@ -8971,7 +8971,7 @@
                 </a:solidFill>
                 <a:latin typeface="Segoe UI"/>
               </a:rPr>
-              <a:t>738</a:t>
+              <a:t>750</a:t>
             </a:r>
           </a:p>
         </p:txBody>
@@ -9005,7 +9005,7 @@
                 </a:solidFill>
                 <a:latin typeface="Segoe UI"/>
               </a:rPr>
-              <a:t>Rs 44,283</a:t>
+              <a:t>Rs 44,970</a:t>
             </a:r>
           </a:p>
         </p:txBody>
@@ -9039,7 +9039,7 @@
                 </a:solidFill>
                 <a:latin typeface="Segoe UI"/>
               </a:rPr>
-              <a:t>Rs -46,917</a:t>
+              <a:t>Rs -46,230</a:t>
             </a:r>
           </a:p>
         </p:txBody>
@@ -9073,7 +9073,7 @@
                 </a:solidFill>
                 <a:latin typeface="Segoe UI"/>
               </a:rPr>
-              <a:t>-51.4%</a:t>
+              <a:t>-50.7%</a:t>
             </a:r>
           </a:p>
         </p:txBody>
@@ -9103,11 +9103,11 @@
             <a:r>
               <a:rPr sz="1000" b="0">
                 <a:solidFill>
-                  <a:srgbClr val="EF4444"/>
-                </a:solidFill>
-                <a:latin typeface="Segoe UI"/>
-              </a:rPr>
-              <a:t>-0.2%</a:t>
+                  <a:srgbClr val="22C55E"/>
+                </a:solidFill>
+                <a:latin typeface="Segoe UI"/>
+              </a:rPr>
+              <a:t>+1.9%</a:t>
             </a:r>
           </a:p>
         </p:txBody>
@@ -9141,7 +9141,7 @@
                 </a:solidFill>
                 <a:latin typeface="Segoe UI"/>
               </a:rPr>
-              <a:t>Total Rs 1,725,580 | P&amp;L Rs -7,267 (-0.4%) | Sharpe -0.42 | Vol 17.72% | VaR95 -1.88%/day</a:t>
+              <a:t>Total Rs 1,741,834 | P&amp;L Rs 11,702 (+0.7%) | Sharpe -0.37 | Vol 17.75% | VaR95 -1.87%/day</a:t>
             </a:r>
           </a:p>
         </p:txBody>

--- a/docs/pmr_daily.pptx
+++ b/docs/pmr_daily.pptx
@@ -3197,7 +3197,7 @@
                 </a:solidFill>
                 <a:latin typeface="Segoe UI"/>
               </a:rPr>
-              <a:t>Wednesday, 29 Jul 2026 16:11 SGT</a:t>
+              <a:t>Thursday, 30 Jul 2026 15:56 SGT</a:t>
             </a:r>
           </a:p>
         </p:txBody>
@@ -3265,7 +3265,7 @@
                 </a:solidFill>
                 <a:latin typeface="Segoe UI"/>
               </a:rPr>
-              <a:t>RAG 19R / 12A / 15G   |   54.3% above 200DMA   |   Portfolio Rs 1,741,834 (+0.7%)</a:t>
+              <a:t>RAG 18R / 12A / 15G   |   55.6% above 200DMA   |   Portfolio Rs 1,738,596 (+0.4%)</a:t>
             </a:r>
           </a:p>
         </p:txBody>
@@ -3461,7 +3461,7 @@
                 </a:solidFill>
                 <a:latin typeface="Segoe UI"/>
               </a:rPr>
-              <a:t>Ethereum</a:t>
+              <a:t>Crude Oil WTI</a:t>
             </a:r>
           </a:p>
         </p:txBody>
@@ -3495,7 +3495,7 @@
                 </a:solidFill>
                 <a:latin typeface="Segoe UI"/>
               </a:rPr>
-              <a:t>ETH-USD · RED</a:t>
+              <a:t>CL=F · RED</a:t>
             </a:r>
           </a:p>
         </p:txBody>
@@ -3529,7 +3529,7 @@
                 </a:solidFill>
                 <a:latin typeface="Segoe UI"/>
               </a:rPr>
-              <a:t>+21.9%</a:t>
+              <a:t>+22.6%</a:t>
             </a:r>
           </a:p>
         </p:txBody>
@@ -3655,7 +3655,7 @@
                 </a:solidFill>
                 <a:latin typeface="Segoe UI"/>
               </a:rPr>
-              <a:t>+21.3%</a:t>
+              <a:t>+21.6%</a:t>
             </a:r>
           </a:p>
         </p:txBody>
@@ -3713,7 +3713,7 @@
                 </a:solidFill>
                 <a:latin typeface="Segoe UI"/>
               </a:rPr>
-              <a:t>NIFTY IT</a:t>
+              <a:t>Ethereum</a:t>
             </a:r>
           </a:p>
         </p:txBody>
@@ -3747,7 +3747,7 @@
                 </a:solidFill>
                 <a:latin typeface="Segoe UI"/>
               </a:rPr>
-              <a:t>^CNXIT · RED</a:t>
+              <a:t>ETH-USD · RED</a:t>
             </a:r>
           </a:p>
         </p:txBody>
@@ -3781,7 +3781,7 @@
                 </a:solidFill>
                 <a:latin typeface="Segoe UI"/>
               </a:rPr>
-              <a:t>+18.6%</a:t>
+              <a:t>+21.1%</a:t>
             </a:r>
           </a:p>
         </p:txBody>
@@ -3839,7 +3839,7 @@
                 </a:solidFill>
                 <a:latin typeface="Segoe UI"/>
               </a:rPr>
-              <a:t>Crude Oil WTI</a:t>
+              <a:t>NIFTY IT</a:t>
             </a:r>
           </a:p>
         </p:txBody>
@@ -3873,7 +3873,7 @@
                 </a:solidFill>
                 <a:latin typeface="Segoe UI"/>
               </a:rPr>
-              <a:t>CL=F · RED</a:t>
+              <a:t>^CNXIT · RED</a:t>
             </a:r>
           </a:p>
         </p:txBody>
@@ -3907,7 +3907,7 @@
                 </a:solidFill>
                 <a:latin typeface="Segoe UI"/>
               </a:rPr>
-              <a:t>+18.2%</a:t>
+              <a:t>+19.8%</a:t>
             </a:r>
           </a:p>
         </p:txBody>
@@ -3965,7 +3965,7 @@
                 </a:solidFill>
                 <a:latin typeface="Segoe UI"/>
               </a:rPr>
-              <a:t>Apple</a:t>
+              <a:t>Infosys</a:t>
             </a:r>
           </a:p>
         </p:txBody>
@@ -3995,11 +3995,11 @@
             <a:r>
               <a:rPr sz="900" b="0">
                 <a:solidFill>
-                  <a:srgbClr val="22C55E"/>
-                </a:solidFill>
-                <a:latin typeface="Segoe UI"/>
-              </a:rPr>
-              <a:t>AAPL · GREEN</a:t>
+                  <a:srgbClr val="EF4444"/>
+                </a:solidFill>
+                <a:latin typeface="Segoe UI"/>
+              </a:rPr>
+              <a:t>INFY.NS · RED</a:t>
             </a:r>
           </a:p>
         </p:txBody>
@@ -4033,7 +4033,7 @@
                 </a:solidFill>
                 <a:latin typeface="Segoe UI"/>
               </a:rPr>
-              <a:t>+16.4%</a:t>
+              <a:t>+17.3%</a:t>
             </a:r>
           </a:p>
         </p:txBody>
@@ -4193,7 +4193,7 @@
                 </a:solidFill>
                 <a:latin typeface="Segoe UI"/>
               </a:rPr>
-              <a:t>-26.5%</a:t>
+              <a:t>-29.1%</a:t>
             </a:r>
           </a:p>
         </p:txBody>
@@ -4251,7 +4251,7 @@
                 </a:solidFill>
                 <a:latin typeface="Segoe UI"/>
               </a:rPr>
-              <a:t>Natural Gas</a:t>
+              <a:t>Clean Energy</a:t>
             </a:r>
           </a:p>
         </p:txBody>
@@ -4285,7 +4285,7 @@
                 </a:solidFill>
                 <a:latin typeface="Segoe UI"/>
               </a:rPr>
-              <a:t>NG=F · RED</a:t>
+              <a:t>ICLN · RED</a:t>
             </a:r>
           </a:p>
         </p:txBody>
@@ -4319,7 +4319,7 @@
                 </a:solidFill>
                 <a:latin typeface="Segoe UI"/>
               </a:rPr>
-              <a:t>-18.1%</a:t>
+              <a:t>-17.7%</a:t>
             </a:r>
           </a:p>
         </p:txBody>
@@ -4377,7 +4377,7 @@
                 </a:solidFill>
                 <a:latin typeface="Segoe UI"/>
               </a:rPr>
-              <a:t>Clean Energy</a:t>
+              <a:t>Natural Gas</a:t>
             </a:r>
           </a:p>
         </p:txBody>
@@ -4411,7 +4411,7 @@
                 </a:solidFill>
                 <a:latin typeface="Segoe UI"/>
               </a:rPr>
-              <a:t>ICLN · RED</a:t>
+              <a:t>NG=F · RED</a:t>
             </a:r>
           </a:p>
         </p:txBody>
@@ -4445,7 +4445,7 @@
                 </a:solidFill>
                 <a:latin typeface="Segoe UI"/>
               </a:rPr>
-              <a:t>-13.1%</a:t>
+              <a:t>-16.9%</a:t>
             </a:r>
           </a:p>
         </p:txBody>
@@ -4503,7 +4503,7 @@
                 </a:solidFill>
                 <a:latin typeface="Segoe UI"/>
               </a:rPr>
-              <a:t>Nikkei 225</a:t>
+              <a:t>US Technology</a:t>
             </a:r>
           </a:p>
         </p:txBody>
@@ -4537,7 +4537,7 @@
                 </a:solidFill>
                 <a:latin typeface="Segoe UI"/>
               </a:rPr>
-              <a:t>^N225 · RED</a:t>
+              <a:t>XLK · RED</a:t>
             </a:r>
           </a:p>
         </p:txBody>
@@ -4571,7 +4571,7 @@
                 </a:solidFill>
                 <a:latin typeface="Segoe UI"/>
               </a:rPr>
-              <a:t>-12.3%</a:t>
+              <a:t>-12.6%</a:t>
             </a:r>
           </a:p>
         </p:txBody>
@@ -4629,7 +4629,7 @@
                 </a:solidFill>
                 <a:latin typeface="Segoe UI"/>
               </a:rPr>
-              <a:t>Alphabet</a:t>
+              <a:t>Nikkei 225</a:t>
             </a:r>
           </a:p>
         </p:txBody>
@@ -4663,7 +4663,7 @@
                 </a:solidFill>
                 <a:latin typeface="Segoe UI"/>
               </a:rPr>
-              <a:t>GOOGL · RED</a:t>
+              <a:t>^N225 · RED</a:t>
             </a:r>
           </a:p>
         </p:txBody>
@@ -4697,7 +4697,7 @@
                 </a:solidFill>
                 <a:latin typeface="Segoe UI"/>
               </a:rPr>
-              <a:t>-8.6%</a:t>
+              <a:t>-11.7%</a:t>
             </a:r>
           </a:p>
         </p:txBody>
@@ -5171,7 +5171,7 @@
                 </a:solidFill>
                 <a:latin typeface="Segoe UI"/>
               </a:rPr>
-              <a:t>86%</a:t>
+              <a:t>85%</a:t>
             </a:r>
           </a:p>
         </p:txBody>
@@ -5307,7 +5307,7 @@
                 </a:solidFill>
                 <a:latin typeface="Segoe UI"/>
               </a:rPr>
-              <a:t>85%</a:t>
+              <a:t>84%</a:t>
             </a:r>
           </a:p>
         </p:txBody>
@@ -5375,7 +5375,7 @@
                 </a:solidFill>
                 <a:latin typeface="Segoe UI"/>
               </a:rPr>
-              <a:t>Bharti Airtel</a:t>
+              <a:t>USD/JPY</a:t>
             </a:r>
           </a:p>
         </p:txBody>
@@ -5443,7 +5443,7 @@
                 </a:solidFill>
                 <a:latin typeface="Segoe UI"/>
               </a:rPr>
-              <a:t>91%</a:t>
+              <a:t>95%</a:t>
             </a:r>
           </a:p>
         </p:txBody>
@@ -5511,7 +5511,7 @@
                 </a:solidFill>
                 <a:latin typeface="Segoe UI"/>
               </a:rPr>
-              <a:t>USD/JPY</a:t>
+              <a:t>Bharti Airtel</a:t>
             </a:r>
           </a:p>
         </p:txBody>
@@ -5579,7 +5579,7 @@
                 </a:solidFill>
                 <a:latin typeface="Segoe UI"/>
               </a:rPr>
-              <a:t>95%</a:t>
+              <a:t>89%</a:t>
             </a:r>
           </a:p>
         </p:txBody>
@@ -5647,7 +5647,7 @@
                 </a:solidFill>
                 <a:latin typeface="Segoe UI"/>
               </a:rPr>
-              <a:t>Dollar Index</a:t>
+              <a:t>US 1-3Y Treasury</a:t>
             </a:r>
           </a:p>
         </p:txBody>
@@ -5783,7 +5783,7 @@
                 </a:solidFill>
                 <a:latin typeface="Segoe UI"/>
               </a:rPr>
-              <a:t>Dow Jones</a:t>
+              <a:t>Dollar Index</a:t>
             </a:r>
           </a:p>
         </p:txBody>
@@ -5919,7 +5919,7 @@
                 </a:solidFill>
                 <a:latin typeface="Segoe UI"/>
               </a:rPr>
-              <a:t>Copper</a:t>
+              <a:t>US Energy</a:t>
             </a:r>
           </a:p>
         </p:txBody>
@@ -5987,7 +5987,7 @@
                 </a:solidFill>
                 <a:latin typeface="Segoe UI"/>
               </a:rPr>
-              <a:t>93%</a:t>
+              <a:t>81%</a:t>
             </a:r>
           </a:p>
         </p:txBody>
@@ -6021,7 +6021,7 @@
                 </a:solidFill>
                 <a:latin typeface="Segoe UI"/>
               </a:rPr>
-              <a:t>above 200DMA · golden cross (50&gt;200) · MACD bullish</a:t>
+              <a:t>above 200DMA · golden cross (50&gt;200) · MACD bearish</a:t>
             </a:r>
           </a:p>
         </p:txBody>
@@ -6055,7 +6055,7 @@
                 </a:solidFill>
                 <a:latin typeface="Segoe UI"/>
               </a:rPr>
-              <a:t>DAX</a:t>
+              <a:t>Copper</a:t>
             </a:r>
           </a:p>
         </p:txBody>
@@ -6259,7 +6259,7 @@
                 </a:solidFill>
                 <a:latin typeface="Segoe UI"/>
               </a:rPr>
-              <a:t>79%</a:t>
+              <a:t>78%</a:t>
             </a:r>
           </a:p>
         </p:txBody>
@@ -6659,7 +6659,7 @@
                 </a:solidFill>
                 <a:latin typeface="Segoe UI"/>
               </a:rPr>
-              <a:t>Base currency INR · USD/INR 95.6</a:t>
+              <a:t>Base currency INR · USD/INR 95.74</a:t>
             </a:r>
           </a:p>
         </p:txBody>
@@ -7067,7 +7067,7 @@
                 </a:solidFill>
                 <a:latin typeface="Segoe UI"/>
               </a:rPr>
-              <a:t>64,302</a:t>
+              <a:t>63,893</a:t>
             </a:r>
           </a:p>
         </p:txBody>
@@ -7101,7 +7101,7 @@
                 </a:solidFill>
                 <a:latin typeface="Segoe UI"/>
               </a:rPr>
-              <a:t>Rs 614,696</a:t>
+              <a:t>Rs 611,677</a:t>
             </a:r>
           </a:p>
         </p:txBody>
@@ -7135,7 +7135,7 @@
                 </a:solidFill>
                 <a:latin typeface="Segoe UI"/>
               </a:rPr>
-              <a:t>Rs 41,126</a:t>
+              <a:t>Rs 37,267</a:t>
             </a:r>
           </a:p>
         </p:txBody>
@@ -7169,7 +7169,7 @@
                 </a:solidFill>
                 <a:latin typeface="Segoe UI"/>
               </a:rPr>
-              <a:t>+7.2%</a:t>
+              <a:t>+6.5%</a:t>
             </a:r>
           </a:p>
         </p:txBody>
@@ -7199,11 +7199,11 @@
             <a:r>
               <a:rPr sz="1000" b="0">
                 <a:solidFill>
-                  <a:srgbClr val="22C55E"/>
-                </a:solidFill>
-                <a:latin typeface="Segoe UI"/>
-              </a:rPr>
-              <a:t>+0.7%</a:t>
+                  <a:srgbClr val="EF4444"/>
+                </a:solidFill>
+                <a:latin typeface="Segoe UI"/>
+              </a:rPr>
+              <a:t>-0.0%</a:t>
             </a:r>
           </a:p>
         </p:txBody>
@@ -7339,7 +7339,7 @@
                 </a:solidFill>
                 <a:latin typeface="Segoe UI"/>
               </a:rPr>
-              <a:t>4,102</a:t>
+              <a:t>4,101</a:t>
             </a:r>
           </a:p>
         </p:txBody>
@@ -7373,7 +7373,7 @@
                 </a:solidFill>
                 <a:latin typeface="Segoe UI"/>
               </a:rPr>
-              <a:t>Rs 392,169</a:t>
+              <a:t>Rs 392,628</a:t>
             </a:r>
           </a:p>
         </p:txBody>
@@ -7407,7 +7407,7 @@
                 </a:solidFill>
                 <a:latin typeface="Segoe UI"/>
               </a:rPr>
-              <a:t>Rs 172,300</a:t>
+              <a:t>Rs 172,438</a:t>
             </a:r>
           </a:p>
         </p:txBody>
@@ -7441,7 +7441,7 @@
                 </a:solidFill>
                 <a:latin typeface="Segoe UI"/>
               </a:rPr>
-              <a:t>+78.4%</a:t>
+              <a:t>+78.3%</a:t>
             </a:r>
           </a:p>
         </p:txBody>
@@ -7611,7 +7611,7 @@
                 </a:solidFill>
                 <a:latin typeface="Segoe UI"/>
               </a:rPr>
-              <a:t>337</a:t>
+              <a:t>338</a:t>
             </a:r>
           </a:p>
         </p:txBody>
@@ -7645,7 +7645,7 @@
                 </a:solidFill>
                 <a:latin typeface="Segoe UI"/>
               </a:rPr>
-              <a:t>Rs 322,069</a:t>
+              <a:t>Rs 323,766</a:t>
             </a:r>
           </a:p>
         </p:txBody>
@@ -7679,7 +7679,7 @@
                 </a:solidFill>
                 <a:latin typeface="Segoe UI"/>
               </a:rPr>
-              <a:t>Rs 145,218</a:t>
+              <a:t>Rs 146,656</a:t>
             </a:r>
           </a:p>
         </p:txBody>
@@ -7713,7 +7713,7 @@
                 </a:solidFill>
                 <a:latin typeface="Segoe UI"/>
               </a:rPr>
-              <a:t>+82.1%</a:t>
+              <a:t>+82.8%</a:t>
             </a:r>
           </a:p>
         </p:txBody>
@@ -7883,7 +7883,7 @@
                 </a:solidFill>
                 <a:latin typeface="Segoe UI"/>
               </a:rPr>
-              <a:t>197</a:t>
+              <a:t>190</a:t>
             </a:r>
           </a:p>
         </p:txBody>
@@ -7917,7 +7917,7 @@
                 </a:solidFill>
                 <a:latin typeface="Segoe UI"/>
               </a:rPr>
-              <a:t>Rs 150,283</a:t>
+              <a:t>Rs 145,525</a:t>
             </a:r>
           </a:p>
         </p:txBody>
@@ -7951,7 +7951,7 @@
                 </a:solidFill>
                 <a:latin typeface="Segoe UI"/>
               </a:rPr>
-              <a:t>Rs -193,859</a:t>
+              <a:t>Rs -199,121</a:t>
             </a:r>
           </a:p>
         </p:txBody>
@@ -7985,7 +7985,7 @@
                 </a:solidFill>
                 <a:latin typeface="Segoe UI"/>
               </a:rPr>
-              <a:t>-56.3%</a:t>
+              <a:t>-57.8%</a:t>
             </a:r>
           </a:p>
         </p:txBody>
@@ -8155,7 +8155,7 @@
                 </a:solidFill>
                 <a:latin typeface="Segoe UI"/>
               </a:rPr>
-              <a:t>1,156</a:t>
+              <a:t>1,174</a:t>
             </a:r>
           </a:p>
         </p:txBody>
@@ -8189,7 +8189,7 @@
                 </a:solidFill>
                 <a:latin typeface="Segoe UI"/>
               </a:rPr>
-              <a:t>Rs 92,472</a:t>
+              <a:t>Rs 93,888</a:t>
             </a:r>
           </a:p>
         </p:txBody>
@@ -8223,7 +8223,7 @@
                 </a:solidFill>
                 <a:latin typeface="Segoe UI"/>
               </a:rPr>
-              <a:t>Rs -19,528</a:t>
+              <a:t>Rs -18,112</a:t>
             </a:r>
           </a:p>
         </p:txBody>
@@ -8257,7 +8257,7 @@
                 </a:solidFill>
                 <a:latin typeface="Segoe UI"/>
               </a:rPr>
-              <a:t>-17.4%</a:t>
+              <a:t>-16.2%</a:t>
             </a:r>
           </a:p>
         </p:txBody>
@@ -8291,7 +8291,7 @@
                 </a:solidFill>
                 <a:latin typeface="Segoe UI"/>
               </a:rPr>
-              <a:t>+4.5%</a:t>
+              <a:t>+1.6%</a:t>
             </a:r>
           </a:p>
         </p:txBody>
@@ -8427,7 +8427,7 @@
                 </a:solidFill>
                 <a:latin typeface="Segoe UI"/>
               </a:rPr>
-              <a:t>1,278</a:t>
+              <a:t>1,293</a:t>
             </a:r>
           </a:p>
         </p:txBody>
@@ -8461,7 +8461,7 @@
                 </a:solidFill>
                 <a:latin typeface="Segoe UI"/>
               </a:rPr>
-              <a:t>Rs 63,915</a:t>
+              <a:t>Rs 64,635</a:t>
             </a:r>
           </a:p>
         </p:txBody>
@@ -8495,7 +8495,7 @@
                 </a:solidFill>
                 <a:latin typeface="Segoe UI"/>
               </a:rPr>
-              <a:t>Rs -58,585</a:t>
+              <a:t>Rs -57,865</a:t>
             </a:r>
           </a:p>
         </p:txBody>
@@ -8529,7 +8529,7 @@
                 </a:solidFill>
                 <a:latin typeface="Segoe UI"/>
               </a:rPr>
-              <a:t>-47.8%</a:t>
+              <a:t>-47.2%</a:t>
             </a:r>
           </a:p>
         </p:txBody>
@@ -8559,11 +8559,11 @@
             <a:r>
               <a:rPr sz="1000" b="0">
                 <a:solidFill>
-                  <a:srgbClr val="EF4444"/>
-                </a:solidFill>
-                <a:latin typeface="Segoe UI"/>
-              </a:rPr>
-              <a:t>-0.1%</a:t>
+                  <a:srgbClr val="22C55E"/>
+                </a:solidFill>
+                <a:latin typeface="Segoe UI"/>
+              </a:rPr>
+              <a:t>+1.3%</a:t>
             </a:r>
           </a:p>
         </p:txBody>
@@ -8699,7 +8699,7 @@
                 </a:solidFill>
                 <a:latin typeface="Segoe UI"/>
               </a:rPr>
-              <a:t>2,450</a:t>
+              <a:t>2,456</a:t>
             </a:r>
           </a:p>
         </p:txBody>
@@ -8733,7 +8733,7 @@
                 </a:solidFill>
                 <a:latin typeface="Segoe UI"/>
               </a:rPr>
-              <a:t>Rs 61,260</a:t>
+              <a:t>Rs 61,408</a:t>
             </a:r>
           </a:p>
         </p:txBody>
@@ -8767,7 +8767,7 @@
                 </a:solidFill>
                 <a:latin typeface="Segoe UI"/>
               </a:rPr>
-              <a:t>Rs -28,740</a:t>
+              <a:t>Rs -28,592</a:t>
             </a:r>
           </a:p>
         </p:txBody>
@@ -8801,7 +8801,7 @@
                 </a:solidFill>
                 <a:latin typeface="Segoe UI"/>
               </a:rPr>
-              <a:t>-31.9%</a:t>
+              <a:t>-31.8%</a:t>
             </a:r>
           </a:p>
         </p:txBody>
@@ -8835,7 +8835,7 @@
                 </a:solidFill>
                 <a:latin typeface="Segoe UI"/>
               </a:rPr>
-              <a:t>+2.2%</a:t>
+              <a:t>+0.4%</a:t>
             </a:r>
           </a:p>
         </p:txBody>
@@ -8971,7 +8971,7 @@
                 </a:solidFill>
                 <a:latin typeface="Segoe UI"/>
               </a:rPr>
-              <a:t>750</a:t>
+              <a:t>751</a:t>
             </a:r>
           </a:p>
         </p:txBody>
@@ -9005,7 +9005,7 @@
                 </a:solidFill>
                 <a:latin typeface="Segoe UI"/>
               </a:rPr>
-              <a:t>Rs 44,970</a:t>
+              <a:t>Rs 45,069</a:t>
             </a:r>
           </a:p>
         </p:txBody>
@@ -9039,7 +9039,7 @@
                 </a:solidFill>
                 <a:latin typeface="Segoe UI"/>
               </a:rPr>
-              <a:t>Rs -46,230</a:t>
+              <a:t>Rs -46,131</a:t>
             </a:r>
           </a:p>
         </p:txBody>
@@ -9073,7 +9073,7 @@
                 </a:solidFill>
                 <a:latin typeface="Segoe UI"/>
               </a:rPr>
-              <a:t>-50.7%</a:t>
+              <a:t>-50.6%</a:t>
             </a:r>
           </a:p>
         </p:txBody>
@@ -9107,7 +9107,7 @@
                 </a:solidFill>
                 <a:latin typeface="Segoe UI"/>
               </a:rPr>
-              <a:t>+1.9%</a:t>
+              <a:t>+0.4%</a:t>
             </a:r>
           </a:p>
         </p:txBody>
@@ -9141,7 +9141,7 @@
                 </a:solidFill>
                 <a:latin typeface="Segoe UI"/>
               </a:rPr>
-              <a:t>Total Rs 1,741,834 | P&amp;L Rs 11,702 (+0.7%) | Sharpe -0.37 | Vol 17.75% | VaR95 -1.87%/day</a:t>
+              <a:t>Total Rs 1,738,596 | P&amp;L Rs 6,540 (+0.4%) | Sharpe -0.26 | Vol 17.53% | VaR95 -1.76%/day</a:t>
             </a:r>
           </a:p>
         </p:txBody>

--- a/docs/pmr_daily.pptx
+++ b/docs/pmr_daily.pptx
@@ -3197,7 +3197,7 @@
                 </a:solidFill>
                 <a:latin typeface="Segoe UI"/>
               </a:rPr>
-              <a:t>Thursday, 30 Jul 2026 15:56 SGT</a:t>
+              <a:t>Friday, 31 Jul 2026 17:34 SGT</a:t>
             </a:r>
           </a:p>
         </p:txBody>
@@ -3227,11 +3227,11 @@
             <a:r>
               <a:rPr sz="2000" b="1">
                 <a:solidFill>
-                  <a:srgbClr val="EF4444"/>
-                </a:solidFill>
-                <a:latin typeface="Segoe UI"/>
-              </a:rPr>
-              <a:t>Market tone: RISK-OFF</a:t>
+                  <a:srgbClr val="F59E0B"/>
+                </a:solidFill>
+                <a:latin typeface="Segoe UI"/>
+              </a:rPr>
+              <a:t>Market tone: MIXED</a:t>
             </a:r>
           </a:p>
         </p:txBody>
@@ -3265,7 +3265,7 @@
                 </a:solidFill>
                 <a:latin typeface="Segoe UI"/>
               </a:rPr>
-              <a:t>RAG 18R / 12A / 15G   |   55.6% above 200DMA   |   Portfolio Rs 1,738,596 (+0.4%)</a:t>
+              <a:t>RAG 14R / 15A / 17G   |   54.3% above 200DMA   |   Portfolio Rs 1,726,021 (-0.1%)</a:t>
             </a:r>
           </a:p>
         </p:txBody>
@@ -3461,7 +3461,7 @@
                 </a:solidFill>
                 <a:latin typeface="Segoe UI"/>
               </a:rPr>
-              <a:t>Crude Oil WTI</a:t>
+              <a:t>Microsoft</a:t>
             </a:r>
           </a:p>
         </p:txBody>
@@ -3491,11 +3491,11 @@
             <a:r>
               <a:rPr sz="900" b="0">
                 <a:solidFill>
-                  <a:srgbClr val="EF4444"/>
-                </a:solidFill>
-                <a:latin typeface="Segoe UI"/>
-              </a:rPr>
-              <a:t>CL=F · RED</a:t>
+                  <a:srgbClr val="22C55E"/>
+                </a:solidFill>
+                <a:latin typeface="Segoe UI"/>
+              </a:rPr>
+              <a:t>MSFT · GREEN</a:t>
             </a:r>
           </a:p>
         </p:txBody>
@@ -3529,7 +3529,7 @@
                 </a:solidFill>
                 <a:latin typeface="Segoe UI"/>
               </a:rPr>
-              <a:t>+22.6%</a:t>
+              <a:t>+20.9%</a:t>
             </a:r>
           </a:p>
         </p:txBody>
@@ -3587,7 +3587,7 @@
                 </a:solidFill>
                 <a:latin typeface="Segoe UI"/>
               </a:rPr>
-              <a:t>TCS</a:t>
+              <a:t>Ethereum</a:t>
             </a:r>
           </a:p>
         </p:txBody>
@@ -3621,7 +3621,7 @@
                 </a:solidFill>
                 <a:latin typeface="Segoe UI"/>
               </a:rPr>
-              <a:t>TCS.NS · RED</a:t>
+              <a:t>ETH-USD · RED</a:t>
             </a:r>
           </a:p>
         </p:txBody>
@@ -3655,7 +3655,7 @@
                 </a:solidFill>
                 <a:latin typeface="Segoe UI"/>
               </a:rPr>
-              <a:t>+21.6%</a:t>
+              <a:t>+19.9%</a:t>
             </a:r>
           </a:p>
         </p:txBody>
@@ -3713,7 +3713,7 @@
                 </a:solidFill>
                 <a:latin typeface="Segoe UI"/>
               </a:rPr>
-              <a:t>Ethereum</a:t>
+              <a:t>Crude Oil WTI</a:t>
             </a:r>
           </a:p>
         </p:txBody>
@@ -3747,7 +3747,7 @@
                 </a:solidFill>
                 <a:latin typeface="Segoe UI"/>
               </a:rPr>
-              <a:t>ETH-USD · RED</a:t>
+              <a:t>CL=F · RED</a:t>
             </a:r>
           </a:p>
         </p:txBody>
@@ -3781,7 +3781,7 @@
                 </a:solidFill>
                 <a:latin typeface="Segoe UI"/>
               </a:rPr>
-              <a:t>+21.1%</a:t>
+              <a:t>+19.5%</a:t>
             </a:r>
           </a:p>
         </p:txBody>
@@ -3839,7 +3839,7 @@
                 </a:solidFill>
                 <a:latin typeface="Segoe UI"/>
               </a:rPr>
-              <a:t>NIFTY IT</a:t>
+              <a:t>TCS</a:t>
             </a:r>
           </a:p>
         </p:txBody>
@@ -3873,7 +3873,7 @@
                 </a:solidFill>
                 <a:latin typeface="Segoe UI"/>
               </a:rPr>
-              <a:t>^CNXIT · RED</a:t>
+              <a:t>TCS.NS · RED</a:t>
             </a:r>
           </a:p>
         </p:txBody>
@@ -3907,7 +3907,7 @@
                 </a:solidFill>
                 <a:latin typeface="Segoe UI"/>
               </a:rPr>
-              <a:t>+19.8%</a:t>
+              <a:t>+17.0%</a:t>
             </a:r>
           </a:p>
         </p:txBody>
@@ -3965,7 +3965,7 @@
                 </a:solidFill>
                 <a:latin typeface="Segoe UI"/>
               </a:rPr>
-              <a:t>Infosys</a:t>
+              <a:t>NIFTY IT</a:t>
             </a:r>
           </a:p>
         </p:txBody>
@@ -3999,7 +3999,7 @@
                 </a:solidFill>
                 <a:latin typeface="Segoe UI"/>
               </a:rPr>
-              <a:t>INFY.NS · RED</a:t>
+              <a:t>^CNXIT · RED</a:t>
             </a:r>
           </a:p>
         </p:txBody>
@@ -4033,7 +4033,7 @@
                 </a:solidFill>
                 <a:latin typeface="Segoe UI"/>
               </a:rPr>
-              <a:t>+17.3%</a:t>
+              <a:t>+16.6%</a:t>
             </a:r>
           </a:p>
         </p:txBody>
@@ -4193,7 +4193,7 @@
                 </a:solidFill>
                 <a:latin typeface="Segoe UI"/>
               </a:rPr>
-              <a:t>-29.1%</a:t>
+              <a:t>-26.6%</a:t>
             </a:r>
           </a:p>
         </p:txBody>
@@ -4251,7 +4251,7 @@
                 </a:solidFill>
                 <a:latin typeface="Segoe UI"/>
               </a:rPr>
-              <a:t>Clean Energy</a:t>
+              <a:t>Natural Gas</a:t>
             </a:r>
           </a:p>
         </p:txBody>
@@ -4285,7 +4285,7 @@
                 </a:solidFill>
                 <a:latin typeface="Segoe UI"/>
               </a:rPr>
-              <a:t>ICLN · RED</a:t>
+              <a:t>NG=F · RED</a:t>
             </a:r>
           </a:p>
         </p:txBody>
@@ -4319,7 +4319,7 @@
                 </a:solidFill>
                 <a:latin typeface="Segoe UI"/>
               </a:rPr>
-              <a:t>-17.7%</a:t>
+              <a:t>-15.5%</a:t>
             </a:r>
           </a:p>
         </p:txBody>
@@ -4377,7 +4377,7 @@
                 </a:solidFill>
                 <a:latin typeface="Segoe UI"/>
               </a:rPr>
-              <a:t>Natural Gas</a:t>
+              <a:t>Clean Energy</a:t>
             </a:r>
           </a:p>
         </p:txBody>
@@ -4411,7 +4411,7 @@
                 </a:solidFill>
                 <a:latin typeface="Segoe UI"/>
               </a:rPr>
-              <a:t>NG=F · RED</a:t>
+              <a:t>ICLN · RED</a:t>
             </a:r>
           </a:p>
         </p:txBody>
@@ -4445,7 +4445,7 @@
                 </a:solidFill>
                 <a:latin typeface="Segoe UI"/>
               </a:rPr>
-              <a:t>-16.9%</a:t>
+              <a:t>-13.8%</a:t>
             </a:r>
           </a:p>
         </p:txBody>
@@ -4503,7 +4503,7 @@
                 </a:solidFill>
                 <a:latin typeface="Segoe UI"/>
               </a:rPr>
-              <a:t>US Technology</a:t>
+              <a:t>Nikkei 225</a:t>
             </a:r>
           </a:p>
         </p:txBody>
@@ -4533,11 +4533,11 @@
             <a:r>
               <a:rPr sz="900" b="0">
                 <a:solidFill>
-                  <a:srgbClr val="EF4444"/>
-                </a:solidFill>
-                <a:latin typeface="Segoe UI"/>
-              </a:rPr>
-              <a:t>XLK · RED</a:t>
+                  <a:srgbClr val="F59E0B"/>
+                </a:solidFill>
+                <a:latin typeface="Segoe UI"/>
+              </a:rPr>
+              <a:t>^N225 · AMBER</a:t>
             </a:r>
           </a:p>
         </p:txBody>
@@ -4571,7 +4571,7 @@
                 </a:solidFill>
                 <a:latin typeface="Segoe UI"/>
               </a:rPr>
-              <a:t>-12.6%</a:t>
+              <a:t>-8.1%</a:t>
             </a:r>
           </a:p>
         </p:txBody>
@@ -4629,7 +4629,7 @@
                 </a:solidFill>
                 <a:latin typeface="Segoe UI"/>
               </a:rPr>
-              <a:t>Nikkei 225</a:t>
+              <a:t>US Technology</a:t>
             </a:r>
           </a:p>
         </p:txBody>
@@ -4659,11 +4659,11 @@
             <a:r>
               <a:rPr sz="900" b="0">
                 <a:solidFill>
-                  <a:srgbClr val="EF4444"/>
-                </a:solidFill>
-                <a:latin typeface="Segoe UI"/>
-              </a:rPr>
-              <a:t>^N225 · RED</a:t>
+                  <a:srgbClr val="F59E0B"/>
+                </a:solidFill>
+                <a:latin typeface="Segoe UI"/>
+              </a:rPr>
+              <a:t>XLK · AMBER</a:t>
             </a:r>
           </a:p>
         </p:txBody>
@@ -4697,7 +4697,7 @@
                 </a:solidFill>
                 <a:latin typeface="Segoe UI"/>
               </a:rPr>
-              <a:t>-11.7%</a:t>
+              <a:t>-7.8%</a:t>
             </a:r>
           </a:p>
         </p:txBody>
@@ -4967,7 +4967,7 @@
                 </a:solidFill>
                 <a:latin typeface="Segoe UI"/>
               </a:rPr>
-              <a:t>Apple</a:t>
+              <a:t>US Financials</a:t>
             </a:r>
           </a:p>
         </p:txBody>
@@ -5035,7 +5035,7 @@
                 </a:solidFill>
                 <a:latin typeface="Segoe UI"/>
               </a:rPr>
-              <a:t>95%</a:t>
+              <a:t>86%</a:t>
             </a:r>
           </a:p>
         </p:txBody>
@@ -5069,7 +5069,7 @@
                 </a:solidFill>
                 <a:latin typeface="Segoe UI"/>
               </a:rPr>
-              <a:t>above 200DMA · golden cross (50&gt;200) · MACD bullish</a:t>
+              <a:t>above 200DMA · golden cross (50&gt;200) · MACD bearish</a:t>
             </a:r>
           </a:p>
         </p:txBody>
@@ -5103,7 +5103,7 @@
                 </a:solidFill>
                 <a:latin typeface="Segoe UI"/>
               </a:rPr>
-              <a:t>US Financials</a:t>
+              <a:t>ICICI Bank</a:t>
             </a:r>
           </a:p>
         </p:txBody>
@@ -5239,7 +5239,7 @@
                 </a:solidFill>
                 <a:latin typeface="Segoe UI"/>
               </a:rPr>
-              <a:t>ICICI Bank</a:t>
+              <a:t>Apple</a:t>
             </a:r>
           </a:p>
         </p:txBody>
@@ -5307,7 +5307,7 @@
                 </a:solidFill>
                 <a:latin typeface="Segoe UI"/>
               </a:rPr>
-              <a:t>84%</a:t>
+              <a:t>85%</a:t>
             </a:r>
           </a:p>
         </p:txBody>
@@ -5375,7 +5375,7 @@
                 </a:solidFill>
                 <a:latin typeface="Segoe UI"/>
               </a:rPr>
-              <a:t>USD/JPY</a:t>
+              <a:t>US Energy</a:t>
             </a:r>
           </a:p>
         </p:txBody>
@@ -5443,7 +5443,7 @@
                 </a:solidFill>
                 <a:latin typeface="Segoe UI"/>
               </a:rPr>
-              <a:t>95%</a:t>
+              <a:t>83%</a:t>
             </a:r>
           </a:p>
         </p:txBody>
@@ -5477,7 +5477,7 @@
                 </a:solidFill>
                 <a:latin typeface="Segoe UI"/>
               </a:rPr>
-              <a:t>above 200DMA · golden cross (50&gt;200) · MACD bullish</a:t>
+              <a:t>above 200DMA · golden cross (50&gt;200) · MACD bearish</a:t>
             </a:r>
           </a:p>
         </p:txBody>
@@ -5511,7 +5511,7 @@
                 </a:solidFill>
                 <a:latin typeface="Segoe UI"/>
               </a:rPr>
-              <a:t>Bharti Airtel</a:t>
+              <a:t>Copper</a:t>
             </a:r>
           </a:p>
         </p:txBody>
@@ -5579,7 +5579,7 @@
                 </a:solidFill>
                 <a:latin typeface="Segoe UI"/>
               </a:rPr>
-              <a:t>89%</a:t>
+              <a:t>95%</a:t>
             </a:r>
           </a:p>
         </p:txBody>
@@ -5647,7 +5647,7 @@
                 </a:solidFill>
                 <a:latin typeface="Segoe UI"/>
               </a:rPr>
-              <a:t>US 1-3Y Treasury</a:t>
+              <a:t>DAX</a:t>
             </a:r>
           </a:p>
         </p:txBody>
@@ -5715,7 +5715,7 @@
                 </a:solidFill>
                 <a:latin typeface="Segoe UI"/>
               </a:rPr>
-              <a:t>94%</a:t>
+              <a:t>82%</a:t>
             </a:r>
           </a:p>
         </p:txBody>
@@ -5783,7 +5783,7 @@
                 </a:solidFill>
                 <a:latin typeface="Segoe UI"/>
               </a:rPr>
-              <a:t>Dollar Index</a:t>
+              <a:t>US 1-3Y Treasury</a:t>
             </a:r>
           </a:p>
         </p:txBody>
@@ -5851,7 +5851,7 @@
                 </a:solidFill>
                 <a:latin typeface="Segoe UI"/>
               </a:rPr>
-              <a:t>82%</a:t>
+              <a:t>94%</a:t>
             </a:r>
           </a:p>
         </p:txBody>
@@ -5885,7 +5885,7 @@
                 </a:solidFill>
                 <a:latin typeface="Segoe UI"/>
               </a:rPr>
-              <a:t>above 200DMA · golden cross (50&gt;200) · MACD bearish</a:t>
+              <a:t>above 200DMA · golden cross (50&gt;200) · MACD bullish</a:t>
             </a:r>
           </a:p>
         </p:txBody>
@@ -5919,7 +5919,7 @@
                 </a:solidFill>
                 <a:latin typeface="Segoe UI"/>
               </a:rPr>
-              <a:t>US Energy</a:t>
+              <a:t>Dow Jones</a:t>
             </a:r>
           </a:p>
         </p:txBody>
@@ -5987,7 +5987,7 @@
                 </a:solidFill>
                 <a:latin typeface="Segoe UI"/>
               </a:rPr>
-              <a:t>81%</a:t>
+              <a:t>82%</a:t>
             </a:r>
           </a:p>
         </p:txBody>
@@ -6055,7 +6055,7 @@
                 </a:solidFill>
                 <a:latin typeface="Segoe UI"/>
               </a:rPr>
-              <a:t>Copper</a:t>
+              <a:t>Bharti Airtel</a:t>
             </a:r>
           </a:p>
         </p:txBody>
@@ -6089,7 +6089,7 @@
                 </a:solidFill>
                 <a:latin typeface="Segoe UI"/>
               </a:rPr>
-              <a:t>STRONG BUY</a:t>
+              <a:t>BUY</a:t>
             </a:r>
           </a:p>
         </p:txBody>
@@ -6123,7 +6123,7 @@
                 </a:solidFill>
                 <a:latin typeface="Segoe UI"/>
               </a:rPr>
-              <a:t>80%</a:t>
+              <a:t>91%</a:t>
             </a:r>
           </a:p>
         </p:txBody>
@@ -6191,7 +6191,7 @@
                 </a:solidFill>
                 <a:latin typeface="Segoe UI"/>
               </a:rPr>
-              <a:t>Straits Times</a:t>
+              <a:t>FTSE 100</a:t>
             </a:r>
           </a:p>
         </p:txBody>
@@ -6327,7 +6327,7 @@
                 </a:solidFill>
                 <a:latin typeface="Segoe UI"/>
               </a:rPr>
-              <a:t>FTSE 100</a:t>
+              <a:t>Straits Times</a:t>
             </a:r>
           </a:p>
         </p:txBody>
@@ -6395,7 +6395,7 @@
                 </a:solidFill>
                 <a:latin typeface="Segoe UI"/>
               </a:rPr>
-              <a:t>77%</a:t>
+              <a:t>71%</a:t>
             </a:r>
           </a:p>
         </p:txBody>
@@ -6429,7 +6429,7 @@
                 </a:solidFill>
                 <a:latin typeface="Segoe UI"/>
               </a:rPr>
-              <a:t>above 200DMA · golden cross (50&gt;200) · MACD bullish</a:t>
+              <a:t>above 200DMA · golden cross (50&gt;200) · MACD bearish</a:t>
             </a:r>
           </a:p>
         </p:txBody>
@@ -6659,7 +6659,7 @@
                 </a:solidFill>
                 <a:latin typeface="Segoe UI"/>
               </a:rPr>
-              <a:t>Base currency INR · USD/INR 95.74</a:t>
+              <a:t>Base currency INR · USD/INR 95.44</a:t>
             </a:r>
           </a:p>
         </p:txBody>
@@ -7067,7 +7067,7 @@
                 </a:solidFill>
                 <a:latin typeface="Segoe UI"/>
               </a:rPr>
-              <a:t>63,893</a:t>
+              <a:t>63,605</a:t>
             </a:r>
           </a:p>
         </p:txBody>
@@ -7101,7 +7101,7 @@
                 </a:solidFill>
                 <a:latin typeface="Segoe UI"/>
               </a:rPr>
-              <a:t>Rs 611,677</a:t>
+              <a:t>Rs 607,027</a:t>
             </a:r>
           </a:p>
         </p:txBody>
@@ -7135,7 +7135,7 @@
                 </a:solidFill>
                 <a:latin typeface="Segoe UI"/>
               </a:rPr>
-              <a:t>Rs 37,267</a:t>
+              <a:t>Rs 34,402</a:t>
             </a:r>
           </a:p>
         </p:txBody>
@@ -7169,7 +7169,7 @@
                 </a:solidFill>
                 <a:latin typeface="Segoe UI"/>
               </a:rPr>
-              <a:t>+6.5%</a:t>
+              <a:t>+6.0%</a:t>
             </a:r>
           </a:p>
         </p:txBody>
@@ -7203,7 +7203,7 @@
                 </a:solidFill>
                 <a:latin typeface="Segoe UI"/>
               </a:rPr>
-              <a:t>-0.0%</a:t>
+              <a:t>-1.7%</a:t>
             </a:r>
           </a:p>
         </p:txBody>
@@ -7339,7 +7339,7 @@
                 </a:solidFill>
                 <a:latin typeface="Segoe UI"/>
               </a:rPr>
-              <a:t>4,101</a:t>
+              <a:t>4,109</a:t>
             </a:r>
           </a:p>
         </p:txBody>
@@ -7373,7 +7373,7 @@
                 </a:solidFill>
                 <a:latin typeface="Segoe UI"/>
               </a:rPr>
-              <a:t>Rs 392,628</a:t>
+              <a:t>Rs 392,191</a:t>
             </a:r>
           </a:p>
         </p:txBody>
@@ -7407,7 +7407,7 @@
                 </a:solidFill>
                 <a:latin typeface="Segoe UI"/>
               </a:rPr>
-              <a:t>Rs 172,438</a:t>
+              <a:t>Rs 172,685</a:t>
             </a:r>
           </a:p>
         </p:txBody>
@@ -7441,7 +7441,7 @@
                 </a:solidFill>
                 <a:latin typeface="Segoe UI"/>
               </a:rPr>
-              <a:t>+78.3%</a:t>
+              <a:t>+78.7%</a:t>
             </a:r>
           </a:p>
         </p:txBody>
@@ -7475,7 +7475,7 @@
                 </a:solidFill>
                 <a:latin typeface="Segoe UI"/>
               </a:rPr>
-              <a:t>+1.6%</a:t>
+              <a:t>+0.2%</a:t>
             </a:r>
           </a:p>
         </p:txBody>
@@ -7611,7 +7611,7 @@
                 </a:solidFill>
                 <a:latin typeface="Segoe UI"/>
               </a:rPr>
-              <a:t>338</a:t>
+              <a:t>333</a:t>
             </a:r>
           </a:p>
         </p:txBody>
@@ -7645,7 +7645,7 @@
                 </a:solidFill>
                 <a:latin typeface="Segoe UI"/>
               </a:rPr>
-              <a:t>Rs 323,766</a:t>
+              <a:t>Rs 318,217</a:t>
             </a:r>
           </a:p>
         </p:txBody>
@@ -7679,7 +7679,7 @@
                 </a:solidFill>
                 <a:latin typeface="Segoe UI"/>
               </a:rPr>
-              <a:t>Rs 146,656</a:t>
+              <a:t>Rs 141,658</a:t>
             </a:r>
           </a:p>
         </p:txBody>
@@ -7713,7 +7713,7 @@
                 </a:solidFill>
                 <a:latin typeface="Segoe UI"/>
               </a:rPr>
-              <a:t>+82.8%</a:t>
+              <a:t>+80.2%</a:t>
             </a:r>
           </a:p>
         </p:txBody>
@@ -7883,7 +7883,7 @@
                 </a:solidFill>
                 <a:latin typeface="Segoe UI"/>
               </a:rPr>
-              <a:t>190</a:t>
+              <a:t>195</a:t>
             </a:r>
           </a:p>
         </p:txBody>
@@ -7917,7 +7917,7 @@
                 </a:solidFill>
                 <a:latin typeface="Segoe UI"/>
               </a:rPr>
-              <a:t>Rs 145,525</a:t>
+              <a:t>Rs 148,913</a:t>
             </a:r>
           </a:p>
         </p:txBody>
@@ -7951,7 +7951,7 @@
                 </a:solidFill>
                 <a:latin typeface="Segoe UI"/>
               </a:rPr>
-              <a:t>Rs -199,121</a:t>
+              <a:t>Rs -194,662</a:t>
             </a:r>
           </a:p>
         </p:txBody>
@@ -7985,7 +7985,7 @@
                 </a:solidFill>
                 <a:latin typeface="Segoe UI"/>
               </a:rPr>
-              <a:t>-57.8%</a:t>
+              <a:t>-56.7%</a:t>
             </a:r>
           </a:p>
         </p:txBody>
@@ -8155,7 +8155,7 @@
                 </a:solidFill>
                 <a:latin typeface="Segoe UI"/>
               </a:rPr>
-              <a:t>1,174</a:t>
+              <a:t>1,128</a:t>
             </a:r>
           </a:p>
         </p:txBody>
@@ -8189,7 +8189,7 @@
                 </a:solidFill>
                 <a:latin typeface="Segoe UI"/>
               </a:rPr>
-              <a:t>Rs 93,888</a:t>
+              <a:t>Rs 90,248</a:t>
             </a:r>
           </a:p>
         </p:txBody>
@@ -8223,7 +8223,7 @@
                 </a:solidFill>
                 <a:latin typeface="Segoe UI"/>
               </a:rPr>
-              <a:t>Rs -18,112</a:t>
+              <a:t>Rs -21,752</a:t>
             </a:r>
           </a:p>
         </p:txBody>
@@ -8257,7 +8257,7 @@
                 </a:solidFill>
                 <a:latin typeface="Segoe UI"/>
               </a:rPr>
-              <a:t>-16.2%</a:t>
+              <a:t>-19.4%</a:t>
             </a:r>
           </a:p>
         </p:txBody>
@@ -8287,11 +8287,11 @@
             <a:r>
               <a:rPr sz="1000" b="0">
                 <a:solidFill>
-                  <a:srgbClr val="22C55E"/>
-                </a:solidFill>
-                <a:latin typeface="Segoe UI"/>
-              </a:rPr>
-              <a:t>+1.6%</a:t>
+                  <a:srgbClr val="EF4444"/>
+                </a:solidFill>
+                <a:latin typeface="Segoe UI"/>
+              </a:rPr>
+              <a:t>-2.3%</a:t>
             </a:r>
           </a:p>
         </p:txBody>
@@ -8427,7 +8427,7 @@
                 </a:solidFill>
                 <a:latin typeface="Segoe UI"/>
               </a:rPr>
-              <a:t>1,293</a:t>
+              <a:t>1,308</a:t>
             </a:r>
           </a:p>
         </p:txBody>
@@ -8461,7 +8461,7 @@
                 </a:solidFill>
                 <a:latin typeface="Segoe UI"/>
               </a:rPr>
-              <a:t>Rs 64,635</a:t>
+              <a:t>Rs 65,410</a:t>
             </a:r>
           </a:p>
         </p:txBody>
@@ -8495,7 +8495,7 @@
                 </a:solidFill>
                 <a:latin typeface="Segoe UI"/>
               </a:rPr>
-              <a:t>Rs -57,865</a:t>
+              <a:t>Rs -57,090</a:t>
             </a:r>
           </a:p>
         </p:txBody>
@@ -8529,7 +8529,7 @@
                 </a:solidFill>
                 <a:latin typeface="Segoe UI"/>
               </a:rPr>
-              <a:t>-47.2%</a:t>
+              <a:t>-46.6%</a:t>
             </a:r>
           </a:p>
         </p:txBody>
@@ -8563,7 +8563,7 @@
                 </a:solidFill>
                 <a:latin typeface="Segoe UI"/>
               </a:rPr>
-              <a:t>+1.3%</a:t>
+              <a:t>+1.2%</a:t>
             </a:r>
           </a:p>
         </p:txBody>
@@ -8699,7 +8699,7 @@
                 </a:solidFill>
                 <a:latin typeface="Segoe UI"/>
               </a:rPr>
-              <a:t>2,456</a:t>
+              <a:t>2,364</a:t>
             </a:r>
           </a:p>
         </p:txBody>
@@ -8733,7 +8733,7 @@
                 </a:solidFill>
                 <a:latin typeface="Segoe UI"/>
               </a:rPr>
-              <a:t>Rs 61,408</a:t>
+              <a:t>Rs 59,088</a:t>
             </a:r>
           </a:p>
         </p:txBody>
@@ -8767,7 +8767,7 @@
                 </a:solidFill>
                 <a:latin typeface="Segoe UI"/>
               </a:rPr>
-              <a:t>Rs -28,592</a:t>
+              <a:t>Rs -30,912</a:t>
             </a:r>
           </a:p>
         </p:txBody>
@@ -8801,7 +8801,7 @@
                 </a:solidFill>
                 <a:latin typeface="Segoe UI"/>
               </a:rPr>
-              <a:t>-31.8%</a:t>
+              <a:t>-34.4%</a:t>
             </a:r>
           </a:p>
         </p:txBody>
@@ -8831,11 +8831,11 @@
             <a:r>
               <a:rPr sz="1000" b="0">
                 <a:solidFill>
-                  <a:srgbClr val="22C55E"/>
-                </a:solidFill>
-                <a:latin typeface="Segoe UI"/>
-              </a:rPr>
-              <a:t>+0.4%</a:t>
+                  <a:srgbClr val="EF4444"/>
+                </a:solidFill>
+                <a:latin typeface="Segoe UI"/>
+              </a:rPr>
+              <a:t>-2.8%</a:t>
             </a:r>
           </a:p>
         </p:txBody>
@@ -8971,7 +8971,7 @@
                 </a:solidFill>
                 <a:latin typeface="Segoe UI"/>
               </a:rPr>
-              <a:t>751</a:t>
+              <a:t>749</a:t>
             </a:r>
           </a:p>
         </p:txBody>
@@ -9005,7 +9005,7 @@
                 </a:solidFill>
                 <a:latin typeface="Segoe UI"/>
               </a:rPr>
-              <a:t>Rs 45,069</a:t>
+              <a:t>Rs 44,928</a:t>
             </a:r>
           </a:p>
         </p:txBody>
@@ -9039,7 +9039,7 @@
                 </a:solidFill>
                 <a:latin typeface="Segoe UI"/>
               </a:rPr>
-              <a:t>Rs -46,131</a:t>
+              <a:t>Rs -46,272</a:t>
             </a:r>
           </a:p>
         </p:txBody>
@@ -9073,7 +9073,7 @@
                 </a:solidFill>
                 <a:latin typeface="Segoe UI"/>
               </a:rPr>
-              <a:t>-50.6%</a:t>
+              <a:t>-50.7%</a:t>
             </a:r>
           </a:p>
         </p:txBody>
@@ -9103,11 +9103,11 @@
             <a:r>
               <a:rPr sz="1000" b="0">
                 <a:solidFill>
-                  <a:srgbClr val="22C55E"/>
-                </a:solidFill>
-                <a:latin typeface="Segoe UI"/>
-              </a:rPr>
-              <a:t>+0.4%</a:t>
+                  <a:srgbClr val="EF4444"/>
+                </a:solidFill>
+                <a:latin typeface="Segoe UI"/>
+              </a:rPr>
+              <a:t>-0.7%</a:t>
             </a:r>
           </a:p>
         </p:txBody>
@@ -9141,7 +9141,7 @@
                 </a:solidFill>
                 <a:latin typeface="Segoe UI"/>
               </a:rPr>
-              <a:t>Total Rs 1,738,596 | P&amp;L Rs 6,540 (+0.4%) | Sharpe -0.26 | Vol 17.53% | VaR95 -1.76%/day</a:t>
+              <a:t>Total Rs 1,726,021 | P&amp;L Rs -1,944 (-0.1%) | Sharpe -0.27 | Vol 17.58% | VaR95 -1.75%/day</a:t>
             </a:r>
           </a:p>
         </p:txBody>

--- a/docs/pmr_daily.pptx
+++ b/docs/pmr_daily.pptx
@@ -3197,7 +3197,7 @@
                 </a:solidFill>
                 <a:latin typeface="Segoe UI"/>
               </a:rPr>
-              <a:t>Friday, 31 Jul 2026 17:34 SGT</a:t>
+              <a:t>Monday, 03 Aug 2026 20:00 SGT</a:t>
             </a:r>
           </a:p>
         </p:txBody>
@@ -3265,7 +3265,7 @@
                 </a:solidFill>
                 <a:latin typeface="Segoe UI"/>
               </a:rPr>
-              <a:t>RAG 14R / 15A / 17G   |   54.3% above 200DMA   |   Portfolio Rs 1,726,021 (-0.1%)</a:t>
+              <a:t>RAG 14R / 16A / 16G   |   60.9% above 200DMA   |   Portfolio Rs 1,703,978 (-1.4%)</a:t>
             </a:r>
           </a:p>
         </p:txBody>
@@ -3461,7 +3461,7 @@
                 </a:solidFill>
                 <a:latin typeface="Segoe UI"/>
               </a:rPr>
-              <a:t>Microsoft</a:t>
+              <a:t>TCS</a:t>
             </a:r>
           </a:p>
         </p:txBody>
@@ -3491,11 +3491,11 @@
             <a:r>
               <a:rPr sz="900" b="0">
                 <a:solidFill>
-                  <a:srgbClr val="22C55E"/>
-                </a:solidFill>
-                <a:latin typeface="Segoe UI"/>
-              </a:rPr>
-              <a:t>MSFT · GREEN</a:t>
+                  <a:srgbClr val="EF4444"/>
+                </a:solidFill>
+                <a:latin typeface="Segoe UI"/>
+              </a:rPr>
+              <a:t>TCS.NS · RED</a:t>
             </a:r>
           </a:p>
         </p:txBody>
@@ -3529,7 +3529,7 @@
                 </a:solidFill>
                 <a:latin typeface="Segoe UI"/>
               </a:rPr>
-              <a:t>+20.9%</a:t>
+              <a:t>+4.6%</a:t>
             </a:r>
           </a:p>
         </p:txBody>
@@ -3587,7 +3587,7 @@
                 </a:solidFill>
                 <a:latin typeface="Segoe UI"/>
               </a:rPr>
-              <a:t>Ethereum</a:t>
+              <a:t>Infosys</a:t>
             </a:r>
           </a:p>
         </p:txBody>
@@ -3621,7 +3621,7 @@
                 </a:solidFill>
                 <a:latin typeface="Segoe UI"/>
               </a:rPr>
-              <a:t>ETH-USD · RED</a:t>
+              <a:t>INFY.NS · RED</a:t>
             </a:r>
           </a:p>
         </p:txBody>
@@ -3655,7 +3655,7 @@
                 </a:solidFill>
                 <a:latin typeface="Segoe UI"/>
               </a:rPr>
-              <a:t>+19.9%</a:t>
+              <a:t>+4.4%</a:t>
             </a:r>
           </a:p>
         </p:txBody>
@@ -3713,7 +3713,7 @@
                 </a:solidFill>
                 <a:latin typeface="Segoe UI"/>
               </a:rPr>
-              <a:t>Crude Oil WTI</a:t>
+              <a:t>NIFTY IT</a:t>
             </a:r>
           </a:p>
         </p:txBody>
@@ -3747,7 +3747,7 @@
                 </a:solidFill>
                 <a:latin typeface="Segoe UI"/>
               </a:rPr>
-              <a:t>CL=F · RED</a:t>
+              <a:t>^CNXIT · RED</a:t>
             </a:r>
           </a:p>
         </p:txBody>
@@ -3781,7 +3781,7 @@
                 </a:solidFill>
                 <a:latin typeface="Segoe UI"/>
               </a:rPr>
-              <a:t>+19.5%</a:t>
+              <a:t>+3.3%</a:t>
             </a:r>
           </a:p>
         </p:txBody>
@@ -3839,7 +3839,7 @@
                 </a:solidFill>
                 <a:latin typeface="Segoe UI"/>
               </a:rPr>
-              <a:t>TCS</a:t>
+              <a:t>ICICI Bank</a:t>
             </a:r>
           </a:p>
         </p:txBody>
@@ -3869,11 +3869,11 @@
             <a:r>
               <a:rPr sz="900" b="0">
                 <a:solidFill>
-                  <a:srgbClr val="EF4444"/>
-                </a:solidFill>
-                <a:latin typeface="Segoe UI"/>
-              </a:rPr>
-              <a:t>TCS.NS · RED</a:t>
+                  <a:srgbClr val="22C55E"/>
+                </a:solidFill>
+                <a:latin typeface="Segoe UI"/>
+              </a:rPr>
+              <a:t>ICICIBANK.NS · GREEN</a:t>
             </a:r>
           </a:p>
         </p:txBody>
@@ -3907,7 +3907,7 @@
                 </a:solidFill>
                 <a:latin typeface="Segoe UI"/>
               </a:rPr>
-              <a:t>+17.0%</a:t>
+              <a:t>+2.6%</a:t>
             </a:r>
           </a:p>
         </p:txBody>
@@ -3965,7 +3965,7 @@
                 </a:solidFill>
                 <a:latin typeface="Segoe UI"/>
               </a:rPr>
-              <a:t>NIFTY IT</a:t>
+              <a:t>ITC</a:t>
             </a:r>
           </a:p>
         </p:txBody>
@@ -3999,7 +3999,7 @@
                 </a:solidFill>
                 <a:latin typeface="Segoe UI"/>
               </a:rPr>
-              <a:t>^CNXIT · RED</a:t>
+              <a:t>ITC.NS · RED</a:t>
             </a:r>
           </a:p>
         </p:txBody>
@@ -4033,7 +4033,7 @@
                 </a:solidFill>
                 <a:latin typeface="Segoe UI"/>
               </a:rPr>
-              <a:t>+16.6%</a:t>
+              <a:t>+2.1%</a:t>
             </a:r>
           </a:p>
         </p:txBody>
@@ -4125,7 +4125,7 @@
                 </a:solidFill>
                 <a:latin typeface="Segoe UI"/>
               </a:rPr>
-              <a:t>Tesla</a:t>
+              <a:t>Crude Oil WTI</a:t>
             </a:r>
           </a:p>
         </p:txBody>
@@ -4159,7 +4159,7 @@
                 </a:solidFill>
                 <a:latin typeface="Segoe UI"/>
               </a:rPr>
-              <a:t>TSLA · RED</a:t>
+              <a:t>CL=F · RED</a:t>
             </a:r>
           </a:p>
         </p:txBody>
@@ -4193,7 +4193,7 @@
                 </a:solidFill>
                 <a:latin typeface="Segoe UI"/>
               </a:rPr>
-              <a:t>-26.6%</a:t>
+              <a:t>-6.4%</a:t>
             </a:r>
           </a:p>
         </p:txBody>
@@ -4251,7 +4251,7 @@
                 </a:solidFill>
                 <a:latin typeface="Segoe UI"/>
               </a:rPr>
-              <a:t>Natural Gas</a:t>
+              <a:t>USD/JPY</a:t>
             </a:r>
           </a:p>
         </p:txBody>
@@ -4281,11 +4281,11 @@
             <a:r>
               <a:rPr sz="900" b="0">
                 <a:solidFill>
-                  <a:srgbClr val="EF4444"/>
-                </a:solidFill>
-                <a:latin typeface="Segoe UI"/>
-              </a:rPr>
-              <a:t>NG=F · RED</a:t>
+                  <a:srgbClr val="F59E0B"/>
+                </a:solidFill>
+                <a:latin typeface="Segoe UI"/>
+              </a:rPr>
+              <a:t>JPY=X · AMBER</a:t>
             </a:r>
           </a:p>
         </p:txBody>
@@ -4319,7 +4319,7 @@
                 </a:solidFill>
                 <a:latin typeface="Segoe UI"/>
               </a:rPr>
-              <a:t>-15.5%</a:t>
+              <a:t>-2.2%</a:t>
             </a:r>
           </a:p>
         </p:txBody>
@@ -4377,7 +4377,7 @@
                 </a:solidFill>
                 <a:latin typeface="Segoe UI"/>
               </a:rPr>
-              <a:t>Clean Energy</a:t>
+              <a:t>Ethereum</a:t>
             </a:r>
           </a:p>
         </p:txBody>
@@ -4411,7 +4411,7 @@
                 </a:solidFill>
                 <a:latin typeface="Segoe UI"/>
               </a:rPr>
-              <a:t>ICLN · RED</a:t>
+              <a:t>ETH-USD · RED</a:t>
             </a:r>
           </a:p>
         </p:txBody>
@@ -4445,7 +4445,7 @@
                 </a:solidFill>
                 <a:latin typeface="Segoe UI"/>
               </a:rPr>
-              <a:t>-13.8%</a:t>
+              <a:t>-1.2%</a:t>
             </a:r>
           </a:p>
         </p:txBody>
@@ -4571,7 +4571,7 @@
                 </a:solidFill>
                 <a:latin typeface="Segoe UI"/>
               </a:rPr>
-              <a:t>-8.1%</a:t>
+              <a:t>-0.9%</a:t>
             </a:r>
           </a:p>
         </p:txBody>
@@ -4629,7 +4629,7 @@
                 </a:solidFill>
                 <a:latin typeface="Segoe UI"/>
               </a:rPr>
-              <a:t>US Technology</a:t>
+              <a:t>Solana</a:t>
             </a:r>
           </a:p>
         </p:txBody>
@@ -4659,11 +4659,11 @@
             <a:r>
               <a:rPr sz="900" b="0">
                 <a:solidFill>
-                  <a:srgbClr val="F59E0B"/>
-                </a:solidFill>
-                <a:latin typeface="Segoe UI"/>
-              </a:rPr>
-              <a:t>XLK · AMBER</a:t>
+                  <a:srgbClr val="EF4444"/>
+                </a:solidFill>
+                <a:latin typeface="Segoe UI"/>
+              </a:rPr>
+              <a:t>SOL-USD · RED</a:t>
             </a:r>
           </a:p>
         </p:txBody>
@@ -4697,7 +4697,7 @@
                 </a:solidFill>
                 <a:latin typeface="Segoe UI"/>
               </a:rPr>
-              <a:t>-7.8%</a:t>
+              <a:t>-0.6%</a:t>
             </a:r>
           </a:p>
         </p:txBody>
@@ -4837,7 +4837,7 @@
         <p:spPr>
           <a:xfrm>
             <a:off x="457200" y="1188720"/>
-            <a:ext cx="11247120" cy="5544503"/>
+            <a:ext cx="11247120" cy="5565585"/>
           </a:xfrm>
           <a:prstGeom prst="rect">
             <a:avLst/>
@@ -5035,7 +5035,7 @@
                 </a:solidFill>
                 <a:latin typeface="Segoe UI"/>
               </a:rPr>
-              <a:t>86%</a:t>
+              <a:t>84%</a:t>
             </a:r>
           </a:p>
         </p:txBody>
@@ -5103,7 +5103,7 @@
                 </a:solidFill>
                 <a:latin typeface="Segoe UI"/>
               </a:rPr>
-              <a:t>ICICI Bank</a:t>
+              <a:t>NIFTY Bank</a:t>
             </a:r>
           </a:p>
         </p:txBody>
@@ -5171,7 +5171,7 @@
                 </a:solidFill>
                 <a:latin typeface="Segoe UI"/>
               </a:rPr>
-              <a:t>85%</a:t>
+              <a:t>89%</a:t>
             </a:r>
           </a:p>
         </p:txBody>
@@ -5205,7 +5205,7 @@
                 </a:solidFill>
                 <a:latin typeface="Segoe UI"/>
               </a:rPr>
-              <a:t>above 200DMA · golden cross (50&gt;200) · MACD bearish</a:t>
+              <a:t>above 200DMA · golden cross (50&gt;200) · MACD bullish</a:t>
             </a:r>
           </a:p>
         </p:txBody>
@@ -5239,7 +5239,7 @@
                 </a:solidFill>
                 <a:latin typeface="Segoe UI"/>
               </a:rPr>
-              <a:t>Apple</a:t>
+              <a:t>Dow Jones</a:t>
             </a:r>
           </a:p>
         </p:txBody>
@@ -5307,7 +5307,7 @@
                 </a:solidFill>
                 <a:latin typeface="Segoe UI"/>
               </a:rPr>
-              <a:t>85%</a:t>
+              <a:t>95%</a:t>
             </a:r>
           </a:p>
         </p:txBody>
@@ -5341,7 +5341,7 @@
                 </a:solidFill>
                 <a:latin typeface="Segoe UI"/>
               </a:rPr>
-              <a:t>above 200DMA · golden cross (50&gt;200) · MACD bearish</a:t>
+              <a:t>above 200DMA · golden cross (50&gt;200) · MACD bullish</a:t>
             </a:r>
           </a:p>
         </p:txBody>
@@ -5443,7 +5443,7 @@
                 </a:solidFill>
                 <a:latin typeface="Segoe UI"/>
               </a:rPr>
-              <a:t>83%</a:t>
+              <a:t>81%</a:t>
             </a:r>
           </a:p>
         </p:txBody>
@@ -5579,7 +5579,7 @@
                 </a:solidFill>
                 <a:latin typeface="Segoe UI"/>
               </a:rPr>
-              <a:t>95%</a:t>
+              <a:t>80%</a:t>
             </a:r>
           </a:p>
         </p:txBody>
@@ -5647,7 +5647,7 @@
                 </a:solidFill>
                 <a:latin typeface="Segoe UI"/>
               </a:rPr>
-              <a:t>DAX</a:t>
+              <a:t>ICICI Bank</a:t>
             </a:r>
           </a:p>
         </p:txBody>
@@ -5681,7 +5681,7 @@
                 </a:solidFill>
                 <a:latin typeface="Segoe UI"/>
               </a:rPr>
-              <a:t>STRONG BUY</a:t>
+              <a:t>BUY</a:t>
             </a:r>
           </a:p>
         </p:txBody>
@@ -5715,7 +5715,7 @@
                 </a:solidFill>
                 <a:latin typeface="Segoe UI"/>
               </a:rPr>
-              <a:t>82%</a:t>
+              <a:t>80%</a:t>
             </a:r>
           </a:p>
         </p:txBody>
@@ -5749,7 +5749,7 @@
                 </a:solidFill>
                 <a:latin typeface="Segoe UI"/>
               </a:rPr>
-              <a:t>above 200DMA · golden cross (50&gt;200) · MACD bullish</a:t>
+              <a:t>above 200DMA · golden cross (50&gt;200) · MACD bearish</a:t>
             </a:r>
           </a:p>
         </p:txBody>
@@ -5783,7 +5783,7 @@
                 </a:solidFill>
                 <a:latin typeface="Segoe UI"/>
               </a:rPr>
-              <a:t>US 1-3Y Treasury</a:t>
+              <a:t>Amazon</a:t>
             </a:r>
           </a:p>
         </p:txBody>
@@ -5817,7 +5817,7 @@
                 </a:solidFill>
                 <a:latin typeface="Segoe UI"/>
               </a:rPr>
-              <a:t>STRONG BUY</a:t>
+              <a:t>BUY</a:t>
             </a:r>
           </a:p>
         </p:txBody>
@@ -5851,7 +5851,7 @@
                 </a:solidFill>
                 <a:latin typeface="Segoe UI"/>
               </a:rPr>
-              <a:t>94%</a:t>
+              <a:t>91%</a:t>
             </a:r>
           </a:p>
         </p:txBody>
@@ -5919,7 +5919,7 @@
                 </a:solidFill>
                 <a:latin typeface="Segoe UI"/>
               </a:rPr>
-              <a:t>Dow Jones</a:t>
+              <a:t>Bharti Airtel</a:t>
             </a:r>
           </a:p>
         </p:txBody>
@@ -5953,7 +5953,7 @@
                 </a:solidFill>
                 <a:latin typeface="Segoe UI"/>
               </a:rPr>
-              <a:t>STRONG BUY</a:t>
+              <a:t>BUY</a:t>
             </a:r>
           </a:p>
         </p:txBody>
@@ -5987,7 +5987,7 @@
                 </a:solidFill>
                 <a:latin typeface="Segoe UI"/>
               </a:rPr>
-              <a:t>82%</a:t>
+              <a:t>91%</a:t>
             </a:r>
           </a:p>
         </p:txBody>
@@ -6021,7 +6021,7 @@
                 </a:solidFill>
                 <a:latin typeface="Segoe UI"/>
               </a:rPr>
-              <a:t>above 200DMA · golden cross (50&gt;200) · MACD bearish</a:t>
+              <a:t>above 200DMA · golden cross (50&gt;200) · MACD bullish</a:t>
             </a:r>
           </a:p>
         </p:txBody>
@@ -6055,7 +6055,7 @@
                 </a:solidFill>
                 <a:latin typeface="Segoe UI"/>
               </a:rPr>
-              <a:t>Bharti Airtel</a:t>
+              <a:t>DAX</a:t>
             </a:r>
           </a:p>
         </p:txBody>
@@ -6123,7 +6123,7 @@
                 </a:solidFill>
                 <a:latin typeface="Segoe UI"/>
               </a:rPr>
-              <a:t>91%</a:t>
+              <a:t>77%</a:t>
             </a:r>
           </a:p>
         </p:txBody>
@@ -6191,7 +6191,7 @@
                 </a:solidFill>
                 <a:latin typeface="Segoe UI"/>
               </a:rPr>
-              <a:t>FTSE 100</a:t>
+              <a:t>Microsoft</a:t>
             </a:r>
           </a:p>
         </p:txBody>
@@ -6259,7 +6259,7 @@
                 </a:solidFill>
                 <a:latin typeface="Segoe UI"/>
               </a:rPr>
-              <a:t>78%</a:t>
+              <a:t>76%</a:t>
             </a:r>
           </a:p>
         </p:txBody>
@@ -6293,7 +6293,7 @@
                 </a:solidFill>
                 <a:latin typeface="Segoe UI"/>
               </a:rPr>
-              <a:t>above 200DMA · golden cross (50&gt;200) · MACD bullish</a:t>
+              <a:t>above 200DMA · death cross (50&lt;200) · MACD bullish</a:t>
             </a:r>
           </a:p>
         </p:txBody>
@@ -6327,7 +6327,7 @@
                 </a:solidFill>
                 <a:latin typeface="Segoe UI"/>
               </a:rPr>
-              <a:t>Straits Times</a:t>
+              <a:t>FTSE 100</a:t>
             </a:r>
           </a:p>
         </p:txBody>
@@ -6395,7 +6395,7 @@
                 </a:solidFill>
                 <a:latin typeface="Segoe UI"/>
               </a:rPr>
-              <a:t>71%</a:t>
+              <a:t>76%</a:t>
             </a:r>
           </a:p>
         </p:txBody>
@@ -6429,7 +6429,7 @@
                 </a:solidFill>
                 <a:latin typeface="Segoe UI"/>
               </a:rPr>
-              <a:t>above 200DMA · golden cross (50&gt;200) · MACD bearish</a:t>
+              <a:t>above 200DMA · golden cross (50&gt;200) · MACD bullish</a:t>
             </a:r>
           </a:p>
         </p:txBody>
@@ -6531,7 +6531,7 @@
                 </a:solidFill>
                 <a:latin typeface="Segoe UI"/>
               </a:rPr>
-              <a:t>70%</a:t>
+              <a:t>69%</a:t>
             </a:r>
           </a:p>
         </p:txBody>
@@ -6659,7 +6659,7 @@
                 </a:solidFill>
                 <a:latin typeface="Segoe UI"/>
               </a:rPr>
-              <a:t>Base currency INR · USD/INR 95.44</a:t>
+              <a:t>Base currency INR · USD/INR 95.39</a:t>
             </a:r>
           </a:p>
         </p:txBody>
@@ -7067,7 +7067,7 @@
                 </a:solidFill>
                 <a:latin typeface="Segoe UI"/>
               </a:rPr>
-              <a:t>63,605</a:t>
+              <a:t>62,486</a:t>
             </a:r>
           </a:p>
         </p:txBody>
@@ -7101,7 +7101,7 @@
                 </a:solidFill>
                 <a:latin typeface="Segoe UI"/>
               </a:rPr>
-              <a:t>Rs 607,027</a:t>
+              <a:t>Rs 596,058</a:t>
             </a:r>
           </a:p>
         </p:txBody>
@@ -7135,7 +7135,7 @@
                 </a:solidFill>
                 <a:latin typeface="Segoe UI"/>
               </a:rPr>
-              <a:t>Rs 34,402</a:t>
+              <a:t>Rs 23,718</a:t>
             </a:r>
           </a:p>
         </p:txBody>
@@ -7169,7 +7169,7 @@
                 </a:solidFill>
                 <a:latin typeface="Segoe UI"/>
               </a:rPr>
-              <a:t>+6.0%</a:t>
+              <a:t>+4.1%</a:t>
             </a:r>
           </a:p>
         </p:txBody>
@@ -7203,7 +7203,7 @@
                 </a:solidFill>
                 <a:latin typeface="Segoe UI"/>
               </a:rPr>
-              <a:t>-1.7%</a:t>
+              <a:t>-1.6%</a:t>
             </a:r>
           </a:p>
         </p:txBody>
@@ -7339,7 +7339,7 @@
                 </a:solidFill>
                 <a:latin typeface="Segoe UI"/>
               </a:rPr>
-              <a:t>4,109</a:t>
+              <a:t>4,117</a:t>
             </a:r>
           </a:p>
         </p:txBody>
@@ -7373,7 +7373,7 @@
                 </a:solidFill>
                 <a:latin typeface="Segoe UI"/>
               </a:rPr>
-              <a:t>Rs 392,191</a:t>
+              <a:t>Rs 392,682</a:t>
             </a:r>
           </a:p>
         </p:txBody>
@@ -7407,7 +7407,7 @@
                 </a:solidFill>
                 <a:latin typeface="Segoe UI"/>
               </a:rPr>
-              <a:t>Rs 172,685</a:t>
+              <a:t>Rs 173,285</a:t>
             </a:r>
           </a:p>
         </p:txBody>
@@ -7441,7 +7441,7 @@
                 </a:solidFill>
                 <a:latin typeface="Segoe UI"/>
               </a:rPr>
-              <a:t>+78.7%</a:t>
+              <a:t>+79.0%</a:t>
             </a:r>
           </a:p>
         </p:txBody>
@@ -7475,7 +7475,7 @@
                 </a:solidFill>
                 <a:latin typeface="Segoe UI"/>
               </a:rPr>
-              <a:t>+0.2%</a:t>
+              <a:t>+1.7%</a:t>
             </a:r>
           </a:p>
         </p:txBody>
@@ -7611,7 +7611,7 @@
                 </a:solidFill>
                 <a:latin typeface="Segoe UI"/>
               </a:rPr>
-              <a:t>333</a:t>
+              <a:t>309</a:t>
             </a:r>
           </a:p>
         </p:txBody>
@@ -7645,7 +7645,7 @@
                 </a:solidFill>
                 <a:latin typeface="Segoe UI"/>
               </a:rPr>
-              <a:t>Rs 318,217</a:t>
+              <a:t>Rs 294,669</a:t>
             </a:r>
           </a:p>
         </p:txBody>
@@ -7679,7 +7679,7 @@
                 </a:solidFill>
                 <a:latin typeface="Segoe UI"/>
               </a:rPr>
-              <a:t>Rs 141,658</a:t>
+              <a:t>Rs 118,198</a:t>
             </a:r>
           </a:p>
         </p:txBody>
@@ -7713,7 +7713,7 @@
                 </a:solidFill>
                 <a:latin typeface="Segoe UI"/>
               </a:rPr>
-              <a:t>+80.2%</a:t>
+              <a:t>+67.0%</a:t>
             </a:r>
           </a:p>
         </p:txBody>
@@ -7883,7 +7883,7 @@
                 </a:solidFill>
                 <a:latin typeface="Segoe UI"/>
               </a:rPr>
-              <a:t>195</a:t>
+              <a:t>201</a:t>
             </a:r>
           </a:p>
         </p:txBody>
@@ -7917,7 +7917,7 @@
                 </a:solidFill>
                 <a:latin typeface="Segoe UI"/>
               </a:rPr>
-              <a:t>Rs 148,913</a:t>
+              <a:t>Rs 153,196</a:t>
             </a:r>
           </a:p>
         </p:txBody>
@@ -7951,7 +7951,7 @@
                 </a:solidFill>
                 <a:latin typeface="Segoe UI"/>
               </a:rPr>
-              <a:t>Rs -194,662</a:t>
+              <a:t>Rs -190,208</a:t>
             </a:r>
           </a:p>
         </p:txBody>
@@ -7985,7 +7985,7 @@
                 </a:solidFill>
                 <a:latin typeface="Segoe UI"/>
               </a:rPr>
-              <a:t>-56.7%</a:t>
+              <a:t>-55.4%</a:t>
             </a:r>
           </a:p>
         </p:txBody>
@@ -8155,7 +8155,7 @@
                 </a:solidFill>
                 <a:latin typeface="Segoe UI"/>
               </a:rPr>
-              <a:t>1,128</a:t>
+              <a:t>1,180</a:t>
             </a:r>
           </a:p>
         </p:txBody>
@@ -8189,7 +8189,7 @@
                 </a:solidFill>
                 <a:latin typeface="Segoe UI"/>
               </a:rPr>
-              <a:t>Rs 90,248</a:t>
+              <a:t>Rs 94,400</a:t>
             </a:r>
           </a:p>
         </p:txBody>
@@ -8223,7 +8223,7 @@
                 </a:solidFill>
                 <a:latin typeface="Segoe UI"/>
               </a:rPr>
-              <a:t>Rs -21,752</a:t>
+              <a:t>Rs -17,600</a:t>
             </a:r>
           </a:p>
         </p:txBody>
@@ -8257,7 +8257,7 @@
                 </a:solidFill>
                 <a:latin typeface="Segoe UI"/>
               </a:rPr>
-              <a:t>-19.4%</a:t>
+              <a:t>-15.7%</a:t>
             </a:r>
           </a:p>
         </p:txBody>
@@ -8287,11 +8287,11 @@
             <a:r>
               <a:rPr sz="1000" b="0">
                 <a:solidFill>
-                  <a:srgbClr val="EF4444"/>
-                </a:solidFill>
-                <a:latin typeface="Segoe UI"/>
-              </a:rPr>
-              <a:t>-2.3%</a:t>
+                  <a:srgbClr val="22C55E"/>
+                </a:solidFill>
+                <a:latin typeface="Segoe UI"/>
+              </a:rPr>
+              <a:t>+4.4%</a:t>
             </a:r>
           </a:p>
         </p:txBody>
@@ -8427,7 +8427,7 @@
                 </a:solidFill>
                 <a:latin typeface="Segoe UI"/>
               </a:rPr>
-              <a:t>1,308</a:t>
+              <a:t>1,319</a:t>
             </a:r>
           </a:p>
         </p:txBody>
@@ -8461,7 +8461,7 @@
                 </a:solidFill>
                 <a:latin typeface="Segoe UI"/>
               </a:rPr>
-              <a:t>Rs 65,410</a:t>
+              <a:t>Rs 65,950</a:t>
             </a:r>
           </a:p>
         </p:txBody>
@@ -8495,7 +8495,7 @@
                 </a:solidFill>
                 <a:latin typeface="Segoe UI"/>
               </a:rPr>
-              <a:t>Rs -57,090</a:t>
+              <a:t>Rs -56,550</a:t>
             </a:r>
           </a:p>
         </p:txBody>
@@ -8529,7 +8529,7 @@
                 </a:solidFill>
                 <a:latin typeface="Segoe UI"/>
               </a:rPr>
-              <a:t>-46.6%</a:t>
+              <a:t>-46.2%</a:t>
             </a:r>
           </a:p>
         </p:txBody>
@@ -8563,7 +8563,7 @@
                 </a:solidFill>
                 <a:latin typeface="Segoe UI"/>
               </a:rPr>
-              <a:t>+1.2%</a:t>
+              <a:t>+0.9%</a:t>
             </a:r>
           </a:p>
         </p:txBody>
@@ -8699,7 +8699,7 @@
                 </a:solidFill>
                 <a:latin typeface="Segoe UI"/>
               </a:rPr>
-              <a:t>2,364</a:t>
+              <a:t>2,474</a:t>
             </a:r>
           </a:p>
         </p:txBody>
@@ -8733,7 +8733,7 @@
                 </a:solidFill>
                 <a:latin typeface="Segoe UI"/>
               </a:rPr>
-              <a:t>Rs 59,088</a:t>
+              <a:t>Rs 61,842</a:t>
             </a:r>
           </a:p>
         </p:txBody>
@@ -8767,7 +8767,7 @@
                 </a:solidFill>
                 <a:latin typeface="Segoe UI"/>
               </a:rPr>
-              <a:t>Rs -30,912</a:t>
+              <a:t>Rs -28,158</a:t>
             </a:r>
           </a:p>
         </p:txBody>
@@ -8801,7 +8801,7 @@
                 </a:solidFill>
                 <a:latin typeface="Segoe UI"/>
               </a:rPr>
-              <a:t>-34.4%</a:t>
+              <a:t>-31.3%</a:t>
             </a:r>
           </a:p>
         </p:txBody>
@@ -8831,11 +8831,11 @@
             <a:r>
               <a:rPr sz="1000" b="0">
                 <a:solidFill>
-                  <a:srgbClr val="EF4444"/>
-                </a:solidFill>
-                <a:latin typeface="Segoe UI"/>
-              </a:rPr>
-              <a:t>-2.8%</a:t>
+                  <a:srgbClr val="22C55E"/>
+                </a:solidFill>
+                <a:latin typeface="Segoe UI"/>
+              </a:rPr>
+              <a:t>+4.6%</a:t>
             </a:r>
           </a:p>
         </p:txBody>
@@ -8971,7 +8971,7 @@
                 </a:solidFill>
                 <a:latin typeface="Segoe UI"/>
               </a:rPr>
-              <a:t>749</a:t>
+              <a:t>753</a:t>
             </a:r>
           </a:p>
         </p:txBody>
@@ -9005,7 +9005,7 @@
                 </a:solidFill>
                 <a:latin typeface="Segoe UI"/>
               </a:rPr>
-              <a:t>Rs 44,928</a:t>
+              <a:t>Rs 45,180</a:t>
             </a:r>
           </a:p>
         </p:txBody>
@@ -9039,7 +9039,7 @@
                 </a:solidFill>
                 <a:latin typeface="Segoe UI"/>
               </a:rPr>
-              <a:t>Rs -46,272</a:t>
+              <a:t>Rs -46,020</a:t>
             </a:r>
           </a:p>
         </p:txBody>
@@ -9073,7 +9073,7 @@
                 </a:solidFill>
                 <a:latin typeface="Segoe UI"/>
               </a:rPr>
-              <a:t>-50.7%</a:t>
+              <a:t>-50.5%</a:t>
             </a:r>
           </a:p>
         </p:txBody>
@@ -9103,11 +9103,11 @@
             <a:r>
               <a:rPr sz="1000" b="0">
                 <a:solidFill>
-                  <a:srgbClr val="EF4444"/>
-                </a:solidFill>
-                <a:latin typeface="Segoe UI"/>
-              </a:rPr>
-              <a:t>-0.7%</a:t>
+                  <a:srgbClr val="22C55E"/>
+                </a:solidFill>
+                <a:latin typeface="Segoe UI"/>
+              </a:rPr>
+              <a:t>+0.7%</a:t>
             </a:r>
           </a:p>
         </p:txBody>
@@ -9141,7 +9141,7 @@
                 </a:solidFill>
                 <a:latin typeface="Segoe UI"/>
               </a:rPr>
-              <a:t>Total Rs 1,726,021 | P&amp;L Rs -1,944 (-0.1%) | Sharpe -0.27 | Vol 17.58% | VaR95 -1.75%/day</a:t>
+              <a:t>Total Rs 1,703,978 | P&amp;L Rs -23,334 (-1.4%) | Sharpe -0.45 | Vol 17.66% | VaR95 -1.82%/day</a:t>
             </a:r>
           </a:p>
         </p:txBody>

--- a/docs/pmr_daily.pptx
+++ b/docs/pmr_daily.pptx
@@ -3197,7 +3197,7 @@
                 </a:solidFill>
                 <a:latin typeface="Segoe UI"/>
               </a:rPr>
-              <a:t>Monday, 03 Aug 2026 20:00 SGT</a:t>
+              <a:t>Tuesday, 04 Aug 2026 16:10 SGT</a:t>
             </a:r>
           </a:p>
         </p:txBody>
@@ -3265,7 +3265,7 @@
                 </a:solidFill>
                 <a:latin typeface="Segoe UI"/>
               </a:rPr>
-              <a:t>RAG 14R / 16A / 16G   |   60.9% above 200DMA   |   Portfolio Rs 1,703,978 (-1.4%)</a:t>
+              <a:t>RAG 15R / 15A / 16G   |   60.9% above 200DMA   |   Portfolio Rs 1,710,525 (-0.9%)</a:t>
             </a:r>
           </a:p>
         </p:txBody>
@@ -3529,7 +3529,7 @@
                 </a:solidFill>
                 <a:latin typeface="Segoe UI"/>
               </a:rPr>
-              <a:t>+4.6%</a:t>
+              <a:t>+3.9%</a:t>
             </a:r>
           </a:p>
         </p:txBody>
@@ -3587,7 +3587,7 @@
                 </a:solidFill>
                 <a:latin typeface="Segoe UI"/>
               </a:rPr>
-              <a:t>Infosys</a:t>
+              <a:t>Copper</a:t>
             </a:r>
           </a:p>
         </p:txBody>
@@ -3617,11 +3617,11 @@
             <a:r>
               <a:rPr sz="900" b="0">
                 <a:solidFill>
-                  <a:srgbClr val="EF4444"/>
-                </a:solidFill>
-                <a:latin typeface="Segoe UI"/>
-              </a:rPr>
-              <a:t>INFY.NS · RED</a:t>
+                  <a:srgbClr val="22C55E"/>
+                </a:solidFill>
+                <a:latin typeface="Segoe UI"/>
+              </a:rPr>
+              <a:t>HG=F · GREEN</a:t>
             </a:r>
           </a:p>
         </p:txBody>
@@ -3655,7 +3655,7 @@
                 </a:solidFill>
                 <a:latin typeface="Segoe UI"/>
               </a:rPr>
-              <a:t>+4.4%</a:t>
+              <a:t>+2.9%</a:t>
             </a:r>
           </a:p>
         </p:txBody>
@@ -3713,7 +3713,7 @@
                 </a:solidFill>
                 <a:latin typeface="Segoe UI"/>
               </a:rPr>
-              <a:t>NIFTY IT</a:t>
+              <a:t>Silver</a:t>
             </a:r>
           </a:p>
         </p:txBody>
@@ -3747,7 +3747,7 @@
                 </a:solidFill>
                 <a:latin typeface="Segoe UI"/>
               </a:rPr>
-              <a:t>^CNXIT · RED</a:t>
+              <a:t>SI=F · RED</a:t>
             </a:r>
           </a:p>
         </p:txBody>
@@ -3781,7 +3781,7 @@
                 </a:solidFill>
                 <a:latin typeface="Segoe UI"/>
               </a:rPr>
-              <a:t>+3.3%</a:t>
+              <a:t>+2.9%</a:t>
             </a:r>
           </a:p>
         </p:txBody>
@@ -3839,7 +3839,7 @@
                 </a:solidFill>
                 <a:latin typeface="Segoe UI"/>
               </a:rPr>
-              <a:t>ICICI Bank</a:t>
+              <a:t>Infosys</a:t>
             </a:r>
           </a:p>
         </p:txBody>
@@ -3869,11 +3869,11 @@
             <a:r>
               <a:rPr sz="900" b="0">
                 <a:solidFill>
-                  <a:srgbClr val="22C55E"/>
-                </a:solidFill>
-                <a:latin typeface="Segoe UI"/>
-              </a:rPr>
-              <a:t>ICICIBANK.NS · GREEN</a:t>
+                  <a:srgbClr val="EF4444"/>
+                </a:solidFill>
+                <a:latin typeface="Segoe UI"/>
+              </a:rPr>
+              <a:t>INFY.NS · RED</a:t>
             </a:r>
           </a:p>
         </p:txBody>
@@ -3965,7 +3965,7 @@
                 </a:solidFill>
                 <a:latin typeface="Segoe UI"/>
               </a:rPr>
-              <a:t>ITC</a:t>
+              <a:t>DAX</a:t>
             </a:r>
           </a:p>
         </p:txBody>
@@ -3995,11 +3995,11 @@
             <a:r>
               <a:rPr sz="900" b="0">
                 <a:solidFill>
-                  <a:srgbClr val="EF4444"/>
-                </a:solidFill>
-                <a:latin typeface="Segoe UI"/>
-              </a:rPr>
-              <a:t>ITC.NS · RED</a:t>
+                  <a:srgbClr val="22C55E"/>
+                </a:solidFill>
+                <a:latin typeface="Segoe UI"/>
+              </a:rPr>
+              <a:t>^GDAXI · GREEN</a:t>
             </a:r>
           </a:p>
         </p:txBody>
@@ -4033,7 +4033,7 @@
                 </a:solidFill>
                 <a:latin typeface="Segoe UI"/>
               </a:rPr>
-              <a:t>+2.1%</a:t>
+              <a:t>+2.4%</a:t>
             </a:r>
           </a:p>
         </p:txBody>
@@ -4193,7 +4193,7 @@
                 </a:solidFill>
                 <a:latin typeface="Segoe UI"/>
               </a:rPr>
-              <a:t>-6.4%</a:t>
+              <a:t>-4.7%</a:t>
             </a:r>
           </a:p>
         </p:txBody>
@@ -4319,7 +4319,7 @@
                 </a:solidFill>
                 <a:latin typeface="Segoe UI"/>
               </a:rPr>
-              <a:t>-2.2%</a:t>
+              <a:t>-1.5%</a:t>
             </a:r>
           </a:p>
         </p:txBody>
@@ -4377,7 +4377,7 @@
                 </a:solidFill>
                 <a:latin typeface="Segoe UI"/>
               </a:rPr>
-              <a:t>Ethereum</a:t>
+              <a:t>HDFC Bank</a:t>
             </a:r>
           </a:p>
         </p:txBody>
@@ -4411,7 +4411,7 @@
                 </a:solidFill>
                 <a:latin typeface="Segoe UI"/>
               </a:rPr>
-              <a:t>ETH-USD · RED</a:t>
+              <a:t>HDFCBANK.NS · RED</a:t>
             </a:r>
           </a:p>
         </p:txBody>
@@ -4503,7 +4503,7 @@
                 </a:solidFill>
                 <a:latin typeface="Segoe UI"/>
               </a:rPr>
-              <a:t>Nikkei 225</a:t>
+              <a:t>Reliance</a:t>
             </a:r>
           </a:p>
         </p:txBody>
@@ -4533,11 +4533,11 @@
             <a:r>
               <a:rPr sz="900" b="0">
                 <a:solidFill>
-                  <a:srgbClr val="F59E0B"/>
-                </a:solidFill>
-                <a:latin typeface="Segoe UI"/>
-              </a:rPr>
-              <a:t>^N225 · AMBER</a:t>
+                  <a:srgbClr val="EF4444"/>
+                </a:solidFill>
+                <a:latin typeface="Segoe UI"/>
+              </a:rPr>
+              <a:t>RELIANCE.NS · RED</a:t>
             </a:r>
           </a:p>
         </p:txBody>
@@ -4571,7 +4571,7 @@
                 </a:solidFill>
                 <a:latin typeface="Segoe UI"/>
               </a:rPr>
-              <a:t>-0.9%</a:t>
+              <a:t>-1.1%</a:t>
             </a:r>
           </a:p>
         </p:txBody>
@@ -4629,7 +4629,7 @@
                 </a:solidFill>
                 <a:latin typeface="Segoe UI"/>
               </a:rPr>
-              <a:t>Solana</a:t>
+              <a:t>Bharti Airtel</a:t>
             </a:r>
           </a:p>
         </p:txBody>
@@ -4659,11 +4659,11 @@
             <a:r>
               <a:rPr sz="900" b="0">
                 <a:solidFill>
-                  <a:srgbClr val="EF4444"/>
-                </a:solidFill>
-                <a:latin typeface="Segoe UI"/>
-              </a:rPr>
-              <a:t>SOL-USD · RED</a:t>
+                  <a:srgbClr val="22C55E"/>
+                </a:solidFill>
+                <a:latin typeface="Segoe UI"/>
+              </a:rPr>
+              <a:t>BHARTIARTL.NS · GREEN</a:t>
             </a:r>
           </a:p>
         </p:txBody>
@@ -4697,7 +4697,7 @@
                 </a:solidFill>
                 <a:latin typeface="Segoe UI"/>
               </a:rPr>
-              <a:t>-0.6%</a:t>
+              <a:t>-1.0%</a:t>
             </a:r>
           </a:p>
         </p:txBody>
@@ -4837,7 +4837,7 @@
         <p:spPr>
           <a:xfrm>
             <a:off x="457200" y="1188720"/>
-            <a:ext cx="11247120" cy="5565585"/>
+            <a:ext cx="11247120" cy="5544503"/>
           </a:xfrm>
           <a:prstGeom prst="rect">
             <a:avLst/>
@@ -4967,7 +4967,7 @@
                 </a:solidFill>
                 <a:latin typeface="Segoe UI"/>
               </a:rPr>
-              <a:t>US Financials</a:t>
+              <a:t>ICICI Bank</a:t>
             </a:r>
           </a:p>
         </p:txBody>
@@ -5035,7 +5035,7 @@
                 </a:solidFill>
                 <a:latin typeface="Segoe UI"/>
               </a:rPr>
-              <a:t>84%</a:t>
+              <a:t>85%</a:t>
             </a:r>
           </a:p>
         </p:txBody>
@@ -5103,7 +5103,7 @@
                 </a:solidFill>
                 <a:latin typeface="Segoe UI"/>
               </a:rPr>
-              <a:t>NIFTY Bank</a:t>
+              <a:t>US Financials</a:t>
             </a:r>
           </a:p>
         </p:txBody>
@@ -5171,7 +5171,7 @@
                 </a:solidFill>
                 <a:latin typeface="Segoe UI"/>
               </a:rPr>
-              <a:t>89%</a:t>
+              <a:t>85%</a:t>
             </a:r>
           </a:p>
         </p:txBody>
@@ -5205,7 +5205,7 @@
                 </a:solidFill>
                 <a:latin typeface="Segoe UI"/>
               </a:rPr>
-              <a:t>above 200DMA · golden cross (50&gt;200) · MACD bullish</a:t>
+              <a:t>above 200DMA · golden cross (50&gt;200) · MACD bearish</a:t>
             </a:r>
           </a:p>
         </p:txBody>
@@ -5239,7 +5239,7 @@
                 </a:solidFill>
                 <a:latin typeface="Segoe UI"/>
               </a:rPr>
-              <a:t>Dow Jones</a:t>
+              <a:t>Bharti Airtel</a:t>
             </a:r>
           </a:p>
         </p:txBody>
@@ -5375,7 +5375,7 @@
                 </a:solidFill>
                 <a:latin typeface="Segoe UI"/>
               </a:rPr>
-              <a:t>US Energy</a:t>
+              <a:t>Dow Jones</a:t>
             </a:r>
           </a:p>
         </p:txBody>
@@ -5443,7 +5443,7 @@
                 </a:solidFill>
                 <a:latin typeface="Segoe UI"/>
               </a:rPr>
-              <a:t>81%</a:t>
+              <a:t>95%</a:t>
             </a:r>
           </a:p>
         </p:txBody>
@@ -5477,7 +5477,7 @@
                 </a:solidFill>
                 <a:latin typeface="Segoe UI"/>
               </a:rPr>
-              <a:t>above 200DMA · golden cross (50&gt;200) · MACD bearish</a:t>
+              <a:t>above 200DMA · golden cross (50&gt;200) · MACD bullish</a:t>
             </a:r>
           </a:p>
         </p:txBody>
@@ -5511,7 +5511,7 @@
                 </a:solidFill>
                 <a:latin typeface="Segoe UI"/>
               </a:rPr>
-              <a:t>Copper</a:t>
+              <a:t>US 1-3Y Treasury</a:t>
             </a:r>
           </a:p>
         </p:txBody>
@@ -5579,7 +5579,7 @@
                 </a:solidFill>
                 <a:latin typeface="Segoe UI"/>
               </a:rPr>
-              <a:t>80%</a:t>
+              <a:t>94%</a:t>
             </a:r>
           </a:p>
         </p:txBody>
@@ -5647,7 +5647,7 @@
                 </a:solidFill>
                 <a:latin typeface="Segoe UI"/>
               </a:rPr>
-              <a:t>ICICI Bank</a:t>
+              <a:t>NIFTY Bank</a:t>
             </a:r>
           </a:p>
         </p:txBody>
@@ -5681,7 +5681,7 @@
                 </a:solidFill>
                 <a:latin typeface="Segoe UI"/>
               </a:rPr>
-              <a:t>BUY</a:t>
+              <a:t>STRONG BUY</a:t>
             </a:r>
           </a:p>
         </p:txBody>
@@ -5715,7 +5715,7 @@
                 </a:solidFill>
                 <a:latin typeface="Segoe UI"/>
               </a:rPr>
-              <a:t>80%</a:t>
+              <a:t>87%</a:t>
             </a:r>
           </a:p>
         </p:txBody>
@@ -5749,7 +5749,7 @@
                 </a:solidFill>
                 <a:latin typeface="Segoe UI"/>
               </a:rPr>
-              <a:t>above 200DMA · golden cross (50&gt;200) · MACD bearish</a:t>
+              <a:t>above 200DMA · golden cross (50&gt;200) · MACD bullish</a:t>
             </a:r>
           </a:p>
         </p:txBody>
@@ -5783,7 +5783,7 @@
                 </a:solidFill>
                 <a:latin typeface="Segoe UI"/>
               </a:rPr>
-              <a:t>Amazon</a:t>
+              <a:t>US Energy</a:t>
             </a:r>
           </a:p>
         </p:txBody>
@@ -5817,7 +5817,7 @@
                 </a:solidFill>
                 <a:latin typeface="Segoe UI"/>
               </a:rPr>
-              <a:t>BUY</a:t>
+              <a:t>STRONG BUY</a:t>
             </a:r>
           </a:p>
         </p:txBody>
@@ -5851,7 +5851,7 @@
                 </a:solidFill>
                 <a:latin typeface="Segoe UI"/>
               </a:rPr>
-              <a:t>91%</a:t>
+              <a:t>80%</a:t>
             </a:r>
           </a:p>
         </p:txBody>
@@ -5885,7 +5885,7 @@
                 </a:solidFill>
                 <a:latin typeface="Segoe UI"/>
               </a:rPr>
-              <a:t>above 200DMA · golden cross (50&gt;200) · MACD bullish</a:t>
+              <a:t>above 200DMA · golden cross (50&gt;200) · MACD bearish</a:t>
             </a:r>
           </a:p>
         </p:txBody>
@@ -5919,7 +5919,7 @@
                 </a:solidFill>
                 <a:latin typeface="Segoe UI"/>
               </a:rPr>
-              <a:t>Bharti Airtel</a:t>
+              <a:t>Amazon</a:t>
             </a:r>
           </a:p>
         </p:txBody>
@@ -5987,7 +5987,7 @@
                 </a:solidFill>
                 <a:latin typeface="Segoe UI"/>
               </a:rPr>
-              <a:t>91%</a:t>
+              <a:t>92%</a:t>
             </a:r>
           </a:p>
         </p:txBody>
@@ -6055,7 +6055,7 @@
                 </a:solidFill>
                 <a:latin typeface="Segoe UI"/>
               </a:rPr>
-              <a:t>DAX</a:t>
+              <a:t>Microsoft</a:t>
             </a:r>
           </a:p>
         </p:txBody>
@@ -6123,7 +6123,7 @@
                 </a:solidFill>
                 <a:latin typeface="Segoe UI"/>
               </a:rPr>
-              <a:t>77%</a:t>
+              <a:t>78%</a:t>
             </a:r>
           </a:p>
         </p:txBody>
@@ -6157,7 +6157,7 @@
                 </a:solidFill>
                 <a:latin typeface="Segoe UI"/>
               </a:rPr>
-              <a:t>above 200DMA · golden cross (50&gt;200) · MACD bullish</a:t>
+              <a:t>above 200DMA · death cross (50&lt;200) · MACD bullish</a:t>
             </a:r>
           </a:p>
         </p:txBody>
@@ -6191,7 +6191,7 @@
                 </a:solidFill>
                 <a:latin typeface="Segoe UI"/>
               </a:rPr>
-              <a:t>Microsoft</a:t>
+              <a:t>DAX</a:t>
             </a:r>
           </a:p>
         </p:txBody>
@@ -6259,7 +6259,7 @@
                 </a:solidFill>
                 <a:latin typeface="Segoe UI"/>
               </a:rPr>
-              <a:t>76%</a:t>
+              <a:t>77%</a:t>
             </a:r>
           </a:p>
         </p:txBody>
@@ -6293,7 +6293,7 @@
                 </a:solidFill>
                 <a:latin typeface="Segoe UI"/>
               </a:rPr>
-              <a:t>above 200DMA · death cross (50&lt;200) · MACD bullish</a:t>
+              <a:t>above 200DMA · golden cross (50&gt;200) · MACD bullish</a:t>
             </a:r>
           </a:p>
         </p:txBody>
@@ -6327,7 +6327,7 @@
                 </a:solidFill>
                 <a:latin typeface="Segoe UI"/>
               </a:rPr>
-              <a:t>FTSE 100</a:t>
+              <a:t>Copper</a:t>
             </a:r>
           </a:p>
         </p:txBody>
@@ -6395,7 +6395,7 @@
                 </a:solidFill>
                 <a:latin typeface="Segoe UI"/>
               </a:rPr>
-              <a:t>76%</a:t>
+              <a:t>77%</a:t>
             </a:r>
           </a:p>
         </p:txBody>
@@ -6463,7 +6463,7 @@
                 </a:solidFill>
                 <a:latin typeface="Segoe UI"/>
               </a:rPr>
-              <a:t>Hang Seng</a:t>
+              <a:t>FTSE 100</a:t>
             </a:r>
           </a:p>
         </p:txBody>
@@ -6531,7 +6531,7 @@
                 </a:solidFill>
                 <a:latin typeface="Segoe UI"/>
               </a:rPr>
-              <a:t>69%</a:t>
+              <a:t>77%</a:t>
             </a:r>
           </a:p>
         </p:txBody>
@@ -6565,7 +6565,7 @@
                 </a:solidFill>
                 <a:latin typeface="Segoe UI"/>
               </a:rPr>
-              <a:t>above 200DMA · death cross (50&lt;200) · MACD bullish</a:t>
+              <a:t>above 200DMA · golden cross (50&gt;200) · MACD bullish</a:t>
             </a:r>
           </a:p>
         </p:txBody>
@@ -6659,7 +6659,7 @@
                 </a:solidFill>
                 <a:latin typeface="Segoe UI"/>
               </a:rPr>
-              <a:t>Base currency INR · USD/INR 95.39</a:t>
+              <a:t>Base currency INR · USD/INR 95.35</a:t>
             </a:r>
           </a:p>
         </p:txBody>
@@ -7067,7 +7067,7 @@
                 </a:solidFill>
                 <a:latin typeface="Segoe UI"/>
               </a:rPr>
-              <a:t>62,486</a:t>
+              <a:t>63,603</a:t>
             </a:r>
           </a:p>
         </p:txBody>
@@ -7101,7 +7101,7 @@
                 </a:solidFill>
                 <a:latin typeface="Segoe UI"/>
               </a:rPr>
-              <a:t>Rs 596,058</a:t>
+              <a:t>Rs 606,456</a:t>
             </a:r>
           </a:p>
         </p:txBody>
@@ -7135,7 +7135,7 @@
                 </a:solidFill>
                 <a:latin typeface="Segoe UI"/>
               </a:rPr>
-              <a:t>Rs 23,718</a:t>
+              <a:t>Rs 34,356</a:t>
             </a:r>
           </a:p>
         </p:txBody>
@@ -7169,7 +7169,7 @@
                 </a:solidFill>
                 <a:latin typeface="Segoe UI"/>
               </a:rPr>
-              <a:t>+4.1%</a:t>
+              <a:t>+6.0%</a:t>
             </a:r>
           </a:p>
         </p:txBody>
@@ -7199,11 +7199,11 @@
             <a:r>
               <a:rPr sz="1000" b="0">
                 <a:solidFill>
-                  <a:srgbClr val="EF4444"/>
-                </a:solidFill>
-                <a:latin typeface="Segoe UI"/>
-              </a:rPr>
-              <a:t>-1.6%</a:t>
+                  <a:srgbClr val="22C55E"/>
+                </a:solidFill>
+                <a:latin typeface="Segoe UI"/>
+              </a:rPr>
+              <a:t>+0.2%</a:t>
             </a:r>
           </a:p>
         </p:txBody>
@@ -7339,7 +7339,7 @@
                 </a:solidFill>
                 <a:latin typeface="Segoe UI"/>
               </a:rPr>
-              <a:t>4,117</a:t>
+              <a:t>4,123</a:t>
             </a:r>
           </a:p>
         </p:txBody>
@@ -7373,7 +7373,7 @@
                 </a:solidFill>
                 <a:latin typeface="Segoe UI"/>
               </a:rPr>
-              <a:t>Rs 392,682</a:t>
+              <a:t>Rs 393,147</a:t>
             </a:r>
           </a:p>
         </p:txBody>
@@ -7407,7 +7407,7 @@
                 </a:solidFill>
                 <a:latin typeface="Segoe UI"/>
               </a:rPr>
-              <a:t>Rs 173,285</a:t>
+              <a:t>Rs 173,842</a:t>
             </a:r>
           </a:p>
         </p:txBody>
@@ -7441,7 +7441,7 @@
                 </a:solidFill>
                 <a:latin typeface="Segoe UI"/>
               </a:rPr>
-              <a:t>+79.0%</a:t>
+              <a:t>+79.3%</a:t>
             </a:r>
           </a:p>
         </p:txBody>
@@ -7475,7 +7475,7 @@
                 </a:solidFill>
                 <a:latin typeface="Segoe UI"/>
               </a:rPr>
-              <a:t>+1.7%</a:t>
+              <a:t>+1.8%</a:t>
             </a:r>
           </a:p>
         </p:txBody>
@@ -7645,7 +7645,7 @@
                 </a:solidFill>
                 <a:latin typeface="Segoe UI"/>
               </a:rPr>
-              <a:t>Rs 294,669</a:t>
+              <a:t>Rs 294,546</a:t>
             </a:r>
           </a:p>
         </p:txBody>
@@ -7679,7 +7679,7 @@
                 </a:solidFill>
                 <a:latin typeface="Segoe UI"/>
               </a:rPr>
-              <a:t>Rs 118,198</a:t>
+              <a:t>Rs 118,148</a:t>
             </a:r>
           </a:p>
         </p:txBody>
@@ -7917,7 +7917,7 @@
                 </a:solidFill>
                 <a:latin typeface="Segoe UI"/>
               </a:rPr>
-              <a:t>Rs 153,196</a:t>
+              <a:t>Rs 153,132</a:t>
             </a:r>
           </a:p>
         </p:txBody>
@@ -7951,7 +7951,7 @@
                 </a:solidFill>
                 <a:latin typeface="Segoe UI"/>
               </a:rPr>
-              <a:t>Rs -190,208</a:t>
+              <a:t>Rs -190,128</a:t>
             </a:r>
           </a:p>
         </p:txBody>
@@ -8155,7 +8155,7 @@
                 </a:solidFill>
                 <a:latin typeface="Segoe UI"/>
               </a:rPr>
-              <a:t>1,180</a:t>
+              <a:t>1,160</a:t>
             </a:r>
           </a:p>
         </p:txBody>
@@ -8189,7 +8189,7 @@
                 </a:solidFill>
                 <a:latin typeface="Segoe UI"/>
               </a:rPr>
-              <a:t>Rs 94,400</a:t>
+              <a:t>Rs 92,776</a:t>
             </a:r>
           </a:p>
         </p:txBody>
@@ -8223,7 +8223,7 @@
                 </a:solidFill>
                 <a:latin typeface="Segoe UI"/>
               </a:rPr>
-              <a:t>Rs -17,600</a:t>
+              <a:t>Rs -19,224</a:t>
             </a:r>
           </a:p>
         </p:txBody>
@@ -8257,7 +8257,7 @@
                 </a:solidFill>
                 <a:latin typeface="Segoe UI"/>
               </a:rPr>
-              <a:t>-15.7%</a:t>
+              <a:t>-17.2%</a:t>
             </a:r>
           </a:p>
         </p:txBody>
@@ -8291,7 +8291,7 @@
                 </a:solidFill>
                 <a:latin typeface="Segoe UI"/>
               </a:rPr>
-              <a:t>+4.4%</a:t>
+              <a:t>+2.6%</a:t>
             </a:r>
           </a:p>
         </p:txBody>
@@ -8427,7 +8427,7 @@
                 </a:solidFill>
                 <a:latin typeface="Segoe UI"/>
               </a:rPr>
-              <a:t>1,319</a:t>
+              <a:t>1,293</a:t>
             </a:r>
           </a:p>
         </p:txBody>
@@ -8461,7 +8461,7 @@
                 </a:solidFill>
                 <a:latin typeface="Segoe UI"/>
               </a:rPr>
-              <a:t>Rs 65,950</a:t>
+              <a:t>Rs 64,665</a:t>
             </a:r>
           </a:p>
         </p:txBody>
@@ -8495,7 +8495,7 @@
                 </a:solidFill>
                 <a:latin typeface="Segoe UI"/>
               </a:rPr>
-              <a:t>Rs -56,550</a:t>
+              <a:t>Rs -57,835</a:t>
             </a:r>
           </a:p>
         </p:txBody>
@@ -8529,7 +8529,7 @@
                 </a:solidFill>
                 <a:latin typeface="Segoe UI"/>
               </a:rPr>
-              <a:t>-46.2%</a:t>
+              <a:t>-47.2%</a:t>
             </a:r>
           </a:p>
         </p:txBody>
@@ -8559,11 +8559,11 @@
             <a:r>
               <a:rPr sz="1000" b="0">
                 <a:solidFill>
-                  <a:srgbClr val="22C55E"/>
-                </a:solidFill>
-                <a:latin typeface="Segoe UI"/>
-              </a:rPr>
-              <a:t>+0.9%</a:t>
+                  <a:srgbClr val="EF4444"/>
+                </a:solidFill>
+                <a:latin typeface="Segoe UI"/>
+              </a:rPr>
+              <a:t>-1.1%</a:t>
             </a:r>
           </a:p>
         </p:txBody>
@@ -8699,7 +8699,7 @@
                 </a:solidFill>
                 <a:latin typeface="Segoe UI"/>
               </a:rPr>
-              <a:t>2,474</a:t>
+              <a:t>2,458</a:t>
             </a:r>
           </a:p>
         </p:txBody>
@@ -8733,7 +8733,7 @@
                 </a:solidFill>
                 <a:latin typeface="Segoe UI"/>
               </a:rPr>
-              <a:t>Rs 61,842</a:t>
+              <a:t>Rs 61,447</a:t>
             </a:r>
           </a:p>
         </p:txBody>
@@ -8767,7 +8767,7 @@
                 </a:solidFill>
                 <a:latin typeface="Segoe UI"/>
               </a:rPr>
-              <a:t>Rs -28,158</a:t>
+              <a:t>Rs -28,553</a:t>
             </a:r>
           </a:p>
         </p:txBody>
@@ -8801,7 +8801,7 @@
                 </a:solidFill>
                 <a:latin typeface="Segoe UI"/>
               </a:rPr>
-              <a:t>-31.3%</a:t>
+              <a:t>-31.7%</a:t>
             </a:r>
           </a:p>
         </p:txBody>
@@ -8835,7 +8835,7 @@
                 </a:solidFill>
                 <a:latin typeface="Segoe UI"/>
               </a:rPr>
-              <a:t>+4.6%</a:t>
+              <a:t>+3.9%</a:t>
             </a:r>
           </a:p>
         </p:txBody>
@@ -8971,7 +8971,7 @@
                 </a:solidFill>
                 <a:latin typeface="Segoe UI"/>
               </a:rPr>
-              <a:t>753</a:t>
+              <a:t>739</a:t>
             </a:r>
           </a:p>
         </p:txBody>
@@ -9005,7 +9005,7 @@
                 </a:solidFill>
                 <a:latin typeface="Segoe UI"/>
               </a:rPr>
-              <a:t>Rs 45,180</a:t>
+              <a:t>Rs 44,355</a:t>
             </a:r>
           </a:p>
         </p:txBody>
@@ -9039,7 +9039,7 @@
                 </a:solidFill>
                 <a:latin typeface="Segoe UI"/>
               </a:rPr>
-              <a:t>Rs -46,020</a:t>
+              <a:t>Rs -46,845</a:t>
             </a:r>
           </a:p>
         </p:txBody>
@@ -9073,7 +9073,7 @@
                 </a:solidFill>
                 <a:latin typeface="Segoe UI"/>
               </a:rPr>
-              <a:t>-50.5%</a:t>
+              <a:t>-51.4%</a:t>
             </a:r>
           </a:p>
         </p:txBody>
@@ -9103,11 +9103,11 @@
             <a:r>
               <a:rPr sz="1000" b="0">
                 <a:solidFill>
-                  <a:srgbClr val="22C55E"/>
-                </a:solidFill>
-                <a:latin typeface="Segoe UI"/>
-              </a:rPr>
-              <a:t>+0.7%</a:t>
+                  <a:srgbClr val="EF4444"/>
+                </a:solidFill>
+                <a:latin typeface="Segoe UI"/>
+              </a:rPr>
+              <a:t>-1.2%</a:t>
             </a:r>
           </a:p>
         </p:txBody>
@@ -9141,7 +9141,7 @@
                 </a:solidFill>
                 <a:latin typeface="Segoe UI"/>
               </a:rPr>
-              <a:t>Total Rs 1,703,978 | P&amp;L Rs -23,334 (-1.4%) | Sharpe -0.45 | Vol 17.66% | VaR95 -1.82%/day</a:t>
+              <a:t>Total Rs 1,710,525 | P&amp;L Rs -16,238 (-0.9%) | Sharpe -0.41 | Vol 17.8% | VaR95 -1.83%/day</a:t>
             </a:r>
           </a:p>
         </p:txBody>

--- a/docs/pmr_daily.pptx
+++ b/docs/pmr_daily.pptx
@@ -3197,7 +3197,7 @@
                 </a:solidFill>
                 <a:latin typeface="Segoe UI"/>
               </a:rPr>
-              <a:t>Tuesday, 04 Aug 2026 16:10 SGT</a:t>
+              <a:t>Wednesday, 05 Aug 2026 16:09 SGT</a:t>
             </a:r>
           </a:p>
         </p:txBody>
@@ -3265,7 +3265,7 @@
                 </a:solidFill>
                 <a:latin typeface="Segoe UI"/>
               </a:rPr>
-              <a:t>RAG 15R / 15A / 16G   |   60.9% above 200DMA   |   Portfolio Rs 1,710,525 (-0.9%)</a:t>
+              <a:t>RAG 15R / 10A / 21G   |   58.7% above 200DMA   |   Portfolio Rs 1,730,395 (+0.3%)</a:t>
             </a:r>
           </a:p>
         </p:txBody>
@@ -3461,7 +3461,7 @@
                 </a:solidFill>
                 <a:latin typeface="Segoe UI"/>
               </a:rPr>
-              <a:t>TCS</a:t>
+              <a:t>Silver</a:t>
             </a:r>
           </a:p>
         </p:txBody>
@@ -3495,7 +3495,7 @@
                 </a:solidFill>
                 <a:latin typeface="Segoe UI"/>
               </a:rPr>
-              <a:t>TCS.NS · RED</a:t>
+              <a:t>SI=F · RED</a:t>
             </a:r>
           </a:p>
         </p:txBody>
@@ -3529,7 +3529,7 @@
                 </a:solidFill>
                 <a:latin typeface="Segoe UI"/>
               </a:rPr>
-              <a:t>+3.9%</a:t>
+              <a:t>+7.8%</a:t>
             </a:r>
           </a:p>
         </p:txBody>
@@ -3587,7 +3587,7 @@
                 </a:solidFill>
                 <a:latin typeface="Segoe UI"/>
               </a:rPr>
-              <a:t>Copper</a:t>
+              <a:t>US Technology</a:t>
             </a:r>
           </a:p>
         </p:txBody>
@@ -3621,7 +3621,7 @@
                 </a:solidFill>
                 <a:latin typeface="Segoe UI"/>
               </a:rPr>
-              <a:t>HG=F · GREEN</a:t>
+              <a:t>XLK · GREEN</a:t>
             </a:r>
           </a:p>
         </p:txBody>
@@ -3655,7 +3655,7 @@
                 </a:solidFill>
                 <a:latin typeface="Segoe UI"/>
               </a:rPr>
-              <a:t>+2.9%</a:t>
+              <a:t>+6.6%</a:t>
             </a:r>
           </a:p>
         </p:txBody>
@@ -3713,7 +3713,7 @@
                 </a:solidFill>
                 <a:latin typeface="Segoe UI"/>
               </a:rPr>
-              <a:t>Silver</a:t>
+              <a:t>Microsoft</a:t>
             </a:r>
           </a:p>
         </p:txBody>
@@ -3743,11 +3743,11 @@
             <a:r>
               <a:rPr sz="900" b="0">
                 <a:solidFill>
-                  <a:srgbClr val="EF4444"/>
-                </a:solidFill>
-                <a:latin typeface="Segoe UI"/>
-              </a:rPr>
-              <a:t>SI=F · RED</a:t>
+                  <a:srgbClr val="22C55E"/>
+                </a:solidFill>
+                <a:latin typeface="Segoe UI"/>
+              </a:rPr>
+              <a:t>MSFT · GREEN</a:t>
             </a:r>
           </a:p>
         </p:txBody>
@@ -3781,7 +3781,7 @@
                 </a:solidFill>
                 <a:latin typeface="Segoe UI"/>
               </a:rPr>
-              <a:t>+2.9%</a:t>
+              <a:t>+6.0%</a:t>
             </a:r>
           </a:p>
         </p:txBody>
@@ -3839,7 +3839,7 @@
                 </a:solidFill>
                 <a:latin typeface="Segoe UI"/>
               </a:rPr>
-              <a:t>Infosys</a:t>
+              <a:t>Alphabet</a:t>
             </a:r>
           </a:p>
         </p:txBody>
@@ -3869,11 +3869,11 @@
             <a:r>
               <a:rPr sz="900" b="0">
                 <a:solidFill>
-                  <a:srgbClr val="EF4444"/>
-                </a:solidFill>
-                <a:latin typeface="Segoe UI"/>
-              </a:rPr>
-              <a:t>INFY.NS · RED</a:t>
+                  <a:srgbClr val="22C55E"/>
+                </a:solidFill>
+                <a:latin typeface="Segoe UI"/>
+              </a:rPr>
+              <a:t>GOOGL · GREEN</a:t>
             </a:r>
           </a:p>
         </p:txBody>
@@ -3907,7 +3907,7 @@
                 </a:solidFill>
                 <a:latin typeface="Segoe UI"/>
               </a:rPr>
-              <a:t>+2.6%</a:t>
+              <a:t>+6.0%</a:t>
             </a:r>
           </a:p>
         </p:txBody>
@@ -3965,7 +3965,7 @@
                 </a:solidFill>
                 <a:latin typeface="Segoe UI"/>
               </a:rPr>
-              <a:t>DAX</a:t>
+              <a:t>Nvidia</a:t>
             </a:r>
           </a:p>
         </p:txBody>
@@ -3995,11 +3995,11 @@
             <a:r>
               <a:rPr sz="900" b="0">
                 <a:solidFill>
-                  <a:srgbClr val="22C55E"/>
-                </a:solidFill>
-                <a:latin typeface="Segoe UI"/>
-              </a:rPr>
-              <a:t>^GDAXI · GREEN</a:t>
+                  <a:srgbClr val="F59E0B"/>
+                </a:solidFill>
+                <a:latin typeface="Segoe UI"/>
+              </a:rPr>
+              <a:t>NVDA · AMBER</a:t>
             </a:r>
           </a:p>
         </p:txBody>
@@ -4033,7 +4033,7 @@
                 </a:solidFill>
                 <a:latin typeface="Segoe UI"/>
               </a:rPr>
-              <a:t>+2.4%</a:t>
+              <a:t>+5.6%</a:t>
             </a:r>
           </a:p>
         </p:txBody>
@@ -4193,7 +4193,7 @@
                 </a:solidFill>
                 <a:latin typeface="Segoe UI"/>
               </a:rPr>
-              <a:t>-4.7%</a:t>
+              <a:t>-10.1%</a:t>
             </a:r>
           </a:p>
         </p:txBody>
@@ -4251,7 +4251,7 @@
                 </a:solidFill>
                 <a:latin typeface="Segoe UI"/>
               </a:rPr>
-              <a:t>USD/JPY</a:t>
+              <a:t>Reliance</a:t>
             </a:r>
           </a:p>
         </p:txBody>
@@ -4281,11 +4281,11 @@
             <a:r>
               <a:rPr sz="900" b="0">
                 <a:solidFill>
-                  <a:srgbClr val="F59E0B"/>
-                </a:solidFill>
-                <a:latin typeface="Segoe UI"/>
-              </a:rPr>
-              <a:t>JPY=X · AMBER</a:t>
+                  <a:srgbClr val="EF4444"/>
+                </a:solidFill>
+                <a:latin typeface="Segoe UI"/>
+              </a:rPr>
+              <a:t>RELIANCE.NS · RED</a:t>
             </a:r>
           </a:p>
         </p:txBody>
@@ -4319,7 +4319,7 @@
                 </a:solidFill>
                 <a:latin typeface="Segoe UI"/>
               </a:rPr>
-              <a:t>-1.5%</a:t>
+              <a:t>-2.1%</a:t>
             </a:r>
           </a:p>
         </p:txBody>
@@ -4377,7 +4377,7 @@
                 </a:solidFill>
                 <a:latin typeface="Segoe UI"/>
               </a:rPr>
-              <a:t>HDFC Bank</a:t>
+              <a:t>Natural Gas</a:t>
             </a:r>
           </a:p>
         </p:txBody>
@@ -4411,7 +4411,7 @@
                 </a:solidFill>
                 <a:latin typeface="Segoe UI"/>
               </a:rPr>
-              <a:t>HDFCBANK.NS · RED</a:t>
+              <a:t>NG=F · RED</a:t>
             </a:r>
           </a:p>
         </p:txBody>
@@ -4445,7 +4445,7 @@
                 </a:solidFill>
                 <a:latin typeface="Segoe UI"/>
               </a:rPr>
-              <a:t>-1.2%</a:t>
+              <a:t>-2.0%</a:t>
             </a:r>
           </a:p>
         </p:txBody>
@@ -4503,7 +4503,7 @@
                 </a:solidFill>
                 <a:latin typeface="Segoe UI"/>
               </a:rPr>
-              <a:t>Reliance</a:t>
+              <a:t>HDFC Bank</a:t>
             </a:r>
           </a:p>
         </p:txBody>
@@ -4537,7 +4537,7 @@
                 </a:solidFill>
                 <a:latin typeface="Segoe UI"/>
               </a:rPr>
-              <a:t>RELIANCE.NS · RED</a:t>
+              <a:t>HDFCBANK.NS · RED</a:t>
             </a:r>
           </a:p>
         </p:txBody>
@@ -4571,7 +4571,7 @@
                 </a:solidFill>
                 <a:latin typeface="Segoe UI"/>
               </a:rPr>
-              <a:t>-1.1%</a:t>
+              <a:t>-1.9%</a:t>
             </a:r>
           </a:p>
         </p:txBody>
@@ -4629,7 +4629,7 @@
                 </a:solidFill>
                 <a:latin typeface="Segoe UI"/>
               </a:rPr>
-              <a:t>Bharti Airtel</a:t>
+              <a:t>US Energy</a:t>
             </a:r>
           </a:p>
         </p:txBody>
@@ -4663,7 +4663,7 @@
                 </a:solidFill>
                 <a:latin typeface="Segoe UI"/>
               </a:rPr>
-              <a:t>BHARTIARTL.NS · GREEN</a:t>
+              <a:t>XLE · GREEN</a:t>
             </a:r>
           </a:p>
         </p:txBody>
@@ -4697,7 +4697,7 @@
                 </a:solidFill>
                 <a:latin typeface="Segoe UI"/>
               </a:rPr>
-              <a:t>-1.0%</a:t>
+              <a:t>-1.7%</a:t>
             </a:r>
           </a:p>
         </p:txBody>
@@ -4967,7 +4967,7 @@
                 </a:solidFill>
                 <a:latin typeface="Segoe UI"/>
               </a:rPr>
-              <a:t>ICICI Bank</a:t>
+              <a:t>Dow Jones</a:t>
             </a:r>
           </a:p>
         </p:txBody>
@@ -5035,7 +5035,7 @@
                 </a:solidFill>
                 <a:latin typeface="Segoe UI"/>
               </a:rPr>
-              <a:t>85%</a:t>
+              <a:t>95%</a:t>
             </a:r>
           </a:p>
         </p:txBody>
@@ -5069,7 +5069,7 @@
                 </a:solidFill>
                 <a:latin typeface="Segoe UI"/>
               </a:rPr>
-              <a:t>above 200DMA · golden cross (50&gt;200) · MACD bearish</a:t>
+              <a:t>above 200DMA · golden cross (50&gt;200) · MACD bullish</a:t>
             </a:r>
           </a:p>
         </p:txBody>
@@ -5103,7 +5103,7 @@
                 </a:solidFill>
                 <a:latin typeface="Segoe UI"/>
               </a:rPr>
-              <a:t>US Financials</a:t>
+              <a:t>ICICI Bank</a:t>
             </a:r>
           </a:p>
         </p:txBody>
@@ -5171,7 +5171,7 @@
                 </a:solidFill>
                 <a:latin typeface="Segoe UI"/>
               </a:rPr>
-              <a:t>85%</a:t>
+              <a:t>84%</a:t>
             </a:r>
           </a:p>
         </p:txBody>
@@ -5239,7 +5239,7 @@
                 </a:solidFill>
                 <a:latin typeface="Segoe UI"/>
               </a:rPr>
-              <a:t>Bharti Airtel</a:t>
+              <a:t>Russell 2000</a:t>
             </a:r>
           </a:p>
         </p:txBody>
@@ -5375,7 +5375,7 @@
                 </a:solidFill>
                 <a:latin typeface="Segoe UI"/>
               </a:rPr>
-              <a:t>Dow Jones</a:t>
+              <a:t>Bharti Airtel</a:t>
             </a:r>
           </a:p>
         </p:txBody>
@@ -5511,7 +5511,7 @@
                 </a:solidFill>
                 <a:latin typeface="Segoe UI"/>
               </a:rPr>
-              <a:t>US 1-3Y Treasury</a:t>
+              <a:t>Alphabet</a:t>
             </a:r>
           </a:p>
         </p:txBody>
@@ -5579,7 +5579,7 @@
                 </a:solidFill>
                 <a:latin typeface="Segoe UI"/>
               </a:rPr>
-              <a:t>94%</a:t>
+              <a:t>95%</a:t>
             </a:r>
           </a:p>
         </p:txBody>
@@ -5647,7 +5647,7 @@
                 </a:solidFill>
                 <a:latin typeface="Segoe UI"/>
               </a:rPr>
-              <a:t>NIFTY Bank</a:t>
+              <a:t>US Financials</a:t>
             </a:r>
           </a:p>
         </p:txBody>
@@ -5681,7 +5681,7 @@
                 </a:solidFill>
                 <a:latin typeface="Segoe UI"/>
               </a:rPr>
-              <a:t>STRONG BUY</a:t>
+              <a:t>BUY</a:t>
             </a:r>
           </a:p>
         </p:txBody>
@@ -5715,7 +5715,7 @@
                 </a:solidFill>
                 <a:latin typeface="Segoe UI"/>
               </a:rPr>
-              <a:t>87%</a:t>
+              <a:t>93%</a:t>
             </a:r>
           </a:p>
         </p:txBody>
@@ -5783,7 +5783,7 @@
                 </a:solidFill>
                 <a:latin typeface="Segoe UI"/>
               </a:rPr>
-              <a:t>US Energy</a:t>
+              <a:t>Microsoft</a:t>
             </a:r>
           </a:p>
         </p:txBody>
@@ -5817,7 +5817,7 @@
                 </a:solidFill>
                 <a:latin typeface="Segoe UI"/>
               </a:rPr>
-              <a:t>STRONG BUY</a:t>
+              <a:t>BUY</a:t>
             </a:r>
           </a:p>
         </p:txBody>
@@ -5851,7 +5851,7 @@
                 </a:solidFill>
                 <a:latin typeface="Segoe UI"/>
               </a:rPr>
-              <a:t>80%</a:t>
+              <a:t>79%</a:t>
             </a:r>
           </a:p>
         </p:txBody>
@@ -5885,7 +5885,7 @@
                 </a:solidFill>
                 <a:latin typeface="Segoe UI"/>
               </a:rPr>
-              <a:t>above 200DMA · golden cross (50&gt;200) · MACD bearish</a:t>
+              <a:t>above 200DMA · death cross (50&lt;200) · MACD bullish</a:t>
             </a:r>
           </a:p>
         </p:txBody>
@@ -5987,7 +5987,7 @@
                 </a:solidFill>
                 <a:latin typeface="Segoe UI"/>
               </a:rPr>
-              <a:t>92%</a:t>
+              <a:t>89%</a:t>
             </a:r>
           </a:p>
         </p:txBody>
@@ -6055,7 +6055,7 @@
                 </a:solidFill>
                 <a:latin typeface="Segoe UI"/>
               </a:rPr>
-              <a:t>Microsoft</a:t>
+              <a:t>DAX</a:t>
             </a:r>
           </a:p>
         </p:txBody>
@@ -6123,7 +6123,7 @@
                 </a:solidFill>
                 <a:latin typeface="Segoe UI"/>
               </a:rPr>
-              <a:t>78%</a:t>
+              <a:t>89%</a:t>
             </a:r>
           </a:p>
         </p:txBody>
@@ -6157,7 +6157,7 @@
                 </a:solidFill>
                 <a:latin typeface="Segoe UI"/>
               </a:rPr>
-              <a:t>above 200DMA · death cross (50&lt;200) · MACD bullish</a:t>
+              <a:t>above 200DMA · golden cross (50&gt;200) · MACD bullish</a:t>
             </a:r>
           </a:p>
         </p:txBody>
@@ -6191,7 +6191,7 @@
                 </a:solidFill>
                 <a:latin typeface="Segoe UI"/>
               </a:rPr>
-              <a:t>DAX</a:t>
+              <a:t>FTSE 100</a:t>
             </a:r>
           </a:p>
         </p:txBody>
@@ -6259,7 +6259,7 @@
                 </a:solidFill>
                 <a:latin typeface="Segoe UI"/>
               </a:rPr>
-              <a:t>77%</a:t>
+              <a:t>76%</a:t>
             </a:r>
           </a:p>
         </p:txBody>
@@ -6395,7 +6395,7 @@
                 </a:solidFill>
                 <a:latin typeface="Segoe UI"/>
               </a:rPr>
-              <a:t>77%</a:t>
+              <a:t>88%</a:t>
             </a:r>
           </a:p>
         </p:txBody>
@@ -6463,7 +6463,7 @@
                 </a:solidFill>
                 <a:latin typeface="Segoe UI"/>
               </a:rPr>
-              <a:t>FTSE 100</a:t>
+              <a:t>S&amp;P 500</a:t>
             </a:r>
           </a:p>
         </p:txBody>
@@ -6531,7 +6531,7 @@
                 </a:solidFill>
                 <a:latin typeface="Segoe UI"/>
               </a:rPr>
-              <a:t>77%</a:t>
+              <a:t>75%</a:t>
             </a:r>
           </a:p>
         </p:txBody>
@@ -6659,7 +6659,7 @@
                 </a:solidFill>
                 <a:latin typeface="Segoe UI"/>
               </a:rPr>
-              <a:t>Base currency INR · USD/INR 95.35</a:t>
+              <a:t>Base currency INR · USD/INR 95.18</a:t>
             </a:r>
           </a:p>
         </p:txBody>
@@ -7067,7 +7067,7 @@
                 </a:solidFill>
                 <a:latin typeface="Segoe UI"/>
               </a:rPr>
-              <a:t>63,603</a:t>
+              <a:t>64,107</a:t>
             </a:r>
           </a:p>
         </p:txBody>
@@ -7101,7 +7101,7 @@
                 </a:solidFill>
                 <a:latin typeface="Segoe UI"/>
               </a:rPr>
-              <a:t>Rs 606,456</a:t>
+              <a:t>Rs 610,183</a:t>
             </a:r>
           </a:p>
         </p:txBody>
@@ -7135,7 +7135,7 @@
                 </a:solidFill>
                 <a:latin typeface="Segoe UI"/>
               </a:rPr>
-              <a:t>Rs 34,356</a:t>
+              <a:t>Rs 39,088</a:t>
             </a:r>
           </a:p>
         </p:txBody>
@@ -7169,7 +7169,7 @@
                 </a:solidFill>
                 <a:latin typeface="Segoe UI"/>
               </a:rPr>
-              <a:t>+6.0%</a:t>
+              <a:t>+6.8%</a:t>
             </a:r>
           </a:p>
         </p:txBody>
@@ -7203,7 +7203,7 @@
                 </a:solidFill>
                 <a:latin typeface="Segoe UI"/>
               </a:rPr>
-              <a:t>+0.2%</a:t>
+              <a:t>+1.0%</a:t>
             </a:r>
           </a:p>
         </p:txBody>
@@ -7339,7 +7339,7 @@
                 </a:solidFill>
                 <a:latin typeface="Segoe UI"/>
               </a:rPr>
-              <a:t>4,123</a:t>
+              <a:t>4,230</a:t>
             </a:r>
           </a:p>
         </p:txBody>
@@ -7373,7 +7373,7 @@
                 </a:solidFill>
                 <a:latin typeface="Segoe UI"/>
               </a:rPr>
-              <a:t>Rs 393,147</a:t>
+              <a:t>Rs 402,603</a:t>
             </a:r>
           </a:p>
         </p:txBody>
@@ -7407,7 +7407,7 @@
                 </a:solidFill>
                 <a:latin typeface="Segoe UI"/>
               </a:rPr>
-              <a:t>Rs 173,842</a:t>
+              <a:t>Rs 183,683</a:t>
             </a:r>
           </a:p>
         </p:txBody>
@@ -7441,7 +7441,7 @@
                 </a:solidFill>
                 <a:latin typeface="Segoe UI"/>
               </a:rPr>
-              <a:t>+79.3%</a:t>
+              <a:t>+83.9%</a:t>
             </a:r>
           </a:p>
         </p:txBody>
@@ -7475,7 +7475,7 @@
                 </a:solidFill>
                 <a:latin typeface="Segoe UI"/>
               </a:rPr>
-              <a:t>+1.8%</a:t>
+              <a:t>+3.3%</a:t>
             </a:r>
           </a:p>
         </p:txBody>
@@ -7645,7 +7645,7 @@
                 </a:solidFill>
                 <a:latin typeface="Segoe UI"/>
               </a:rPr>
-              <a:t>Rs 294,546</a:t>
+              <a:t>Rs 294,476</a:t>
             </a:r>
           </a:p>
         </p:txBody>
@@ -7679,7 +7679,7 @@
                 </a:solidFill>
                 <a:latin typeface="Segoe UI"/>
               </a:rPr>
-              <a:t>Rs 118,148</a:t>
+              <a:t>Rs 118,388</a:t>
             </a:r>
           </a:p>
         </p:txBody>
@@ -7713,7 +7713,7 @@
                 </a:solidFill>
                 <a:latin typeface="Segoe UI"/>
               </a:rPr>
-              <a:t>+67.0%</a:t>
+              <a:t>+67.2%</a:t>
             </a:r>
           </a:p>
         </p:txBody>
@@ -7883,7 +7883,7 @@
                 </a:solidFill>
                 <a:latin typeface="Segoe UI"/>
               </a:rPr>
-              <a:t>201</a:t>
+              <a:t>212</a:t>
             </a:r>
           </a:p>
         </p:txBody>
@@ -7917,7 +7917,7 @@
                 </a:solidFill>
                 <a:latin typeface="Segoe UI"/>
               </a:rPr>
-              <a:t>Rs 153,132</a:t>
+              <a:t>Rs 161,384</a:t>
             </a:r>
           </a:p>
         </p:txBody>
@@ -7951,7 +7951,7 @@
                 </a:solidFill>
                 <a:latin typeface="Segoe UI"/>
               </a:rPr>
-              <a:t>Rs -190,128</a:t>
+              <a:t>Rs -181,273</a:t>
             </a:r>
           </a:p>
         </p:txBody>
@@ -7985,7 +7985,7 @@
                 </a:solidFill>
                 <a:latin typeface="Segoe UI"/>
               </a:rPr>
-              <a:t>-55.4%</a:t>
+              <a:t>-52.9%</a:t>
             </a:r>
           </a:p>
         </p:txBody>
@@ -8155,7 +8155,7 @@
                 </a:solidFill>
                 <a:latin typeface="Segoe UI"/>
               </a:rPr>
-              <a:t>1,160</a:t>
+              <a:t>1,166</a:t>
             </a:r>
           </a:p>
         </p:txBody>
@@ -8189,7 +8189,7 @@
                 </a:solidFill>
                 <a:latin typeface="Segoe UI"/>
               </a:rPr>
-              <a:t>Rs 92,776</a:t>
+              <a:t>Rs 93,280</a:t>
             </a:r>
           </a:p>
         </p:txBody>
@@ -8223,7 +8223,7 @@
                 </a:solidFill>
                 <a:latin typeface="Segoe UI"/>
               </a:rPr>
-              <a:t>Rs -19,224</a:t>
+              <a:t>Rs -18,720</a:t>
             </a:r>
           </a:p>
         </p:txBody>
@@ -8257,7 +8257,7 @@
                 </a:solidFill>
                 <a:latin typeface="Segoe UI"/>
               </a:rPr>
-              <a:t>-17.2%</a:t>
+              <a:t>-16.7%</a:t>
             </a:r>
           </a:p>
         </p:txBody>
@@ -8287,11 +8287,11 @@
             <a:r>
               <a:rPr sz="1000" b="0">
                 <a:solidFill>
-                  <a:srgbClr val="22C55E"/>
-                </a:solidFill>
-                <a:latin typeface="Segoe UI"/>
-              </a:rPr>
-              <a:t>+2.6%</a:t>
+                  <a:srgbClr val="EF4444"/>
+                </a:solidFill>
+                <a:latin typeface="Segoe UI"/>
+              </a:rPr>
+              <a:t>-0.1%</a:t>
             </a:r>
           </a:p>
         </p:txBody>
@@ -8427,7 +8427,7 @@
                 </a:solidFill>
                 <a:latin typeface="Segoe UI"/>
               </a:rPr>
-              <a:t>1,293</a:t>
+              <a:t>1,280</a:t>
             </a:r>
           </a:p>
         </p:txBody>
@@ -8461,7 +8461,7 @@
                 </a:solidFill>
                 <a:latin typeface="Segoe UI"/>
               </a:rPr>
-              <a:t>Rs 64,665</a:t>
+              <a:t>Rs 64,020</a:t>
             </a:r>
           </a:p>
         </p:txBody>
@@ -8495,7 +8495,7 @@
                 </a:solidFill>
                 <a:latin typeface="Segoe UI"/>
               </a:rPr>
-              <a:t>Rs -57,835</a:t>
+              <a:t>Rs -58,480</a:t>
             </a:r>
           </a:p>
         </p:txBody>
@@ -8529,7 +8529,7 @@
                 </a:solidFill>
                 <a:latin typeface="Segoe UI"/>
               </a:rPr>
-              <a:t>-47.2%</a:t>
+              <a:t>-47.7%</a:t>
             </a:r>
           </a:p>
         </p:txBody>
@@ -8563,7 +8563,7 @@
                 </a:solidFill>
                 <a:latin typeface="Segoe UI"/>
               </a:rPr>
-              <a:t>-1.1%</a:t>
+              <a:t>-0.8%</a:t>
             </a:r>
           </a:p>
         </p:txBody>
@@ -8699,7 +8699,7 @@
                 </a:solidFill>
                 <a:latin typeface="Segoe UI"/>
               </a:rPr>
-              <a:t>2,458</a:t>
+              <a:t>2,417</a:t>
             </a:r>
           </a:p>
         </p:txBody>
@@ -8733,7 +8733,7 @@
                 </a:solidFill>
                 <a:latin typeface="Segoe UI"/>
               </a:rPr>
-              <a:t>Rs 61,447</a:t>
+              <a:t>Rs 60,428</a:t>
             </a:r>
           </a:p>
         </p:txBody>
@@ -8767,7 +8767,7 @@
                 </a:solidFill>
                 <a:latin typeface="Segoe UI"/>
               </a:rPr>
-              <a:t>Rs -28,553</a:t>
+              <a:t>Rs -29,572</a:t>
             </a:r>
           </a:p>
         </p:txBody>
@@ -8801,7 +8801,7 @@
                 </a:solidFill>
                 <a:latin typeface="Segoe UI"/>
               </a:rPr>
-              <a:t>-31.7%</a:t>
+              <a:t>-32.9%</a:t>
             </a:r>
           </a:p>
         </p:txBody>
@@ -8831,11 +8831,11 @@
             <a:r>
               <a:rPr sz="1000" b="0">
                 <a:solidFill>
-                  <a:srgbClr val="22C55E"/>
-                </a:solidFill>
-                <a:latin typeface="Segoe UI"/>
-              </a:rPr>
-              <a:t>+3.9%</a:t>
+                  <a:srgbClr val="EF4444"/>
+                </a:solidFill>
+                <a:latin typeface="Segoe UI"/>
+              </a:rPr>
+              <a:t>-1.7%</a:t>
             </a:r>
           </a:p>
         </p:txBody>
@@ -8971,7 +8971,7 @@
                 </a:solidFill>
                 <a:latin typeface="Segoe UI"/>
               </a:rPr>
-              <a:t>739</a:t>
+              <a:t>734</a:t>
             </a:r>
           </a:p>
         </p:txBody>
@@ -9005,7 +9005,7 @@
                 </a:solidFill>
                 <a:latin typeface="Segoe UI"/>
               </a:rPr>
-              <a:t>Rs 44,355</a:t>
+              <a:t>Rs 44,022</a:t>
             </a:r>
           </a:p>
         </p:txBody>
@@ -9039,7 +9039,7 @@
                 </a:solidFill>
                 <a:latin typeface="Segoe UI"/>
               </a:rPr>
-              <a:t>Rs -46,845</a:t>
+              <a:t>Rs -47,178</a:t>
             </a:r>
           </a:p>
         </p:txBody>
@@ -9073,7 +9073,7 @@
                 </a:solidFill>
                 <a:latin typeface="Segoe UI"/>
               </a:rPr>
-              <a:t>-51.4%</a:t>
+              <a:t>-51.7%</a:t>
             </a:r>
           </a:p>
         </p:txBody>
@@ -9107,7 +9107,7 @@
                 </a:solidFill>
                 <a:latin typeface="Segoe UI"/>
               </a:rPr>
-              <a:t>-1.2%</a:t>
+              <a:t>-1.1%</a:t>
             </a:r>
           </a:p>
         </p:txBody>
@@ -9141,7 +9141,7 @@
                 </a:solidFill>
                 <a:latin typeface="Segoe UI"/>
               </a:rPr>
-              <a:t>Total Rs 1,710,525 | P&amp;L Rs -16,238 (-0.9%) | Sharpe -0.41 | Vol 17.8% | VaR95 -1.83%/day</a:t>
+              <a:t>Total Rs 1,730,395 | P&amp;L Rs 5,935 (+0.3%) | Sharpe -0.43 | Vol 17.74% | VaR95 -1.82%/day</a:t>
             </a:r>
           </a:p>
         </p:txBody>

--- a/docs/pmr_daily.pptx
+++ b/docs/pmr_daily.pptx
@@ -3197,7 +3197,7 @@
                 </a:solidFill>
                 <a:latin typeface="Segoe UI"/>
               </a:rPr>
-              <a:t>Wednesday, 05 Aug 2026 16:09 SGT</a:t>
+              <a:t>Thursday, 06 Aug 2026 16:06 SGT</a:t>
             </a:r>
           </a:p>
         </p:txBody>
@@ -3265,7 +3265,7 @@
                 </a:solidFill>
                 <a:latin typeface="Segoe UI"/>
               </a:rPr>
-              <a:t>RAG 15R / 10A / 21G   |   58.7% above 200DMA   |   Portfolio Rs 1,730,395 (+0.3%)</a:t>
+              <a:t>RAG 14R / 13A / 19G   |   56.5% above 200DMA   |   Portfolio Rs 1,755,176 (+1.7%)</a:t>
             </a:r>
           </a:p>
         </p:txBody>
@@ -3461,7 +3461,7 @@
                 </a:solidFill>
                 <a:latin typeface="Segoe UI"/>
               </a:rPr>
-              <a:t>Silver</a:t>
+              <a:t>Nvidia</a:t>
             </a:r>
           </a:p>
         </p:txBody>
@@ -3491,11 +3491,11 @@
             <a:r>
               <a:rPr sz="900" b="0">
                 <a:solidFill>
-                  <a:srgbClr val="EF4444"/>
-                </a:solidFill>
-                <a:latin typeface="Segoe UI"/>
-              </a:rPr>
-              <a:t>SI=F · RED</a:t>
+                  <a:srgbClr val="22C55E"/>
+                </a:solidFill>
+                <a:latin typeface="Segoe UI"/>
+              </a:rPr>
+              <a:t>NVDA · GREEN</a:t>
             </a:r>
           </a:p>
         </p:txBody>
@@ -3529,7 +3529,7 @@
                 </a:solidFill>
                 <a:latin typeface="Segoe UI"/>
               </a:rPr>
-              <a:t>+7.8%</a:t>
+              <a:t>+9.2%</a:t>
             </a:r>
           </a:p>
         </p:txBody>
@@ -3587,7 +3587,7 @@
                 </a:solidFill>
                 <a:latin typeface="Segoe UI"/>
               </a:rPr>
-              <a:t>US Technology</a:t>
+              <a:t>Silver</a:t>
             </a:r>
           </a:p>
         </p:txBody>
@@ -3617,11 +3617,11 @@
             <a:r>
               <a:rPr sz="900" b="0">
                 <a:solidFill>
-                  <a:srgbClr val="22C55E"/>
-                </a:solidFill>
-                <a:latin typeface="Segoe UI"/>
-              </a:rPr>
-              <a:t>XLK · GREEN</a:t>
+                  <a:srgbClr val="EF4444"/>
+                </a:solidFill>
+                <a:latin typeface="Segoe UI"/>
+              </a:rPr>
+              <a:t>SI=F · RED</a:t>
             </a:r>
           </a:p>
         </p:txBody>
@@ -3655,7 +3655,7 @@
                 </a:solidFill>
                 <a:latin typeface="Segoe UI"/>
               </a:rPr>
-              <a:t>+6.6%</a:t>
+              <a:t>+7.8%</a:t>
             </a:r>
           </a:p>
         </p:txBody>
@@ -3713,7 +3713,7 @@
                 </a:solidFill>
                 <a:latin typeface="Segoe UI"/>
               </a:rPr>
-              <a:t>Microsoft</a:t>
+              <a:t>Gold</a:t>
             </a:r>
           </a:p>
         </p:txBody>
@@ -3743,11 +3743,11 @@
             <a:r>
               <a:rPr sz="900" b="0">
                 <a:solidFill>
-                  <a:srgbClr val="22C55E"/>
-                </a:solidFill>
-                <a:latin typeface="Segoe UI"/>
-              </a:rPr>
-              <a:t>MSFT · GREEN</a:t>
+                  <a:srgbClr val="EF4444"/>
+                </a:solidFill>
+                <a:latin typeface="Segoe UI"/>
+              </a:rPr>
+              <a:t>GC=F · RED</a:t>
             </a:r>
           </a:p>
         </p:txBody>
@@ -3781,7 +3781,7 @@
                 </a:solidFill>
                 <a:latin typeface="Segoe UI"/>
               </a:rPr>
-              <a:t>+6.0%</a:t>
+              <a:t>+6.7%</a:t>
             </a:r>
           </a:p>
         </p:txBody>
@@ -3839,7 +3839,7 @@
                 </a:solidFill>
                 <a:latin typeface="Segoe UI"/>
               </a:rPr>
-              <a:t>Alphabet</a:t>
+              <a:t>US Technology</a:t>
             </a:r>
           </a:p>
         </p:txBody>
@@ -3869,11 +3869,11 @@
             <a:r>
               <a:rPr sz="900" b="0">
                 <a:solidFill>
-                  <a:srgbClr val="22C55E"/>
-                </a:solidFill>
-                <a:latin typeface="Segoe UI"/>
-              </a:rPr>
-              <a:t>GOOGL · GREEN</a:t>
+                  <a:srgbClr val="F59E0B"/>
+                </a:solidFill>
+                <a:latin typeface="Segoe UI"/>
+              </a:rPr>
+              <a:t>XLK · AMBER</a:t>
             </a:r>
           </a:p>
         </p:txBody>
@@ -3965,7 +3965,7 @@
                 </a:solidFill>
                 <a:latin typeface="Segoe UI"/>
               </a:rPr>
-              <a:t>Nvidia</a:t>
+              <a:t>Microsoft</a:t>
             </a:r>
           </a:p>
         </p:txBody>
@@ -3995,11 +3995,11 @@
             <a:r>
               <a:rPr sz="900" b="0">
                 <a:solidFill>
-                  <a:srgbClr val="F59E0B"/>
-                </a:solidFill>
-                <a:latin typeface="Segoe UI"/>
-              </a:rPr>
-              <a:t>NVDA · AMBER</a:t>
+                  <a:srgbClr val="22C55E"/>
+                </a:solidFill>
+                <a:latin typeface="Segoe UI"/>
+              </a:rPr>
+              <a:t>MSFT · GREEN</a:t>
             </a:r>
           </a:p>
         </p:txBody>
@@ -4033,7 +4033,7 @@
                 </a:solidFill>
                 <a:latin typeface="Segoe UI"/>
               </a:rPr>
-              <a:t>+5.6%</a:t>
+              <a:t>+4.9%</a:t>
             </a:r>
           </a:p>
         </p:txBody>
@@ -4193,7 +4193,7 @@
                 </a:solidFill>
                 <a:latin typeface="Segoe UI"/>
               </a:rPr>
-              <a:t>-10.1%</a:t>
+              <a:t>-11.2%</a:t>
             </a:r>
           </a:p>
         </p:txBody>
@@ -4251,7 +4251,7 @@
                 </a:solidFill>
                 <a:latin typeface="Segoe UI"/>
               </a:rPr>
-              <a:t>Reliance</a:t>
+              <a:t>US Energy</a:t>
             </a:r>
           </a:p>
         </p:txBody>
@@ -4281,11 +4281,11 @@
             <a:r>
               <a:rPr sz="900" b="0">
                 <a:solidFill>
-                  <a:srgbClr val="EF4444"/>
-                </a:solidFill>
-                <a:latin typeface="Segoe UI"/>
-              </a:rPr>
-              <a:t>RELIANCE.NS · RED</a:t>
+                  <a:srgbClr val="F59E0B"/>
+                </a:solidFill>
+                <a:latin typeface="Segoe UI"/>
+              </a:rPr>
+              <a:t>XLE · AMBER</a:t>
             </a:r>
           </a:p>
         </p:txBody>
@@ -4319,7 +4319,7 @@
                 </a:solidFill>
                 <a:latin typeface="Segoe UI"/>
               </a:rPr>
-              <a:t>-2.1%</a:t>
+              <a:t>-3.8%</a:t>
             </a:r>
           </a:p>
         </p:txBody>
@@ -4571,7 +4571,7 @@
                 </a:solidFill>
                 <a:latin typeface="Segoe UI"/>
               </a:rPr>
-              <a:t>-1.9%</a:t>
+              <a:t>-1.6%</a:t>
             </a:r>
           </a:p>
         </p:txBody>
@@ -4629,7 +4629,7 @@
                 </a:solidFill>
                 <a:latin typeface="Segoe UI"/>
               </a:rPr>
-              <a:t>US Energy</a:t>
+              <a:t>Hang Seng</a:t>
             </a:r>
           </a:p>
         </p:txBody>
@@ -4659,11 +4659,11 @@
             <a:r>
               <a:rPr sz="900" b="0">
                 <a:solidFill>
-                  <a:srgbClr val="22C55E"/>
-                </a:solidFill>
-                <a:latin typeface="Segoe UI"/>
-              </a:rPr>
-              <a:t>XLE · GREEN</a:t>
+                  <a:srgbClr val="F59E0B"/>
+                </a:solidFill>
+                <a:latin typeface="Segoe UI"/>
+              </a:rPr>
+              <a:t>^HSI · AMBER</a:t>
             </a:r>
           </a:p>
         </p:txBody>
@@ -4697,7 +4697,7 @@
                 </a:solidFill>
                 <a:latin typeface="Segoe UI"/>
               </a:rPr>
-              <a:t>-1.7%</a:t>
+              <a:t>-1.5%</a:t>
             </a:r>
           </a:p>
         </p:txBody>
@@ -4967,7 +4967,7 @@
                 </a:solidFill>
                 <a:latin typeface="Segoe UI"/>
               </a:rPr>
-              <a:t>Dow Jones</a:t>
+              <a:t>ICICI Bank</a:t>
             </a:r>
           </a:p>
         </p:txBody>
@@ -5103,7 +5103,7 @@
                 </a:solidFill>
                 <a:latin typeface="Segoe UI"/>
               </a:rPr>
-              <a:t>ICICI Bank</a:t>
+              <a:t>Bharti Airtel</a:t>
             </a:r>
           </a:p>
         </p:txBody>
@@ -5171,7 +5171,7 @@
                 </a:solidFill>
                 <a:latin typeface="Segoe UI"/>
               </a:rPr>
-              <a:t>84%</a:t>
+              <a:t>95%</a:t>
             </a:r>
           </a:p>
         </p:txBody>
@@ -5205,7 +5205,7 @@
                 </a:solidFill>
                 <a:latin typeface="Segoe UI"/>
               </a:rPr>
-              <a:t>above 200DMA · golden cross (50&gt;200) · MACD bearish</a:t>
+              <a:t>above 200DMA · golden cross (50&gt;200) · MACD bullish</a:t>
             </a:r>
           </a:p>
         </p:txBody>
@@ -5239,7 +5239,7 @@
                 </a:solidFill>
                 <a:latin typeface="Segoe UI"/>
               </a:rPr>
-              <a:t>Russell 2000</a:t>
+              <a:t>Amazon</a:t>
             </a:r>
           </a:p>
         </p:txBody>
@@ -5307,7 +5307,7 @@
                 </a:solidFill>
                 <a:latin typeface="Segoe UI"/>
               </a:rPr>
-              <a:t>95%</a:t>
+              <a:t>94%</a:t>
             </a:r>
           </a:p>
         </p:txBody>
@@ -5375,7 +5375,7 @@
                 </a:solidFill>
                 <a:latin typeface="Segoe UI"/>
               </a:rPr>
-              <a:t>Bharti Airtel</a:t>
+              <a:t>Russell 2000</a:t>
             </a:r>
           </a:p>
         </p:txBody>
@@ -5443,7 +5443,7 @@
                 </a:solidFill>
                 <a:latin typeface="Segoe UI"/>
               </a:rPr>
-              <a:t>95%</a:t>
+              <a:t>94%</a:t>
             </a:r>
           </a:p>
         </p:txBody>
@@ -5511,7 +5511,7 @@
                 </a:solidFill>
                 <a:latin typeface="Segoe UI"/>
               </a:rPr>
-              <a:t>Alphabet</a:t>
+              <a:t>NIFTY Bank</a:t>
             </a:r>
           </a:p>
         </p:txBody>
@@ -5579,7 +5579,7 @@
                 </a:solidFill>
                 <a:latin typeface="Segoe UI"/>
               </a:rPr>
-              <a:t>95%</a:t>
+              <a:t>87%</a:t>
             </a:r>
           </a:p>
         </p:txBody>
@@ -5647,7 +5647,7 @@
                 </a:solidFill>
                 <a:latin typeface="Segoe UI"/>
               </a:rPr>
-              <a:t>US Financials</a:t>
+              <a:t>S&amp;P 500</a:t>
             </a:r>
           </a:p>
         </p:txBody>
@@ -5681,7 +5681,7 @@
                 </a:solidFill>
                 <a:latin typeface="Segoe UI"/>
               </a:rPr>
-              <a:t>BUY</a:t>
+              <a:t>STRONG BUY</a:t>
             </a:r>
           </a:p>
         </p:txBody>
@@ -5715,7 +5715,7 @@
                 </a:solidFill>
                 <a:latin typeface="Segoe UI"/>
               </a:rPr>
-              <a:t>93%</a:t>
+              <a:t>81%</a:t>
             </a:r>
           </a:p>
         </p:txBody>
@@ -5783,7 +5783,7 @@
                 </a:solidFill>
                 <a:latin typeface="Segoe UI"/>
               </a:rPr>
-              <a:t>Microsoft</a:t>
+              <a:t>US Financials</a:t>
             </a:r>
           </a:p>
         </p:txBody>
@@ -5851,7 +5851,7 @@
                 </a:solidFill>
                 <a:latin typeface="Segoe UI"/>
               </a:rPr>
-              <a:t>79%</a:t>
+              <a:t>92%</a:t>
             </a:r>
           </a:p>
         </p:txBody>
@@ -5885,7 +5885,7 @@
                 </a:solidFill>
                 <a:latin typeface="Segoe UI"/>
               </a:rPr>
-              <a:t>above 200DMA · death cross (50&lt;200) · MACD bullish</a:t>
+              <a:t>above 200DMA · golden cross (50&gt;200) · MACD bullish</a:t>
             </a:r>
           </a:p>
         </p:txBody>
@@ -5919,7 +5919,7 @@
                 </a:solidFill>
                 <a:latin typeface="Segoe UI"/>
               </a:rPr>
-              <a:t>Amazon</a:t>
+              <a:t>Dow Jones</a:t>
             </a:r>
           </a:p>
         </p:txBody>
@@ -5987,7 +5987,7 @@
                 </a:solidFill>
                 <a:latin typeface="Segoe UI"/>
               </a:rPr>
-              <a:t>89%</a:t>
+              <a:t>90%</a:t>
             </a:r>
           </a:p>
         </p:txBody>
@@ -6055,7 +6055,7 @@
                 </a:solidFill>
                 <a:latin typeface="Segoe UI"/>
               </a:rPr>
-              <a:t>DAX</a:t>
+              <a:t>Copper</a:t>
             </a:r>
           </a:p>
         </p:txBody>
@@ -6123,7 +6123,7 @@
                 </a:solidFill>
                 <a:latin typeface="Segoe UI"/>
               </a:rPr>
-              <a:t>89%</a:t>
+              <a:t>90%</a:t>
             </a:r>
           </a:p>
         </p:txBody>
@@ -6191,7 +6191,7 @@
                 </a:solidFill>
                 <a:latin typeface="Segoe UI"/>
               </a:rPr>
-              <a:t>FTSE 100</a:t>
+              <a:t>Microsoft</a:t>
             </a:r>
           </a:p>
         </p:txBody>
@@ -6259,7 +6259,7 @@
                 </a:solidFill>
                 <a:latin typeface="Segoe UI"/>
               </a:rPr>
-              <a:t>76%</a:t>
+              <a:t>78%</a:t>
             </a:r>
           </a:p>
         </p:txBody>
@@ -6293,7 +6293,7 @@
                 </a:solidFill>
                 <a:latin typeface="Segoe UI"/>
               </a:rPr>
-              <a:t>above 200DMA · golden cross (50&gt;200) · MACD bullish</a:t>
+              <a:t>above 200DMA · death cross (50&lt;200) · MACD bullish</a:t>
             </a:r>
           </a:p>
         </p:txBody>
@@ -6327,7 +6327,7 @@
                 </a:solidFill>
                 <a:latin typeface="Segoe UI"/>
               </a:rPr>
-              <a:t>Copper</a:t>
+              <a:t>FTSE 100</a:t>
             </a:r>
           </a:p>
         </p:txBody>
@@ -6395,7 +6395,7 @@
                 </a:solidFill>
                 <a:latin typeface="Segoe UI"/>
               </a:rPr>
-              <a:t>88%</a:t>
+              <a:t>76%</a:t>
             </a:r>
           </a:p>
         </p:txBody>
@@ -6463,7 +6463,7 @@
                 </a:solidFill>
                 <a:latin typeface="Segoe UI"/>
               </a:rPr>
-              <a:t>S&amp;P 500</a:t>
+              <a:t>DAX</a:t>
             </a:r>
           </a:p>
         </p:txBody>
@@ -6531,7 +6531,7 @@
                 </a:solidFill>
                 <a:latin typeface="Segoe UI"/>
               </a:rPr>
-              <a:t>75%</a:t>
+              <a:t>76%</a:t>
             </a:r>
           </a:p>
         </p:txBody>
@@ -6659,7 +6659,7 @@
                 </a:solidFill>
                 <a:latin typeface="Segoe UI"/>
               </a:rPr>
-              <a:t>Base currency INR · USD/INR 95.18</a:t>
+              <a:t>Base currency INR · USD/INR 95.24</a:t>
             </a:r>
           </a:p>
         </p:txBody>
@@ -7067,7 +7067,7 @@
                 </a:solidFill>
                 <a:latin typeface="Segoe UI"/>
               </a:rPr>
-              <a:t>64,107</a:t>
+              <a:t>64,786</a:t>
             </a:r>
           </a:p>
         </p:txBody>
@@ -7101,7 +7101,7 @@
                 </a:solidFill>
                 <a:latin typeface="Segoe UI"/>
               </a:rPr>
-              <a:t>Rs 610,183</a:t>
+              <a:t>Rs 617,008</a:t>
             </a:r>
           </a:p>
         </p:txBody>
@@ -7135,7 +7135,7 @@
                 </a:solidFill>
                 <a:latin typeface="Segoe UI"/>
               </a:rPr>
-              <a:t>Rs 39,088</a:t>
+              <a:t>Rs 45,583</a:t>
             </a:r>
           </a:p>
         </p:txBody>
@@ -7169,7 +7169,7 @@
                 </a:solidFill>
                 <a:latin typeface="Segoe UI"/>
               </a:rPr>
-              <a:t>+6.8%</a:t>
+              <a:t>+8.0%</a:t>
             </a:r>
           </a:p>
         </p:txBody>
@@ -7203,7 +7203,7 @@
                 </a:solidFill>
                 <a:latin typeface="Segoe UI"/>
               </a:rPr>
-              <a:t>+1.0%</a:t>
+              <a:t>+0.3%</a:t>
             </a:r>
           </a:p>
         </p:txBody>
@@ -7339,7 +7339,7 @@
                 </a:solidFill>
                 <a:latin typeface="Segoe UI"/>
               </a:rPr>
-              <a:t>4,230</a:t>
+              <a:t>4,321</a:t>
             </a:r>
           </a:p>
         </p:txBody>
@@ -7373,7 +7373,7 @@
                 </a:solidFill>
                 <a:latin typeface="Segoe UI"/>
               </a:rPr>
-              <a:t>Rs 402,603</a:t>
+              <a:t>Rs 411,493</a:t>
             </a:r>
           </a:p>
         </p:txBody>
@@ -7407,7 +7407,7 @@
                 </a:solidFill>
                 <a:latin typeface="Segoe UI"/>
               </a:rPr>
-              <a:t>Rs 183,683</a:t>
+              <a:t>Rs 192,446</a:t>
             </a:r>
           </a:p>
         </p:txBody>
@@ -7441,7 +7441,7 @@
                 </a:solidFill>
                 <a:latin typeface="Segoe UI"/>
               </a:rPr>
-              <a:t>+83.9%</a:t>
+              <a:t>+87.9%</a:t>
             </a:r>
           </a:p>
         </p:txBody>
@@ -7475,7 +7475,7 @@
                 </a:solidFill>
                 <a:latin typeface="Segoe UI"/>
               </a:rPr>
-              <a:t>+3.3%</a:t>
+              <a:t>+1.8%</a:t>
             </a:r>
           </a:p>
         </p:txBody>
@@ -7611,7 +7611,7 @@
                 </a:solidFill>
                 <a:latin typeface="Segoe UI"/>
               </a:rPr>
-              <a:t>309</a:t>
+              <a:t>311</a:t>
             </a:r>
           </a:p>
         </p:txBody>
@@ -7645,7 +7645,7 @@
                 </a:solidFill>
                 <a:latin typeface="Segoe UI"/>
               </a:rPr>
-              <a:t>Rs 294,476</a:t>
+              <a:t>Rs 296,189</a:t>
             </a:r>
           </a:p>
         </p:txBody>
@@ -7679,7 +7679,7 @@
                 </a:solidFill>
                 <a:latin typeface="Segoe UI"/>
               </a:rPr>
-              <a:t>Rs 118,388</a:t>
+              <a:t>Rs 119,999</a:t>
             </a:r>
           </a:p>
         </p:txBody>
@@ -7713,7 +7713,7 @@
                 </a:solidFill>
                 <a:latin typeface="Segoe UI"/>
               </a:rPr>
-              <a:t>+67.2%</a:t>
+              <a:t>+68.1%</a:t>
             </a:r>
           </a:p>
         </p:txBody>
@@ -7883,7 +7883,7 @@
                 </a:solidFill>
                 <a:latin typeface="Segoe UI"/>
               </a:rPr>
-              <a:t>212</a:t>
+              <a:t>219</a:t>
             </a:r>
           </a:p>
         </p:txBody>
@@ -7917,7 +7917,7 @@
                 </a:solidFill>
                 <a:latin typeface="Segoe UI"/>
               </a:rPr>
-              <a:t>Rs 161,384</a:t>
+              <a:t>Rs 167,024</a:t>
             </a:r>
           </a:p>
         </p:txBody>
@@ -7951,7 +7951,7 @@
                 </a:solidFill>
                 <a:latin typeface="Segoe UI"/>
               </a:rPr>
-              <a:t>Rs -181,273</a:t>
+              <a:t>Rs -175,831</a:t>
             </a:r>
           </a:p>
         </p:txBody>
@@ -7985,7 +7985,7 @@
                 </a:solidFill>
                 <a:latin typeface="Segoe UI"/>
               </a:rPr>
-              <a:t>-52.9%</a:t>
+              <a:t>-51.3%</a:t>
             </a:r>
           </a:p>
         </p:txBody>
@@ -8155,7 +8155,7 @@
                 </a:solidFill>
                 <a:latin typeface="Segoe UI"/>
               </a:rPr>
-              <a:t>1,166</a:t>
+              <a:t>1,167</a:t>
             </a:r>
           </a:p>
         </p:txBody>
@@ -8189,7 +8189,7 @@
                 </a:solidFill>
                 <a:latin typeface="Segoe UI"/>
               </a:rPr>
-              <a:t>Rs 93,280</a:t>
+              <a:t>Rs 93,392</a:t>
             </a:r>
           </a:p>
         </p:txBody>
@@ -8223,7 +8223,7 @@
                 </a:solidFill>
                 <a:latin typeface="Segoe UI"/>
               </a:rPr>
-              <a:t>Rs -18,720</a:t>
+              <a:t>Rs -18,608</a:t>
             </a:r>
           </a:p>
         </p:txBody>
@@ -8257,7 +8257,7 @@
                 </a:solidFill>
                 <a:latin typeface="Segoe UI"/>
               </a:rPr>
-              <a:t>-16.7%</a:t>
+              <a:t>-16.6%</a:t>
             </a:r>
           </a:p>
         </p:txBody>
@@ -8291,7 +8291,7 @@
                 </a:solidFill>
                 <a:latin typeface="Segoe UI"/>
               </a:rPr>
-              <a:t>-0.1%</a:t>
+              <a:t>-0.6%</a:t>
             </a:r>
           </a:p>
         </p:txBody>
@@ -8427,7 +8427,7 @@
                 </a:solidFill>
                 <a:latin typeface="Segoe UI"/>
               </a:rPr>
-              <a:t>1,280</a:t>
+              <a:t>1,322</a:t>
             </a:r>
           </a:p>
         </p:txBody>
@@ -8461,7 +8461,7 @@
                 </a:solidFill>
                 <a:latin typeface="Segoe UI"/>
               </a:rPr>
-              <a:t>Rs 64,020</a:t>
+              <a:t>Rs 66,120</a:t>
             </a:r>
           </a:p>
         </p:txBody>
@@ -8495,7 +8495,7 @@
                 </a:solidFill>
                 <a:latin typeface="Segoe UI"/>
               </a:rPr>
-              <a:t>Rs -58,480</a:t>
+              <a:t>Rs -56,380</a:t>
             </a:r>
           </a:p>
         </p:txBody>
@@ -8529,7 +8529,7 @@
                 </a:solidFill>
                 <a:latin typeface="Segoe UI"/>
               </a:rPr>
-              <a:t>-47.7%</a:t>
+              <a:t>-46.0%</a:t>
             </a:r>
           </a:p>
         </p:txBody>
@@ -8559,11 +8559,11 @@
             <a:r>
               <a:rPr sz="1000" b="0">
                 <a:solidFill>
-                  <a:srgbClr val="EF4444"/>
-                </a:solidFill>
-                <a:latin typeface="Segoe UI"/>
-              </a:rPr>
-              <a:t>-0.8%</a:t>
+                  <a:srgbClr val="22C55E"/>
+                </a:solidFill>
+                <a:latin typeface="Segoe UI"/>
+              </a:rPr>
+              <a:t>+3.3%</a:t>
             </a:r>
           </a:p>
         </p:txBody>
@@ -8699,7 +8699,7 @@
                 </a:solidFill>
                 <a:latin typeface="Segoe UI"/>
               </a:rPr>
-              <a:t>2,417</a:t>
+              <a:t>2,391</a:t>
             </a:r>
           </a:p>
         </p:txBody>
@@ -8733,7 +8733,7 @@
                 </a:solidFill>
                 <a:latin typeface="Segoe UI"/>
               </a:rPr>
-              <a:t>Rs 60,428</a:t>
+              <a:t>Rs 59,783</a:t>
             </a:r>
           </a:p>
         </p:txBody>
@@ -8767,7 +8767,7 @@
                 </a:solidFill>
                 <a:latin typeface="Segoe UI"/>
               </a:rPr>
-              <a:t>Rs -29,572</a:t>
+              <a:t>Rs -30,217</a:t>
             </a:r>
           </a:p>
         </p:txBody>
@@ -8801,7 +8801,7 @@
                 </a:solidFill>
                 <a:latin typeface="Segoe UI"/>
               </a:rPr>
-              <a:t>-32.9%</a:t>
+              <a:t>-33.6%</a:t>
             </a:r>
           </a:p>
         </p:txBody>
@@ -8835,7 +8835,7 @@
                 </a:solidFill>
                 <a:latin typeface="Segoe UI"/>
               </a:rPr>
-              <a:t>-1.7%</a:t>
+              <a:t>-0.9%</a:t>
             </a:r>
           </a:p>
         </p:txBody>
@@ -8971,7 +8971,7 @@
                 </a:solidFill>
                 <a:latin typeface="Segoe UI"/>
               </a:rPr>
-              <a:t>734</a:t>
+              <a:t>736</a:t>
             </a:r>
           </a:p>
         </p:txBody>
@@ -9005,7 +9005,7 @@
                 </a:solidFill>
                 <a:latin typeface="Segoe UI"/>
               </a:rPr>
-              <a:t>Rs 44,022</a:t>
+              <a:t>Rs 44,169</a:t>
             </a:r>
           </a:p>
         </p:txBody>
@@ -9039,7 +9039,7 @@
                 </a:solidFill>
                 <a:latin typeface="Segoe UI"/>
               </a:rPr>
-              <a:t>Rs -47,178</a:t>
+              <a:t>Rs -47,031</a:t>
             </a:r>
           </a:p>
         </p:txBody>
@@ -9073,7 +9073,7 @@
                 </a:solidFill>
                 <a:latin typeface="Segoe UI"/>
               </a:rPr>
-              <a:t>-51.7%</a:t>
+              <a:t>-51.6%</a:t>
             </a:r>
           </a:p>
         </p:txBody>
@@ -9103,11 +9103,11 @@
             <a:r>
               <a:rPr sz="1000" b="0">
                 <a:solidFill>
-                  <a:srgbClr val="EF4444"/>
-                </a:solidFill>
-                <a:latin typeface="Segoe UI"/>
-              </a:rPr>
-              <a:t>-1.1%</a:t>
+                  <a:srgbClr val="22C55E"/>
+                </a:solidFill>
+                <a:latin typeface="Segoe UI"/>
+              </a:rPr>
+              <a:t>+0.2%</a:t>
             </a:r>
           </a:p>
         </p:txBody>
@@ -9141,7 +9141,7 @@
                 </a:solidFill>
                 <a:latin typeface="Segoe UI"/>
               </a:rPr>
-              <a:t>Total Rs 1,730,395 | P&amp;L Rs 5,935 (+0.3%) | Sharpe -0.43 | Vol 17.74% | VaR95 -1.82%/day</a:t>
+              <a:t>Total Rs 1,755,176 | P&amp;L Rs 29,960 (+1.7%) | Sharpe -0.36 | Vol 17.79% | VaR95 -1.81%/day</a:t>
             </a:r>
           </a:p>
         </p:txBody>

--- a/docs/pmr_daily.pptx
+++ b/docs/pmr_daily.pptx
@@ -3197,7 +3197,7 @@
                 </a:solidFill>
                 <a:latin typeface="Segoe UI"/>
               </a:rPr>
-              <a:t>Thursday, 06 Aug 2026 16:06 SGT</a:t>
+              <a:t>Friday, 07 Aug 2026 13:23 SGT</a:t>
             </a:r>
           </a:p>
         </p:txBody>
@@ -3265,7 +3265,7 @@
                 </a:solidFill>
                 <a:latin typeface="Segoe UI"/>
               </a:rPr>
-              <a:t>RAG 14R / 13A / 19G   |   56.5% above 200DMA   |   Portfolio Rs 1,755,176 (+1.7%)</a:t>
+              <a:t>RAG 14R / 15A / 17G   |   60.9% above 200DMA   |   Portfolio Rs 1,751,932 (+1.5%)</a:t>
             </a:r>
           </a:p>
         </p:txBody>
@@ -3529,7 +3529,7 @@
                 </a:solidFill>
                 <a:latin typeface="Segoe UI"/>
               </a:rPr>
-              <a:t>+9.2%</a:t>
+              <a:t>+9.1%</a:t>
             </a:r>
           </a:p>
         </p:txBody>
@@ -3655,7 +3655,7 @@
                 </a:solidFill>
                 <a:latin typeface="Segoe UI"/>
               </a:rPr>
-              <a:t>+7.8%</a:t>
+              <a:t>+8.7%</a:t>
             </a:r>
           </a:p>
         </p:txBody>
@@ -3713,7 +3713,7 @@
                 </a:solidFill>
                 <a:latin typeface="Segoe UI"/>
               </a:rPr>
-              <a:t>Gold</a:t>
+              <a:t>Microsoft</a:t>
             </a:r>
           </a:p>
         </p:txBody>
@@ -3743,11 +3743,11 @@
             <a:r>
               <a:rPr sz="900" b="0">
                 <a:solidFill>
-                  <a:srgbClr val="EF4444"/>
-                </a:solidFill>
-                <a:latin typeface="Segoe UI"/>
-              </a:rPr>
-              <a:t>GC=F · RED</a:t>
+                  <a:srgbClr val="22C55E"/>
+                </a:solidFill>
+                <a:latin typeface="Segoe UI"/>
+              </a:rPr>
+              <a:t>MSFT · GREEN</a:t>
             </a:r>
           </a:p>
         </p:txBody>
@@ -3781,7 +3781,7 @@
                 </a:solidFill>
                 <a:latin typeface="Segoe UI"/>
               </a:rPr>
-              <a:t>+6.7%</a:t>
+              <a:t>+7.6%</a:t>
             </a:r>
           </a:p>
         </p:txBody>
@@ -3839,7 +3839,7 @@
                 </a:solidFill>
                 <a:latin typeface="Segoe UI"/>
               </a:rPr>
-              <a:t>US Technology</a:t>
+              <a:t>Gold</a:t>
             </a:r>
           </a:p>
         </p:txBody>
@@ -3869,11 +3869,11 @@
             <a:r>
               <a:rPr sz="900" b="0">
                 <a:solidFill>
-                  <a:srgbClr val="F59E0B"/>
-                </a:solidFill>
-                <a:latin typeface="Segoe UI"/>
-              </a:rPr>
-              <a:t>XLK · AMBER</a:t>
+                  <a:srgbClr val="EF4444"/>
+                </a:solidFill>
+                <a:latin typeface="Segoe UI"/>
+              </a:rPr>
+              <a:t>GC=F · RED</a:t>
             </a:r>
           </a:p>
         </p:txBody>
@@ -3907,7 +3907,7 @@
                 </a:solidFill>
                 <a:latin typeface="Segoe UI"/>
               </a:rPr>
-              <a:t>+6.0%</a:t>
+              <a:t>+6.9%</a:t>
             </a:r>
           </a:p>
         </p:txBody>
@@ -3965,7 +3965,7 @@
                 </a:solidFill>
                 <a:latin typeface="Segoe UI"/>
               </a:rPr>
-              <a:t>Microsoft</a:t>
+              <a:t>US Technology</a:t>
             </a:r>
           </a:p>
         </p:txBody>
@@ -3995,11 +3995,11 @@
             <a:r>
               <a:rPr sz="900" b="0">
                 <a:solidFill>
-                  <a:srgbClr val="22C55E"/>
-                </a:solidFill>
-                <a:latin typeface="Segoe UI"/>
-              </a:rPr>
-              <a:t>MSFT · GREEN</a:t>
+                  <a:srgbClr val="F59E0B"/>
+                </a:solidFill>
+                <a:latin typeface="Segoe UI"/>
+              </a:rPr>
+              <a:t>XLK · AMBER</a:t>
             </a:r>
           </a:p>
         </p:txBody>
@@ -4033,7 +4033,7 @@
                 </a:solidFill>
                 <a:latin typeface="Segoe UI"/>
               </a:rPr>
-              <a:t>+4.9%</a:t>
+              <a:t>+5.7%</a:t>
             </a:r>
           </a:p>
         </p:txBody>
@@ -4193,7 +4193,7 @@
                 </a:solidFill>
                 <a:latin typeface="Segoe UI"/>
               </a:rPr>
-              <a:t>-11.2%</a:t>
+              <a:t>-7.6%</a:t>
             </a:r>
           </a:p>
         </p:txBody>
@@ -4251,7 +4251,7 @@
                 </a:solidFill>
                 <a:latin typeface="Segoe UI"/>
               </a:rPr>
-              <a:t>US Energy</a:t>
+              <a:t>Natural Gas</a:t>
             </a:r>
           </a:p>
         </p:txBody>
@@ -4281,11 +4281,11 @@
             <a:r>
               <a:rPr sz="900" b="0">
                 <a:solidFill>
-                  <a:srgbClr val="F59E0B"/>
-                </a:solidFill>
-                <a:latin typeface="Segoe UI"/>
-              </a:rPr>
-              <a:t>XLE · AMBER</a:t>
+                  <a:srgbClr val="EF4444"/>
+                </a:solidFill>
+                <a:latin typeface="Segoe UI"/>
+              </a:rPr>
+              <a:t>NG=F · RED</a:t>
             </a:r>
           </a:p>
         </p:txBody>
@@ -4319,7 +4319,7 @@
                 </a:solidFill>
                 <a:latin typeface="Segoe UI"/>
               </a:rPr>
-              <a:t>-3.8%</a:t>
+              <a:t>-3.7%</a:t>
             </a:r>
           </a:p>
         </p:txBody>
@@ -4377,7 +4377,7 @@
                 </a:solidFill>
                 <a:latin typeface="Segoe UI"/>
               </a:rPr>
-              <a:t>Natural Gas</a:t>
+              <a:t>US Energy</a:t>
             </a:r>
           </a:p>
         </p:txBody>
@@ -4407,11 +4407,11 @@
             <a:r>
               <a:rPr sz="900" b="0">
                 <a:solidFill>
-                  <a:srgbClr val="EF4444"/>
-                </a:solidFill>
-                <a:latin typeface="Segoe UI"/>
-              </a:rPr>
-              <a:t>NG=F · RED</a:t>
+                  <a:srgbClr val="F59E0B"/>
+                </a:solidFill>
+                <a:latin typeface="Segoe UI"/>
+              </a:rPr>
+              <a:t>XLE · AMBER</a:t>
             </a:r>
           </a:p>
         </p:txBody>
@@ -4445,7 +4445,7 @@
                 </a:solidFill>
                 <a:latin typeface="Segoe UI"/>
               </a:rPr>
-              <a:t>-2.0%</a:t>
+              <a:t>-2.3%</a:t>
             </a:r>
           </a:p>
         </p:txBody>
@@ -4571,7 +4571,7 @@
                 </a:solidFill>
                 <a:latin typeface="Segoe UI"/>
               </a:rPr>
-              <a:t>-1.6%</a:t>
+              <a:t>-1.9%</a:t>
             </a:r>
           </a:p>
         </p:txBody>
@@ -4629,7 +4629,7 @@
                 </a:solidFill>
                 <a:latin typeface="Segoe UI"/>
               </a:rPr>
-              <a:t>Hang Seng</a:t>
+              <a:t>Bharti Airtel</a:t>
             </a:r>
           </a:p>
         </p:txBody>
@@ -4663,7 +4663,7 @@
                 </a:solidFill>
                 <a:latin typeface="Segoe UI"/>
               </a:rPr>
-              <a:t>^HSI · AMBER</a:t>
+              <a:t>BHARTIARTL.NS · AMBER</a:t>
             </a:r>
           </a:p>
         </p:txBody>
@@ -4697,7 +4697,7 @@
                 </a:solidFill>
                 <a:latin typeface="Segoe UI"/>
               </a:rPr>
-              <a:t>-1.5%</a:t>
+              <a:t>-1.4%</a:t>
             </a:r>
           </a:p>
         </p:txBody>
@@ -4967,7 +4967,7 @@
                 </a:solidFill>
                 <a:latin typeface="Segoe UI"/>
               </a:rPr>
-              <a:t>ICICI Bank</a:t>
+              <a:t>US Financials</a:t>
             </a:r>
           </a:p>
         </p:txBody>
@@ -5103,7 +5103,7 @@
                 </a:solidFill>
                 <a:latin typeface="Segoe UI"/>
               </a:rPr>
-              <a:t>Bharti Airtel</a:t>
+              <a:t>ICICI Bank</a:t>
             </a:r>
           </a:p>
         </p:txBody>
@@ -5239,7 +5239,7 @@
                 </a:solidFill>
                 <a:latin typeface="Segoe UI"/>
               </a:rPr>
-              <a:t>Amazon</a:t>
+              <a:t>Nvidia</a:t>
             </a:r>
           </a:p>
         </p:txBody>
@@ -5307,7 +5307,7 @@
                 </a:solidFill>
                 <a:latin typeface="Segoe UI"/>
               </a:rPr>
-              <a:t>94%</a:t>
+              <a:t>95%</a:t>
             </a:r>
           </a:p>
         </p:txBody>
@@ -5375,7 +5375,7 @@
                 </a:solidFill>
                 <a:latin typeface="Segoe UI"/>
               </a:rPr>
-              <a:t>Russell 2000</a:t>
+              <a:t>Dow Jones</a:t>
             </a:r>
           </a:p>
         </p:txBody>
@@ -5443,7 +5443,7 @@
                 </a:solidFill>
                 <a:latin typeface="Segoe UI"/>
               </a:rPr>
-              <a:t>94%</a:t>
+              <a:t>95%</a:t>
             </a:r>
           </a:p>
         </p:txBody>
@@ -5511,7 +5511,7 @@
                 </a:solidFill>
                 <a:latin typeface="Segoe UI"/>
               </a:rPr>
-              <a:t>NIFTY Bank</a:t>
+              <a:t>Amazon</a:t>
             </a:r>
           </a:p>
         </p:txBody>
@@ -5579,7 +5579,7 @@
                 </a:solidFill>
                 <a:latin typeface="Segoe UI"/>
               </a:rPr>
-              <a:t>87%</a:t>
+              <a:t>94%</a:t>
             </a:r>
           </a:p>
         </p:txBody>
@@ -5783,7 +5783,7 @@
                 </a:solidFill>
                 <a:latin typeface="Segoe UI"/>
               </a:rPr>
-              <a:t>US Financials</a:t>
+              <a:t>Russell 2000</a:t>
             </a:r>
           </a:p>
         </p:txBody>
@@ -5817,7 +5817,7 @@
                 </a:solidFill>
                 <a:latin typeface="Segoe UI"/>
               </a:rPr>
-              <a:t>BUY</a:t>
+              <a:t>STRONG BUY</a:t>
             </a:r>
           </a:p>
         </p:txBody>
@@ -5851,7 +5851,7 @@
                 </a:solidFill>
                 <a:latin typeface="Segoe UI"/>
               </a:rPr>
-              <a:t>92%</a:t>
+              <a:t>93%</a:t>
             </a:r>
           </a:p>
         </p:txBody>
@@ -5919,7 +5919,7 @@
                 </a:solidFill>
                 <a:latin typeface="Segoe UI"/>
               </a:rPr>
-              <a:t>Dow Jones</a:t>
+              <a:t>Microsoft</a:t>
             </a:r>
           </a:p>
         </p:txBody>
@@ -5987,7 +5987,7 @@
                 </a:solidFill>
                 <a:latin typeface="Segoe UI"/>
               </a:rPr>
-              <a:t>90%</a:t>
+              <a:t>80%</a:t>
             </a:r>
           </a:p>
         </p:txBody>
@@ -6021,7 +6021,7 @@
                 </a:solidFill>
                 <a:latin typeface="Segoe UI"/>
               </a:rPr>
-              <a:t>above 200DMA · golden cross (50&gt;200) · MACD bullish</a:t>
+              <a:t>above 200DMA · death cross (50&lt;200) · MACD bullish</a:t>
             </a:r>
           </a:p>
         </p:txBody>
@@ -6123,7 +6123,7 @@
                 </a:solidFill>
                 <a:latin typeface="Segoe UI"/>
               </a:rPr>
-              <a:t>90%</a:t>
+              <a:t>91%</a:t>
             </a:r>
           </a:p>
         </p:txBody>
@@ -6191,7 +6191,7 @@
                 </a:solidFill>
                 <a:latin typeface="Segoe UI"/>
               </a:rPr>
-              <a:t>Microsoft</a:t>
+              <a:t>DAX</a:t>
             </a:r>
           </a:p>
         </p:txBody>
@@ -6259,7 +6259,7 @@
                 </a:solidFill>
                 <a:latin typeface="Segoe UI"/>
               </a:rPr>
-              <a:t>78%</a:t>
+              <a:t>89%</a:t>
             </a:r>
           </a:p>
         </p:txBody>
@@ -6293,7 +6293,7 @@
                 </a:solidFill>
                 <a:latin typeface="Segoe UI"/>
               </a:rPr>
-              <a:t>above 200DMA · death cross (50&lt;200) · MACD bullish</a:t>
+              <a:t>above 200DMA · golden cross (50&gt;200) · MACD bullish</a:t>
             </a:r>
           </a:p>
         </p:txBody>
@@ -6327,7 +6327,7 @@
                 </a:solidFill>
                 <a:latin typeface="Segoe UI"/>
               </a:rPr>
-              <a:t>FTSE 100</a:t>
+              <a:t>Straits Times</a:t>
             </a:r>
           </a:p>
         </p:txBody>
@@ -6395,7 +6395,7 @@
                 </a:solidFill>
                 <a:latin typeface="Segoe UI"/>
               </a:rPr>
-              <a:t>76%</a:t>
+              <a:t>70%</a:t>
             </a:r>
           </a:p>
         </p:txBody>
@@ -6429,7 +6429,7 @@
                 </a:solidFill>
                 <a:latin typeface="Segoe UI"/>
               </a:rPr>
-              <a:t>above 200DMA · golden cross (50&gt;200) · MACD bullish</a:t>
+              <a:t>above 200DMA · golden cross (50&gt;200) · MACD bearish</a:t>
             </a:r>
           </a:p>
         </p:txBody>
@@ -6463,7 +6463,7 @@
                 </a:solidFill>
                 <a:latin typeface="Segoe UI"/>
               </a:rPr>
-              <a:t>DAX</a:t>
+              <a:t>Bharti Airtel</a:t>
             </a:r>
           </a:p>
         </p:txBody>
@@ -6531,7 +6531,7 @@
                 </a:solidFill>
                 <a:latin typeface="Segoe UI"/>
               </a:rPr>
-              <a:t>76%</a:t>
+              <a:t>74%</a:t>
             </a:r>
           </a:p>
         </p:txBody>
@@ -6565,7 +6565,7 @@
                 </a:solidFill>
                 <a:latin typeface="Segoe UI"/>
               </a:rPr>
-              <a:t>above 200DMA · golden cross (50&gt;200) · MACD bullish</a:t>
+              <a:t>above 200DMA · golden cross (50&gt;200) · MACD bearish</a:t>
             </a:r>
           </a:p>
         </p:txBody>
@@ -6659,7 +6659,7 @@
                 </a:solidFill>
                 <a:latin typeface="Segoe UI"/>
               </a:rPr>
-              <a:t>Base currency INR · USD/INR 95.24</a:t>
+              <a:t>Base currency INR · USD/INR 95.25</a:t>
             </a:r>
           </a:p>
         </p:txBody>
@@ -7067,7 +7067,7 @@
                 </a:solidFill>
                 <a:latin typeface="Segoe UI"/>
               </a:rPr>
-              <a:t>64,786</a:t>
+              <a:t>64,119</a:t>
             </a:r>
           </a:p>
         </p:txBody>
@@ -7101,7 +7101,7 @@
                 </a:solidFill>
                 <a:latin typeface="Segoe UI"/>
               </a:rPr>
-              <a:t>Rs 617,008</a:t>
+              <a:t>Rs 610,699</a:t>
             </a:r>
           </a:p>
         </p:txBody>
@@ -7135,7 +7135,7 @@
                 </a:solidFill>
                 <a:latin typeface="Segoe UI"/>
               </a:rPr>
-              <a:t>Rs 45,583</a:t>
+              <a:t>Rs 39,229</a:t>
             </a:r>
           </a:p>
         </p:txBody>
@@ -7169,7 +7169,7 @@
                 </a:solidFill>
                 <a:latin typeface="Segoe UI"/>
               </a:rPr>
-              <a:t>+8.0%</a:t>
+              <a:t>+6.9%</a:t>
             </a:r>
           </a:p>
         </p:txBody>
@@ -7199,11 +7199,11 @@
             <a:r>
               <a:rPr sz="1000" b="0">
                 <a:solidFill>
-                  <a:srgbClr val="22C55E"/>
-                </a:solidFill>
-                <a:latin typeface="Segoe UI"/>
-              </a:rPr>
-              <a:t>+0.3%</a:t>
+                  <a:srgbClr val="EF4444"/>
+                </a:solidFill>
+                <a:latin typeface="Segoe UI"/>
+              </a:rPr>
+              <a:t>-0.7%</a:t>
             </a:r>
           </a:p>
         </p:txBody>
@@ -7339,7 +7339,7 @@
                 </a:solidFill>
                 <a:latin typeface="Segoe UI"/>
               </a:rPr>
-              <a:t>4,321</a:t>
+              <a:t>4,328</a:t>
             </a:r>
           </a:p>
         </p:txBody>
@@ -7373,7 +7373,7 @@
                 </a:solidFill>
                 <a:latin typeface="Segoe UI"/>
               </a:rPr>
-              <a:t>Rs 411,493</a:t>
+              <a:t>Rs 412,230</a:t>
             </a:r>
           </a:p>
         </p:txBody>
@@ -7407,7 +7407,7 @@
                 </a:solidFill>
                 <a:latin typeface="Segoe UI"/>
               </a:rPr>
-              <a:t>Rs 192,446</a:t>
+              <a:t>Rs 193,166</a:t>
             </a:r>
           </a:p>
         </p:txBody>
@@ -7441,7 +7441,7 @@
                 </a:solidFill>
                 <a:latin typeface="Segoe UI"/>
               </a:rPr>
-              <a:t>+87.9%</a:t>
+              <a:t>+88.2%</a:t>
             </a:r>
           </a:p>
         </p:txBody>
@@ -7475,7 +7475,7 @@
                 </a:solidFill>
                 <a:latin typeface="Segoe UI"/>
               </a:rPr>
-              <a:t>+1.8%</a:t>
+              <a:t>+2.0%</a:t>
             </a:r>
           </a:p>
         </p:txBody>
@@ -7611,7 +7611,7 @@
                 </a:solidFill>
                 <a:latin typeface="Segoe UI"/>
               </a:rPr>
-              <a:t>311</a:t>
+              <a:t>312</a:t>
             </a:r>
           </a:p>
         </p:txBody>
@@ -7645,7 +7645,7 @@
                 </a:solidFill>
                 <a:latin typeface="Segoe UI"/>
               </a:rPr>
-              <a:t>Rs 296,189</a:t>
+              <a:t>Rs 297,555</a:t>
             </a:r>
           </a:p>
         </p:txBody>
@@ -7679,7 +7679,7 @@
                 </a:solidFill>
                 <a:latin typeface="Segoe UI"/>
               </a:rPr>
-              <a:t>Rs 119,999</a:t>
+              <a:t>Rs 121,352</a:t>
             </a:r>
           </a:p>
         </p:txBody>
@@ -7713,7 +7713,7 @@
                 </a:solidFill>
                 <a:latin typeface="Segoe UI"/>
               </a:rPr>
-              <a:t>+68.1%</a:t>
+              <a:t>+68.9%</a:t>
             </a:r>
           </a:p>
         </p:txBody>
@@ -7917,7 +7917,7 @@
                 </a:solidFill>
                 <a:latin typeface="Segoe UI"/>
               </a:rPr>
-              <a:t>Rs 167,024</a:t>
+              <a:t>Rs 166,862</a:t>
             </a:r>
           </a:p>
         </p:txBody>
@@ -7951,7 +7951,7 @@
                 </a:solidFill>
                 <a:latin typeface="Segoe UI"/>
               </a:rPr>
-              <a:t>Rs -175,831</a:t>
+              <a:t>Rs -176,020</a:t>
             </a:r>
           </a:p>
         </p:txBody>
@@ -8155,7 +8155,7 @@
                 </a:solidFill>
                 <a:latin typeface="Segoe UI"/>
               </a:rPr>
-              <a:t>1,167</a:t>
+              <a:t>1,172</a:t>
             </a:r>
           </a:p>
         </p:txBody>
@@ -8189,7 +8189,7 @@
                 </a:solidFill>
                 <a:latin typeface="Segoe UI"/>
               </a:rPr>
-              <a:t>Rs 93,392</a:t>
+              <a:t>Rs 93,720</a:t>
             </a:r>
           </a:p>
         </p:txBody>
@@ -8223,7 +8223,7 @@
                 </a:solidFill>
                 <a:latin typeface="Segoe UI"/>
               </a:rPr>
-              <a:t>Rs -18,608</a:t>
+              <a:t>Rs -18,280</a:t>
             </a:r>
           </a:p>
         </p:txBody>
@@ -8257,7 +8257,7 @@
                 </a:solidFill>
                 <a:latin typeface="Segoe UI"/>
               </a:rPr>
-              <a:t>-16.6%</a:t>
+              <a:t>-16.3%</a:t>
             </a:r>
           </a:p>
         </p:txBody>
@@ -8287,11 +8287,11 @@
             <a:r>
               <a:rPr sz="1000" b="0">
                 <a:solidFill>
-                  <a:srgbClr val="EF4444"/>
-                </a:solidFill>
-                <a:latin typeface="Segoe UI"/>
-              </a:rPr>
-              <a:t>-0.6%</a:t>
+                  <a:srgbClr val="22C55E"/>
+                </a:solidFill>
+                <a:latin typeface="Segoe UI"/>
+              </a:rPr>
+              <a:t>+0.6%</a:t>
             </a:r>
           </a:p>
         </p:txBody>
@@ -8427,7 +8427,7 @@
                 </a:solidFill>
                 <a:latin typeface="Segoe UI"/>
               </a:rPr>
-              <a:t>1,322</a:t>
+              <a:t>1,324</a:t>
             </a:r>
           </a:p>
         </p:txBody>
@@ -8461,7 +8461,7 @@
                 </a:solidFill>
                 <a:latin typeface="Segoe UI"/>
               </a:rPr>
-              <a:t>Rs 66,120</a:t>
+              <a:t>Rs 66,175</a:t>
             </a:r>
           </a:p>
         </p:txBody>
@@ -8495,7 +8495,7 @@
                 </a:solidFill>
                 <a:latin typeface="Segoe UI"/>
               </a:rPr>
-              <a:t>Rs -56,380</a:t>
+              <a:t>Rs -56,325</a:t>
             </a:r>
           </a:p>
         </p:txBody>
@@ -8559,11 +8559,11 @@
             <a:r>
               <a:rPr sz="1000" b="0">
                 <a:solidFill>
-                  <a:srgbClr val="22C55E"/>
-                </a:solidFill>
-                <a:latin typeface="Segoe UI"/>
-              </a:rPr>
-              <a:t>+3.3%</a:t>
+                  <a:srgbClr val="EF4444"/>
+                </a:solidFill>
+                <a:latin typeface="Segoe UI"/>
+              </a:rPr>
+              <a:t>-0.1%</a:t>
             </a:r>
           </a:p>
         </p:txBody>
@@ -8699,7 +8699,7 @@
                 </a:solidFill>
                 <a:latin typeface="Segoe UI"/>
               </a:rPr>
-              <a:t>2,391</a:t>
+              <a:t>2,426</a:t>
             </a:r>
           </a:p>
         </p:txBody>
@@ -8733,7 +8733,7 @@
                 </a:solidFill>
                 <a:latin typeface="Segoe UI"/>
               </a:rPr>
-              <a:t>Rs 59,783</a:t>
+              <a:t>Rs 60,658</a:t>
             </a:r>
           </a:p>
         </p:txBody>
@@ -8767,7 +8767,7 @@
                 </a:solidFill>
                 <a:latin typeface="Segoe UI"/>
               </a:rPr>
-              <a:t>Rs -30,217</a:t>
+              <a:t>Rs -29,342</a:t>
             </a:r>
           </a:p>
         </p:txBody>
@@ -8801,7 +8801,7 @@
                 </a:solidFill>
                 <a:latin typeface="Segoe UI"/>
               </a:rPr>
-              <a:t>-33.6%</a:t>
+              <a:t>-32.6%</a:t>
             </a:r>
           </a:p>
         </p:txBody>
@@ -8831,11 +8831,11 @@
             <a:r>
               <a:rPr sz="1000" b="0">
                 <a:solidFill>
-                  <a:srgbClr val="EF4444"/>
-                </a:solidFill>
-                <a:latin typeface="Segoe UI"/>
-              </a:rPr>
-              <a:t>-0.9%</a:t>
+                  <a:srgbClr val="22C55E"/>
+                </a:solidFill>
+                <a:latin typeface="Segoe UI"/>
+              </a:rPr>
+              <a:t>+2.2%</a:t>
             </a:r>
           </a:p>
         </p:txBody>
@@ -8971,7 +8971,7 @@
                 </a:solidFill>
                 <a:latin typeface="Segoe UI"/>
               </a:rPr>
-              <a:t>736</a:t>
+              <a:t>734</a:t>
             </a:r>
           </a:p>
         </p:txBody>
@@ -9005,7 +9005,7 @@
                 </a:solidFill>
                 <a:latin typeface="Segoe UI"/>
               </a:rPr>
-              <a:t>Rs 44,169</a:t>
+              <a:t>Rs 44,034</a:t>
             </a:r>
           </a:p>
         </p:txBody>
@@ -9039,7 +9039,7 @@
                 </a:solidFill>
                 <a:latin typeface="Segoe UI"/>
               </a:rPr>
-              <a:t>Rs -47,031</a:t>
+              <a:t>Rs -47,166</a:t>
             </a:r>
           </a:p>
         </p:txBody>
@@ -9073,7 +9073,7 @@
                 </a:solidFill>
                 <a:latin typeface="Segoe UI"/>
               </a:rPr>
-              <a:t>-51.6%</a:t>
+              <a:t>-51.7%</a:t>
             </a:r>
           </a:p>
         </p:txBody>
@@ -9103,11 +9103,11 @@
             <a:r>
               <a:rPr sz="1000" b="0">
                 <a:solidFill>
-                  <a:srgbClr val="22C55E"/>
-                </a:solidFill>
-                <a:latin typeface="Segoe UI"/>
-              </a:rPr>
-              <a:t>+0.2%</a:t>
+                  <a:srgbClr val="EF4444"/>
+                </a:solidFill>
+                <a:latin typeface="Segoe UI"/>
+              </a:rPr>
+              <a:t>-0.1%</a:t>
             </a:r>
           </a:p>
         </p:txBody>
@@ -9141,7 +9141,7 @@
                 </a:solidFill>
                 <a:latin typeface="Segoe UI"/>
               </a:rPr>
-              <a:t>Total Rs 1,755,176 | P&amp;L Rs 29,960 (+1.7%) | Sharpe -0.36 | Vol 17.79% | VaR95 -1.81%/day</a:t>
+              <a:t>Total Rs 1,751,932 | P&amp;L Rs 26,613 (+1.5%) | Sharpe -0.37 | Vol 17.71% | VaR95 -1.81%/day</a:t>
             </a:r>
           </a:p>
         </p:txBody>

--- a/docs/pmr_daily.pptx
+++ b/docs/pmr_daily.pptx
@@ -3197,7 +3197,7 @@
                 </a:solidFill>
                 <a:latin typeface="Segoe UI"/>
               </a:rPr>
-              <a:t>Friday, 07 Aug 2026 13:23 SGT</a:t>
+              <a:t>Monday, 10 Aug 2026 08:04 SGT</a:t>
             </a:r>
           </a:p>
         </p:txBody>
@@ -3265,7 +3265,7 @@
                 </a:solidFill>
                 <a:latin typeface="Segoe UI"/>
               </a:rPr>
-              <a:t>RAG 14R / 15A / 17G   |   60.9% above 200DMA   |   Portfolio Rs 1,751,932 (+1.5%)</a:t>
+              <a:t>RAG 14R / 12A / 20G   |   60.9% above 200DMA   |   Portfolio Rs 1,771,028 (+2.7%)</a:t>
             </a:r>
           </a:p>
         </p:txBody>
@@ -3529,7 +3529,7 @@
                 </a:solidFill>
                 <a:latin typeface="Segoe UI"/>
               </a:rPr>
-              <a:t>+9.1%</a:t>
+              <a:t>+11.6%</a:t>
             </a:r>
           </a:p>
         </p:txBody>
@@ -3655,7 +3655,7 @@
                 </a:solidFill>
                 <a:latin typeface="Segoe UI"/>
               </a:rPr>
-              <a:t>+8.7%</a:t>
+              <a:t>+11.0%</a:t>
             </a:r>
           </a:p>
         </p:txBody>
@@ -3713,7 +3713,7 @@
                 </a:solidFill>
                 <a:latin typeface="Segoe UI"/>
               </a:rPr>
-              <a:t>Microsoft</a:t>
+              <a:t>Gold</a:t>
             </a:r>
           </a:p>
         </p:txBody>
@@ -3743,11 +3743,11 @@
             <a:r>
               <a:rPr sz="900" b="0">
                 <a:solidFill>
-                  <a:srgbClr val="22C55E"/>
-                </a:solidFill>
-                <a:latin typeface="Segoe UI"/>
-              </a:rPr>
-              <a:t>MSFT · GREEN</a:t>
+                  <a:srgbClr val="EF4444"/>
+                </a:solidFill>
+                <a:latin typeface="Segoe UI"/>
+              </a:rPr>
+              <a:t>GC=F · RED</a:t>
             </a:r>
           </a:p>
         </p:txBody>
@@ -3781,7 +3781,7 @@
                 </a:solidFill>
                 <a:latin typeface="Segoe UI"/>
               </a:rPr>
-              <a:t>+7.6%</a:t>
+              <a:t>+8.7%</a:t>
             </a:r>
           </a:p>
         </p:txBody>
@@ -3839,7 +3839,7 @@
                 </a:solidFill>
                 <a:latin typeface="Segoe UI"/>
               </a:rPr>
-              <a:t>Gold</a:t>
+              <a:t>Microsoft</a:t>
             </a:r>
           </a:p>
         </p:txBody>
@@ -3869,11 +3869,11 @@
             <a:r>
               <a:rPr sz="900" b="0">
                 <a:solidFill>
-                  <a:srgbClr val="EF4444"/>
-                </a:solidFill>
-                <a:latin typeface="Segoe UI"/>
-              </a:rPr>
-              <a:t>GC=F · RED</a:t>
+                  <a:srgbClr val="22C55E"/>
+                </a:solidFill>
+                <a:latin typeface="Segoe UI"/>
+              </a:rPr>
+              <a:t>MSFT · GREEN</a:t>
             </a:r>
           </a:p>
         </p:txBody>
@@ -3907,7 +3907,7 @@
                 </a:solidFill>
                 <a:latin typeface="Segoe UI"/>
               </a:rPr>
-              <a:t>+6.9%</a:t>
+              <a:t>+7.6%</a:t>
             </a:r>
           </a:p>
         </p:txBody>
@@ -3995,11 +3995,11 @@
             <a:r>
               <a:rPr sz="900" b="0">
                 <a:solidFill>
-                  <a:srgbClr val="F59E0B"/>
-                </a:solidFill>
-                <a:latin typeface="Segoe UI"/>
-              </a:rPr>
-              <a:t>XLK · AMBER</a:t>
+                  <a:srgbClr val="22C55E"/>
+                </a:solidFill>
+                <a:latin typeface="Segoe UI"/>
+              </a:rPr>
+              <a:t>XLK · GREEN</a:t>
             </a:r>
           </a:p>
         </p:txBody>
@@ -4033,7 +4033,7 @@
                 </a:solidFill>
                 <a:latin typeface="Segoe UI"/>
               </a:rPr>
-              <a:t>+5.7%</a:t>
+              <a:t>+7.2%</a:t>
             </a:r>
           </a:p>
         </p:txBody>
@@ -4193,7 +4193,7 @@
                 </a:solidFill>
                 <a:latin typeface="Segoe UI"/>
               </a:rPr>
-              <a:t>-7.6%</a:t>
+              <a:t>-6.9%</a:t>
             </a:r>
           </a:p>
         </p:txBody>
@@ -4251,7 +4251,7 @@
                 </a:solidFill>
                 <a:latin typeface="Segoe UI"/>
               </a:rPr>
-              <a:t>Natural Gas</a:t>
+              <a:t>US Energy</a:t>
             </a:r>
           </a:p>
         </p:txBody>
@@ -4281,11 +4281,11 @@
             <a:r>
               <a:rPr sz="900" b="0">
                 <a:solidFill>
-                  <a:srgbClr val="EF4444"/>
-                </a:solidFill>
-                <a:latin typeface="Segoe UI"/>
-              </a:rPr>
-              <a:t>NG=F · RED</a:t>
+                  <a:srgbClr val="F59E0B"/>
+                </a:solidFill>
+                <a:latin typeface="Segoe UI"/>
+              </a:rPr>
+              <a:t>XLE · AMBER</a:t>
             </a:r>
           </a:p>
         </p:txBody>
@@ -4319,7 +4319,7 @@
                 </a:solidFill>
                 <a:latin typeface="Segoe UI"/>
               </a:rPr>
-              <a:t>-3.7%</a:t>
+              <a:t>-3.4%</a:t>
             </a:r>
           </a:p>
         </p:txBody>
@@ -4377,7 +4377,7 @@
                 </a:solidFill>
                 <a:latin typeface="Segoe UI"/>
               </a:rPr>
-              <a:t>US Energy</a:t>
+              <a:t>HDFC Bank</a:t>
             </a:r>
           </a:p>
         </p:txBody>
@@ -4407,11 +4407,11 @@
             <a:r>
               <a:rPr sz="900" b="0">
                 <a:solidFill>
-                  <a:srgbClr val="F59E0B"/>
-                </a:solidFill>
-                <a:latin typeface="Segoe UI"/>
-              </a:rPr>
-              <a:t>XLE · AMBER</a:t>
+                  <a:srgbClr val="EF4444"/>
+                </a:solidFill>
+                <a:latin typeface="Segoe UI"/>
+              </a:rPr>
+              <a:t>HDFCBANK.NS · RED</a:t>
             </a:r>
           </a:p>
         </p:txBody>
@@ -4503,7 +4503,7 @@
                 </a:solidFill>
                 <a:latin typeface="Segoe UI"/>
               </a:rPr>
-              <a:t>HDFC Bank</a:t>
+              <a:t>USD/JPY</a:t>
             </a:r>
           </a:p>
         </p:txBody>
@@ -4533,11 +4533,11 @@
             <a:r>
               <a:rPr sz="900" b="0">
                 <a:solidFill>
-                  <a:srgbClr val="EF4444"/>
-                </a:solidFill>
-                <a:latin typeface="Segoe UI"/>
-              </a:rPr>
-              <a:t>HDFCBANK.NS · RED</a:t>
+                  <a:srgbClr val="F59E0B"/>
+                </a:solidFill>
+                <a:latin typeface="Segoe UI"/>
+              </a:rPr>
+              <a:t>JPY=X · AMBER</a:t>
             </a:r>
           </a:p>
         </p:txBody>
@@ -4571,7 +4571,7 @@
                 </a:solidFill>
                 <a:latin typeface="Segoe UI"/>
               </a:rPr>
-              <a:t>-1.9%</a:t>
+              <a:t>-1.5%</a:t>
             </a:r>
           </a:p>
         </p:txBody>
@@ -4629,7 +4629,7 @@
                 </a:solidFill>
                 <a:latin typeface="Segoe UI"/>
               </a:rPr>
-              <a:t>Bharti Airtel</a:t>
+              <a:t>Natural Gas</a:t>
             </a:r>
           </a:p>
         </p:txBody>
@@ -4659,11 +4659,11 @@
             <a:r>
               <a:rPr sz="900" b="0">
                 <a:solidFill>
-                  <a:srgbClr val="F59E0B"/>
-                </a:solidFill>
-                <a:latin typeface="Segoe UI"/>
-              </a:rPr>
-              <a:t>BHARTIARTL.NS · AMBER</a:t>
+                  <a:srgbClr val="EF4444"/>
+                </a:solidFill>
+                <a:latin typeface="Segoe UI"/>
+              </a:rPr>
+              <a:t>NG=F · RED</a:t>
             </a:r>
           </a:p>
         </p:txBody>
@@ -4697,7 +4697,7 @@
                 </a:solidFill>
                 <a:latin typeface="Segoe UI"/>
               </a:rPr>
-              <a:t>-1.4%</a:t>
+              <a:t>-0.9%</a:t>
             </a:r>
           </a:p>
         </p:txBody>
@@ -5035,7 +5035,7 @@
                 </a:solidFill>
                 <a:latin typeface="Segoe UI"/>
               </a:rPr>
-              <a:t>95%</a:t>
+              <a:t>83%</a:t>
             </a:r>
           </a:p>
         </p:txBody>
@@ -5069,7 +5069,7 @@
                 </a:solidFill>
                 <a:latin typeface="Segoe UI"/>
               </a:rPr>
-              <a:t>above 200DMA · golden cross (50&gt;200) · MACD bullish</a:t>
+              <a:t>above 200DMA · golden cross (50&gt;200) · MACD bearish</a:t>
             </a:r>
           </a:p>
         </p:txBody>
@@ -5103,7 +5103,7 @@
                 </a:solidFill>
                 <a:latin typeface="Segoe UI"/>
               </a:rPr>
-              <a:t>ICICI Bank</a:t>
+              <a:t>Nvidia</a:t>
             </a:r>
           </a:p>
         </p:txBody>
@@ -5239,7 +5239,7 @@
                 </a:solidFill>
                 <a:latin typeface="Segoe UI"/>
               </a:rPr>
-              <a:t>Nvidia</a:t>
+              <a:t>Dow Jones</a:t>
             </a:r>
           </a:p>
         </p:txBody>
@@ -5375,7 +5375,7 @@
                 </a:solidFill>
                 <a:latin typeface="Segoe UI"/>
               </a:rPr>
-              <a:t>Dow Jones</a:t>
+              <a:t>Russell 2000</a:t>
             </a:r>
           </a:p>
         </p:txBody>
@@ -5647,7 +5647,7 @@
                 </a:solidFill>
                 <a:latin typeface="Segoe UI"/>
               </a:rPr>
-              <a:t>S&amp;P 500</a:t>
+              <a:t>ICICI Bank</a:t>
             </a:r>
           </a:p>
         </p:txBody>
@@ -5749,7 +5749,7 @@
                 </a:solidFill>
                 <a:latin typeface="Segoe UI"/>
               </a:rPr>
-              <a:t>above 200DMA · golden cross (50&gt;200) · MACD bullish</a:t>
+              <a:t>above 200DMA · golden cross (50&gt;200) · MACD bearish</a:t>
             </a:r>
           </a:p>
         </p:txBody>
@@ -5783,7 +5783,7 @@
                 </a:solidFill>
                 <a:latin typeface="Segoe UI"/>
               </a:rPr>
-              <a:t>Russell 2000</a:t>
+              <a:t>Microsoft</a:t>
             </a:r>
           </a:p>
         </p:txBody>
@@ -5817,7 +5817,7 @@
                 </a:solidFill>
                 <a:latin typeface="Segoe UI"/>
               </a:rPr>
-              <a:t>STRONG BUY</a:t>
+              <a:t>BUY</a:t>
             </a:r>
           </a:p>
         </p:txBody>
@@ -5919,7 +5919,7 @@
                 </a:solidFill>
                 <a:latin typeface="Segoe UI"/>
               </a:rPr>
-              <a:t>Microsoft</a:t>
+              <a:t>DAX</a:t>
             </a:r>
           </a:p>
         </p:txBody>
@@ -5987,7 +5987,7 @@
                 </a:solidFill>
                 <a:latin typeface="Segoe UI"/>
               </a:rPr>
-              <a:t>80%</a:t>
+              <a:t>91%</a:t>
             </a:r>
           </a:p>
         </p:txBody>
@@ -6021,7 +6021,7 @@
                 </a:solidFill>
                 <a:latin typeface="Segoe UI"/>
               </a:rPr>
-              <a:t>above 200DMA · death cross (50&lt;200) · MACD bullish</a:t>
+              <a:t>above 200DMA · golden cross (50&gt;200) · MACD bullish</a:t>
             </a:r>
           </a:p>
         </p:txBody>
@@ -6055,7 +6055,7 @@
                 </a:solidFill>
                 <a:latin typeface="Segoe UI"/>
               </a:rPr>
-              <a:t>Copper</a:t>
+              <a:t>Straits Times</a:t>
             </a:r>
           </a:p>
         </p:txBody>
@@ -6123,7 +6123,7 @@
                 </a:solidFill>
                 <a:latin typeface="Segoe UI"/>
               </a:rPr>
-              <a:t>91%</a:t>
+              <a:t>71%</a:t>
             </a:r>
           </a:p>
         </p:txBody>
@@ -6157,7 +6157,7 @@
                 </a:solidFill>
                 <a:latin typeface="Segoe UI"/>
               </a:rPr>
-              <a:t>above 200DMA · golden cross (50&gt;200) · MACD bullish</a:t>
+              <a:t>above 200DMA · golden cross (50&gt;200) · MACD bearish</a:t>
             </a:r>
           </a:p>
         </p:txBody>
@@ -6191,7 +6191,7 @@
                 </a:solidFill>
                 <a:latin typeface="Segoe UI"/>
               </a:rPr>
-              <a:t>DAX</a:t>
+              <a:t>S&amp;P 500</a:t>
             </a:r>
           </a:p>
         </p:txBody>
@@ -6259,7 +6259,7 @@
                 </a:solidFill>
                 <a:latin typeface="Segoe UI"/>
               </a:rPr>
-              <a:t>89%</a:t>
+              <a:t>76%</a:t>
             </a:r>
           </a:p>
         </p:txBody>
@@ -6327,7 +6327,7 @@
                 </a:solidFill>
                 <a:latin typeface="Segoe UI"/>
               </a:rPr>
-              <a:t>Straits Times</a:t>
+              <a:t>NIFTY IT</a:t>
             </a:r>
           </a:p>
         </p:txBody>
@@ -6395,7 +6395,7 @@
                 </a:solidFill>
                 <a:latin typeface="Segoe UI"/>
               </a:rPr>
-              <a:t>70%</a:t>
+              <a:t>68%</a:t>
             </a:r>
           </a:p>
         </p:txBody>
@@ -6429,7 +6429,7 @@
                 </a:solidFill>
                 <a:latin typeface="Segoe UI"/>
               </a:rPr>
-              <a:t>above 200DMA · golden cross (50&gt;200) · MACD bearish</a:t>
+              <a:t>above 200DMA · death cross (50&lt;200) · MACD bullish</a:t>
             </a:r>
           </a:p>
         </p:txBody>
@@ -6463,7 +6463,7 @@
                 </a:solidFill>
                 <a:latin typeface="Segoe UI"/>
               </a:rPr>
-              <a:t>Bharti Airtel</a:t>
+              <a:t>FTSE 100</a:t>
             </a:r>
           </a:p>
         </p:txBody>
@@ -6531,7 +6531,7 @@
                 </a:solidFill>
                 <a:latin typeface="Segoe UI"/>
               </a:rPr>
-              <a:t>74%</a:t>
+              <a:t>68%</a:t>
             </a:r>
           </a:p>
         </p:txBody>
@@ -6659,7 +6659,7 @@
                 </a:solidFill>
                 <a:latin typeface="Segoe UI"/>
               </a:rPr>
-              <a:t>Base currency INR · USD/INR 95.25</a:t>
+              <a:t>Base currency INR · USD/INR 95.2</a:t>
             </a:r>
           </a:p>
         </p:txBody>
@@ -7067,7 +7067,7 @@
                 </a:solidFill>
                 <a:latin typeface="Segoe UI"/>
               </a:rPr>
-              <a:t>64,119</a:t>
+              <a:t>64,856</a:t>
             </a:r>
           </a:p>
         </p:txBody>
@@ -7101,7 +7101,7 @@
                 </a:solidFill>
                 <a:latin typeface="Segoe UI"/>
               </a:rPr>
-              <a:t>Rs 610,699</a:t>
+              <a:t>Rs 617,411</a:t>
             </a:r>
           </a:p>
         </p:txBody>
@@ -7135,7 +7135,7 @@
                 </a:solidFill>
                 <a:latin typeface="Segoe UI"/>
               </a:rPr>
-              <a:t>Rs 39,229</a:t>
+              <a:t>Rs 46,223</a:t>
             </a:r>
           </a:p>
         </p:txBody>
@@ -7169,7 +7169,7 @@
                 </a:solidFill>
                 <a:latin typeface="Segoe UI"/>
               </a:rPr>
-              <a:t>+6.9%</a:t>
+              <a:t>+8.1%</a:t>
             </a:r>
           </a:p>
         </p:txBody>
@@ -7203,7 +7203,7 @@
                 </a:solidFill>
                 <a:latin typeface="Segoe UI"/>
               </a:rPr>
-              <a:t>-0.7%</a:t>
+              <a:t>-0.1%</a:t>
             </a:r>
           </a:p>
         </p:txBody>
@@ -7339,7 +7339,7 @@
                 </a:solidFill>
                 <a:latin typeface="Segoe UI"/>
               </a:rPr>
-              <a:t>4,328</a:t>
+              <a:t>4,400</a:t>
             </a:r>
           </a:p>
         </p:txBody>
@@ -7373,7 +7373,7 @@
                 </a:solidFill>
                 <a:latin typeface="Segoe UI"/>
               </a:rPr>
-              <a:t>Rs 412,230</a:t>
+              <a:t>Rs 418,843</a:t>
             </a:r>
           </a:p>
         </p:txBody>
@@ -7407,7 +7407,7 @@
                 </a:solidFill>
                 <a:latin typeface="Segoe UI"/>
               </a:rPr>
-              <a:t>Rs 193,166</a:t>
+              <a:t>Rs 199,887</a:t>
             </a:r>
           </a:p>
         </p:txBody>
@@ -7441,7 +7441,7 @@
                 </a:solidFill>
                 <a:latin typeface="Segoe UI"/>
               </a:rPr>
-              <a:t>+88.2%</a:t>
+              <a:t>+91.3%</a:t>
             </a:r>
           </a:p>
         </p:txBody>
@@ -7475,7 +7475,7 @@
                 </a:solidFill>
                 <a:latin typeface="Segoe UI"/>
               </a:rPr>
-              <a:t>+2.0%</a:t>
+              <a:t>+0.0%</a:t>
             </a:r>
           </a:p>
         </p:txBody>
@@ -7611,7 +7611,7 @@
                 </a:solidFill>
                 <a:latin typeface="Segoe UI"/>
               </a:rPr>
-              <a:t>312</a:t>
+              <a:t>313</a:t>
             </a:r>
           </a:p>
         </p:txBody>
@@ -7645,7 +7645,7 @@
                 </a:solidFill>
                 <a:latin typeface="Segoe UI"/>
               </a:rPr>
-              <a:t>Rs 297,555</a:t>
+              <a:t>Rs 298,284</a:t>
             </a:r>
           </a:p>
         </p:txBody>
@@ -7679,7 +7679,7 @@
                 </a:solidFill>
                 <a:latin typeface="Segoe UI"/>
               </a:rPr>
-              <a:t>Rs 121,352</a:t>
+              <a:t>Rs 122,168</a:t>
             </a:r>
           </a:p>
         </p:txBody>
@@ -7713,7 +7713,7 @@
                 </a:solidFill>
                 <a:latin typeface="Segoe UI"/>
               </a:rPr>
-              <a:t>+68.9%</a:t>
+              <a:t>+69.4%</a:t>
             </a:r>
           </a:p>
         </p:txBody>
@@ -7883,7 +7883,7 @@
                 </a:solidFill>
                 <a:latin typeface="Segoe UI"/>
               </a:rPr>
-              <a:t>219</a:t>
+              <a:t>224</a:t>
             </a:r>
           </a:p>
         </p:txBody>
@@ -7917,7 +7917,7 @@
                 </a:solidFill>
                 <a:latin typeface="Segoe UI"/>
               </a:rPr>
-              <a:t>Rs 166,862</a:t>
+              <a:t>Rs 170,564</a:t>
             </a:r>
           </a:p>
         </p:txBody>
@@ -7951,7 +7951,7 @@
                 </a:solidFill>
                 <a:latin typeface="Segoe UI"/>
               </a:rPr>
-              <a:t>Rs -176,020</a:t>
+              <a:t>Rs -172,148</a:t>
             </a:r>
           </a:p>
         </p:txBody>
@@ -7985,7 +7985,7 @@
                 </a:solidFill>
                 <a:latin typeface="Segoe UI"/>
               </a:rPr>
-              <a:t>-51.3%</a:t>
+              <a:t>-50.2%</a:t>
             </a:r>
           </a:p>
         </p:txBody>
@@ -8155,7 +8155,7 @@
                 </a:solidFill>
                 <a:latin typeface="Segoe UI"/>
               </a:rPr>
-              <a:t>1,172</a:t>
+              <a:t>1,175</a:t>
             </a:r>
           </a:p>
         </p:txBody>
@@ -8189,7 +8189,7 @@
                 </a:solidFill>
                 <a:latin typeface="Segoe UI"/>
               </a:rPr>
-              <a:t>Rs 93,720</a:t>
+              <a:t>Rs 94,008</a:t>
             </a:r>
           </a:p>
         </p:txBody>
@@ -8223,7 +8223,7 @@
                 </a:solidFill>
                 <a:latin typeface="Segoe UI"/>
               </a:rPr>
-              <a:t>Rs -18,280</a:t>
+              <a:t>Rs -17,992</a:t>
             </a:r>
           </a:p>
         </p:txBody>
@@ -8257,7 +8257,7 @@
                 </a:solidFill>
                 <a:latin typeface="Segoe UI"/>
               </a:rPr>
-              <a:t>-16.3%</a:t>
+              <a:t>-16.1%</a:t>
             </a:r>
           </a:p>
         </p:txBody>
@@ -8291,7 +8291,7 @@
                 </a:solidFill>
                 <a:latin typeface="Segoe UI"/>
               </a:rPr>
-              <a:t>+0.6%</a:t>
+              <a:t>+0.0%</a:t>
             </a:r>
           </a:p>
         </p:txBody>
@@ -8427,7 +8427,7 @@
                 </a:solidFill>
                 <a:latin typeface="Segoe UI"/>
               </a:rPr>
-              <a:t>1,324</a:t>
+              <a:t>1,335</a:t>
             </a:r>
           </a:p>
         </p:txBody>
@@ -8461,7 +8461,7 @@
                 </a:solidFill>
                 <a:latin typeface="Segoe UI"/>
               </a:rPr>
-              <a:t>Rs 66,175</a:t>
+              <a:t>Rs 66,740</a:t>
             </a:r>
           </a:p>
         </p:txBody>
@@ -8495,7 +8495,7 @@
                 </a:solidFill>
                 <a:latin typeface="Segoe UI"/>
               </a:rPr>
-              <a:t>Rs -56,325</a:t>
+              <a:t>Rs -55,760</a:t>
             </a:r>
           </a:p>
         </p:txBody>
@@ -8529,7 +8529,7 @@
                 </a:solidFill>
                 <a:latin typeface="Segoe UI"/>
               </a:rPr>
-              <a:t>-46.0%</a:t>
+              <a:t>-45.5%</a:t>
             </a:r>
           </a:p>
         </p:txBody>
@@ -8559,11 +8559,11 @@
             <a:r>
               <a:rPr sz="1000" b="0">
                 <a:solidFill>
-                  <a:srgbClr val="EF4444"/>
-                </a:solidFill>
-                <a:latin typeface="Segoe UI"/>
-              </a:rPr>
-              <a:t>-0.1%</a:t>
+                  <a:srgbClr val="22C55E"/>
+                </a:solidFill>
+                <a:latin typeface="Segoe UI"/>
+              </a:rPr>
+              <a:t>+0.0%</a:t>
             </a:r>
           </a:p>
         </p:txBody>
@@ -8699,7 +8699,7 @@
                 </a:solidFill>
                 <a:latin typeface="Segoe UI"/>
               </a:rPr>
-              <a:t>2,426</a:t>
+              <a:t>2,453</a:t>
             </a:r>
           </a:p>
         </p:txBody>
@@ -8733,7 +8733,7 @@
                 </a:solidFill>
                 <a:latin typeface="Segoe UI"/>
               </a:rPr>
-              <a:t>Rs 60,658</a:t>
+              <a:t>Rs 61,317</a:t>
             </a:r>
           </a:p>
         </p:txBody>
@@ -8767,7 +8767,7 @@
                 </a:solidFill>
                 <a:latin typeface="Segoe UI"/>
               </a:rPr>
-              <a:t>Rs -29,342</a:t>
+              <a:t>Rs -28,683</a:t>
             </a:r>
           </a:p>
         </p:txBody>
@@ -8801,7 +8801,7 @@
                 </a:solidFill>
                 <a:latin typeface="Segoe UI"/>
               </a:rPr>
-              <a:t>-32.6%</a:t>
+              <a:t>-31.9%</a:t>
             </a:r>
           </a:p>
         </p:txBody>
@@ -8835,7 +8835,7 @@
                 </a:solidFill>
                 <a:latin typeface="Segoe UI"/>
               </a:rPr>
-              <a:t>+2.2%</a:t>
+              <a:t>+0.0%</a:t>
             </a:r>
           </a:p>
         </p:txBody>
@@ -8971,7 +8971,7 @@
                 </a:solidFill>
                 <a:latin typeface="Segoe UI"/>
               </a:rPr>
-              <a:t>734</a:t>
+              <a:t>731</a:t>
             </a:r>
           </a:p>
         </p:txBody>
@@ -9005,7 +9005,7 @@
                 </a:solidFill>
                 <a:latin typeface="Segoe UI"/>
               </a:rPr>
-              <a:t>Rs 44,034</a:t>
+              <a:t>Rs 43,860</a:t>
             </a:r>
           </a:p>
         </p:txBody>
@@ -9039,7 +9039,7 @@
                 </a:solidFill>
                 <a:latin typeface="Segoe UI"/>
               </a:rPr>
-              <a:t>Rs -47,166</a:t>
+              <a:t>Rs -47,340</a:t>
             </a:r>
           </a:p>
         </p:txBody>
@@ -9073,7 +9073,7 @@
                 </a:solidFill>
                 <a:latin typeface="Segoe UI"/>
               </a:rPr>
-              <a:t>-51.7%</a:t>
+              <a:t>-51.9%</a:t>
             </a:r>
           </a:p>
         </p:txBody>
@@ -9103,11 +9103,11 @@
             <a:r>
               <a:rPr sz="1000" b="0">
                 <a:solidFill>
-                  <a:srgbClr val="EF4444"/>
-                </a:solidFill>
-                <a:latin typeface="Segoe UI"/>
-              </a:rPr>
-              <a:t>-0.1%</a:t>
+                  <a:srgbClr val="22C55E"/>
+                </a:solidFill>
+                <a:latin typeface="Segoe UI"/>
+              </a:rPr>
+              <a:t>+0.0%</a:t>
             </a:r>
           </a:p>
         </p:txBody>
@@ -9141,7 +9141,7 @@
                 </a:solidFill>
                 <a:latin typeface="Segoe UI"/>
               </a:rPr>
-              <a:t>Total Rs 1,751,932 | P&amp;L Rs 26,613 (+1.5%) | Sharpe -0.37 | Vol 17.71% | VaR95 -1.81%/day</a:t>
+              <a:t>Total Rs 1,771,028 | P&amp;L Rs 46,355 (+2.7%) | Sharpe -0.24 | Vol 17.75% | VaR95 -1.8%/day</a:t>
             </a:r>
           </a:p>
         </p:txBody>

--- a/docs/pmr_daily.pptx
+++ b/docs/pmr_daily.pptx
@@ -3197,7 +3197,7 @@
                 </a:solidFill>
                 <a:latin typeface="Segoe UI"/>
               </a:rPr>
-              <a:t>Monday, 10 Aug 2026 08:04 SGT</a:t>
+              <a:t>Tuesday, 11 Aug 2026 12:06 SGT</a:t>
             </a:r>
           </a:p>
         </p:txBody>
@@ -3265,7 +3265,7 @@
                 </a:solidFill>
                 <a:latin typeface="Segoe UI"/>
               </a:rPr>
-              <a:t>RAG 14R / 12A / 20G   |   60.9% above 200DMA   |   Portfolio Rs 1,771,028 (+2.7%)</a:t>
+              <a:t>RAG 14R / 13A / 19G   |   63.0% above 200DMA   |   Portfolio Rs 1,753,348 (+1.5%)</a:t>
             </a:r>
           </a:p>
         </p:txBody>
@@ -3461,7 +3461,7 @@
                 </a:solidFill>
                 <a:latin typeface="Segoe UI"/>
               </a:rPr>
-              <a:t>Nvidia</a:t>
+              <a:t>Silver</a:t>
             </a:r>
           </a:p>
         </p:txBody>
@@ -3491,11 +3491,11 @@
             <a:r>
               <a:rPr sz="900" b="0">
                 <a:solidFill>
-                  <a:srgbClr val="22C55E"/>
-                </a:solidFill>
-                <a:latin typeface="Segoe UI"/>
-              </a:rPr>
-              <a:t>NVDA · GREEN</a:t>
+                  <a:srgbClr val="EF4444"/>
+                </a:solidFill>
+                <a:latin typeface="Segoe UI"/>
+              </a:rPr>
+              <a:t>SI=F · RED</a:t>
             </a:r>
           </a:p>
         </p:txBody>
@@ -3529,7 +3529,7 @@
                 </a:solidFill>
                 <a:latin typeface="Segoe UI"/>
               </a:rPr>
-              <a:t>+11.6%</a:t>
+              <a:t>+13.0%</a:t>
             </a:r>
           </a:p>
         </p:txBody>
@@ -3587,7 +3587,7 @@
                 </a:solidFill>
                 <a:latin typeface="Segoe UI"/>
               </a:rPr>
-              <a:t>Silver</a:t>
+              <a:t>Microsoft</a:t>
             </a:r>
           </a:p>
         </p:txBody>
@@ -3617,11 +3617,11 @@
             <a:r>
               <a:rPr sz="900" b="0">
                 <a:solidFill>
-                  <a:srgbClr val="EF4444"/>
-                </a:solidFill>
-                <a:latin typeface="Segoe UI"/>
-              </a:rPr>
-              <a:t>SI=F · RED</a:t>
+                  <a:srgbClr val="22C55E"/>
+                </a:solidFill>
+                <a:latin typeface="Segoe UI"/>
+              </a:rPr>
+              <a:t>MSFT · GREEN</a:t>
             </a:r>
           </a:p>
         </p:txBody>
@@ -3655,7 +3655,7 @@
                 </a:solidFill>
                 <a:latin typeface="Segoe UI"/>
               </a:rPr>
-              <a:t>+11.0%</a:t>
+              <a:t>+8.9%</a:t>
             </a:r>
           </a:p>
         </p:txBody>
@@ -3713,7 +3713,7 @@
                 </a:solidFill>
                 <a:latin typeface="Segoe UI"/>
               </a:rPr>
-              <a:t>Gold</a:t>
+              <a:t>Nvidia</a:t>
             </a:r>
           </a:p>
         </p:txBody>
@@ -3743,11 +3743,11 @@
             <a:r>
               <a:rPr sz="900" b="0">
                 <a:solidFill>
-                  <a:srgbClr val="EF4444"/>
-                </a:solidFill>
-                <a:latin typeface="Segoe UI"/>
-              </a:rPr>
-              <a:t>GC=F · RED</a:t>
+                  <a:srgbClr val="22C55E"/>
+                </a:solidFill>
+                <a:latin typeface="Segoe UI"/>
+              </a:rPr>
+              <a:t>NVDA · GREEN</a:t>
             </a:r>
           </a:p>
         </p:txBody>
@@ -3781,7 +3781,7 @@
                 </a:solidFill>
                 <a:latin typeface="Segoe UI"/>
               </a:rPr>
-              <a:t>+8.7%</a:t>
+              <a:t>+8.4%</a:t>
             </a:r>
           </a:p>
         </p:txBody>
@@ -3839,7 +3839,7 @@
                 </a:solidFill>
                 <a:latin typeface="Segoe UI"/>
               </a:rPr>
-              <a:t>Microsoft</a:t>
+              <a:t>Gold</a:t>
             </a:r>
           </a:p>
         </p:txBody>
@@ -3869,11 +3869,11 @@
             <a:r>
               <a:rPr sz="900" b="0">
                 <a:solidFill>
-                  <a:srgbClr val="22C55E"/>
-                </a:solidFill>
-                <a:latin typeface="Segoe UI"/>
-              </a:rPr>
-              <a:t>MSFT · GREEN</a:t>
+                  <a:srgbClr val="EF4444"/>
+                </a:solidFill>
+                <a:latin typeface="Segoe UI"/>
+              </a:rPr>
+              <a:t>GC=F · RED</a:t>
             </a:r>
           </a:p>
         </p:txBody>
@@ -3907,7 +3907,7 @@
                 </a:solidFill>
                 <a:latin typeface="Segoe UI"/>
               </a:rPr>
-              <a:t>+7.6%</a:t>
+              <a:t>+7.7%</a:t>
             </a:r>
           </a:p>
         </p:txBody>
@@ -3965,7 +3965,7 @@
                 </a:solidFill>
                 <a:latin typeface="Segoe UI"/>
               </a:rPr>
-              <a:t>US Technology</a:t>
+              <a:t>Tesla</a:t>
             </a:r>
           </a:p>
         </p:txBody>
@@ -3995,11 +3995,11 @@
             <a:r>
               <a:rPr sz="900" b="0">
                 <a:solidFill>
-                  <a:srgbClr val="22C55E"/>
-                </a:solidFill>
-                <a:latin typeface="Segoe UI"/>
-              </a:rPr>
-              <a:t>XLK · GREEN</a:t>
+                  <a:srgbClr val="EF4444"/>
+                </a:solidFill>
+                <a:latin typeface="Segoe UI"/>
+              </a:rPr>
+              <a:t>TSLA · RED</a:t>
             </a:r>
           </a:p>
         </p:txBody>
@@ -4033,7 +4033,7 @@
                 </a:solidFill>
                 <a:latin typeface="Segoe UI"/>
               </a:rPr>
-              <a:t>+7.2%</a:t>
+              <a:t>+6.3%</a:t>
             </a:r>
           </a:p>
         </p:txBody>
@@ -4193,7 +4193,7 @@
                 </a:solidFill>
                 <a:latin typeface="Segoe UI"/>
               </a:rPr>
-              <a:t>-6.9%</a:t>
+              <a:t>-3.0%</a:t>
             </a:r>
           </a:p>
         </p:txBody>
@@ -4251,7 +4251,7 @@
                 </a:solidFill>
                 <a:latin typeface="Segoe UI"/>
               </a:rPr>
-              <a:t>US Energy</a:t>
+              <a:t>HDFC Bank</a:t>
             </a:r>
           </a:p>
         </p:txBody>
@@ -4281,11 +4281,11 @@
             <a:r>
               <a:rPr sz="900" b="0">
                 <a:solidFill>
-                  <a:srgbClr val="F59E0B"/>
-                </a:solidFill>
-                <a:latin typeface="Segoe UI"/>
-              </a:rPr>
-              <a:t>XLE · AMBER</a:t>
+                  <a:srgbClr val="EF4444"/>
+                </a:solidFill>
+                <a:latin typeface="Segoe UI"/>
+              </a:rPr>
+              <a:t>HDFCBANK.NS · RED</a:t>
             </a:r>
           </a:p>
         </p:txBody>
@@ -4319,7 +4319,7 @@
                 </a:solidFill>
                 <a:latin typeface="Segoe UI"/>
               </a:rPr>
-              <a:t>-3.4%</a:t>
+              <a:t>-2.7%</a:t>
             </a:r>
           </a:p>
         </p:txBody>
@@ -4377,7 +4377,7 @@
                 </a:solidFill>
                 <a:latin typeface="Segoe UI"/>
               </a:rPr>
-              <a:t>HDFC Bank</a:t>
+              <a:t>Bharti Airtel</a:t>
             </a:r>
           </a:p>
         </p:txBody>
@@ -4407,11 +4407,11 @@
             <a:r>
               <a:rPr sz="900" b="0">
                 <a:solidFill>
-                  <a:srgbClr val="EF4444"/>
-                </a:solidFill>
-                <a:latin typeface="Segoe UI"/>
-              </a:rPr>
-              <a:t>HDFCBANK.NS · RED</a:t>
+                  <a:srgbClr val="F59E0B"/>
+                </a:solidFill>
+                <a:latin typeface="Segoe UI"/>
+              </a:rPr>
+              <a:t>BHARTIARTL.NS · AMBER</a:t>
             </a:r>
           </a:p>
         </p:txBody>
@@ -4571,7 +4571,7 @@
                 </a:solidFill>
                 <a:latin typeface="Segoe UI"/>
               </a:rPr>
-              <a:t>-1.5%</a:t>
+              <a:t>-0.6%</a:t>
             </a:r>
           </a:p>
         </p:txBody>
@@ -4629,7 +4629,7 @@
                 </a:solidFill>
                 <a:latin typeface="Segoe UI"/>
               </a:rPr>
-              <a:t>Natural Gas</a:t>
+              <a:t>Hang Seng</a:t>
             </a:r>
           </a:p>
         </p:txBody>
@@ -4659,11 +4659,11 @@
             <a:r>
               <a:rPr sz="900" b="0">
                 <a:solidFill>
-                  <a:srgbClr val="EF4444"/>
-                </a:solidFill>
-                <a:latin typeface="Segoe UI"/>
-              </a:rPr>
-              <a:t>NG=F · RED</a:t>
+                  <a:srgbClr val="F59E0B"/>
+                </a:solidFill>
+                <a:latin typeface="Segoe UI"/>
+              </a:rPr>
+              <a:t>^HSI · AMBER</a:t>
             </a:r>
           </a:p>
         </p:txBody>
@@ -4697,7 +4697,7 @@
                 </a:solidFill>
                 <a:latin typeface="Segoe UI"/>
               </a:rPr>
-              <a:t>-0.9%</a:t>
+              <a:t>-0.4%</a:t>
             </a:r>
           </a:p>
         </p:txBody>
@@ -4967,7 +4967,7 @@
                 </a:solidFill>
                 <a:latin typeface="Segoe UI"/>
               </a:rPr>
-              <a:t>US Financials</a:t>
+              <a:t>Amazon</a:t>
             </a:r>
           </a:p>
         </p:txBody>
@@ -5035,7 +5035,7 @@
                 </a:solidFill>
                 <a:latin typeface="Segoe UI"/>
               </a:rPr>
-              <a:t>83%</a:t>
+              <a:t>95%</a:t>
             </a:r>
           </a:p>
         </p:txBody>
@@ -5069,7 +5069,7 @@
                 </a:solidFill>
                 <a:latin typeface="Segoe UI"/>
               </a:rPr>
-              <a:t>above 200DMA · golden cross (50&gt;200) · MACD bearish</a:t>
+              <a:t>above 200DMA · golden cross (50&gt;200) · MACD bullish</a:t>
             </a:r>
           </a:p>
         </p:txBody>
@@ -5103,7 +5103,7 @@
                 </a:solidFill>
                 <a:latin typeface="Segoe UI"/>
               </a:rPr>
-              <a:t>Nvidia</a:t>
+              <a:t>US Financials</a:t>
             </a:r>
           </a:p>
         </p:txBody>
@@ -5171,7 +5171,7 @@
                 </a:solidFill>
                 <a:latin typeface="Segoe UI"/>
               </a:rPr>
-              <a:t>95%</a:t>
+              <a:t>84%</a:t>
             </a:r>
           </a:p>
         </p:txBody>
@@ -5205,7 +5205,7 @@
                 </a:solidFill>
                 <a:latin typeface="Segoe UI"/>
               </a:rPr>
-              <a:t>above 200DMA · golden cross (50&gt;200) · MACD bullish</a:t>
+              <a:t>above 200DMA · golden cross (50&gt;200) · MACD bearish</a:t>
             </a:r>
           </a:p>
         </p:txBody>
@@ -5375,7 +5375,7 @@
                 </a:solidFill>
                 <a:latin typeface="Segoe UI"/>
               </a:rPr>
-              <a:t>Russell 2000</a:t>
+              <a:t>S&amp;P 500</a:t>
             </a:r>
           </a:p>
         </p:txBody>
@@ -5443,7 +5443,7 @@
                 </a:solidFill>
                 <a:latin typeface="Segoe UI"/>
               </a:rPr>
-              <a:t>95%</a:t>
+              <a:t>82%</a:t>
             </a:r>
           </a:p>
         </p:txBody>
@@ -5511,7 +5511,7 @@
                 </a:solidFill>
                 <a:latin typeface="Segoe UI"/>
               </a:rPr>
-              <a:t>Amazon</a:t>
+              <a:t>ICICI Bank</a:t>
             </a:r>
           </a:p>
         </p:txBody>
@@ -5579,7 +5579,7 @@
                 </a:solidFill>
                 <a:latin typeface="Segoe UI"/>
               </a:rPr>
-              <a:t>94%</a:t>
+              <a:t>81%</a:t>
             </a:r>
           </a:p>
         </p:txBody>
@@ -5613,7 +5613,7 @@
                 </a:solidFill>
                 <a:latin typeface="Segoe UI"/>
               </a:rPr>
-              <a:t>above 200DMA · golden cross (50&gt;200) · MACD bullish</a:t>
+              <a:t>above 200DMA · golden cross (50&gt;200) · MACD bearish</a:t>
             </a:r>
           </a:p>
         </p:txBody>
@@ -5647,7 +5647,7 @@
                 </a:solidFill>
                 <a:latin typeface="Segoe UI"/>
               </a:rPr>
-              <a:t>ICICI Bank</a:t>
+              <a:t>Russell 2000</a:t>
             </a:r>
           </a:p>
         </p:txBody>
@@ -5715,7 +5715,7 @@
                 </a:solidFill>
                 <a:latin typeface="Segoe UI"/>
               </a:rPr>
-              <a:t>81%</a:t>
+              <a:t>93%</a:t>
             </a:r>
           </a:p>
         </p:txBody>
@@ -5749,7 +5749,7 @@
                 </a:solidFill>
                 <a:latin typeface="Segoe UI"/>
               </a:rPr>
-              <a:t>above 200DMA · golden cross (50&gt;200) · MACD bearish</a:t>
+              <a:t>above 200DMA · golden cross (50&gt;200) · MACD bullish</a:t>
             </a:r>
           </a:p>
         </p:txBody>
@@ -6055,7 +6055,7 @@
                 </a:solidFill>
                 <a:latin typeface="Segoe UI"/>
               </a:rPr>
-              <a:t>Straits Times</a:t>
+              <a:t>FTSE 100</a:t>
             </a:r>
           </a:p>
         </p:txBody>
@@ -6123,7 +6123,7 @@
                 </a:solidFill>
                 <a:latin typeface="Segoe UI"/>
               </a:rPr>
-              <a:t>71%</a:t>
+              <a:t>68%</a:t>
             </a:r>
           </a:p>
         </p:txBody>
@@ -6191,7 +6191,7 @@
                 </a:solidFill>
                 <a:latin typeface="Segoe UI"/>
               </a:rPr>
-              <a:t>S&amp;P 500</a:t>
+              <a:t>Copper</a:t>
             </a:r>
           </a:p>
         </p:txBody>
@@ -6259,7 +6259,7 @@
                 </a:solidFill>
                 <a:latin typeface="Segoe UI"/>
               </a:rPr>
-              <a:t>76%</a:t>
+              <a:t>79%</a:t>
             </a:r>
           </a:p>
         </p:txBody>
@@ -6327,7 +6327,7 @@
                 </a:solidFill>
                 <a:latin typeface="Segoe UI"/>
               </a:rPr>
-              <a:t>NIFTY IT</a:t>
+              <a:t>NIFTY 50</a:t>
             </a:r>
           </a:p>
         </p:txBody>
@@ -6395,7 +6395,7 @@
                 </a:solidFill>
                 <a:latin typeface="Segoe UI"/>
               </a:rPr>
-              <a:t>68%</a:t>
+              <a:t>73%</a:t>
             </a:r>
           </a:p>
         </p:txBody>
@@ -6429,7 +6429,7 @@
                 </a:solidFill>
                 <a:latin typeface="Segoe UI"/>
               </a:rPr>
-              <a:t>above 200DMA · death cross (50&lt;200) · MACD bullish</a:t>
+              <a:t>above 200DMA · golden cross (50&gt;200) · MACD bullish</a:t>
             </a:r>
           </a:p>
         </p:txBody>
@@ -6463,7 +6463,7 @@
                 </a:solidFill>
                 <a:latin typeface="Segoe UI"/>
               </a:rPr>
-              <a:t>FTSE 100</a:t>
+              <a:t>US Technology</a:t>
             </a:r>
           </a:p>
         </p:txBody>
@@ -6531,7 +6531,7 @@
                 </a:solidFill>
                 <a:latin typeface="Segoe UI"/>
               </a:rPr>
-              <a:t>68%</a:t>
+              <a:t>78%</a:t>
             </a:r>
           </a:p>
         </p:txBody>
@@ -6565,7 +6565,7 @@
                 </a:solidFill>
                 <a:latin typeface="Segoe UI"/>
               </a:rPr>
-              <a:t>above 200DMA · golden cross (50&gt;200) · MACD bearish</a:t>
+              <a:t>above 200DMA · golden cross (50&gt;200) · MACD bullish</a:t>
             </a:r>
           </a:p>
         </p:txBody>
@@ -6659,7 +6659,7 @@
                 </a:solidFill>
                 <a:latin typeface="Segoe UI"/>
               </a:rPr>
-              <a:t>Base currency INR · USD/INR 95.2</a:t>
+              <a:t>Base currency INR · USD/INR 95.39</a:t>
             </a:r>
           </a:p>
         </p:txBody>
@@ -7067,7 +7067,7 @@
                 </a:solidFill>
                 <a:latin typeface="Segoe UI"/>
               </a:rPr>
-              <a:t>64,856</a:t>
+              <a:t>64,065</a:t>
             </a:r>
           </a:p>
         </p:txBody>
@@ -7101,7 +7101,7 @@
                 </a:solidFill>
                 <a:latin typeface="Segoe UI"/>
               </a:rPr>
-              <a:t>Rs 617,411</a:t>
+              <a:t>Rs 611,114</a:t>
             </a:r>
           </a:p>
         </p:txBody>
@@ -7135,7 +7135,7 @@
                 </a:solidFill>
                 <a:latin typeface="Segoe UI"/>
               </a:rPr>
-              <a:t>Rs 46,223</a:t>
+              <a:t>Rs 38,774</a:t>
             </a:r>
           </a:p>
         </p:txBody>
@@ -7169,7 +7169,7 @@
                 </a:solidFill>
                 <a:latin typeface="Segoe UI"/>
               </a:rPr>
-              <a:t>+8.1%</a:t>
+              <a:t>+6.8%</a:t>
             </a:r>
           </a:p>
         </p:txBody>
@@ -7203,7 +7203,7 @@
                 </a:solidFill>
                 <a:latin typeface="Segoe UI"/>
               </a:rPr>
-              <a:t>-0.1%</a:t>
+              <a:t>-1.2%</a:t>
             </a:r>
           </a:p>
         </p:txBody>
@@ -7339,7 +7339,7 @@
                 </a:solidFill>
                 <a:latin typeface="Segoe UI"/>
               </a:rPr>
-              <a:t>4,400</a:t>
+              <a:t>4,362</a:t>
             </a:r>
           </a:p>
         </p:txBody>
@@ -7373,7 +7373,7 @@
                 </a:solidFill>
                 <a:latin typeface="Segoe UI"/>
               </a:rPr>
-              <a:t>Rs 418,843</a:t>
+              <a:t>Rs 416,072</a:t>
             </a:r>
           </a:p>
         </p:txBody>
@@ -7407,7 +7407,7 @@
                 </a:solidFill>
                 <a:latin typeface="Segoe UI"/>
               </a:rPr>
-              <a:t>Rs 199,887</a:t>
+              <a:t>Rs 196,675</a:t>
             </a:r>
           </a:p>
         </p:txBody>
@@ -7441,7 +7441,7 @@
                 </a:solidFill>
                 <a:latin typeface="Segoe UI"/>
               </a:rPr>
-              <a:t>+91.3%</a:t>
+              <a:t>+89.6%</a:t>
             </a:r>
           </a:p>
         </p:txBody>
@@ -7611,7 +7611,7 @@
                 </a:solidFill>
                 <a:latin typeface="Segoe UI"/>
               </a:rPr>
-              <a:t>313</a:t>
+              <a:t>308</a:t>
             </a:r>
           </a:p>
         </p:txBody>
@@ -7645,7 +7645,7 @@
                 </a:solidFill>
                 <a:latin typeface="Segoe UI"/>
               </a:rPr>
-              <a:t>Rs 298,284</a:t>
+              <a:t>Rs 294,049</a:t>
             </a:r>
           </a:p>
         </p:txBody>
@@ -7679,7 +7679,7 @@
                 </a:solidFill>
                 <a:latin typeface="Segoe UI"/>
               </a:rPr>
-              <a:t>Rs 122,168</a:t>
+              <a:t>Rs 117,578</a:t>
             </a:r>
           </a:p>
         </p:txBody>
@@ -7713,7 +7713,7 @@
                 </a:solidFill>
                 <a:latin typeface="Segoe UI"/>
               </a:rPr>
-              <a:t>+69.4%</a:t>
+              <a:t>+66.6%</a:t>
             </a:r>
           </a:p>
         </p:txBody>
@@ -7883,7 +7883,7 @@
                 </a:solidFill>
                 <a:latin typeface="Segoe UI"/>
               </a:rPr>
-              <a:t>224</a:t>
+              <a:t>218</a:t>
             </a:r>
           </a:p>
         </p:txBody>
@@ -7917,7 +7917,7 @@
                 </a:solidFill>
                 <a:latin typeface="Segoe UI"/>
               </a:rPr>
-              <a:t>Rs 170,564</a:t>
+              <a:t>Rs 166,017</a:t>
             </a:r>
           </a:p>
         </p:txBody>
@@ -7951,7 +7951,7 @@
                 </a:solidFill>
                 <a:latin typeface="Segoe UI"/>
               </a:rPr>
-              <a:t>Rs -172,148</a:t>
+              <a:t>Rs -177,387</a:t>
             </a:r>
           </a:p>
         </p:txBody>
@@ -7985,7 +7985,7 @@
                 </a:solidFill>
                 <a:latin typeface="Segoe UI"/>
               </a:rPr>
-              <a:t>-50.2%</a:t>
+              <a:t>-51.7%</a:t>
             </a:r>
           </a:p>
         </p:txBody>
@@ -8155,7 +8155,7 @@
                 </a:solidFill>
                 <a:latin typeface="Segoe UI"/>
               </a:rPr>
-              <a:t>1,175</a:t>
+              <a:t>1,192</a:t>
             </a:r>
           </a:p>
         </p:txBody>
@@ -8189,7 +8189,7 @@
                 </a:solidFill>
                 <a:latin typeface="Segoe UI"/>
               </a:rPr>
-              <a:t>Rs 94,008</a:t>
+              <a:t>Rs 95,352</a:t>
             </a:r>
           </a:p>
         </p:txBody>
@@ -8223,7 +8223,7 @@
                 </a:solidFill>
                 <a:latin typeface="Segoe UI"/>
               </a:rPr>
-              <a:t>Rs -17,992</a:t>
+              <a:t>Rs -16,648</a:t>
             </a:r>
           </a:p>
         </p:txBody>
@@ -8257,7 +8257,7 @@
                 </a:solidFill>
                 <a:latin typeface="Segoe UI"/>
               </a:rPr>
-              <a:t>-16.1%</a:t>
+              <a:t>-14.9%</a:t>
             </a:r>
           </a:p>
         </p:txBody>
@@ -8291,7 +8291,7 @@
                 </a:solidFill>
                 <a:latin typeface="Segoe UI"/>
               </a:rPr>
-              <a:t>+0.0%</a:t>
+              <a:t>+0.8%</a:t>
             </a:r>
           </a:p>
         </p:txBody>
@@ -8427,7 +8427,7 @@
                 </a:solidFill>
                 <a:latin typeface="Segoe UI"/>
               </a:rPr>
-              <a:t>1,335</a:t>
+              <a:t>1,319</a:t>
             </a:r>
           </a:p>
         </p:txBody>
@@ -8461,7 +8461,7 @@
                 </a:solidFill>
                 <a:latin typeface="Segoe UI"/>
               </a:rPr>
-              <a:t>Rs 66,740</a:t>
+              <a:t>Rs 65,945</a:t>
             </a:r>
           </a:p>
         </p:txBody>
@@ -8495,7 +8495,7 @@
                 </a:solidFill>
                 <a:latin typeface="Segoe UI"/>
               </a:rPr>
-              <a:t>Rs -55,760</a:t>
+              <a:t>Rs -56,555</a:t>
             </a:r>
           </a:p>
         </p:txBody>
@@ -8529,7 +8529,7 @@
                 </a:solidFill>
                 <a:latin typeface="Segoe UI"/>
               </a:rPr>
-              <a:t>-45.5%</a:t>
+              <a:t>-46.2%</a:t>
             </a:r>
           </a:p>
         </p:txBody>
@@ -8559,11 +8559,11 @@
             <a:r>
               <a:rPr sz="1000" b="0">
                 <a:solidFill>
-                  <a:srgbClr val="22C55E"/>
-                </a:solidFill>
-                <a:latin typeface="Segoe UI"/>
-              </a:rPr>
-              <a:t>+0.0%</a:t>
+                  <a:srgbClr val="EF4444"/>
+                </a:solidFill>
+                <a:latin typeface="Segoe UI"/>
+              </a:rPr>
+              <a:t>-0.6%</a:t>
             </a:r>
           </a:p>
         </p:txBody>
@@ -8699,7 +8699,7 @@
                 </a:solidFill>
                 <a:latin typeface="Segoe UI"/>
               </a:rPr>
-              <a:t>2,453</a:t>
+              <a:t>2,444</a:t>
             </a:r>
           </a:p>
         </p:txBody>
@@ -8733,7 +8733,7 @@
                 </a:solidFill>
                 <a:latin typeface="Segoe UI"/>
               </a:rPr>
-              <a:t>Rs 61,317</a:t>
+              <a:t>Rs 61,112</a:t>
             </a:r>
           </a:p>
         </p:txBody>
@@ -8767,7 +8767,7 @@
                 </a:solidFill>
                 <a:latin typeface="Segoe UI"/>
               </a:rPr>
-              <a:t>Rs -28,683</a:t>
+              <a:t>Rs -28,888</a:t>
             </a:r>
           </a:p>
         </p:txBody>
@@ -8801,7 +8801,7 @@
                 </a:solidFill>
                 <a:latin typeface="Segoe UI"/>
               </a:rPr>
-              <a:t>-31.9%</a:t>
+              <a:t>-32.1%</a:t>
             </a:r>
           </a:p>
         </p:txBody>
@@ -8835,7 +8835,7 @@
                 </a:solidFill>
                 <a:latin typeface="Segoe UI"/>
               </a:rPr>
-              <a:t>+0.0%</a:t>
+              <a:t>+0.8%</a:t>
             </a:r>
           </a:p>
         </p:txBody>
@@ -8971,7 +8971,7 @@
                 </a:solidFill>
                 <a:latin typeface="Segoe UI"/>
               </a:rPr>
-              <a:t>731</a:t>
+              <a:t>728</a:t>
             </a:r>
           </a:p>
         </p:txBody>
@@ -9005,7 +9005,7 @@
                 </a:solidFill>
                 <a:latin typeface="Segoe UI"/>
               </a:rPr>
-              <a:t>Rs 43,860</a:t>
+              <a:t>Rs 43,686</a:t>
             </a:r>
           </a:p>
         </p:txBody>
@@ -9039,7 +9039,7 @@
                 </a:solidFill>
                 <a:latin typeface="Segoe UI"/>
               </a:rPr>
-              <a:t>Rs -47,340</a:t>
+              <a:t>Rs -47,514</a:t>
             </a:r>
           </a:p>
         </p:txBody>
@@ -9073,7 +9073,7 @@
                 </a:solidFill>
                 <a:latin typeface="Segoe UI"/>
               </a:rPr>
-              <a:t>-51.9%</a:t>
+              <a:t>-52.1%</a:t>
             </a:r>
           </a:p>
         </p:txBody>
@@ -9103,11 +9103,11 @@
             <a:r>
               <a:rPr sz="1000" b="0">
                 <a:solidFill>
-                  <a:srgbClr val="22C55E"/>
-                </a:solidFill>
-                <a:latin typeface="Segoe UI"/>
-              </a:rPr>
-              <a:t>+0.0%</a:t>
+                  <a:srgbClr val="EF4444"/>
+                </a:solidFill>
+                <a:latin typeface="Segoe UI"/>
+              </a:rPr>
+              <a:t>-0.4%</a:t>
             </a:r>
           </a:p>
         </p:txBody>
@@ -9141,7 +9141,7 @@
                 </a:solidFill>
                 <a:latin typeface="Segoe UI"/>
               </a:rPr>
-              <a:t>Total Rs 1,771,028 | P&amp;L Rs 46,355 (+2.7%) | Sharpe -0.24 | Vol 17.75% | VaR95 -1.8%/day</a:t>
+              <a:t>Total Rs 1,753,348 | P&amp;L Rs 26,035 (+1.5%) | Sharpe -0.42 | Vol 17.64% | VaR95 -1.8%/day</a:t>
             </a:r>
           </a:p>
         </p:txBody>

--- a/docs/pmr_daily.pptx
+++ b/docs/pmr_daily.pptx
@@ -3197,7 +3197,7 @@
                 </a:solidFill>
                 <a:latin typeface="Segoe UI"/>
               </a:rPr>
-              <a:t>Tuesday, 11 Aug 2026 12:06 SGT</a:t>
+              <a:t>Wednesday, 12 Aug 2026 07:41 SGT</a:t>
             </a:r>
           </a:p>
         </p:txBody>
@@ -3265,7 +3265,7 @@
                 </a:solidFill>
                 <a:latin typeface="Segoe UI"/>
               </a:rPr>
-              <a:t>RAG 14R / 13A / 19G   |   63.0% above 200DMA   |   Portfolio Rs 1,753,348 (+1.5%)</a:t>
+              <a:t>RAG 14R / 14A / 18G   |   63.0% above 200DMA   |   Portfolio Rs 1,752,619 (+1.4%)</a:t>
             </a:r>
           </a:p>
         </p:txBody>
@@ -3529,7 +3529,7 @@
                 </a:solidFill>
                 <a:latin typeface="Segoe UI"/>
               </a:rPr>
-              <a:t>+13.0%</a:t>
+              <a:t>+12.8%</a:t>
             </a:r>
           </a:p>
         </p:txBody>
@@ -3587,7 +3587,7 @@
                 </a:solidFill>
                 <a:latin typeface="Segoe UI"/>
               </a:rPr>
-              <a:t>Microsoft</a:t>
+              <a:t>Gold</a:t>
             </a:r>
           </a:p>
         </p:txBody>
@@ -3617,11 +3617,11 @@
             <a:r>
               <a:rPr sz="900" b="0">
                 <a:solidFill>
-                  <a:srgbClr val="22C55E"/>
-                </a:solidFill>
-                <a:latin typeface="Segoe UI"/>
-              </a:rPr>
-              <a:t>MSFT · GREEN</a:t>
+                  <a:srgbClr val="EF4444"/>
+                </a:solidFill>
+                <a:latin typeface="Segoe UI"/>
+              </a:rPr>
+              <a:t>GC=F · RED</a:t>
             </a:r>
           </a:p>
         </p:txBody>
@@ -3655,7 +3655,7 @@
                 </a:solidFill>
                 <a:latin typeface="Segoe UI"/>
               </a:rPr>
-              <a:t>+8.9%</a:t>
+              <a:t>+9.4%</a:t>
             </a:r>
           </a:p>
         </p:txBody>
@@ -3713,7 +3713,7 @@
                 </a:solidFill>
                 <a:latin typeface="Segoe UI"/>
               </a:rPr>
-              <a:t>Nvidia</a:t>
+              <a:t>Microsoft</a:t>
             </a:r>
           </a:p>
         </p:txBody>
@@ -3747,7 +3747,7 @@
                 </a:solidFill>
                 <a:latin typeface="Segoe UI"/>
               </a:rPr>
-              <a:t>NVDA · GREEN</a:t>
+              <a:t>MSFT · GREEN</a:t>
             </a:r>
           </a:p>
         </p:txBody>
@@ -3839,7 +3839,7 @@
                 </a:solidFill>
                 <a:latin typeface="Segoe UI"/>
               </a:rPr>
-              <a:t>Gold</a:t>
+              <a:t>Nvidia</a:t>
             </a:r>
           </a:p>
         </p:txBody>
@@ -3869,11 +3869,11 @@
             <a:r>
               <a:rPr sz="900" b="0">
                 <a:solidFill>
-                  <a:srgbClr val="EF4444"/>
-                </a:solidFill>
-                <a:latin typeface="Segoe UI"/>
-              </a:rPr>
-              <a:t>GC=F · RED</a:t>
+                  <a:srgbClr val="22C55E"/>
+                </a:solidFill>
+                <a:latin typeface="Segoe UI"/>
+              </a:rPr>
+              <a:t>NVDA · GREEN</a:t>
             </a:r>
           </a:p>
         </p:txBody>
@@ -3907,7 +3907,7 @@
                 </a:solidFill>
                 <a:latin typeface="Segoe UI"/>
               </a:rPr>
-              <a:t>+7.7%</a:t>
+              <a:t>+8.3%</a:t>
             </a:r>
           </a:p>
         </p:txBody>
@@ -4033,7 +4033,7 @@
                 </a:solidFill>
                 <a:latin typeface="Segoe UI"/>
               </a:rPr>
-              <a:t>+6.3%</a:t>
+              <a:t>+6.9%</a:t>
             </a:r>
           </a:p>
         </p:txBody>
@@ -4125,7 +4125,7 @@
                 </a:solidFill>
                 <a:latin typeface="Segoe UI"/>
               </a:rPr>
-              <a:t>Crude Oil WTI</a:t>
+              <a:t>Alphabet</a:t>
             </a:r>
           </a:p>
         </p:txBody>
@@ -4155,11 +4155,11 @@
             <a:r>
               <a:rPr sz="900" b="0">
                 <a:solidFill>
-                  <a:srgbClr val="EF4444"/>
-                </a:solidFill>
-                <a:latin typeface="Segoe UI"/>
-              </a:rPr>
-              <a:t>CL=F · RED</a:t>
+                  <a:srgbClr val="F59E0B"/>
+                </a:solidFill>
+                <a:latin typeface="Segoe UI"/>
+              </a:rPr>
+              <a:t>GOOGL · AMBER</a:t>
             </a:r>
           </a:p>
         </p:txBody>
@@ -4193,7 +4193,7 @@
                 </a:solidFill>
                 <a:latin typeface="Segoe UI"/>
               </a:rPr>
-              <a:t>-3.0%</a:t>
+              <a:t>-3.5%</a:t>
             </a:r>
           </a:p>
         </p:txBody>
@@ -4251,7 +4251,7 @@
                 </a:solidFill>
                 <a:latin typeface="Segoe UI"/>
               </a:rPr>
-              <a:t>HDFC Bank</a:t>
+              <a:t>Bharti Airtel</a:t>
             </a:r>
           </a:p>
         </p:txBody>
@@ -4281,11 +4281,11 @@
             <a:r>
               <a:rPr sz="900" b="0">
                 <a:solidFill>
-                  <a:srgbClr val="EF4444"/>
-                </a:solidFill>
-                <a:latin typeface="Segoe UI"/>
-              </a:rPr>
-              <a:t>HDFCBANK.NS · RED</a:t>
+                  <a:srgbClr val="F59E0B"/>
+                </a:solidFill>
+                <a:latin typeface="Segoe UI"/>
+              </a:rPr>
+              <a:t>BHARTIARTL.NS · AMBER</a:t>
             </a:r>
           </a:p>
         </p:txBody>
@@ -4319,7 +4319,7 @@
                 </a:solidFill>
                 <a:latin typeface="Segoe UI"/>
               </a:rPr>
-              <a:t>-2.7%</a:t>
+              <a:t>-2.9%</a:t>
             </a:r>
           </a:p>
         </p:txBody>
@@ -4377,7 +4377,7 @@
                 </a:solidFill>
                 <a:latin typeface="Segoe UI"/>
               </a:rPr>
-              <a:t>Bharti Airtel</a:t>
+              <a:t>HDFC Bank</a:t>
             </a:r>
           </a:p>
         </p:txBody>
@@ -4407,11 +4407,11 @@
             <a:r>
               <a:rPr sz="900" b="0">
                 <a:solidFill>
-                  <a:srgbClr val="F59E0B"/>
-                </a:solidFill>
-                <a:latin typeface="Segoe UI"/>
-              </a:rPr>
-              <a:t>BHARTIARTL.NS · AMBER</a:t>
+                  <a:srgbClr val="EF4444"/>
+                </a:solidFill>
+                <a:latin typeface="Segoe UI"/>
+              </a:rPr>
+              <a:t>HDFCBANK.NS · RED</a:t>
             </a:r>
           </a:p>
         </p:txBody>
@@ -4445,7 +4445,7 @@
                 </a:solidFill>
                 <a:latin typeface="Segoe UI"/>
               </a:rPr>
-              <a:t>-2.3%</a:t>
+              <a:t>-2.6%</a:t>
             </a:r>
           </a:p>
         </p:txBody>
@@ -4503,7 +4503,7 @@
                 </a:solidFill>
                 <a:latin typeface="Segoe UI"/>
               </a:rPr>
-              <a:t>USD/JPY</a:t>
+              <a:t>Crude Oil WTI</a:t>
             </a:r>
           </a:p>
         </p:txBody>
@@ -4533,11 +4533,11 @@
             <a:r>
               <a:rPr sz="900" b="0">
                 <a:solidFill>
-                  <a:srgbClr val="F59E0B"/>
-                </a:solidFill>
-                <a:latin typeface="Segoe UI"/>
-              </a:rPr>
-              <a:t>JPY=X · AMBER</a:t>
+                  <a:srgbClr val="EF4444"/>
+                </a:solidFill>
+                <a:latin typeface="Segoe UI"/>
+              </a:rPr>
+              <a:t>CL=F · RED</a:t>
             </a:r>
           </a:p>
         </p:txBody>
@@ -4571,7 +4571,7 @@
                 </a:solidFill>
                 <a:latin typeface="Segoe UI"/>
               </a:rPr>
-              <a:t>-0.6%</a:t>
+              <a:t>-1.4%</a:t>
             </a:r>
           </a:p>
         </p:txBody>
@@ -4629,7 +4629,7 @@
                 </a:solidFill>
                 <a:latin typeface="Segoe UI"/>
               </a:rPr>
-              <a:t>Hang Seng</a:t>
+              <a:t>Apple</a:t>
             </a:r>
           </a:p>
         </p:txBody>
@@ -4663,7 +4663,7 @@
                 </a:solidFill>
                 <a:latin typeface="Segoe UI"/>
               </a:rPr>
-              <a:t>^HSI · AMBER</a:t>
+              <a:t>AAPL · AMBER</a:t>
             </a:r>
           </a:p>
         </p:txBody>
@@ -4697,7 +4697,7 @@
                 </a:solidFill>
                 <a:latin typeface="Segoe UI"/>
               </a:rPr>
-              <a:t>-0.4%</a:t>
+              <a:t>-1.2%</a:t>
             </a:r>
           </a:p>
         </p:txBody>
@@ -4967,7 +4967,7 @@
                 </a:solidFill>
                 <a:latin typeface="Segoe UI"/>
               </a:rPr>
-              <a:t>Amazon</a:t>
+              <a:t>US Financials</a:t>
             </a:r>
           </a:p>
         </p:txBody>
@@ -5035,7 +5035,7 @@
                 </a:solidFill>
                 <a:latin typeface="Segoe UI"/>
               </a:rPr>
-              <a:t>95%</a:t>
+              <a:t>84%</a:t>
             </a:r>
           </a:p>
         </p:txBody>
@@ -5069,7 +5069,7 @@
                 </a:solidFill>
                 <a:latin typeface="Segoe UI"/>
               </a:rPr>
-              <a:t>above 200DMA · golden cross (50&gt;200) · MACD bullish</a:t>
+              <a:t>above 200DMA · golden cross (50&gt;200) · MACD bearish</a:t>
             </a:r>
           </a:p>
         </p:txBody>
@@ -5103,7 +5103,7 @@
                 </a:solidFill>
                 <a:latin typeface="Segoe UI"/>
               </a:rPr>
-              <a:t>US Financials</a:t>
+              <a:t>Dow Jones</a:t>
             </a:r>
           </a:p>
         </p:txBody>
@@ -5171,7 +5171,7 @@
                 </a:solidFill>
                 <a:latin typeface="Segoe UI"/>
               </a:rPr>
-              <a:t>84%</a:t>
+              <a:t>95%</a:t>
             </a:r>
           </a:p>
         </p:txBody>
@@ -5205,7 +5205,7 @@
                 </a:solidFill>
                 <a:latin typeface="Segoe UI"/>
               </a:rPr>
-              <a:t>above 200DMA · golden cross (50&gt;200) · MACD bearish</a:t>
+              <a:t>above 200DMA · golden cross (50&gt;200) · MACD bullish</a:t>
             </a:r>
           </a:p>
         </p:txBody>
@@ -5239,7 +5239,7 @@
                 </a:solidFill>
                 <a:latin typeface="Segoe UI"/>
               </a:rPr>
-              <a:t>Dow Jones</a:t>
+              <a:t>Russell 2000</a:t>
             </a:r>
           </a:p>
         </p:txBody>
@@ -5375,7 +5375,7 @@
                 </a:solidFill>
                 <a:latin typeface="Segoe UI"/>
               </a:rPr>
-              <a:t>S&amp;P 500</a:t>
+              <a:t>Amazon</a:t>
             </a:r>
           </a:p>
         </p:txBody>
@@ -5443,7 +5443,7 @@
                 </a:solidFill>
                 <a:latin typeface="Segoe UI"/>
               </a:rPr>
-              <a:t>82%</a:t>
+              <a:t>94%</a:t>
             </a:r>
           </a:p>
         </p:txBody>
@@ -5511,7 +5511,7 @@
                 </a:solidFill>
                 <a:latin typeface="Segoe UI"/>
               </a:rPr>
-              <a:t>ICICI Bank</a:t>
+              <a:t>S&amp;P 500</a:t>
             </a:r>
           </a:p>
         </p:txBody>
@@ -5579,7 +5579,7 @@
                 </a:solidFill>
                 <a:latin typeface="Segoe UI"/>
               </a:rPr>
-              <a:t>81%</a:t>
+              <a:t>82%</a:t>
             </a:r>
           </a:p>
         </p:txBody>
@@ -5613,7 +5613,7 @@
                 </a:solidFill>
                 <a:latin typeface="Segoe UI"/>
               </a:rPr>
-              <a:t>above 200DMA · golden cross (50&gt;200) · MACD bearish</a:t>
+              <a:t>above 200DMA · golden cross (50&gt;200) · MACD bullish</a:t>
             </a:r>
           </a:p>
         </p:txBody>
@@ -5647,7 +5647,7 @@
                 </a:solidFill>
                 <a:latin typeface="Segoe UI"/>
               </a:rPr>
-              <a:t>Russell 2000</a:t>
+              <a:t>ICICI Bank</a:t>
             </a:r>
           </a:p>
         </p:txBody>
@@ -5715,7 +5715,7 @@
                 </a:solidFill>
                 <a:latin typeface="Segoe UI"/>
               </a:rPr>
-              <a:t>93%</a:t>
+              <a:t>81%</a:t>
             </a:r>
           </a:p>
         </p:txBody>
@@ -5749,7 +5749,7 @@
                 </a:solidFill>
                 <a:latin typeface="Segoe UI"/>
               </a:rPr>
-              <a:t>above 200DMA · golden cross (50&gt;200) · MACD bullish</a:t>
+              <a:t>above 200DMA · golden cross (50&gt;200) · MACD bearish</a:t>
             </a:r>
           </a:p>
         </p:txBody>
@@ -5783,7 +5783,7 @@
                 </a:solidFill>
                 <a:latin typeface="Segoe UI"/>
               </a:rPr>
-              <a:t>Microsoft</a:t>
+              <a:t>Copper</a:t>
             </a:r>
           </a:p>
         </p:txBody>
@@ -5817,7 +5817,7 @@
                 </a:solidFill>
                 <a:latin typeface="Segoe UI"/>
               </a:rPr>
-              <a:t>BUY</a:t>
+              <a:t>STRONG BUY</a:t>
             </a:r>
           </a:p>
         </p:txBody>
@@ -5851,7 +5851,7 @@
                 </a:solidFill>
                 <a:latin typeface="Segoe UI"/>
               </a:rPr>
-              <a:t>93%</a:t>
+              <a:t>80%</a:t>
             </a:r>
           </a:p>
         </p:txBody>
@@ -5919,7 +5919,7 @@
                 </a:solidFill>
                 <a:latin typeface="Segoe UI"/>
               </a:rPr>
-              <a:t>DAX</a:t>
+              <a:t>Nvidia</a:t>
             </a:r>
           </a:p>
         </p:txBody>
@@ -5953,7 +5953,7 @@
                 </a:solidFill>
                 <a:latin typeface="Segoe UI"/>
               </a:rPr>
-              <a:t>BUY</a:t>
+              <a:t>STRONG BUY</a:t>
             </a:r>
           </a:p>
         </p:txBody>
@@ -5987,7 +5987,7 @@
                 </a:solidFill>
                 <a:latin typeface="Segoe UI"/>
               </a:rPr>
-              <a:t>91%</a:t>
+              <a:t>92%</a:t>
             </a:r>
           </a:p>
         </p:txBody>
@@ -6055,7 +6055,7 @@
                 </a:solidFill>
                 <a:latin typeface="Segoe UI"/>
               </a:rPr>
-              <a:t>FTSE 100</a:t>
+              <a:t>Microsoft</a:t>
             </a:r>
           </a:p>
         </p:txBody>
@@ -6123,7 +6123,7 @@
                 </a:solidFill>
                 <a:latin typeface="Segoe UI"/>
               </a:rPr>
-              <a:t>68%</a:t>
+              <a:t>92%</a:t>
             </a:r>
           </a:p>
         </p:txBody>
@@ -6157,7 +6157,7 @@
                 </a:solidFill>
                 <a:latin typeface="Segoe UI"/>
               </a:rPr>
-              <a:t>above 200DMA · golden cross (50&gt;200) · MACD bearish</a:t>
+              <a:t>above 200DMA · golden cross (50&gt;200) · MACD bullish</a:t>
             </a:r>
           </a:p>
         </p:txBody>
@@ -6191,7 +6191,7 @@
                 </a:solidFill>
                 <a:latin typeface="Segoe UI"/>
               </a:rPr>
-              <a:t>Copper</a:t>
+              <a:t>DAX</a:t>
             </a:r>
           </a:p>
         </p:txBody>
@@ -6259,7 +6259,7 @@
                 </a:solidFill>
                 <a:latin typeface="Segoe UI"/>
               </a:rPr>
-              <a:t>79%</a:t>
+              <a:t>91%</a:t>
             </a:r>
           </a:p>
         </p:txBody>
@@ -6327,7 +6327,7 @@
                 </a:solidFill>
                 <a:latin typeface="Segoe UI"/>
               </a:rPr>
-              <a:t>NIFTY 50</a:t>
+              <a:t>Straits Times</a:t>
             </a:r>
           </a:p>
         </p:txBody>
@@ -6395,7 +6395,7 @@
                 </a:solidFill>
                 <a:latin typeface="Segoe UI"/>
               </a:rPr>
-              <a:t>73%</a:t>
+              <a:t>71%</a:t>
             </a:r>
           </a:p>
         </p:txBody>
@@ -6429,7 +6429,7 @@
                 </a:solidFill>
                 <a:latin typeface="Segoe UI"/>
               </a:rPr>
-              <a:t>above 200DMA · golden cross (50&gt;200) · MACD bullish</a:t>
+              <a:t>above 200DMA · golden cross (50&gt;200) · MACD bearish</a:t>
             </a:r>
           </a:p>
         </p:txBody>
@@ -6531,7 +6531,7 @@
                 </a:solidFill>
                 <a:latin typeface="Segoe UI"/>
               </a:rPr>
-              <a:t>78%</a:t>
+              <a:t>73%</a:t>
             </a:r>
           </a:p>
         </p:txBody>
@@ -6659,7 +6659,7 @@
                 </a:solidFill>
                 <a:latin typeface="Segoe UI"/>
               </a:rPr>
-              <a:t>Base currency INR · USD/INR 95.39</a:t>
+              <a:t>Base currency INR · USD/INR 95.43</a:t>
             </a:r>
           </a:p>
         </p:txBody>
@@ -7067,7 +7067,7 @@
                 </a:solidFill>
                 <a:latin typeface="Segoe UI"/>
               </a:rPr>
-              <a:t>64,065</a:t>
+              <a:t>63,553</a:t>
             </a:r>
           </a:p>
         </p:txBody>
@@ -7101,7 +7101,7 @@
                 </a:solidFill>
                 <a:latin typeface="Segoe UI"/>
               </a:rPr>
-              <a:t>Rs 611,114</a:t>
+              <a:t>Rs 606,458</a:t>
             </a:r>
           </a:p>
         </p:txBody>
@@ -7135,7 +7135,7 @@
                 </a:solidFill>
                 <a:latin typeface="Segoe UI"/>
               </a:rPr>
-              <a:t>Rs 38,774</a:t>
+              <a:t>Rs 33,908</a:t>
             </a:r>
           </a:p>
         </p:txBody>
@@ -7169,7 +7169,7 @@
                 </a:solidFill>
                 <a:latin typeface="Segoe UI"/>
               </a:rPr>
-              <a:t>+6.8%</a:t>
+              <a:t>+5.9%</a:t>
             </a:r>
           </a:p>
         </p:txBody>
@@ -7199,11 +7199,11 @@
             <a:r>
               <a:rPr sz="1000" b="0">
                 <a:solidFill>
-                  <a:srgbClr val="EF4444"/>
-                </a:solidFill>
-                <a:latin typeface="Segoe UI"/>
-              </a:rPr>
-              <a:t>-1.2%</a:t>
+                  <a:srgbClr val="22C55E"/>
+                </a:solidFill>
+                <a:latin typeface="Segoe UI"/>
+              </a:rPr>
+              <a:t>+0.0%</a:t>
             </a:r>
           </a:p>
         </p:txBody>
@@ -7339,7 +7339,7 @@
                 </a:solidFill>
                 <a:latin typeface="Segoe UI"/>
               </a:rPr>
-              <a:t>4,362</a:t>
+              <a:t>4,431</a:t>
             </a:r>
           </a:p>
         </p:txBody>
@@ -7373,7 +7373,7 @@
                 </a:solidFill>
                 <a:latin typeface="Segoe UI"/>
               </a:rPr>
-              <a:t>Rs 416,072</a:t>
+              <a:t>Rs 422,828</a:t>
             </a:r>
           </a:p>
         </p:txBody>
@@ -7407,7 +7407,7 @@
                 </a:solidFill>
                 <a:latin typeface="Segoe UI"/>
               </a:rPr>
-              <a:t>Rs 196,675</a:t>
+              <a:t>Rs 203,351</a:t>
             </a:r>
           </a:p>
         </p:txBody>
@@ -7441,7 +7441,7 @@
                 </a:solidFill>
                 <a:latin typeface="Segoe UI"/>
               </a:rPr>
-              <a:t>+89.6%</a:t>
+              <a:t>+92.7%</a:t>
             </a:r>
           </a:p>
         </p:txBody>
@@ -7611,7 +7611,7 @@
                 </a:solidFill>
                 <a:latin typeface="Segoe UI"/>
               </a:rPr>
-              <a:t>308</a:t>
+              <a:t>305</a:t>
             </a:r>
           </a:p>
         </p:txBody>
@@ -7645,7 +7645,7 @@
                 </a:solidFill>
                 <a:latin typeface="Segoe UI"/>
               </a:rPr>
-              <a:t>Rs 294,049</a:t>
+              <a:t>Rs 290,960</a:t>
             </a:r>
           </a:p>
         </p:txBody>
@@ -7679,7 +7679,7 @@
                 </a:solidFill>
                 <a:latin typeface="Segoe UI"/>
               </a:rPr>
-              <a:t>Rs 117,578</a:t>
+              <a:t>Rs 114,424</a:t>
             </a:r>
           </a:p>
         </p:txBody>
@@ -7713,7 +7713,7 @@
                 </a:solidFill>
                 <a:latin typeface="Segoe UI"/>
               </a:rPr>
-              <a:t>+66.6%</a:t>
+              <a:t>+64.8%</a:t>
             </a:r>
           </a:p>
         </p:txBody>
@@ -7917,7 +7917,7 @@
                 </a:solidFill>
                 <a:latin typeface="Segoe UI"/>
               </a:rPr>
-              <a:t>Rs 166,017</a:t>
+              <a:t>Rs 166,040</a:t>
             </a:r>
           </a:p>
         </p:txBody>
@@ -7951,7 +7951,7 @@
                 </a:solidFill>
                 <a:latin typeface="Segoe UI"/>
               </a:rPr>
-              <a:t>Rs -177,387</a:t>
+              <a:t>Rs -177,491</a:t>
             </a:r>
           </a:p>
         </p:txBody>
@@ -8155,7 +8155,7 @@
                 </a:solidFill>
                 <a:latin typeface="Segoe UI"/>
               </a:rPr>
-              <a:t>1,192</a:t>
+              <a:t>1,191</a:t>
             </a:r>
           </a:p>
         </p:txBody>
@@ -8189,7 +8189,7 @@
                 </a:solidFill>
                 <a:latin typeface="Segoe UI"/>
               </a:rPr>
-              <a:t>Rs 95,352</a:t>
+              <a:t>Rs 95,256</a:t>
             </a:r>
           </a:p>
         </p:txBody>
@@ -8223,7 +8223,7 @@
                 </a:solidFill>
                 <a:latin typeface="Segoe UI"/>
               </a:rPr>
-              <a:t>Rs -16,648</a:t>
+              <a:t>Rs -16,744</a:t>
             </a:r>
           </a:p>
         </p:txBody>
@@ -8291,7 +8291,7 @@
                 </a:solidFill>
                 <a:latin typeface="Segoe UI"/>
               </a:rPr>
-              <a:t>+0.8%</a:t>
+              <a:t>+0.0%</a:t>
             </a:r>
           </a:p>
         </p:txBody>
@@ -8427,7 +8427,7 @@
                 </a:solidFill>
                 <a:latin typeface="Segoe UI"/>
               </a:rPr>
-              <a:t>1,319</a:t>
+              <a:t>1,324</a:t>
             </a:r>
           </a:p>
         </p:txBody>
@@ -8461,7 +8461,7 @@
                 </a:solidFill>
                 <a:latin typeface="Segoe UI"/>
               </a:rPr>
-              <a:t>Rs 65,945</a:t>
+              <a:t>Rs 66,195</a:t>
             </a:r>
           </a:p>
         </p:txBody>
@@ -8495,7 +8495,7 @@
                 </a:solidFill>
                 <a:latin typeface="Segoe UI"/>
               </a:rPr>
-              <a:t>Rs -56,555</a:t>
+              <a:t>Rs -56,305</a:t>
             </a:r>
           </a:p>
         </p:txBody>
@@ -8529,7 +8529,7 @@
                 </a:solidFill>
                 <a:latin typeface="Segoe UI"/>
               </a:rPr>
-              <a:t>-46.2%</a:t>
+              <a:t>-46.0%</a:t>
             </a:r>
           </a:p>
         </p:txBody>
@@ -8559,11 +8559,11 @@
             <a:r>
               <a:rPr sz="1000" b="0">
                 <a:solidFill>
-                  <a:srgbClr val="EF4444"/>
-                </a:solidFill>
-                <a:latin typeface="Segoe UI"/>
-              </a:rPr>
-              <a:t>-0.6%</a:t>
+                  <a:srgbClr val="22C55E"/>
+                </a:solidFill>
+                <a:latin typeface="Segoe UI"/>
+              </a:rPr>
+              <a:t>+0.0%</a:t>
             </a:r>
           </a:p>
         </p:txBody>
@@ -8699,7 +8699,7 @@
                 </a:solidFill>
                 <a:latin typeface="Segoe UI"/>
               </a:rPr>
-              <a:t>2,444</a:t>
+              <a:t>2,446</a:t>
             </a:r>
           </a:p>
         </p:txBody>
@@ -8733,7 +8733,7 @@
                 </a:solidFill>
                 <a:latin typeface="Segoe UI"/>
               </a:rPr>
-              <a:t>Rs 61,112</a:t>
+              <a:t>Rs 61,142</a:t>
             </a:r>
           </a:p>
         </p:txBody>
@@ -8767,7 +8767,7 @@
                 </a:solidFill>
                 <a:latin typeface="Segoe UI"/>
               </a:rPr>
-              <a:t>Rs -28,888</a:t>
+              <a:t>Rs -28,858</a:t>
             </a:r>
           </a:p>
         </p:txBody>
@@ -8835,7 +8835,7 @@
                 </a:solidFill>
                 <a:latin typeface="Segoe UI"/>
               </a:rPr>
-              <a:t>+0.8%</a:t>
+              <a:t>+0.0%</a:t>
             </a:r>
           </a:p>
         </p:txBody>
@@ -8971,7 +8971,7 @@
                 </a:solidFill>
                 <a:latin typeface="Segoe UI"/>
               </a:rPr>
-              <a:t>728</a:t>
+              <a:t>729</a:t>
             </a:r>
           </a:p>
         </p:txBody>
@@ -9005,7 +9005,7 @@
                 </a:solidFill>
                 <a:latin typeface="Segoe UI"/>
               </a:rPr>
-              <a:t>Rs 43,686</a:t>
+              <a:t>Rs 43,740</a:t>
             </a:r>
           </a:p>
         </p:txBody>
@@ -9039,7 +9039,7 @@
                 </a:solidFill>
                 <a:latin typeface="Segoe UI"/>
               </a:rPr>
-              <a:t>Rs -47,514</a:t>
+              <a:t>Rs -47,460</a:t>
             </a:r>
           </a:p>
         </p:txBody>
@@ -9073,7 +9073,7 @@
                 </a:solidFill>
                 <a:latin typeface="Segoe UI"/>
               </a:rPr>
-              <a:t>-52.1%</a:t>
+              <a:t>-52.0%</a:t>
             </a:r>
           </a:p>
         </p:txBody>
@@ -9103,11 +9103,11 @@
             <a:r>
               <a:rPr sz="1000" b="0">
                 <a:solidFill>
-                  <a:srgbClr val="EF4444"/>
-                </a:solidFill>
-                <a:latin typeface="Segoe UI"/>
-              </a:rPr>
-              <a:t>-0.4%</a:t>
+                  <a:srgbClr val="22C55E"/>
+                </a:solidFill>
+                <a:latin typeface="Segoe UI"/>
+              </a:rPr>
+              <a:t>+0.0%</a:t>
             </a:r>
           </a:p>
         </p:txBody>
@@ -9141,7 +9141,7 @@
                 </a:solidFill>
                 <a:latin typeface="Segoe UI"/>
               </a:rPr>
-              <a:t>Total Rs 1,753,348 | P&amp;L Rs 26,035 (+1.5%) | Sharpe -0.42 | Vol 17.64% | VaR95 -1.8%/day</a:t>
+              <a:t>Total Rs 1,752,619 | P&amp;L Rs 24,825 (+1.4%) | Sharpe -0.46 | Vol 17.59% | VaR95 -1.79%/day</a:t>
             </a:r>
           </a:p>
         </p:txBody>

--- a/docs/pmr_daily.pptx
+++ b/docs/pmr_daily.pptx
@@ -3197,7 +3197,7 @@
                 </a:solidFill>
                 <a:latin typeface="Segoe UI"/>
               </a:rPr>
-              <a:t>Wednesday, 12 Aug 2026 07:41 SGT</a:t>
+              <a:t>Thursday, 13 Aug 2026 07:41 SGT</a:t>
             </a:r>
           </a:p>
         </p:txBody>
@@ -3265,7 +3265,7 @@
                 </a:solidFill>
                 <a:latin typeface="Segoe UI"/>
               </a:rPr>
-              <a:t>RAG 14R / 14A / 18G   |   63.0% above 200DMA   |   Portfolio Rs 1,752,619 (+1.4%)</a:t>
+              <a:t>RAG 14R / 13A / 19G   |   60.9% above 200DMA   |   Portfolio Rs 1,752,643 (+1.5%)</a:t>
             </a:r>
           </a:p>
         </p:txBody>
@@ -3529,7 +3529,7 @@
                 </a:solidFill>
                 <a:latin typeface="Segoe UI"/>
               </a:rPr>
-              <a:t>+12.8%</a:t>
+              <a:t>+13.6%</a:t>
             </a:r>
           </a:p>
         </p:txBody>
@@ -3587,7 +3587,7 @@
                 </a:solidFill>
                 <a:latin typeface="Segoe UI"/>
               </a:rPr>
-              <a:t>Gold</a:t>
+              <a:t>Nvidia</a:t>
             </a:r>
           </a:p>
         </p:txBody>
@@ -3617,11 +3617,11 @@
             <a:r>
               <a:rPr sz="900" b="0">
                 <a:solidFill>
-                  <a:srgbClr val="EF4444"/>
-                </a:solidFill>
-                <a:latin typeface="Segoe UI"/>
-              </a:rPr>
-              <a:t>GC=F · RED</a:t>
+                  <a:srgbClr val="22C55E"/>
+                </a:solidFill>
+                <a:latin typeface="Segoe UI"/>
+              </a:rPr>
+              <a:t>NVDA · GREEN</a:t>
             </a:r>
           </a:p>
         </p:txBody>
@@ -3655,7 +3655,7 @@
                 </a:solidFill>
                 <a:latin typeface="Segoe UI"/>
               </a:rPr>
-              <a:t>+9.4%</a:t>
+              <a:t>+11.6%</a:t>
             </a:r>
           </a:p>
         </p:txBody>
@@ -3713,7 +3713,7 @@
                 </a:solidFill>
                 <a:latin typeface="Segoe UI"/>
               </a:rPr>
-              <a:t>Microsoft</a:t>
+              <a:t>Gold</a:t>
             </a:r>
           </a:p>
         </p:txBody>
@@ -3743,11 +3743,11 @@
             <a:r>
               <a:rPr sz="900" b="0">
                 <a:solidFill>
-                  <a:srgbClr val="22C55E"/>
-                </a:solidFill>
-                <a:latin typeface="Segoe UI"/>
-              </a:rPr>
-              <a:t>MSFT · GREEN</a:t>
+                  <a:srgbClr val="EF4444"/>
+                </a:solidFill>
+                <a:latin typeface="Segoe UI"/>
+              </a:rPr>
+              <a:t>GC=F · RED</a:t>
             </a:r>
           </a:p>
         </p:txBody>
@@ -3781,7 +3781,7 @@
                 </a:solidFill>
                 <a:latin typeface="Segoe UI"/>
               </a:rPr>
-              <a:t>+8.4%</a:t>
+              <a:t>+10.3%</a:t>
             </a:r>
           </a:p>
         </p:txBody>
@@ -3839,7 +3839,7 @@
                 </a:solidFill>
                 <a:latin typeface="Segoe UI"/>
               </a:rPr>
-              <a:t>Nvidia</a:t>
+              <a:t>US Technology</a:t>
             </a:r>
           </a:p>
         </p:txBody>
@@ -3873,7 +3873,7 @@
                 </a:solidFill>
                 <a:latin typeface="Segoe UI"/>
               </a:rPr>
-              <a:t>NVDA · GREEN</a:t>
+              <a:t>XLK · GREEN</a:t>
             </a:r>
           </a:p>
         </p:txBody>
@@ -3907,7 +3907,7 @@
                 </a:solidFill>
                 <a:latin typeface="Segoe UI"/>
               </a:rPr>
-              <a:t>+8.3%</a:t>
+              <a:t>+7.7%</a:t>
             </a:r>
           </a:p>
         </p:txBody>
@@ -3965,7 +3965,7 @@
                 </a:solidFill>
                 <a:latin typeface="Segoe UI"/>
               </a:rPr>
-              <a:t>Tesla</a:t>
+              <a:t>Microsoft</a:t>
             </a:r>
           </a:p>
         </p:txBody>
@@ -3995,11 +3995,11 @@
             <a:r>
               <a:rPr sz="900" b="0">
                 <a:solidFill>
-                  <a:srgbClr val="EF4444"/>
-                </a:solidFill>
-                <a:latin typeface="Segoe UI"/>
-              </a:rPr>
-              <a:t>TSLA · RED</a:t>
+                  <a:srgbClr val="22C55E"/>
+                </a:solidFill>
+                <a:latin typeface="Segoe UI"/>
+              </a:rPr>
+              <a:t>MSFT · GREEN</a:t>
             </a:r>
           </a:p>
         </p:txBody>
@@ -4033,7 +4033,7 @@
                 </a:solidFill>
                 <a:latin typeface="Segoe UI"/>
               </a:rPr>
-              <a:t>+6.9%</a:t>
+              <a:t>+6.0%</a:t>
             </a:r>
           </a:p>
         </p:txBody>
@@ -4251,7 +4251,7 @@
                 </a:solidFill>
                 <a:latin typeface="Segoe UI"/>
               </a:rPr>
-              <a:t>Bharti Airtel</a:t>
+              <a:t>HDFC Bank</a:t>
             </a:r>
           </a:p>
         </p:txBody>
@@ -4281,11 +4281,11 @@
             <a:r>
               <a:rPr sz="900" b="0">
                 <a:solidFill>
-                  <a:srgbClr val="F59E0B"/>
-                </a:solidFill>
-                <a:latin typeface="Segoe UI"/>
-              </a:rPr>
-              <a:t>BHARTIARTL.NS · AMBER</a:t>
+                  <a:srgbClr val="EF4444"/>
+                </a:solidFill>
+                <a:latin typeface="Segoe UI"/>
+              </a:rPr>
+              <a:t>HDFCBANK.NS · RED</a:t>
             </a:r>
           </a:p>
         </p:txBody>
@@ -4319,7 +4319,7 @@
                 </a:solidFill>
                 <a:latin typeface="Segoe UI"/>
               </a:rPr>
-              <a:t>-2.9%</a:t>
+              <a:t>-2.6%</a:t>
             </a:r>
           </a:p>
         </p:txBody>
@@ -4377,7 +4377,7 @@
                 </a:solidFill>
                 <a:latin typeface="Segoe UI"/>
               </a:rPr>
-              <a:t>HDFC Bank</a:t>
+              <a:t>Crude Oil WTI</a:t>
             </a:r>
           </a:p>
         </p:txBody>
@@ -4411,7 +4411,7 @@
                 </a:solidFill>
                 <a:latin typeface="Segoe UI"/>
               </a:rPr>
-              <a:t>HDFCBANK.NS · RED</a:t>
+              <a:t>CL=F · RED</a:t>
             </a:r>
           </a:p>
         </p:txBody>
@@ -4445,7 +4445,7 @@
                 </a:solidFill>
                 <a:latin typeface="Segoe UI"/>
               </a:rPr>
-              <a:t>-2.6%</a:t>
+              <a:t>-2.3%</a:t>
             </a:r>
           </a:p>
         </p:txBody>
@@ -4503,7 +4503,7 @@
                 </a:solidFill>
                 <a:latin typeface="Segoe UI"/>
               </a:rPr>
-              <a:t>Crude Oil WTI</a:t>
+              <a:t>Apple</a:t>
             </a:r>
           </a:p>
         </p:txBody>
@@ -4533,11 +4533,11 @@
             <a:r>
               <a:rPr sz="900" b="0">
                 <a:solidFill>
-                  <a:srgbClr val="EF4444"/>
-                </a:solidFill>
-                <a:latin typeface="Segoe UI"/>
-              </a:rPr>
-              <a:t>CL=F · RED</a:t>
+                  <a:srgbClr val="F59E0B"/>
+                </a:solidFill>
+                <a:latin typeface="Segoe UI"/>
+              </a:rPr>
+              <a:t>AAPL · AMBER</a:t>
             </a:r>
           </a:p>
         </p:txBody>
@@ -4571,7 +4571,7 @@
                 </a:solidFill>
                 <a:latin typeface="Segoe UI"/>
               </a:rPr>
-              <a:t>-1.4%</a:t>
+              <a:t>-2.1%</a:t>
             </a:r>
           </a:p>
         </p:txBody>
@@ -4629,7 +4629,7 @@
                 </a:solidFill>
                 <a:latin typeface="Segoe UI"/>
               </a:rPr>
-              <a:t>Apple</a:t>
+              <a:t>ITC</a:t>
             </a:r>
           </a:p>
         </p:txBody>
@@ -4659,11 +4659,11 @@
             <a:r>
               <a:rPr sz="900" b="0">
                 <a:solidFill>
-                  <a:srgbClr val="F59E0B"/>
-                </a:solidFill>
-                <a:latin typeface="Segoe UI"/>
-              </a:rPr>
-              <a:t>AAPL · AMBER</a:t>
+                  <a:srgbClr val="EF4444"/>
+                </a:solidFill>
+                <a:latin typeface="Segoe UI"/>
+              </a:rPr>
+              <a:t>ITC.NS · RED</a:t>
             </a:r>
           </a:p>
         </p:txBody>
@@ -4697,7 +4697,7 @@
                 </a:solidFill>
                 <a:latin typeface="Segoe UI"/>
               </a:rPr>
-              <a:t>-1.2%</a:t>
+              <a:t>-1.7%</a:t>
             </a:r>
           </a:p>
         </p:txBody>
@@ -4837,7 +4837,7 @@
         <p:spPr>
           <a:xfrm>
             <a:off x="457200" y="1188720"/>
-            <a:ext cx="11247120" cy="5544503"/>
+            <a:ext cx="11247120" cy="5493022"/>
           </a:xfrm>
           <a:prstGeom prst="rect">
             <a:avLst/>
@@ -5103,7 +5103,7 @@
                 </a:solidFill>
                 <a:latin typeface="Segoe UI"/>
               </a:rPr>
-              <a:t>Dow Jones</a:t>
+              <a:t>Nvidia</a:t>
             </a:r>
           </a:p>
         </p:txBody>
@@ -5239,7 +5239,7 @@
                 </a:solidFill>
                 <a:latin typeface="Segoe UI"/>
               </a:rPr>
-              <a:t>Russell 2000</a:t>
+              <a:t>S&amp;P 500</a:t>
             </a:r>
           </a:p>
         </p:txBody>
@@ -5307,7 +5307,7 @@
                 </a:solidFill>
                 <a:latin typeface="Segoe UI"/>
               </a:rPr>
-              <a:t>95%</a:t>
+              <a:t>82%</a:t>
             </a:r>
           </a:p>
         </p:txBody>
@@ -5375,7 +5375,7 @@
                 </a:solidFill>
                 <a:latin typeface="Segoe UI"/>
               </a:rPr>
-              <a:t>Amazon</a:t>
+              <a:t>Dow Jones</a:t>
             </a:r>
           </a:p>
         </p:txBody>
@@ -5511,7 +5511,7 @@
                 </a:solidFill>
                 <a:latin typeface="Segoe UI"/>
               </a:rPr>
-              <a:t>S&amp;P 500</a:t>
+              <a:t>US Energy</a:t>
             </a:r>
           </a:p>
         </p:txBody>
@@ -5579,7 +5579,7 @@
                 </a:solidFill>
                 <a:latin typeface="Segoe UI"/>
               </a:rPr>
-              <a:t>82%</a:t>
+              <a:t>94%</a:t>
             </a:r>
           </a:p>
         </p:txBody>
@@ -5647,7 +5647,7 @@
                 </a:solidFill>
                 <a:latin typeface="Segoe UI"/>
               </a:rPr>
-              <a:t>ICICI Bank</a:t>
+              <a:t>Russell 2000</a:t>
             </a:r>
           </a:p>
         </p:txBody>
@@ -5749,7 +5749,7 @@
                 </a:solidFill>
                 <a:latin typeface="Segoe UI"/>
               </a:rPr>
-              <a:t>above 200DMA · golden cross (50&gt;200) · MACD bearish</a:t>
+              <a:t>above 200DMA · golden cross (50&gt;200) · MACD bullish</a:t>
             </a:r>
           </a:p>
         </p:txBody>
@@ -5851,7 +5851,7 @@
                 </a:solidFill>
                 <a:latin typeface="Segoe UI"/>
               </a:rPr>
-              <a:t>80%</a:t>
+              <a:t>93%</a:t>
             </a:r>
           </a:p>
         </p:txBody>
@@ -5919,7 +5919,7 @@
                 </a:solidFill>
                 <a:latin typeface="Segoe UI"/>
               </a:rPr>
-              <a:t>Nvidia</a:t>
+              <a:t>ICICI Bank</a:t>
             </a:r>
           </a:p>
         </p:txBody>
@@ -5987,7 +5987,7 @@
                 </a:solidFill>
                 <a:latin typeface="Segoe UI"/>
               </a:rPr>
-              <a:t>92%</a:t>
+              <a:t>80%</a:t>
             </a:r>
           </a:p>
         </p:txBody>
@@ -6021,7 +6021,7 @@
                 </a:solidFill>
                 <a:latin typeface="Segoe UI"/>
               </a:rPr>
-              <a:t>above 200DMA · golden cross (50&gt;200) · MACD bullish</a:t>
+              <a:t>above 200DMA · golden cross (50&gt;200) · MACD bearish</a:t>
             </a:r>
           </a:p>
         </p:txBody>
@@ -6055,7 +6055,7 @@
                 </a:solidFill>
                 <a:latin typeface="Segoe UI"/>
               </a:rPr>
-              <a:t>Microsoft</a:t>
+              <a:t>Amazon</a:t>
             </a:r>
           </a:p>
         </p:txBody>
@@ -6089,7 +6089,7 @@
                 </a:solidFill>
                 <a:latin typeface="Segoe UI"/>
               </a:rPr>
-              <a:t>BUY</a:t>
+              <a:t>STRONG BUY</a:t>
             </a:r>
           </a:p>
         </p:txBody>
@@ -6123,7 +6123,7 @@
                 </a:solidFill>
                 <a:latin typeface="Segoe UI"/>
               </a:rPr>
-              <a:t>92%</a:t>
+              <a:t>80%</a:t>
             </a:r>
           </a:p>
         </p:txBody>
@@ -6157,7 +6157,7 @@
                 </a:solidFill>
                 <a:latin typeface="Segoe UI"/>
               </a:rPr>
-              <a:t>above 200DMA · golden cross (50&gt;200) · MACD bullish</a:t>
+              <a:t>above 200DMA · golden cross (50&gt;200) · MACD bearish</a:t>
             </a:r>
           </a:p>
         </p:txBody>
@@ -6327,7 +6327,7 @@
                 </a:solidFill>
                 <a:latin typeface="Segoe UI"/>
               </a:rPr>
-              <a:t>Straits Times</a:t>
+              <a:t>Microsoft</a:t>
             </a:r>
           </a:p>
         </p:txBody>
@@ -6395,7 +6395,7 @@
                 </a:solidFill>
                 <a:latin typeface="Segoe UI"/>
               </a:rPr>
-              <a:t>71%</a:t>
+              <a:t>91%</a:t>
             </a:r>
           </a:p>
         </p:txBody>
@@ -6429,7 +6429,7 @@
                 </a:solidFill>
                 <a:latin typeface="Segoe UI"/>
               </a:rPr>
-              <a:t>above 200DMA · golden cross (50&gt;200) · MACD bearish</a:t>
+              <a:t>above 200DMA · golden cross (50&gt;200) · MACD bullish</a:t>
             </a:r>
           </a:p>
         </p:txBody>
@@ -6463,7 +6463,7 @@
                 </a:solidFill>
                 <a:latin typeface="Segoe UI"/>
               </a:rPr>
-              <a:t>US Technology</a:t>
+              <a:t>Straits Times</a:t>
             </a:r>
           </a:p>
         </p:txBody>
@@ -6531,7 +6531,7 @@
                 </a:solidFill>
                 <a:latin typeface="Segoe UI"/>
               </a:rPr>
-              <a:t>73%</a:t>
+              <a:t>79%</a:t>
             </a:r>
           </a:p>
         </p:txBody>
@@ -6659,7 +6659,7 @@
                 </a:solidFill>
                 <a:latin typeface="Segoe UI"/>
               </a:rPr>
-              <a:t>Base currency INR · USD/INR 95.43</a:t>
+              <a:t>Base currency INR · USD/INR 95.38</a:t>
             </a:r>
           </a:p>
         </p:txBody>
@@ -7067,7 +7067,7 @@
                 </a:solidFill>
                 <a:latin typeface="Segoe UI"/>
               </a:rPr>
-              <a:t>63,553</a:t>
+              <a:t>63,353</a:t>
             </a:r>
           </a:p>
         </p:txBody>
@@ -7101,7 +7101,7 @@
                 </a:solidFill>
                 <a:latin typeface="Segoe UI"/>
               </a:rPr>
-              <a:t>Rs 606,458</a:t>
+              <a:t>Rs 604,257</a:t>
             </a:r>
           </a:p>
         </p:txBody>
@@ -7135,7 +7135,7 @@
                 </a:solidFill>
                 <a:latin typeface="Segoe UI"/>
               </a:rPr>
-              <a:t>Rs 33,908</a:t>
+              <a:t>Rs 31,978</a:t>
             </a:r>
           </a:p>
         </p:txBody>
@@ -7169,7 +7169,7 @@
                 </a:solidFill>
                 <a:latin typeface="Segoe UI"/>
               </a:rPr>
-              <a:t>+5.9%</a:t>
+              <a:t>+5.6%</a:t>
             </a:r>
           </a:p>
         </p:txBody>
@@ -7339,7 +7339,7 @@
                 </a:solidFill>
                 <a:latin typeface="Segoe UI"/>
               </a:rPr>
-              <a:t>4,431</a:t>
+              <a:t>4,467</a:t>
             </a:r>
           </a:p>
         </p:txBody>
@@ -7373,7 +7373,7 @@
                 </a:solidFill>
                 <a:latin typeface="Segoe UI"/>
               </a:rPr>
-              <a:t>Rs 422,828</a:t>
+              <a:t>Rs 426,091</a:t>
             </a:r>
           </a:p>
         </p:txBody>
@@ -7407,7 +7407,7 @@
                 </a:solidFill>
                 <a:latin typeface="Segoe UI"/>
               </a:rPr>
-              <a:t>Rs 203,351</a:t>
+              <a:t>Rs 206,717</a:t>
             </a:r>
           </a:p>
         </p:txBody>
@@ -7441,7 +7441,7 @@
                 </a:solidFill>
                 <a:latin typeface="Segoe UI"/>
               </a:rPr>
-              <a:t>+92.7%</a:t>
+              <a:t>+94.2%</a:t>
             </a:r>
           </a:p>
         </p:txBody>
@@ -7611,7 +7611,7 @@
                 </a:solidFill>
                 <a:latin typeface="Segoe UI"/>
               </a:rPr>
-              <a:t>305</a:t>
+              <a:t>302</a:t>
             </a:r>
           </a:p>
         </p:txBody>
@@ -7645,7 +7645,7 @@
                 </a:solidFill>
                 <a:latin typeface="Segoe UI"/>
               </a:rPr>
-              <a:t>Rs 290,960</a:t>
+              <a:t>Rs 288,286</a:t>
             </a:r>
           </a:p>
         </p:txBody>
@@ -7679,7 +7679,7 @@
                 </a:solidFill>
                 <a:latin typeface="Segoe UI"/>
               </a:rPr>
-              <a:t>Rs 114,424</a:t>
+              <a:t>Rs 111,833</a:t>
             </a:r>
           </a:p>
         </p:txBody>
@@ -7713,7 +7713,7 @@
                 </a:solidFill>
                 <a:latin typeface="Segoe UI"/>
               </a:rPr>
-              <a:t>+64.8%</a:t>
+              <a:t>+63.4%</a:t>
             </a:r>
           </a:p>
         </p:txBody>
@@ -7883,7 +7883,7 @@
                 </a:solidFill>
                 <a:latin typeface="Segoe UI"/>
               </a:rPr>
-              <a:t>218</a:t>
+              <a:t>224</a:t>
             </a:r>
           </a:p>
         </p:txBody>
@@ -7917,7 +7917,7 @@
                 </a:solidFill>
                 <a:latin typeface="Segoe UI"/>
               </a:rPr>
-              <a:t>Rs 166,040</a:t>
+              <a:t>Rs 170,989</a:t>
             </a:r>
           </a:p>
         </p:txBody>
@@ -7951,7 +7951,7 @@
                 </a:solidFill>
                 <a:latin typeface="Segoe UI"/>
               </a:rPr>
-              <a:t>Rs -177,491</a:t>
+              <a:t>Rs -172,378</a:t>
             </a:r>
           </a:p>
         </p:txBody>
@@ -7985,7 +7985,7 @@
                 </a:solidFill>
                 <a:latin typeface="Segoe UI"/>
               </a:rPr>
-              <a:t>-51.7%</a:t>
+              <a:t>-50.2%</a:t>
             </a:r>
           </a:p>
         </p:txBody>
@@ -8155,7 +8155,7 @@
                 </a:solidFill>
                 <a:latin typeface="Segoe UI"/>
               </a:rPr>
-              <a:t>1,191</a:t>
+              <a:t>1,176</a:t>
             </a:r>
           </a:p>
         </p:txBody>
@@ -8189,7 +8189,7 @@
                 </a:solidFill>
                 <a:latin typeface="Segoe UI"/>
               </a:rPr>
-              <a:t>Rs 95,256</a:t>
+              <a:t>Rs 94,088</a:t>
             </a:r>
           </a:p>
         </p:txBody>
@@ -8223,7 +8223,7 @@
                 </a:solidFill>
                 <a:latin typeface="Segoe UI"/>
               </a:rPr>
-              <a:t>Rs -16,744</a:t>
+              <a:t>Rs -17,912</a:t>
             </a:r>
           </a:p>
         </p:txBody>
@@ -8257,7 +8257,7 @@
                 </a:solidFill>
                 <a:latin typeface="Segoe UI"/>
               </a:rPr>
-              <a:t>-14.9%</a:t>
+              <a:t>-16.0%</a:t>
             </a:r>
           </a:p>
         </p:txBody>
@@ -8427,7 +8427,7 @@
                 </a:solidFill>
                 <a:latin typeface="Segoe UI"/>
               </a:rPr>
-              <a:t>1,324</a:t>
+              <a:t>1,329</a:t>
             </a:r>
           </a:p>
         </p:txBody>
@@ -8461,7 +8461,7 @@
                 </a:solidFill>
                 <a:latin typeface="Segoe UI"/>
               </a:rPr>
-              <a:t>Rs 66,195</a:t>
+              <a:t>Rs 66,450</a:t>
             </a:r>
           </a:p>
         </p:txBody>
@@ -8495,7 +8495,7 @@
                 </a:solidFill>
                 <a:latin typeface="Segoe UI"/>
               </a:rPr>
-              <a:t>Rs -56,305</a:t>
+              <a:t>Rs -56,050</a:t>
             </a:r>
           </a:p>
         </p:txBody>
@@ -8529,7 +8529,7 @@
                 </a:solidFill>
                 <a:latin typeface="Segoe UI"/>
               </a:rPr>
-              <a:t>-46.0%</a:t>
+              <a:t>-45.8%</a:t>
             </a:r>
           </a:p>
         </p:txBody>
@@ -8699,7 +8699,7 @@
                 </a:solidFill>
                 <a:latin typeface="Segoe UI"/>
               </a:rPr>
-              <a:t>2,446</a:t>
+              <a:t>2,350</a:t>
             </a:r>
           </a:p>
         </p:txBody>
@@ -8733,7 +8733,7 @@
                 </a:solidFill>
                 <a:latin typeface="Segoe UI"/>
               </a:rPr>
-              <a:t>Rs 61,142</a:t>
+              <a:t>Rs 58,742</a:t>
             </a:r>
           </a:p>
         </p:txBody>
@@ -8767,7 +8767,7 @@
                 </a:solidFill>
                 <a:latin typeface="Segoe UI"/>
               </a:rPr>
-              <a:t>Rs -28,858</a:t>
+              <a:t>Rs -31,258</a:t>
             </a:r>
           </a:p>
         </p:txBody>
@@ -8801,7 +8801,7 @@
                 </a:solidFill>
                 <a:latin typeface="Segoe UI"/>
               </a:rPr>
-              <a:t>-32.1%</a:t>
+              <a:t>-34.7%</a:t>
             </a:r>
           </a:p>
         </p:txBody>
@@ -9141,7 +9141,7 @@
                 </a:solidFill>
                 <a:latin typeface="Segoe UI"/>
               </a:rPr>
-              <a:t>Total Rs 1,752,619 | P&amp;L Rs 24,825 (+1.4%) | Sharpe -0.46 | Vol 17.59% | VaR95 -1.79%/day</a:t>
+              <a:t>Total Rs 1,752,643 | P&amp;L Rs 25,470 (+1.5%) | Sharpe -0.43 | Vol 17.6% | VaR95 -1.79%/day</a:t>
             </a:r>
           </a:p>
         </p:txBody>

--- a/docs/pmr_daily.pptx
+++ b/docs/pmr_daily.pptx
@@ -3197,7 +3197,7 @@
                 </a:solidFill>
                 <a:latin typeface="Segoe UI"/>
               </a:rPr>
-              <a:t>Thursday, 13 Aug 2026 07:41 SGT</a:t>
+              <a:t>Friday, 14 Aug 2026 07:41 SGT</a:t>
             </a:r>
           </a:p>
         </p:txBody>
@@ -3265,7 +3265,7 @@
                 </a:solidFill>
                 <a:latin typeface="Segoe UI"/>
               </a:rPr>
-              <a:t>RAG 14R / 13A / 19G   |   60.9% above 200DMA   |   Portfolio Rs 1,752,643 (+1.5%)</a:t>
+              <a:t>RAG 14R / 12A / 20G   |   58.7% above 200DMA   |   Portfolio Rs 1,750,635 (+1.4%)</a:t>
             </a:r>
           </a:p>
         </p:txBody>
@@ -3529,7 +3529,7 @@
                 </a:solidFill>
                 <a:latin typeface="Segoe UI"/>
               </a:rPr>
-              <a:t>+13.6%</a:t>
+              <a:t>+12.5%</a:t>
             </a:r>
           </a:p>
         </p:txBody>
@@ -3655,7 +3655,7 @@
                 </a:solidFill>
                 <a:latin typeface="Segoe UI"/>
               </a:rPr>
-              <a:t>+11.6%</a:t>
+              <a:t>+12.2%</a:t>
             </a:r>
           </a:p>
         </p:txBody>
@@ -3713,7 +3713,7 @@
                 </a:solidFill>
                 <a:latin typeface="Segoe UI"/>
               </a:rPr>
-              <a:t>Gold</a:t>
+              <a:t>Tesla</a:t>
             </a:r>
           </a:p>
         </p:txBody>
@@ -3747,7 +3747,7 @@
                 </a:solidFill>
                 <a:latin typeface="Segoe UI"/>
               </a:rPr>
-              <a:t>GC=F · RED</a:t>
+              <a:t>TSLA · RED</a:t>
             </a:r>
           </a:p>
         </p:txBody>
@@ -3781,7 +3781,7 @@
                 </a:solidFill>
                 <a:latin typeface="Segoe UI"/>
               </a:rPr>
-              <a:t>+10.3%</a:t>
+              <a:t>+9.2%</a:t>
             </a:r>
           </a:p>
         </p:txBody>
@@ -3839,7 +3839,7 @@
                 </a:solidFill>
                 <a:latin typeface="Segoe UI"/>
               </a:rPr>
-              <a:t>US Technology</a:t>
+              <a:t>Gold</a:t>
             </a:r>
           </a:p>
         </p:txBody>
@@ -3869,11 +3869,11 @@
             <a:r>
               <a:rPr sz="900" b="0">
                 <a:solidFill>
-                  <a:srgbClr val="22C55E"/>
-                </a:solidFill>
-                <a:latin typeface="Segoe UI"/>
-              </a:rPr>
-              <a:t>XLK · GREEN</a:t>
+                  <a:srgbClr val="EF4444"/>
+                </a:solidFill>
+                <a:latin typeface="Segoe UI"/>
+              </a:rPr>
+              <a:t>GC=F · RED</a:t>
             </a:r>
           </a:p>
         </p:txBody>
@@ -3907,7 +3907,7 @@
                 </a:solidFill>
                 <a:latin typeface="Segoe UI"/>
               </a:rPr>
-              <a:t>+7.7%</a:t>
+              <a:t>+9.1%</a:t>
             </a:r>
           </a:p>
         </p:txBody>
@@ -3965,7 +3965,7 @@
                 </a:solidFill>
                 <a:latin typeface="Segoe UI"/>
               </a:rPr>
-              <a:t>Microsoft</a:t>
+              <a:t>US Technology</a:t>
             </a:r>
           </a:p>
         </p:txBody>
@@ -3999,7 +3999,7 @@
                 </a:solidFill>
                 <a:latin typeface="Segoe UI"/>
               </a:rPr>
-              <a:t>MSFT · GREEN</a:t>
+              <a:t>XLK · GREEN</a:t>
             </a:r>
           </a:p>
         </p:txBody>
@@ -4033,7 +4033,7 @@
                 </a:solidFill>
                 <a:latin typeface="Segoe UI"/>
               </a:rPr>
-              <a:t>+6.0%</a:t>
+              <a:t>+8.8%</a:t>
             </a:r>
           </a:p>
         </p:txBody>
@@ -4125,7 +4125,7 @@
                 </a:solidFill>
                 <a:latin typeface="Segoe UI"/>
               </a:rPr>
-              <a:t>Alphabet</a:t>
+              <a:t>Crude Oil WTI</a:t>
             </a:r>
           </a:p>
         </p:txBody>
@@ -4155,11 +4155,11 @@
             <a:r>
               <a:rPr sz="900" b="0">
                 <a:solidFill>
-                  <a:srgbClr val="F59E0B"/>
-                </a:solidFill>
-                <a:latin typeface="Segoe UI"/>
-              </a:rPr>
-              <a:t>GOOGL · AMBER</a:t>
+                  <a:srgbClr val="EF4444"/>
+                </a:solidFill>
+                <a:latin typeface="Segoe UI"/>
+              </a:rPr>
+              <a:t>CL=F · RED</a:t>
             </a:r>
           </a:p>
         </p:txBody>
@@ -4193,7 +4193,7 @@
                 </a:solidFill>
                 <a:latin typeface="Segoe UI"/>
               </a:rPr>
-              <a:t>-3.5%</a:t>
+              <a:t>-4.1%</a:t>
             </a:r>
           </a:p>
         </p:txBody>
@@ -4319,7 +4319,7 @@
                 </a:solidFill>
                 <a:latin typeface="Segoe UI"/>
               </a:rPr>
-              <a:t>-2.6%</a:t>
+              <a:t>-3.1%</a:t>
             </a:r>
           </a:p>
         </p:txBody>
@@ -4377,7 +4377,7 @@
                 </a:solidFill>
                 <a:latin typeface="Segoe UI"/>
               </a:rPr>
-              <a:t>Crude Oil WTI</a:t>
+              <a:t>Alphabet</a:t>
             </a:r>
           </a:p>
         </p:txBody>
@@ -4407,11 +4407,11 @@
             <a:r>
               <a:rPr sz="900" b="0">
                 <a:solidFill>
-                  <a:srgbClr val="EF4444"/>
-                </a:solidFill>
-                <a:latin typeface="Segoe UI"/>
-              </a:rPr>
-              <a:t>CL=F · RED</a:t>
+                  <a:srgbClr val="F59E0B"/>
+                </a:solidFill>
+                <a:latin typeface="Segoe UI"/>
+              </a:rPr>
+              <a:t>GOOGL · AMBER</a:t>
             </a:r>
           </a:p>
         </p:txBody>
@@ -4445,7 +4445,7 @@
                 </a:solidFill>
                 <a:latin typeface="Segoe UI"/>
               </a:rPr>
-              <a:t>-2.3%</a:t>
+              <a:t>-2.7%</a:t>
             </a:r>
           </a:p>
         </p:txBody>
@@ -4503,7 +4503,7 @@
                 </a:solidFill>
                 <a:latin typeface="Segoe UI"/>
               </a:rPr>
-              <a:t>Apple</a:t>
+              <a:t>Amazon</a:t>
             </a:r>
           </a:p>
         </p:txBody>
@@ -4533,11 +4533,11 @@
             <a:r>
               <a:rPr sz="900" b="0">
                 <a:solidFill>
-                  <a:srgbClr val="F59E0B"/>
-                </a:solidFill>
-                <a:latin typeface="Segoe UI"/>
-              </a:rPr>
-              <a:t>AAPL · AMBER</a:t>
+                  <a:srgbClr val="22C55E"/>
+                </a:solidFill>
+                <a:latin typeface="Segoe UI"/>
+              </a:rPr>
+              <a:t>AMZN · GREEN</a:t>
             </a:r>
           </a:p>
         </p:txBody>
@@ -4571,7 +4571,7 @@
                 </a:solidFill>
                 <a:latin typeface="Segoe UI"/>
               </a:rPr>
-              <a:t>-2.1%</a:t>
+              <a:t>-2.4%</a:t>
             </a:r>
           </a:p>
         </p:txBody>
@@ -4837,7 +4837,7 @@
         <p:spPr>
           <a:xfrm>
             <a:off x="457200" y="1188720"/>
-            <a:ext cx="11247120" cy="5493022"/>
+            <a:ext cx="11247120" cy="5597208"/>
           </a:xfrm>
           <a:prstGeom prst="rect">
             <a:avLst/>
@@ -4967,7 +4967,7 @@
                 </a:solidFill>
                 <a:latin typeface="Segoe UI"/>
               </a:rPr>
-              <a:t>US Financials</a:t>
+              <a:t>Nvidia</a:t>
             </a:r>
           </a:p>
         </p:txBody>
@@ -5035,7 +5035,7 @@
                 </a:solidFill>
                 <a:latin typeface="Segoe UI"/>
               </a:rPr>
-              <a:t>84%</a:t>
+              <a:t>95%</a:t>
             </a:r>
           </a:p>
         </p:txBody>
@@ -5069,7 +5069,7 @@
                 </a:solidFill>
                 <a:latin typeface="Segoe UI"/>
               </a:rPr>
-              <a:t>above 200DMA · golden cross (50&gt;200) · MACD bearish</a:t>
+              <a:t>above 200DMA · golden cross (50&gt;200) · MACD bullish</a:t>
             </a:r>
           </a:p>
         </p:txBody>
@@ -5103,7 +5103,7 @@
                 </a:solidFill>
                 <a:latin typeface="Segoe UI"/>
               </a:rPr>
-              <a:t>Nvidia</a:t>
+              <a:t>Dow Jones</a:t>
             </a:r>
           </a:p>
         </p:txBody>
@@ -5239,7 +5239,7 @@
                 </a:solidFill>
                 <a:latin typeface="Segoe UI"/>
               </a:rPr>
-              <a:t>S&amp;P 500</a:t>
+              <a:t>US Energy</a:t>
             </a:r>
           </a:p>
         </p:txBody>
@@ -5307,7 +5307,7 @@
                 </a:solidFill>
                 <a:latin typeface="Segoe UI"/>
               </a:rPr>
-              <a:t>82%</a:t>
+              <a:t>94%</a:t>
             </a:r>
           </a:p>
         </p:txBody>
@@ -5375,7 +5375,7 @@
                 </a:solidFill>
                 <a:latin typeface="Segoe UI"/>
               </a:rPr>
-              <a:t>Dow Jones</a:t>
+              <a:t>Russell 2000</a:t>
             </a:r>
           </a:p>
         </p:txBody>
@@ -5443,7 +5443,7 @@
                 </a:solidFill>
                 <a:latin typeface="Segoe UI"/>
               </a:rPr>
-              <a:t>94%</a:t>
+              <a:t>81%</a:t>
             </a:r>
           </a:p>
         </p:txBody>
@@ -5511,7 +5511,7 @@
                 </a:solidFill>
                 <a:latin typeface="Segoe UI"/>
               </a:rPr>
-              <a:t>US Energy</a:t>
+              <a:t>Amazon</a:t>
             </a:r>
           </a:p>
         </p:txBody>
@@ -5579,7 +5579,7 @@
                 </a:solidFill>
                 <a:latin typeface="Segoe UI"/>
               </a:rPr>
-              <a:t>94%</a:t>
+              <a:t>81%</a:t>
             </a:r>
           </a:p>
         </p:txBody>
@@ -5613,7 +5613,7 @@
                 </a:solidFill>
                 <a:latin typeface="Segoe UI"/>
               </a:rPr>
-              <a:t>above 200DMA · golden cross (50&gt;200) · MACD bullish</a:t>
+              <a:t>above 200DMA · golden cross (50&gt;200) · MACD bearish</a:t>
             </a:r>
           </a:p>
         </p:txBody>
@@ -5647,7 +5647,7 @@
                 </a:solidFill>
                 <a:latin typeface="Segoe UI"/>
               </a:rPr>
-              <a:t>Russell 2000</a:t>
+              <a:t>US Technology</a:t>
             </a:r>
           </a:p>
         </p:txBody>
@@ -5715,7 +5715,7 @@
                 </a:solidFill>
                 <a:latin typeface="Segoe UI"/>
               </a:rPr>
-              <a:t>81%</a:t>
+              <a:t>80%</a:t>
             </a:r>
           </a:p>
         </p:txBody>
@@ -5783,7 +5783,7 @@
                 </a:solidFill>
                 <a:latin typeface="Segoe UI"/>
               </a:rPr>
-              <a:t>Copper</a:t>
+              <a:t>US Financials</a:t>
             </a:r>
           </a:p>
         </p:txBody>
@@ -5817,7 +5817,7 @@
                 </a:solidFill>
                 <a:latin typeface="Segoe UI"/>
               </a:rPr>
-              <a:t>STRONG BUY</a:t>
+              <a:t>BUY</a:t>
             </a:r>
           </a:p>
         </p:txBody>
@@ -5851,7 +5851,7 @@
                 </a:solidFill>
                 <a:latin typeface="Segoe UI"/>
               </a:rPr>
-              <a:t>93%</a:t>
+              <a:t>92%</a:t>
             </a:r>
           </a:p>
         </p:txBody>
@@ -5919,7 +5919,7 @@
                 </a:solidFill>
                 <a:latin typeface="Segoe UI"/>
               </a:rPr>
-              <a:t>ICICI Bank</a:t>
+              <a:t>DAX</a:t>
             </a:r>
           </a:p>
         </p:txBody>
@@ -5953,7 +5953,7 @@
                 </a:solidFill>
                 <a:latin typeface="Segoe UI"/>
               </a:rPr>
-              <a:t>STRONG BUY</a:t>
+              <a:t>BUY</a:t>
             </a:r>
           </a:p>
         </p:txBody>
@@ -5987,7 +5987,7 @@
                 </a:solidFill>
                 <a:latin typeface="Segoe UI"/>
               </a:rPr>
-              <a:t>80%</a:t>
+              <a:t>90%</a:t>
             </a:r>
           </a:p>
         </p:txBody>
@@ -6021,7 +6021,7 @@
                 </a:solidFill>
                 <a:latin typeface="Segoe UI"/>
               </a:rPr>
-              <a:t>above 200DMA · golden cross (50&gt;200) · MACD bearish</a:t>
+              <a:t>above 200DMA · golden cross (50&gt;200) · MACD bullish</a:t>
             </a:r>
           </a:p>
         </p:txBody>
@@ -6055,7 +6055,7 @@
                 </a:solidFill>
                 <a:latin typeface="Segoe UI"/>
               </a:rPr>
-              <a:t>Amazon</a:t>
+              <a:t>Microsoft</a:t>
             </a:r>
           </a:p>
         </p:txBody>
@@ -6089,7 +6089,7 @@
                 </a:solidFill>
                 <a:latin typeface="Segoe UI"/>
               </a:rPr>
-              <a:t>STRONG BUY</a:t>
+              <a:t>BUY</a:t>
             </a:r>
           </a:p>
         </p:txBody>
@@ -6123,7 +6123,7 @@
                 </a:solidFill>
                 <a:latin typeface="Segoe UI"/>
               </a:rPr>
-              <a:t>80%</a:t>
+              <a:t>78%</a:t>
             </a:r>
           </a:p>
         </p:txBody>
@@ -6191,7 +6191,7 @@
                 </a:solidFill>
                 <a:latin typeface="Segoe UI"/>
               </a:rPr>
-              <a:t>DAX</a:t>
+              <a:t>S&amp;P 500</a:t>
             </a:r>
           </a:p>
         </p:txBody>
@@ -6259,7 +6259,7 @@
                 </a:solidFill>
                 <a:latin typeface="Segoe UI"/>
               </a:rPr>
-              <a:t>91%</a:t>
+              <a:t>78%</a:t>
             </a:r>
           </a:p>
         </p:txBody>
@@ -6327,7 +6327,7 @@
                 </a:solidFill>
                 <a:latin typeface="Segoe UI"/>
               </a:rPr>
-              <a:t>Microsoft</a:t>
+              <a:t>Straits Times</a:t>
             </a:r>
           </a:p>
         </p:txBody>
@@ -6395,7 +6395,7 @@
                 </a:solidFill>
                 <a:latin typeface="Segoe UI"/>
               </a:rPr>
-              <a:t>91%</a:t>
+              <a:t>71%</a:t>
             </a:r>
           </a:p>
         </p:txBody>
@@ -6429,7 +6429,7 @@
                 </a:solidFill>
                 <a:latin typeface="Segoe UI"/>
               </a:rPr>
-              <a:t>above 200DMA · golden cross (50&gt;200) · MACD bullish</a:t>
+              <a:t>above 200DMA · golden cross (50&gt;200) · MACD bearish</a:t>
             </a:r>
           </a:p>
         </p:txBody>
@@ -6463,7 +6463,7 @@
                 </a:solidFill>
                 <a:latin typeface="Segoe UI"/>
               </a:rPr>
-              <a:t>Straits Times</a:t>
+              <a:t>Bharti Airtel</a:t>
             </a:r>
           </a:p>
         </p:txBody>
@@ -6531,7 +6531,7 @@
                 </a:solidFill>
                 <a:latin typeface="Segoe UI"/>
               </a:rPr>
-              <a:t>79%</a:t>
+              <a:t>73%</a:t>
             </a:r>
           </a:p>
         </p:txBody>
@@ -6565,7 +6565,7 @@
                 </a:solidFill>
                 <a:latin typeface="Segoe UI"/>
               </a:rPr>
-              <a:t>above 200DMA · golden cross (50&gt;200) · MACD bullish</a:t>
+              <a:t>above 200DMA · golden cross (50&gt;200) · MACD bearish</a:t>
             </a:r>
           </a:p>
         </p:txBody>
@@ -6659,7 +6659,7 @@
                 </a:solidFill>
                 <a:latin typeface="Segoe UI"/>
               </a:rPr>
-              <a:t>Base currency INR · USD/INR 95.38</a:t>
+              <a:t>Base currency INR · USD/INR 95.34</a:t>
             </a:r>
           </a:p>
         </p:txBody>
@@ -7067,7 +7067,7 @@
                 </a:solidFill>
                 <a:latin typeface="Segoe UI"/>
               </a:rPr>
-              <a:t>63,353</a:t>
+              <a:t>63,391</a:t>
             </a:r>
           </a:p>
         </p:txBody>
@@ -7101,7 +7101,7 @@
                 </a:solidFill>
                 <a:latin typeface="Segoe UI"/>
               </a:rPr>
-              <a:t>Rs 604,257</a:t>
+              <a:t>Rs 604,396</a:t>
             </a:r>
           </a:p>
         </p:txBody>
@@ -7135,7 +7135,7 @@
                 </a:solidFill>
                 <a:latin typeface="Segoe UI"/>
               </a:rPr>
-              <a:t>Rs 31,978</a:t>
+              <a:t>Rs 32,330</a:t>
             </a:r>
           </a:p>
         </p:txBody>
@@ -7169,7 +7169,7 @@
                 </a:solidFill>
                 <a:latin typeface="Segoe UI"/>
               </a:rPr>
-              <a:t>+5.6%</a:t>
+              <a:t>+5.7%</a:t>
             </a:r>
           </a:p>
         </p:txBody>
@@ -7339,7 +7339,7 @@
                 </a:solidFill>
                 <a:latin typeface="Segoe UI"/>
               </a:rPr>
-              <a:t>4,467</a:t>
+              <a:t>4,418</a:t>
             </a:r>
           </a:p>
         </p:txBody>
@@ -7373,7 +7373,7 @@
                 </a:solidFill>
                 <a:latin typeface="Segoe UI"/>
               </a:rPr>
-              <a:t>Rs 426,091</a:t>
+              <a:t>Rs 421,250</a:t>
             </a:r>
           </a:p>
         </p:txBody>
@@ -7407,7 +7407,7 @@
                 </a:solidFill>
                 <a:latin typeface="Segoe UI"/>
               </a:rPr>
-              <a:t>Rs 206,717</a:t>
+              <a:t>Rs 201,958</a:t>
             </a:r>
           </a:p>
         </p:txBody>
@@ -7441,7 +7441,7 @@
                 </a:solidFill>
                 <a:latin typeface="Segoe UI"/>
               </a:rPr>
-              <a:t>+94.2%</a:t>
+              <a:t>+92.1%</a:t>
             </a:r>
           </a:p>
         </p:txBody>
@@ -7611,7 +7611,7 @@
                 </a:solidFill>
                 <a:latin typeface="Segoe UI"/>
               </a:rPr>
-              <a:t>302</a:t>
+              <a:t>305</a:t>
             </a:r>
           </a:p>
         </p:txBody>
@@ -7645,7 +7645,7 @@
                 </a:solidFill>
                 <a:latin typeface="Segoe UI"/>
               </a:rPr>
-              <a:t>Rs 288,286</a:t>
+              <a:t>Rs 291,048</a:t>
             </a:r>
           </a:p>
         </p:txBody>
@@ -7679,7 +7679,7 @@
                 </a:solidFill>
                 <a:latin typeface="Segoe UI"/>
               </a:rPr>
-              <a:t>Rs 111,833</a:t>
+              <a:t>Rs 114,661</a:t>
             </a:r>
           </a:p>
         </p:txBody>
@@ -7713,7 +7713,7 @@
                 </a:solidFill>
                 <a:latin typeface="Segoe UI"/>
               </a:rPr>
-              <a:t>+63.4%</a:t>
+              <a:t>+65.0%</a:t>
             </a:r>
           </a:p>
         </p:txBody>
@@ -7883,7 +7883,7 @@
                 </a:solidFill>
                 <a:latin typeface="Segoe UI"/>
               </a:rPr>
-              <a:t>224</a:t>
+              <a:t>225</a:t>
             </a:r>
           </a:p>
         </p:txBody>
@@ -7917,7 +7917,7 @@
                 </a:solidFill>
                 <a:latin typeface="Segoe UI"/>
               </a:rPr>
-              <a:t>Rs 170,989</a:t>
+              <a:t>Rs 171,849</a:t>
             </a:r>
           </a:p>
         </p:txBody>
@@ -7951,7 +7951,7 @@
                 </a:solidFill>
                 <a:latin typeface="Segoe UI"/>
               </a:rPr>
-              <a:t>Rs -172,378</a:t>
+              <a:t>Rs -171,391</a:t>
             </a:r>
           </a:p>
         </p:txBody>
@@ -7985,7 +7985,7 @@
                 </a:solidFill>
                 <a:latin typeface="Segoe UI"/>
               </a:rPr>
-              <a:t>-50.2%</a:t>
+              <a:t>-49.9%</a:t>
             </a:r>
           </a:p>
         </p:txBody>
@@ -8155,7 +8155,7 @@
                 </a:solidFill>
                 <a:latin typeface="Segoe UI"/>
               </a:rPr>
-              <a:t>1,176</a:t>
+              <a:t>1,175</a:t>
             </a:r>
           </a:p>
         </p:txBody>
@@ -8189,7 +8189,7 @@
                 </a:solidFill>
                 <a:latin typeface="Segoe UI"/>
               </a:rPr>
-              <a:t>Rs 94,088</a:t>
+              <a:t>Rs 94,000</a:t>
             </a:r>
           </a:p>
         </p:txBody>
@@ -8223,7 +8223,7 @@
                 </a:solidFill>
                 <a:latin typeface="Segoe UI"/>
               </a:rPr>
-              <a:t>Rs -17,912</a:t>
+              <a:t>Rs -18,000</a:t>
             </a:r>
           </a:p>
         </p:txBody>
@@ -8257,7 +8257,7 @@
                 </a:solidFill>
                 <a:latin typeface="Segoe UI"/>
               </a:rPr>
-              <a:t>-16.0%</a:t>
+              <a:t>-16.1%</a:t>
             </a:r>
           </a:p>
         </p:txBody>
@@ -8427,7 +8427,7 @@
                 </a:solidFill>
                 <a:latin typeface="Segoe UI"/>
               </a:rPr>
-              <a:t>1,329</a:t>
+              <a:t>1,317</a:t>
             </a:r>
           </a:p>
         </p:txBody>
@@ -8461,7 +8461,7 @@
                 </a:solidFill>
                 <a:latin typeface="Segoe UI"/>
               </a:rPr>
-              <a:t>Rs 66,450</a:t>
+              <a:t>Rs 65,850</a:t>
             </a:r>
           </a:p>
         </p:txBody>
@@ -8495,7 +8495,7 @@
                 </a:solidFill>
                 <a:latin typeface="Segoe UI"/>
               </a:rPr>
-              <a:t>Rs -56,050</a:t>
+              <a:t>Rs -56,650</a:t>
             </a:r>
           </a:p>
         </p:txBody>
@@ -8529,7 +8529,7 @@
                 </a:solidFill>
                 <a:latin typeface="Segoe UI"/>
               </a:rPr>
-              <a:t>-45.8%</a:t>
+              <a:t>-46.2%</a:t>
             </a:r>
           </a:p>
         </p:txBody>
@@ -8971,7 +8971,7 @@
                 </a:solidFill>
                 <a:latin typeface="Segoe UI"/>
               </a:rPr>
-              <a:t>729</a:t>
+              <a:t>725</a:t>
             </a:r>
           </a:p>
         </p:txBody>
@@ -9005,7 +9005,7 @@
                 </a:solidFill>
                 <a:latin typeface="Segoe UI"/>
               </a:rPr>
-              <a:t>Rs 43,740</a:t>
+              <a:t>Rs 43,500</a:t>
             </a:r>
           </a:p>
         </p:txBody>
@@ -9039,7 +9039,7 @@
                 </a:solidFill>
                 <a:latin typeface="Segoe UI"/>
               </a:rPr>
-              <a:t>Rs -47,460</a:t>
+              <a:t>Rs -47,700</a:t>
             </a:r>
           </a:p>
         </p:txBody>
@@ -9073,7 +9073,7 @@
                 </a:solidFill>
                 <a:latin typeface="Segoe UI"/>
               </a:rPr>
-              <a:t>-52.0%</a:t>
+              <a:t>-52.3%</a:t>
             </a:r>
           </a:p>
         </p:txBody>
@@ -9141,7 +9141,7 @@
                 </a:solidFill>
                 <a:latin typeface="Segoe UI"/>
               </a:rPr>
-              <a:t>Total Rs 1,752,643 | P&amp;L Rs 25,470 (+1.5%) | Sharpe -0.43 | Vol 17.6% | VaR95 -1.79%/day</a:t>
+              <a:t>Total Rs 1,750,635 | P&amp;L Rs 23,951 (+1.4%) | Sharpe -0.37 | Vol 17.57% | VaR95 -1.79%/day</a:t>
             </a:r>
           </a:p>
         </p:txBody>

--- a/docs/pmr_daily.pptx
+++ b/docs/pmr_daily.pptx
@@ -3197,7 +3197,7 @@
                 </a:solidFill>
                 <a:latin typeface="Segoe UI"/>
               </a:rPr>
-              <a:t>Friday, 14 Aug 2026 07:41 SGT</a:t>
+              <a:t>Monday, 17 Aug 2026 07:20 SGT</a:t>
             </a:r>
           </a:p>
         </p:txBody>
@@ -3265,7 +3265,7 @@
                 </a:solidFill>
                 <a:latin typeface="Segoe UI"/>
               </a:rPr>
-              <a:t>RAG 14R / 12A / 20G   |   58.7% above 200DMA   |   Portfolio Rs 1,750,635 (+1.4%)</a:t>
+              <a:t>RAG 14R / 12A / 20G   |   58.7% above 200DMA   |   Portfolio Rs 1,748,267 (+1.2%)</a:t>
             </a:r>
           </a:p>
         </p:txBody>
@@ -3529,7 +3529,7 @@
                 </a:solidFill>
                 <a:latin typeface="Segoe UI"/>
               </a:rPr>
-              <a:t>+12.5%</a:t>
+              <a:t>+13.4%</a:t>
             </a:r>
           </a:p>
         </p:txBody>
@@ -3781,7 +3781,7 @@
                 </a:solidFill>
                 <a:latin typeface="Segoe UI"/>
               </a:rPr>
-              <a:t>+9.2%</a:t>
+              <a:t>+10.0%</a:t>
             </a:r>
           </a:p>
         </p:txBody>
@@ -3907,7 +3907,7 @@
                 </a:solidFill>
                 <a:latin typeface="Segoe UI"/>
               </a:rPr>
-              <a:t>+9.1%</a:t>
+              <a:t>+9.6%</a:t>
             </a:r>
           </a:p>
         </p:txBody>
@@ -4033,7 +4033,7 @@
                 </a:solidFill>
                 <a:latin typeface="Segoe UI"/>
               </a:rPr>
-              <a:t>+8.8%</a:t>
+              <a:t>+8.4%</a:t>
             </a:r>
           </a:p>
         </p:txBody>
@@ -4125,7 +4125,7 @@
                 </a:solidFill>
                 <a:latin typeface="Segoe UI"/>
               </a:rPr>
-              <a:t>Crude Oil WTI</a:t>
+              <a:t>Amazon</a:t>
             </a:r>
           </a:p>
         </p:txBody>
@@ -4155,11 +4155,11 @@
             <a:r>
               <a:rPr sz="900" b="0">
                 <a:solidFill>
-                  <a:srgbClr val="EF4444"/>
-                </a:solidFill>
-                <a:latin typeface="Segoe UI"/>
-              </a:rPr>
-              <a:t>CL=F · RED</a:t>
+                  <a:srgbClr val="22C55E"/>
+                </a:solidFill>
+                <a:latin typeface="Segoe UI"/>
+              </a:rPr>
+              <a:t>AMZN · GREEN</a:t>
             </a:r>
           </a:p>
         </p:txBody>
@@ -4193,7 +4193,7 @@
                 </a:solidFill>
                 <a:latin typeface="Segoe UI"/>
               </a:rPr>
-              <a:t>-4.1%</a:t>
+              <a:t>-3.3%</a:t>
             </a:r>
           </a:p>
         </p:txBody>
@@ -4251,7 +4251,7 @@
                 </a:solidFill>
                 <a:latin typeface="Segoe UI"/>
               </a:rPr>
-              <a:t>HDFC Bank</a:t>
+              <a:t>Hang Seng</a:t>
             </a:r>
           </a:p>
         </p:txBody>
@@ -4281,11 +4281,11 @@
             <a:r>
               <a:rPr sz="900" b="0">
                 <a:solidFill>
-                  <a:srgbClr val="EF4444"/>
-                </a:solidFill>
-                <a:latin typeface="Segoe UI"/>
-              </a:rPr>
-              <a:t>HDFCBANK.NS · RED</a:t>
+                  <a:srgbClr val="F59E0B"/>
+                </a:solidFill>
+                <a:latin typeface="Segoe UI"/>
+              </a:rPr>
+              <a:t>^HSI · AMBER</a:t>
             </a:r>
           </a:p>
         </p:txBody>
@@ -4319,7 +4319,7 @@
                 </a:solidFill>
                 <a:latin typeface="Segoe UI"/>
               </a:rPr>
-              <a:t>-3.1%</a:t>
+              <a:t>-3.0%</a:t>
             </a:r>
           </a:p>
         </p:txBody>
@@ -4445,7 +4445,7 @@
                 </a:solidFill>
                 <a:latin typeface="Segoe UI"/>
               </a:rPr>
-              <a:t>-2.7%</a:t>
+              <a:t>-2.9%</a:t>
             </a:r>
           </a:p>
         </p:txBody>
@@ -4503,7 +4503,7 @@
                 </a:solidFill>
                 <a:latin typeface="Segoe UI"/>
               </a:rPr>
-              <a:t>Amazon</a:t>
+              <a:t>HDFC Bank</a:t>
             </a:r>
           </a:p>
         </p:txBody>
@@ -4533,11 +4533,11 @@
             <a:r>
               <a:rPr sz="900" b="0">
                 <a:solidFill>
-                  <a:srgbClr val="22C55E"/>
-                </a:solidFill>
-                <a:latin typeface="Segoe UI"/>
-              </a:rPr>
-              <a:t>AMZN · GREEN</a:t>
+                  <a:srgbClr val="EF4444"/>
+                </a:solidFill>
+                <a:latin typeface="Segoe UI"/>
+              </a:rPr>
+              <a:t>HDFCBANK.NS · RED</a:t>
             </a:r>
           </a:p>
         </p:txBody>
@@ -4571,7 +4571,7 @@
                 </a:solidFill>
                 <a:latin typeface="Segoe UI"/>
               </a:rPr>
-              <a:t>-2.4%</a:t>
+              <a:t>-2.8%</a:t>
             </a:r>
           </a:p>
         </p:txBody>
@@ -4629,7 +4629,7 @@
                 </a:solidFill>
                 <a:latin typeface="Segoe UI"/>
               </a:rPr>
-              <a:t>ITC</a:t>
+              <a:t>Crude Oil WTI</a:t>
             </a:r>
           </a:p>
         </p:txBody>
@@ -4663,7 +4663,7 @@
                 </a:solidFill>
                 <a:latin typeface="Segoe UI"/>
               </a:rPr>
-              <a:t>ITC.NS · RED</a:t>
+              <a:t>CL=F · RED</a:t>
             </a:r>
           </a:p>
         </p:txBody>
@@ -4697,7 +4697,7 @@
                 </a:solidFill>
                 <a:latin typeface="Segoe UI"/>
               </a:rPr>
-              <a:t>-1.7%</a:t>
+              <a:t>-2.7%</a:t>
             </a:r>
           </a:p>
         </p:txBody>
@@ -4837,7 +4837,7 @@
         <p:spPr>
           <a:xfrm>
             <a:off x="457200" y="1188720"/>
-            <a:ext cx="11247120" cy="5597208"/>
+            <a:ext cx="11247120" cy="5544503"/>
           </a:xfrm>
           <a:prstGeom prst="rect">
             <a:avLst/>
@@ -4967,7 +4967,7 @@
                 </a:solidFill>
                 <a:latin typeface="Segoe UI"/>
               </a:rPr>
-              <a:t>Nvidia</a:t>
+              <a:t>Bharti Airtel</a:t>
             </a:r>
           </a:p>
         </p:txBody>
@@ -5103,7 +5103,7 @@
                 </a:solidFill>
                 <a:latin typeface="Segoe UI"/>
               </a:rPr>
-              <a:t>Dow Jones</a:t>
+              <a:t>Nvidia</a:t>
             </a:r>
           </a:p>
         </p:txBody>
@@ -5239,7 +5239,7 @@
                 </a:solidFill>
                 <a:latin typeface="Segoe UI"/>
               </a:rPr>
-              <a:t>US Energy</a:t>
+              <a:t>US Financials</a:t>
             </a:r>
           </a:p>
         </p:txBody>
@@ -5307,7 +5307,7 @@
                 </a:solidFill>
                 <a:latin typeface="Segoe UI"/>
               </a:rPr>
-              <a:t>94%</a:t>
+              <a:t>84%</a:t>
             </a:r>
           </a:p>
         </p:txBody>
@@ -5341,7 +5341,7 @@
                 </a:solidFill>
                 <a:latin typeface="Segoe UI"/>
               </a:rPr>
-              <a:t>above 200DMA · golden cross (50&gt;200) · MACD bullish</a:t>
+              <a:t>above 200DMA · golden cross (50&gt;200) · MACD bearish</a:t>
             </a:r>
           </a:p>
         </p:txBody>
@@ -5443,7 +5443,7 @@
                 </a:solidFill>
                 <a:latin typeface="Segoe UI"/>
               </a:rPr>
-              <a:t>81%</a:t>
+              <a:t>95%</a:t>
             </a:r>
           </a:p>
         </p:txBody>
@@ -5511,7 +5511,7 @@
                 </a:solidFill>
                 <a:latin typeface="Segoe UI"/>
               </a:rPr>
-              <a:t>Amazon</a:t>
+              <a:t>Dow Jones</a:t>
             </a:r>
           </a:p>
         </p:txBody>
@@ -5647,7 +5647,7 @@
                 </a:solidFill>
                 <a:latin typeface="Segoe UI"/>
               </a:rPr>
-              <a:t>US Technology</a:t>
+              <a:t>Amazon</a:t>
             </a:r>
           </a:p>
         </p:txBody>
@@ -5749,7 +5749,7 @@
                 </a:solidFill>
                 <a:latin typeface="Segoe UI"/>
               </a:rPr>
-              <a:t>above 200DMA · golden cross (50&gt;200) · MACD bullish</a:t>
+              <a:t>above 200DMA · golden cross (50&gt;200) · MACD bearish</a:t>
             </a:r>
           </a:p>
         </p:txBody>
@@ -5783,7 +5783,7 @@
                 </a:solidFill>
                 <a:latin typeface="Segoe UI"/>
               </a:rPr>
-              <a:t>US Financials</a:t>
+              <a:t>US Energy</a:t>
             </a:r>
           </a:p>
         </p:txBody>
@@ -5851,7 +5851,7 @@
                 </a:solidFill>
                 <a:latin typeface="Segoe UI"/>
               </a:rPr>
-              <a:t>92%</a:t>
+              <a:t>93%</a:t>
             </a:r>
           </a:p>
         </p:txBody>
@@ -5919,7 +5919,7 @@
                 </a:solidFill>
                 <a:latin typeface="Segoe UI"/>
               </a:rPr>
-              <a:t>DAX</a:t>
+              <a:t>Microsoft</a:t>
             </a:r>
           </a:p>
         </p:txBody>
@@ -5987,7 +5987,7 @@
                 </a:solidFill>
                 <a:latin typeface="Segoe UI"/>
               </a:rPr>
-              <a:t>90%</a:t>
+              <a:t>78%</a:t>
             </a:r>
           </a:p>
         </p:txBody>
@@ -6021,7 +6021,7 @@
                 </a:solidFill>
                 <a:latin typeface="Segoe UI"/>
               </a:rPr>
-              <a:t>above 200DMA · golden cross (50&gt;200) · MACD bullish</a:t>
+              <a:t>above 200DMA · golden cross (50&gt;200) · MACD bearish</a:t>
             </a:r>
           </a:p>
         </p:txBody>
@@ -6055,7 +6055,7 @@
                 </a:solidFill>
                 <a:latin typeface="Segoe UI"/>
               </a:rPr>
-              <a:t>Microsoft</a:t>
+              <a:t>DAX</a:t>
             </a:r>
           </a:p>
         </p:txBody>
@@ -6123,7 +6123,7 @@
                 </a:solidFill>
                 <a:latin typeface="Segoe UI"/>
               </a:rPr>
-              <a:t>78%</a:t>
+              <a:t>77%</a:t>
             </a:r>
           </a:p>
         </p:txBody>
@@ -6191,7 +6191,7 @@
                 </a:solidFill>
                 <a:latin typeface="Segoe UI"/>
               </a:rPr>
-              <a:t>S&amp;P 500</a:t>
+              <a:t>Straits Times</a:t>
             </a:r>
           </a:p>
         </p:txBody>
@@ -6259,7 +6259,7 @@
                 </a:solidFill>
                 <a:latin typeface="Segoe UI"/>
               </a:rPr>
-              <a:t>78%</a:t>
+              <a:t>71%</a:t>
             </a:r>
           </a:p>
         </p:txBody>
@@ -6293,7 +6293,7 @@
                 </a:solidFill>
                 <a:latin typeface="Segoe UI"/>
               </a:rPr>
-              <a:t>above 200DMA · golden cross (50&gt;200) · MACD bullish</a:t>
+              <a:t>above 200DMA · golden cross (50&gt;200) · MACD bearish</a:t>
             </a:r>
           </a:p>
         </p:txBody>
@@ -6327,7 +6327,7 @@
                 </a:solidFill>
                 <a:latin typeface="Segoe UI"/>
               </a:rPr>
-              <a:t>Straits Times</a:t>
+              <a:t>S&amp;P 500</a:t>
             </a:r>
           </a:p>
         </p:txBody>
@@ -6395,7 +6395,7 @@
                 </a:solidFill>
                 <a:latin typeface="Segoe UI"/>
               </a:rPr>
-              <a:t>71%</a:t>
+              <a:t>76%</a:t>
             </a:r>
           </a:p>
         </p:txBody>
@@ -6429,7 +6429,7 @@
                 </a:solidFill>
                 <a:latin typeface="Segoe UI"/>
               </a:rPr>
-              <a:t>above 200DMA · golden cross (50&gt;200) · MACD bearish</a:t>
+              <a:t>above 200DMA · golden cross (50&gt;200) · MACD bullish</a:t>
             </a:r>
           </a:p>
         </p:txBody>
@@ -6463,7 +6463,7 @@
                 </a:solidFill>
                 <a:latin typeface="Segoe UI"/>
               </a:rPr>
-              <a:t>Bharti Airtel</a:t>
+              <a:t>ICICI Bank</a:t>
             </a:r>
           </a:p>
         </p:txBody>
@@ -6531,7 +6531,7 @@
                 </a:solidFill>
                 <a:latin typeface="Segoe UI"/>
               </a:rPr>
-              <a:t>73%</a:t>
+              <a:t>80%</a:t>
             </a:r>
           </a:p>
         </p:txBody>
@@ -6659,7 +6659,7 @@
                 </a:solidFill>
                 <a:latin typeface="Segoe UI"/>
               </a:rPr>
-              <a:t>Base currency INR · USD/INR 95.34</a:t>
+              <a:t>Base currency INR · USD/INR 95.42</a:t>
             </a:r>
           </a:p>
         </p:txBody>
@@ -7067,7 +7067,7 @@
                 </a:solidFill>
                 <a:latin typeface="Segoe UI"/>
               </a:rPr>
-              <a:t>63,391</a:t>
+              <a:t>62,806</a:t>
             </a:r>
           </a:p>
         </p:txBody>
@@ -7101,7 +7101,7 @@
                 </a:solidFill>
                 <a:latin typeface="Segoe UI"/>
               </a:rPr>
-              <a:t>Rs 604,396</a:t>
+              <a:t>Rs 599,266</a:t>
             </a:r>
           </a:p>
         </p:txBody>
@@ -7135,7 +7135,7 @@
                 </a:solidFill>
                 <a:latin typeface="Segoe UI"/>
               </a:rPr>
-              <a:t>Rs 32,330</a:t>
+              <a:t>Rs 26,776</a:t>
             </a:r>
           </a:p>
         </p:txBody>
@@ -7169,7 +7169,7 @@
                 </a:solidFill>
                 <a:latin typeface="Segoe UI"/>
               </a:rPr>
-              <a:t>+5.7%</a:t>
+              <a:t>+4.7%</a:t>
             </a:r>
           </a:p>
         </p:txBody>
@@ -7339,7 +7339,7 @@
                 </a:solidFill>
                 <a:latin typeface="Segoe UI"/>
               </a:rPr>
-              <a:t>4,418</a:t>
+              <a:t>4,439</a:t>
             </a:r>
           </a:p>
         </p:txBody>
@@ -7373,7 +7373,7 @@
                 </a:solidFill>
                 <a:latin typeface="Segoe UI"/>
               </a:rPr>
-              <a:t>Rs 421,250</a:t>
+              <a:t>Rs 423,547</a:t>
             </a:r>
           </a:p>
         </p:txBody>
@@ -7407,7 +7407,7 @@
                 </a:solidFill>
                 <a:latin typeface="Segoe UI"/>
               </a:rPr>
-              <a:t>Rs 201,958</a:t>
+              <a:t>Rs 204,093</a:t>
             </a:r>
           </a:p>
         </p:txBody>
@@ -7441,7 +7441,7 @@
                 </a:solidFill>
                 <a:latin typeface="Segoe UI"/>
               </a:rPr>
-              <a:t>+92.1%</a:t>
+              <a:t>+93.0%</a:t>
             </a:r>
           </a:p>
         </p:txBody>
@@ -7611,7 +7611,7 @@
                 </a:solidFill>
                 <a:latin typeface="Segoe UI"/>
               </a:rPr>
-              <a:t>305</a:t>
+              <a:t>306</a:t>
             </a:r>
           </a:p>
         </p:txBody>
@@ -7645,7 +7645,7 @@
                 </a:solidFill>
                 <a:latin typeface="Segoe UI"/>
               </a:rPr>
-              <a:t>Rs 291,048</a:t>
+              <a:t>Rs 291,903</a:t>
             </a:r>
           </a:p>
         </p:txBody>
@@ -7679,7 +7679,7 @@
                 </a:solidFill>
                 <a:latin typeface="Segoe UI"/>
               </a:rPr>
-              <a:t>Rs 114,661</a:t>
+              <a:t>Rs 115,385</a:t>
             </a:r>
           </a:p>
         </p:txBody>
@@ -7713,7 +7713,7 @@
                 </a:solidFill>
                 <a:latin typeface="Segoe UI"/>
               </a:rPr>
-              <a:t>+65.0%</a:t>
+              <a:t>+65.4%</a:t>
             </a:r>
           </a:p>
         </p:txBody>
@@ -7917,7 +7917,7 @@
                 </a:solidFill>
                 <a:latin typeface="Segoe UI"/>
               </a:rPr>
-              <a:t>Rs 171,849</a:t>
+              <a:t>Rs 171,869</a:t>
             </a:r>
           </a:p>
         </p:txBody>
@@ -7951,7 +7951,7 @@
                 </a:solidFill>
                 <a:latin typeface="Segoe UI"/>
               </a:rPr>
-              <a:t>Rs -171,391</a:t>
+              <a:t>Rs -171,625</a:t>
             </a:r>
           </a:p>
         </p:txBody>
@@ -7985,7 +7985,7 @@
                 </a:solidFill>
                 <a:latin typeface="Segoe UI"/>
               </a:rPr>
-              <a:t>-49.9%</a:t>
+              <a:t>-50.0%</a:t>
             </a:r>
           </a:p>
         </p:txBody>
@@ -8155,7 +8155,7 @@
                 </a:solidFill>
                 <a:latin typeface="Segoe UI"/>
               </a:rPr>
-              <a:t>1,175</a:t>
+              <a:t>1,169</a:t>
             </a:r>
           </a:p>
         </p:txBody>
@@ -8189,7 +8189,7 @@
                 </a:solidFill>
                 <a:latin typeface="Segoe UI"/>
               </a:rPr>
-              <a:t>Rs 94,000</a:t>
+              <a:t>Rs 93,536</a:t>
             </a:r>
           </a:p>
         </p:txBody>
@@ -8223,7 +8223,7 @@
                 </a:solidFill>
                 <a:latin typeface="Segoe UI"/>
               </a:rPr>
-              <a:t>Rs -18,000</a:t>
+              <a:t>Rs -18,464</a:t>
             </a:r>
           </a:p>
         </p:txBody>
@@ -8257,7 +8257,7 @@
                 </a:solidFill>
                 <a:latin typeface="Segoe UI"/>
               </a:rPr>
-              <a:t>-16.1%</a:t>
+              <a:t>-16.5%</a:t>
             </a:r>
           </a:p>
         </p:txBody>
@@ -8427,7 +8427,7 @@
                 </a:solidFill>
                 <a:latin typeface="Segoe UI"/>
               </a:rPr>
-              <a:t>1,317</a:t>
+              <a:t>1,310</a:t>
             </a:r>
           </a:p>
         </p:txBody>
@@ -8461,7 +8461,7 @@
                 </a:solidFill>
                 <a:latin typeface="Segoe UI"/>
               </a:rPr>
-              <a:t>Rs 65,850</a:t>
+              <a:t>Rs 65,500</a:t>
             </a:r>
           </a:p>
         </p:txBody>
@@ -8495,7 +8495,7 @@
                 </a:solidFill>
                 <a:latin typeface="Segoe UI"/>
               </a:rPr>
-              <a:t>Rs -56,650</a:t>
+              <a:t>Rs -57,000</a:t>
             </a:r>
           </a:p>
         </p:txBody>
@@ -8529,7 +8529,7 @@
                 </a:solidFill>
                 <a:latin typeface="Segoe UI"/>
               </a:rPr>
-              <a:t>-46.2%</a:t>
+              <a:t>-46.5%</a:t>
             </a:r>
           </a:p>
         </p:txBody>
@@ -8699,7 +8699,7 @@
                 </a:solidFill>
                 <a:latin typeface="Segoe UI"/>
               </a:rPr>
-              <a:t>2,350</a:t>
+              <a:t>2,361</a:t>
             </a:r>
           </a:p>
         </p:txBody>
@@ -8733,7 +8733,7 @@
                 </a:solidFill>
                 <a:latin typeface="Segoe UI"/>
               </a:rPr>
-              <a:t>Rs 58,742</a:t>
+              <a:t>Rs 59,025</a:t>
             </a:r>
           </a:p>
         </p:txBody>
@@ -8767,7 +8767,7 @@
                 </a:solidFill>
                 <a:latin typeface="Segoe UI"/>
               </a:rPr>
-              <a:t>Rs -31,258</a:t>
+              <a:t>Rs -30,975</a:t>
             </a:r>
           </a:p>
         </p:txBody>
@@ -8801,7 +8801,7 @@
                 </a:solidFill>
                 <a:latin typeface="Segoe UI"/>
               </a:rPr>
-              <a:t>-34.7%</a:t>
+              <a:t>-34.4%</a:t>
             </a:r>
           </a:p>
         </p:txBody>
@@ -8971,7 +8971,7 @@
                 </a:solidFill>
                 <a:latin typeface="Segoe UI"/>
               </a:rPr>
-              <a:t>725</a:t>
+              <a:t>727</a:t>
             </a:r>
           </a:p>
         </p:txBody>
@@ -9005,7 +9005,7 @@
                 </a:solidFill>
                 <a:latin typeface="Segoe UI"/>
               </a:rPr>
-              <a:t>Rs 43,500</a:t>
+              <a:t>Rs 43,620</a:t>
             </a:r>
           </a:p>
         </p:txBody>
@@ -9039,7 +9039,7 @@
                 </a:solidFill>
                 <a:latin typeface="Segoe UI"/>
               </a:rPr>
-              <a:t>Rs -47,700</a:t>
+              <a:t>Rs -47,580</a:t>
             </a:r>
           </a:p>
         </p:txBody>
@@ -9073,7 +9073,7 @@
                 </a:solidFill>
                 <a:latin typeface="Segoe UI"/>
               </a:rPr>
-              <a:t>-52.3%</a:t>
+              <a:t>-52.2%</a:t>
             </a:r>
           </a:p>
         </p:txBody>
@@ -9141,7 +9141,7 @@
                 </a:solidFill>
                 <a:latin typeface="Segoe UI"/>
               </a:rPr>
-              <a:t>Total Rs 1,750,635 | P&amp;L Rs 23,951 (+1.4%) | Sharpe -0.37 | Vol 17.57% | VaR95 -1.79%/day</a:t>
+              <a:t>Total Rs 1,748,267 | P&amp;L Rs 20,610 (+1.2%) | Sharpe -0.4 | Vol 17.52% | VaR95 -1.79%/day</a:t>
             </a:r>
           </a:p>
         </p:txBody>

--- a/docs/pmr_daily.pptx
+++ b/docs/pmr_daily.pptx
@@ -3197,7 +3197,7 @@
                 </a:solidFill>
                 <a:latin typeface="Segoe UI"/>
               </a:rPr>
-              <a:t>Monday, 17 Aug 2026 07:20 SGT</a:t>
+              <a:t>Tuesday, 18 Aug 2026 07:23 SGT</a:t>
             </a:r>
           </a:p>
         </p:txBody>
@@ -3265,7 +3265,7 @@
                 </a:solidFill>
                 <a:latin typeface="Segoe UI"/>
               </a:rPr>
-              <a:t>RAG 14R / 12A / 20G   |   58.7% above 200DMA   |   Portfolio Rs 1,748,267 (+1.2%)</a:t>
+              <a:t>RAG 15R / 12A / 19G   |   58.7% above 200DMA   |   Portfolio Rs 1,765,924 (+2.2%)</a:t>
             </a:r>
           </a:p>
         </p:txBody>
@@ -3529,7 +3529,7 @@
                 </a:solidFill>
                 <a:latin typeface="Segoe UI"/>
               </a:rPr>
-              <a:t>+13.4%</a:t>
+              <a:t>+14.3%</a:t>
             </a:r>
           </a:p>
         </p:txBody>
@@ -3655,7 +3655,7 @@
                 </a:solidFill>
                 <a:latin typeface="Segoe UI"/>
               </a:rPr>
-              <a:t>+12.2%</a:t>
+              <a:t>+12.1%</a:t>
             </a:r>
           </a:p>
         </p:txBody>
@@ -3713,7 +3713,7 @@
                 </a:solidFill>
                 <a:latin typeface="Segoe UI"/>
               </a:rPr>
-              <a:t>Tesla</a:t>
+              <a:t>Gold</a:t>
             </a:r>
           </a:p>
         </p:txBody>
@@ -3747,7 +3747,7 @@
                 </a:solidFill>
                 <a:latin typeface="Segoe UI"/>
               </a:rPr>
-              <a:t>TSLA · RED</a:t>
+              <a:t>GC=F · RED</a:t>
             </a:r>
           </a:p>
         </p:txBody>
@@ -3781,7 +3781,7 @@
                 </a:solidFill>
                 <a:latin typeface="Segoe UI"/>
               </a:rPr>
-              <a:t>+10.0%</a:t>
+              <a:t>+10.4%</a:t>
             </a:r>
           </a:p>
         </p:txBody>
@@ -3839,7 +3839,7 @@
                 </a:solidFill>
                 <a:latin typeface="Segoe UI"/>
               </a:rPr>
-              <a:t>Gold</a:t>
+              <a:t>Tesla</a:t>
             </a:r>
           </a:p>
         </p:txBody>
@@ -3873,7 +3873,7 @@
                 </a:solidFill>
                 <a:latin typeface="Segoe UI"/>
               </a:rPr>
-              <a:t>GC=F · RED</a:t>
+              <a:t>TSLA · RED</a:t>
             </a:r>
           </a:p>
         </p:txBody>
@@ -3907,7 +3907,7 @@
                 </a:solidFill>
                 <a:latin typeface="Segoe UI"/>
               </a:rPr>
-              <a:t>+9.6%</a:t>
+              <a:t>+9.0%</a:t>
             </a:r>
           </a:p>
         </p:txBody>
@@ -4033,7 +4033,7 @@
                 </a:solidFill>
                 <a:latin typeface="Segoe UI"/>
               </a:rPr>
-              <a:t>+8.4%</a:t>
+              <a:t>+8.5%</a:t>
             </a:r>
           </a:p>
         </p:txBody>
@@ -4193,7 +4193,7 @@
                 </a:solidFill>
                 <a:latin typeface="Segoe UI"/>
               </a:rPr>
-              <a:t>-3.3%</a:t>
+              <a:t>-3.8%</a:t>
             </a:r>
           </a:p>
         </p:txBody>
@@ -4251,7 +4251,7 @@
                 </a:solidFill>
                 <a:latin typeface="Segoe UI"/>
               </a:rPr>
-              <a:t>Hang Seng</a:t>
+              <a:t>Alphabet</a:t>
             </a:r>
           </a:p>
         </p:txBody>
@@ -4285,7 +4285,7 @@
                 </a:solidFill>
                 <a:latin typeface="Segoe UI"/>
               </a:rPr>
-              <a:t>^HSI · AMBER</a:t>
+              <a:t>GOOGL · AMBER</a:t>
             </a:r>
           </a:p>
         </p:txBody>
@@ -4319,7 +4319,7 @@
                 </a:solidFill>
                 <a:latin typeface="Segoe UI"/>
               </a:rPr>
-              <a:t>-3.0%</a:t>
+              <a:t>-3.4%</a:t>
             </a:r>
           </a:p>
         </p:txBody>
@@ -4377,7 +4377,7 @@
                 </a:solidFill>
                 <a:latin typeface="Segoe UI"/>
               </a:rPr>
-              <a:t>Alphabet</a:t>
+              <a:t>Hang Seng</a:t>
             </a:r>
           </a:p>
         </p:txBody>
@@ -4411,7 +4411,7 @@
                 </a:solidFill>
                 <a:latin typeface="Segoe UI"/>
               </a:rPr>
-              <a:t>GOOGL · AMBER</a:t>
+              <a:t>^HSI · AMBER</a:t>
             </a:r>
           </a:p>
         </p:txBody>
@@ -4445,7 +4445,7 @@
                 </a:solidFill>
                 <a:latin typeface="Segoe UI"/>
               </a:rPr>
-              <a:t>-2.9%</a:t>
+              <a:t>-3.0%</a:t>
             </a:r>
           </a:p>
         </p:txBody>
@@ -4629,7 +4629,7 @@
                 </a:solidFill>
                 <a:latin typeface="Segoe UI"/>
               </a:rPr>
-              <a:t>Crude Oil WTI</a:t>
+              <a:t>Natural Gas</a:t>
             </a:r>
           </a:p>
         </p:txBody>
@@ -4663,7 +4663,7 @@
                 </a:solidFill>
                 <a:latin typeface="Segoe UI"/>
               </a:rPr>
-              <a:t>CL=F · RED</a:t>
+              <a:t>NG=F · RED</a:t>
             </a:r>
           </a:p>
         </p:txBody>
@@ -4697,7 +4697,7 @@
                 </a:solidFill>
                 <a:latin typeface="Segoe UI"/>
               </a:rPr>
-              <a:t>-2.7%</a:t>
+              <a:t>-1.7%</a:t>
             </a:r>
           </a:p>
         </p:txBody>
@@ -4837,7 +4837,7 @@
         <p:spPr>
           <a:xfrm>
             <a:off x="457200" y="1188720"/>
-            <a:ext cx="11247120" cy="5544503"/>
+            <a:ext cx="11247120" cy="5539312"/>
           </a:xfrm>
           <a:prstGeom prst="rect">
             <a:avLst/>
@@ -5239,7 +5239,7 @@
                 </a:solidFill>
                 <a:latin typeface="Segoe UI"/>
               </a:rPr>
-              <a:t>US Financials</a:t>
+              <a:t>Russell 2000</a:t>
             </a:r>
           </a:p>
         </p:txBody>
@@ -5307,7 +5307,7 @@
                 </a:solidFill>
                 <a:latin typeface="Segoe UI"/>
               </a:rPr>
-              <a:t>84%</a:t>
+              <a:t>95%</a:t>
             </a:r>
           </a:p>
         </p:txBody>
@@ -5341,7 +5341,7 @@
                 </a:solidFill>
                 <a:latin typeface="Segoe UI"/>
               </a:rPr>
-              <a:t>above 200DMA · golden cross (50&gt;200) · MACD bearish</a:t>
+              <a:t>above 200DMA · golden cross (50&gt;200) · MACD bullish</a:t>
             </a:r>
           </a:p>
         </p:txBody>
@@ -5375,7 +5375,7 @@
                 </a:solidFill>
                 <a:latin typeface="Segoe UI"/>
               </a:rPr>
-              <a:t>Russell 2000</a:t>
+              <a:t>Microsoft</a:t>
             </a:r>
           </a:p>
         </p:txBody>
@@ -5443,7 +5443,7 @@
                 </a:solidFill>
                 <a:latin typeface="Segoe UI"/>
               </a:rPr>
-              <a:t>95%</a:t>
+              <a:t>83%</a:t>
             </a:r>
           </a:p>
         </p:txBody>
@@ -5477,7 +5477,7 @@
                 </a:solidFill>
                 <a:latin typeface="Segoe UI"/>
               </a:rPr>
-              <a:t>above 200DMA · golden cross (50&gt;200) · MACD bullish</a:t>
+              <a:t>above 200DMA · golden cross (50&gt;200) · MACD bearish</a:t>
             </a:r>
           </a:p>
         </p:txBody>
@@ -5511,7 +5511,7 @@
                 </a:solidFill>
                 <a:latin typeface="Segoe UI"/>
               </a:rPr>
-              <a:t>Dow Jones</a:t>
+              <a:t>US Financials</a:t>
             </a:r>
           </a:p>
         </p:txBody>
@@ -5579,7 +5579,7 @@
                 </a:solidFill>
                 <a:latin typeface="Segoe UI"/>
               </a:rPr>
-              <a:t>81%</a:t>
+              <a:t>82%</a:t>
             </a:r>
           </a:p>
         </p:txBody>
@@ -5647,7 +5647,7 @@
                 </a:solidFill>
                 <a:latin typeface="Segoe UI"/>
               </a:rPr>
-              <a:t>Amazon</a:t>
+              <a:t>US Technology</a:t>
             </a:r>
           </a:p>
         </p:txBody>
@@ -5715,7 +5715,7 @@
                 </a:solidFill>
                 <a:latin typeface="Segoe UI"/>
               </a:rPr>
-              <a:t>80%</a:t>
+              <a:t>81%</a:t>
             </a:r>
           </a:p>
         </p:txBody>
@@ -5749,7 +5749,7 @@
                 </a:solidFill>
                 <a:latin typeface="Segoe UI"/>
               </a:rPr>
-              <a:t>above 200DMA · golden cross (50&gt;200) · MACD bearish</a:t>
+              <a:t>above 200DMA · golden cross (50&gt;200) · MACD bullish</a:t>
             </a:r>
           </a:p>
         </p:txBody>
@@ -5783,7 +5783,7 @@
                 </a:solidFill>
                 <a:latin typeface="Segoe UI"/>
               </a:rPr>
-              <a:t>US Energy</a:t>
+              <a:t>ICICI Bank</a:t>
             </a:r>
           </a:p>
         </p:txBody>
@@ -5817,7 +5817,7 @@
                 </a:solidFill>
                 <a:latin typeface="Segoe UI"/>
               </a:rPr>
-              <a:t>BUY</a:t>
+              <a:t>STRONG BUY</a:t>
             </a:r>
           </a:p>
         </p:txBody>
@@ -5851,7 +5851,7 @@
                 </a:solidFill>
                 <a:latin typeface="Segoe UI"/>
               </a:rPr>
-              <a:t>93%</a:t>
+              <a:t>80%</a:t>
             </a:r>
           </a:p>
         </p:txBody>
@@ -5885,7 +5885,7 @@
                 </a:solidFill>
                 <a:latin typeface="Segoe UI"/>
               </a:rPr>
-              <a:t>above 200DMA · golden cross (50&gt;200) · MACD bullish</a:t>
+              <a:t>above 200DMA · golden cross (50&gt;200) · MACD bearish</a:t>
             </a:r>
           </a:p>
         </p:txBody>
@@ -5919,7 +5919,7 @@
                 </a:solidFill>
                 <a:latin typeface="Segoe UI"/>
               </a:rPr>
-              <a:t>Microsoft</a:t>
+              <a:t>US Energy</a:t>
             </a:r>
           </a:p>
         </p:txBody>
@@ -5987,7 +5987,7 @@
                 </a:solidFill>
                 <a:latin typeface="Segoe UI"/>
               </a:rPr>
-              <a:t>78%</a:t>
+              <a:t>94%</a:t>
             </a:r>
           </a:p>
         </p:txBody>
@@ -6021,7 +6021,7 @@
                 </a:solidFill>
                 <a:latin typeface="Segoe UI"/>
               </a:rPr>
-              <a:t>above 200DMA · golden cross (50&gt;200) · MACD bearish</a:t>
+              <a:t>above 200DMA · golden cross (50&gt;200) · MACD bullish</a:t>
             </a:r>
           </a:p>
         </p:txBody>
@@ -6123,7 +6123,7 @@
                 </a:solidFill>
                 <a:latin typeface="Segoe UI"/>
               </a:rPr>
-              <a:t>77%</a:t>
+              <a:t>78%</a:t>
             </a:r>
           </a:p>
         </p:txBody>
@@ -6395,7 +6395,7 @@
                 </a:solidFill>
                 <a:latin typeface="Segoe UI"/>
               </a:rPr>
-              <a:t>76%</a:t>
+              <a:t>69%</a:t>
             </a:r>
           </a:p>
         </p:txBody>
@@ -6429,7 +6429,7 @@
                 </a:solidFill>
                 <a:latin typeface="Segoe UI"/>
               </a:rPr>
-              <a:t>above 200DMA · golden cross (50&gt;200) · MACD bullish</a:t>
+              <a:t>above 200DMA · golden cross (50&gt;200) · MACD bearish</a:t>
             </a:r>
           </a:p>
         </p:txBody>
@@ -6463,7 +6463,7 @@
                 </a:solidFill>
                 <a:latin typeface="Segoe UI"/>
               </a:rPr>
-              <a:t>ICICI Bank</a:t>
+              <a:t>Nasdaq 100</a:t>
             </a:r>
           </a:p>
         </p:txBody>
@@ -6531,7 +6531,7 @@
                 </a:solidFill>
                 <a:latin typeface="Segoe UI"/>
               </a:rPr>
-              <a:t>80%</a:t>
+              <a:t>79%</a:t>
             </a:r>
           </a:p>
         </p:txBody>
@@ -6565,7 +6565,7 @@
                 </a:solidFill>
                 <a:latin typeface="Segoe UI"/>
               </a:rPr>
-              <a:t>above 200DMA · golden cross (50&gt;200) · MACD bearish</a:t>
+              <a:t>above 200DMA · golden cross (50&gt;200) · MACD bullish</a:t>
             </a:r>
           </a:p>
         </p:txBody>
@@ -6659,7 +6659,7 @@
                 </a:solidFill>
                 <a:latin typeface="Segoe UI"/>
               </a:rPr>
-              <a:t>Base currency INR · USD/INR 95.42</a:t>
+              <a:t>Base currency INR · USD/INR 95.45</a:t>
             </a:r>
           </a:p>
         </p:txBody>
@@ -7067,7 +7067,7 @@
                 </a:solidFill>
                 <a:latin typeface="Segoe UI"/>
               </a:rPr>
-              <a:t>62,806</a:t>
+              <a:t>64,334</a:t>
             </a:r>
           </a:p>
         </p:txBody>
@@ -7101,7 +7101,7 @@
                 </a:solidFill>
                 <a:latin typeface="Segoe UI"/>
               </a:rPr>
-              <a:t>Rs 599,266</a:t>
+              <a:t>Rs 614,066</a:t>
             </a:r>
           </a:p>
         </p:txBody>
@@ -7135,7 +7135,7 @@
                 </a:solidFill>
                 <a:latin typeface="Segoe UI"/>
               </a:rPr>
-              <a:t>Rs 26,776</a:t>
+              <a:t>Rs 41,364</a:t>
             </a:r>
           </a:p>
         </p:txBody>
@@ -7169,7 +7169,7 @@
                 </a:solidFill>
                 <a:latin typeface="Segoe UI"/>
               </a:rPr>
-              <a:t>+4.7%</a:t>
+              <a:t>+7.2%</a:t>
             </a:r>
           </a:p>
         </p:txBody>
@@ -7339,7 +7339,7 @@
                 </a:solidFill>
                 <a:latin typeface="Segoe UI"/>
               </a:rPr>
-              <a:t>4,439</a:t>
+              <a:t>4,470</a:t>
             </a:r>
           </a:p>
         </p:txBody>
@@ -7373,7 +7373,7 @@
                 </a:solidFill>
                 <a:latin typeface="Segoe UI"/>
               </a:rPr>
-              <a:t>Rs 423,547</a:t>
+              <a:t>Rs 426,672</a:t>
             </a:r>
           </a:p>
         </p:txBody>
@@ -7407,7 +7407,7 @@
                 </a:solidFill>
                 <a:latin typeface="Segoe UI"/>
               </a:rPr>
-              <a:t>Rs 204,093</a:t>
+              <a:t>Rs 207,137</a:t>
             </a:r>
           </a:p>
         </p:txBody>
@@ -7441,7 +7441,7 @@
                 </a:solidFill>
                 <a:latin typeface="Segoe UI"/>
               </a:rPr>
-              <a:t>+93.0%</a:t>
+              <a:t>+94.3%</a:t>
             </a:r>
           </a:p>
         </p:txBody>
@@ -7645,7 +7645,7 @@
                 </a:solidFill>
                 <a:latin typeface="Segoe UI"/>
               </a:rPr>
-              <a:t>Rs 291,903</a:t>
+              <a:t>Rs 291,687</a:t>
             </a:r>
           </a:p>
         </p:txBody>
@@ -7679,7 +7679,7 @@
                 </a:solidFill>
                 <a:latin typeface="Segoe UI"/>
               </a:rPr>
-              <a:t>Rs 115,385</a:t>
+              <a:t>Rs 115,104</a:t>
             </a:r>
           </a:p>
         </p:txBody>
@@ -7713,7 +7713,7 @@
                 </a:solidFill>
                 <a:latin typeface="Segoe UI"/>
               </a:rPr>
-              <a:t>+65.4%</a:t>
+              <a:t>+65.2%</a:t>
             </a:r>
           </a:p>
         </p:txBody>
@@ -7917,7 +7917,7 @@
                 </a:solidFill>
                 <a:latin typeface="Segoe UI"/>
               </a:rPr>
-              <a:t>Rs 171,869</a:t>
+              <a:t>Rs 171,818</a:t>
             </a:r>
           </a:p>
         </p:txBody>
@@ -7951,7 +7951,7 @@
                 </a:solidFill>
                 <a:latin typeface="Segoe UI"/>
               </a:rPr>
-              <a:t>Rs -171,625</a:t>
+              <a:t>Rs -171,803</a:t>
             </a:r>
           </a:p>
         </p:txBody>
@@ -9141,7 +9141,7 @@
                 </a:solidFill>
                 <a:latin typeface="Segoe UI"/>
               </a:rPr>
-              <a:t>Total Rs 1,748,267 | P&amp;L Rs 20,610 (+1.2%) | Sharpe -0.4 | Vol 17.52% | VaR95 -1.79%/day</a:t>
+              <a:t>Total Rs 1,765,924 | P&amp;L Rs 37,783 (+2.2%) | Sharpe -0.4 | Vol 17.66% | VaR95 -1.79%/day</a:t>
             </a:r>
           </a:p>
         </p:txBody>

--- a/docs/pmr_daily.pptx
+++ b/docs/pmr_daily.pptx
@@ -3197,7 +3197,7 @@
                 </a:solidFill>
                 <a:latin typeface="Segoe UI"/>
               </a:rPr>
-              <a:t>Tuesday, 18 Aug 2026 07:23 SGT</a:t>
+              <a:t>Wednesday, 19 Aug 2026 07:22 SGT</a:t>
             </a:r>
           </a:p>
         </p:txBody>
@@ -3265,7 +3265,7 @@
                 </a:solidFill>
                 <a:latin typeface="Segoe UI"/>
               </a:rPr>
-              <a:t>RAG 15R / 12A / 19G   |   58.7% above 200DMA   |   Portfolio Rs 1,765,924 (+2.2%)</a:t>
+              <a:t>RAG 15R / 13A / 18G   |   60.9% above 200DMA   |   Portfolio Rs 1,762,164 (+1.8%)</a:t>
             </a:r>
           </a:p>
         </p:txBody>
@@ -3529,7 +3529,7 @@
                 </a:solidFill>
                 <a:latin typeface="Segoe UI"/>
               </a:rPr>
-              <a:t>+14.3%</a:t>
+              <a:t>+9.6%</a:t>
             </a:r>
           </a:p>
         </p:txBody>
@@ -3655,7 +3655,7 @@
                 </a:solidFill>
                 <a:latin typeface="Segoe UI"/>
               </a:rPr>
-              <a:t>+12.1%</a:t>
+              <a:t>+9.5%</a:t>
             </a:r>
           </a:p>
         </p:txBody>
@@ -3781,7 +3781,7 @@
                 </a:solidFill>
                 <a:latin typeface="Segoe UI"/>
               </a:rPr>
-              <a:t>+10.4%</a:t>
+              <a:t>+8.3%</a:t>
             </a:r>
           </a:p>
         </p:txBody>
@@ -3907,7 +3907,7 @@
                 </a:solidFill>
                 <a:latin typeface="Segoe UI"/>
               </a:rPr>
-              <a:t>+9.0%</a:t>
+              <a:t>+8.2%</a:t>
             </a:r>
           </a:p>
         </p:txBody>
@@ -3965,7 +3965,7 @@
                 </a:solidFill>
                 <a:latin typeface="Segoe UI"/>
               </a:rPr>
-              <a:t>US Technology</a:t>
+              <a:t>Nikkei 225</a:t>
             </a:r>
           </a:p>
         </p:txBody>
@@ -3999,7 +3999,7 @@
                 </a:solidFill>
                 <a:latin typeface="Segoe UI"/>
               </a:rPr>
-              <a:t>XLK · GREEN</a:t>
+              <a:t>^N225 · GREEN</a:t>
             </a:r>
           </a:p>
         </p:txBody>
@@ -4033,7 +4033,7 @@
                 </a:solidFill>
                 <a:latin typeface="Segoe UI"/>
               </a:rPr>
-              <a:t>+8.5%</a:t>
+              <a:t>+7.5%</a:t>
             </a:r>
           </a:p>
         </p:txBody>
@@ -4155,11 +4155,11 @@
             <a:r>
               <a:rPr sz="900" b="0">
                 <a:solidFill>
-                  <a:srgbClr val="22C55E"/>
-                </a:solidFill>
-                <a:latin typeface="Segoe UI"/>
-              </a:rPr>
-              <a:t>AMZN · GREEN</a:t>
+                  <a:srgbClr val="F59E0B"/>
+                </a:solidFill>
+                <a:latin typeface="Segoe UI"/>
+              </a:rPr>
+              <a:t>AMZN · AMBER</a:t>
             </a:r>
           </a:p>
         </p:txBody>
@@ -4193,7 +4193,7 @@
                 </a:solidFill>
                 <a:latin typeface="Segoe UI"/>
               </a:rPr>
-              <a:t>-3.8%</a:t>
+              <a:t>-4.5%</a:t>
             </a:r>
           </a:p>
         </p:txBody>
@@ -4319,7 +4319,7 @@
                 </a:solidFill>
                 <a:latin typeface="Segoe UI"/>
               </a:rPr>
-              <a:t>-3.4%</a:t>
+              <a:t>-3.3%</a:t>
             </a:r>
           </a:p>
         </p:txBody>
@@ -4377,7 +4377,7 @@
                 </a:solidFill>
                 <a:latin typeface="Segoe UI"/>
               </a:rPr>
-              <a:t>Hang Seng</a:t>
+              <a:t>ITC</a:t>
             </a:r>
           </a:p>
         </p:txBody>
@@ -4407,11 +4407,11 @@
             <a:r>
               <a:rPr sz="900" b="0">
                 <a:solidFill>
-                  <a:srgbClr val="F59E0B"/>
-                </a:solidFill>
-                <a:latin typeface="Segoe UI"/>
-              </a:rPr>
-              <a:t>^HSI · AMBER</a:t>
+                  <a:srgbClr val="EF4444"/>
+                </a:solidFill>
+                <a:latin typeface="Segoe UI"/>
+              </a:rPr>
+              <a:t>ITC.NS · RED</a:t>
             </a:r>
           </a:p>
         </p:txBody>
@@ -4445,7 +4445,7 @@
                 </a:solidFill>
                 <a:latin typeface="Segoe UI"/>
               </a:rPr>
-              <a:t>-3.0%</a:t>
+              <a:t>-2.8%</a:t>
             </a:r>
           </a:p>
         </p:txBody>
@@ -4571,7 +4571,7 @@
                 </a:solidFill>
                 <a:latin typeface="Segoe UI"/>
               </a:rPr>
-              <a:t>-2.8%</a:t>
+              <a:t>-2.6%</a:t>
             </a:r>
           </a:p>
         </p:txBody>
@@ -4629,7 +4629,7 @@
                 </a:solidFill>
                 <a:latin typeface="Segoe UI"/>
               </a:rPr>
-              <a:t>Natural Gas</a:t>
+              <a:t>TCS</a:t>
             </a:r>
           </a:p>
         </p:txBody>
@@ -4663,7 +4663,7 @@
                 </a:solidFill>
                 <a:latin typeface="Segoe UI"/>
               </a:rPr>
-              <a:t>NG=F · RED</a:t>
+              <a:t>TCS.NS · RED</a:t>
             </a:r>
           </a:p>
         </p:txBody>
@@ -4697,7 +4697,7 @@
                 </a:solidFill>
                 <a:latin typeface="Segoe UI"/>
               </a:rPr>
-              <a:t>-1.7%</a:t>
+              <a:t>-2.2%</a:t>
             </a:r>
           </a:p>
         </p:txBody>
@@ -4837,7 +4837,7 @@
         <p:spPr>
           <a:xfrm>
             <a:off x="457200" y="1188720"/>
-            <a:ext cx="11247120" cy="5539312"/>
+            <a:ext cx="11247120" cy="5523796"/>
           </a:xfrm>
           <a:prstGeom prst="rect">
             <a:avLst/>
@@ -4967,7 +4967,7 @@
                 </a:solidFill>
                 <a:latin typeface="Segoe UI"/>
               </a:rPr>
-              <a:t>Bharti Airtel</a:t>
+              <a:t>US Financials</a:t>
             </a:r>
           </a:p>
         </p:txBody>
@@ -5035,7 +5035,7 @@
                 </a:solidFill>
                 <a:latin typeface="Segoe UI"/>
               </a:rPr>
-              <a:t>95%</a:t>
+              <a:t>84%</a:t>
             </a:r>
           </a:p>
         </p:txBody>
@@ -5069,7 +5069,7 @@
                 </a:solidFill>
                 <a:latin typeface="Segoe UI"/>
               </a:rPr>
-              <a:t>above 200DMA · golden cross (50&gt;200) · MACD bullish</a:t>
+              <a:t>above 200DMA · golden cross (50&gt;200) · MACD bearish</a:t>
             </a:r>
           </a:p>
         </p:txBody>
@@ -5103,7 +5103,7 @@
                 </a:solidFill>
                 <a:latin typeface="Segoe UI"/>
               </a:rPr>
-              <a:t>Nvidia</a:t>
+              <a:t>Microsoft</a:t>
             </a:r>
           </a:p>
         </p:txBody>
@@ -5171,7 +5171,7 @@
                 </a:solidFill>
                 <a:latin typeface="Segoe UI"/>
               </a:rPr>
-              <a:t>95%</a:t>
+              <a:t>84%</a:t>
             </a:r>
           </a:p>
         </p:txBody>
@@ -5205,7 +5205,7 @@
                 </a:solidFill>
                 <a:latin typeface="Segoe UI"/>
               </a:rPr>
-              <a:t>above 200DMA · golden cross (50&gt;200) · MACD bullish</a:t>
+              <a:t>above 200DMA · golden cross (50&gt;200) · MACD bearish</a:t>
             </a:r>
           </a:p>
         </p:txBody>
@@ -5239,7 +5239,7 @@
                 </a:solidFill>
                 <a:latin typeface="Segoe UI"/>
               </a:rPr>
-              <a:t>Russell 2000</a:t>
+              <a:t>DAX</a:t>
             </a:r>
           </a:p>
         </p:txBody>
@@ -5307,7 +5307,7 @@
                 </a:solidFill>
                 <a:latin typeface="Segoe UI"/>
               </a:rPr>
-              <a:t>95%</a:t>
+              <a:t>83%</a:t>
             </a:r>
           </a:p>
         </p:txBody>
@@ -5341,7 +5341,7 @@
                 </a:solidFill>
                 <a:latin typeface="Segoe UI"/>
               </a:rPr>
-              <a:t>above 200DMA · golden cross (50&gt;200) · MACD bullish</a:t>
+              <a:t>above 200DMA · golden cross (50&gt;200) · MACD bearish</a:t>
             </a:r>
           </a:p>
         </p:txBody>
@@ -5375,7 +5375,7 @@
                 </a:solidFill>
                 <a:latin typeface="Segoe UI"/>
               </a:rPr>
-              <a:t>Microsoft</a:t>
+              <a:t>Bharti Airtel</a:t>
             </a:r>
           </a:p>
         </p:txBody>
@@ -5443,7 +5443,7 @@
                 </a:solidFill>
                 <a:latin typeface="Segoe UI"/>
               </a:rPr>
-              <a:t>83%</a:t>
+              <a:t>82%</a:t>
             </a:r>
           </a:p>
         </p:txBody>
@@ -5511,7 +5511,7 @@
                 </a:solidFill>
                 <a:latin typeface="Segoe UI"/>
               </a:rPr>
-              <a:t>US Financials</a:t>
+              <a:t>Nvidia</a:t>
             </a:r>
           </a:p>
         </p:txBody>
@@ -5579,7 +5579,7 @@
                 </a:solidFill>
                 <a:latin typeface="Segoe UI"/>
               </a:rPr>
-              <a:t>82%</a:t>
+              <a:t>81%</a:t>
             </a:r>
           </a:p>
         </p:txBody>
@@ -5647,7 +5647,7 @@
                 </a:solidFill>
                 <a:latin typeface="Segoe UI"/>
               </a:rPr>
-              <a:t>US Technology</a:t>
+              <a:t>US 1-3Y Treasury</a:t>
             </a:r>
           </a:p>
         </p:txBody>
@@ -5783,7 +5783,7 @@
                 </a:solidFill>
                 <a:latin typeface="Segoe UI"/>
               </a:rPr>
-              <a:t>ICICI Bank</a:t>
+              <a:t>US Energy</a:t>
             </a:r>
           </a:p>
         </p:txBody>
@@ -5817,7 +5817,7 @@
                 </a:solidFill>
                 <a:latin typeface="Segoe UI"/>
               </a:rPr>
-              <a:t>STRONG BUY</a:t>
+              <a:t>BUY</a:t>
             </a:r>
           </a:p>
         </p:txBody>
@@ -5851,7 +5851,7 @@
                 </a:solidFill>
                 <a:latin typeface="Segoe UI"/>
               </a:rPr>
-              <a:t>80%</a:t>
+              <a:t>94%</a:t>
             </a:r>
           </a:p>
         </p:txBody>
@@ -5885,7 +5885,7 @@
                 </a:solidFill>
                 <a:latin typeface="Segoe UI"/>
               </a:rPr>
-              <a:t>above 200DMA · golden cross (50&gt;200) · MACD bearish</a:t>
+              <a:t>above 200DMA · golden cross (50&gt;200) · MACD bullish</a:t>
             </a:r>
           </a:p>
         </p:txBody>
@@ -5919,7 +5919,7 @@
                 </a:solidFill>
                 <a:latin typeface="Segoe UI"/>
               </a:rPr>
-              <a:t>US Energy</a:t>
+              <a:t>S&amp;P 500</a:t>
             </a:r>
           </a:p>
         </p:txBody>
@@ -5987,7 +5987,7 @@
                 </a:solidFill>
                 <a:latin typeface="Segoe UI"/>
               </a:rPr>
-              <a:t>94%</a:t>
+              <a:t>70%</a:t>
             </a:r>
           </a:p>
         </p:txBody>
@@ -6021,7 +6021,7 @@
                 </a:solidFill>
                 <a:latin typeface="Segoe UI"/>
               </a:rPr>
-              <a:t>above 200DMA · golden cross (50&gt;200) · MACD bullish</a:t>
+              <a:t>above 200DMA · golden cross (50&gt;200) · MACD bearish</a:t>
             </a:r>
           </a:p>
         </p:txBody>
@@ -6055,7 +6055,7 @@
                 </a:solidFill>
                 <a:latin typeface="Segoe UI"/>
               </a:rPr>
-              <a:t>DAX</a:t>
+              <a:t>Dow Jones</a:t>
             </a:r>
           </a:p>
         </p:txBody>
@@ -6123,7 +6123,7 @@
                 </a:solidFill>
                 <a:latin typeface="Segoe UI"/>
               </a:rPr>
-              <a:t>78%</a:t>
+              <a:t>68%</a:t>
             </a:r>
           </a:p>
         </p:txBody>
@@ -6191,7 +6191,7 @@
                 </a:solidFill>
                 <a:latin typeface="Segoe UI"/>
               </a:rPr>
-              <a:t>Straits Times</a:t>
+              <a:t>Russell 2000</a:t>
             </a:r>
           </a:p>
         </p:txBody>
@@ -6259,7 +6259,7 @@
                 </a:solidFill>
                 <a:latin typeface="Segoe UI"/>
               </a:rPr>
-              <a:t>71%</a:t>
+              <a:t>68%</a:t>
             </a:r>
           </a:p>
         </p:txBody>
@@ -6327,7 +6327,7 @@
                 </a:solidFill>
                 <a:latin typeface="Segoe UI"/>
               </a:rPr>
-              <a:t>S&amp;P 500</a:t>
+              <a:t>Amazon</a:t>
             </a:r>
           </a:p>
         </p:txBody>
@@ -6395,7 +6395,7 @@
                 </a:solidFill>
                 <a:latin typeface="Segoe UI"/>
               </a:rPr>
-              <a:t>69%</a:t>
+              <a:t>74%</a:t>
             </a:r>
           </a:p>
         </p:txBody>
@@ -6463,7 +6463,7 @@
                 </a:solidFill>
                 <a:latin typeface="Segoe UI"/>
               </a:rPr>
-              <a:t>Nasdaq 100</a:t>
+              <a:t>Nikkei 225</a:t>
             </a:r>
           </a:p>
         </p:txBody>
@@ -6531,7 +6531,7 @@
                 </a:solidFill>
                 <a:latin typeface="Segoe UI"/>
               </a:rPr>
-              <a:t>79%</a:t>
+              <a:t>68%</a:t>
             </a:r>
           </a:p>
         </p:txBody>
@@ -6659,7 +6659,7 @@
                 </a:solidFill>
                 <a:latin typeface="Segoe UI"/>
               </a:rPr>
-              <a:t>Base currency INR · USD/INR 95.45</a:t>
+              <a:t>Base currency INR · USD/INR 95.69</a:t>
             </a:r>
           </a:p>
         </p:txBody>
@@ -7067,7 +7067,7 @@
                 </a:solidFill>
                 <a:latin typeface="Segoe UI"/>
               </a:rPr>
-              <a:t>64,334</a:t>
+              <a:t>64,679</a:t>
             </a:r>
           </a:p>
         </p:txBody>
@@ -7101,7 +7101,7 @@
                 </a:solidFill>
                 <a:latin typeface="Segoe UI"/>
               </a:rPr>
-              <a:t>Rs 614,066</a:t>
+              <a:t>Rs 618,937</a:t>
             </a:r>
           </a:p>
         </p:txBody>
@@ -7135,7 +7135,7 @@
                 </a:solidFill>
                 <a:latin typeface="Segoe UI"/>
               </a:rPr>
-              <a:t>Rs 41,364</a:t>
+              <a:t>Rs 44,772</a:t>
             </a:r>
           </a:p>
         </p:txBody>
@@ -7169,7 +7169,7 @@
                 </a:solidFill>
                 <a:latin typeface="Segoe UI"/>
               </a:rPr>
-              <a:t>+7.2%</a:t>
+              <a:t>+7.8%</a:t>
             </a:r>
           </a:p>
         </p:txBody>
@@ -7339,7 +7339,7 @@
                 </a:solidFill>
                 <a:latin typeface="Segoe UI"/>
               </a:rPr>
-              <a:t>4,470</a:t>
+              <a:t>4,386</a:t>
             </a:r>
           </a:p>
         </p:txBody>
@@ -7373,7 +7373,7 @@
                 </a:solidFill>
                 <a:latin typeface="Segoe UI"/>
               </a:rPr>
-              <a:t>Rs 426,672</a:t>
+              <a:t>Rs 419,762</a:t>
             </a:r>
           </a:p>
         </p:txBody>
@@ -7407,7 +7407,7 @@
                 </a:solidFill>
                 <a:latin typeface="Segoe UI"/>
               </a:rPr>
-              <a:t>Rs 207,137</a:t>
+              <a:t>Rs 199,666</a:t>
             </a:r>
           </a:p>
         </p:txBody>
@@ -7441,7 +7441,7 @@
                 </a:solidFill>
                 <a:latin typeface="Segoe UI"/>
               </a:rPr>
-              <a:t>+94.3%</a:t>
+              <a:t>+90.7%</a:t>
             </a:r>
           </a:p>
         </p:txBody>
@@ -7611,7 +7611,7 @@
                 </a:solidFill>
                 <a:latin typeface="Segoe UI"/>
               </a:rPr>
-              <a:t>306</a:t>
+              <a:t>310</a:t>
             </a:r>
           </a:p>
         </p:txBody>
@@ -7645,7 +7645,7 @@
                 </a:solidFill>
                 <a:latin typeface="Segoe UI"/>
               </a:rPr>
-              <a:t>Rs 291,687</a:t>
+              <a:t>Rs 296,680</a:t>
             </a:r>
           </a:p>
         </p:txBody>
@@ -7679,7 +7679,7 @@
                 </a:solidFill>
                 <a:latin typeface="Segoe UI"/>
               </a:rPr>
-              <a:t>Rs 115,104</a:t>
+              <a:t>Rs 119,646</a:t>
             </a:r>
           </a:p>
         </p:txBody>
@@ -7713,7 +7713,7 @@
                 </a:solidFill>
                 <a:latin typeface="Segoe UI"/>
               </a:rPr>
-              <a:t>+65.2%</a:t>
+              <a:t>+67.6%</a:t>
             </a:r>
           </a:p>
         </p:txBody>
@@ -7883,7 +7883,7 @@
                 </a:solidFill>
                 <a:latin typeface="Segoe UI"/>
               </a:rPr>
-              <a:t>225</a:t>
+              <a:t>220</a:t>
             </a:r>
           </a:p>
         </p:txBody>
@@ -7917,7 +7917,7 @@
                 </a:solidFill>
                 <a:latin typeface="Segoe UI"/>
               </a:rPr>
-              <a:t>Rs 171,818</a:t>
+              <a:t>Rs 168,223</a:t>
             </a:r>
           </a:p>
         </p:txBody>
@@ -7951,7 +7951,7 @@
                 </a:solidFill>
                 <a:latin typeface="Segoe UI"/>
               </a:rPr>
-              <a:t>Rs -171,803</a:t>
+              <a:t>Rs -176,276</a:t>
             </a:r>
           </a:p>
         </p:txBody>
@@ -7985,7 +7985,7 @@
                 </a:solidFill>
                 <a:latin typeface="Segoe UI"/>
               </a:rPr>
-              <a:t>-50.0%</a:t>
+              <a:t>-51.2%</a:t>
             </a:r>
           </a:p>
         </p:txBody>
@@ -8155,7 +8155,7 @@
                 </a:solidFill>
                 <a:latin typeface="Segoe UI"/>
               </a:rPr>
-              <a:t>1,169</a:t>
+              <a:t>1,140</a:t>
             </a:r>
           </a:p>
         </p:txBody>
@@ -8189,7 +8189,7 @@
                 </a:solidFill>
                 <a:latin typeface="Segoe UI"/>
               </a:rPr>
-              <a:t>Rs 93,536</a:t>
+              <a:t>Rs 91,192</a:t>
             </a:r>
           </a:p>
         </p:txBody>
@@ -8223,7 +8223,7 @@
                 </a:solidFill>
                 <a:latin typeface="Segoe UI"/>
               </a:rPr>
-              <a:t>Rs -18,464</a:t>
+              <a:t>Rs -20,808</a:t>
             </a:r>
           </a:p>
         </p:txBody>
@@ -8257,7 +8257,7 @@
                 </a:solidFill>
                 <a:latin typeface="Segoe UI"/>
               </a:rPr>
-              <a:t>-16.5%</a:t>
+              <a:t>-18.6%</a:t>
             </a:r>
           </a:p>
         </p:txBody>
@@ -8427,7 +8427,7 @@
                 </a:solidFill>
                 <a:latin typeface="Segoe UI"/>
               </a:rPr>
-              <a:t>1,310</a:t>
+              <a:t>1,316</a:t>
             </a:r>
           </a:p>
         </p:txBody>
@@ -8461,7 +8461,7 @@
                 </a:solidFill>
                 <a:latin typeface="Segoe UI"/>
               </a:rPr>
-              <a:t>Rs 65,500</a:t>
+              <a:t>Rs 65,800</a:t>
             </a:r>
           </a:p>
         </p:txBody>
@@ -8495,7 +8495,7 @@
                 </a:solidFill>
                 <a:latin typeface="Segoe UI"/>
               </a:rPr>
-              <a:t>Rs -57,000</a:t>
+              <a:t>Rs -56,700</a:t>
             </a:r>
           </a:p>
         </p:txBody>
@@ -8529,7 +8529,7 @@
                 </a:solidFill>
                 <a:latin typeface="Segoe UI"/>
               </a:rPr>
-              <a:t>-46.5%</a:t>
+              <a:t>-46.3%</a:t>
             </a:r>
           </a:p>
         </p:txBody>
@@ -8699,7 +8699,7 @@
                 </a:solidFill>
                 <a:latin typeface="Segoe UI"/>
               </a:rPr>
-              <a:t>2,361</a:t>
+              <a:t>2,313</a:t>
             </a:r>
           </a:p>
         </p:txBody>
@@ -8733,7 +8733,7 @@
                 </a:solidFill>
                 <a:latin typeface="Segoe UI"/>
               </a:rPr>
-              <a:t>Rs 59,025</a:t>
+              <a:t>Rs 57,830</a:t>
             </a:r>
           </a:p>
         </p:txBody>
@@ -8767,7 +8767,7 @@
                 </a:solidFill>
                 <a:latin typeface="Segoe UI"/>
               </a:rPr>
-              <a:t>Rs -30,975</a:t>
+              <a:t>Rs -32,170</a:t>
             </a:r>
           </a:p>
         </p:txBody>
@@ -8801,7 +8801,7 @@
                 </a:solidFill>
                 <a:latin typeface="Segoe UI"/>
               </a:rPr>
-              <a:t>-34.4%</a:t>
+              <a:t>-35.7%</a:t>
             </a:r>
           </a:p>
         </p:txBody>
@@ -8971,7 +8971,7 @@
                 </a:solidFill>
                 <a:latin typeface="Segoe UI"/>
               </a:rPr>
-              <a:t>727</a:t>
+              <a:t>729</a:t>
             </a:r>
           </a:p>
         </p:txBody>
@@ -9005,7 +9005,7 @@
                 </a:solidFill>
                 <a:latin typeface="Segoe UI"/>
               </a:rPr>
-              <a:t>Rs 43,620</a:t>
+              <a:t>Rs 43,740</a:t>
             </a:r>
           </a:p>
         </p:txBody>
@@ -9039,7 +9039,7 @@
                 </a:solidFill>
                 <a:latin typeface="Segoe UI"/>
               </a:rPr>
-              <a:t>Rs -47,580</a:t>
+              <a:t>Rs -47,460</a:t>
             </a:r>
           </a:p>
         </p:txBody>
@@ -9073,7 +9073,7 @@
                 </a:solidFill>
                 <a:latin typeface="Segoe UI"/>
               </a:rPr>
-              <a:t>-52.2%</a:t>
+              <a:t>-52.0%</a:t>
             </a:r>
           </a:p>
         </p:txBody>
@@ -9141,7 +9141,7 @@
                 </a:solidFill>
                 <a:latin typeface="Segoe UI"/>
               </a:rPr>
-              <a:t>Total Rs 1,765,924 | P&amp;L Rs 37,783 (+2.2%) | Sharpe -0.4 | Vol 17.66% | VaR95 -1.79%/day</a:t>
+              <a:t>Total Rs 1,762,164 | P&amp;L Rs 30,670 (+1.8%) | Sharpe -0.4 | Vol 17.7% | VaR95 -1.81%/day</a:t>
             </a:r>
           </a:p>
         </p:txBody>

--- a/docs/pmr_daily.pptx
+++ b/docs/pmr_daily.pptx
@@ -3197,7 +3197,7 @@
                 </a:solidFill>
                 <a:latin typeface="Segoe UI"/>
               </a:rPr>
-              <a:t>Wednesday, 19 Aug 2026 07:22 SGT</a:t>
+              <a:t>Thursday, 20 Aug 2026 07:23 SGT</a:t>
             </a:r>
           </a:p>
         </p:txBody>
@@ -3265,7 +3265,7 @@
                 </a:solidFill>
                 <a:latin typeface="Segoe UI"/>
               </a:rPr>
-              <a:t>RAG 15R / 13A / 18G   |   60.9% above 200DMA   |   Portfolio Rs 1,762,164 (+1.8%)</a:t>
+              <a:t>RAG 12R / 15A / 19G   |   65.2% above 200DMA   |   Portfolio Rs 1,828,423 (+5.5%)</a:t>
             </a:r>
           </a:p>
         </p:txBody>
@@ -3461,7 +3461,7 @@
                 </a:solidFill>
                 <a:latin typeface="Segoe UI"/>
               </a:rPr>
-              <a:t>Silver</a:t>
+              <a:t>Ethereum</a:t>
             </a:r>
           </a:p>
         </p:txBody>
@@ -3495,7 +3495,7 @@
                 </a:solidFill>
                 <a:latin typeface="Segoe UI"/>
               </a:rPr>
-              <a:t>SI=F · RED</a:t>
+              <a:t>ETH-USD · RED</a:t>
             </a:r>
           </a:p>
         </p:txBody>
@@ -3529,7 +3529,7 @@
                 </a:solidFill>
                 <a:latin typeface="Segoe UI"/>
               </a:rPr>
-              <a:t>+9.6%</a:t>
+              <a:t>+20.8%</a:t>
             </a:r>
           </a:p>
         </p:txBody>
@@ -3587,7 +3587,7 @@
                 </a:solidFill>
                 <a:latin typeface="Segoe UI"/>
               </a:rPr>
-              <a:t>Nvidia</a:t>
+              <a:t>Solana</a:t>
             </a:r>
           </a:p>
         </p:txBody>
@@ -3617,11 +3617,11 @@
             <a:r>
               <a:rPr sz="900" b="0">
                 <a:solidFill>
-                  <a:srgbClr val="22C55E"/>
-                </a:solidFill>
-                <a:latin typeface="Segoe UI"/>
-              </a:rPr>
-              <a:t>NVDA · GREEN</a:t>
+                  <a:srgbClr val="EF4444"/>
+                </a:solidFill>
+                <a:latin typeface="Segoe UI"/>
+              </a:rPr>
+              <a:t>SOL-USD · RED</a:t>
             </a:r>
           </a:p>
         </p:txBody>
@@ -3655,7 +3655,7 @@
                 </a:solidFill>
                 <a:latin typeface="Segoe UI"/>
               </a:rPr>
-              <a:t>+9.5%</a:t>
+              <a:t>+17.2%</a:t>
             </a:r>
           </a:p>
         </p:txBody>
@@ -3713,7 +3713,7 @@
                 </a:solidFill>
                 <a:latin typeface="Segoe UI"/>
               </a:rPr>
-              <a:t>Gold</a:t>
+              <a:t>Silver</a:t>
             </a:r>
           </a:p>
         </p:txBody>
@@ -3747,7 +3747,7 @@
                 </a:solidFill>
                 <a:latin typeface="Segoe UI"/>
               </a:rPr>
-              <a:t>GC=F · RED</a:t>
+              <a:t>SI=F · RED</a:t>
             </a:r>
           </a:p>
         </p:txBody>
@@ -3781,7 +3781,7 @@
                 </a:solidFill>
                 <a:latin typeface="Segoe UI"/>
               </a:rPr>
-              <a:t>+8.3%</a:t>
+              <a:t>+16.5%</a:t>
             </a:r>
           </a:p>
         </p:txBody>
@@ -3839,7 +3839,7 @@
                 </a:solidFill>
                 <a:latin typeface="Segoe UI"/>
               </a:rPr>
-              <a:t>Tesla</a:t>
+              <a:t>Gold</a:t>
             </a:r>
           </a:p>
         </p:txBody>
@@ -3869,11 +3869,11 @@
             <a:r>
               <a:rPr sz="900" b="0">
                 <a:solidFill>
-                  <a:srgbClr val="EF4444"/>
-                </a:solidFill>
-                <a:latin typeface="Segoe UI"/>
-              </a:rPr>
-              <a:t>TSLA · RED</a:t>
+                  <a:srgbClr val="F59E0B"/>
+                </a:solidFill>
+                <a:latin typeface="Segoe UI"/>
+              </a:rPr>
+              <a:t>GC=F · AMBER</a:t>
             </a:r>
           </a:p>
         </p:txBody>
@@ -3907,7 +3907,7 @@
                 </a:solidFill>
                 <a:latin typeface="Segoe UI"/>
               </a:rPr>
-              <a:t>+8.2%</a:t>
+              <a:t>+13.0%</a:t>
             </a:r>
           </a:p>
         </p:txBody>
@@ -3965,7 +3965,7 @@
                 </a:solidFill>
                 <a:latin typeface="Segoe UI"/>
               </a:rPr>
-              <a:t>Nikkei 225</a:t>
+              <a:t>Tesla</a:t>
             </a:r>
           </a:p>
         </p:txBody>
@@ -3995,11 +3995,11 @@
             <a:r>
               <a:rPr sz="900" b="0">
                 <a:solidFill>
-                  <a:srgbClr val="22C55E"/>
-                </a:solidFill>
-                <a:latin typeface="Segoe UI"/>
-              </a:rPr>
-              <a:t>^N225 · GREEN</a:t>
+                  <a:srgbClr val="EF4444"/>
+                </a:solidFill>
+                <a:latin typeface="Segoe UI"/>
+              </a:rPr>
+              <a:t>TSLA · RED</a:t>
             </a:r>
           </a:p>
         </p:txBody>
@@ -4033,7 +4033,7 @@
                 </a:solidFill>
                 <a:latin typeface="Segoe UI"/>
               </a:rPr>
-              <a:t>+7.5%</a:t>
+              <a:t>+12.8%</a:t>
             </a:r>
           </a:p>
         </p:txBody>
@@ -4125,7 +4125,7 @@
                 </a:solidFill>
                 <a:latin typeface="Segoe UI"/>
               </a:rPr>
-              <a:t>Amazon</a:t>
+              <a:t>ITC</a:t>
             </a:r>
           </a:p>
         </p:txBody>
@@ -4155,11 +4155,11 @@
             <a:r>
               <a:rPr sz="900" b="0">
                 <a:solidFill>
-                  <a:srgbClr val="F59E0B"/>
-                </a:solidFill>
-                <a:latin typeface="Segoe UI"/>
-              </a:rPr>
-              <a:t>AMZN · AMBER</a:t>
+                  <a:srgbClr val="EF4444"/>
+                </a:solidFill>
+                <a:latin typeface="Segoe UI"/>
+              </a:rPr>
+              <a:t>ITC.NS · RED</a:t>
             </a:r>
           </a:p>
         </p:txBody>
@@ -4193,7 +4193,7 @@
                 </a:solidFill>
                 <a:latin typeface="Segoe UI"/>
               </a:rPr>
-              <a:t>-4.5%</a:t>
+              <a:t>-5.0%</a:t>
             </a:r>
           </a:p>
         </p:txBody>
@@ -4251,7 +4251,7 @@
                 </a:solidFill>
                 <a:latin typeface="Segoe UI"/>
               </a:rPr>
-              <a:t>Alphabet</a:t>
+              <a:t>HDFC Bank</a:t>
             </a:r>
           </a:p>
         </p:txBody>
@@ -4281,11 +4281,11 @@
             <a:r>
               <a:rPr sz="900" b="0">
                 <a:solidFill>
-                  <a:srgbClr val="F59E0B"/>
-                </a:solidFill>
-                <a:latin typeface="Segoe UI"/>
-              </a:rPr>
-              <a:t>GOOGL · AMBER</a:t>
+                  <a:srgbClr val="EF4444"/>
+                </a:solidFill>
+                <a:latin typeface="Segoe UI"/>
+              </a:rPr>
+              <a:t>HDFCBANK.NS · RED</a:t>
             </a:r>
           </a:p>
         </p:txBody>
@@ -4319,7 +4319,7 @@
                 </a:solidFill>
                 <a:latin typeface="Segoe UI"/>
               </a:rPr>
-              <a:t>-3.3%</a:t>
+              <a:t>-3.8%</a:t>
             </a:r>
           </a:p>
         </p:txBody>
@@ -4377,7 +4377,7 @@
                 </a:solidFill>
                 <a:latin typeface="Segoe UI"/>
               </a:rPr>
-              <a:t>ITC</a:t>
+              <a:t>TCS</a:t>
             </a:r>
           </a:p>
         </p:txBody>
@@ -4411,7 +4411,7 @@
                 </a:solidFill>
                 <a:latin typeface="Segoe UI"/>
               </a:rPr>
-              <a:t>ITC.NS · RED</a:t>
+              <a:t>TCS.NS · RED</a:t>
             </a:r>
           </a:p>
         </p:txBody>
@@ -4445,7 +4445,7 @@
                 </a:solidFill>
                 <a:latin typeface="Segoe UI"/>
               </a:rPr>
-              <a:t>-2.8%</a:t>
+              <a:t>-3.2%</a:t>
             </a:r>
           </a:p>
         </p:txBody>
@@ -4503,7 +4503,7 @@
                 </a:solidFill>
                 <a:latin typeface="Segoe UI"/>
               </a:rPr>
-              <a:t>HDFC Bank</a:t>
+              <a:t>Alphabet</a:t>
             </a:r>
           </a:p>
         </p:txBody>
@@ -4533,11 +4533,11 @@
             <a:r>
               <a:rPr sz="900" b="0">
                 <a:solidFill>
-                  <a:srgbClr val="EF4444"/>
-                </a:solidFill>
-                <a:latin typeface="Segoe UI"/>
-              </a:rPr>
-              <a:t>HDFCBANK.NS · RED</a:t>
+                  <a:srgbClr val="F59E0B"/>
+                </a:solidFill>
+                <a:latin typeface="Segoe UI"/>
+              </a:rPr>
+              <a:t>GOOGL · AMBER</a:t>
             </a:r>
           </a:p>
         </p:txBody>
@@ -4571,7 +4571,7 @@
                 </a:solidFill>
                 <a:latin typeface="Segoe UI"/>
               </a:rPr>
-              <a:t>-2.6%</a:t>
+              <a:t>-3.2%</a:t>
             </a:r>
           </a:p>
         </p:txBody>
@@ -4629,7 +4629,7 @@
                 </a:solidFill>
                 <a:latin typeface="Segoe UI"/>
               </a:rPr>
-              <a:t>TCS</a:t>
+              <a:t>Bharti Airtel</a:t>
             </a:r>
           </a:p>
         </p:txBody>
@@ -4659,11 +4659,11 @@
             <a:r>
               <a:rPr sz="900" b="0">
                 <a:solidFill>
-                  <a:srgbClr val="EF4444"/>
-                </a:solidFill>
-                <a:latin typeface="Segoe UI"/>
-              </a:rPr>
-              <a:t>TCS.NS · RED</a:t>
+                  <a:srgbClr val="F59E0B"/>
+                </a:solidFill>
+                <a:latin typeface="Segoe UI"/>
+              </a:rPr>
+              <a:t>BHARTIARTL.NS · AMBER</a:t>
             </a:r>
           </a:p>
         </p:txBody>
@@ -4697,7 +4697,7 @@
                 </a:solidFill>
                 <a:latin typeface="Segoe UI"/>
               </a:rPr>
-              <a:t>-2.2%</a:t>
+              <a:t>-2.5%</a:t>
             </a:r>
           </a:p>
         </p:txBody>
@@ -4837,7 +4837,7 @@
         <p:spPr>
           <a:xfrm>
             <a:off x="457200" y="1188720"/>
-            <a:ext cx="11247120" cy="5523796"/>
+            <a:ext cx="11247120" cy="5544503"/>
           </a:xfrm>
           <a:prstGeom prst="rect">
             <a:avLst/>
@@ -4967,7 +4967,7 @@
                 </a:solidFill>
                 <a:latin typeface="Segoe UI"/>
               </a:rPr>
-              <a:t>US Financials</a:t>
+              <a:t>Microsoft</a:t>
             </a:r>
           </a:p>
         </p:txBody>
@@ -5103,7 +5103,7 @@
                 </a:solidFill>
                 <a:latin typeface="Segoe UI"/>
               </a:rPr>
-              <a:t>Microsoft</a:t>
+              <a:t>US Financials</a:t>
             </a:r>
           </a:p>
         </p:txBody>
@@ -5171,7 +5171,7 @@
                 </a:solidFill>
                 <a:latin typeface="Segoe UI"/>
               </a:rPr>
-              <a:t>84%</a:t>
+              <a:t>83%</a:t>
             </a:r>
           </a:p>
         </p:txBody>
@@ -5239,7 +5239,7 @@
                 </a:solidFill>
                 <a:latin typeface="Segoe UI"/>
               </a:rPr>
-              <a:t>DAX</a:t>
+              <a:t>Dow Jones</a:t>
             </a:r>
           </a:p>
         </p:txBody>
@@ -5307,7 +5307,7 @@
                 </a:solidFill>
                 <a:latin typeface="Segoe UI"/>
               </a:rPr>
-              <a:t>83%</a:t>
+              <a:t>81%</a:t>
             </a:r>
           </a:p>
         </p:txBody>
@@ -5375,7 +5375,7 @@
                 </a:solidFill>
                 <a:latin typeface="Segoe UI"/>
               </a:rPr>
-              <a:t>Bharti Airtel</a:t>
+              <a:t>DAX</a:t>
             </a:r>
           </a:p>
         </p:txBody>
@@ -5443,7 +5443,7 @@
                 </a:solidFill>
                 <a:latin typeface="Segoe UI"/>
               </a:rPr>
-              <a:t>82%</a:t>
+              <a:t>80%</a:t>
             </a:r>
           </a:p>
         </p:txBody>
@@ -5511,7 +5511,7 @@
                 </a:solidFill>
                 <a:latin typeface="Segoe UI"/>
               </a:rPr>
-              <a:t>Nvidia</a:t>
+              <a:t>Amazon</a:t>
             </a:r>
           </a:p>
         </p:txBody>
@@ -5579,7 +5579,7 @@
                 </a:solidFill>
                 <a:latin typeface="Segoe UI"/>
               </a:rPr>
-              <a:t>81%</a:t>
+              <a:t>80%</a:t>
             </a:r>
           </a:p>
         </p:txBody>
@@ -5647,7 +5647,7 @@
                 </a:solidFill>
                 <a:latin typeface="Segoe UI"/>
               </a:rPr>
-              <a:t>US 1-3Y Treasury</a:t>
+              <a:t>US Energy</a:t>
             </a:r>
           </a:p>
         </p:txBody>
@@ -5681,7 +5681,7 @@
                 </a:solidFill>
                 <a:latin typeface="Segoe UI"/>
               </a:rPr>
-              <a:t>STRONG BUY</a:t>
+              <a:t>BUY</a:t>
             </a:r>
           </a:p>
         </p:txBody>
@@ -5715,7 +5715,7 @@
                 </a:solidFill>
                 <a:latin typeface="Segoe UI"/>
               </a:rPr>
-              <a:t>81%</a:t>
+              <a:t>93%</a:t>
             </a:r>
           </a:p>
         </p:txBody>
@@ -5783,7 +5783,7 @@
                 </a:solidFill>
                 <a:latin typeface="Segoe UI"/>
               </a:rPr>
-              <a:t>US Energy</a:t>
+              <a:t>Straits Times</a:t>
             </a:r>
           </a:p>
         </p:txBody>
@@ -5851,7 +5851,7 @@
                 </a:solidFill>
                 <a:latin typeface="Segoe UI"/>
               </a:rPr>
-              <a:t>94%</a:t>
+              <a:t>70%</a:t>
             </a:r>
           </a:p>
         </p:txBody>
@@ -5885,7 +5885,7 @@
                 </a:solidFill>
                 <a:latin typeface="Segoe UI"/>
               </a:rPr>
-              <a:t>above 200DMA · golden cross (50&gt;200) · MACD bullish</a:t>
+              <a:t>above 200DMA · golden cross (50&gt;200) · MACD bearish</a:t>
             </a:r>
           </a:p>
         </p:txBody>
@@ -5919,7 +5919,7 @@
                 </a:solidFill>
                 <a:latin typeface="Segoe UI"/>
               </a:rPr>
-              <a:t>S&amp;P 500</a:t>
+              <a:t>Gold</a:t>
             </a:r>
           </a:p>
         </p:txBody>
@@ -6021,7 +6021,7 @@
                 </a:solidFill>
                 <a:latin typeface="Segoe UI"/>
               </a:rPr>
-              <a:t>above 200DMA · golden cross (50&gt;200) · MACD bearish</a:t>
+              <a:t>above 200DMA · death cross (50&lt;200) · MACD bullish</a:t>
             </a:r>
           </a:p>
         </p:txBody>
@@ -6055,7 +6055,7 @@
                 </a:solidFill>
                 <a:latin typeface="Segoe UI"/>
               </a:rPr>
-              <a:t>Dow Jones</a:t>
+              <a:t>Bitcoin</a:t>
             </a:r>
           </a:p>
         </p:txBody>
@@ -6123,7 +6123,7 @@
                 </a:solidFill>
                 <a:latin typeface="Segoe UI"/>
               </a:rPr>
-              <a:t>68%</a:t>
+              <a:t>69%</a:t>
             </a:r>
           </a:p>
         </p:txBody>
@@ -6157,7 +6157,7 @@
                 </a:solidFill>
                 <a:latin typeface="Segoe UI"/>
               </a:rPr>
-              <a:t>above 200DMA · golden cross (50&gt;200) · MACD bearish</a:t>
+              <a:t>above 200DMA · death cross (50&lt;200) · MACD bullish</a:t>
             </a:r>
           </a:p>
         </p:txBody>
@@ -6191,7 +6191,7 @@
                 </a:solidFill>
                 <a:latin typeface="Segoe UI"/>
               </a:rPr>
-              <a:t>Russell 2000</a:t>
+              <a:t>S&amp;P 500</a:t>
             </a:r>
           </a:p>
         </p:txBody>
@@ -6327,7 +6327,7 @@
                 </a:solidFill>
                 <a:latin typeface="Segoe UI"/>
               </a:rPr>
-              <a:t>Amazon</a:t>
+              <a:t>US 1-3Y Treasury</a:t>
             </a:r>
           </a:p>
         </p:txBody>
@@ -6429,7 +6429,7 @@
                 </a:solidFill>
                 <a:latin typeface="Segoe UI"/>
               </a:rPr>
-              <a:t>above 200DMA · golden cross (50&gt;200) · MACD bearish</a:t>
+              <a:t>above 200DMA · golden cross (50&gt;200) · MACD bullish</a:t>
             </a:r>
           </a:p>
         </p:txBody>
@@ -6463,7 +6463,7 @@
                 </a:solidFill>
                 <a:latin typeface="Segoe UI"/>
               </a:rPr>
-              <a:t>Nikkei 225</a:t>
+              <a:t>Nvidia</a:t>
             </a:r>
           </a:p>
         </p:txBody>
@@ -6531,7 +6531,7 @@
                 </a:solidFill>
                 <a:latin typeface="Segoe UI"/>
               </a:rPr>
-              <a:t>68%</a:t>
+              <a:t>78%</a:t>
             </a:r>
           </a:p>
         </p:txBody>
@@ -6565,7 +6565,7 @@
                 </a:solidFill>
                 <a:latin typeface="Segoe UI"/>
               </a:rPr>
-              <a:t>above 200DMA · golden cross (50&gt;200) · MACD bullish</a:t>
+              <a:t>above 200DMA · golden cross (50&gt;200) · MACD bearish</a:t>
             </a:r>
           </a:p>
         </p:txBody>
@@ -6659,7 +6659,7 @@
                 </a:solidFill>
                 <a:latin typeface="Segoe UI"/>
               </a:rPr>
-              <a:t>Base currency INR · USD/INR 95.69</a:t>
+              <a:t>Base currency INR · USD/INR 95.82</a:t>
             </a:r>
           </a:p>
         </p:txBody>
@@ -7067,7 +7067,7 @@
                 </a:solidFill>
                 <a:latin typeface="Segoe UI"/>
               </a:rPr>
-              <a:t>64,679</a:t>
+              <a:t>69,291</a:t>
             </a:r>
           </a:p>
         </p:txBody>
@@ -7101,7 +7101,7 @@
                 </a:solidFill>
                 <a:latin typeface="Segoe UI"/>
               </a:rPr>
-              <a:t>Rs 618,937</a:t>
+              <a:t>Rs 663,923</a:t>
             </a:r>
           </a:p>
         </p:txBody>
@@ -7135,7 +7135,7 @@
                 </a:solidFill>
                 <a:latin typeface="Segoe UI"/>
               </a:rPr>
-              <a:t>Rs 44,772</a:t>
+              <a:t>Rs 89,025</a:t>
             </a:r>
           </a:p>
         </p:txBody>
@@ -7169,7 +7169,7 @@
                 </a:solidFill>
                 <a:latin typeface="Segoe UI"/>
               </a:rPr>
-              <a:t>+7.8%</a:t>
+              <a:t>+15.5%</a:t>
             </a:r>
           </a:p>
         </p:txBody>
@@ -7339,7 +7339,7 @@
                 </a:solidFill>
                 <a:latin typeface="Segoe UI"/>
               </a:rPr>
-              <a:t>4,386</a:t>
+              <a:t>4,578</a:t>
             </a:r>
           </a:p>
         </p:txBody>
@@ -7373,7 +7373,7 @@
                 </a:solidFill>
                 <a:latin typeface="Segoe UI"/>
               </a:rPr>
-              <a:t>Rs 419,762</a:t>
+              <a:t>Rs 438,600</a:t>
             </a:r>
           </a:p>
         </p:txBody>
@@ -7407,7 +7407,7 @@
                 </a:solidFill>
                 <a:latin typeface="Segoe UI"/>
               </a:rPr>
-              <a:t>Rs 199,666</a:t>
+              <a:t>Rs 218,222</a:t>
             </a:r>
           </a:p>
         </p:txBody>
@@ -7441,7 +7441,7 @@
                 </a:solidFill>
                 <a:latin typeface="Segoe UI"/>
               </a:rPr>
-              <a:t>+90.7%</a:t>
+              <a:t>+99.0%</a:t>
             </a:r>
           </a:p>
         </p:txBody>
@@ -7611,7 +7611,7 @@
                 </a:solidFill>
                 <a:latin typeface="Segoe UI"/>
               </a:rPr>
-              <a:t>310</a:t>
+              <a:t>317</a:t>
             </a:r>
           </a:p>
         </p:txBody>
@@ -7645,7 +7645,7 @@
                 </a:solidFill>
                 <a:latin typeface="Segoe UI"/>
               </a:rPr>
-              <a:t>Rs 296,680</a:t>
+              <a:t>Rs 303,575</a:t>
             </a:r>
           </a:p>
         </p:txBody>
@@ -7679,7 +7679,7 @@
                 </a:solidFill>
                 <a:latin typeface="Segoe UI"/>
               </a:rPr>
-              <a:t>Rs 119,646</a:t>
+              <a:t>Rs 126,315</a:t>
             </a:r>
           </a:p>
         </p:txBody>
@@ -7713,7 +7713,7 @@
                 </a:solidFill>
                 <a:latin typeface="Segoe UI"/>
               </a:rPr>
-              <a:t>+67.6%</a:t>
+              <a:t>+71.3%</a:t>
             </a:r>
           </a:p>
         </p:txBody>
@@ -7883,7 +7883,7 @@
                 </a:solidFill>
                 <a:latin typeface="Segoe UI"/>
               </a:rPr>
-              <a:t>220</a:t>
+              <a:t>218</a:t>
             </a:r>
           </a:p>
         </p:txBody>
@@ -7917,7 +7917,7 @@
                 </a:solidFill>
                 <a:latin typeface="Segoe UI"/>
               </a:rPr>
-              <a:t>Rs 168,223</a:t>
+              <a:t>Rs 166,767</a:t>
             </a:r>
           </a:p>
         </p:txBody>
@@ -7951,7 +7951,7 @@
                 </a:solidFill>
                 <a:latin typeface="Segoe UI"/>
               </a:rPr>
-              <a:t>Rs -176,276</a:t>
+              <a:t>Rs -178,173</a:t>
             </a:r>
           </a:p>
         </p:txBody>
@@ -7985,7 +7985,7 @@
                 </a:solidFill>
                 <a:latin typeface="Segoe UI"/>
               </a:rPr>
-              <a:t>-51.2%</a:t>
+              <a:t>-51.6%</a:t>
             </a:r>
           </a:p>
         </p:txBody>
@@ -8155,7 +8155,7 @@
                 </a:solidFill>
                 <a:latin typeface="Segoe UI"/>
               </a:rPr>
-              <a:t>1,140</a:t>
+              <a:t>1,120</a:t>
             </a:r>
           </a:p>
         </p:txBody>
@@ -8189,7 +8189,7 @@
                 </a:solidFill>
                 <a:latin typeface="Segoe UI"/>
               </a:rPr>
-              <a:t>Rs 91,192</a:t>
+              <a:t>Rs 89,584</a:t>
             </a:r>
           </a:p>
         </p:txBody>
@@ -8223,7 +8223,7 @@
                 </a:solidFill>
                 <a:latin typeface="Segoe UI"/>
               </a:rPr>
-              <a:t>Rs -20,808</a:t>
+              <a:t>Rs -22,416</a:t>
             </a:r>
           </a:p>
         </p:txBody>
@@ -8257,7 +8257,7 @@
                 </a:solidFill>
                 <a:latin typeface="Segoe UI"/>
               </a:rPr>
-              <a:t>-18.6%</a:t>
+              <a:t>-20.0%</a:t>
             </a:r>
           </a:p>
         </p:txBody>
@@ -8427,7 +8427,7 @@
                 </a:solidFill>
                 <a:latin typeface="Segoe UI"/>
               </a:rPr>
-              <a:t>1,316</a:t>
+              <a:t>1,311</a:t>
             </a:r>
           </a:p>
         </p:txBody>
@@ -8461,7 +8461,7 @@
                 </a:solidFill>
                 <a:latin typeface="Segoe UI"/>
               </a:rPr>
-              <a:t>Rs 65,800</a:t>
+              <a:t>Rs 65,550</a:t>
             </a:r>
           </a:p>
         </p:txBody>
@@ -8495,7 +8495,7 @@
                 </a:solidFill>
                 <a:latin typeface="Segoe UI"/>
               </a:rPr>
-              <a:t>Rs -56,700</a:t>
+              <a:t>Rs -56,950</a:t>
             </a:r>
           </a:p>
         </p:txBody>
@@ -8529,7 +8529,7 @@
                 </a:solidFill>
                 <a:latin typeface="Segoe UI"/>
               </a:rPr>
-              <a:t>-46.3%</a:t>
+              <a:t>-46.5%</a:t>
             </a:r>
           </a:p>
         </p:txBody>
@@ -8699,7 +8699,7 @@
                 </a:solidFill>
                 <a:latin typeface="Segoe UI"/>
               </a:rPr>
-              <a:t>2,313</a:t>
+              <a:t>2,289</a:t>
             </a:r>
           </a:p>
         </p:txBody>
@@ -8733,7 +8733,7 @@
                 </a:solidFill>
                 <a:latin typeface="Segoe UI"/>
               </a:rPr>
-              <a:t>Rs 57,830</a:t>
+              <a:t>Rs 57,225</a:t>
             </a:r>
           </a:p>
         </p:txBody>
@@ -8767,7 +8767,7 @@
                 </a:solidFill>
                 <a:latin typeface="Segoe UI"/>
               </a:rPr>
-              <a:t>Rs -32,170</a:t>
+              <a:t>Rs -32,775</a:t>
             </a:r>
           </a:p>
         </p:txBody>
@@ -8801,7 +8801,7 @@
                 </a:solidFill>
                 <a:latin typeface="Segoe UI"/>
               </a:rPr>
-              <a:t>-35.7%</a:t>
+              <a:t>-36.4%</a:t>
             </a:r>
           </a:p>
         </p:txBody>
@@ -8971,7 +8971,7 @@
                 </a:solidFill>
                 <a:latin typeface="Segoe UI"/>
               </a:rPr>
-              <a:t>729</a:t>
+              <a:t>720</a:t>
             </a:r>
           </a:p>
         </p:txBody>
@@ -9005,7 +9005,7 @@
                 </a:solidFill>
                 <a:latin typeface="Segoe UI"/>
               </a:rPr>
-              <a:t>Rs 43,740</a:t>
+              <a:t>Rs 43,200</a:t>
             </a:r>
           </a:p>
         </p:txBody>
@@ -9039,7 +9039,7 @@
                 </a:solidFill>
                 <a:latin typeface="Segoe UI"/>
               </a:rPr>
-              <a:t>Rs -47,460</a:t>
+              <a:t>Rs -48,000</a:t>
             </a:r>
           </a:p>
         </p:txBody>
@@ -9073,7 +9073,7 @@
                 </a:solidFill>
                 <a:latin typeface="Segoe UI"/>
               </a:rPr>
-              <a:t>-52.0%</a:t>
+              <a:t>-52.6%</a:t>
             </a:r>
           </a:p>
         </p:txBody>
@@ -9141,7 +9141,7 @@
                 </a:solidFill>
                 <a:latin typeface="Segoe UI"/>
               </a:rPr>
-              <a:t>Total Rs 1,762,164 | P&amp;L Rs 30,670 (+1.8%) | Sharpe -0.4 | Vol 17.7% | VaR95 -1.81%/day</a:t>
+              <a:t>Total Rs 1,828,423 | P&amp;L Rs 95,248 (+5.5%) | Sharpe -0.23 | Vol 18.44% | VaR95 -1.82%/day</a:t>
             </a:r>
           </a:p>
         </p:txBody>

--- a/docs/pmr_daily.pptx
+++ b/docs/pmr_daily.pptx
@@ -3197,7 +3197,7 @@
                 </a:solidFill>
                 <a:latin typeface="Segoe UI"/>
               </a:rPr>
-              <a:t>Thursday, 20 Aug 2026 07:23 SGT</a:t>
+              <a:t>Friday, 21 Aug 2026 07:25 SGT</a:t>
             </a:r>
           </a:p>
         </p:txBody>
@@ -3265,7 +3265,7 @@
                 </a:solidFill>
                 <a:latin typeface="Segoe UI"/>
               </a:rPr>
-              <a:t>RAG 12R / 15A / 19G   |   65.2% above 200DMA   |   Portfolio Rs 1,828,423 (+5.5%)</a:t>
+              <a:t>RAG 12R / 18A / 16G   |   63.0% above 200DMA   |   Portfolio Rs 1,856,686 (+7.4%)</a:t>
             </a:r>
           </a:p>
         </p:txBody>
@@ -3529,7 +3529,7 @@
                 </a:solidFill>
                 <a:latin typeface="Segoe UI"/>
               </a:rPr>
-              <a:t>+20.8%</a:t>
+              <a:t>+25.5%</a:t>
             </a:r>
           </a:p>
         </p:txBody>
@@ -3655,7 +3655,7 @@
                 </a:solidFill>
                 <a:latin typeface="Segoe UI"/>
               </a:rPr>
-              <a:t>+17.2%</a:t>
+              <a:t>+20.5%</a:t>
             </a:r>
           </a:p>
         </p:txBody>
@@ -3781,7 +3781,7 @@
                 </a:solidFill>
                 <a:latin typeface="Segoe UI"/>
               </a:rPr>
-              <a:t>+16.5%</a:t>
+              <a:t>+18.8%</a:t>
             </a:r>
           </a:p>
         </p:txBody>
@@ -3839,7 +3839,7 @@
                 </a:solidFill>
                 <a:latin typeface="Segoe UI"/>
               </a:rPr>
-              <a:t>Gold</a:t>
+              <a:t>Bitcoin</a:t>
             </a:r>
           </a:p>
         </p:txBody>
@@ -3873,7 +3873,7 @@
                 </a:solidFill>
                 <a:latin typeface="Segoe UI"/>
               </a:rPr>
-              <a:t>GC=F · AMBER</a:t>
+              <a:t>BTC-USD · AMBER</a:t>
             </a:r>
           </a:p>
         </p:txBody>
@@ -3907,7 +3907,7 @@
                 </a:solidFill>
                 <a:latin typeface="Segoe UI"/>
               </a:rPr>
-              <a:t>+13.0%</a:t>
+              <a:t>+16.5%</a:t>
             </a:r>
           </a:p>
         </p:txBody>
@@ -3965,7 +3965,7 @@
                 </a:solidFill>
                 <a:latin typeface="Segoe UI"/>
               </a:rPr>
-              <a:t>Tesla</a:t>
+              <a:t>Gold</a:t>
             </a:r>
           </a:p>
         </p:txBody>
@@ -3995,11 +3995,11 @@
             <a:r>
               <a:rPr sz="900" b="0">
                 <a:solidFill>
-                  <a:srgbClr val="EF4444"/>
-                </a:solidFill>
-                <a:latin typeface="Segoe UI"/>
-              </a:rPr>
-              <a:t>TSLA · RED</a:t>
+                  <a:srgbClr val="F59E0B"/>
+                </a:solidFill>
+                <a:latin typeface="Segoe UI"/>
+              </a:rPr>
+              <a:t>GC=F · AMBER</a:t>
             </a:r>
           </a:p>
         </p:txBody>
@@ -4033,7 +4033,7 @@
                 </a:solidFill>
                 <a:latin typeface="Segoe UI"/>
               </a:rPr>
-              <a:t>+12.8%</a:t>
+              <a:t>+13.3%</a:t>
             </a:r>
           </a:p>
         </p:txBody>
@@ -4125,7 +4125,7 @@
                 </a:solidFill>
                 <a:latin typeface="Segoe UI"/>
               </a:rPr>
-              <a:t>ITC</a:t>
+              <a:t>Alphabet</a:t>
             </a:r>
           </a:p>
         </p:txBody>
@@ -4155,11 +4155,11 @@
             <a:r>
               <a:rPr sz="900" b="0">
                 <a:solidFill>
-                  <a:srgbClr val="EF4444"/>
-                </a:solidFill>
-                <a:latin typeface="Segoe UI"/>
-              </a:rPr>
-              <a:t>ITC.NS · RED</a:t>
+                  <a:srgbClr val="F59E0B"/>
+                </a:solidFill>
+                <a:latin typeface="Segoe UI"/>
+              </a:rPr>
+              <a:t>GOOGL · AMBER</a:t>
             </a:r>
           </a:p>
         </p:txBody>
@@ -4193,7 +4193,7 @@
                 </a:solidFill>
                 <a:latin typeface="Segoe UI"/>
               </a:rPr>
-              <a:t>-5.0%</a:t>
+              <a:t>-4.3%</a:t>
             </a:r>
           </a:p>
         </p:txBody>
@@ -4251,7 +4251,7 @@
                 </a:solidFill>
                 <a:latin typeface="Segoe UI"/>
               </a:rPr>
-              <a:t>HDFC Bank</a:t>
+              <a:t>Amazon</a:t>
             </a:r>
           </a:p>
         </p:txBody>
@@ -4281,11 +4281,11 @@
             <a:r>
               <a:rPr sz="900" b="0">
                 <a:solidFill>
-                  <a:srgbClr val="EF4444"/>
-                </a:solidFill>
-                <a:latin typeface="Segoe UI"/>
-              </a:rPr>
-              <a:t>HDFCBANK.NS · RED</a:t>
+                  <a:srgbClr val="F59E0B"/>
+                </a:solidFill>
+                <a:latin typeface="Segoe UI"/>
+              </a:rPr>
+              <a:t>AMZN · AMBER</a:t>
             </a:r>
           </a:p>
         </p:txBody>
@@ -4319,7 +4319,7 @@
                 </a:solidFill>
                 <a:latin typeface="Segoe UI"/>
               </a:rPr>
-              <a:t>-3.8%</a:t>
+              <a:t>-4.2%</a:t>
             </a:r>
           </a:p>
         </p:txBody>
@@ -4377,7 +4377,7 @@
                 </a:solidFill>
                 <a:latin typeface="Segoe UI"/>
               </a:rPr>
-              <a:t>TCS</a:t>
+              <a:t>ITC</a:t>
             </a:r>
           </a:p>
         </p:txBody>
@@ -4411,7 +4411,7 @@
                 </a:solidFill>
                 <a:latin typeface="Segoe UI"/>
               </a:rPr>
-              <a:t>TCS.NS · RED</a:t>
+              <a:t>ITC.NS · RED</a:t>
             </a:r>
           </a:p>
         </p:txBody>
@@ -4445,7 +4445,7 @@
                 </a:solidFill>
                 <a:latin typeface="Segoe UI"/>
               </a:rPr>
-              <a:t>-3.2%</a:t>
+              <a:t>-3.3%</a:t>
             </a:r>
           </a:p>
         </p:txBody>
@@ -4503,7 +4503,7 @@
                 </a:solidFill>
                 <a:latin typeface="Segoe UI"/>
               </a:rPr>
-              <a:t>Alphabet</a:t>
+              <a:t>HDFC Bank</a:t>
             </a:r>
           </a:p>
         </p:txBody>
@@ -4533,11 +4533,11 @@
             <a:r>
               <a:rPr sz="900" b="0">
                 <a:solidFill>
-                  <a:srgbClr val="F59E0B"/>
-                </a:solidFill>
-                <a:latin typeface="Segoe UI"/>
-              </a:rPr>
-              <a:t>GOOGL · AMBER</a:t>
+                  <a:srgbClr val="EF4444"/>
+                </a:solidFill>
+                <a:latin typeface="Segoe UI"/>
+              </a:rPr>
+              <a:t>HDFCBANK.NS · RED</a:t>
             </a:r>
           </a:p>
         </p:txBody>
@@ -4571,7 +4571,7 @@
                 </a:solidFill>
                 <a:latin typeface="Segoe UI"/>
               </a:rPr>
-              <a:t>-3.2%</a:t>
+              <a:t>-3.1%</a:t>
             </a:r>
           </a:p>
         </p:txBody>
@@ -4629,7 +4629,7 @@
                 </a:solidFill>
                 <a:latin typeface="Segoe UI"/>
               </a:rPr>
-              <a:t>Bharti Airtel</a:t>
+              <a:t>TCS</a:t>
             </a:r>
           </a:p>
         </p:txBody>
@@ -4659,11 +4659,11 @@
             <a:r>
               <a:rPr sz="900" b="0">
                 <a:solidFill>
-                  <a:srgbClr val="F59E0B"/>
-                </a:solidFill>
-                <a:latin typeface="Segoe UI"/>
-              </a:rPr>
-              <a:t>BHARTIARTL.NS · AMBER</a:t>
+                  <a:srgbClr val="EF4444"/>
+                </a:solidFill>
+                <a:latin typeface="Segoe UI"/>
+              </a:rPr>
+              <a:t>TCS.NS · RED</a:t>
             </a:r>
           </a:p>
         </p:txBody>
@@ -4697,7 +4697,7 @@
                 </a:solidFill>
                 <a:latin typeface="Segoe UI"/>
               </a:rPr>
-              <a:t>-2.5%</a:t>
+              <a:t>-2.9%</a:t>
             </a:r>
           </a:p>
         </p:txBody>
@@ -5035,7 +5035,7 @@
                 </a:solidFill>
                 <a:latin typeface="Segoe UI"/>
               </a:rPr>
-              <a:t>84%</a:t>
+              <a:t>83%</a:t>
             </a:r>
           </a:p>
         </p:txBody>
@@ -5171,7 +5171,7 @@
                 </a:solidFill>
                 <a:latin typeface="Segoe UI"/>
               </a:rPr>
-              <a:t>83%</a:t>
+              <a:t>82%</a:t>
             </a:r>
           </a:p>
         </p:txBody>
@@ -5239,7 +5239,7 @@
                 </a:solidFill>
                 <a:latin typeface="Segoe UI"/>
               </a:rPr>
-              <a:t>Dow Jones</a:t>
+              <a:t>DAX</a:t>
             </a:r>
           </a:p>
         </p:txBody>
@@ -5375,7 +5375,7 @@
                 </a:solidFill>
                 <a:latin typeface="Segoe UI"/>
               </a:rPr>
-              <a:t>DAX</a:t>
+              <a:t>US Energy</a:t>
             </a:r>
           </a:p>
         </p:txBody>
@@ -5409,7 +5409,7 @@
                 </a:solidFill>
                 <a:latin typeface="Segoe UI"/>
               </a:rPr>
-              <a:t>STRONG BUY</a:t>
+              <a:t>BUY</a:t>
             </a:r>
           </a:p>
         </p:txBody>
@@ -5443,7 +5443,7 @@
                 </a:solidFill>
                 <a:latin typeface="Segoe UI"/>
               </a:rPr>
-              <a:t>80%</a:t>
+              <a:t>94%</a:t>
             </a:r>
           </a:p>
         </p:txBody>
@@ -5477,7 +5477,7 @@
                 </a:solidFill>
                 <a:latin typeface="Segoe UI"/>
               </a:rPr>
-              <a:t>above 200DMA · golden cross (50&gt;200) · MACD bearish</a:t>
+              <a:t>above 200DMA · golden cross (50&gt;200) · MACD bullish</a:t>
             </a:r>
           </a:p>
         </p:txBody>
@@ -5511,7 +5511,7 @@
                 </a:solidFill>
                 <a:latin typeface="Segoe UI"/>
               </a:rPr>
-              <a:t>Amazon</a:t>
+              <a:t>Bitcoin</a:t>
             </a:r>
           </a:p>
         </p:txBody>
@@ -5545,7 +5545,7 @@
                 </a:solidFill>
                 <a:latin typeface="Segoe UI"/>
               </a:rPr>
-              <a:t>STRONG BUY</a:t>
+              <a:t>BUY</a:t>
             </a:r>
           </a:p>
         </p:txBody>
@@ -5579,7 +5579,7 @@
                 </a:solidFill>
                 <a:latin typeface="Segoe UI"/>
               </a:rPr>
-              <a:t>80%</a:t>
+              <a:t>71%</a:t>
             </a:r>
           </a:p>
         </p:txBody>
@@ -5613,7 +5613,7 @@
                 </a:solidFill>
                 <a:latin typeface="Segoe UI"/>
               </a:rPr>
-              <a:t>above 200DMA · golden cross (50&gt;200) · MACD bearish</a:t>
+              <a:t>above 200DMA · death cross (50&lt;200) · MACD bullish</a:t>
             </a:r>
           </a:p>
         </p:txBody>
@@ -5647,7 +5647,7 @@
                 </a:solidFill>
                 <a:latin typeface="Segoe UI"/>
               </a:rPr>
-              <a:t>US Energy</a:t>
+              <a:t>Straits Times</a:t>
             </a:r>
           </a:p>
         </p:txBody>
@@ -5715,7 +5715,7 @@
                 </a:solidFill>
                 <a:latin typeface="Segoe UI"/>
               </a:rPr>
-              <a:t>93%</a:t>
+              <a:t>70%</a:t>
             </a:r>
           </a:p>
         </p:txBody>
@@ -5749,7 +5749,7 @@
                 </a:solidFill>
                 <a:latin typeface="Segoe UI"/>
               </a:rPr>
-              <a:t>above 200DMA · golden cross (50&gt;200) · MACD bullish</a:t>
+              <a:t>above 200DMA · golden cross (50&gt;200) · MACD bearish</a:t>
             </a:r>
           </a:p>
         </p:txBody>
@@ -5783,7 +5783,7 @@
                 </a:solidFill>
                 <a:latin typeface="Segoe UI"/>
               </a:rPr>
-              <a:t>Straits Times</a:t>
+              <a:t>Gold</a:t>
             </a:r>
           </a:p>
         </p:txBody>
@@ -5885,7 +5885,7 @@
                 </a:solidFill>
                 <a:latin typeface="Segoe UI"/>
               </a:rPr>
-              <a:t>above 200DMA · golden cross (50&gt;200) · MACD bearish</a:t>
+              <a:t>above 200DMA · death cross (50&lt;200) · MACD bullish</a:t>
             </a:r>
           </a:p>
         </p:txBody>
@@ -5919,7 +5919,7 @@
                 </a:solidFill>
                 <a:latin typeface="Segoe UI"/>
               </a:rPr>
-              <a:t>Gold</a:t>
+              <a:t>EUR/USD</a:t>
             </a:r>
           </a:p>
         </p:txBody>
@@ -5987,7 +5987,7 @@
                 </a:solidFill>
                 <a:latin typeface="Segoe UI"/>
               </a:rPr>
-              <a:t>70%</a:t>
+              <a:t>68%</a:t>
             </a:r>
           </a:p>
         </p:txBody>
@@ -6055,7 +6055,7 @@
                 </a:solidFill>
                 <a:latin typeface="Segoe UI"/>
               </a:rPr>
-              <a:t>Bitcoin</a:t>
+              <a:t>US 1-3Y Treasury</a:t>
             </a:r>
           </a:p>
         </p:txBody>
@@ -6123,7 +6123,7 @@
                 </a:solidFill>
                 <a:latin typeface="Segoe UI"/>
               </a:rPr>
-              <a:t>69%</a:t>
+              <a:t>79%</a:t>
             </a:r>
           </a:p>
         </p:txBody>
@@ -6157,7 +6157,7 @@
                 </a:solidFill>
                 <a:latin typeface="Segoe UI"/>
               </a:rPr>
-              <a:t>above 200DMA · death cross (50&lt;200) · MACD bullish</a:t>
+              <a:t>above 200DMA · golden cross (50&gt;200) · MACD bullish</a:t>
             </a:r>
           </a:p>
         </p:txBody>
@@ -6191,7 +6191,7 @@
                 </a:solidFill>
                 <a:latin typeface="Segoe UI"/>
               </a:rPr>
-              <a:t>S&amp;P 500</a:t>
+              <a:t>Crude Oil WTI</a:t>
             </a:r>
           </a:p>
         </p:txBody>
@@ -6259,7 +6259,7 @@
                 </a:solidFill>
                 <a:latin typeface="Segoe UI"/>
               </a:rPr>
-              <a:t>68%</a:t>
+              <a:t>67%</a:t>
             </a:r>
           </a:p>
         </p:txBody>
@@ -6293,7 +6293,7 @@
                 </a:solidFill>
                 <a:latin typeface="Segoe UI"/>
               </a:rPr>
-              <a:t>above 200DMA · golden cross (50&gt;200) · MACD bearish</a:t>
+              <a:t>above 200DMA · death cross (50&lt;200) · MACD bullish</a:t>
             </a:r>
           </a:p>
         </p:txBody>
@@ -6327,7 +6327,7 @@
                 </a:solidFill>
                 <a:latin typeface="Segoe UI"/>
               </a:rPr>
-              <a:t>US 1-3Y Treasury</a:t>
+              <a:t>S&amp;P 500</a:t>
             </a:r>
           </a:p>
         </p:txBody>
@@ -6395,7 +6395,7 @@
                 </a:solidFill>
                 <a:latin typeface="Segoe UI"/>
               </a:rPr>
-              <a:t>74%</a:t>
+              <a:t>67%</a:t>
             </a:r>
           </a:p>
         </p:txBody>
@@ -6429,7 +6429,7 @@
                 </a:solidFill>
                 <a:latin typeface="Segoe UI"/>
               </a:rPr>
-              <a:t>above 200DMA · golden cross (50&gt;200) · MACD bullish</a:t>
+              <a:t>above 200DMA · golden cross (50&gt;200) · MACD bearish</a:t>
             </a:r>
           </a:p>
         </p:txBody>
@@ -6659,7 +6659,7 @@
                 </a:solidFill>
                 <a:latin typeface="Segoe UI"/>
               </a:rPr>
-              <a:t>Base currency INR · USD/INR 95.82</a:t>
+              <a:t>Base currency INR · USD/INR 95.5</a:t>
             </a:r>
           </a:p>
         </p:txBody>
@@ -7067,7 +7067,7 @@
                 </a:solidFill>
                 <a:latin typeface="Segoe UI"/>
               </a:rPr>
-              <a:t>69,291</a:t>
+              <a:t>73,167</a:t>
             </a:r>
           </a:p>
         </p:txBody>
@@ -7101,7 +7101,7 @@
                 </a:solidFill>
                 <a:latin typeface="Segoe UI"/>
               </a:rPr>
-              <a:t>Rs 663,923</a:t>
+              <a:t>Rs 698,716</a:t>
             </a:r>
           </a:p>
         </p:txBody>
@@ -7135,7 +7135,7 @@
                 </a:solidFill>
                 <a:latin typeface="Segoe UI"/>
               </a:rPr>
-              <a:t>Rs 89,025</a:t>
+              <a:t>Rs 125,740</a:t>
             </a:r>
           </a:p>
         </p:txBody>
@@ -7169,7 +7169,7 @@
                 </a:solidFill>
                 <a:latin typeface="Segoe UI"/>
               </a:rPr>
-              <a:t>+15.5%</a:t>
+              <a:t>+21.9%</a:t>
             </a:r>
           </a:p>
         </p:txBody>
@@ -7339,7 +7339,7 @@
                 </a:solidFill>
                 <a:latin typeface="Segoe UI"/>
               </a:rPr>
-              <a:t>4,578</a:t>
+              <a:t>4,587</a:t>
             </a:r>
           </a:p>
         </p:txBody>
@@ -7373,7 +7373,7 @@
                 </a:solidFill>
                 <a:latin typeface="Segoe UI"/>
               </a:rPr>
-              <a:t>Rs 438,600</a:t>
+              <a:t>Rs 438,012</a:t>
             </a:r>
           </a:p>
         </p:txBody>
@@ -7407,7 +7407,7 @@
                 </a:solidFill>
                 <a:latin typeface="Segoe UI"/>
               </a:rPr>
-              <a:t>Rs 218,222</a:t>
+              <a:t>Rs 218,371</a:t>
             </a:r>
           </a:p>
         </p:txBody>
@@ -7441,7 +7441,7 @@
                 </a:solidFill>
                 <a:latin typeface="Segoe UI"/>
               </a:rPr>
-              <a:t>+99.0%</a:t>
+              <a:t>+99.4%</a:t>
             </a:r>
           </a:p>
         </p:txBody>
@@ -7611,7 +7611,7 @@
                 </a:solidFill>
                 <a:latin typeface="Segoe UI"/>
               </a:rPr>
-              <a:t>317</a:t>
+              <a:t>311</a:t>
             </a:r>
           </a:p>
         </p:txBody>
@@ -7645,7 +7645,7 @@
                 </a:solidFill>
                 <a:latin typeface="Segoe UI"/>
               </a:rPr>
-              <a:t>Rs 303,575</a:t>
+              <a:t>Rs 297,279</a:t>
             </a:r>
           </a:p>
         </p:txBody>
@@ -7679,7 +7679,7 @@
                 </a:solidFill>
                 <a:latin typeface="Segoe UI"/>
               </a:rPr>
-              <a:t>Rs 126,315</a:t>
+              <a:t>Rs 120,611</a:t>
             </a:r>
           </a:p>
         </p:txBody>
@@ -7713,7 +7713,7 @@
                 </a:solidFill>
                 <a:latin typeface="Segoe UI"/>
               </a:rPr>
-              <a:t>+71.3%</a:t>
+              <a:t>+68.3%</a:t>
             </a:r>
           </a:p>
         </p:txBody>
@@ -7883,7 +7883,7 @@
                 </a:solidFill>
                 <a:latin typeface="Segoe UI"/>
               </a:rPr>
-              <a:t>218</a:t>
+              <a:t>217</a:t>
             </a:r>
           </a:p>
         </p:txBody>
@@ -7917,7 +7917,7 @@
                 </a:solidFill>
                 <a:latin typeface="Segoe UI"/>
               </a:rPr>
-              <a:t>Rs 166,767</a:t>
+              <a:t>Rs 165,666</a:t>
             </a:r>
           </a:p>
         </p:txBody>
@@ -7951,7 +7951,7 @@
                 </a:solidFill>
                 <a:latin typeface="Segoe UI"/>
               </a:rPr>
-              <a:t>Rs -178,173</a:t>
+              <a:t>Rs -178,119</a:t>
             </a:r>
           </a:p>
         </p:txBody>
@@ -7985,7 +7985,7 @@
                 </a:solidFill>
                 <a:latin typeface="Segoe UI"/>
               </a:rPr>
-              <a:t>-51.6%</a:t>
+              <a:t>-51.8%</a:t>
             </a:r>
           </a:p>
         </p:txBody>
@@ -8155,7 +8155,7 @@
                 </a:solidFill>
                 <a:latin typeface="Segoe UI"/>
               </a:rPr>
-              <a:t>1,120</a:t>
+              <a:t>1,130</a:t>
             </a:r>
           </a:p>
         </p:txBody>
@@ -8189,7 +8189,7 @@
                 </a:solidFill>
                 <a:latin typeface="Segoe UI"/>
               </a:rPr>
-              <a:t>Rs 89,584</a:t>
+              <a:t>Rs 90,400</a:t>
             </a:r>
           </a:p>
         </p:txBody>
@@ -8223,7 +8223,7 @@
                 </a:solidFill>
                 <a:latin typeface="Segoe UI"/>
               </a:rPr>
-              <a:t>Rs -22,416</a:t>
+              <a:t>Rs -21,600</a:t>
             </a:r>
           </a:p>
         </p:txBody>
@@ -8257,7 +8257,7 @@
                 </a:solidFill>
                 <a:latin typeface="Segoe UI"/>
               </a:rPr>
-              <a:t>-20.0%</a:t>
+              <a:t>-19.3%</a:t>
             </a:r>
           </a:p>
         </p:txBody>
@@ -8427,7 +8427,7 @@
                 </a:solidFill>
                 <a:latin typeface="Segoe UI"/>
               </a:rPr>
-              <a:t>1,311</a:t>
+              <a:t>1,313</a:t>
             </a:r>
           </a:p>
         </p:txBody>
@@ -8461,7 +8461,7 @@
                 </a:solidFill>
                 <a:latin typeface="Segoe UI"/>
               </a:rPr>
-              <a:t>Rs 65,550</a:t>
+              <a:t>Rs 65,660</a:t>
             </a:r>
           </a:p>
         </p:txBody>
@@ -8495,7 +8495,7 @@
                 </a:solidFill>
                 <a:latin typeface="Segoe UI"/>
               </a:rPr>
-              <a:t>Rs -56,950</a:t>
+              <a:t>Rs -56,840</a:t>
             </a:r>
           </a:p>
         </p:txBody>
@@ -8529,7 +8529,7 @@
                 </a:solidFill>
                 <a:latin typeface="Segoe UI"/>
               </a:rPr>
-              <a:t>-46.5%</a:t>
+              <a:t>-46.4%</a:t>
             </a:r>
           </a:p>
         </p:txBody>
@@ -8699,7 +8699,7 @@
                 </a:solidFill>
                 <a:latin typeface="Segoe UI"/>
               </a:rPr>
-              <a:t>2,289</a:t>
+              <a:t>2,298</a:t>
             </a:r>
           </a:p>
         </p:txBody>
@@ -8733,7 +8733,7 @@
                 </a:solidFill>
                 <a:latin typeface="Segoe UI"/>
               </a:rPr>
-              <a:t>Rs 57,225</a:t>
+              <a:t>Rs 57,450</a:t>
             </a:r>
           </a:p>
         </p:txBody>
@@ -8767,7 +8767,7 @@
                 </a:solidFill>
                 <a:latin typeface="Segoe UI"/>
               </a:rPr>
-              <a:t>Rs -32,775</a:t>
+              <a:t>Rs -32,550</a:t>
             </a:r>
           </a:p>
         </p:txBody>
@@ -8801,7 +8801,7 @@
                 </a:solidFill>
                 <a:latin typeface="Segoe UI"/>
               </a:rPr>
-              <a:t>-36.4%</a:t>
+              <a:t>-36.2%</a:t>
             </a:r>
           </a:p>
         </p:txBody>
@@ -8971,7 +8971,7 @@
                 </a:solidFill>
                 <a:latin typeface="Segoe UI"/>
               </a:rPr>
-              <a:t>720</a:t>
+              <a:t>725</a:t>
             </a:r>
           </a:p>
         </p:txBody>
@@ -9005,7 +9005,7 @@
                 </a:solidFill>
                 <a:latin typeface="Segoe UI"/>
               </a:rPr>
-              <a:t>Rs 43,200</a:t>
+              <a:t>Rs 43,503</a:t>
             </a:r>
           </a:p>
         </p:txBody>
@@ -9039,7 +9039,7 @@
                 </a:solidFill>
                 <a:latin typeface="Segoe UI"/>
               </a:rPr>
-              <a:t>Rs -48,000</a:t>
+              <a:t>Rs -47,697</a:t>
             </a:r>
           </a:p>
         </p:txBody>
@@ -9073,7 +9073,7 @@
                 </a:solidFill>
                 <a:latin typeface="Segoe UI"/>
               </a:rPr>
-              <a:t>-52.6%</a:t>
+              <a:t>-52.3%</a:t>
             </a:r>
           </a:p>
         </p:txBody>
@@ -9141,7 +9141,7 @@
                 </a:solidFill>
                 <a:latin typeface="Segoe UI"/>
               </a:rPr>
-              <a:t>Total Rs 1,828,423 | P&amp;L Rs 95,248 (+5.5%) | Sharpe -0.23 | Vol 18.44% | VaR95 -1.82%/day</a:t>
+              <a:t>Total Rs 1,856,686 | P&amp;L Rs 127,916 (+7.4%) | Sharpe -0.09 | Vol 18.76% | VaR95 -1.84%/day</a:t>
             </a:r>
           </a:p>
         </p:txBody>

--- a/docs/pmr_daily.pptx
+++ b/docs/pmr_daily.pptx
@@ -3197,7 +3197,7 @@
                 </a:solidFill>
                 <a:latin typeface="Segoe UI"/>
               </a:rPr>
-              <a:t>Friday, 21 Aug 2026 07:25 SGT</a:t>
+              <a:t>Monday, 24 Aug 2026 07:20 SGT</a:t>
             </a:r>
           </a:p>
         </p:txBody>
@@ -3265,7 +3265,7 @@
                 </a:solidFill>
                 <a:latin typeface="Segoe UI"/>
               </a:rPr>
-              <a:t>RAG 12R / 18A / 16G   |   63.0% above 200DMA   |   Portfolio Rs 1,856,686 (+7.4%)</a:t>
+              <a:t>RAG 11R / 20A / 15G   |   69.6% above 200DMA   |   Portfolio Rs 1,905,142 (+10.0%)</a:t>
             </a:r>
           </a:p>
         </p:txBody>
@@ -3491,11 +3491,11 @@
             <a:r>
               <a:rPr sz="900" b="0">
                 <a:solidFill>
-                  <a:srgbClr val="EF4444"/>
-                </a:solidFill>
-                <a:latin typeface="Segoe UI"/>
-              </a:rPr>
-              <a:t>ETH-USD · RED</a:t>
+                  <a:srgbClr val="F59E0B"/>
+                </a:solidFill>
+                <a:latin typeface="Segoe UI"/>
+              </a:rPr>
+              <a:t>ETH-USD · AMBER</a:t>
             </a:r>
           </a:p>
         </p:txBody>
@@ -3529,7 +3529,7 @@
                 </a:solidFill>
                 <a:latin typeface="Segoe UI"/>
               </a:rPr>
-              <a:t>+25.5%</a:t>
+              <a:t>+31.9%</a:t>
             </a:r>
           </a:p>
         </p:txBody>
@@ -3655,7 +3655,7 @@
                 </a:solidFill>
                 <a:latin typeface="Segoe UI"/>
               </a:rPr>
-              <a:t>+20.5%</a:t>
+              <a:t>+31.2%</a:t>
             </a:r>
           </a:p>
         </p:txBody>
@@ -3713,7 +3713,7 @@
                 </a:solidFill>
                 <a:latin typeface="Segoe UI"/>
               </a:rPr>
-              <a:t>Silver</a:t>
+              <a:t>Bitcoin</a:t>
             </a:r>
           </a:p>
         </p:txBody>
@@ -3743,11 +3743,11 @@
             <a:r>
               <a:rPr sz="900" b="0">
                 <a:solidFill>
-                  <a:srgbClr val="EF4444"/>
-                </a:solidFill>
-                <a:latin typeface="Segoe UI"/>
-              </a:rPr>
-              <a:t>SI=F · RED</a:t>
+                  <a:srgbClr val="F59E0B"/>
+                </a:solidFill>
+                <a:latin typeface="Segoe UI"/>
+              </a:rPr>
+              <a:t>BTC-USD · AMBER</a:t>
             </a:r>
           </a:p>
         </p:txBody>
@@ -3781,7 +3781,7 @@
                 </a:solidFill>
                 <a:latin typeface="Segoe UI"/>
               </a:rPr>
-              <a:t>+18.8%</a:t>
+              <a:t>+23.4%</a:t>
             </a:r>
           </a:p>
         </p:txBody>
@@ -3839,7 +3839,7 @@
                 </a:solidFill>
                 <a:latin typeface="Segoe UI"/>
               </a:rPr>
-              <a:t>Bitcoin</a:t>
+              <a:t>Silver</a:t>
             </a:r>
           </a:p>
         </p:txBody>
@@ -3869,11 +3869,11 @@
             <a:r>
               <a:rPr sz="900" b="0">
                 <a:solidFill>
-                  <a:srgbClr val="F59E0B"/>
-                </a:solidFill>
-                <a:latin typeface="Segoe UI"/>
-              </a:rPr>
-              <a:t>BTC-USD · AMBER</a:t>
+                  <a:srgbClr val="EF4444"/>
+                </a:solidFill>
+                <a:latin typeface="Segoe UI"/>
+              </a:rPr>
+              <a:t>SI=F · RED</a:t>
             </a:r>
           </a:p>
         </p:txBody>
@@ -3907,7 +3907,7 @@
                 </a:solidFill>
                 <a:latin typeface="Segoe UI"/>
               </a:rPr>
-              <a:t>+16.5%</a:t>
+              <a:t>+19.8%</a:t>
             </a:r>
           </a:p>
         </p:txBody>
@@ -3965,7 +3965,7 @@
                 </a:solidFill>
                 <a:latin typeface="Segoe UI"/>
               </a:rPr>
-              <a:t>Gold</a:t>
+              <a:t>Tesla</a:t>
             </a:r>
           </a:p>
         </p:txBody>
@@ -3995,11 +3995,11 @@
             <a:r>
               <a:rPr sz="900" b="0">
                 <a:solidFill>
-                  <a:srgbClr val="F59E0B"/>
-                </a:solidFill>
-                <a:latin typeface="Segoe UI"/>
-              </a:rPr>
-              <a:t>GC=F · AMBER</a:t>
+                  <a:srgbClr val="EF4444"/>
+                </a:solidFill>
+                <a:latin typeface="Segoe UI"/>
+              </a:rPr>
+              <a:t>TSLA · RED</a:t>
             </a:r>
           </a:p>
         </p:txBody>
@@ -4033,7 +4033,7 @@
                 </a:solidFill>
                 <a:latin typeface="Segoe UI"/>
               </a:rPr>
-              <a:t>+13.3%</a:t>
+              <a:t>+16.6%</a:t>
             </a:r>
           </a:p>
         </p:txBody>
@@ -4125,7 +4125,7 @@
                 </a:solidFill>
                 <a:latin typeface="Segoe UI"/>
               </a:rPr>
-              <a:t>Alphabet</a:t>
+              <a:t>Amazon</a:t>
             </a:r>
           </a:p>
         </p:txBody>
@@ -4159,7 +4159,7 @@
                 </a:solidFill>
                 <a:latin typeface="Segoe UI"/>
               </a:rPr>
-              <a:t>GOOGL · AMBER</a:t>
+              <a:t>AMZN · AMBER</a:t>
             </a:r>
           </a:p>
         </p:txBody>
@@ -4193,7 +4193,7 @@
                 </a:solidFill>
                 <a:latin typeface="Segoe UI"/>
               </a:rPr>
-              <a:t>-4.3%</a:t>
+              <a:t>-4.8%</a:t>
             </a:r>
           </a:p>
         </p:txBody>
@@ -4251,7 +4251,7 @@
                 </a:solidFill>
                 <a:latin typeface="Segoe UI"/>
               </a:rPr>
-              <a:t>Amazon</a:t>
+              <a:t>ITC</a:t>
             </a:r>
           </a:p>
         </p:txBody>
@@ -4281,11 +4281,11 @@
             <a:r>
               <a:rPr sz="900" b="0">
                 <a:solidFill>
-                  <a:srgbClr val="F59E0B"/>
-                </a:solidFill>
-                <a:latin typeface="Segoe UI"/>
-              </a:rPr>
-              <a:t>AMZN · AMBER</a:t>
+                  <a:srgbClr val="EF4444"/>
+                </a:solidFill>
+                <a:latin typeface="Segoe UI"/>
+              </a:rPr>
+              <a:t>ITC.NS · RED</a:t>
             </a:r>
           </a:p>
         </p:txBody>
@@ -4319,7 +4319,7 @@
                 </a:solidFill>
                 <a:latin typeface="Segoe UI"/>
               </a:rPr>
-              <a:t>-4.2%</a:t>
+              <a:t>-4.1%</a:t>
             </a:r>
           </a:p>
         </p:txBody>
@@ -4377,7 +4377,7 @@
                 </a:solidFill>
                 <a:latin typeface="Segoe UI"/>
               </a:rPr>
-              <a:t>ITC</a:t>
+              <a:t>Alphabet</a:t>
             </a:r>
           </a:p>
         </p:txBody>
@@ -4407,11 +4407,11 @@
             <a:r>
               <a:rPr sz="900" b="0">
                 <a:solidFill>
-                  <a:srgbClr val="EF4444"/>
-                </a:solidFill>
-                <a:latin typeface="Segoe UI"/>
-              </a:rPr>
-              <a:t>ITC.NS · RED</a:t>
+                  <a:srgbClr val="F59E0B"/>
+                </a:solidFill>
+                <a:latin typeface="Segoe UI"/>
+              </a:rPr>
+              <a:t>GOOGL · AMBER</a:t>
             </a:r>
           </a:p>
         </p:txBody>
@@ -4445,7 +4445,7 @@
                 </a:solidFill>
                 <a:latin typeface="Segoe UI"/>
               </a:rPr>
-              <a:t>-3.3%</a:t>
+              <a:t>-3.2%</a:t>
             </a:r>
           </a:p>
         </p:txBody>
@@ -4571,7 +4571,7 @@
                 </a:solidFill>
                 <a:latin typeface="Segoe UI"/>
               </a:rPr>
-              <a:t>-3.1%</a:t>
+              <a:t>-2.8%</a:t>
             </a:r>
           </a:p>
         </p:txBody>
@@ -4697,7 +4697,7 @@
                 </a:solidFill>
                 <a:latin typeface="Segoe UI"/>
               </a:rPr>
-              <a:t>-2.9%</a:t>
+              <a:t>-2.7%</a:t>
             </a:r>
           </a:p>
         </p:txBody>
@@ -4837,7 +4837,7 @@
         <p:spPr>
           <a:xfrm>
             <a:off x="457200" y="1188720"/>
-            <a:ext cx="11247120" cy="5544503"/>
+            <a:ext cx="11247120" cy="5508365"/>
           </a:xfrm>
           <a:prstGeom prst="rect">
             <a:avLst/>
@@ -5307,7 +5307,7 @@
                 </a:solidFill>
                 <a:latin typeface="Segoe UI"/>
               </a:rPr>
-              <a:t>81%</a:t>
+              <a:t>80%</a:t>
             </a:r>
           </a:p>
         </p:txBody>
@@ -5443,7 +5443,7 @@
                 </a:solidFill>
                 <a:latin typeface="Segoe UI"/>
               </a:rPr>
-              <a:t>94%</a:t>
+              <a:t>93%</a:t>
             </a:r>
           </a:p>
         </p:txBody>
@@ -5647,7 +5647,7 @@
                 </a:solidFill>
                 <a:latin typeface="Segoe UI"/>
               </a:rPr>
-              <a:t>Straits Times</a:t>
+              <a:t>Ethereum</a:t>
             </a:r>
           </a:p>
         </p:txBody>
@@ -5715,7 +5715,7 @@
                 </a:solidFill>
                 <a:latin typeface="Segoe UI"/>
               </a:rPr>
-              <a:t>70%</a:t>
+              <a:t>71%</a:t>
             </a:r>
           </a:p>
         </p:txBody>
@@ -5749,7 +5749,7 @@
                 </a:solidFill>
                 <a:latin typeface="Segoe UI"/>
               </a:rPr>
-              <a:t>above 200DMA · golden cross (50&gt;200) · MACD bearish</a:t>
+              <a:t>above 200DMA · death cross (50&lt;200) · MACD bullish</a:t>
             </a:r>
           </a:p>
         </p:txBody>
@@ -5919,7 +5919,7 @@
                 </a:solidFill>
                 <a:latin typeface="Segoe UI"/>
               </a:rPr>
-              <a:t>EUR/USD</a:t>
+              <a:t>Hang Seng</a:t>
             </a:r>
           </a:p>
         </p:txBody>
@@ -5987,7 +5987,7 @@
                 </a:solidFill>
                 <a:latin typeface="Segoe UI"/>
               </a:rPr>
-              <a:t>68%</a:t>
+              <a:t>76%</a:t>
             </a:r>
           </a:p>
         </p:txBody>
@@ -6055,7 +6055,7 @@
                 </a:solidFill>
                 <a:latin typeface="Segoe UI"/>
               </a:rPr>
-              <a:t>US 1-3Y Treasury</a:t>
+              <a:t>Straits Times</a:t>
             </a:r>
           </a:p>
         </p:txBody>
@@ -6123,7 +6123,7 @@
                 </a:solidFill>
                 <a:latin typeface="Segoe UI"/>
               </a:rPr>
-              <a:t>79%</a:t>
+              <a:t>70%</a:t>
             </a:r>
           </a:p>
         </p:txBody>
@@ -6157,7 +6157,7 @@
                 </a:solidFill>
                 <a:latin typeface="Segoe UI"/>
               </a:rPr>
-              <a:t>above 200DMA · golden cross (50&gt;200) · MACD bullish</a:t>
+              <a:t>above 200DMA · golden cross (50&gt;200) · MACD bearish</a:t>
             </a:r>
           </a:p>
         </p:txBody>
@@ -6327,7 +6327,7 @@
                 </a:solidFill>
                 <a:latin typeface="Segoe UI"/>
               </a:rPr>
-              <a:t>S&amp;P 500</a:t>
+              <a:t>FTSE 100</a:t>
             </a:r>
           </a:p>
         </p:txBody>
@@ -6463,7 +6463,7 @@
                 </a:solidFill>
                 <a:latin typeface="Segoe UI"/>
               </a:rPr>
-              <a:t>Nvidia</a:t>
+              <a:t>Copper</a:t>
             </a:r>
           </a:p>
         </p:txBody>
@@ -6531,7 +6531,7 @@
                 </a:solidFill>
                 <a:latin typeface="Segoe UI"/>
               </a:rPr>
-              <a:t>78%</a:t>
+              <a:t>79%</a:t>
             </a:r>
           </a:p>
         </p:txBody>
@@ -6659,7 +6659,7 @@
                 </a:solidFill>
                 <a:latin typeface="Segoe UI"/>
               </a:rPr>
-              <a:t>Base currency INR · USD/INR 95.5</a:t>
+              <a:t>Base currency INR · USD/INR 95.68</a:t>
             </a:r>
           </a:p>
         </p:txBody>
@@ -7067,7 +7067,7 @@
                 </a:solidFill>
                 <a:latin typeface="Segoe UI"/>
               </a:rPr>
-              <a:t>73,167</a:t>
+              <a:t>77,527</a:t>
             </a:r>
           </a:p>
         </p:txBody>
@@ -7101,7 +7101,7 @@
                 </a:solidFill>
                 <a:latin typeface="Segoe UI"/>
               </a:rPr>
-              <a:t>Rs 698,716</a:t>
+              <a:t>Rs 741,777</a:t>
             </a:r>
           </a:p>
         </p:txBody>
@@ -7135,7 +7135,7 @@
                 </a:solidFill>
                 <a:latin typeface="Segoe UI"/>
               </a:rPr>
-              <a:t>Rs 125,740</a:t>
+              <a:t>Rs 167,697</a:t>
             </a:r>
           </a:p>
         </p:txBody>
@@ -7169,7 +7169,7 @@
                 </a:solidFill>
                 <a:latin typeface="Segoe UI"/>
               </a:rPr>
-              <a:t>+21.9%</a:t>
+              <a:t>+29.2%</a:t>
             </a:r>
           </a:p>
         </p:txBody>
@@ -7339,7 +7339,7 @@
                 </a:solidFill>
                 <a:latin typeface="Segoe UI"/>
               </a:rPr>
-              <a:t>4,587</a:t>
+              <a:t>4,665</a:t>
             </a:r>
           </a:p>
         </p:txBody>
@@ -7373,7 +7373,7 @@
                 </a:solidFill>
                 <a:latin typeface="Segoe UI"/>
               </a:rPr>
-              <a:t>Rs 438,012</a:t>
+              <a:t>Rs 446,376</a:t>
             </a:r>
           </a:p>
         </p:txBody>
@@ -7407,7 +7407,7 @@
                 </a:solidFill>
                 <a:latin typeface="Segoe UI"/>
               </a:rPr>
-              <a:t>Rs 218,371</a:t>
+              <a:t>Rs 226,312</a:t>
             </a:r>
           </a:p>
         </p:txBody>
@@ -7441,7 +7441,7 @@
                 </a:solidFill>
                 <a:latin typeface="Segoe UI"/>
               </a:rPr>
-              <a:t>+99.4%</a:t>
+              <a:t>+102.8%</a:t>
             </a:r>
           </a:p>
         </p:txBody>
@@ -7611,7 +7611,7 @@
                 </a:solidFill>
                 <a:latin typeface="Segoe UI"/>
               </a:rPr>
-              <a:t>311</a:t>
+              <a:t>309</a:t>
             </a:r>
           </a:p>
         </p:txBody>
@@ -7645,7 +7645,7 @@
                 </a:solidFill>
                 <a:latin typeface="Segoe UI"/>
               </a:rPr>
-              <a:t>Rs 297,279</a:t>
+              <a:t>Rs 295,986</a:t>
             </a:r>
           </a:p>
         </p:txBody>
@@ -7679,7 +7679,7 @@
                 </a:solidFill>
                 <a:latin typeface="Segoe UI"/>
               </a:rPr>
-              <a:t>Rs 120,611</a:t>
+              <a:t>Rs 118,978</a:t>
             </a:r>
           </a:p>
         </p:txBody>
@@ -7713,7 +7713,7 @@
                 </a:solidFill>
                 <a:latin typeface="Segoe UI"/>
               </a:rPr>
-              <a:t>+68.3%</a:t>
+              <a:t>+67.2%</a:t>
             </a:r>
           </a:p>
         </p:txBody>
@@ -7883,7 +7883,7 @@
                 </a:solidFill>
                 <a:latin typeface="Segoe UI"/>
               </a:rPr>
-              <a:t>217</a:t>
+              <a:t>215</a:t>
             </a:r>
           </a:p>
         </p:txBody>
@@ -7917,7 +7917,7 @@
                 </a:solidFill>
                 <a:latin typeface="Segoe UI"/>
               </a:rPr>
-              <a:t>Rs 165,666</a:t>
+              <a:t>Rs 164,355</a:t>
             </a:r>
           </a:p>
         </p:txBody>
@@ -7951,7 +7951,7 @@
                 </a:solidFill>
                 <a:latin typeface="Segoe UI"/>
               </a:rPr>
-              <a:t>Rs -178,119</a:t>
+              <a:t>Rs -180,093</a:t>
             </a:r>
           </a:p>
         </p:txBody>
@@ -7985,7 +7985,7 @@
                 </a:solidFill>
                 <a:latin typeface="Segoe UI"/>
               </a:rPr>
-              <a:t>-51.8%</a:t>
+              <a:t>-52.3%</a:t>
             </a:r>
           </a:p>
         </p:txBody>
@@ -8155,7 +8155,7 @@
                 </a:solidFill>
                 <a:latin typeface="Segoe UI"/>
               </a:rPr>
-              <a:t>1,130</a:t>
+              <a:t>1,121</a:t>
             </a:r>
           </a:p>
         </p:txBody>
@@ -8189,7 +8189,7 @@
                 </a:solidFill>
                 <a:latin typeface="Segoe UI"/>
               </a:rPr>
-              <a:t>Rs 90,400</a:t>
+              <a:t>Rs 89,680</a:t>
             </a:r>
           </a:p>
         </p:txBody>
@@ -8223,7 +8223,7 @@
                 </a:solidFill>
                 <a:latin typeface="Segoe UI"/>
               </a:rPr>
-              <a:t>Rs -21,600</a:t>
+              <a:t>Rs -22,320</a:t>
             </a:r>
           </a:p>
         </p:txBody>
@@ -8257,7 +8257,7 @@
                 </a:solidFill>
                 <a:latin typeface="Segoe UI"/>
               </a:rPr>
-              <a:t>-19.3%</a:t>
+              <a:t>-19.9%</a:t>
             </a:r>
           </a:p>
         </p:txBody>
@@ -8427,7 +8427,7 @@
                 </a:solidFill>
                 <a:latin typeface="Segoe UI"/>
               </a:rPr>
-              <a:t>1,313</a:t>
+              <a:t>1,316</a:t>
             </a:r>
           </a:p>
         </p:txBody>
@@ -8461,7 +8461,7 @@
                 </a:solidFill>
                 <a:latin typeface="Segoe UI"/>
               </a:rPr>
-              <a:t>Rs 65,660</a:t>
+              <a:t>Rs 65,800</a:t>
             </a:r>
           </a:p>
         </p:txBody>
@@ -8495,7 +8495,7 @@
                 </a:solidFill>
                 <a:latin typeface="Segoe UI"/>
               </a:rPr>
-              <a:t>Rs -56,840</a:t>
+              <a:t>Rs -56,700</a:t>
             </a:r>
           </a:p>
         </p:txBody>
@@ -8529,7 +8529,7 @@
                 </a:solidFill>
                 <a:latin typeface="Segoe UI"/>
               </a:rPr>
-              <a:t>-46.4%</a:t>
+              <a:t>-46.3%</a:t>
             </a:r>
           </a:p>
         </p:txBody>
@@ -8699,7 +8699,7 @@
                 </a:solidFill>
                 <a:latin typeface="Segoe UI"/>
               </a:rPr>
-              <a:t>2,298</a:t>
+              <a:t>2,302</a:t>
             </a:r>
           </a:p>
         </p:txBody>
@@ -8733,7 +8733,7 @@
                 </a:solidFill>
                 <a:latin typeface="Segoe UI"/>
               </a:rPr>
-              <a:t>Rs 57,450</a:t>
+              <a:t>Rs 57,550</a:t>
             </a:r>
           </a:p>
         </p:txBody>
@@ -8767,7 +8767,7 @@
                 </a:solidFill>
                 <a:latin typeface="Segoe UI"/>
               </a:rPr>
-              <a:t>Rs -32,550</a:t>
+              <a:t>Rs -32,450</a:t>
             </a:r>
           </a:p>
         </p:txBody>
@@ -8801,7 +8801,7 @@
                 </a:solidFill>
                 <a:latin typeface="Segoe UI"/>
               </a:rPr>
-              <a:t>-36.2%</a:t>
+              <a:t>-36.1%</a:t>
             </a:r>
           </a:p>
         </p:txBody>
@@ -8971,7 +8971,7 @@
                 </a:solidFill>
                 <a:latin typeface="Segoe UI"/>
               </a:rPr>
-              <a:t>725</a:t>
+              <a:t>727</a:t>
             </a:r>
           </a:p>
         </p:txBody>
@@ -9005,7 +9005,7 @@
                 </a:solidFill>
                 <a:latin typeface="Segoe UI"/>
               </a:rPr>
-              <a:t>Rs 43,503</a:t>
+              <a:t>Rs 43,617</a:t>
             </a:r>
           </a:p>
         </p:txBody>
@@ -9039,7 +9039,7 @@
                 </a:solidFill>
                 <a:latin typeface="Segoe UI"/>
               </a:rPr>
-              <a:t>Rs -47,697</a:t>
+              <a:t>Rs -47,583</a:t>
             </a:r>
           </a:p>
         </p:txBody>
@@ -9073,7 +9073,7 @@
                 </a:solidFill>
                 <a:latin typeface="Segoe UI"/>
               </a:rPr>
-              <a:t>-52.3%</a:t>
+              <a:t>-52.2%</a:t>
             </a:r>
           </a:p>
         </p:txBody>
@@ -9141,7 +9141,7 @@
                 </a:solidFill>
                 <a:latin typeface="Segoe UI"/>
               </a:rPr>
-              <a:t>Total Rs 1,856,686 | P&amp;L Rs 127,916 (+7.4%) | Sharpe -0.09 | Vol 18.76% | VaR95 -1.84%/day</a:t>
+              <a:t>Total Rs 1,905,142 | P&amp;L Rs 173,842 (+10.0%) | Sharpe 0.12 | Vol 19.27% | VaR95 -1.88%/day</a:t>
             </a:r>
           </a:p>
         </p:txBody>

--- a/docs/pmr_daily.pptx
+++ b/docs/pmr_daily.pptx
@@ -3197,7 +3197,7 @@
                 </a:solidFill>
                 <a:latin typeface="Segoe UI"/>
               </a:rPr>
-              <a:t>Monday, 24 Aug 2026 07:20 SGT</a:t>
+              <a:t>Tuesday, 25 Aug 2026 07:23 SGT</a:t>
             </a:r>
           </a:p>
         </p:txBody>
@@ -3265,7 +3265,7 @@
                 </a:solidFill>
                 <a:latin typeface="Segoe UI"/>
               </a:rPr>
-              <a:t>RAG 11R / 20A / 15G   |   69.6% above 200DMA   |   Portfolio Rs 1,905,142 (+10.0%)</a:t>
+              <a:t>RAG 11R / 20A / 15G   |   67.4% above 200DMA   |   Portfolio Rs 1,920,376 (+10.9%)</a:t>
             </a:r>
           </a:p>
         </p:txBody>
@@ -3461,7 +3461,7 @@
                 </a:solidFill>
                 <a:latin typeface="Segoe UI"/>
               </a:rPr>
-              <a:t>Ethereum</a:t>
+              <a:t>Solana</a:t>
             </a:r>
           </a:p>
         </p:txBody>
@@ -3491,11 +3491,11 @@
             <a:r>
               <a:rPr sz="900" b="0">
                 <a:solidFill>
-                  <a:srgbClr val="F59E0B"/>
-                </a:solidFill>
-                <a:latin typeface="Segoe UI"/>
-              </a:rPr>
-              <a:t>ETH-USD · AMBER</a:t>
+                  <a:srgbClr val="EF4444"/>
+                </a:solidFill>
+                <a:latin typeface="Segoe UI"/>
+              </a:rPr>
+              <a:t>SOL-USD · RED</a:t>
             </a:r>
           </a:p>
         </p:txBody>
@@ -3529,7 +3529,7 @@
                 </a:solidFill>
                 <a:latin typeface="Segoe UI"/>
               </a:rPr>
-              <a:t>+31.9%</a:t>
+              <a:t>+34.7%</a:t>
             </a:r>
           </a:p>
         </p:txBody>
@@ -3587,7 +3587,7 @@
                 </a:solidFill>
                 <a:latin typeface="Segoe UI"/>
               </a:rPr>
-              <a:t>Solana</a:t>
+              <a:t>Ethereum</a:t>
             </a:r>
           </a:p>
         </p:txBody>
@@ -3617,11 +3617,11 @@
             <a:r>
               <a:rPr sz="900" b="0">
                 <a:solidFill>
-                  <a:srgbClr val="EF4444"/>
-                </a:solidFill>
-                <a:latin typeface="Segoe UI"/>
-              </a:rPr>
-              <a:t>SOL-USD · RED</a:t>
+                  <a:srgbClr val="F59E0B"/>
+                </a:solidFill>
+                <a:latin typeface="Segoe UI"/>
+              </a:rPr>
+              <a:t>ETH-USD · AMBER</a:t>
             </a:r>
           </a:p>
         </p:txBody>
@@ -3655,7 +3655,7 @@
                 </a:solidFill>
                 <a:latin typeface="Segoe UI"/>
               </a:rPr>
-              <a:t>+31.2%</a:t>
+              <a:t>+33.4%</a:t>
             </a:r>
           </a:p>
         </p:txBody>
@@ -3781,7 +3781,7 @@
                 </a:solidFill>
                 <a:latin typeface="Segoe UI"/>
               </a:rPr>
-              <a:t>+23.4%</a:t>
+              <a:t>+25.5%</a:t>
             </a:r>
           </a:p>
         </p:txBody>
@@ -3907,7 +3907,7 @@
                 </a:solidFill>
                 <a:latin typeface="Segoe UI"/>
               </a:rPr>
-              <a:t>+19.8%</a:t>
+              <a:t>+20.3%</a:t>
             </a:r>
           </a:p>
         </p:txBody>
@@ -3965,7 +3965,7 @@
                 </a:solidFill>
                 <a:latin typeface="Segoe UI"/>
               </a:rPr>
-              <a:t>Tesla</a:t>
+              <a:t>Gold</a:t>
             </a:r>
           </a:p>
         </p:txBody>
@@ -3995,11 +3995,11 @@
             <a:r>
               <a:rPr sz="900" b="0">
                 <a:solidFill>
-                  <a:srgbClr val="EF4444"/>
-                </a:solidFill>
-                <a:latin typeface="Segoe UI"/>
-              </a:rPr>
-              <a:t>TSLA · RED</a:t>
+                  <a:srgbClr val="F59E0B"/>
+                </a:solidFill>
+                <a:latin typeface="Segoe UI"/>
+              </a:rPr>
+              <a:t>GC=F · AMBER</a:t>
             </a:r>
           </a:p>
         </p:txBody>
@@ -4033,7 +4033,7 @@
                 </a:solidFill>
                 <a:latin typeface="Segoe UI"/>
               </a:rPr>
-              <a:t>+16.6%</a:t>
+              <a:t>+16.8%</a:t>
             </a:r>
           </a:p>
         </p:txBody>
@@ -4125,7 +4125,7 @@
                 </a:solidFill>
                 <a:latin typeface="Segoe UI"/>
               </a:rPr>
-              <a:t>Amazon</a:t>
+              <a:t>ITC</a:t>
             </a:r>
           </a:p>
         </p:txBody>
@@ -4155,11 +4155,11 @@
             <a:r>
               <a:rPr sz="900" b="0">
                 <a:solidFill>
-                  <a:srgbClr val="F59E0B"/>
-                </a:solidFill>
-                <a:latin typeface="Segoe UI"/>
-              </a:rPr>
-              <a:t>AMZN · AMBER</a:t>
+                  <a:srgbClr val="EF4444"/>
+                </a:solidFill>
+                <a:latin typeface="Segoe UI"/>
+              </a:rPr>
+              <a:t>ITC.NS · RED</a:t>
             </a:r>
           </a:p>
         </p:txBody>
@@ -4193,7 +4193,7 @@
                 </a:solidFill>
                 <a:latin typeface="Segoe UI"/>
               </a:rPr>
-              <a:t>-4.8%</a:t>
+              <a:t>-4.1%</a:t>
             </a:r>
           </a:p>
         </p:txBody>
@@ -4251,7 +4251,7 @@
                 </a:solidFill>
                 <a:latin typeface="Segoe UI"/>
               </a:rPr>
-              <a:t>ITC</a:t>
+              <a:t>Amazon</a:t>
             </a:r>
           </a:p>
         </p:txBody>
@@ -4281,11 +4281,11 @@
             <a:r>
               <a:rPr sz="900" b="0">
                 <a:solidFill>
-                  <a:srgbClr val="EF4444"/>
-                </a:solidFill>
-                <a:latin typeface="Segoe UI"/>
-              </a:rPr>
-              <a:t>ITC.NS · RED</a:t>
+                  <a:srgbClr val="22C55E"/>
+                </a:solidFill>
+                <a:latin typeface="Segoe UI"/>
+              </a:rPr>
+              <a:t>AMZN · GREEN</a:t>
             </a:r>
           </a:p>
         </p:txBody>
@@ -4319,7 +4319,7 @@
                 </a:solidFill>
                 <a:latin typeface="Segoe UI"/>
               </a:rPr>
-              <a:t>-4.1%</a:t>
+              <a:t>-3.5%</a:t>
             </a:r>
           </a:p>
         </p:txBody>
@@ -4377,7 +4377,7 @@
                 </a:solidFill>
                 <a:latin typeface="Segoe UI"/>
               </a:rPr>
-              <a:t>Alphabet</a:t>
+              <a:t>HDFC Bank</a:t>
             </a:r>
           </a:p>
         </p:txBody>
@@ -4407,11 +4407,11 @@
             <a:r>
               <a:rPr sz="900" b="0">
                 <a:solidFill>
-                  <a:srgbClr val="F59E0B"/>
-                </a:solidFill>
-                <a:latin typeface="Segoe UI"/>
-              </a:rPr>
-              <a:t>GOOGL · AMBER</a:t>
+                  <a:srgbClr val="EF4444"/>
+                </a:solidFill>
+                <a:latin typeface="Segoe UI"/>
+              </a:rPr>
+              <a:t>HDFCBANK.NS · RED</a:t>
             </a:r>
           </a:p>
         </p:txBody>
@@ -4445,7 +4445,7 @@
                 </a:solidFill>
                 <a:latin typeface="Segoe UI"/>
               </a:rPr>
-              <a:t>-3.2%</a:t>
+              <a:t>-2.8%</a:t>
             </a:r>
           </a:p>
         </p:txBody>
@@ -4503,7 +4503,7 @@
                 </a:solidFill>
                 <a:latin typeface="Segoe UI"/>
               </a:rPr>
-              <a:t>HDFC Bank</a:t>
+              <a:t>TCS</a:t>
             </a:r>
           </a:p>
         </p:txBody>
@@ -4537,7 +4537,7 @@
                 </a:solidFill>
                 <a:latin typeface="Segoe UI"/>
               </a:rPr>
-              <a:t>HDFCBANK.NS · RED</a:t>
+              <a:t>TCS.NS · RED</a:t>
             </a:r>
           </a:p>
         </p:txBody>
@@ -4571,7 +4571,7 @@
                 </a:solidFill>
                 <a:latin typeface="Segoe UI"/>
               </a:rPr>
-              <a:t>-2.8%</a:t>
+              <a:t>-2.7%</a:t>
             </a:r>
           </a:p>
         </p:txBody>
@@ -4629,7 +4629,7 @@
                 </a:solidFill>
                 <a:latin typeface="Segoe UI"/>
               </a:rPr>
-              <a:t>TCS</a:t>
+              <a:t>Alphabet</a:t>
             </a:r>
           </a:p>
         </p:txBody>
@@ -4659,11 +4659,11 @@
             <a:r>
               <a:rPr sz="900" b="0">
                 <a:solidFill>
-                  <a:srgbClr val="EF4444"/>
-                </a:solidFill>
-                <a:latin typeface="Segoe UI"/>
-              </a:rPr>
-              <a:t>TCS.NS · RED</a:t>
+                  <a:srgbClr val="F59E0B"/>
+                </a:solidFill>
+                <a:latin typeface="Segoe UI"/>
+              </a:rPr>
+              <a:t>GOOGL · AMBER</a:t>
             </a:r>
           </a:p>
         </p:txBody>
@@ -4697,7 +4697,7 @@
                 </a:solidFill>
                 <a:latin typeface="Segoe UI"/>
               </a:rPr>
-              <a:t>-2.7%</a:t>
+              <a:t>-2.3%</a:t>
             </a:r>
           </a:p>
         </p:txBody>
@@ -4967,7 +4967,7 @@
                 </a:solidFill>
                 <a:latin typeface="Segoe UI"/>
               </a:rPr>
-              <a:t>Microsoft</a:t>
+              <a:t>US Energy</a:t>
             </a:r>
           </a:p>
         </p:txBody>
@@ -5035,7 +5035,7 @@
                 </a:solidFill>
                 <a:latin typeface="Segoe UI"/>
               </a:rPr>
-              <a:t>83%</a:t>
+              <a:t>95%</a:t>
             </a:r>
           </a:p>
         </p:txBody>
@@ -5069,7 +5069,7 @@
                 </a:solidFill>
                 <a:latin typeface="Segoe UI"/>
               </a:rPr>
-              <a:t>above 200DMA · golden cross (50&gt;200) · MACD bearish</a:t>
+              <a:t>above 200DMA · golden cross (50&gt;200) · MACD bullish</a:t>
             </a:r>
           </a:p>
         </p:txBody>
@@ -5171,7 +5171,7 @@
                 </a:solidFill>
                 <a:latin typeface="Segoe UI"/>
               </a:rPr>
-              <a:t>82%</a:t>
+              <a:t>83%</a:t>
             </a:r>
           </a:p>
         </p:txBody>
@@ -5239,7 +5239,7 @@
                 </a:solidFill>
                 <a:latin typeface="Segoe UI"/>
               </a:rPr>
-              <a:t>DAX</a:t>
+              <a:t>Microsoft</a:t>
             </a:r>
           </a:p>
         </p:txBody>
@@ -5307,7 +5307,7 @@
                 </a:solidFill>
                 <a:latin typeface="Segoe UI"/>
               </a:rPr>
-              <a:t>80%</a:t>
+              <a:t>83%</a:t>
             </a:r>
           </a:p>
         </p:txBody>
@@ -5375,7 +5375,7 @@
                 </a:solidFill>
                 <a:latin typeface="Segoe UI"/>
               </a:rPr>
-              <a:t>US Energy</a:t>
+              <a:t>DAX</a:t>
             </a:r>
           </a:p>
         </p:txBody>
@@ -5409,7 +5409,7 @@
                 </a:solidFill>
                 <a:latin typeface="Segoe UI"/>
               </a:rPr>
-              <a:t>BUY</a:t>
+              <a:t>STRONG BUY</a:t>
             </a:r>
           </a:p>
         </p:txBody>
@@ -5443,7 +5443,7 @@
                 </a:solidFill>
                 <a:latin typeface="Segoe UI"/>
               </a:rPr>
-              <a:t>93%</a:t>
+              <a:t>81%</a:t>
             </a:r>
           </a:p>
         </p:txBody>
@@ -5477,7 +5477,7 @@
                 </a:solidFill>
                 <a:latin typeface="Segoe UI"/>
               </a:rPr>
-              <a:t>above 200DMA · golden cross (50&gt;200) · MACD bullish</a:t>
+              <a:t>above 200DMA · golden cross (50&gt;200) · MACD bearish</a:t>
             </a:r>
           </a:p>
         </p:txBody>
@@ -5511,7 +5511,7 @@
                 </a:solidFill>
                 <a:latin typeface="Segoe UI"/>
               </a:rPr>
-              <a:t>Bitcoin</a:t>
+              <a:t>Copper</a:t>
             </a:r>
           </a:p>
         </p:txBody>
@@ -5545,7 +5545,7 @@
                 </a:solidFill>
                 <a:latin typeface="Segoe UI"/>
               </a:rPr>
-              <a:t>BUY</a:t>
+              <a:t>STRONG BUY</a:t>
             </a:r>
           </a:p>
         </p:txBody>
@@ -5579,7 +5579,7 @@
                 </a:solidFill>
                 <a:latin typeface="Segoe UI"/>
               </a:rPr>
-              <a:t>71%</a:t>
+              <a:t>80%</a:t>
             </a:r>
           </a:p>
         </p:txBody>
@@ -5613,7 +5613,7 @@
                 </a:solidFill>
                 <a:latin typeface="Segoe UI"/>
               </a:rPr>
-              <a:t>above 200DMA · death cross (50&lt;200) · MACD bullish</a:t>
+              <a:t>above 200DMA · golden cross (50&gt;200) · MACD bearish</a:t>
             </a:r>
           </a:p>
         </p:txBody>
@@ -5647,7 +5647,7 @@
                 </a:solidFill>
                 <a:latin typeface="Segoe UI"/>
               </a:rPr>
-              <a:t>Ethereum</a:t>
+              <a:t>Bitcoin</a:t>
             </a:r>
           </a:p>
         </p:txBody>
@@ -5715,7 +5715,7 @@
                 </a:solidFill>
                 <a:latin typeface="Segoe UI"/>
               </a:rPr>
-              <a:t>71%</a:t>
+              <a:t>72%</a:t>
             </a:r>
           </a:p>
         </p:txBody>
@@ -5783,7 +5783,7 @@
                 </a:solidFill>
                 <a:latin typeface="Segoe UI"/>
               </a:rPr>
-              <a:t>Gold</a:t>
+              <a:t>Ethereum</a:t>
             </a:r>
           </a:p>
         </p:txBody>
@@ -5851,7 +5851,7 @@
                 </a:solidFill>
                 <a:latin typeface="Segoe UI"/>
               </a:rPr>
-              <a:t>70%</a:t>
+              <a:t>72%</a:t>
             </a:r>
           </a:p>
         </p:txBody>
@@ -5987,7 +5987,7 @@
                 </a:solidFill>
                 <a:latin typeface="Segoe UI"/>
               </a:rPr>
-              <a:t>76%</a:t>
+              <a:t>77%</a:t>
             </a:r>
           </a:p>
         </p:txBody>
@@ -6055,7 +6055,7 @@
                 </a:solidFill>
                 <a:latin typeface="Segoe UI"/>
               </a:rPr>
-              <a:t>Straits Times</a:t>
+              <a:t>Gold</a:t>
             </a:r>
           </a:p>
         </p:txBody>
@@ -6123,7 +6123,7 @@
                 </a:solidFill>
                 <a:latin typeface="Segoe UI"/>
               </a:rPr>
-              <a:t>70%</a:t>
+              <a:t>71%</a:t>
             </a:r>
           </a:p>
         </p:txBody>
@@ -6157,7 +6157,7 @@
                 </a:solidFill>
                 <a:latin typeface="Segoe UI"/>
               </a:rPr>
-              <a:t>above 200DMA · golden cross (50&gt;200) · MACD bearish</a:t>
+              <a:t>above 200DMA · death cross (50&lt;200) · MACD bullish</a:t>
             </a:r>
           </a:p>
         </p:txBody>
@@ -6191,7 +6191,7 @@
                 </a:solidFill>
                 <a:latin typeface="Segoe UI"/>
               </a:rPr>
-              <a:t>Crude Oil WTI</a:t>
+              <a:t>Straits Times</a:t>
             </a:r>
           </a:p>
         </p:txBody>
@@ -6259,7 +6259,7 @@
                 </a:solidFill>
                 <a:latin typeface="Segoe UI"/>
               </a:rPr>
-              <a:t>67%</a:t>
+              <a:t>70%</a:t>
             </a:r>
           </a:p>
         </p:txBody>
@@ -6293,7 +6293,7 @@
                 </a:solidFill>
                 <a:latin typeface="Segoe UI"/>
               </a:rPr>
-              <a:t>above 200DMA · death cross (50&lt;200) · MACD bullish</a:t>
+              <a:t>above 200DMA · golden cross (50&gt;200) · MACD bearish</a:t>
             </a:r>
           </a:p>
         </p:txBody>
@@ -6463,7 +6463,7 @@
                 </a:solidFill>
                 <a:latin typeface="Segoe UI"/>
               </a:rPr>
-              <a:t>Copper</a:t>
+              <a:t>ICICI Bank</a:t>
             </a:r>
           </a:p>
         </p:txBody>
@@ -6659,7 +6659,7 @@
                 </a:solidFill>
                 <a:latin typeface="Segoe UI"/>
               </a:rPr>
-              <a:t>Base currency INR · USD/INR 95.68</a:t>
+              <a:t>Base currency INR · USD/INR 95.7</a:t>
             </a:r>
           </a:p>
         </p:txBody>
@@ -7067,7 +7067,7 @@
                 </a:solidFill>
                 <a:latin typeface="Segoe UI"/>
               </a:rPr>
-              <a:t>77,527</a:t>
+              <a:t>78,861</a:t>
             </a:r>
           </a:p>
         </p:txBody>
@@ -7101,7 +7101,7 @@
                 </a:solidFill>
                 <a:latin typeface="Segoe UI"/>
               </a:rPr>
-              <a:t>Rs 741,777</a:t>
+              <a:t>Rs 754,706</a:t>
             </a:r>
           </a:p>
         </p:txBody>
@@ -7135,7 +7135,7 @@
                 </a:solidFill>
                 <a:latin typeface="Segoe UI"/>
               </a:rPr>
-              <a:t>Rs 167,697</a:t>
+              <a:t>Rs 180,504</a:t>
             </a:r>
           </a:p>
         </p:txBody>
@@ -7169,7 +7169,7 @@
                 </a:solidFill>
                 <a:latin typeface="Segoe UI"/>
               </a:rPr>
-              <a:t>+29.2%</a:t>
+              <a:t>+31.4%</a:t>
             </a:r>
           </a:p>
         </p:txBody>
@@ -7339,7 +7339,7 @@
                 </a:solidFill>
                 <a:latin typeface="Segoe UI"/>
               </a:rPr>
-              <a:t>4,665</a:t>
+              <a:t>4,727</a:t>
             </a:r>
           </a:p>
         </p:txBody>
@@ -7373,7 +7373,7 @@
                 </a:solidFill>
                 <a:latin typeface="Segoe UI"/>
               </a:rPr>
-              <a:t>Rs 446,376</a:t>
+              <a:t>Rs 452,414</a:t>
             </a:r>
           </a:p>
         </p:txBody>
@@ -7407,7 +7407,7 @@
                 </a:solidFill>
                 <a:latin typeface="Segoe UI"/>
               </a:rPr>
-              <a:t>Rs 226,312</a:t>
+              <a:t>Rs 232,303</a:t>
             </a:r>
           </a:p>
         </p:txBody>
@@ -7441,7 +7441,7 @@
                 </a:solidFill>
                 <a:latin typeface="Segoe UI"/>
               </a:rPr>
-              <a:t>+102.8%</a:t>
+              <a:t>+105.5%</a:t>
             </a:r>
           </a:p>
         </p:txBody>
@@ -7611,7 +7611,7 @@
                 </a:solidFill>
                 <a:latin typeface="Segoe UI"/>
               </a:rPr>
-              <a:t>309</a:t>
+              <a:t>310</a:t>
             </a:r>
           </a:p>
         </p:txBody>
@@ -7645,7 +7645,7 @@
                 </a:solidFill>
                 <a:latin typeface="Segoe UI"/>
               </a:rPr>
-              <a:t>Rs 295,986</a:t>
+              <a:t>Rs 296,996</a:t>
             </a:r>
           </a:p>
         </p:txBody>
@@ -7679,7 +7679,7 @@
                 </a:solidFill>
                 <a:latin typeface="Segoe UI"/>
               </a:rPr>
-              <a:t>Rs 118,978</a:t>
+              <a:t>Rs 119,951</a:t>
             </a:r>
           </a:p>
         </p:txBody>
@@ -7713,7 +7713,7 @@
                 </a:solidFill>
                 <a:latin typeface="Segoe UI"/>
               </a:rPr>
-              <a:t>+67.2%</a:t>
+              <a:t>+67.8%</a:t>
             </a:r>
           </a:p>
         </p:txBody>
@@ -7883,7 +7883,7 @@
                 </a:solidFill>
                 <a:latin typeface="Segoe UI"/>
               </a:rPr>
-              <a:t>215</a:t>
+              <a:t>208</a:t>
             </a:r>
           </a:p>
         </p:txBody>
@@ -7917,7 +7917,7 @@
                 </a:solidFill>
                 <a:latin typeface="Segoe UI"/>
               </a:rPr>
-              <a:t>Rs 164,355</a:t>
+              <a:t>Rs 159,613</a:t>
             </a:r>
           </a:p>
         </p:txBody>
@@ -7951,7 +7951,7 @@
                 </a:solidFill>
                 <a:latin typeface="Segoe UI"/>
               </a:rPr>
-              <a:t>Rs -180,093</a:t>
+              <a:t>Rs -184,908</a:t>
             </a:r>
           </a:p>
         </p:txBody>
@@ -7985,7 +7985,7 @@
                 </a:solidFill>
                 <a:latin typeface="Segoe UI"/>
               </a:rPr>
-              <a:t>-52.3%</a:t>
+              <a:t>-53.7%</a:t>
             </a:r>
           </a:p>
         </p:txBody>
@@ -9141,7 +9141,7 @@
                 </a:solidFill>
                 <a:latin typeface="Segoe UI"/>
               </a:rPr>
-              <a:t>Total Rs 1,905,142 | P&amp;L Rs 173,842 (+10.0%) | Sharpe 0.12 | Vol 19.27% | VaR95 -1.88%/day</a:t>
+              <a:t>Total Rs 1,920,376 | P&amp;L Rs 188,797 (+10.9%) | Sharpe 0.13 | Vol 19.37% | VaR95 -1.89%/day</a:t>
             </a:r>
           </a:p>
         </p:txBody>

--- a/docs/pmr_daily.pptx
+++ b/docs/pmr_daily.pptx
@@ -3197,7 +3197,7 @@
                 </a:solidFill>
                 <a:latin typeface="Segoe UI"/>
               </a:rPr>
-              <a:t>Tuesday, 25 Aug 2026 07:23 SGT</a:t>
+              <a:t>Wednesday, 26 Aug 2026 07:25 SGT</a:t>
             </a:r>
           </a:p>
         </p:txBody>
@@ -3265,7 +3265,7 @@
                 </a:solidFill>
                 <a:latin typeface="Segoe UI"/>
               </a:rPr>
-              <a:t>RAG 11R / 20A / 15G   |   67.4% above 200DMA   |   Portfolio Rs 1,920,376 (+10.9%)</a:t>
+              <a:t>RAG 11R / 19A / 16G   |   69.6% above 200DMA   |   Portfolio Rs 1,921,838 (+11.0%)</a:t>
             </a:r>
           </a:p>
         </p:txBody>
@@ -3529,7 +3529,7 @@
                 </a:solidFill>
                 <a:latin typeface="Segoe UI"/>
               </a:rPr>
-              <a:t>+34.7%</a:t>
+              <a:t>+33.2%</a:t>
             </a:r>
           </a:p>
         </p:txBody>
@@ -3655,7 +3655,7 @@
                 </a:solidFill>
                 <a:latin typeface="Segoe UI"/>
               </a:rPr>
-              <a:t>+33.4%</a:t>
+              <a:t>+31.7%</a:t>
             </a:r>
           </a:p>
         </p:txBody>
@@ -3781,7 +3781,7 @@
                 </a:solidFill>
                 <a:latin typeface="Segoe UI"/>
               </a:rPr>
-              <a:t>+25.5%</a:t>
+              <a:t>+25.2%</a:t>
             </a:r>
           </a:p>
         </p:txBody>
@@ -3907,7 +3907,7 @@
                 </a:solidFill>
                 <a:latin typeface="Segoe UI"/>
               </a:rPr>
-              <a:t>+20.3%</a:t>
+              <a:t>+19.8%</a:t>
             </a:r>
           </a:p>
         </p:txBody>
@@ -4033,7 +4033,7 @@
                 </a:solidFill>
                 <a:latin typeface="Segoe UI"/>
               </a:rPr>
-              <a:t>+16.8%</a:t>
+              <a:t>+16.7%</a:t>
             </a:r>
           </a:p>
         </p:txBody>
@@ -4125,7 +4125,7 @@
                 </a:solidFill>
                 <a:latin typeface="Segoe UI"/>
               </a:rPr>
-              <a:t>ITC</a:t>
+              <a:t>Crude Oil WTI</a:t>
             </a:r>
           </a:p>
         </p:txBody>
@@ -4159,7 +4159,7 @@
                 </a:solidFill>
                 <a:latin typeface="Segoe UI"/>
               </a:rPr>
-              <a:t>ITC.NS · RED</a:t>
+              <a:t>CL=F · RED</a:t>
             </a:r>
           </a:p>
         </p:txBody>
@@ -4193,7 +4193,7 @@
                 </a:solidFill>
                 <a:latin typeface="Segoe UI"/>
               </a:rPr>
-              <a:t>-4.1%</a:t>
+              <a:t>-4.4%</a:t>
             </a:r>
           </a:p>
         </p:txBody>
@@ -4251,7 +4251,7 @@
                 </a:solidFill>
                 <a:latin typeface="Segoe UI"/>
               </a:rPr>
-              <a:t>Amazon</a:t>
+              <a:t>ITC</a:t>
             </a:r>
           </a:p>
         </p:txBody>
@@ -4281,11 +4281,11 @@
             <a:r>
               <a:rPr sz="900" b="0">
                 <a:solidFill>
-                  <a:srgbClr val="22C55E"/>
-                </a:solidFill>
-                <a:latin typeface="Segoe UI"/>
-              </a:rPr>
-              <a:t>AMZN · GREEN</a:t>
+                  <a:srgbClr val="EF4444"/>
+                </a:solidFill>
+                <a:latin typeface="Segoe UI"/>
+              </a:rPr>
+              <a:t>ITC.NS · RED</a:t>
             </a:r>
           </a:p>
         </p:txBody>
@@ -4319,7 +4319,7 @@
                 </a:solidFill>
                 <a:latin typeface="Segoe UI"/>
               </a:rPr>
-              <a:t>-3.5%</a:t>
+              <a:t>-4.0%</a:t>
             </a:r>
           </a:p>
         </p:txBody>
@@ -4377,7 +4377,7 @@
                 </a:solidFill>
                 <a:latin typeface="Segoe UI"/>
               </a:rPr>
-              <a:t>HDFC Bank</a:t>
+              <a:t>Amazon</a:t>
             </a:r>
           </a:p>
         </p:txBody>
@@ -4407,11 +4407,11 @@
             <a:r>
               <a:rPr sz="900" b="0">
                 <a:solidFill>
-                  <a:srgbClr val="EF4444"/>
-                </a:solidFill>
-                <a:latin typeface="Segoe UI"/>
-              </a:rPr>
-              <a:t>HDFCBANK.NS · RED</a:t>
+                  <a:srgbClr val="F59E0B"/>
+                </a:solidFill>
+                <a:latin typeface="Segoe UI"/>
+              </a:rPr>
+              <a:t>AMZN · AMBER</a:t>
             </a:r>
           </a:p>
         </p:txBody>
@@ -4445,7 +4445,7 @@
                 </a:solidFill>
                 <a:latin typeface="Segoe UI"/>
               </a:rPr>
-              <a:t>-2.8%</a:t>
+              <a:t>-3.9%</a:t>
             </a:r>
           </a:p>
         </p:txBody>
@@ -4571,7 +4571,7 @@
                 </a:solidFill>
                 <a:latin typeface="Segoe UI"/>
               </a:rPr>
-              <a:t>-2.7%</a:t>
+              <a:t>-3.4%</a:t>
             </a:r>
           </a:p>
         </p:txBody>
@@ -4697,7 +4697,7 @@
                 </a:solidFill>
                 <a:latin typeface="Segoe UI"/>
               </a:rPr>
-              <a:t>-2.3%</a:t>
+              <a:t>-2.6%</a:t>
             </a:r>
           </a:p>
         </p:txBody>
@@ -4967,7 +4967,7 @@
                 </a:solidFill>
                 <a:latin typeface="Segoe UI"/>
               </a:rPr>
-              <a:t>US Energy</a:t>
+              <a:t>Copper</a:t>
             </a:r>
           </a:p>
         </p:txBody>
@@ -5103,7 +5103,7 @@
                 </a:solidFill>
                 <a:latin typeface="Segoe UI"/>
               </a:rPr>
-              <a:t>US Financials</a:t>
+              <a:t>Microsoft</a:t>
             </a:r>
           </a:p>
         </p:txBody>
@@ -5171,7 +5171,7 @@
                 </a:solidFill>
                 <a:latin typeface="Segoe UI"/>
               </a:rPr>
-              <a:t>83%</a:t>
+              <a:t>84%</a:t>
             </a:r>
           </a:p>
         </p:txBody>
@@ -5239,7 +5239,7 @@
                 </a:solidFill>
                 <a:latin typeface="Segoe UI"/>
               </a:rPr>
-              <a:t>Microsoft</a:t>
+              <a:t>US Financials</a:t>
             </a:r>
           </a:p>
         </p:txBody>
@@ -5375,7 +5375,7 @@
                 </a:solidFill>
                 <a:latin typeface="Segoe UI"/>
               </a:rPr>
-              <a:t>DAX</a:t>
+              <a:t>US Energy</a:t>
             </a:r>
           </a:p>
         </p:txBody>
@@ -5443,7 +5443,7 @@
                 </a:solidFill>
                 <a:latin typeface="Segoe UI"/>
               </a:rPr>
-              <a:t>81%</a:t>
+              <a:t>83%</a:t>
             </a:r>
           </a:p>
         </p:txBody>
@@ -5511,7 +5511,7 @@
                 </a:solidFill>
                 <a:latin typeface="Segoe UI"/>
               </a:rPr>
-              <a:t>Copper</a:t>
+              <a:t>FTSE 100</a:t>
             </a:r>
           </a:p>
         </p:txBody>
@@ -5579,7 +5579,7 @@
                 </a:solidFill>
                 <a:latin typeface="Segoe UI"/>
               </a:rPr>
-              <a:t>80%</a:t>
+              <a:t>81%</a:t>
             </a:r>
           </a:p>
         </p:txBody>
@@ -5613,7 +5613,7 @@
                 </a:solidFill>
                 <a:latin typeface="Segoe UI"/>
               </a:rPr>
-              <a:t>above 200DMA · golden cross (50&gt;200) · MACD bearish</a:t>
+              <a:t>above 200DMA · golden cross (50&gt;200) · MACD bullish</a:t>
             </a:r>
           </a:p>
         </p:txBody>
@@ -5647,7 +5647,7 @@
                 </a:solidFill>
                 <a:latin typeface="Segoe UI"/>
               </a:rPr>
-              <a:t>Bitcoin</a:t>
+              <a:t>DAX</a:t>
             </a:r>
           </a:p>
         </p:txBody>
@@ -5681,7 +5681,7 @@
                 </a:solidFill>
                 <a:latin typeface="Segoe UI"/>
               </a:rPr>
-              <a:t>BUY</a:t>
+              <a:t>STRONG BUY</a:t>
             </a:r>
           </a:p>
         </p:txBody>
@@ -5715,7 +5715,7 @@
                 </a:solidFill>
                 <a:latin typeface="Segoe UI"/>
               </a:rPr>
-              <a:t>72%</a:t>
+              <a:t>81%</a:t>
             </a:r>
           </a:p>
         </p:txBody>
@@ -5749,7 +5749,7 @@
                 </a:solidFill>
                 <a:latin typeface="Segoe UI"/>
               </a:rPr>
-              <a:t>above 200DMA · death cross (50&lt;200) · MACD bullish</a:t>
+              <a:t>above 200DMA · golden cross (50&gt;200) · MACD bearish</a:t>
             </a:r>
           </a:p>
         </p:txBody>
@@ -5783,7 +5783,7 @@
                 </a:solidFill>
                 <a:latin typeface="Segoe UI"/>
               </a:rPr>
-              <a:t>Ethereum</a:t>
+              <a:t>Bitcoin</a:t>
             </a:r>
           </a:p>
         </p:txBody>
@@ -5919,7 +5919,7 @@
                 </a:solidFill>
                 <a:latin typeface="Segoe UI"/>
               </a:rPr>
-              <a:t>Hang Seng</a:t>
+              <a:t>Gold</a:t>
             </a:r>
           </a:p>
         </p:txBody>
@@ -5987,7 +5987,7 @@
                 </a:solidFill>
                 <a:latin typeface="Segoe UI"/>
               </a:rPr>
-              <a:t>77%</a:t>
+              <a:t>72%</a:t>
             </a:r>
           </a:p>
         </p:txBody>
@@ -6055,7 +6055,7 @@
                 </a:solidFill>
                 <a:latin typeface="Segoe UI"/>
               </a:rPr>
-              <a:t>Gold</a:t>
+              <a:t>Ethereum</a:t>
             </a:r>
           </a:p>
         </p:txBody>
@@ -6327,7 +6327,7 @@
                 </a:solidFill>
                 <a:latin typeface="Segoe UI"/>
               </a:rPr>
-              <a:t>FTSE 100</a:t>
+              <a:t>S&amp;P 500</a:t>
             </a:r>
           </a:p>
         </p:txBody>
@@ -6463,7 +6463,7 @@
                 </a:solidFill>
                 <a:latin typeface="Segoe UI"/>
               </a:rPr>
-              <a:t>ICICI Bank</a:t>
+              <a:t>Dow Jones</a:t>
             </a:r>
           </a:p>
         </p:txBody>
@@ -6531,7 +6531,7 @@
                 </a:solidFill>
                 <a:latin typeface="Segoe UI"/>
               </a:rPr>
-              <a:t>79%</a:t>
+              <a:t>67%</a:t>
             </a:r>
           </a:p>
         </p:txBody>
@@ -6659,7 +6659,7 @@
                 </a:solidFill>
                 <a:latin typeface="Segoe UI"/>
               </a:rPr>
-              <a:t>Base currency INR · USD/INR 95.7</a:t>
+              <a:t>Base currency INR · USD/INR 95.72</a:t>
             </a:r>
           </a:p>
         </p:txBody>
@@ -7067,7 +7067,7 @@
                 </a:solidFill>
                 <a:latin typeface="Segoe UI"/>
               </a:rPr>
-              <a:t>78,861</a:t>
+              <a:t>78,665</a:t>
             </a:r>
           </a:p>
         </p:txBody>
@@ -7101,7 +7101,7 @@
                 </a:solidFill>
                 <a:latin typeface="Segoe UI"/>
               </a:rPr>
-              <a:t>Rs 754,706</a:t>
+              <a:t>Rs 753,008</a:t>
             </a:r>
           </a:p>
         </p:txBody>
@@ -7135,7 +7135,7 @@
                 </a:solidFill>
                 <a:latin typeface="Segoe UI"/>
               </a:rPr>
-              <a:t>Rs 180,504</a:t>
+              <a:t>Rs 178,669</a:t>
             </a:r>
           </a:p>
         </p:txBody>
@@ -7169,7 +7169,7 @@
                 </a:solidFill>
                 <a:latin typeface="Segoe UI"/>
               </a:rPr>
-              <a:t>+31.4%</a:t>
+              <a:t>+31.1%</a:t>
             </a:r>
           </a:p>
         </p:txBody>
@@ -7339,7 +7339,7 @@
                 </a:solidFill>
                 <a:latin typeface="Segoe UI"/>
               </a:rPr>
-              <a:t>4,727</a:t>
+              <a:t>4,725</a:t>
             </a:r>
           </a:p>
         </p:txBody>
@@ -7373,7 +7373,7 @@
                 </a:solidFill>
                 <a:latin typeface="Segoe UI"/>
               </a:rPr>
-              <a:t>Rs 452,414</a:t>
+              <a:t>Rs 452,301</a:t>
             </a:r>
           </a:p>
         </p:txBody>
@@ -7407,7 +7407,7 @@
                 </a:solidFill>
                 <a:latin typeface="Segoe UI"/>
               </a:rPr>
-              <a:t>Rs 232,303</a:t>
+              <a:t>Rs 232,138</a:t>
             </a:r>
           </a:p>
         </p:txBody>
@@ -7441,7 +7441,7 @@
                 </a:solidFill>
                 <a:latin typeface="Segoe UI"/>
               </a:rPr>
-              <a:t>+105.5%</a:t>
+              <a:t>+105.4%</a:t>
             </a:r>
           </a:p>
         </p:txBody>
@@ -7645,7 +7645,7 @@
                 </a:solidFill>
                 <a:latin typeface="Segoe UI"/>
               </a:rPr>
-              <a:t>Rs 296,996</a:t>
+              <a:t>Rs 296,646</a:t>
             </a:r>
           </a:p>
         </p:txBody>
@@ -7679,7 +7679,7 @@
                 </a:solidFill>
                 <a:latin typeface="Segoe UI"/>
               </a:rPr>
-              <a:t>Rs 119,951</a:t>
+              <a:t>Rs 119,558</a:t>
             </a:r>
           </a:p>
         </p:txBody>
@@ -7713,7 +7713,7 @@
                 </a:solidFill>
                 <a:latin typeface="Segoe UI"/>
               </a:rPr>
-              <a:t>+67.8%</a:t>
+              <a:t>+67.5%</a:t>
             </a:r>
           </a:p>
         </p:txBody>
@@ -7883,7 +7883,7 @@
                 </a:solidFill>
                 <a:latin typeface="Segoe UI"/>
               </a:rPr>
-              <a:t>208</a:t>
+              <a:t>213</a:t>
             </a:r>
           </a:p>
         </p:txBody>
@@ -7917,7 +7917,7 @@
                 </a:solidFill>
                 <a:latin typeface="Segoe UI"/>
               </a:rPr>
-              <a:t>Rs 159,613</a:t>
+              <a:t>Rs 163,150</a:t>
             </a:r>
           </a:p>
         </p:txBody>
@@ -7951,7 +7951,7 @@
                 </a:solidFill>
                 <a:latin typeface="Segoe UI"/>
               </a:rPr>
-              <a:t>Rs -184,908</a:t>
+              <a:t>Rs -181,453</a:t>
             </a:r>
           </a:p>
         </p:txBody>
@@ -7985,7 +7985,7 @@
                 </a:solidFill>
                 <a:latin typeface="Segoe UI"/>
               </a:rPr>
-              <a:t>-53.7%</a:t>
+              <a:t>-52.7%</a:t>
             </a:r>
           </a:p>
         </p:txBody>
@@ -8155,7 +8155,7 @@
                 </a:solidFill>
                 <a:latin typeface="Segoe UI"/>
               </a:rPr>
-              <a:t>1,121</a:t>
+              <a:t>1,130</a:t>
             </a:r>
           </a:p>
         </p:txBody>
@@ -8189,7 +8189,7 @@
                 </a:solidFill>
                 <a:latin typeface="Segoe UI"/>
               </a:rPr>
-              <a:t>Rs 89,680</a:t>
+              <a:t>Rs 90,400</a:t>
             </a:r>
           </a:p>
         </p:txBody>
@@ -8223,7 +8223,7 @@
                 </a:solidFill>
                 <a:latin typeface="Segoe UI"/>
               </a:rPr>
-              <a:t>Rs -22,320</a:t>
+              <a:t>Rs -21,600</a:t>
             </a:r>
           </a:p>
         </p:txBody>
@@ -8257,7 +8257,7 @@
                 </a:solidFill>
                 <a:latin typeface="Segoe UI"/>
               </a:rPr>
-              <a:t>-19.9%</a:t>
+              <a:t>-19.3%</a:t>
             </a:r>
           </a:p>
         </p:txBody>
@@ -8427,7 +8427,7 @@
                 </a:solidFill>
                 <a:latin typeface="Segoe UI"/>
               </a:rPr>
-              <a:t>1,316</a:t>
+              <a:t>1,310</a:t>
             </a:r>
           </a:p>
         </p:txBody>
@@ -8461,7 +8461,7 @@
                 </a:solidFill>
                 <a:latin typeface="Segoe UI"/>
               </a:rPr>
-              <a:t>Rs 65,800</a:t>
+              <a:t>Rs 65,490</a:t>
             </a:r>
           </a:p>
         </p:txBody>
@@ -8495,7 +8495,7 @@
                 </a:solidFill>
                 <a:latin typeface="Segoe UI"/>
               </a:rPr>
-              <a:t>Rs -56,700</a:t>
+              <a:t>Rs -57,010</a:t>
             </a:r>
           </a:p>
         </p:txBody>
@@ -8529,7 +8529,7 @@
                 </a:solidFill>
                 <a:latin typeface="Segoe UI"/>
               </a:rPr>
-              <a:t>-46.3%</a:t>
+              <a:t>-46.5%</a:t>
             </a:r>
           </a:p>
         </p:txBody>
@@ -8699,7 +8699,7 @@
                 </a:solidFill>
                 <a:latin typeface="Segoe UI"/>
               </a:rPr>
-              <a:t>2,302</a:t>
+              <a:t>2,284</a:t>
             </a:r>
           </a:p>
         </p:txBody>
@@ -8733,7 +8733,7 @@
                 </a:solidFill>
                 <a:latin typeface="Segoe UI"/>
               </a:rPr>
-              <a:t>Rs 57,550</a:t>
+              <a:t>Rs 57,103</a:t>
             </a:r>
           </a:p>
         </p:txBody>
@@ -8767,7 +8767,7 @@
                 </a:solidFill>
                 <a:latin typeface="Segoe UI"/>
               </a:rPr>
-              <a:t>Rs -32,450</a:t>
+              <a:t>Rs -32,897</a:t>
             </a:r>
           </a:p>
         </p:txBody>
@@ -8801,7 +8801,7 @@
                 </a:solidFill>
                 <a:latin typeface="Segoe UI"/>
               </a:rPr>
-              <a:t>-36.1%</a:t>
+              <a:t>-36.5%</a:t>
             </a:r>
           </a:p>
         </p:txBody>
@@ -8971,7 +8971,7 @@
                 </a:solidFill>
                 <a:latin typeface="Segoe UI"/>
               </a:rPr>
-              <a:t>727</a:t>
+              <a:t>729</a:t>
             </a:r>
           </a:p>
         </p:txBody>
@@ -9005,7 +9005,7 @@
                 </a:solidFill>
                 <a:latin typeface="Segoe UI"/>
               </a:rPr>
-              <a:t>Rs 43,617</a:t>
+              <a:t>Rs 43,740</a:t>
             </a:r>
           </a:p>
         </p:txBody>
@@ -9039,7 +9039,7 @@
                 </a:solidFill>
                 <a:latin typeface="Segoe UI"/>
               </a:rPr>
-              <a:t>Rs -47,583</a:t>
+              <a:t>Rs -47,460</a:t>
             </a:r>
           </a:p>
         </p:txBody>
@@ -9073,7 +9073,7 @@
                 </a:solidFill>
                 <a:latin typeface="Segoe UI"/>
               </a:rPr>
-              <a:t>-52.2%</a:t>
+              <a:t>-52.0%</a:t>
             </a:r>
           </a:p>
         </p:txBody>
@@ -9141,7 +9141,7 @@
                 </a:solidFill>
                 <a:latin typeface="Segoe UI"/>
               </a:rPr>
-              <a:t>Total Rs 1,920,376 | P&amp;L Rs 188,797 (+10.9%) | Sharpe 0.13 | Vol 19.37% | VaR95 -1.89%/day</a:t>
+              <a:t>Total Rs 1,921,838 | P&amp;L Rs 189,945 (+11.0%) | Sharpe 0.18 | Vol 19.31% | VaR95 -1.89%/day</a:t>
             </a:r>
           </a:p>
         </p:txBody>

--- a/docs/pmr_daily.pptx
+++ b/docs/pmr_daily.pptx
@@ -3197,7 +3197,7 @@
                 </a:solidFill>
                 <a:latin typeface="Segoe UI"/>
               </a:rPr>
-              <a:t>Wednesday, 26 Aug 2026 07:25 SGT</a:t>
+              <a:t>Thursday, 27 Aug 2026 12:20 SGT</a:t>
             </a:r>
           </a:p>
         </p:txBody>
@@ -3265,7 +3265,7 @@
                 </a:solidFill>
                 <a:latin typeface="Segoe UI"/>
               </a:rPr>
-              <a:t>RAG 11R / 19A / 16G   |   69.6% above 200DMA   |   Portfolio Rs 1,921,838 (+11.0%)</a:t>
+              <a:t>RAG 11R / 18A / 17G   |   67.4% above 200DMA   |   Portfolio Rs 1,912,064 (+10.7%)</a:t>
             </a:r>
           </a:p>
         </p:txBody>
@@ -3529,7 +3529,7 @@
                 </a:solidFill>
                 <a:latin typeface="Segoe UI"/>
               </a:rPr>
-              <a:t>+33.2%</a:t>
+              <a:t>+39.0%</a:t>
             </a:r>
           </a:p>
         </p:txBody>
@@ -3655,7 +3655,7 @@
                 </a:solidFill>
                 <a:latin typeface="Segoe UI"/>
               </a:rPr>
-              <a:t>+31.7%</a:t>
+              <a:t>+34.1%</a:t>
             </a:r>
           </a:p>
         </p:txBody>
@@ -3781,7 +3781,7 @@
                 </a:solidFill>
                 <a:latin typeface="Segoe UI"/>
               </a:rPr>
-              <a:t>+25.2%</a:t>
+              <a:t>+25.5%</a:t>
             </a:r>
           </a:p>
         </p:txBody>
@@ -4033,7 +4033,7 @@
                 </a:solidFill>
                 <a:latin typeface="Segoe UI"/>
               </a:rPr>
-              <a:t>+16.7%</a:t>
+              <a:t>+15.6%</a:t>
             </a:r>
           </a:p>
         </p:txBody>
@@ -4125,7 +4125,7 @@
                 </a:solidFill>
                 <a:latin typeface="Segoe UI"/>
               </a:rPr>
-              <a:t>Crude Oil WTI</a:t>
+              <a:t>TCS</a:t>
             </a:r>
           </a:p>
         </p:txBody>
@@ -4159,7 +4159,7 @@
                 </a:solidFill>
                 <a:latin typeface="Segoe UI"/>
               </a:rPr>
-              <a:t>CL=F · RED</a:t>
+              <a:t>TCS.NS · RED</a:t>
             </a:r>
           </a:p>
         </p:txBody>
@@ -4193,7 +4193,7 @@
                 </a:solidFill>
                 <a:latin typeface="Segoe UI"/>
               </a:rPr>
-              <a:t>-4.4%</a:t>
+              <a:t>-4.5%</a:t>
             </a:r>
           </a:p>
         </p:txBody>
@@ -4251,7 +4251,7 @@
                 </a:solidFill>
                 <a:latin typeface="Segoe UI"/>
               </a:rPr>
-              <a:t>ITC</a:t>
+              <a:t>Amazon</a:t>
             </a:r>
           </a:p>
         </p:txBody>
@@ -4281,11 +4281,11 @@
             <a:r>
               <a:rPr sz="900" b="0">
                 <a:solidFill>
-                  <a:srgbClr val="EF4444"/>
-                </a:solidFill>
-                <a:latin typeface="Segoe UI"/>
-              </a:rPr>
-              <a:t>ITC.NS · RED</a:t>
+                  <a:srgbClr val="F59E0B"/>
+                </a:solidFill>
+                <a:latin typeface="Segoe UI"/>
+              </a:rPr>
+              <a:t>AMZN · AMBER</a:t>
             </a:r>
           </a:p>
         </p:txBody>
@@ -4319,7 +4319,7 @@
                 </a:solidFill>
                 <a:latin typeface="Segoe UI"/>
               </a:rPr>
-              <a:t>-4.0%</a:t>
+              <a:t>-4.2%</a:t>
             </a:r>
           </a:p>
         </p:txBody>
@@ -4377,7 +4377,7 @@
                 </a:solidFill>
                 <a:latin typeface="Segoe UI"/>
               </a:rPr>
-              <a:t>Amazon</a:t>
+              <a:t>Alphabet</a:t>
             </a:r>
           </a:p>
         </p:txBody>
@@ -4411,7 +4411,7 @@
                 </a:solidFill>
                 <a:latin typeface="Segoe UI"/>
               </a:rPr>
-              <a:t>AMZN · AMBER</a:t>
+              <a:t>GOOGL · AMBER</a:t>
             </a:r>
           </a:p>
         </p:txBody>
@@ -4445,7 +4445,7 @@
                 </a:solidFill>
                 <a:latin typeface="Segoe UI"/>
               </a:rPr>
-              <a:t>-3.9%</a:t>
+              <a:t>-4.0%</a:t>
             </a:r>
           </a:p>
         </p:txBody>
@@ -4503,7 +4503,7 @@
                 </a:solidFill>
                 <a:latin typeface="Segoe UI"/>
               </a:rPr>
-              <a:t>TCS</a:t>
+              <a:t>ITC</a:t>
             </a:r>
           </a:p>
         </p:txBody>
@@ -4537,7 +4537,7 @@
                 </a:solidFill>
                 <a:latin typeface="Segoe UI"/>
               </a:rPr>
-              <a:t>TCS.NS · RED</a:t>
+              <a:t>ITC.NS · RED</a:t>
             </a:r>
           </a:p>
         </p:txBody>
@@ -4571,7 +4571,7 @@
                 </a:solidFill>
                 <a:latin typeface="Segoe UI"/>
               </a:rPr>
-              <a:t>-3.4%</a:t>
+              <a:t>-3.9%</a:t>
             </a:r>
           </a:p>
         </p:txBody>
@@ -4629,7 +4629,7 @@
                 </a:solidFill>
                 <a:latin typeface="Segoe UI"/>
               </a:rPr>
-              <a:t>Alphabet</a:t>
+              <a:t>HDFC Bank</a:t>
             </a:r>
           </a:p>
         </p:txBody>
@@ -4659,11 +4659,11 @@
             <a:r>
               <a:rPr sz="900" b="0">
                 <a:solidFill>
-                  <a:srgbClr val="F59E0B"/>
-                </a:solidFill>
-                <a:latin typeface="Segoe UI"/>
-              </a:rPr>
-              <a:t>GOOGL · AMBER</a:t>
+                  <a:srgbClr val="EF4444"/>
+                </a:solidFill>
+                <a:latin typeface="Segoe UI"/>
+              </a:rPr>
+              <a:t>HDFCBANK.NS · RED</a:t>
             </a:r>
           </a:p>
         </p:txBody>
@@ -4697,7 +4697,7 @@
                 </a:solidFill>
                 <a:latin typeface="Segoe UI"/>
               </a:rPr>
-              <a:t>-2.6%</a:t>
+              <a:t>-3.7%</a:t>
             </a:r>
           </a:p>
         </p:txBody>
@@ -4837,7 +4837,7 @@
         <p:spPr>
           <a:xfrm>
             <a:off x="457200" y="1188720"/>
-            <a:ext cx="11247120" cy="5508365"/>
+            <a:ext cx="11247120" cy="5544503"/>
           </a:xfrm>
           <a:prstGeom prst="rect">
             <a:avLst/>
@@ -4967,7 +4967,7 @@
                 </a:solidFill>
                 <a:latin typeface="Segoe UI"/>
               </a:rPr>
-              <a:t>Copper</a:t>
+              <a:t>Microsoft</a:t>
             </a:r>
           </a:p>
         </p:txBody>
@@ -5035,7 +5035,7 @@
                 </a:solidFill>
                 <a:latin typeface="Segoe UI"/>
               </a:rPr>
-              <a:t>95%</a:t>
+              <a:t>84%</a:t>
             </a:r>
           </a:p>
         </p:txBody>
@@ -5069,7 +5069,7 @@
                 </a:solidFill>
                 <a:latin typeface="Segoe UI"/>
               </a:rPr>
-              <a:t>above 200DMA · golden cross (50&gt;200) · MACD bullish</a:t>
+              <a:t>above 200DMA · golden cross (50&gt;200) · MACD bearish</a:t>
             </a:r>
           </a:p>
         </p:txBody>
@@ -5103,7 +5103,7 @@
                 </a:solidFill>
                 <a:latin typeface="Segoe UI"/>
               </a:rPr>
-              <a:t>Microsoft</a:t>
+              <a:t>Copper</a:t>
             </a:r>
           </a:p>
         </p:txBody>
@@ -5171,7 +5171,7 @@
                 </a:solidFill>
                 <a:latin typeface="Segoe UI"/>
               </a:rPr>
-              <a:t>84%</a:t>
+              <a:t>95%</a:t>
             </a:r>
           </a:p>
         </p:txBody>
@@ -5205,7 +5205,7 @@
                 </a:solidFill>
                 <a:latin typeface="Segoe UI"/>
               </a:rPr>
-              <a:t>above 200DMA · golden cross (50&gt;200) · MACD bearish</a:t>
+              <a:t>above 200DMA · golden cross (50&gt;200) · MACD bullish</a:t>
             </a:r>
           </a:p>
         </p:txBody>
@@ -5511,7 +5511,7 @@
                 </a:solidFill>
                 <a:latin typeface="Segoe UI"/>
               </a:rPr>
-              <a:t>FTSE 100</a:t>
+              <a:t>ICICI Bank</a:t>
             </a:r>
           </a:p>
         </p:txBody>
@@ -5579,7 +5579,7 @@
                 </a:solidFill>
                 <a:latin typeface="Segoe UI"/>
               </a:rPr>
-              <a:t>81%</a:t>
+              <a:t>93%</a:t>
             </a:r>
           </a:p>
         </p:txBody>
@@ -5715,7 +5715,7 @@
                 </a:solidFill>
                 <a:latin typeface="Segoe UI"/>
               </a:rPr>
-              <a:t>81%</a:t>
+              <a:t>80%</a:t>
             </a:r>
           </a:p>
         </p:txBody>
@@ -5783,7 +5783,7 @@
                 </a:solidFill>
                 <a:latin typeface="Segoe UI"/>
               </a:rPr>
-              <a:t>Bitcoin</a:t>
+              <a:t>FTSE 100</a:t>
             </a:r>
           </a:p>
         </p:txBody>
@@ -5817,7 +5817,7 @@
                 </a:solidFill>
                 <a:latin typeface="Segoe UI"/>
               </a:rPr>
-              <a:t>BUY</a:t>
+              <a:t>STRONG BUY</a:t>
             </a:r>
           </a:p>
         </p:txBody>
@@ -5851,7 +5851,7 @@
                 </a:solidFill>
                 <a:latin typeface="Segoe UI"/>
               </a:rPr>
-              <a:t>72%</a:t>
+              <a:t>80%</a:t>
             </a:r>
           </a:p>
         </p:txBody>
@@ -5885,7 +5885,7 @@
                 </a:solidFill>
                 <a:latin typeface="Segoe UI"/>
               </a:rPr>
-              <a:t>above 200DMA · death cross (50&lt;200) · MACD bullish</a:t>
+              <a:t>above 200DMA · golden cross (50&gt;200) · MACD bullish</a:t>
             </a:r>
           </a:p>
         </p:txBody>
@@ -5919,7 +5919,7 @@
                 </a:solidFill>
                 <a:latin typeface="Segoe UI"/>
               </a:rPr>
-              <a:t>Gold</a:t>
+              <a:t>Ethereum</a:t>
             </a:r>
           </a:p>
         </p:txBody>
@@ -6055,7 +6055,7 @@
                 </a:solidFill>
                 <a:latin typeface="Segoe UI"/>
               </a:rPr>
-              <a:t>Ethereum</a:t>
+              <a:t>Bitcoin</a:t>
             </a:r>
           </a:p>
         </p:txBody>
@@ -6123,7 +6123,7 @@
                 </a:solidFill>
                 <a:latin typeface="Segoe UI"/>
               </a:rPr>
-              <a:t>71%</a:t>
+              <a:t>72%</a:t>
             </a:r>
           </a:p>
         </p:txBody>
@@ -6191,7 +6191,7 @@
                 </a:solidFill>
                 <a:latin typeface="Segoe UI"/>
               </a:rPr>
-              <a:t>Straits Times</a:t>
+              <a:t>Gold</a:t>
             </a:r>
           </a:p>
         </p:txBody>
@@ -6259,7 +6259,7 @@
                 </a:solidFill>
                 <a:latin typeface="Segoe UI"/>
               </a:rPr>
-              <a:t>70%</a:t>
+              <a:t>71%</a:t>
             </a:r>
           </a:p>
         </p:txBody>
@@ -6293,7 +6293,7 @@
                 </a:solidFill>
                 <a:latin typeface="Segoe UI"/>
               </a:rPr>
-              <a:t>above 200DMA · golden cross (50&gt;200) · MACD bearish</a:t>
+              <a:t>above 200DMA · death cross (50&lt;200) · MACD bullish</a:t>
             </a:r>
           </a:p>
         </p:txBody>
@@ -6327,7 +6327,7 @@
                 </a:solidFill>
                 <a:latin typeface="Segoe UI"/>
               </a:rPr>
-              <a:t>S&amp;P 500</a:t>
+              <a:t>Straits Times</a:t>
             </a:r>
           </a:p>
         </p:txBody>
@@ -6395,7 +6395,7 @@
                 </a:solidFill>
                 <a:latin typeface="Segoe UI"/>
               </a:rPr>
-              <a:t>67%</a:t>
+              <a:t>69%</a:t>
             </a:r>
           </a:p>
         </p:txBody>
@@ -6463,7 +6463,7 @@
                 </a:solidFill>
                 <a:latin typeface="Segoe UI"/>
               </a:rPr>
-              <a:t>Dow Jones</a:t>
+              <a:t>Apple</a:t>
             </a:r>
           </a:p>
         </p:txBody>
@@ -6531,7 +6531,7 @@
                 </a:solidFill>
                 <a:latin typeface="Segoe UI"/>
               </a:rPr>
-              <a:t>67%</a:t>
+              <a:t>92%</a:t>
             </a:r>
           </a:p>
         </p:txBody>
@@ -6565,7 +6565,7 @@
                 </a:solidFill>
                 <a:latin typeface="Segoe UI"/>
               </a:rPr>
-              <a:t>above 200DMA · golden cross (50&gt;200) · MACD bearish</a:t>
+              <a:t>above 200DMA · golden cross (50&gt;200) · MACD bullish</a:t>
             </a:r>
           </a:p>
         </p:txBody>
@@ -6659,7 +6659,7 @@
                 </a:solidFill>
                 <a:latin typeface="Segoe UI"/>
               </a:rPr>
-              <a:t>Base currency INR · USD/INR 95.72</a:t>
+              <a:t>Base currency INR · USD/INR 95.4</a:t>
             </a:r>
           </a:p>
         </p:txBody>
@@ -7067,7 +7067,7 @@
                 </a:solidFill>
                 <a:latin typeface="Segoe UI"/>
               </a:rPr>
-              <a:t>78,665</a:t>
+              <a:t>78,840</a:t>
             </a:r>
           </a:p>
         </p:txBody>
@@ -7101,7 +7101,7 @@
                 </a:solidFill>
                 <a:latin typeface="Segoe UI"/>
               </a:rPr>
-              <a:t>Rs 753,008</a:t>
+              <a:t>Rs 752,148</a:t>
             </a:r>
           </a:p>
         </p:txBody>
@@ -7135,7 +7135,7 @@
                 </a:solidFill>
                 <a:latin typeface="Segoe UI"/>
               </a:rPr>
-              <a:t>Rs 178,669</a:t>
+              <a:t>Rs 179,736</a:t>
             </a:r>
           </a:p>
         </p:txBody>
@@ -7169,7 +7169,7 @@
                 </a:solidFill>
                 <a:latin typeface="Segoe UI"/>
               </a:rPr>
-              <a:t>+31.1%</a:t>
+              <a:t>+31.4%</a:t>
             </a:r>
           </a:p>
         </p:txBody>
@@ -7203,7 +7203,7 @@
                 </a:solidFill>
                 <a:latin typeface="Segoe UI"/>
               </a:rPr>
-              <a:t>+0.0%</a:t>
+              <a:t>+0.3%</a:t>
             </a:r>
           </a:p>
         </p:txBody>
@@ -7339,7 +7339,7 @@
                 </a:solidFill>
                 <a:latin typeface="Segoe UI"/>
               </a:rPr>
-              <a:t>4,725</a:t>
+              <a:t>4,680</a:t>
             </a:r>
           </a:p>
         </p:txBody>
@@ -7373,7 +7373,7 @@
                 </a:solidFill>
                 <a:latin typeface="Segoe UI"/>
               </a:rPr>
-              <a:t>Rs 452,301</a:t>
+              <a:t>Rs 446,472</a:t>
             </a:r>
           </a:p>
         </p:txBody>
@@ -7407,7 +7407,7 @@
                 </a:solidFill>
                 <a:latin typeface="Segoe UI"/>
               </a:rPr>
-              <a:t>Rs 232,138</a:t>
+              <a:t>Rs 227,047</a:t>
             </a:r>
           </a:p>
         </p:txBody>
@@ -7441,7 +7441,7 @@
                 </a:solidFill>
                 <a:latin typeface="Segoe UI"/>
               </a:rPr>
-              <a:t>+105.4%</a:t>
+              <a:t>+103.5%</a:t>
             </a:r>
           </a:p>
         </p:txBody>
@@ -7475,7 +7475,7 @@
                 </a:solidFill>
                 <a:latin typeface="Segoe UI"/>
               </a:rPr>
-              <a:t>+0.0%</a:t>
+              <a:t>+1.8%</a:t>
             </a:r>
           </a:p>
         </p:txBody>
@@ -7611,7 +7611,7 @@
                 </a:solidFill>
                 <a:latin typeface="Segoe UI"/>
               </a:rPr>
-              <a:t>310</a:t>
+              <a:t>313</a:t>
             </a:r>
           </a:p>
         </p:txBody>
@@ -7645,7 +7645,7 @@
                 </a:solidFill>
                 <a:latin typeface="Segoe UI"/>
               </a:rPr>
-              <a:t>Rs 296,646</a:t>
+              <a:t>Rs 299,038</a:t>
             </a:r>
           </a:p>
         </p:txBody>
@@ -7679,7 +7679,7 @@
                 </a:solidFill>
                 <a:latin typeface="Segoe UI"/>
               </a:rPr>
-              <a:t>Rs 119,558</a:t>
+              <a:t>Rs 122,544</a:t>
             </a:r>
           </a:p>
         </p:txBody>
@@ -7713,7 +7713,7 @@
                 </a:solidFill>
                 <a:latin typeface="Segoe UI"/>
               </a:rPr>
-              <a:t>+67.5%</a:t>
+              <a:t>+69.4%</a:t>
             </a:r>
           </a:p>
         </p:txBody>
@@ -7883,7 +7883,7 @@
                 </a:solidFill>
                 <a:latin typeface="Segoe UI"/>
               </a:rPr>
-              <a:t>213</a:t>
+              <a:t>210</a:t>
             </a:r>
           </a:p>
         </p:txBody>
@@ -7917,7 +7917,7 @@
                 </a:solidFill>
                 <a:latin typeface="Segoe UI"/>
               </a:rPr>
-              <a:t>Rs 163,150</a:t>
+              <a:t>Rs 160,016</a:t>
             </a:r>
           </a:p>
         </p:txBody>
@@ -7951,7 +7951,7 @@
                 </a:solidFill>
                 <a:latin typeface="Segoe UI"/>
               </a:rPr>
-              <a:t>Rs -181,453</a:t>
+              <a:t>Rs -183,431</a:t>
             </a:r>
           </a:p>
         </p:txBody>
@@ -7985,7 +7985,7 @@
                 </a:solidFill>
                 <a:latin typeface="Segoe UI"/>
               </a:rPr>
-              <a:t>-52.7%</a:t>
+              <a:t>-53.4%</a:t>
             </a:r>
           </a:p>
         </p:txBody>
@@ -8155,7 +8155,7 @@
                 </a:solidFill>
                 <a:latin typeface="Segoe UI"/>
               </a:rPr>
-              <a:t>1,130</a:t>
+              <a:t>1,120</a:t>
             </a:r>
           </a:p>
         </p:txBody>
@@ -8189,7 +8189,7 @@
                 </a:solidFill>
                 <a:latin typeface="Segoe UI"/>
               </a:rPr>
-              <a:t>Rs 90,400</a:t>
+              <a:t>Rs 89,560</a:t>
             </a:r>
           </a:p>
         </p:txBody>
@@ -8223,7 +8223,7 @@
                 </a:solidFill>
                 <a:latin typeface="Segoe UI"/>
               </a:rPr>
-              <a:t>Rs -21,600</a:t>
+              <a:t>Rs -22,440</a:t>
             </a:r>
           </a:p>
         </p:txBody>
@@ -8257,7 +8257,7 @@
                 </a:solidFill>
                 <a:latin typeface="Segoe UI"/>
               </a:rPr>
-              <a:t>-19.3%</a:t>
+              <a:t>-20.0%</a:t>
             </a:r>
           </a:p>
         </p:txBody>
@@ -8287,11 +8287,11 @@
             <a:r>
               <a:rPr sz="1000" b="0">
                 <a:solidFill>
-                  <a:srgbClr val="22C55E"/>
-                </a:solidFill>
-                <a:latin typeface="Segoe UI"/>
-              </a:rPr>
-              <a:t>+0.0%</a:t>
+                  <a:srgbClr val="EF4444"/>
+                </a:solidFill>
+                <a:latin typeface="Segoe UI"/>
+              </a:rPr>
+              <a:t>-0.0%</a:t>
             </a:r>
           </a:p>
         </p:txBody>
@@ -8427,7 +8427,7 @@
                 </a:solidFill>
                 <a:latin typeface="Segoe UI"/>
               </a:rPr>
-              <a:t>1,310</a:t>
+              <a:t>1,303</a:t>
             </a:r>
           </a:p>
         </p:txBody>
@@ -8461,7 +8461,7 @@
                 </a:solidFill>
                 <a:latin typeface="Segoe UI"/>
               </a:rPr>
-              <a:t>Rs 65,490</a:t>
+              <a:t>Rs 65,155</a:t>
             </a:r>
           </a:p>
         </p:txBody>
@@ -8495,7 +8495,7 @@
                 </a:solidFill>
                 <a:latin typeface="Segoe UI"/>
               </a:rPr>
-              <a:t>Rs -57,010</a:t>
+              <a:t>Rs -57,345</a:t>
             </a:r>
           </a:p>
         </p:txBody>
@@ -8529,7 +8529,7 @@
                 </a:solidFill>
                 <a:latin typeface="Segoe UI"/>
               </a:rPr>
-              <a:t>-46.5%</a:t>
+              <a:t>-46.8%</a:t>
             </a:r>
           </a:p>
         </p:txBody>
@@ -8563,7 +8563,7 @@
                 </a:solidFill>
                 <a:latin typeface="Segoe UI"/>
               </a:rPr>
-              <a:t>+0.0%</a:t>
+              <a:t>+0.4%</a:t>
             </a:r>
           </a:p>
         </p:txBody>
@@ -8699,7 +8699,7 @@
                 </a:solidFill>
                 <a:latin typeface="Segoe UI"/>
               </a:rPr>
-              <a:t>2,284</a:t>
+              <a:t>2,258</a:t>
             </a:r>
           </a:p>
         </p:txBody>
@@ -8733,7 +8733,7 @@
                 </a:solidFill>
                 <a:latin typeface="Segoe UI"/>
               </a:rPr>
-              <a:t>Rs 57,103</a:t>
+              <a:t>Rs 56,460</a:t>
             </a:r>
           </a:p>
         </p:txBody>
@@ -8767,7 +8767,7 @@
                 </a:solidFill>
                 <a:latin typeface="Segoe UI"/>
               </a:rPr>
-              <a:t>Rs -32,897</a:t>
+              <a:t>Rs -33,540</a:t>
             </a:r>
           </a:p>
         </p:txBody>
@@ -8801,7 +8801,7 @@
                 </a:solidFill>
                 <a:latin typeface="Segoe UI"/>
               </a:rPr>
-              <a:t>-36.5%</a:t>
+              <a:t>-37.3%</a:t>
             </a:r>
           </a:p>
         </p:txBody>
@@ -8831,11 +8831,11 @@
             <a:r>
               <a:rPr sz="1000" b="0">
                 <a:solidFill>
-                  <a:srgbClr val="22C55E"/>
-                </a:solidFill>
-                <a:latin typeface="Segoe UI"/>
-              </a:rPr>
-              <a:t>+0.0%</a:t>
+                  <a:srgbClr val="EF4444"/>
+                </a:solidFill>
+                <a:latin typeface="Segoe UI"/>
+              </a:rPr>
+              <a:t>-0.5%</a:t>
             </a:r>
           </a:p>
         </p:txBody>
@@ -8971,7 +8971,7 @@
                 </a:solidFill>
                 <a:latin typeface="Segoe UI"/>
               </a:rPr>
-              <a:t>729</a:t>
+              <a:t>720</a:t>
             </a:r>
           </a:p>
         </p:txBody>
@@ -9005,7 +9005,7 @@
                 </a:solidFill>
                 <a:latin typeface="Segoe UI"/>
               </a:rPr>
-              <a:t>Rs 43,740</a:t>
+              <a:t>Rs 43,215</a:t>
             </a:r>
           </a:p>
         </p:txBody>
@@ -9039,7 +9039,7 @@
                 </a:solidFill>
                 <a:latin typeface="Segoe UI"/>
               </a:rPr>
-              <a:t>Rs -47,460</a:t>
+              <a:t>Rs -47,985</a:t>
             </a:r>
           </a:p>
         </p:txBody>
@@ -9073,7 +9073,7 @@
                 </a:solidFill>
                 <a:latin typeface="Segoe UI"/>
               </a:rPr>
-              <a:t>-52.0%</a:t>
+              <a:t>-52.6%</a:t>
             </a:r>
           </a:p>
         </p:txBody>
@@ -9103,11 +9103,11 @@
             <a:r>
               <a:rPr sz="1000" b="0">
                 <a:solidFill>
-                  <a:srgbClr val="22C55E"/>
-                </a:solidFill>
-                <a:latin typeface="Segoe UI"/>
-              </a:rPr>
-              <a:t>+0.0%</a:t>
+                  <a:srgbClr val="EF4444"/>
+                </a:solidFill>
+                <a:latin typeface="Segoe UI"/>
+              </a:rPr>
+              <a:t>-1.0%</a:t>
             </a:r>
           </a:p>
         </p:txBody>
@@ -9141,7 +9141,7 @@
                 </a:solidFill>
                 <a:latin typeface="Segoe UI"/>
               </a:rPr>
-              <a:t>Total Rs 1,921,838 | P&amp;L Rs 189,945 (+11.0%) | Sharpe 0.18 | Vol 19.31% | VaR95 -1.89%/day</a:t>
+              <a:t>Total Rs 1,912,064 | P&amp;L Rs 184,586 (+10.7%) | Sharpe 0.17 | Vol 19.34% | VaR95 -1.89%/day</a:t>
             </a:r>
           </a:p>
         </p:txBody>

--- a/docs/pmr_daily.pptx
+++ b/docs/pmr_daily.pptx
@@ -3197,7 +3197,7 @@
                 </a:solidFill>
                 <a:latin typeface="Segoe UI"/>
               </a:rPr>
-              <a:t>Thursday, 27 Aug 2026 12:20 SGT</a:t>
+              <a:t>Friday, 28 Aug 2026 14:47 SGT</a:t>
             </a:r>
           </a:p>
         </p:txBody>
@@ -3265,7 +3265,7 @@
                 </a:solidFill>
                 <a:latin typeface="Segoe UI"/>
               </a:rPr>
-              <a:t>RAG 11R / 18A / 17G   |   67.4% above 200DMA   |   Portfolio Rs 1,912,064 (+10.7%)</a:t>
+              <a:t>RAG 11R / 16A / 19G   |   65.2% above 200DMA   |   Portfolio Rs 1,938,136 (+12.1%)</a:t>
             </a:r>
           </a:p>
         </p:txBody>
@@ -3491,11 +3491,11 @@
             <a:r>
               <a:rPr sz="900" b="0">
                 <a:solidFill>
-                  <a:srgbClr val="EF4444"/>
-                </a:solidFill>
-                <a:latin typeface="Segoe UI"/>
-              </a:rPr>
-              <a:t>SOL-USD · RED</a:t>
+                  <a:srgbClr val="F59E0B"/>
+                </a:solidFill>
+                <a:latin typeface="Segoe UI"/>
+              </a:rPr>
+              <a:t>SOL-USD · AMBER</a:t>
             </a:r>
           </a:p>
         </p:txBody>
@@ -3529,7 +3529,7 @@
                 </a:solidFill>
                 <a:latin typeface="Segoe UI"/>
               </a:rPr>
-              <a:t>+39.0%</a:t>
+              <a:t>+47.9%</a:t>
             </a:r>
           </a:p>
         </p:txBody>
@@ -3655,7 +3655,7 @@
                 </a:solidFill>
                 <a:latin typeface="Segoe UI"/>
               </a:rPr>
-              <a:t>+34.1%</a:t>
+              <a:t>+34.6%</a:t>
             </a:r>
           </a:p>
         </p:txBody>
@@ -3781,7 +3781,7 @@
                 </a:solidFill>
                 <a:latin typeface="Segoe UI"/>
               </a:rPr>
-              <a:t>+25.5%</a:t>
+              <a:t>+27.2%</a:t>
             </a:r>
           </a:p>
         </p:txBody>
@@ -3907,7 +3907,7 @@
                 </a:solidFill>
                 <a:latin typeface="Segoe UI"/>
               </a:rPr>
-              <a:t>+19.8%</a:t>
+              <a:t>+21.4%</a:t>
             </a:r>
           </a:p>
         </p:txBody>
@@ -4033,7 +4033,7 @@
                 </a:solidFill>
                 <a:latin typeface="Segoe UI"/>
               </a:rPr>
-              <a:t>+15.6%</a:t>
+              <a:t>+14.5%</a:t>
             </a:r>
           </a:p>
         </p:txBody>
@@ -4125,7 +4125,7 @@
                 </a:solidFill>
                 <a:latin typeface="Segoe UI"/>
               </a:rPr>
-              <a:t>TCS</a:t>
+              <a:t>Amazon</a:t>
             </a:r>
           </a:p>
         </p:txBody>
@@ -4155,11 +4155,11 @@
             <a:r>
               <a:rPr sz="900" b="0">
                 <a:solidFill>
-                  <a:srgbClr val="EF4444"/>
-                </a:solidFill>
-                <a:latin typeface="Segoe UI"/>
-              </a:rPr>
-              <a:t>TCS.NS · RED</a:t>
+                  <a:srgbClr val="F59E0B"/>
+                </a:solidFill>
+                <a:latin typeface="Segoe UI"/>
+              </a:rPr>
+              <a:t>AMZN · AMBER</a:t>
             </a:r>
           </a:p>
         </p:txBody>
@@ -4193,7 +4193,7 @@
                 </a:solidFill>
                 <a:latin typeface="Segoe UI"/>
               </a:rPr>
-              <a:t>-4.5%</a:t>
+              <a:t>-5.6%</a:t>
             </a:r>
           </a:p>
         </p:txBody>
@@ -4251,7 +4251,7 @@
                 </a:solidFill>
                 <a:latin typeface="Segoe UI"/>
               </a:rPr>
-              <a:t>Amazon</a:t>
+              <a:t>Bharti Airtel</a:t>
             </a:r>
           </a:p>
         </p:txBody>
@@ -4285,7 +4285,7 @@
                 </a:solidFill>
                 <a:latin typeface="Segoe UI"/>
               </a:rPr>
-              <a:t>AMZN · AMBER</a:t>
+              <a:t>BHARTIARTL.NS · AMBER</a:t>
             </a:r>
           </a:p>
         </p:txBody>
@@ -4319,7 +4319,7 @@
                 </a:solidFill>
                 <a:latin typeface="Segoe UI"/>
               </a:rPr>
-              <a:t>-4.2%</a:t>
+              <a:t>-5.2%</a:t>
             </a:r>
           </a:p>
         </p:txBody>
@@ -4377,7 +4377,7 @@
                 </a:solidFill>
                 <a:latin typeface="Segoe UI"/>
               </a:rPr>
-              <a:t>Alphabet</a:t>
+              <a:t>ITC</a:t>
             </a:r>
           </a:p>
         </p:txBody>
@@ -4407,11 +4407,11 @@
             <a:r>
               <a:rPr sz="900" b="0">
                 <a:solidFill>
-                  <a:srgbClr val="F59E0B"/>
-                </a:solidFill>
-                <a:latin typeface="Segoe UI"/>
-              </a:rPr>
-              <a:t>GOOGL · AMBER</a:t>
+                  <a:srgbClr val="EF4444"/>
+                </a:solidFill>
+                <a:latin typeface="Segoe UI"/>
+              </a:rPr>
+              <a:t>ITC.NS · RED</a:t>
             </a:r>
           </a:p>
         </p:txBody>
@@ -4445,7 +4445,7 @@
                 </a:solidFill>
                 <a:latin typeface="Segoe UI"/>
               </a:rPr>
-              <a:t>-4.0%</a:t>
+              <a:t>-5.2%</a:t>
             </a:r>
           </a:p>
         </p:txBody>
@@ -4503,7 +4503,7 @@
                 </a:solidFill>
                 <a:latin typeface="Segoe UI"/>
               </a:rPr>
-              <a:t>ITC</a:t>
+              <a:t>HDFC Bank</a:t>
             </a:r>
           </a:p>
         </p:txBody>
@@ -4537,7 +4537,7 @@
                 </a:solidFill>
                 <a:latin typeface="Segoe UI"/>
               </a:rPr>
-              <a:t>ITC.NS · RED</a:t>
+              <a:t>HDFCBANK.NS · RED</a:t>
             </a:r>
           </a:p>
         </p:txBody>
@@ -4571,7 +4571,7 @@
                 </a:solidFill>
                 <a:latin typeface="Segoe UI"/>
               </a:rPr>
-              <a:t>-3.9%</a:t>
+              <a:t>-4.5%</a:t>
             </a:r>
           </a:p>
         </p:txBody>
@@ -4629,7 +4629,7 @@
                 </a:solidFill>
                 <a:latin typeface="Segoe UI"/>
               </a:rPr>
-              <a:t>HDFC Bank</a:t>
+              <a:t>Alphabet</a:t>
             </a:r>
           </a:p>
         </p:txBody>
@@ -4659,11 +4659,11 @@
             <a:r>
               <a:rPr sz="900" b="0">
                 <a:solidFill>
-                  <a:srgbClr val="EF4444"/>
-                </a:solidFill>
-                <a:latin typeface="Segoe UI"/>
-              </a:rPr>
-              <a:t>HDFCBANK.NS · RED</a:t>
+                  <a:srgbClr val="F59E0B"/>
+                </a:solidFill>
+                <a:latin typeface="Segoe UI"/>
+              </a:rPr>
+              <a:t>GOOGL · AMBER</a:t>
             </a:r>
           </a:p>
         </p:txBody>
@@ -4697,7 +4697,7 @@
                 </a:solidFill>
                 <a:latin typeface="Segoe UI"/>
               </a:rPr>
-              <a:t>-3.7%</a:t>
+              <a:t>-4.3%</a:t>
             </a:r>
           </a:p>
         </p:txBody>
@@ -4837,7 +4837,7 @@
         <p:spPr>
           <a:xfrm>
             <a:off x="457200" y="1188720"/>
-            <a:ext cx="11247120" cy="5544503"/>
+            <a:ext cx="11247120" cy="5597208"/>
           </a:xfrm>
           <a:prstGeom prst="rect">
             <a:avLst/>
@@ -4967,7 +4967,7 @@
                 </a:solidFill>
                 <a:latin typeface="Segoe UI"/>
               </a:rPr>
-              <a:t>Microsoft</a:t>
+              <a:t>Nvidia</a:t>
             </a:r>
           </a:p>
         </p:txBody>
@@ -5035,7 +5035,7 @@
                 </a:solidFill>
                 <a:latin typeface="Segoe UI"/>
               </a:rPr>
-              <a:t>84%</a:t>
+              <a:t>95%</a:t>
             </a:r>
           </a:p>
         </p:txBody>
@@ -5069,7 +5069,7 @@
                 </a:solidFill>
                 <a:latin typeface="Segoe UI"/>
               </a:rPr>
-              <a:t>above 200DMA · golden cross (50&gt;200) · MACD bearish</a:t>
+              <a:t>above 200DMA · golden cross (50&gt;200) · MACD bullish</a:t>
             </a:r>
           </a:p>
         </p:txBody>
@@ -5239,7 +5239,7 @@
                 </a:solidFill>
                 <a:latin typeface="Segoe UI"/>
               </a:rPr>
-              <a:t>US Financials</a:t>
+              <a:t>US Energy</a:t>
             </a:r>
           </a:p>
         </p:txBody>
@@ -5307,7 +5307,7 @@
                 </a:solidFill>
                 <a:latin typeface="Segoe UI"/>
               </a:rPr>
-              <a:t>83%</a:t>
+              <a:t>82%</a:t>
             </a:r>
           </a:p>
         </p:txBody>
@@ -5375,7 +5375,7 @@
                 </a:solidFill>
                 <a:latin typeface="Segoe UI"/>
               </a:rPr>
-              <a:t>US Energy</a:t>
+              <a:t>DAX</a:t>
             </a:r>
           </a:p>
         </p:txBody>
@@ -5443,7 +5443,7 @@
                 </a:solidFill>
                 <a:latin typeface="Segoe UI"/>
               </a:rPr>
-              <a:t>83%</a:t>
+              <a:t>81%</a:t>
             </a:r>
           </a:p>
         </p:txBody>
@@ -5511,7 +5511,7 @@
                 </a:solidFill>
                 <a:latin typeface="Segoe UI"/>
               </a:rPr>
-              <a:t>ICICI Bank</a:t>
+              <a:t>US Financials</a:t>
             </a:r>
           </a:p>
         </p:txBody>
@@ -5579,7 +5579,7 @@
                 </a:solidFill>
                 <a:latin typeface="Segoe UI"/>
               </a:rPr>
-              <a:t>93%</a:t>
+              <a:t>81%</a:t>
             </a:r>
           </a:p>
         </p:txBody>
@@ -5613,7 +5613,7 @@
                 </a:solidFill>
                 <a:latin typeface="Segoe UI"/>
               </a:rPr>
-              <a:t>above 200DMA · golden cross (50&gt;200) · MACD bullish</a:t>
+              <a:t>above 200DMA · golden cross (50&gt;200) · MACD bearish</a:t>
             </a:r>
           </a:p>
         </p:txBody>
@@ -5647,7 +5647,7 @@
                 </a:solidFill>
                 <a:latin typeface="Segoe UI"/>
               </a:rPr>
-              <a:t>DAX</a:t>
+              <a:t>Microsoft</a:t>
             </a:r>
           </a:p>
         </p:txBody>
@@ -5681,7 +5681,7 @@
                 </a:solidFill>
                 <a:latin typeface="Segoe UI"/>
               </a:rPr>
-              <a:t>STRONG BUY</a:t>
+              <a:t>BUY</a:t>
             </a:r>
           </a:p>
         </p:txBody>
@@ -5783,7 +5783,7 @@
                 </a:solidFill>
                 <a:latin typeface="Segoe UI"/>
               </a:rPr>
-              <a:t>FTSE 100</a:t>
+              <a:t>Solana</a:t>
             </a:r>
           </a:p>
         </p:txBody>
@@ -5817,7 +5817,7 @@
                 </a:solidFill>
                 <a:latin typeface="Segoe UI"/>
               </a:rPr>
-              <a:t>STRONG BUY</a:t>
+              <a:t>BUY</a:t>
             </a:r>
           </a:p>
         </p:txBody>
@@ -5851,7 +5851,7 @@
                 </a:solidFill>
                 <a:latin typeface="Segoe UI"/>
               </a:rPr>
-              <a:t>80%</a:t>
+              <a:t>72%</a:t>
             </a:r>
           </a:p>
         </p:txBody>
@@ -5885,7 +5885,7 @@
                 </a:solidFill>
                 <a:latin typeface="Segoe UI"/>
               </a:rPr>
-              <a:t>above 200DMA · golden cross (50&gt;200) · MACD bullish</a:t>
+              <a:t>above 200DMA · death cross (50&lt;200) · MACD bullish</a:t>
             </a:r>
           </a:p>
         </p:txBody>
@@ -5919,7 +5919,7 @@
                 </a:solidFill>
                 <a:latin typeface="Segoe UI"/>
               </a:rPr>
-              <a:t>Ethereum</a:t>
+              <a:t>Bitcoin</a:t>
             </a:r>
           </a:p>
         </p:txBody>
@@ -6055,7 +6055,7 @@
                 </a:solidFill>
                 <a:latin typeface="Segoe UI"/>
               </a:rPr>
-              <a:t>Bitcoin</a:t>
+              <a:t>Ethereum</a:t>
             </a:r>
           </a:p>
         </p:txBody>
@@ -6259,7 +6259,7 @@
                 </a:solidFill>
                 <a:latin typeface="Segoe UI"/>
               </a:rPr>
-              <a:t>71%</a:t>
+              <a:t>70%</a:t>
             </a:r>
           </a:p>
         </p:txBody>
@@ -6463,7 +6463,7 @@
                 </a:solidFill>
                 <a:latin typeface="Segoe UI"/>
               </a:rPr>
-              <a:t>Apple</a:t>
+              <a:t>NIFTY IT</a:t>
             </a:r>
           </a:p>
         </p:txBody>
@@ -6531,7 +6531,7 @@
                 </a:solidFill>
                 <a:latin typeface="Segoe UI"/>
               </a:rPr>
-              <a:t>92%</a:t>
+              <a:t>67%</a:t>
             </a:r>
           </a:p>
         </p:txBody>
@@ -6565,7 +6565,7 @@
                 </a:solidFill>
                 <a:latin typeface="Segoe UI"/>
               </a:rPr>
-              <a:t>above 200DMA · golden cross (50&gt;200) · MACD bullish</a:t>
+              <a:t>above 200DMA · golden cross (50&gt;200) · MACD bearish</a:t>
             </a:r>
           </a:p>
         </p:txBody>
@@ -6659,7 +6659,7 @@
                 </a:solidFill>
                 <a:latin typeface="Segoe UI"/>
               </a:rPr>
-              <a:t>Base currency INR · USD/INR 95.4</a:t>
+              <a:t>Base currency INR · USD/INR 95.56</a:t>
             </a:r>
           </a:p>
         </p:txBody>
@@ -7067,7 +7067,7 @@
                 </a:solidFill>
                 <a:latin typeface="Segoe UI"/>
               </a:rPr>
-              <a:t>78,840</a:t>
+              <a:t>79,925</a:t>
             </a:r>
           </a:p>
         </p:txBody>
@@ -7101,7 +7101,7 @@
                 </a:solidFill>
                 <a:latin typeface="Segoe UI"/>
               </a:rPr>
-              <a:t>Rs 752,148</a:t>
+              <a:t>Rs 763,722</a:t>
             </a:r>
           </a:p>
         </p:txBody>
@@ -7135,7 +7135,7 @@
                 </a:solidFill>
                 <a:latin typeface="Segoe UI"/>
               </a:rPr>
-              <a:t>Rs 179,736</a:t>
+              <a:t>Rs 190,392</a:t>
             </a:r>
           </a:p>
         </p:txBody>
@@ -7169,7 +7169,7 @@
                 </a:solidFill>
                 <a:latin typeface="Segoe UI"/>
               </a:rPr>
-              <a:t>+31.4%</a:t>
+              <a:t>+33.2%</a:t>
             </a:r>
           </a:p>
         </p:txBody>
@@ -7203,7 +7203,7 @@
                 </a:solidFill>
                 <a:latin typeface="Segoe UI"/>
               </a:rPr>
-              <a:t>+0.3%</a:t>
+              <a:t>+1.1%</a:t>
             </a:r>
           </a:p>
         </p:txBody>
@@ -7339,7 +7339,7 @@
                 </a:solidFill>
                 <a:latin typeface="Segoe UI"/>
               </a:rPr>
-              <a:t>4,680</a:t>
+              <a:t>4,638</a:t>
             </a:r>
           </a:p>
         </p:txBody>
@@ -7373,7 +7373,7 @@
                 </a:solidFill>
                 <a:latin typeface="Segoe UI"/>
               </a:rPr>
-              <a:t>Rs 446,472</a:t>
+              <a:t>Rs 443,155</a:t>
             </a:r>
           </a:p>
         </p:txBody>
@@ -7407,7 +7407,7 @@
                 </a:solidFill>
                 <a:latin typeface="Segoe UI"/>
               </a:rPr>
-              <a:t>Rs 227,047</a:t>
+              <a:t>Rs 223,379</a:t>
             </a:r>
           </a:p>
         </p:txBody>
@@ -7441,7 +7441,7 @@
                 </a:solidFill>
                 <a:latin typeface="Segoe UI"/>
               </a:rPr>
-              <a:t>+103.5%</a:t>
+              <a:t>+101.6%</a:t>
             </a:r>
           </a:p>
         </p:txBody>
@@ -7475,7 +7475,7 @@
                 </a:solidFill>
                 <a:latin typeface="Segoe UI"/>
               </a:rPr>
-              <a:t>+1.8%</a:t>
+              <a:t>+0.6%</a:t>
             </a:r>
           </a:p>
         </p:txBody>
@@ -7611,7 +7611,7 @@
                 </a:solidFill>
                 <a:latin typeface="Segoe UI"/>
               </a:rPr>
-              <a:t>313</a:t>
+              <a:t>315</a:t>
             </a:r>
           </a:p>
         </p:txBody>
@@ -7645,7 +7645,7 @@
                 </a:solidFill>
                 <a:latin typeface="Segoe UI"/>
               </a:rPr>
-              <a:t>Rs 299,038</a:t>
+              <a:t>Rs 300,597</a:t>
             </a:r>
           </a:p>
         </p:txBody>
@@ -7679,7 +7679,7 @@
                 </a:solidFill>
                 <a:latin typeface="Segoe UI"/>
               </a:rPr>
-              <a:t>Rs 122,544</a:t>
+              <a:t>Rs 123,820</a:t>
             </a:r>
           </a:p>
         </p:txBody>
@@ -7713,7 +7713,7 @@
                 </a:solidFill>
                 <a:latin typeface="Segoe UI"/>
               </a:rPr>
-              <a:t>+69.4%</a:t>
+              <a:t>+70.0%</a:t>
             </a:r>
           </a:p>
         </p:txBody>
@@ -7883,7 +7883,7 @@
                 </a:solidFill>
                 <a:latin typeface="Segoe UI"/>
               </a:rPr>
-              <a:t>210</a:t>
+              <a:t>228</a:t>
             </a:r>
           </a:p>
         </p:txBody>
@@ -7917,7 +7917,7 @@
                 </a:solidFill>
                 <a:latin typeface="Segoe UI"/>
               </a:rPr>
-              <a:t>Rs 160,016</a:t>
+              <a:t>Rs 174,277</a:t>
             </a:r>
           </a:p>
         </p:txBody>
@@ -7951,7 +7951,7 @@
                 </a:solidFill>
                 <a:latin typeface="Segoe UI"/>
               </a:rPr>
-              <a:t>Rs -183,431</a:t>
+              <a:t>Rs -169,721</a:t>
             </a:r>
           </a:p>
         </p:txBody>
@@ -7985,7 +7985,7 @@
                 </a:solidFill>
                 <a:latin typeface="Segoe UI"/>
               </a:rPr>
-              <a:t>-53.4%</a:t>
+              <a:t>-49.3%</a:t>
             </a:r>
           </a:p>
         </p:txBody>
@@ -8155,7 +8155,7 @@
                 </a:solidFill>
                 <a:latin typeface="Segoe UI"/>
               </a:rPr>
-              <a:t>1,120</a:t>
+              <a:t>1,138</a:t>
             </a:r>
           </a:p>
         </p:txBody>
@@ -8189,7 +8189,7 @@
                 </a:solidFill>
                 <a:latin typeface="Segoe UI"/>
               </a:rPr>
-              <a:t>Rs 89,560</a:t>
+              <a:t>Rs 91,008</a:t>
             </a:r>
           </a:p>
         </p:txBody>
@@ -8223,7 +8223,7 @@
                 </a:solidFill>
                 <a:latin typeface="Segoe UI"/>
               </a:rPr>
-              <a:t>Rs -22,440</a:t>
+              <a:t>Rs -20,992</a:t>
             </a:r>
           </a:p>
         </p:txBody>
@@ -8257,7 +8257,7 @@
                 </a:solidFill>
                 <a:latin typeface="Segoe UI"/>
               </a:rPr>
-              <a:t>-20.0%</a:t>
+              <a:t>-18.7%</a:t>
             </a:r>
           </a:p>
         </p:txBody>
@@ -8287,11 +8287,11 @@
             <a:r>
               <a:rPr sz="1000" b="0">
                 <a:solidFill>
-                  <a:srgbClr val="EF4444"/>
-                </a:solidFill>
-                <a:latin typeface="Segoe UI"/>
-              </a:rPr>
-              <a:t>-0.0%</a:t>
+                  <a:srgbClr val="22C55E"/>
+                </a:solidFill>
+                <a:latin typeface="Segoe UI"/>
+              </a:rPr>
+              <a:t>+2.4%</a:t>
             </a:r>
           </a:p>
         </p:txBody>
@@ -8427,7 +8427,7 @@
                 </a:solidFill>
                 <a:latin typeface="Segoe UI"/>
               </a:rPr>
-              <a:t>1,303</a:t>
+              <a:t>1,282</a:t>
             </a:r>
           </a:p>
         </p:txBody>
@@ -8461,7 +8461,7 @@
                 </a:solidFill>
                 <a:latin typeface="Segoe UI"/>
               </a:rPr>
-              <a:t>Rs 65,155</a:t>
+              <a:t>Rs 64,090</a:t>
             </a:r>
           </a:p>
         </p:txBody>
@@ -8495,7 +8495,7 @@
                 </a:solidFill>
                 <a:latin typeface="Segoe UI"/>
               </a:rPr>
-              <a:t>Rs -57,345</a:t>
+              <a:t>Rs -58,410</a:t>
             </a:r>
           </a:p>
         </p:txBody>
@@ -8529,7 +8529,7 @@
                 </a:solidFill>
                 <a:latin typeface="Segoe UI"/>
               </a:rPr>
-              <a:t>-46.8%</a:t>
+              <a:t>-47.7%</a:t>
             </a:r>
           </a:p>
         </p:txBody>
@@ -8559,11 +8559,11 @@
             <a:r>
               <a:rPr sz="1000" b="0">
                 <a:solidFill>
-                  <a:srgbClr val="22C55E"/>
-                </a:solidFill>
-                <a:latin typeface="Segoe UI"/>
-              </a:rPr>
-              <a:t>+0.4%</a:t>
+                  <a:srgbClr val="EF4444"/>
+                </a:solidFill>
+                <a:latin typeface="Segoe UI"/>
+              </a:rPr>
+              <a:t>-0.0%</a:t>
             </a:r>
           </a:p>
         </p:txBody>
@@ -8699,7 +8699,7 @@
                 </a:solidFill>
                 <a:latin typeface="Segoe UI"/>
               </a:rPr>
-              <a:t>2,258</a:t>
+              <a:t>2,336</a:t>
             </a:r>
           </a:p>
         </p:txBody>
@@ -8733,7 +8733,7 @@
                 </a:solidFill>
                 <a:latin typeface="Segoe UI"/>
               </a:rPr>
-              <a:t>Rs 56,460</a:t>
+              <a:t>Rs 58,410</a:t>
             </a:r>
           </a:p>
         </p:txBody>
@@ -8767,7 +8767,7 @@
                 </a:solidFill>
                 <a:latin typeface="Segoe UI"/>
               </a:rPr>
-              <a:t>Rs -33,540</a:t>
+              <a:t>Rs -31,590</a:t>
             </a:r>
           </a:p>
         </p:txBody>
@@ -8801,7 +8801,7 @@
                 </a:solidFill>
                 <a:latin typeface="Segoe UI"/>
               </a:rPr>
-              <a:t>-37.3%</a:t>
+              <a:t>-35.1%</a:t>
             </a:r>
           </a:p>
         </p:txBody>
@@ -8831,11 +8831,11 @@
             <a:r>
               <a:rPr sz="1000" b="0">
                 <a:solidFill>
-                  <a:srgbClr val="EF4444"/>
-                </a:solidFill>
-                <a:latin typeface="Segoe UI"/>
-              </a:rPr>
-              <a:t>-0.5%</a:t>
+                  <a:srgbClr val="22C55E"/>
+                </a:solidFill>
+                <a:latin typeface="Segoe UI"/>
+              </a:rPr>
+              <a:t>+3.9%</a:t>
             </a:r>
           </a:p>
         </p:txBody>
@@ -8971,7 +8971,7 @@
                 </a:solidFill>
                 <a:latin typeface="Segoe UI"/>
               </a:rPr>
-              <a:t>720</a:t>
+              <a:t>715</a:t>
             </a:r>
           </a:p>
         </p:txBody>
@@ -9005,7 +9005,7 @@
                 </a:solidFill>
                 <a:latin typeface="Segoe UI"/>
               </a:rPr>
-              <a:t>Rs 43,215</a:t>
+              <a:t>Rs 42,876</a:t>
             </a:r>
           </a:p>
         </p:txBody>
@@ -9039,7 +9039,7 @@
                 </a:solidFill>
                 <a:latin typeface="Segoe UI"/>
               </a:rPr>
-              <a:t>Rs -47,985</a:t>
+              <a:t>Rs -48,324</a:t>
             </a:r>
           </a:p>
         </p:txBody>
@@ -9073,7 +9073,7 @@
                 </a:solidFill>
                 <a:latin typeface="Segoe UI"/>
               </a:rPr>
-              <a:t>-52.6%</a:t>
+              <a:t>-53.0%</a:t>
             </a:r>
           </a:p>
         </p:txBody>
@@ -9103,11 +9103,11 @@
             <a:r>
               <a:rPr sz="1000" b="0">
                 <a:solidFill>
-                  <a:srgbClr val="EF4444"/>
-                </a:solidFill>
-                <a:latin typeface="Segoe UI"/>
-              </a:rPr>
-              <a:t>-1.0%</a:t>
+                  <a:srgbClr val="22C55E"/>
+                </a:solidFill>
+                <a:latin typeface="Segoe UI"/>
+              </a:rPr>
+              <a:t>+0.5%</a:t>
             </a:r>
           </a:p>
         </p:txBody>
@@ -9141,7 +9141,7 @@
                 </a:solidFill>
                 <a:latin typeface="Segoe UI"/>
               </a:rPr>
-              <a:t>Total Rs 1,912,064 | P&amp;L Rs 184,586 (+10.7%) | Sharpe 0.17 | Vol 19.34% | VaR95 -1.89%/day</a:t>
+              <a:t>Total Rs 1,938,136 | P&amp;L Rs 208,555 (+12.1%) | Sharpe 0.15 | Vol 19.31% | VaR95 -1.9%/day</a:t>
             </a:r>
           </a:p>
         </p:txBody>

--- a/docs/pmr_daily.pptx
+++ b/docs/pmr_daily.pptx
@@ -3197,7 +3197,7 @@
                 </a:solidFill>
                 <a:latin typeface="Segoe UI"/>
               </a:rPr>
-              <a:t>Friday, 28 Aug 2026 14:47 SGT</a:t>
+              <a:t>Monday, 31 Aug 2026 09:07 SGT</a:t>
             </a:r>
           </a:p>
         </p:txBody>
@@ -3265,7 +3265,7 @@
                 </a:solidFill>
                 <a:latin typeface="Segoe UI"/>
               </a:rPr>
-              <a:t>RAG 11R / 16A / 19G   |   65.2% above 200DMA   |   Portfolio Rs 1,938,136 (+12.1%)</a:t>
+              <a:t>RAG 13R / 14A / 19G   |   69.6% above 200DMA   |   Portfolio Rs 1,901,651 (+10.0%)</a:t>
             </a:r>
           </a:p>
         </p:txBody>
@@ -3491,11 +3491,11 @@
             <a:r>
               <a:rPr sz="900" b="0">
                 <a:solidFill>
-                  <a:srgbClr val="F59E0B"/>
-                </a:solidFill>
-                <a:latin typeface="Segoe UI"/>
-              </a:rPr>
-              <a:t>SOL-USD · AMBER</a:t>
+                  <a:srgbClr val="EF4444"/>
+                </a:solidFill>
+                <a:latin typeface="Segoe UI"/>
+              </a:rPr>
+              <a:t>SOL-USD · RED</a:t>
             </a:r>
           </a:p>
         </p:txBody>
@@ -3529,7 +3529,7 @@
                 </a:solidFill>
                 <a:latin typeface="Segoe UI"/>
               </a:rPr>
-              <a:t>+47.9%</a:t>
+              <a:t>+39.7%</a:t>
             </a:r>
           </a:p>
         </p:txBody>
@@ -3655,7 +3655,7 @@
                 </a:solidFill>
                 <a:latin typeface="Segoe UI"/>
               </a:rPr>
-              <a:t>+34.6%</a:t>
+              <a:t>+30.0%</a:t>
             </a:r>
           </a:p>
         </p:txBody>
@@ -3781,7 +3781,7 @@
                 </a:solidFill>
                 <a:latin typeface="Segoe UI"/>
               </a:rPr>
-              <a:t>+27.2%</a:t>
+              <a:t>+23.7%</a:t>
             </a:r>
           </a:p>
         </p:txBody>
@@ -3907,7 +3907,7 @@
                 </a:solidFill>
                 <a:latin typeface="Segoe UI"/>
               </a:rPr>
-              <a:t>+21.4%</a:t>
+              <a:t>+16.8%</a:t>
             </a:r>
           </a:p>
         </p:txBody>
@@ -3965,7 +3965,7 @@
                 </a:solidFill>
                 <a:latin typeface="Segoe UI"/>
               </a:rPr>
-              <a:t>Gold</a:t>
+              <a:t>Tesla</a:t>
             </a:r>
           </a:p>
         </p:txBody>
@@ -3995,11 +3995,11 @@
             <a:r>
               <a:rPr sz="900" b="0">
                 <a:solidFill>
-                  <a:srgbClr val="F59E0B"/>
-                </a:solidFill>
-                <a:latin typeface="Segoe UI"/>
-              </a:rPr>
-              <a:t>GC=F · AMBER</a:t>
+                  <a:srgbClr val="EF4444"/>
+                </a:solidFill>
+                <a:latin typeface="Segoe UI"/>
+              </a:rPr>
+              <a:t>TSLA · RED</a:t>
             </a:r>
           </a:p>
         </p:txBody>
@@ -4033,7 +4033,7 @@
                 </a:solidFill>
                 <a:latin typeface="Segoe UI"/>
               </a:rPr>
-              <a:t>+14.5%</a:t>
+              <a:t>+12.1%</a:t>
             </a:r>
           </a:p>
         </p:txBody>
@@ -4125,7 +4125,7 @@
                 </a:solidFill>
                 <a:latin typeface="Segoe UI"/>
               </a:rPr>
-              <a:t>Amazon</a:t>
+              <a:t>ITC</a:t>
             </a:r>
           </a:p>
         </p:txBody>
@@ -4155,11 +4155,11 @@
             <a:r>
               <a:rPr sz="900" b="0">
                 <a:solidFill>
-                  <a:srgbClr val="F59E0B"/>
-                </a:solidFill>
-                <a:latin typeface="Segoe UI"/>
-              </a:rPr>
-              <a:t>AMZN · AMBER</a:t>
+                  <a:srgbClr val="EF4444"/>
+                </a:solidFill>
+                <a:latin typeface="Segoe UI"/>
+              </a:rPr>
+              <a:t>ITC.NS · RED</a:t>
             </a:r>
           </a:p>
         </p:txBody>
@@ -4193,7 +4193,7 @@
                 </a:solidFill>
                 <a:latin typeface="Segoe UI"/>
               </a:rPr>
-              <a:t>-5.6%</a:t>
+              <a:t>-5.3%</a:t>
             </a:r>
           </a:p>
         </p:txBody>
@@ -4319,7 +4319,7 @@
                 </a:solidFill>
                 <a:latin typeface="Segoe UI"/>
               </a:rPr>
-              <a:t>-5.2%</a:t>
+              <a:t>-4.5%</a:t>
             </a:r>
           </a:p>
         </p:txBody>
@@ -4377,7 +4377,7 @@
                 </a:solidFill>
                 <a:latin typeface="Segoe UI"/>
               </a:rPr>
-              <a:t>ITC</a:t>
+              <a:t>HDFC Bank</a:t>
             </a:r>
           </a:p>
         </p:txBody>
@@ -4411,7 +4411,7 @@
                 </a:solidFill>
                 <a:latin typeface="Segoe UI"/>
               </a:rPr>
-              <a:t>ITC.NS · RED</a:t>
+              <a:t>HDFCBANK.NS · RED</a:t>
             </a:r>
           </a:p>
         </p:txBody>
@@ -4445,7 +4445,7 @@
                 </a:solidFill>
                 <a:latin typeface="Segoe UI"/>
               </a:rPr>
-              <a:t>-5.2%</a:t>
+              <a:t>-3.7%</a:t>
             </a:r>
           </a:p>
         </p:txBody>
@@ -4503,7 +4503,7 @@
                 </a:solidFill>
                 <a:latin typeface="Segoe UI"/>
               </a:rPr>
-              <a:t>HDFC Bank</a:t>
+              <a:t>Alphabet</a:t>
             </a:r>
           </a:p>
         </p:txBody>
@@ -4533,11 +4533,11 @@
             <a:r>
               <a:rPr sz="900" b="0">
                 <a:solidFill>
-                  <a:srgbClr val="EF4444"/>
-                </a:solidFill>
-                <a:latin typeface="Segoe UI"/>
-              </a:rPr>
-              <a:t>HDFCBANK.NS · RED</a:t>
+                  <a:srgbClr val="F59E0B"/>
+                </a:solidFill>
+                <a:latin typeface="Segoe UI"/>
+              </a:rPr>
+              <a:t>GOOGL · AMBER</a:t>
             </a:r>
           </a:p>
         </p:txBody>
@@ -4571,7 +4571,7 @@
                 </a:solidFill>
                 <a:latin typeface="Segoe UI"/>
               </a:rPr>
-              <a:t>-4.5%</a:t>
+              <a:t>-2.7%</a:t>
             </a:r>
           </a:p>
         </p:txBody>
@@ -4629,7 +4629,7 @@
                 </a:solidFill>
                 <a:latin typeface="Segoe UI"/>
               </a:rPr>
-              <a:t>Alphabet</a:t>
+              <a:t>Amazon</a:t>
             </a:r>
           </a:p>
         </p:txBody>
@@ -4659,11 +4659,11 @@
             <a:r>
               <a:rPr sz="900" b="0">
                 <a:solidFill>
-                  <a:srgbClr val="F59E0B"/>
-                </a:solidFill>
-                <a:latin typeface="Segoe UI"/>
-              </a:rPr>
-              <a:t>GOOGL · AMBER</a:t>
+                  <a:srgbClr val="22C55E"/>
+                </a:solidFill>
+                <a:latin typeface="Segoe UI"/>
+              </a:rPr>
+              <a:t>AMZN · GREEN</a:t>
             </a:r>
           </a:p>
         </p:txBody>
@@ -4697,7 +4697,7 @@
                 </a:solidFill>
                 <a:latin typeface="Segoe UI"/>
               </a:rPr>
-              <a:t>-4.3%</a:t>
+              <a:t>-1.9%</a:t>
             </a:r>
           </a:p>
         </p:txBody>
@@ -4837,7 +4837,7 @@
         <p:spPr>
           <a:xfrm>
             <a:off x="457200" y="1188720"/>
-            <a:ext cx="11247120" cy="5597208"/>
+            <a:ext cx="11247120" cy="5534130"/>
           </a:xfrm>
           <a:prstGeom prst="rect">
             <a:avLst/>
@@ -4967,7 +4967,7 @@
                 </a:solidFill>
                 <a:latin typeface="Segoe UI"/>
               </a:rPr>
-              <a:t>Nvidia</a:t>
+              <a:t>US Energy</a:t>
             </a:r>
           </a:p>
         </p:txBody>
@@ -5035,7 +5035,7 @@
                 </a:solidFill>
                 <a:latin typeface="Segoe UI"/>
               </a:rPr>
-              <a:t>95%</a:t>
+              <a:t>83%</a:t>
             </a:r>
           </a:p>
         </p:txBody>
@@ -5069,7 +5069,7 @@
                 </a:solidFill>
                 <a:latin typeface="Segoe UI"/>
               </a:rPr>
-              <a:t>above 200DMA · golden cross (50&gt;200) · MACD bullish</a:t>
+              <a:t>above 200DMA · golden cross (50&gt;200) · MACD bearish</a:t>
             </a:r>
           </a:p>
         </p:txBody>
@@ -5103,7 +5103,7 @@
                 </a:solidFill>
                 <a:latin typeface="Segoe UI"/>
               </a:rPr>
-              <a:t>Copper</a:t>
+              <a:t>NIFTY IT</a:t>
             </a:r>
           </a:p>
         </p:txBody>
@@ -5171,7 +5171,7 @@
                 </a:solidFill>
                 <a:latin typeface="Segoe UI"/>
               </a:rPr>
-              <a:t>95%</a:t>
+              <a:t>83%</a:t>
             </a:r>
           </a:p>
         </p:txBody>
@@ -5239,7 +5239,7 @@
                 </a:solidFill>
                 <a:latin typeface="Segoe UI"/>
               </a:rPr>
-              <a:t>US Energy</a:t>
+              <a:t>US Financials</a:t>
             </a:r>
           </a:p>
         </p:txBody>
@@ -5375,7 +5375,7 @@
                 </a:solidFill>
                 <a:latin typeface="Segoe UI"/>
               </a:rPr>
-              <a:t>DAX</a:t>
+              <a:t>Apple</a:t>
             </a:r>
           </a:p>
         </p:txBody>
@@ -5443,7 +5443,7 @@
                 </a:solidFill>
                 <a:latin typeface="Segoe UI"/>
               </a:rPr>
-              <a:t>81%</a:t>
+              <a:t>93%</a:t>
             </a:r>
           </a:p>
         </p:txBody>
@@ -5477,7 +5477,7 @@
                 </a:solidFill>
                 <a:latin typeface="Segoe UI"/>
               </a:rPr>
-              <a:t>above 200DMA · golden cross (50&gt;200) · MACD bearish</a:t>
+              <a:t>above 200DMA · golden cross (50&gt;200) · MACD bullish</a:t>
             </a:r>
           </a:p>
         </p:txBody>
@@ -5511,7 +5511,7 @@
                 </a:solidFill>
                 <a:latin typeface="Segoe UI"/>
               </a:rPr>
-              <a:t>US Financials</a:t>
+              <a:t>Copper</a:t>
             </a:r>
           </a:p>
         </p:txBody>
@@ -5715,7 +5715,7 @@
                 </a:solidFill>
                 <a:latin typeface="Segoe UI"/>
               </a:rPr>
-              <a:t>80%</a:t>
+              <a:t>94%</a:t>
             </a:r>
           </a:p>
         </p:txBody>
@@ -5749,7 +5749,7 @@
                 </a:solidFill>
                 <a:latin typeface="Segoe UI"/>
               </a:rPr>
-              <a:t>above 200DMA · golden cross (50&gt;200) · MACD bearish</a:t>
+              <a:t>above 200DMA · golden cross (50&gt;200) · MACD bullish</a:t>
             </a:r>
           </a:p>
         </p:txBody>
@@ -5783,7 +5783,7 @@
                 </a:solidFill>
                 <a:latin typeface="Segoe UI"/>
               </a:rPr>
-              <a:t>Solana</a:t>
+              <a:t>DAX</a:t>
             </a:r>
           </a:p>
         </p:txBody>
@@ -5851,7 +5851,7 @@
                 </a:solidFill>
                 <a:latin typeface="Segoe UI"/>
               </a:rPr>
-              <a:t>72%</a:t>
+              <a:t>90%</a:t>
             </a:r>
           </a:p>
         </p:txBody>
@@ -5885,7 +5885,7 @@
                 </a:solidFill>
                 <a:latin typeface="Segoe UI"/>
               </a:rPr>
-              <a:t>above 200DMA · death cross (50&lt;200) · MACD bullish</a:t>
+              <a:t>above 200DMA · golden cross (50&gt;200) · MACD bullish</a:t>
             </a:r>
           </a:p>
         </p:txBody>
@@ -5919,7 +5919,7 @@
                 </a:solidFill>
                 <a:latin typeface="Segoe UI"/>
               </a:rPr>
-              <a:t>Bitcoin</a:t>
+              <a:t>Ethereum</a:t>
             </a:r>
           </a:p>
         </p:txBody>
@@ -5987,7 +5987,7 @@
                 </a:solidFill>
                 <a:latin typeface="Segoe UI"/>
               </a:rPr>
-              <a:t>72%</a:t>
+              <a:t>77%</a:t>
             </a:r>
           </a:p>
         </p:txBody>
@@ -6055,7 +6055,7 @@
                 </a:solidFill>
                 <a:latin typeface="Segoe UI"/>
               </a:rPr>
-              <a:t>Ethereum</a:t>
+              <a:t>Bitcoin</a:t>
             </a:r>
           </a:p>
         </p:txBody>
@@ -6123,7 +6123,7 @@
                 </a:solidFill>
                 <a:latin typeface="Segoe UI"/>
               </a:rPr>
-              <a:t>72%</a:t>
+              <a:t>70%</a:t>
             </a:r>
           </a:p>
         </p:txBody>
@@ -6191,7 +6191,7 @@
                 </a:solidFill>
                 <a:latin typeface="Segoe UI"/>
               </a:rPr>
-              <a:t>Gold</a:t>
+              <a:t>Straits Times</a:t>
             </a:r>
           </a:p>
         </p:txBody>
@@ -6293,7 +6293,7 @@
                 </a:solidFill>
                 <a:latin typeface="Segoe UI"/>
               </a:rPr>
-              <a:t>above 200DMA · death cross (50&lt;200) · MACD bullish</a:t>
+              <a:t>above 200DMA · golden cross (50&gt;200) · MACD bearish</a:t>
             </a:r>
           </a:p>
         </p:txBody>
@@ -6327,7 +6327,7 @@
                 </a:solidFill>
                 <a:latin typeface="Segoe UI"/>
               </a:rPr>
-              <a:t>Straits Times</a:t>
+              <a:t>Solana</a:t>
             </a:r>
           </a:p>
         </p:txBody>
@@ -6395,7 +6395,7 @@
                 </a:solidFill>
                 <a:latin typeface="Segoe UI"/>
               </a:rPr>
-              <a:t>69%</a:t>
+              <a:t>70%</a:t>
             </a:r>
           </a:p>
         </p:txBody>
@@ -6429,7 +6429,7 @@
                 </a:solidFill>
                 <a:latin typeface="Segoe UI"/>
               </a:rPr>
-              <a:t>above 200DMA · golden cross (50&gt;200) · MACD bearish</a:t>
+              <a:t>above 200DMA · death cross (50&lt;200) · MACD bullish</a:t>
             </a:r>
           </a:p>
         </p:txBody>
@@ -6463,7 +6463,7 @@
                 </a:solidFill>
                 <a:latin typeface="Segoe UI"/>
               </a:rPr>
-              <a:t>NIFTY IT</a:t>
+              <a:t>Hang Seng</a:t>
             </a:r>
           </a:p>
         </p:txBody>
@@ -6531,7 +6531,7 @@
                 </a:solidFill>
                 <a:latin typeface="Segoe UI"/>
               </a:rPr>
-              <a:t>67%</a:t>
+              <a:t>75%</a:t>
             </a:r>
           </a:p>
         </p:txBody>
@@ -6659,7 +6659,7 @@
                 </a:solidFill>
                 <a:latin typeface="Segoe UI"/>
               </a:rPr>
-              <a:t>Base currency INR · USD/INR 95.56</a:t>
+              <a:t>Base currency INR · USD/INR 95.47</a:t>
             </a:r>
           </a:p>
         </p:txBody>
@@ -7067,7 +7067,7 @@
                 </a:solidFill>
                 <a:latin typeface="Segoe UI"/>
               </a:rPr>
-              <a:t>79,925</a:t>
+              <a:t>77,692</a:t>
             </a:r>
           </a:p>
         </p:txBody>
@@ -7101,7 +7101,7 @@
                 </a:solidFill>
                 <a:latin typeface="Segoe UI"/>
               </a:rPr>
-              <a:t>Rs 763,722</a:t>
+              <a:t>Rs 741,732</a:t>
             </a:r>
           </a:p>
         </p:txBody>
@@ -7135,7 +7135,7 @@
                 </a:solidFill>
                 <a:latin typeface="Segoe UI"/>
               </a:rPr>
-              <a:t>Rs 190,392</a:t>
+              <a:t>Rs 168,909</a:t>
             </a:r>
           </a:p>
         </p:txBody>
@@ -7169,7 +7169,7 @@
                 </a:solidFill>
                 <a:latin typeface="Segoe UI"/>
               </a:rPr>
-              <a:t>+33.2%</a:t>
+              <a:t>+29.5%</a:t>
             </a:r>
           </a:p>
         </p:txBody>
@@ -7199,11 +7199,11 @@
             <a:r>
               <a:rPr sz="1000" b="0">
                 <a:solidFill>
-                  <a:srgbClr val="22C55E"/>
-                </a:solidFill>
-                <a:latin typeface="Segoe UI"/>
-              </a:rPr>
-              <a:t>+1.1%</a:t>
+                  <a:srgbClr val="EF4444"/>
+                </a:solidFill>
+                <a:latin typeface="Segoe UI"/>
+              </a:rPr>
+              <a:t>-0.2%</a:t>
             </a:r>
           </a:p>
         </p:txBody>
@@ -7339,7 +7339,7 @@
                 </a:solidFill>
                 <a:latin typeface="Segoe UI"/>
               </a:rPr>
-              <a:t>4,638</a:t>
+              <a:t>4,514</a:t>
             </a:r>
           </a:p>
         </p:txBody>
@@ -7373,7 +7373,7 @@
                 </a:solidFill>
                 <a:latin typeface="Segoe UI"/>
               </a:rPr>
-              <a:t>Rs 443,155</a:t>
+              <a:t>Rs 430,906</a:t>
             </a:r>
           </a:p>
         </p:txBody>
@@ -7407,7 +7407,7 @@
                 </a:solidFill>
                 <a:latin typeface="Segoe UI"/>
               </a:rPr>
-              <a:t>Rs 223,379</a:t>
+              <a:t>Rs 211,324</a:t>
             </a:r>
           </a:p>
         </p:txBody>
@@ -7441,7 +7441,7 @@
                 </a:solidFill>
                 <a:latin typeface="Segoe UI"/>
               </a:rPr>
-              <a:t>+101.6%</a:t>
+              <a:t>+96.2%</a:t>
             </a:r>
           </a:p>
         </p:txBody>
@@ -7475,7 +7475,7 @@
                 </a:solidFill>
                 <a:latin typeface="Segoe UI"/>
               </a:rPr>
-              <a:t>+0.6%</a:t>
+              <a:t>+0.0%</a:t>
             </a:r>
           </a:p>
         </p:txBody>
@@ -7611,7 +7611,7 @@
                 </a:solidFill>
                 <a:latin typeface="Segoe UI"/>
               </a:rPr>
-              <a:t>315</a:t>
+              <a:t>320</a:t>
             </a:r>
           </a:p>
         </p:txBody>
@@ -7645,7 +7645,7 @@
                 </a:solidFill>
                 <a:latin typeface="Segoe UI"/>
               </a:rPr>
-              <a:t>Rs 300,597</a:t>
+              <a:t>Rs 305,219</a:t>
             </a:r>
           </a:p>
         </p:txBody>
@@ -7679,7 +7679,7 @@
                 </a:solidFill>
                 <a:latin typeface="Segoe UI"/>
               </a:rPr>
-              <a:t>Rs 123,820</a:t>
+              <a:t>Rs 128,599</a:t>
             </a:r>
           </a:p>
         </p:txBody>
@@ -7713,7 +7713,7 @@
                 </a:solidFill>
                 <a:latin typeface="Segoe UI"/>
               </a:rPr>
-              <a:t>+70.0%</a:t>
+              <a:t>+72.8%</a:t>
             </a:r>
           </a:p>
         </p:txBody>
@@ -7883,7 +7883,7 @@
                 </a:solidFill>
                 <a:latin typeface="Segoe UI"/>
               </a:rPr>
-              <a:t>228</a:t>
+              <a:t>218</a:t>
             </a:r>
           </a:p>
         </p:txBody>
@@ -7917,7 +7917,7 @@
                 </a:solidFill>
                 <a:latin typeface="Segoe UI"/>
               </a:rPr>
-              <a:t>Rs 174,277</a:t>
+              <a:t>Rs 166,157</a:t>
             </a:r>
           </a:p>
         </p:txBody>
@@ -7951,7 +7951,7 @@
                 </a:solidFill>
                 <a:latin typeface="Segoe UI"/>
               </a:rPr>
-              <a:t>Rs -169,721</a:t>
+              <a:t>Rs -177,537</a:t>
             </a:r>
           </a:p>
         </p:txBody>
@@ -7985,7 +7985,7 @@
                 </a:solidFill>
                 <a:latin typeface="Segoe UI"/>
               </a:rPr>
-              <a:t>-49.3%</a:t>
+              <a:t>-51.7%</a:t>
             </a:r>
           </a:p>
         </p:txBody>
@@ -8155,7 +8155,7 @@
                 </a:solidFill>
                 <a:latin typeface="Segoe UI"/>
               </a:rPr>
-              <a:t>1,138</a:t>
+              <a:t>1,144</a:t>
             </a:r>
           </a:p>
         </p:txBody>
@@ -8189,7 +8189,7 @@
                 </a:solidFill>
                 <a:latin typeface="Segoe UI"/>
               </a:rPr>
-              <a:t>Rs 91,008</a:t>
+              <a:t>Rs 91,520</a:t>
             </a:r>
           </a:p>
         </p:txBody>
@@ -8223,7 +8223,7 @@
                 </a:solidFill>
                 <a:latin typeface="Segoe UI"/>
               </a:rPr>
-              <a:t>Rs -20,992</a:t>
+              <a:t>Rs -20,480</a:t>
             </a:r>
           </a:p>
         </p:txBody>
@@ -8257,7 +8257,7 @@
                 </a:solidFill>
                 <a:latin typeface="Segoe UI"/>
               </a:rPr>
-              <a:t>-18.7%</a:t>
+              <a:t>-18.3%</a:t>
             </a:r>
           </a:p>
         </p:txBody>
@@ -8291,7 +8291,7 @@
                 </a:solidFill>
                 <a:latin typeface="Segoe UI"/>
               </a:rPr>
-              <a:t>+2.4%</a:t>
+              <a:t>+0.0%</a:t>
             </a:r>
           </a:p>
         </p:txBody>
@@ -8427,7 +8427,7 @@
                 </a:solidFill>
                 <a:latin typeface="Segoe UI"/>
               </a:rPr>
-              <a:t>1,282</a:t>
+              <a:t>1,287</a:t>
             </a:r>
           </a:p>
         </p:txBody>
@@ -8461,7 +8461,7 @@
                 </a:solidFill>
                 <a:latin typeface="Segoe UI"/>
               </a:rPr>
-              <a:t>Rs 64,090</a:t>
+              <a:t>Rs 64,350</a:t>
             </a:r>
           </a:p>
         </p:txBody>
@@ -8495,7 +8495,7 @@
                 </a:solidFill>
                 <a:latin typeface="Segoe UI"/>
               </a:rPr>
-              <a:t>Rs -58,410</a:t>
+              <a:t>Rs -58,150</a:t>
             </a:r>
           </a:p>
         </p:txBody>
@@ -8529,7 +8529,7 @@
                 </a:solidFill>
                 <a:latin typeface="Segoe UI"/>
               </a:rPr>
-              <a:t>-47.7%</a:t>
+              <a:t>-47.5%</a:t>
             </a:r>
           </a:p>
         </p:txBody>
@@ -8559,11 +8559,11 @@
             <a:r>
               <a:rPr sz="1000" b="0">
                 <a:solidFill>
-                  <a:srgbClr val="EF4444"/>
-                </a:solidFill>
-                <a:latin typeface="Segoe UI"/>
-              </a:rPr>
-              <a:t>-0.0%</a:t>
+                  <a:srgbClr val="22C55E"/>
+                </a:solidFill>
+                <a:latin typeface="Segoe UI"/>
+              </a:rPr>
+              <a:t>+0.0%</a:t>
             </a:r>
           </a:p>
         </p:txBody>
@@ -8699,7 +8699,7 @@
                 </a:solidFill>
                 <a:latin typeface="Segoe UI"/>
               </a:rPr>
-              <a:t>2,336</a:t>
+              <a:t>2,342</a:t>
             </a:r>
           </a:p>
         </p:txBody>
@@ -8733,7 +8733,7 @@
                 </a:solidFill>
                 <a:latin typeface="Segoe UI"/>
               </a:rPr>
-              <a:t>Rs 58,410</a:t>
+              <a:t>Rs 58,550</a:t>
             </a:r>
           </a:p>
         </p:txBody>
@@ -8767,7 +8767,7 @@
                 </a:solidFill>
                 <a:latin typeface="Segoe UI"/>
               </a:rPr>
-              <a:t>Rs -31,590</a:t>
+              <a:t>Rs -31,450</a:t>
             </a:r>
           </a:p>
         </p:txBody>
@@ -8801,7 +8801,7 @@
                 </a:solidFill>
                 <a:latin typeface="Segoe UI"/>
               </a:rPr>
-              <a:t>-35.1%</a:t>
+              <a:t>-34.9%</a:t>
             </a:r>
           </a:p>
         </p:txBody>
@@ -8835,7 +8835,7 @@
                 </a:solidFill>
                 <a:latin typeface="Segoe UI"/>
               </a:rPr>
-              <a:t>+3.9%</a:t>
+              <a:t>+0.0%</a:t>
             </a:r>
           </a:p>
         </p:txBody>
@@ -8971,7 +8971,7 @@
                 </a:solidFill>
                 <a:latin typeface="Segoe UI"/>
               </a:rPr>
-              <a:t>715</a:t>
+              <a:t>720</a:t>
             </a:r>
           </a:p>
         </p:txBody>
@@ -9005,7 +9005,7 @@
                 </a:solidFill>
                 <a:latin typeface="Segoe UI"/>
               </a:rPr>
-              <a:t>Rs 42,876</a:t>
+              <a:t>Rs 43,218</a:t>
             </a:r>
           </a:p>
         </p:txBody>
@@ -9039,7 +9039,7 @@
                 </a:solidFill>
                 <a:latin typeface="Segoe UI"/>
               </a:rPr>
-              <a:t>Rs -48,324</a:t>
+              <a:t>Rs -47,982</a:t>
             </a:r>
           </a:p>
         </p:txBody>
@@ -9073,7 +9073,7 @@
                 </a:solidFill>
                 <a:latin typeface="Segoe UI"/>
               </a:rPr>
-              <a:t>-53.0%</a:t>
+              <a:t>-52.6%</a:t>
             </a:r>
           </a:p>
         </p:txBody>
@@ -9107,7 +9107,7 @@
                 </a:solidFill>
                 <a:latin typeface="Segoe UI"/>
               </a:rPr>
-              <a:t>+0.5%</a:t>
+              <a:t>+0.0%</a:t>
             </a:r>
           </a:p>
         </p:txBody>
@@ -9141,7 +9141,7 @@
                 </a:solidFill>
                 <a:latin typeface="Segoe UI"/>
               </a:rPr>
-              <a:t>Total Rs 1,938,136 | P&amp;L Rs 208,555 (+12.1%) | Sharpe 0.15 | Vol 19.31% | VaR95 -1.9%/day</a:t>
+              <a:t>Total Rs 1,901,651 | P&amp;L Rs 173,233 (+10.0%) | Sharpe 0.04 | Vol 19.25% | VaR95 -1.89%/day</a:t>
             </a:r>
           </a:p>
         </p:txBody>

--- a/docs/pmr_daily.pptx
+++ b/docs/pmr_daily.pptx
@@ -3197,7 +3197,7 @@
                 </a:solidFill>
                 <a:latin typeface="Segoe UI"/>
               </a:rPr>
-              <a:t>Monday, 31 Aug 2026 09:07 SGT</a:t>
+              <a:t>Tuesday, 01 Sep 2026 09:41 SGT</a:t>
             </a:r>
           </a:p>
         </p:txBody>
@@ -3265,7 +3265,7 @@
                 </a:solidFill>
                 <a:latin typeface="Segoe UI"/>
               </a:rPr>
-              <a:t>RAG 13R / 14A / 19G   |   69.6% above 200DMA   |   Portfolio Rs 1,901,651 (+10.0%)</a:t>
+              <a:t>RAG 12R / 16A / 18G   |   71.7% above 200DMA   |   Portfolio Rs 1,907,046 (+10.3%)</a:t>
             </a:r>
           </a:p>
         </p:txBody>
@@ -3461,7 +3461,7 @@
                 </a:solidFill>
                 <a:latin typeface="Segoe UI"/>
               </a:rPr>
-              <a:t>Solana</a:t>
+              <a:t>Ethereum</a:t>
             </a:r>
           </a:p>
         </p:txBody>
@@ -3491,11 +3491,11 @@
             <a:r>
               <a:rPr sz="900" b="0">
                 <a:solidFill>
-                  <a:srgbClr val="EF4444"/>
-                </a:solidFill>
-                <a:latin typeface="Segoe UI"/>
-              </a:rPr>
-              <a:t>SOL-USD · RED</a:t>
+                  <a:srgbClr val="F59E0B"/>
+                </a:solidFill>
+                <a:latin typeface="Segoe UI"/>
+              </a:rPr>
+              <a:t>ETH-USD · AMBER</a:t>
             </a:r>
           </a:p>
         </p:txBody>
@@ -3529,7 +3529,7 @@
                 </a:solidFill>
                 <a:latin typeface="Segoe UI"/>
               </a:rPr>
-              <a:t>+39.7%</a:t>
+              <a:t>+1.0%</a:t>
             </a:r>
           </a:p>
         </p:txBody>
@@ -3587,7 +3587,7 @@
                 </a:solidFill>
                 <a:latin typeface="Segoe UI"/>
               </a:rPr>
-              <a:t>Ethereum</a:t>
+              <a:t>Bitcoin</a:t>
             </a:r>
           </a:p>
         </p:txBody>
@@ -3621,7 +3621,7 @@
                 </a:solidFill>
                 <a:latin typeface="Segoe UI"/>
               </a:rPr>
-              <a:t>ETH-USD · AMBER</a:t>
+              <a:t>BTC-USD · AMBER</a:t>
             </a:r>
           </a:p>
         </p:txBody>
@@ -3655,7 +3655,7 @@
                 </a:solidFill>
                 <a:latin typeface="Segoe UI"/>
               </a:rPr>
-              <a:t>+30.0%</a:t>
+              <a:t>+0.9%</a:t>
             </a:r>
           </a:p>
         </p:txBody>
@@ -3713,7 +3713,7 @@
                 </a:solidFill>
                 <a:latin typeface="Segoe UI"/>
               </a:rPr>
-              <a:t>Bitcoin</a:t>
+              <a:t>Straits Times</a:t>
             </a:r>
           </a:p>
         </p:txBody>
@@ -3743,11 +3743,11 @@
             <a:r>
               <a:rPr sz="900" b="0">
                 <a:solidFill>
-                  <a:srgbClr val="F59E0B"/>
-                </a:solidFill>
-                <a:latin typeface="Segoe UI"/>
-              </a:rPr>
-              <a:t>BTC-USD · AMBER</a:t>
+                  <a:srgbClr val="22C55E"/>
+                </a:solidFill>
+                <a:latin typeface="Segoe UI"/>
+              </a:rPr>
+              <a:t>^STI · GREEN</a:t>
             </a:r>
           </a:p>
         </p:txBody>
@@ -3781,7 +3781,7 @@
                 </a:solidFill>
                 <a:latin typeface="Segoe UI"/>
               </a:rPr>
-              <a:t>+23.7%</a:t>
+              <a:t>+0.6%</a:t>
             </a:r>
           </a:p>
         </p:txBody>
@@ -3839,7 +3839,7 @@
                 </a:solidFill>
                 <a:latin typeface="Segoe UI"/>
               </a:rPr>
-              <a:t>Silver</a:t>
+              <a:t>USD/JPY</a:t>
             </a:r>
           </a:p>
         </p:txBody>
@@ -3869,11 +3869,11 @@
             <a:r>
               <a:rPr sz="900" b="0">
                 <a:solidFill>
-                  <a:srgbClr val="EF4444"/>
-                </a:solidFill>
-                <a:latin typeface="Segoe UI"/>
-              </a:rPr>
-              <a:t>SI=F · RED</a:t>
+                  <a:srgbClr val="F59E0B"/>
+                </a:solidFill>
+                <a:latin typeface="Segoe UI"/>
+              </a:rPr>
+              <a:t>JPY=X · AMBER</a:t>
             </a:r>
           </a:p>
         </p:txBody>
@@ -3907,7 +3907,7 @@
                 </a:solidFill>
                 <a:latin typeface="Segoe UI"/>
               </a:rPr>
-              <a:t>+16.8%</a:t>
+              <a:t>+0.3%</a:t>
             </a:r>
           </a:p>
         </p:txBody>
@@ -3965,7 +3965,7 @@
                 </a:solidFill>
                 <a:latin typeface="Segoe UI"/>
               </a:rPr>
-              <a:t>Tesla</a:t>
+              <a:t>Clean Energy</a:t>
             </a:r>
           </a:p>
         </p:txBody>
@@ -3999,7 +3999,7 @@
                 </a:solidFill>
                 <a:latin typeface="Segoe UI"/>
               </a:rPr>
-              <a:t>TSLA · RED</a:t>
+              <a:t>ICLN · RED</a:t>
             </a:r>
           </a:p>
         </p:txBody>
@@ -4033,7 +4033,7 @@
                 </a:solidFill>
                 <a:latin typeface="Segoe UI"/>
               </a:rPr>
-              <a:t>+12.1%</a:t>
+              <a:t>+0.0%</a:t>
             </a:r>
           </a:p>
         </p:txBody>
@@ -4125,7 +4125,7 @@
                 </a:solidFill>
                 <a:latin typeface="Segoe UI"/>
               </a:rPr>
-              <a:t>ITC</a:t>
+              <a:t>Solana</a:t>
             </a:r>
           </a:p>
         </p:txBody>
@@ -4155,11 +4155,11 @@
             <a:r>
               <a:rPr sz="900" b="0">
                 <a:solidFill>
-                  <a:srgbClr val="EF4444"/>
-                </a:solidFill>
-                <a:latin typeface="Segoe UI"/>
-              </a:rPr>
-              <a:t>ITC.NS · RED</a:t>
+                  <a:srgbClr val="F59E0B"/>
+                </a:solidFill>
+                <a:latin typeface="Segoe UI"/>
+              </a:rPr>
+              <a:t>SOL-USD · AMBER</a:t>
             </a:r>
           </a:p>
         </p:txBody>
@@ -4193,7 +4193,7 @@
                 </a:solidFill>
                 <a:latin typeface="Segoe UI"/>
               </a:rPr>
-              <a:t>-5.3%</a:t>
+              <a:t>-0.8%</a:t>
             </a:r>
           </a:p>
         </p:txBody>
@@ -4251,7 +4251,7 @@
                 </a:solidFill>
                 <a:latin typeface="Segoe UI"/>
               </a:rPr>
-              <a:t>Bharti Airtel</a:t>
+              <a:t>EUR/USD</a:t>
             </a:r>
           </a:p>
         </p:txBody>
@@ -4285,7 +4285,7 @@
                 </a:solidFill>
                 <a:latin typeface="Segoe UI"/>
               </a:rPr>
-              <a:t>BHARTIARTL.NS · AMBER</a:t>
+              <a:t>EURUSD=X · AMBER</a:t>
             </a:r>
           </a:p>
         </p:txBody>
@@ -4319,7 +4319,7 @@
                 </a:solidFill>
                 <a:latin typeface="Segoe UI"/>
               </a:rPr>
-              <a:t>-4.5%</a:t>
+              <a:t>-0.4%</a:t>
             </a:r>
           </a:p>
         </p:txBody>
@@ -4377,7 +4377,7 @@
                 </a:solidFill>
                 <a:latin typeface="Segoe UI"/>
               </a:rPr>
-              <a:t>HDFC Bank</a:t>
+              <a:t>Nikkei 225</a:t>
             </a:r>
           </a:p>
         </p:txBody>
@@ -4407,11 +4407,11 @@
             <a:r>
               <a:rPr sz="900" b="0">
                 <a:solidFill>
-                  <a:srgbClr val="EF4444"/>
-                </a:solidFill>
-                <a:latin typeface="Segoe UI"/>
-              </a:rPr>
-              <a:t>HDFCBANK.NS · RED</a:t>
+                  <a:srgbClr val="F59E0B"/>
+                </a:solidFill>
+                <a:latin typeface="Segoe UI"/>
+              </a:rPr>
+              <a:t>^N225 · AMBER</a:t>
             </a:r>
           </a:p>
         </p:txBody>
@@ -4445,7 +4445,7 @@
                 </a:solidFill>
                 <a:latin typeface="Segoe UI"/>
               </a:rPr>
-              <a:t>-3.7%</a:t>
+              <a:t>-0.2%</a:t>
             </a:r>
           </a:p>
         </p:txBody>
@@ -4503,7 +4503,7 @@
                 </a:solidFill>
                 <a:latin typeface="Segoe UI"/>
               </a:rPr>
-              <a:t>Alphabet</a:t>
+              <a:t>NIFTY 50</a:t>
             </a:r>
           </a:p>
         </p:txBody>
@@ -4537,7 +4537,7 @@
                 </a:solidFill>
                 <a:latin typeface="Segoe UI"/>
               </a:rPr>
-              <a:t>GOOGL · AMBER</a:t>
+              <a:t>^NSEI · AMBER</a:t>
             </a:r>
           </a:p>
         </p:txBody>
@@ -4567,11 +4567,11 @@
             <a:r>
               <a:rPr sz="1000">
                 <a:solidFill>
-                  <a:srgbClr val="EF4444"/>
-                </a:solidFill>
-                <a:latin typeface="Segoe UI"/>
-              </a:rPr>
-              <a:t>-2.7%</a:t>
+                  <a:srgbClr val="22C55E"/>
+                </a:solidFill>
+                <a:latin typeface="Segoe UI"/>
+              </a:rPr>
+              <a:t>+0.0%</a:t>
             </a:r>
           </a:p>
         </p:txBody>
@@ -4629,7 +4629,7 @@
                 </a:solidFill>
                 <a:latin typeface="Segoe UI"/>
               </a:rPr>
-              <a:t>Amazon</a:t>
+              <a:t>NIFTY Bank</a:t>
             </a:r>
           </a:p>
         </p:txBody>
@@ -4659,11 +4659,11 @@
             <a:r>
               <a:rPr sz="900" b="0">
                 <a:solidFill>
-                  <a:srgbClr val="22C55E"/>
-                </a:solidFill>
-                <a:latin typeface="Segoe UI"/>
-              </a:rPr>
-              <a:t>AMZN · GREEN</a:t>
+                  <a:srgbClr val="F59E0B"/>
+                </a:solidFill>
+                <a:latin typeface="Segoe UI"/>
+              </a:rPr>
+              <a:t>^NSEBANK · AMBER</a:t>
             </a:r>
           </a:p>
         </p:txBody>
@@ -4693,11 +4693,11 @@
             <a:r>
               <a:rPr sz="1000">
                 <a:solidFill>
-                  <a:srgbClr val="EF4444"/>
-                </a:solidFill>
-                <a:latin typeface="Segoe UI"/>
-              </a:rPr>
-              <a:t>-1.9%</a:t>
+                  <a:srgbClr val="22C55E"/>
+                </a:solidFill>
+                <a:latin typeface="Segoe UI"/>
+              </a:rPr>
+              <a:t>+0.0%</a:t>
             </a:r>
           </a:p>
         </p:txBody>
@@ -4837,7 +4837,7 @@
         <p:spPr>
           <a:xfrm>
             <a:off x="457200" y="1188720"/>
-            <a:ext cx="11247120" cy="5534130"/>
+            <a:ext cx="11247120" cy="5544503"/>
           </a:xfrm>
           <a:prstGeom prst="rect">
             <a:avLst/>
@@ -5035,7 +5035,7 @@
                 </a:solidFill>
                 <a:latin typeface="Segoe UI"/>
               </a:rPr>
-              <a:t>83%</a:t>
+              <a:t>85%</a:t>
             </a:r>
           </a:p>
         </p:txBody>
@@ -5103,7 +5103,7 @@
                 </a:solidFill>
                 <a:latin typeface="Segoe UI"/>
               </a:rPr>
-              <a:t>NIFTY IT</a:t>
+              <a:t>Microsoft</a:t>
             </a:r>
           </a:p>
         </p:txBody>
@@ -5171,7 +5171,7 @@
                 </a:solidFill>
                 <a:latin typeface="Segoe UI"/>
               </a:rPr>
-              <a:t>83%</a:t>
+              <a:t>85%</a:t>
             </a:r>
           </a:p>
         </p:txBody>
@@ -5205,7 +5205,7 @@
                 </a:solidFill>
                 <a:latin typeface="Segoe UI"/>
               </a:rPr>
-              <a:t>above 200DMA · golden cross (50&gt;200) · MACD bullish</a:t>
+              <a:t>above 200DMA · golden cross (50&gt;200) · MACD bearish</a:t>
             </a:r>
           </a:p>
         </p:txBody>
@@ -5239,7 +5239,7 @@
                 </a:solidFill>
                 <a:latin typeface="Segoe UI"/>
               </a:rPr>
-              <a:t>US Financials</a:t>
+              <a:t>Copper</a:t>
             </a:r>
           </a:p>
         </p:txBody>
@@ -5307,7 +5307,7 @@
                 </a:solidFill>
                 <a:latin typeface="Segoe UI"/>
               </a:rPr>
-              <a:t>82%</a:t>
+              <a:t>95%</a:t>
             </a:r>
           </a:p>
         </p:txBody>
@@ -5341,7 +5341,7 @@
                 </a:solidFill>
                 <a:latin typeface="Segoe UI"/>
               </a:rPr>
-              <a:t>above 200DMA · golden cross (50&gt;200) · MACD bearish</a:t>
+              <a:t>above 200DMA · golden cross (50&gt;200) · MACD bullish</a:t>
             </a:r>
           </a:p>
         </p:txBody>
@@ -5375,7 +5375,7 @@
                 </a:solidFill>
                 <a:latin typeface="Segoe UI"/>
               </a:rPr>
-              <a:t>Apple</a:t>
+              <a:t>NIFTY IT</a:t>
             </a:r>
           </a:p>
         </p:txBody>
@@ -5443,7 +5443,7 @@
                 </a:solidFill>
                 <a:latin typeface="Segoe UI"/>
               </a:rPr>
-              <a:t>93%</a:t>
+              <a:t>83%</a:t>
             </a:r>
           </a:p>
         </p:txBody>
@@ -5511,7 +5511,7 @@
                 </a:solidFill>
                 <a:latin typeface="Segoe UI"/>
               </a:rPr>
-              <a:t>Copper</a:t>
+              <a:t>US Financials</a:t>
             </a:r>
           </a:p>
         </p:txBody>
@@ -5579,7 +5579,7 @@
                 </a:solidFill>
                 <a:latin typeface="Segoe UI"/>
               </a:rPr>
-              <a:t>81%</a:t>
+              <a:t>82%</a:t>
             </a:r>
           </a:p>
         </p:txBody>
@@ -5647,7 +5647,7 @@
                 </a:solidFill>
                 <a:latin typeface="Segoe UI"/>
               </a:rPr>
-              <a:t>Microsoft</a:t>
+              <a:t>DAX</a:t>
             </a:r>
           </a:p>
         </p:txBody>
@@ -5715,7 +5715,7 @@
                 </a:solidFill>
                 <a:latin typeface="Segoe UI"/>
               </a:rPr>
-              <a:t>94%</a:t>
+              <a:t>90%</a:t>
             </a:r>
           </a:p>
         </p:txBody>
@@ -5783,7 +5783,7 @@
                 </a:solidFill>
                 <a:latin typeface="Segoe UI"/>
               </a:rPr>
-              <a:t>DAX</a:t>
+              <a:t>Ethereum</a:t>
             </a:r>
           </a:p>
         </p:txBody>
@@ -5851,7 +5851,7 @@
                 </a:solidFill>
                 <a:latin typeface="Segoe UI"/>
               </a:rPr>
-              <a:t>90%</a:t>
+              <a:t>72%</a:t>
             </a:r>
           </a:p>
         </p:txBody>
@@ -5885,7 +5885,7 @@
                 </a:solidFill>
                 <a:latin typeface="Segoe UI"/>
               </a:rPr>
-              <a:t>above 200DMA · golden cross (50&gt;200) · MACD bullish</a:t>
+              <a:t>above 200DMA · death cross (50&lt;200) · MACD bullish</a:t>
             </a:r>
           </a:p>
         </p:txBody>
@@ -5919,7 +5919,7 @@
                 </a:solidFill>
                 <a:latin typeface="Segoe UI"/>
               </a:rPr>
-              <a:t>Ethereum</a:t>
+              <a:t>Bitcoin</a:t>
             </a:r>
           </a:p>
         </p:txBody>
@@ -5987,7 +5987,7 @@
                 </a:solidFill>
                 <a:latin typeface="Segoe UI"/>
               </a:rPr>
-              <a:t>77%</a:t>
+              <a:t>71%</a:t>
             </a:r>
           </a:p>
         </p:txBody>
@@ -6055,7 +6055,7 @@
                 </a:solidFill>
                 <a:latin typeface="Segoe UI"/>
               </a:rPr>
-              <a:t>Bitcoin</a:t>
+              <a:t>Straits Times</a:t>
             </a:r>
           </a:p>
         </p:txBody>
@@ -6157,7 +6157,7 @@
                 </a:solidFill>
                 <a:latin typeface="Segoe UI"/>
               </a:rPr>
-              <a:t>above 200DMA · death cross (50&lt;200) · MACD bullish</a:t>
+              <a:t>above 200DMA · golden cross (50&gt;200) · MACD bearish</a:t>
             </a:r>
           </a:p>
         </p:txBody>
@@ -6191,7 +6191,7 @@
                 </a:solidFill>
                 <a:latin typeface="Segoe UI"/>
               </a:rPr>
-              <a:t>Straits Times</a:t>
+              <a:t>Solana</a:t>
             </a:r>
           </a:p>
         </p:txBody>
@@ -6293,7 +6293,7 @@
                 </a:solidFill>
                 <a:latin typeface="Segoe UI"/>
               </a:rPr>
-              <a:t>above 200DMA · golden cross (50&gt;200) · MACD bearish</a:t>
+              <a:t>above 200DMA · death cross (50&lt;200) · MACD bullish</a:t>
             </a:r>
           </a:p>
         </p:txBody>
@@ -6327,7 +6327,7 @@
                 </a:solidFill>
                 <a:latin typeface="Segoe UI"/>
               </a:rPr>
-              <a:t>Solana</a:t>
+              <a:t>Hang Seng</a:t>
             </a:r>
           </a:p>
         </p:txBody>
@@ -6395,7 +6395,7 @@
                 </a:solidFill>
                 <a:latin typeface="Segoe UI"/>
               </a:rPr>
-              <a:t>70%</a:t>
+              <a:t>75%</a:t>
             </a:r>
           </a:p>
         </p:txBody>
@@ -6429,7 +6429,7 @@
                 </a:solidFill>
                 <a:latin typeface="Segoe UI"/>
               </a:rPr>
-              <a:t>above 200DMA · death cross (50&lt;200) · MACD bullish</a:t>
+              <a:t>above 200DMA · golden cross (50&gt;200) · MACD bearish</a:t>
             </a:r>
           </a:p>
         </p:txBody>
@@ -6463,7 +6463,7 @@
                 </a:solidFill>
                 <a:latin typeface="Segoe UI"/>
               </a:rPr>
-              <a:t>Hang Seng</a:t>
+              <a:t>Apple</a:t>
             </a:r>
           </a:p>
         </p:txBody>
@@ -6531,7 +6531,7 @@
                 </a:solidFill>
                 <a:latin typeface="Segoe UI"/>
               </a:rPr>
-              <a:t>75%</a:t>
+              <a:t>91%</a:t>
             </a:r>
           </a:p>
         </p:txBody>
@@ -6565,7 +6565,7 @@
                 </a:solidFill>
                 <a:latin typeface="Segoe UI"/>
               </a:rPr>
-              <a:t>above 200DMA · golden cross (50&gt;200) · MACD bearish</a:t>
+              <a:t>above 200DMA · golden cross (50&gt;200) · MACD bullish</a:t>
             </a:r>
           </a:p>
         </p:txBody>
@@ -7067,7 +7067,7 @@
                 </a:solidFill>
                 <a:latin typeface="Segoe UI"/>
               </a:rPr>
-              <a:t>77,692</a:t>
+              <a:t>78,538</a:t>
             </a:r>
           </a:p>
         </p:txBody>
@@ -7101,7 +7101,7 @@
                 </a:solidFill>
                 <a:latin typeface="Segoe UI"/>
               </a:rPr>
-              <a:t>Rs 741,732</a:t>
+              <a:t>Rs 749,806</a:t>
             </a:r>
           </a:p>
         </p:txBody>
@@ -7135,7 +7135,7 @@
                 </a:solidFill>
                 <a:latin typeface="Segoe UI"/>
               </a:rPr>
-              <a:t>Rs 168,909</a:t>
+              <a:t>Rs 176,983</a:t>
             </a:r>
           </a:p>
         </p:txBody>
@@ -7169,7 +7169,7 @@
                 </a:solidFill>
                 <a:latin typeface="Segoe UI"/>
               </a:rPr>
-              <a:t>+29.5%</a:t>
+              <a:t>+30.9%</a:t>
             </a:r>
           </a:p>
         </p:txBody>
@@ -7199,11 +7199,11 @@
             <a:r>
               <a:rPr sz="1000" b="0">
                 <a:solidFill>
-                  <a:srgbClr val="EF4444"/>
-                </a:solidFill>
-                <a:latin typeface="Segoe UI"/>
-              </a:rPr>
-              <a:t>-0.2%</a:t>
+                  <a:srgbClr val="22C55E"/>
+                </a:solidFill>
+                <a:latin typeface="Segoe UI"/>
+              </a:rPr>
+              <a:t>+0.9%</a:t>
             </a:r>
           </a:p>
         </p:txBody>
@@ -7339,7 +7339,7 @@
                 </a:solidFill>
                 <a:latin typeface="Segoe UI"/>
               </a:rPr>
-              <a:t>4,514</a:t>
+              <a:t>4,488</a:t>
             </a:r>
           </a:p>
         </p:txBody>
@@ -7373,7 +7373,7 @@
                 </a:solidFill>
                 <a:latin typeface="Segoe UI"/>
               </a:rPr>
-              <a:t>Rs 430,906</a:t>
+              <a:t>Rs 428,481</a:t>
             </a:r>
           </a:p>
         </p:txBody>
@@ -7407,7 +7407,7 @@
                 </a:solidFill>
                 <a:latin typeface="Segoe UI"/>
               </a:rPr>
-              <a:t>Rs 211,324</a:t>
+              <a:t>Rs 208,899</a:t>
             </a:r>
           </a:p>
         </p:txBody>
@@ -7441,7 +7441,7 @@
                 </a:solidFill>
                 <a:latin typeface="Segoe UI"/>
               </a:rPr>
-              <a:t>+96.2%</a:t>
+              <a:t>+95.1%</a:t>
             </a:r>
           </a:p>
         </p:txBody>
@@ -7611,7 +7611,7 @@
                 </a:solidFill>
                 <a:latin typeface="Segoe UI"/>
               </a:rPr>
-              <a:t>320</a:t>
+              <a:t>317</a:t>
             </a:r>
           </a:p>
         </p:txBody>
@@ -7645,7 +7645,7 @@
                 </a:solidFill>
                 <a:latin typeface="Segoe UI"/>
               </a:rPr>
-              <a:t>Rs 305,219</a:t>
+              <a:t>Rs 302,498</a:t>
             </a:r>
           </a:p>
         </p:txBody>
@@ -7679,7 +7679,7 @@
                 </a:solidFill>
                 <a:latin typeface="Segoe UI"/>
               </a:rPr>
-              <a:t>Rs 128,599</a:t>
+              <a:t>Rs 125,878</a:t>
             </a:r>
           </a:p>
         </p:txBody>
@@ -7713,7 +7713,7 @@
                 </a:solidFill>
                 <a:latin typeface="Segoe UI"/>
               </a:rPr>
-              <a:t>+72.8%</a:t>
+              <a:t>+71.3%</a:t>
             </a:r>
           </a:p>
         </p:txBody>
@@ -7883,7 +7883,7 @@
                 </a:solidFill>
                 <a:latin typeface="Segoe UI"/>
               </a:rPr>
-              <a:t>218</a:t>
+              <a:t>221</a:t>
             </a:r>
           </a:p>
         </p:txBody>
@@ -7917,7 +7917,7 @@
                 </a:solidFill>
                 <a:latin typeface="Segoe UI"/>
               </a:rPr>
-              <a:t>Rs 166,157</a:t>
+              <a:t>Rs 168,624</a:t>
             </a:r>
           </a:p>
         </p:txBody>
@@ -7951,7 +7951,7 @@
                 </a:solidFill>
                 <a:latin typeface="Segoe UI"/>
               </a:rPr>
-              <a:t>Rs -177,537</a:t>
+              <a:t>Rs -175,070</a:t>
             </a:r>
           </a:p>
         </p:txBody>
@@ -7985,7 +7985,7 @@
                 </a:solidFill>
                 <a:latin typeface="Segoe UI"/>
               </a:rPr>
-              <a:t>-51.7%</a:t>
+              <a:t>-50.9%</a:t>
             </a:r>
           </a:p>
         </p:txBody>
@@ -9141,7 +9141,7 @@
                 </a:solidFill>
                 <a:latin typeface="Segoe UI"/>
               </a:rPr>
-              <a:t>Total Rs 1,901,651 | P&amp;L Rs 173,233 (+10.0%) | Sharpe 0.04 | Vol 19.25% | VaR95 -1.89%/day</a:t>
+              <a:t>Total Rs 1,907,046 | P&amp;L Rs 178,628 (+10.3%) | Sharpe 0.05 | Vol 19.33% | VaR95 -1.9%/day</a:t>
             </a:r>
           </a:p>
         </p:txBody>

--- a/docs/pmr_daily.pptx
+++ b/docs/pmr_daily.pptx
@@ -3197,7 +3197,7 @@
                 </a:solidFill>
                 <a:latin typeface="Segoe UI"/>
               </a:rPr>
-              <a:t>Tuesday, 01 Sep 2026 09:41 SGT</a:t>
+              <a:t>Wednesday, 02 Sep 2026 08:51 SGT</a:t>
             </a:r>
           </a:p>
         </p:txBody>
@@ -3265,7 +3265,7 @@
                 </a:solidFill>
                 <a:latin typeface="Segoe UI"/>
               </a:rPr>
-              <a:t>RAG 12R / 16A / 18G   |   71.7% above 200DMA   |   Portfolio Rs 1,907,046 (+10.3%)</a:t>
+              <a:t>RAG 12R / 18A / 16G   |   69.6% above 200DMA   |   Portfolio Rs 1,881,498 (+9.3%)</a:t>
             </a:r>
           </a:p>
         </p:txBody>
@@ -3461,7 +3461,7 @@
                 </a:solidFill>
                 <a:latin typeface="Segoe UI"/>
               </a:rPr>
-              <a:t>Ethereum</a:t>
+              <a:t>Crude Oil WTI</a:t>
             </a:r>
           </a:p>
         </p:txBody>
@@ -3491,11 +3491,11 @@
             <a:r>
               <a:rPr sz="900" b="0">
                 <a:solidFill>
-                  <a:srgbClr val="F59E0B"/>
-                </a:solidFill>
-                <a:latin typeface="Segoe UI"/>
-              </a:rPr>
-              <a:t>ETH-USD · AMBER</a:t>
+                  <a:srgbClr val="EF4444"/>
+                </a:solidFill>
+                <a:latin typeface="Segoe UI"/>
+              </a:rPr>
+              <a:t>CL=F · RED</a:t>
             </a:r>
           </a:p>
         </p:txBody>
@@ -3529,7 +3529,7 @@
                 </a:solidFill>
                 <a:latin typeface="Segoe UI"/>
               </a:rPr>
-              <a:t>+1.0%</a:t>
+              <a:t>+6.9%</a:t>
             </a:r>
           </a:p>
         </p:txBody>
@@ -3587,7 +3587,7 @@
                 </a:solidFill>
                 <a:latin typeface="Segoe UI"/>
               </a:rPr>
-              <a:t>Bitcoin</a:t>
+              <a:t>ITC</a:t>
             </a:r>
           </a:p>
         </p:txBody>
@@ -3617,11 +3617,11 @@
             <a:r>
               <a:rPr sz="900" b="0">
                 <a:solidFill>
-                  <a:srgbClr val="F59E0B"/>
-                </a:solidFill>
-                <a:latin typeface="Segoe UI"/>
-              </a:rPr>
-              <a:t>BTC-USD · AMBER</a:t>
+                  <a:srgbClr val="EF4444"/>
+                </a:solidFill>
+                <a:latin typeface="Segoe UI"/>
+              </a:rPr>
+              <a:t>ITC.NS · RED</a:t>
             </a:r>
           </a:p>
         </p:txBody>
@@ -3655,7 +3655,7 @@
                 </a:solidFill>
                 <a:latin typeface="Segoe UI"/>
               </a:rPr>
-              <a:t>+0.9%</a:t>
+              <a:t>+4.3%</a:t>
             </a:r>
           </a:p>
         </p:txBody>
@@ -3713,7 +3713,7 @@
                 </a:solidFill>
                 <a:latin typeface="Segoe UI"/>
               </a:rPr>
-              <a:t>Straits Times</a:t>
+              <a:t>Bharti Airtel</a:t>
             </a:r>
           </a:p>
         </p:txBody>
@@ -3743,11 +3743,11 @@
             <a:r>
               <a:rPr sz="900" b="0">
                 <a:solidFill>
-                  <a:srgbClr val="22C55E"/>
-                </a:solidFill>
-                <a:latin typeface="Segoe UI"/>
-              </a:rPr>
-              <a:t>^STI · GREEN</a:t>
+                  <a:srgbClr val="F59E0B"/>
+                </a:solidFill>
+                <a:latin typeface="Segoe UI"/>
+              </a:rPr>
+              <a:t>BHARTIARTL.NS · AMBER</a:t>
             </a:r>
           </a:p>
         </p:txBody>
@@ -3781,7 +3781,7 @@
                 </a:solidFill>
                 <a:latin typeface="Segoe UI"/>
               </a:rPr>
-              <a:t>+0.6%</a:t>
+              <a:t>+3.6%</a:t>
             </a:r>
           </a:p>
         </p:txBody>
@@ -3839,7 +3839,7 @@
                 </a:solidFill>
                 <a:latin typeface="Segoe UI"/>
               </a:rPr>
-              <a:t>USD/JPY</a:t>
+              <a:t>Apple</a:t>
             </a:r>
           </a:p>
         </p:txBody>
@@ -3869,11 +3869,11 @@
             <a:r>
               <a:rPr sz="900" b="0">
                 <a:solidFill>
-                  <a:srgbClr val="F59E0B"/>
-                </a:solidFill>
-                <a:latin typeface="Segoe UI"/>
-              </a:rPr>
-              <a:t>JPY=X · AMBER</a:t>
+                  <a:srgbClr val="22C55E"/>
+                </a:solidFill>
+                <a:latin typeface="Segoe UI"/>
+              </a:rPr>
+              <a:t>AAPL · GREEN</a:t>
             </a:r>
           </a:p>
         </p:txBody>
@@ -3907,7 +3907,7 @@
                 </a:solidFill>
                 <a:latin typeface="Segoe UI"/>
               </a:rPr>
-              <a:t>+0.3%</a:t>
+              <a:t>+2.6%</a:t>
             </a:r>
           </a:p>
         </p:txBody>
@@ -3965,7 +3965,7 @@
                 </a:solidFill>
                 <a:latin typeface="Segoe UI"/>
               </a:rPr>
-              <a:t>Clean Energy</a:t>
+              <a:t>Reliance</a:t>
             </a:r>
           </a:p>
         </p:txBody>
@@ -3995,11 +3995,11 @@
             <a:r>
               <a:rPr sz="900" b="0">
                 <a:solidFill>
-                  <a:srgbClr val="EF4444"/>
-                </a:solidFill>
-                <a:latin typeface="Segoe UI"/>
-              </a:rPr>
-              <a:t>ICLN · RED</a:t>
+                  <a:srgbClr val="F59E0B"/>
+                </a:solidFill>
+                <a:latin typeface="Segoe UI"/>
+              </a:rPr>
+              <a:t>RELIANCE.NS · AMBER</a:t>
             </a:r>
           </a:p>
         </p:txBody>
@@ -4033,7 +4033,7 @@
                 </a:solidFill>
                 <a:latin typeface="Segoe UI"/>
               </a:rPr>
-              <a:t>+0.0%</a:t>
+              <a:t>+2.5%</a:t>
             </a:r>
           </a:p>
         </p:txBody>
@@ -4125,7 +4125,7 @@
                 </a:solidFill>
                 <a:latin typeface="Segoe UI"/>
               </a:rPr>
-              <a:t>Solana</a:t>
+              <a:t>Tesla</a:t>
             </a:r>
           </a:p>
         </p:txBody>
@@ -4155,11 +4155,11 @@
             <a:r>
               <a:rPr sz="900" b="0">
                 <a:solidFill>
-                  <a:srgbClr val="F59E0B"/>
-                </a:solidFill>
-                <a:latin typeface="Segoe UI"/>
-              </a:rPr>
-              <a:t>SOL-USD · AMBER</a:t>
+                  <a:srgbClr val="EF4444"/>
+                </a:solidFill>
+                <a:latin typeface="Segoe UI"/>
+              </a:rPr>
+              <a:t>TSLA · RED</a:t>
             </a:r>
           </a:p>
         </p:txBody>
@@ -4193,7 +4193,7 @@
                 </a:solidFill>
                 <a:latin typeface="Segoe UI"/>
               </a:rPr>
-              <a:t>-0.8%</a:t>
+              <a:t>-3.2%</a:t>
             </a:r>
           </a:p>
         </p:txBody>
@@ -4251,7 +4251,7 @@
                 </a:solidFill>
                 <a:latin typeface="Segoe UI"/>
               </a:rPr>
-              <a:t>EUR/USD</a:t>
+              <a:t>Solana</a:t>
             </a:r>
           </a:p>
         </p:txBody>
@@ -4281,11 +4281,11 @@
             <a:r>
               <a:rPr sz="900" b="0">
                 <a:solidFill>
-                  <a:srgbClr val="F59E0B"/>
-                </a:solidFill>
-                <a:latin typeface="Segoe UI"/>
-              </a:rPr>
-              <a:t>EURUSD=X · AMBER</a:t>
+                  <a:srgbClr val="EF4444"/>
+                </a:solidFill>
+                <a:latin typeface="Segoe UI"/>
+              </a:rPr>
+              <a:t>SOL-USD · RED</a:t>
             </a:r>
           </a:p>
         </p:txBody>
@@ -4319,7 +4319,7 @@
                 </a:solidFill>
                 <a:latin typeface="Segoe UI"/>
               </a:rPr>
-              <a:t>-0.4%</a:t>
+              <a:t>-3.2%</a:t>
             </a:r>
           </a:p>
         </p:txBody>
@@ -4445,7 +4445,7 @@
                 </a:solidFill>
                 <a:latin typeface="Segoe UI"/>
               </a:rPr>
-              <a:t>-0.2%</a:t>
+              <a:t>-2.6%</a:t>
             </a:r>
           </a:p>
         </p:txBody>
@@ -4503,7 +4503,7 @@
                 </a:solidFill>
                 <a:latin typeface="Segoe UI"/>
               </a:rPr>
-              <a:t>NIFTY 50</a:t>
+              <a:t>Ethereum</a:t>
             </a:r>
           </a:p>
         </p:txBody>
@@ -4537,7 +4537,7 @@
                 </a:solidFill>
                 <a:latin typeface="Segoe UI"/>
               </a:rPr>
-              <a:t>^NSEI · AMBER</a:t>
+              <a:t>ETH-USD · AMBER</a:t>
             </a:r>
           </a:p>
         </p:txBody>
@@ -4567,11 +4567,11 @@
             <a:r>
               <a:rPr sz="1000">
                 <a:solidFill>
-                  <a:srgbClr val="22C55E"/>
-                </a:solidFill>
-                <a:latin typeface="Segoe UI"/>
-              </a:rPr>
-              <a:t>+0.0%</a:t>
+                  <a:srgbClr val="EF4444"/>
+                </a:solidFill>
+                <a:latin typeface="Segoe UI"/>
+              </a:rPr>
+              <a:t>-2.4%</a:t>
             </a:r>
           </a:p>
         </p:txBody>
@@ -4629,7 +4629,7 @@
                 </a:solidFill>
                 <a:latin typeface="Segoe UI"/>
               </a:rPr>
-              <a:t>NIFTY Bank</a:t>
+              <a:t>Silver</a:t>
             </a:r>
           </a:p>
         </p:txBody>
@@ -4659,11 +4659,11 @@
             <a:r>
               <a:rPr sz="900" b="0">
                 <a:solidFill>
-                  <a:srgbClr val="F59E0B"/>
-                </a:solidFill>
-                <a:latin typeface="Segoe UI"/>
-              </a:rPr>
-              <a:t>^NSEBANK · AMBER</a:t>
+                  <a:srgbClr val="EF4444"/>
+                </a:solidFill>
+                <a:latin typeface="Segoe UI"/>
+              </a:rPr>
+              <a:t>SI=F · RED</a:t>
             </a:r>
           </a:p>
         </p:txBody>
@@ -4693,11 +4693,11 @@
             <a:r>
               <a:rPr sz="1000">
                 <a:solidFill>
-                  <a:srgbClr val="22C55E"/>
-                </a:solidFill>
-                <a:latin typeface="Segoe UI"/>
-              </a:rPr>
-              <a:t>+0.0%</a:t>
+                  <a:srgbClr val="EF4444"/>
+                </a:solidFill>
+                <a:latin typeface="Segoe UI"/>
+              </a:rPr>
+              <a:t>-2.3%</a:t>
             </a:r>
           </a:p>
         </p:txBody>
@@ -4837,7 +4837,7 @@
         <p:spPr>
           <a:xfrm>
             <a:off x="457200" y="1188720"/>
-            <a:ext cx="11247120" cy="5544503"/>
+            <a:ext cx="11247120" cy="5508365"/>
           </a:xfrm>
           <a:prstGeom prst="rect">
             <a:avLst/>
@@ -4967,7 +4967,7 @@
                 </a:solidFill>
                 <a:latin typeface="Segoe UI"/>
               </a:rPr>
-              <a:t>US Energy</a:t>
+              <a:t>Microsoft</a:t>
             </a:r>
           </a:p>
         </p:txBody>
@@ -5035,7 +5035,7 @@
                 </a:solidFill>
                 <a:latin typeface="Segoe UI"/>
               </a:rPr>
-              <a:t>85%</a:t>
+              <a:t>84%</a:t>
             </a:r>
           </a:p>
         </p:txBody>
@@ -5103,7 +5103,7 @@
                 </a:solidFill>
                 <a:latin typeface="Segoe UI"/>
               </a:rPr>
-              <a:t>Microsoft</a:t>
+              <a:t>ICICI Bank</a:t>
             </a:r>
           </a:p>
         </p:txBody>
@@ -5171,7 +5171,7 @@
                 </a:solidFill>
                 <a:latin typeface="Segoe UI"/>
               </a:rPr>
-              <a:t>85%</a:t>
+              <a:t>95%</a:t>
             </a:r>
           </a:p>
         </p:txBody>
@@ -5205,7 +5205,7 @@
                 </a:solidFill>
                 <a:latin typeface="Segoe UI"/>
               </a:rPr>
-              <a:t>above 200DMA · golden cross (50&gt;200) · MACD bearish</a:t>
+              <a:t>above 200DMA · golden cross (50&gt;200) · MACD bullish</a:t>
             </a:r>
           </a:p>
         </p:txBody>
@@ -5239,7 +5239,7 @@
                 </a:solidFill>
                 <a:latin typeface="Segoe UI"/>
               </a:rPr>
-              <a:t>Copper</a:t>
+              <a:t>NIFTY IT</a:t>
             </a:r>
           </a:p>
         </p:txBody>
@@ -5307,7 +5307,7 @@
                 </a:solidFill>
                 <a:latin typeface="Segoe UI"/>
               </a:rPr>
-              <a:t>95%</a:t>
+              <a:t>83%</a:t>
             </a:r>
           </a:p>
         </p:txBody>
@@ -5375,7 +5375,7 @@
                 </a:solidFill>
                 <a:latin typeface="Segoe UI"/>
               </a:rPr>
-              <a:t>NIFTY IT</a:t>
+              <a:t>Solana</a:t>
             </a:r>
           </a:p>
         </p:txBody>
@@ -5443,7 +5443,7 @@
                 </a:solidFill>
                 <a:latin typeface="Segoe UI"/>
               </a:rPr>
-              <a:t>83%</a:t>
+              <a:t>82%</a:t>
             </a:r>
           </a:p>
         </p:txBody>
@@ -5511,7 +5511,7 @@
                 </a:solidFill>
                 <a:latin typeface="Segoe UI"/>
               </a:rPr>
-              <a:t>US Financials</a:t>
+              <a:t>Apple</a:t>
             </a:r>
           </a:p>
         </p:txBody>
@@ -5579,7 +5579,7 @@
                 </a:solidFill>
                 <a:latin typeface="Segoe UI"/>
               </a:rPr>
-              <a:t>82%</a:t>
+              <a:t>94%</a:t>
             </a:r>
           </a:p>
         </p:txBody>
@@ -5613,7 +5613,7 @@
                 </a:solidFill>
                 <a:latin typeface="Segoe UI"/>
               </a:rPr>
-              <a:t>above 200DMA · golden cross (50&gt;200) · MACD bearish</a:t>
+              <a:t>above 200DMA · golden cross (50&gt;200) · MACD bullish</a:t>
             </a:r>
           </a:p>
         </p:txBody>
@@ -5647,7 +5647,7 @@
                 </a:solidFill>
                 <a:latin typeface="Segoe UI"/>
               </a:rPr>
-              <a:t>DAX</a:t>
+              <a:t>TCS</a:t>
             </a:r>
           </a:p>
         </p:txBody>
@@ -5681,7 +5681,7 @@
                 </a:solidFill>
                 <a:latin typeface="Segoe UI"/>
               </a:rPr>
-              <a:t>BUY</a:t>
+              <a:t>STRONG BUY</a:t>
             </a:r>
           </a:p>
         </p:txBody>
@@ -5715,7 +5715,7 @@
                 </a:solidFill>
                 <a:latin typeface="Segoe UI"/>
               </a:rPr>
-              <a:t>90%</a:t>
+              <a:t>81%</a:t>
             </a:r>
           </a:p>
         </p:txBody>
@@ -5783,7 +5783,7 @@
                 </a:solidFill>
                 <a:latin typeface="Segoe UI"/>
               </a:rPr>
-              <a:t>Ethereum</a:t>
+              <a:t>DAX</a:t>
             </a:r>
           </a:p>
         </p:txBody>
@@ -5817,7 +5817,7 @@
                 </a:solidFill>
                 <a:latin typeface="Segoe UI"/>
               </a:rPr>
-              <a:t>BUY</a:t>
+              <a:t>STRONG BUY</a:t>
             </a:r>
           </a:p>
         </p:txBody>
@@ -5851,7 +5851,7 @@
                 </a:solidFill>
                 <a:latin typeface="Segoe UI"/>
               </a:rPr>
-              <a:t>72%</a:t>
+              <a:t>81%</a:t>
             </a:r>
           </a:p>
         </p:txBody>
@@ -5885,7 +5885,7 @@
                 </a:solidFill>
                 <a:latin typeface="Segoe UI"/>
               </a:rPr>
-              <a:t>above 200DMA · death cross (50&lt;200) · MACD bullish</a:t>
+              <a:t>above 200DMA · golden cross (50&gt;200) · MACD bearish</a:t>
             </a:r>
           </a:p>
         </p:txBody>
@@ -5919,7 +5919,7 @@
                 </a:solidFill>
                 <a:latin typeface="Segoe UI"/>
               </a:rPr>
-              <a:t>Bitcoin</a:t>
+              <a:t>US Energy</a:t>
             </a:r>
           </a:p>
         </p:txBody>
@@ -5987,7 +5987,7 @@
                 </a:solidFill>
                 <a:latin typeface="Segoe UI"/>
               </a:rPr>
-              <a:t>71%</a:t>
+              <a:t>93%</a:t>
             </a:r>
           </a:p>
         </p:txBody>
@@ -6021,7 +6021,7 @@
                 </a:solidFill>
                 <a:latin typeface="Segoe UI"/>
               </a:rPr>
-              <a:t>above 200DMA · death cross (50&lt;200) · MACD bullish</a:t>
+              <a:t>above 200DMA · golden cross (50&gt;200) · MACD bullish</a:t>
             </a:r>
           </a:p>
         </p:txBody>
@@ -6123,7 +6123,7 @@
                 </a:solidFill>
                 <a:latin typeface="Segoe UI"/>
               </a:rPr>
-              <a:t>70%</a:t>
+              <a:t>71%</a:t>
             </a:r>
           </a:p>
         </p:txBody>
@@ -6191,7 +6191,7 @@
                 </a:solidFill>
                 <a:latin typeface="Segoe UI"/>
               </a:rPr>
-              <a:t>Solana</a:t>
+              <a:t>Ethereum</a:t>
             </a:r>
           </a:p>
         </p:txBody>
@@ -6259,7 +6259,7 @@
                 </a:solidFill>
                 <a:latin typeface="Segoe UI"/>
               </a:rPr>
-              <a:t>70%</a:t>
+              <a:t>76%</a:t>
             </a:r>
           </a:p>
         </p:txBody>
@@ -6293,7 +6293,7 @@
                 </a:solidFill>
                 <a:latin typeface="Segoe UI"/>
               </a:rPr>
-              <a:t>above 200DMA · death cross (50&lt;200) · MACD bullish</a:t>
+              <a:t>above 200DMA · golden cross (50&gt;200) · MACD bearish</a:t>
             </a:r>
           </a:p>
         </p:txBody>
@@ -6395,7 +6395,7 @@
                 </a:solidFill>
                 <a:latin typeface="Segoe UI"/>
               </a:rPr>
-              <a:t>75%</a:t>
+              <a:t>76%</a:t>
             </a:r>
           </a:p>
         </p:txBody>
@@ -6463,7 +6463,7 @@
                 </a:solidFill>
                 <a:latin typeface="Segoe UI"/>
               </a:rPr>
-              <a:t>Apple</a:t>
+              <a:t>Copper</a:t>
             </a:r>
           </a:p>
         </p:txBody>
@@ -6531,7 +6531,7 @@
                 </a:solidFill>
                 <a:latin typeface="Segoe UI"/>
               </a:rPr>
-              <a:t>91%</a:t>
+              <a:t>80%</a:t>
             </a:r>
           </a:p>
         </p:txBody>
@@ -6565,7 +6565,7 @@
                 </a:solidFill>
                 <a:latin typeface="Segoe UI"/>
               </a:rPr>
-              <a:t>above 200DMA · golden cross (50&gt;200) · MACD bullish</a:t>
+              <a:t>above 200DMA · golden cross (50&gt;200) · MACD bearish</a:t>
             </a:r>
           </a:p>
         </p:txBody>
@@ -6659,7 +6659,7 @@
                 </a:solidFill>
                 <a:latin typeface="Segoe UI"/>
               </a:rPr>
-              <a:t>Base currency INR · USD/INR 95.47</a:t>
+              <a:t>Base currency INR · USD/INR 94.94</a:t>
             </a:r>
           </a:p>
         </p:txBody>
@@ -7067,7 +7067,7 @@
                 </a:solidFill>
                 <a:latin typeface="Segoe UI"/>
               </a:rPr>
-              <a:t>78,538</a:t>
+              <a:t>77,189</a:t>
             </a:r>
           </a:p>
         </p:txBody>
@@ -7101,7 +7101,7 @@
                 </a:solidFill>
                 <a:latin typeface="Segoe UI"/>
               </a:rPr>
-              <a:t>Rs 749,806</a:t>
+              <a:t>Rs 732,837</a:t>
             </a:r>
           </a:p>
         </p:txBody>
@@ -7135,7 +7135,7 @@
                 </a:solidFill>
                 <a:latin typeface="Segoe UI"/>
               </a:rPr>
-              <a:t>Rs 176,983</a:t>
+              <a:t>Rs 163,197</a:t>
             </a:r>
           </a:p>
         </p:txBody>
@@ -7169,7 +7169,7 @@
                 </a:solidFill>
                 <a:latin typeface="Segoe UI"/>
               </a:rPr>
-              <a:t>+30.9%</a:t>
+              <a:t>+28.6%</a:t>
             </a:r>
           </a:p>
         </p:txBody>
@@ -7199,11 +7199,11 @@
             <a:r>
               <a:rPr sz="1000" b="0">
                 <a:solidFill>
-                  <a:srgbClr val="22C55E"/>
-                </a:solidFill>
-                <a:latin typeface="Segoe UI"/>
-              </a:rPr>
-              <a:t>+0.9%</a:t>
+                  <a:srgbClr val="EF4444"/>
+                </a:solidFill>
+                <a:latin typeface="Segoe UI"/>
+              </a:rPr>
+              <a:t>-1.7%</a:t>
             </a:r>
           </a:p>
         </p:txBody>
@@ -7339,7 +7339,7 @@
                 </a:solidFill>
                 <a:latin typeface="Segoe UI"/>
               </a:rPr>
-              <a:t>4,488</a:t>
+              <a:t>4,371</a:t>
             </a:r>
           </a:p>
         </p:txBody>
@@ -7373,7 +7373,7 @@
                 </a:solidFill>
                 <a:latin typeface="Segoe UI"/>
               </a:rPr>
-              <a:t>Rs 428,481</a:t>
+              <a:t>Rs 414,964</a:t>
             </a:r>
           </a:p>
         </p:txBody>
@@ -7407,7 +7407,7 @@
                 </a:solidFill>
                 <a:latin typeface="Segoe UI"/>
               </a:rPr>
-              <a:t>Rs 208,899</a:t>
+              <a:t>Rs 196,602</a:t>
             </a:r>
           </a:p>
         </p:txBody>
@@ -7441,7 +7441,7 @@
                 </a:solidFill>
                 <a:latin typeface="Segoe UI"/>
               </a:rPr>
-              <a:t>+95.1%</a:t>
+              <a:t>+90.0%</a:t>
             </a:r>
           </a:p>
         </p:txBody>
@@ -7611,7 +7611,7 @@
                 </a:solidFill>
                 <a:latin typeface="Segoe UI"/>
               </a:rPr>
-              <a:t>317</a:t>
+              <a:t>325</a:t>
             </a:r>
           </a:p>
         </p:txBody>
@@ -7645,7 +7645,7 @@
                 </a:solidFill>
                 <a:latin typeface="Segoe UI"/>
               </a:rPr>
-              <a:t>Rs 302,498</a:t>
+              <a:t>Rs 308,678</a:t>
             </a:r>
           </a:p>
         </p:txBody>
@@ -7679,7 +7679,7 @@
                 </a:solidFill>
                 <a:latin typeface="Segoe UI"/>
               </a:rPr>
-              <a:t>Rs 125,878</a:t>
+              <a:t>Rs 133,039</a:t>
             </a:r>
           </a:p>
         </p:txBody>
@@ -7713,7 +7713,7 @@
                 </a:solidFill>
                 <a:latin typeface="Segoe UI"/>
               </a:rPr>
-              <a:t>+71.3%</a:t>
+              <a:t>+75.8%</a:t>
             </a:r>
           </a:p>
         </p:txBody>
@@ -7883,7 +7883,7 @@
                 </a:solidFill>
                 <a:latin typeface="Segoe UI"/>
               </a:rPr>
-              <a:t>221</a:t>
+              <a:t>217</a:t>
             </a:r>
           </a:p>
         </p:txBody>
@@ -7917,7 +7917,7 @@
                 </a:solidFill>
                 <a:latin typeface="Segoe UI"/>
               </a:rPr>
-              <a:t>Rs 168,624</a:t>
+              <a:t>Rs 165,150</a:t>
             </a:r>
           </a:p>
         </p:txBody>
@@ -7951,7 +7951,7 @@
                 </a:solidFill>
                 <a:latin typeface="Segoe UI"/>
               </a:rPr>
-              <a:t>Rs -175,070</a:t>
+              <a:t>Rs -176,634</a:t>
             </a:r>
           </a:p>
         </p:txBody>
@@ -7985,7 +7985,7 @@
                 </a:solidFill>
                 <a:latin typeface="Segoe UI"/>
               </a:rPr>
-              <a:t>-50.9%</a:t>
+              <a:t>-51.7%</a:t>
             </a:r>
           </a:p>
         </p:txBody>
@@ -8155,7 +8155,7 @@
                 </a:solidFill>
                 <a:latin typeface="Segoe UI"/>
               </a:rPr>
-              <a:t>1,144</a:t>
+              <a:t>1,156</a:t>
             </a:r>
           </a:p>
         </p:txBody>
@@ -8189,7 +8189,7 @@
                 </a:solidFill>
                 <a:latin typeface="Segoe UI"/>
               </a:rPr>
-              <a:t>Rs 91,520</a:t>
+              <a:t>Rs 92,480</a:t>
             </a:r>
           </a:p>
         </p:txBody>
@@ -8223,7 +8223,7 @@
                 </a:solidFill>
                 <a:latin typeface="Segoe UI"/>
               </a:rPr>
-              <a:t>Rs -20,480</a:t>
+              <a:t>Rs -19,520</a:t>
             </a:r>
           </a:p>
         </p:txBody>
@@ -8257,7 +8257,7 @@
                 </a:solidFill>
                 <a:latin typeface="Segoe UI"/>
               </a:rPr>
-              <a:t>-18.3%</a:t>
+              <a:t>-17.4%</a:t>
             </a:r>
           </a:p>
         </p:txBody>
@@ -8427,7 +8427,7 @@
                 </a:solidFill>
                 <a:latin typeface="Segoe UI"/>
               </a:rPr>
-              <a:t>1,287</a:t>
+              <a:t>1,309</a:t>
             </a:r>
           </a:p>
         </p:txBody>
@@ -8461,7 +8461,7 @@
                 </a:solidFill>
                 <a:latin typeface="Segoe UI"/>
               </a:rPr>
-              <a:t>Rs 64,350</a:t>
+              <a:t>Rs 65,450</a:t>
             </a:r>
           </a:p>
         </p:txBody>
@@ -8495,7 +8495,7 @@
                 </a:solidFill>
                 <a:latin typeface="Segoe UI"/>
               </a:rPr>
-              <a:t>Rs -58,150</a:t>
+              <a:t>Rs -57,050</a:t>
             </a:r>
           </a:p>
         </p:txBody>
@@ -8529,7 +8529,7 @@
                 </a:solidFill>
                 <a:latin typeface="Segoe UI"/>
               </a:rPr>
-              <a:t>-47.5%</a:t>
+              <a:t>-46.6%</a:t>
             </a:r>
           </a:p>
         </p:txBody>
@@ -8699,7 +8699,7 @@
                 </a:solidFill>
                 <a:latin typeface="Segoe UI"/>
               </a:rPr>
-              <a:t>2,342</a:t>
+              <a:t>2,369</a:t>
             </a:r>
           </a:p>
         </p:txBody>
@@ -8733,7 +8733,7 @@
                 </a:solidFill>
                 <a:latin typeface="Segoe UI"/>
               </a:rPr>
-              <a:t>Rs 58,550</a:t>
+              <a:t>Rs 59,225</a:t>
             </a:r>
           </a:p>
         </p:txBody>
@@ -8767,7 +8767,7 @@
                 </a:solidFill>
                 <a:latin typeface="Segoe UI"/>
               </a:rPr>
-              <a:t>Rs -31,450</a:t>
+              <a:t>Rs -30,775</a:t>
             </a:r>
           </a:p>
         </p:txBody>
@@ -8801,7 +8801,7 @@
                 </a:solidFill>
                 <a:latin typeface="Segoe UI"/>
               </a:rPr>
-              <a:t>-34.9%</a:t>
+              <a:t>-34.2%</a:t>
             </a:r>
           </a:p>
         </p:txBody>
@@ -8971,7 +8971,7 @@
                 </a:solidFill>
                 <a:latin typeface="Segoe UI"/>
               </a:rPr>
-              <a:t>720</a:t>
+              <a:t>712</a:t>
             </a:r>
           </a:p>
         </p:txBody>
@@ -9005,7 +9005,7 @@
                 </a:solidFill>
                 <a:latin typeface="Segoe UI"/>
               </a:rPr>
-              <a:t>Rs 43,218</a:t>
+              <a:t>Rs 42,714</a:t>
             </a:r>
           </a:p>
         </p:txBody>
@@ -9039,7 +9039,7 @@
                 </a:solidFill>
                 <a:latin typeface="Segoe UI"/>
               </a:rPr>
-              <a:t>Rs -47,982</a:t>
+              <a:t>Rs -48,486</a:t>
             </a:r>
           </a:p>
         </p:txBody>
@@ -9073,7 +9073,7 @@
                 </a:solidFill>
                 <a:latin typeface="Segoe UI"/>
               </a:rPr>
-              <a:t>-52.6%</a:t>
+              <a:t>-53.2%</a:t>
             </a:r>
           </a:p>
         </p:txBody>
@@ -9141,7 +9141,7 @@
                 </a:solidFill>
                 <a:latin typeface="Segoe UI"/>
               </a:rPr>
-              <a:t>Total Rs 1,907,046 | P&amp;L Rs 178,628 (+10.3%) | Sharpe 0.05 | Vol 19.33% | VaR95 -1.9%/day</a:t>
+              <a:t>Total Rs 1,881,498 | P&amp;L Rs 160,373 (+9.3%) | Sharpe -0.02 | Vol 19.2% | VaR95 -1.89%/day</a:t>
             </a:r>
           </a:p>
         </p:txBody>

--- a/docs/pmr_daily.pptx
+++ b/docs/pmr_daily.pptx
@@ -3197,7 +3197,7 @@
                 </a:solidFill>
                 <a:latin typeface="Segoe UI"/>
               </a:rPr>
-              <a:t>Wednesday, 02 Sep 2026 08:51 SGT</a:t>
+              <a:t>Thursday, 03 Sep 2026 08:58 SGT</a:t>
             </a:r>
           </a:p>
         </p:txBody>
@@ -3265,7 +3265,7 @@
                 </a:solidFill>
                 <a:latin typeface="Segoe UI"/>
               </a:rPr>
-              <a:t>RAG 12R / 18A / 16G   |   69.6% above 200DMA   |   Portfolio Rs 1,881,498 (+9.3%)</a:t>
+              <a:t>RAG 12R / 18A / 16G   |   69.6% above 200DMA   |   Portfolio Rs 1,884,552 (+9.5%)</a:t>
             </a:r>
           </a:p>
         </p:txBody>
@@ -3529,7 +3529,7 @@
                 </a:solidFill>
                 <a:latin typeface="Segoe UI"/>
               </a:rPr>
-              <a:t>+6.9%</a:t>
+              <a:t>+5.8%</a:t>
             </a:r>
           </a:p>
         </p:txBody>
@@ -3655,7 +3655,7 @@
                 </a:solidFill>
                 <a:latin typeface="Segoe UI"/>
               </a:rPr>
-              <a:t>+4.3%</a:t>
+              <a:t>+4.2%</a:t>
             </a:r>
           </a:p>
         </p:txBody>
@@ -3713,7 +3713,7 @@
                 </a:solidFill>
                 <a:latin typeface="Segoe UI"/>
               </a:rPr>
-              <a:t>Bharti Airtel</a:t>
+              <a:t>Reliance</a:t>
             </a:r>
           </a:p>
         </p:txBody>
@@ -3747,7 +3747,7 @@
                 </a:solidFill>
                 <a:latin typeface="Segoe UI"/>
               </a:rPr>
-              <a:t>BHARTIARTL.NS · AMBER</a:t>
+              <a:t>RELIANCE.NS · AMBER</a:t>
             </a:r>
           </a:p>
         </p:txBody>
@@ -3781,7 +3781,7 @@
                 </a:solidFill>
                 <a:latin typeface="Segoe UI"/>
               </a:rPr>
-              <a:t>+3.6%</a:t>
+              <a:t>+2.8%</a:t>
             </a:r>
           </a:p>
         </p:txBody>
@@ -3839,7 +3839,7 @@
                 </a:solidFill>
                 <a:latin typeface="Segoe UI"/>
               </a:rPr>
-              <a:t>Apple</a:t>
+              <a:t>Bharti Airtel</a:t>
             </a:r>
           </a:p>
         </p:txBody>
@@ -3869,11 +3869,11 @@
             <a:r>
               <a:rPr sz="900" b="0">
                 <a:solidFill>
-                  <a:srgbClr val="22C55E"/>
-                </a:solidFill>
-                <a:latin typeface="Segoe UI"/>
-              </a:rPr>
-              <a:t>AAPL · GREEN</a:t>
+                  <a:srgbClr val="F59E0B"/>
+                </a:solidFill>
+                <a:latin typeface="Segoe UI"/>
+              </a:rPr>
+              <a:t>BHARTIARTL.NS · AMBER</a:t>
             </a:r>
           </a:p>
         </p:txBody>
@@ -3907,7 +3907,7 @@
                 </a:solidFill>
                 <a:latin typeface="Segoe UI"/>
               </a:rPr>
-              <a:t>+2.6%</a:t>
+              <a:t>+2.8%</a:t>
             </a:r>
           </a:p>
         </p:txBody>
@@ -3965,7 +3965,7 @@
                 </a:solidFill>
                 <a:latin typeface="Segoe UI"/>
               </a:rPr>
-              <a:t>Reliance</a:t>
+              <a:t>Natural Gas</a:t>
             </a:r>
           </a:p>
         </p:txBody>
@@ -3995,11 +3995,11 @@
             <a:r>
               <a:rPr sz="900" b="0">
                 <a:solidFill>
-                  <a:srgbClr val="F59E0B"/>
-                </a:solidFill>
-                <a:latin typeface="Segoe UI"/>
-              </a:rPr>
-              <a:t>RELIANCE.NS · AMBER</a:t>
+                  <a:srgbClr val="EF4444"/>
+                </a:solidFill>
+                <a:latin typeface="Segoe UI"/>
+              </a:rPr>
+              <a:t>NG=F · RED</a:t>
             </a:r>
           </a:p>
         </p:txBody>
@@ -4033,7 +4033,7 @@
                 </a:solidFill>
                 <a:latin typeface="Segoe UI"/>
               </a:rPr>
-              <a:t>+2.5%</a:t>
+              <a:t>+2.7%</a:t>
             </a:r>
           </a:p>
         </p:txBody>
@@ -4125,7 +4125,7 @@
                 </a:solidFill>
                 <a:latin typeface="Segoe UI"/>
               </a:rPr>
-              <a:t>Tesla</a:t>
+              <a:t>Ethereum</a:t>
             </a:r>
           </a:p>
         </p:txBody>
@@ -4155,11 +4155,11 @@
             <a:r>
               <a:rPr sz="900" b="0">
                 <a:solidFill>
-                  <a:srgbClr val="EF4444"/>
-                </a:solidFill>
-                <a:latin typeface="Segoe UI"/>
-              </a:rPr>
-              <a:t>TSLA · RED</a:t>
+                  <a:srgbClr val="F59E0B"/>
+                </a:solidFill>
+                <a:latin typeface="Segoe UI"/>
+              </a:rPr>
+              <a:t>ETH-USD · AMBER</a:t>
             </a:r>
           </a:p>
         </p:txBody>
@@ -4193,7 +4193,7 @@
                 </a:solidFill>
                 <a:latin typeface="Segoe UI"/>
               </a:rPr>
-              <a:t>-3.2%</a:t>
+              <a:t>-3.5%</a:t>
             </a:r>
           </a:p>
         </p:txBody>
@@ -4251,7 +4251,7 @@
                 </a:solidFill>
                 <a:latin typeface="Segoe UI"/>
               </a:rPr>
-              <a:t>Solana</a:t>
+              <a:t>Nikkei 225</a:t>
             </a:r>
           </a:p>
         </p:txBody>
@@ -4281,11 +4281,11 @@
             <a:r>
               <a:rPr sz="900" b="0">
                 <a:solidFill>
-                  <a:srgbClr val="EF4444"/>
-                </a:solidFill>
-                <a:latin typeface="Segoe UI"/>
-              </a:rPr>
-              <a:t>SOL-USD · RED</a:t>
+                  <a:srgbClr val="F59E0B"/>
+                </a:solidFill>
+                <a:latin typeface="Segoe UI"/>
+              </a:rPr>
+              <a:t>^N225 · AMBER</a:t>
             </a:r>
           </a:p>
         </p:txBody>
@@ -4377,7 +4377,7 @@
                 </a:solidFill>
                 <a:latin typeface="Segoe UI"/>
               </a:rPr>
-              <a:t>Nikkei 225</a:t>
+              <a:t>Tesla</a:t>
             </a:r>
           </a:p>
         </p:txBody>
@@ -4407,11 +4407,11 @@
             <a:r>
               <a:rPr sz="900" b="0">
                 <a:solidFill>
-                  <a:srgbClr val="F59E0B"/>
-                </a:solidFill>
-                <a:latin typeface="Segoe UI"/>
-              </a:rPr>
-              <a:t>^N225 · AMBER</a:t>
+                  <a:srgbClr val="EF4444"/>
+                </a:solidFill>
+                <a:latin typeface="Segoe UI"/>
+              </a:rPr>
+              <a:t>TSLA · RED</a:t>
             </a:r>
           </a:p>
         </p:txBody>
@@ -4445,7 +4445,7 @@
                 </a:solidFill>
                 <a:latin typeface="Segoe UI"/>
               </a:rPr>
-              <a:t>-2.6%</a:t>
+              <a:t>-3.2%</a:t>
             </a:r>
           </a:p>
         </p:txBody>
@@ -4503,7 +4503,7 @@
                 </a:solidFill>
                 <a:latin typeface="Segoe UI"/>
               </a:rPr>
-              <a:t>Ethereum</a:t>
+              <a:t>Solana</a:t>
             </a:r>
           </a:p>
         </p:txBody>
@@ -4533,11 +4533,11 @@
             <a:r>
               <a:rPr sz="900" b="0">
                 <a:solidFill>
-                  <a:srgbClr val="F59E0B"/>
-                </a:solidFill>
-                <a:latin typeface="Segoe UI"/>
-              </a:rPr>
-              <a:t>ETH-USD · AMBER</a:t>
+                  <a:srgbClr val="EF4444"/>
+                </a:solidFill>
+                <a:latin typeface="Segoe UI"/>
+              </a:rPr>
+              <a:t>SOL-USD · RED</a:t>
             </a:r>
           </a:p>
         </p:txBody>
@@ -4571,7 +4571,7 @@
                 </a:solidFill>
                 <a:latin typeface="Segoe UI"/>
               </a:rPr>
-              <a:t>-2.4%</a:t>
+              <a:t>-3.2%</a:t>
             </a:r>
           </a:p>
         </p:txBody>
@@ -4629,7 +4629,7 @@
                 </a:solidFill>
                 <a:latin typeface="Segoe UI"/>
               </a:rPr>
-              <a:t>Silver</a:t>
+              <a:t>TCS</a:t>
             </a:r>
           </a:p>
         </p:txBody>
@@ -4663,7 +4663,7 @@
                 </a:solidFill>
                 <a:latin typeface="Segoe UI"/>
               </a:rPr>
-              <a:t>SI=F · RED</a:t>
+              <a:t>TCS.NS · RED</a:t>
             </a:r>
           </a:p>
         </p:txBody>
@@ -4697,7 +4697,7 @@
                 </a:solidFill>
                 <a:latin typeface="Segoe UI"/>
               </a:rPr>
-              <a:t>-2.3%</a:t>
+              <a:t>-2.1%</a:t>
             </a:r>
           </a:p>
         </p:txBody>
@@ -4967,7 +4967,7 @@
                 </a:solidFill>
                 <a:latin typeface="Segoe UI"/>
               </a:rPr>
-              <a:t>Microsoft</a:t>
+              <a:t>NIFTY IT</a:t>
             </a:r>
           </a:p>
         </p:txBody>
@@ -5069,7 +5069,7 @@
                 </a:solidFill>
                 <a:latin typeface="Segoe UI"/>
               </a:rPr>
-              <a:t>above 200DMA · golden cross (50&gt;200) · MACD bearish</a:t>
+              <a:t>above 200DMA · golden cross (50&gt;200) · MACD bullish</a:t>
             </a:r>
           </a:p>
         </p:txBody>
@@ -5103,7 +5103,7 @@
                 </a:solidFill>
                 <a:latin typeface="Segoe UI"/>
               </a:rPr>
-              <a:t>ICICI Bank</a:t>
+              <a:t>Microsoft</a:t>
             </a:r>
           </a:p>
         </p:txBody>
@@ -5171,7 +5171,7 @@
                 </a:solidFill>
                 <a:latin typeface="Segoe UI"/>
               </a:rPr>
-              <a:t>95%</a:t>
+              <a:t>84%</a:t>
             </a:r>
           </a:p>
         </p:txBody>
@@ -5205,7 +5205,7 @@
                 </a:solidFill>
                 <a:latin typeface="Segoe UI"/>
               </a:rPr>
-              <a:t>above 200DMA · golden cross (50&gt;200) · MACD bullish</a:t>
+              <a:t>above 200DMA · golden cross (50&gt;200) · MACD bearish</a:t>
             </a:r>
           </a:p>
         </p:txBody>
@@ -5239,7 +5239,7 @@
                 </a:solidFill>
                 <a:latin typeface="Segoe UI"/>
               </a:rPr>
-              <a:t>NIFTY IT</a:t>
+              <a:t>Copper</a:t>
             </a:r>
           </a:p>
         </p:txBody>
@@ -5307,7 +5307,7 @@
                 </a:solidFill>
                 <a:latin typeface="Segoe UI"/>
               </a:rPr>
-              <a:t>83%</a:t>
+              <a:t>82%</a:t>
             </a:r>
           </a:p>
         </p:txBody>
@@ -5341,7 +5341,7 @@
                 </a:solidFill>
                 <a:latin typeface="Segoe UI"/>
               </a:rPr>
-              <a:t>above 200DMA · golden cross (50&gt;200) · MACD bullish</a:t>
+              <a:t>above 200DMA · golden cross (50&gt;200) · MACD bearish</a:t>
             </a:r>
           </a:p>
         </p:txBody>
@@ -5375,7 +5375,7 @@
                 </a:solidFill>
                 <a:latin typeface="Segoe UI"/>
               </a:rPr>
-              <a:t>Solana</a:t>
+              <a:t>Apple</a:t>
             </a:r>
           </a:p>
         </p:txBody>
@@ -5443,7 +5443,7 @@
                 </a:solidFill>
                 <a:latin typeface="Segoe UI"/>
               </a:rPr>
-              <a:t>82%</a:t>
+              <a:t>93%</a:t>
             </a:r>
           </a:p>
         </p:txBody>
@@ -5511,7 +5511,7 @@
                 </a:solidFill>
                 <a:latin typeface="Segoe UI"/>
               </a:rPr>
-              <a:t>Apple</a:t>
+              <a:t>ICICI Bank</a:t>
             </a:r>
           </a:p>
         </p:txBody>
@@ -5579,7 +5579,7 @@
                 </a:solidFill>
                 <a:latin typeface="Segoe UI"/>
               </a:rPr>
-              <a:t>94%</a:t>
+              <a:t>92%</a:t>
             </a:r>
           </a:p>
         </p:txBody>
@@ -5715,7 +5715,7 @@
                 </a:solidFill>
                 <a:latin typeface="Segoe UI"/>
               </a:rPr>
-              <a:t>81%</a:t>
+              <a:t>80%</a:t>
             </a:r>
           </a:p>
         </p:txBody>
@@ -5783,7 +5783,7 @@
                 </a:solidFill>
                 <a:latin typeface="Segoe UI"/>
               </a:rPr>
-              <a:t>DAX</a:t>
+              <a:t>US Energy</a:t>
             </a:r>
           </a:p>
         </p:txBody>
@@ -5817,7 +5817,7 @@
                 </a:solidFill>
                 <a:latin typeface="Segoe UI"/>
               </a:rPr>
-              <a:t>STRONG BUY</a:t>
+              <a:t>BUY</a:t>
             </a:r>
           </a:p>
         </p:txBody>
@@ -5851,7 +5851,7 @@
                 </a:solidFill>
                 <a:latin typeface="Segoe UI"/>
               </a:rPr>
-              <a:t>81%</a:t>
+              <a:t>93%</a:t>
             </a:r>
           </a:p>
         </p:txBody>
@@ -5885,7 +5885,7 @@
                 </a:solidFill>
                 <a:latin typeface="Segoe UI"/>
               </a:rPr>
-              <a:t>above 200DMA · golden cross (50&gt;200) · MACD bearish</a:t>
+              <a:t>above 200DMA · golden cross (50&gt;200) · MACD bullish</a:t>
             </a:r>
           </a:p>
         </p:txBody>
@@ -5919,7 +5919,7 @@
                 </a:solidFill>
                 <a:latin typeface="Segoe UI"/>
               </a:rPr>
-              <a:t>US Energy</a:t>
+              <a:t>Crude Oil WTI</a:t>
             </a:r>
           </a:p>
         </p:txBody>
@@ -5987,7 +5987,7 @@
                 </a:solidFill>
                 <a:latin typeface="Segoe UI"/>
               </a:rPr>
-              <a:t>93%</a:t>
+              <a:t>71%</a:t>
             </a:r>
           </a:p>
         </p:txBody>
@@ -6021,7 +6021,7 @@
                 </a:solidFill>
                 <a:latin typeface="Segoe UI"/>
               </a:rPr>
-              <a:t>above 200DMA · golden cross (50&gt;200) · MACD bullish</a:t>
+              <a:t>above 200DMA · death cross (50&lt;200) · MACD bullish</a:t>
             </a:r>
           </a:p>
         </p:txBody>
@@ -6327,7 +6327,7 @@
                 </a:solidFill>
                 <a:latin typeface="Segoe UI"/>
               </a:rPr>
-              <a:t>Hang Seng</a:t>
+              <a:t>Solana</a:t>
             </a:r>
           </a:p>
         </p:txBody>
@@ -6395,7 +6395,7 @@
                 </a:solidFill>
                 <a:latin typeface="Segoe UI"/>
               </a:rPr>
-              <a:t>76%</a:t>
+              <a:t>69%</a:t>
             </a:r>
           </a:p>
         </p:txBody>
@@ -6463,7 +6463,7 @@
                 </a:solidFill>
                 <a:latin typeface="Segoe UI"/>
               </a:rPr>
-              <a:t>Copper</a:t>
+              <a:t>Nvidia</a:t>
             </a:r>
           </a:p>
         </p:txBody>
@@ -6531,7 +6531,7 @@
                 </a:solidFill>
                 <a:latin typeface="Segoe UI"/>
               </a:rPr>
-              <a:t>80%</a:t>
+              <a:t>79%</a:t>
             </a:r>
           </a:p>
         </p:txBody>
@@ -6659,7 +6659,7 @@
                 </a:solidFill>
                 <a:latin typeface="Segoe UI"/>
               </a:rPr>
-              <a:t>Base currency INR · USD/INR 94.94</a:t>
+              <a:t>Base currency INR · USD/INR 94.96</a:t>
             </a:r>
           </a:p>
         </p:txBody>
@@ -7067,7 +7067,7 @@
                 </a:solidFill>
                 <a:latin typeface="Segoe UI"/>
               </a:rPr>
-              <a:t>77,189</a:t>
+              <a:t>77,093</a:t>
             </a:r>
           </a:p>
         </p:txBody>
@@ -7101,7 +7101,7 @@
                 </a:solidFill>
                 <a:latin typeface="Segoe UI"/>
               </a:rPr>
-              <a:t>Rs 732,837</a:t>
+              <a:t>Rs 732,041</a:t>
             </a:r>
           </a:p>
         </p:txBody>
@@ -7135,7 +7135,7 @@
                 </a:solidFill>
                 <a:latin typeface="Segoe UI"/>
               </a:rPr>
-              <a:t>Rs 163,197</a:t>
+              <a:t>Rs 162,310</a:t>
             </a:r>
           </a:p>
         </p:txBody>
@@ -7169,7 +7169,7 @@
                 </a:solidFill>
                 <a:latin typeface="Segoe UI"/>
               </a:rPr>
-              <a:t>+28.6%</a:t>
+              <a:t>+28.5%</a:t>
             </a:r>
           </a:p>
         </p:txBody>
@@ -7203,7 +7203,7 @@
                 </a:solidFill>
                 <a:latin typeface="Segoe UI"/>
               </a:rPr>
-              <a:t>-1.7%</a:t>
+              <a:t>-0.4%</a:t>
             </a:r>
           </a:p>
         </p:txBody>
@@ -7339,7 +7339,7 @@
                 </a:solidFill>
                 <a:latin typeface="Segoe UI"/>
               </a:rPr>
-              <a:t>4,371</a:t>
+              <a:t>4,434</a:t>
             </a:r>
           </a:p>
         </p:txBody>
@@ -7373,7 +7373,7 @@
                 </a:solidFill>
                 <a:latin typeface="Segoe UI"/>
               </a:rPr>
-              <a:t>Rs 414,964</a:t>
+              <a:t>Rs 421,003</a:t>
             </a:r>
           </a:p>
         </p:txBody>
@@ -7407,7 +7407,7 @@
                 </a:solidFill>
                 <a:latin typeface="Segoe UI"/>
               </a:rPr>
-              <a:t>Rs 196,602</a:t>
+              <a:t>Rs 202,606</a:t>
             </a:r>
           </a:p>
         </p:txBody>
@@ -7441,7 +7441,7 @@
                 </a:solidFill>
                 <a:latin typeface="Segoe UI"/>
               </a:rPr>
-              <a:t>+90.0%</a:t>
+              <a:t>+92.8%</a:t>
             </a:r>
           </a:p>
         </p:txBody>
@@ -7645,7 +7645,7 @@
                 </a:solidFill>
                 <a:latin typeface="Segoe UI"/>
               </a:rPr>
-              <a:t>Rs 308,678</a:t>
+              <a:t>Rs 308,728</a:t>
             </a:r>
           </a:p>
         </p:txBody>
@@ -7679,7 +7679,7 @@
                 </a:solidFill>
                 <a:latin typeface="Segoe UI"/>
               </a:rPr>
-              <a:t>Rs 133,039</a:t>
+              <a:t>Rs 133,061</a:t>
             </a:r>
           </a:p>
         </p:txBody>
@@ -7917,7 +7917,7 @@
                 </a:solidFill>
                 <a:latin typeface="Segoe UI"/>
               </a:rPr>
-              <a:t>Rs 165,150</a:t>
+              <a:t>Rs 165,176</a:t>
             </a:r>
           </a:p>
         </p:txBody>
@@ -7951,7 +7951,7 @@
                 </a:solidFill>
                 <a:latin typeface="Segoe UI"/>
               </a:rPr>
-              <a:t>Rs -176,634</a:t>
+              <a:t>Rs -176,662</a:t>
             </a:r>
           </a:p>
         </p:txBody>
@@ -8155,7 +8155,7 @@
                 </a:solidFill>
                 <a:latin typeface="Segoe UI"/>
               </a:rPr>
-              <a:t>1,156</a:t>
+              <a:t>1,140</a:t>
             </a:r>
           </a:p>
         </p:txBody>
@@ -8189,7 +8189,7 @@
                 </a:solidFill>
                 <a:latin typeface="Segoe UI"/>
               </a:rPr>
-              <a:t>Rs 92,480</a:t>
+              <a:t>Rs 91,200</a:t>
             </a:r>
           </a:p>
         </p:txBody>
@@ -8223,7 +8223,7 @@
                 </a:solidFill>
                 <a:latin typeface="Segoe UI"/>
               </a:rPr>
-              <a:t>Rs -19,520</a:t>
+              <a:t>Rs -20,800</a:t>
             </a:r>
           </a:p>
         </p:txBody>
@@ -8257,7 +8257,7 @@
                 </a:solidFill>
                 <a:latin typeface="Segoe UI"/>
               </a:rPr>
-              <a:t>-17.4%</a:t>
+              <a:t>-18.6%</a:t>
             </a:r>
           </a:p>
         </p:txBody>
@@ -8427,7 +8427,7 @@
                 </a:solidFill>
                 <a:latin typeface="Segoe UI"/>
               </a:rPr>
-              <a:t>1,309</a:t>
+              <a:t>1,313</a:t>
             </a:r>
           </a:p>
         </p:txBody>
@@ -8461,7 +8461,7 @@
                 </a:solidFill>
                 <a:latin typeface="Segoe UI"/>
               </a:rPr>
-              <a:t>Rs 65,450</a:t>
+              <a:t>Rs 65,655</a:t>
             </a:r>
           </a:p>
         </p:txBody>
@@ -8495,7 +8495,7 @@
                 </a:solidFill>
                 <a:latin typeface="Segoe UI"/>
               </a:rPr>
-              <a:t>Rs -57,050</a:t>
+              <a:t>Rs -56,845</a:t>
             </a:r>
           </a:p>
         </p:txBody>
@@ -8529,7 +8529,7 @@
                 </a:solidFill>
                 <a:latin typeface="Segoe UI"/>
               </a:rPr>
-              <a:t>-46.6%</a:t>
+              <a:t>-46.4%</a:t>
             </a:r>
           </a:p>
         </p:txBody>
@@ -8699,7 +8699,7 @@
                 </a:solidFill>
                 <a:latin typeface="Segoe UI"/>
               </a:rPr>
-              <a:t>2,369</a:t>
+              <a:t>2,348</a:t>
             </a:r>
           </a:p>
         </p:txBody>
@@ -8733,7 +8733,7 @@
                 </a:solidFill>
                 <a:latin typeface="Segoe UI"/>
               </a:rPr>
-              <a:t>Rs 59,225</a:t>
+              <a:t>Rs 58,700</a:t>
             </a:r>
           </a:p>
         </p:txBody>
@@ -8767,7 +8767,7 @@
                 </a:solidFill>
                 <a:latin typeface="Segoe UI"/>
               </a:rPr>
-              <a:t>Rs -30,775</a:t>
+              <a:t>Rs -31,300</a:t>
             </a:r>
           </a:p>
         </p:txBody>
@@ -8801,7 +8801,7 @@
                 </a:solidFill>
                 <a:latin typeface="Segoe UI"/>
               </a:rPr>
-              <a:t>-34.2%</a:t>
+              <a:t>-34.8%</a:t>
             </a:r>
           </a:p>
         </p:txBody>
@@ -8971,7 +8971,7 @@
                 </a:solidFill>
                 <a:latin typeface="Segoe UI"/>
               </a:rPr>
-              <a:t>712</a:t>
+              <a:t>701</a:t>
             </a:r>
           </a:p>
         </p:txBody>
@@ -9005,7 +9005,7 @@
                 </a:solidFill>
                 <a:latin typeface="Segoe UI"/>
               </a:rPr>
-              <a:t>Rs 42,714</a:t>
+              <a:t>Rs 42,048</a:t>
             </a:r>
           </a:p>
         </p:txBody>
@@ -9039,7 +9039,7 @@
                 </a:solidFill>
                 <a:latin typeface="Segoe UI"/>
               </a:rPr>
-              <a:t>Rs -48,486</a:t>
+              <a:t>Rs -49,152</a:t>
             </a:r>
           </a:p>
         </p:txBody>
@@ -9073,7 +9073,7 @@
                 </a:solidFill>
                 <a:latin typeface="Segoe UI"/>
               </a:rPr>
-              <a:t>-53.2%</a:t>
+              <a:t>-53.9%</a:t>
             </a:r>
           </a:p>
         </p:txBody>
@@ -9141,7 +9141,7 @@
                 </a:solidFill>
                 <a:latin typeface="Segoe UI"/>
               </a:rPr>
-              <a:t>Total Rs 1,881,498 | P&amp;L Rs 160,373 (+9.3%) | Sharpe -0.02 | Vol 19.2% | VaR95 -1.89%/day</a:t>
+              <a:t>Total Rs 1,884,552 | P&amp;L Rs 163,218 (+9.5%) | Sharpe -0.0 | Vol 19.19% | VaR95 -1.88%/day</a:t>
             </a:r>
           </a:p>
         </p:txBody>

--- a/docs/pmr_daily.pptx
+++ b/docs/pmr_daily.pptx
@@ -3197,7 +3197,7 @@
                 </a:solidFill>
                 <a:latin typeface="Segoe UI"/>
               </a:rPr>
-              <a:t>Thursday, 03 Sep 2026 08:58 SGT</a:t>
+              <a:t>Friday, 04 Sep 2026 08:49 SGT</a:t>
             </a:r>
           </a:p>
         </p:txBody>
@@ -3265,7 +3265,7 @@
                 </a:solidFill>
                 <a:latin typeface="Segoe UI"/>
               </a:rPr>
-              <a:t>RAG 12R / 18A / 16G   |   69.6% above 200DMA   |   Portfolio Rs 1,884,552 (+9.5%)</a:t>
+              <a:t>RAG 10R / 21A / 15G   |   60.9% above 200DMA   |   Portfolio Rs 1,926,452 (+12.3%)</a:t>
             </a:r>
           </a:p>
         </p:txBody>
@@ -3529,7 +3529,7 @@
                 </a:solidFill>
                 <a:latin typeface="Segoe UI"/>
               </a:rPr>
-              <a:t>+5.8%</a:t>
+              <a:t>+6.7%</a:t>
             </a:r>
           </a:p>
         </p:txBody>
@@ -3587,7 +3587,7 @@
                 </a:solidFill>
                 <a:latin typeface="Segoe UI"/>
               </a:rPr>
-              <a:t>ITC</a:t>
+              <a:t>Bitcoin</a:t>
             </a:r>
           </a:p>
         </p:txBody>
@@ -3617,11 +3617,11 @@
             <a:r>
               <a:rPr sz="900" b="0">
                 <a:solidFill>
-                  <a:srgbClr val="EF4444"/>
-                </a:solidFill>
-                <a:latin typeface="Segoe UI"/>
-              </a:rPr>
-              <a:t>ITC.NS · RED</a:t>
+                  <a:srgbClr val="F59E0B"/>
+                </a:solidFill>
+                <a:latin typeface="Segoe UI"/>
+              </a:rPr>
+              <a:t>BTC-USD · AMBER</a:t>
             </a:r>
           </a:p>
         </p:txBody>
@@ -3655,7 +3655,7 @@
                 </a:solidFill>
                 <a:latin typeface="Segoe UI"/>
               </a:rPr>
-              <a:t>+4.2%</a:t>
+              <a:t>+3.3%</a:t>
             </a:r>
           </a:p>
         </p:txBody>
@@ -3713,7 +3713,7 @@
                 </a:solidFill>
                 <a:latin typeface="Segoe UI"/>
               </a:rPr>
-              <a:t>Reliance</a:t>
+              <a:t>Bharti Airtel</a:t>
             </a:r>
           </a:p>
         </p:txBody>
@@ -3747,7 +3747,7 @@
                 </a:solidFill>
                 <a:latin typeface="Segoe UI"/>
               </a:rPr>
-              <a:t>RELIANCE.NS · AMBER</a:t>
+              <a:t>BHARTIARTL.NS · AMBER</a:t>
             </a:r>
           </a:p>
         </p:txBody>
@@ -3781,7 +3781,7 @@
                 </a:solidFill>
                 <a:latin typeface="Segoe UI"/>
               </a:rPr>
-              <a:t>+2.8%</a:t>
+              <a:t>+3.2%</a:t>
             </a:r>
           </a:p>
         </p:txBody>
@@ -3839,7 +3839,7 @@
                 </a:solidFill>
                 <a:latin typeface="Segoe UI"/>
               </a:rPr>
-              <a:t>Bharti Airtel</a:t>
+              <a:t>ITC</a:t>
             </a:r>
           </a:p>
         </p:txBody>
@@ -3869,11 +3869,11 @@
             <a:r>
               <a:rPr sz="900" b="0">
                 <a:solidFill>
-                  <a:srgbClr val="F59E0B"/>
-                </a:solidFill>
-                <a:latin typeface="Segoe UI"/>
-              </a:rPr>
-              <a:t>BHARTIARTL.NS · AMBER</a:t>
+                  <a:srgbClr val="EF4444"/>
+                </a:solidFill>
+                <a:latin typeface="Segoe UI"/>
+              </a:rPr>
+              <a:t>ITC.NS · RED</a:t>
             </a:r>
           </a:p>
         </p:txBody>
@@ -3907,7 +3907,7 @@
                 </a:solidFill>
                 <a:latin typeface="Segoe UI"/>
               </a:rPr>
-              <a:t>+2.8%</a:t>
+              <a:t>+2.9%</a:t>
             </a:r>
           </a:p>
         </p:txBody>
@@ -3965,7 +3965,7 @@
                 </a:solidFill>
                 <a:latin typeface="Segoe UI"/>
               </a:rPr>
-              <a:t>Natural Gas</a:t>
+              <a:t>Apple</a:t>
             </a:r>
           </a:p>
         </p:txBody>
@@ -3995,11 +3995,11 @@
             <a:r>
               <a:rPr sz="900" b="0">
                 <a:solidFill>
-                  <a:srgbClr val="EF4444"/>
-                </a:solidFill>
-                <a:latin typeface="Segoe UI"/>
-              </a:rPr>
-              <a:t>NG=F · RED</a:t>
+                  <a:srgbClr val="22C55E"/>
+                </a:solidFill>
+                <a:latin typeface="Segoe UI"/>
+              </a:rPr>
+              <a:t>AAPL · GREEN</a:t>
             </a:r>
           </a:p>
         </p:txBody>
@@ -4033,7 +4033,7 @@
                 </a:solidFill>
                 <a:latin typeface="Segoe UI"/>
               </a:rPr>
-              <a:t>+2.7%</a:t>
+              <a:t>+2.6%</a:t>
             </a:r>
           </a:p>
         </p:txBody>
@@ -4125,7 +4125,7 @@
                 </a:solidFill>
                 <a:latin typeface="Segoe UI"/>
               </a:rPr>
-              <a:t>Ethereum</a:t>
+              <a:t>TCS</a:t>
             </a:r>
           </a:p>
         </p:txBody>
@@ -4155,11 +4155,11 @@
             <a:r>
               <a:rPr sz="900" b="0">
                 <a:solidFill>
-                  <a:srgbClr val="F59E0B"/>
-                </a:solidFill>
-                <a:latin typeface="Segoe UI"/>
-              </a:rPr>
-              <a:t>ETH-USD · AMBER</a:t>
+                  <a:srgbClr val="EF4444"/>
+                </a:solidFill>
+                <a:latin typeface="Segoe UI"/>
+              </a:rPr>
+              <a:t>TCS.NS · RED</a:t>
             </a:r>
           </a:p>
         </p:txBody>
@@ -4193,7 +4193,7 @@
                 </a:solidFill>
                 <a:latin typeface="Segoe UI"/>
               </a:rPr>
-              <a:t>-3.5%</a:t>
+              <a:t>-3.3%</a:t>
             </a:r>
           </a:p>
         </p:txBody>
@@ -4251,7 +4251,7 @@
                 </a:solidFill>
                 <a:latin typeface="Segoe UI"/>
               </a:rPr>
-              <a:t>Nikkei 225</a:t>
+              <a:t>Tesla</a:t>
             </a:r>
           </a:p>
         </p:txBody>
@@ -4281,11 +4281,11 @@
             <a:r>
               <a:rPr sz="900" b="0">
                 <a:solidFill>
-                  <a:srgbClr val="F59E0B"/>
-                </a:solidFill>
-                <a:latin typeface="Segoe UI"/>
-              </a:rPr>
-              <a:t>^N225 · AMBER</a:t>
+                  <a:srgbClr val="EF4444"/>
+                </a:solidFill>
+                <a:latin typeface="Segoe UI"/>
+              </a:rPr>
+              <a:t>TSLA · RED</a:t>
             </a:r>
           </a:p>
         </p:txBody>
@@ -4319,7 +4319,7 @@
                 </a:solidFill>
                 <a:latin typeface="Segoe UI"/>
               </a:rPr>
-              <a:t>-3.2%</a:t>
+              <a:t>-3.0%</a:t>
             </a:r>
           </a:p>
         </p:txBody>
@@ -4377,7 +4377,7 @@
                 </a:solidFill>
                 <a:latin typeface="Segoe UI"/>
               </a:rPr>
-              <a:t>Tesla</a:t>
+              <a:t>Nikkei 225</a:t>
             </a:r>
           </a:p>
         </p:txBody>
@@ -4407,11 +4407,11 @@
             <a:r>
               <a:rPr sz="900" b="0">
                 <a:solidFill>
-                  <a:srgbClr val="EF4444"/>
-                </a:solidFill>
-                <a:latin typeface="Segoe UI"/>
-              </a:rPr>
-              <a:t>TSLA · RED</a:t>
+                  <a:srgbClr val="F59E0B"/>
+                </a:solidFill>
+                <a:latin typeface="Segoe UI"/>
+              </a:rPr>
+              <a:t>^N225 · AMBER</a:t>
             </a:r>
           </a:p>
         </p:txBody>
@@ -4445,7 +4445,7 @@
                 </a:solidFill>
                 <a:latin typeface="Segoe UI"/>
               </a:rPr>
-              <a:t>-3.2%</a:t>
+              <a:t>-2.4%</a:t>
             </a:r>
           </a:p>
         </p:txBody>
@@ -4503,7 +4503,7 @@
                 </a:solidFill>
                 <a:latin typeface="Segoe UI"/>
               </a:rPr>
-              <a:t>Solana</a:t>
+              <a:t>Microsoft</a:t>
             </a:r>
           </a:p>
         </p:txBody>
@@ -4533,11 +4533,11 @@
             <a:r>
               <a:rPr sz="900" b="0">
                 <a:solidFill>
-                  <a:srgbClr val="EF4444"/>
-                </a:solidFill>
-                <a:latin typeface="Segoe UI"/>
-              </a:rPr>
-              <a:t>SOL-USD · RED</a:t>
+                  <a:srgbClr val="22C55E"/>
+                </a:solidFill>
+                <a:latin typeface="Segoe UI"/>
+              </a:rPr>
+              <a:t>MSFT · GREEN</a:t>
             </a:r>
           </a:p>
         </p:txBody>
@@ -4571,7 +4571,7 @@
                 </a:solidFill>
                 <a:latin typeface="Segoe UI"/>
               </a:rPr>
-              <a:t>-3.2%</a:t>
+              <a:t>-2.1%</a:t>
             </a:r>
           </a:p>
         </p:txBody>
@@ -4629,7 +4629,7 @@
                 </a:solidFill>
                 <a:latin typeface="Segoe UI"/>
               </a:rPr>
-              <a:t>TCS</a:t>
+              <a:t>Amazon</a:t>
             </a:r>
           </a:p>
         </p:txBody>
@@ -4659,11 +4659,11 @@
             <a:r>
               <a:rPr sz="900" b="0">
                 <a:solidFill>
-                  <a:srgbClr val="EF4444"/>
-                </a:solidFill>
-                <a:latin typeface="Segoe UI"/>
-              </a:rPr>
-              <a:t>TCS.NS · RED</a:t>
+                  <a:srgbClr val="F59E0B"/>
+                </a:solidFill>
+                <a:latin typeface="Segoe UI"/>
+              </a:rPr>
+              <a:t>AMZN · AMBER</a:t>
             </a:r>
           </a:p>
         </p:txBody>
@@ -4697,7 +4697,7 @@
                 </a:solidFill>
                 <a:latin typeface="Segoe UI"/>
               </a:rPr>
-              <a:t>-2.1%</a:t>
+              <a:t>-1.8%</a:t>
             </a:r>
           </a:p>
         </p:txBody>
@@ -4967,7 +4967,7 @@
                 </a:solidFill>
                 <a:latin typeface="Segoe UI"/>
               </a:rPr>
-              <a:t>NIFTY IT</a:t>
+              <a:t>Copper</a:t>
             </a:r>
           </a:p>
         </p:txBody>
@@ -5035,7 +5035,7 @@
                 </a:solidFill>
                 <a:latin typeface="Segoe UI"/>
               </a:rPr>
-              <a:t>84%</a:t>
+              <a:t>95%</a:t>
             </a:r>
           </a:p>
         </p:txBody>
@@ -5171,7 +5171,7 @@
                 </a:solidFill>
                 <a:latin typeface="Segoe UI"/>
               </a:rPr>
-              <a:t>84%</a:t>
+              <a:t>83%</a:t>
             </a:r>
           </a:p>
         </p:txBody>
@@ -5239,7 +5239,7 @@
                 </a:solidFill>
                 <a:latin typeface="Segoe UI"/>
               </a:rPr>
-              <a:t>Copper</a:t>
+              <a:t>Nvidia</a:t>
             </a:r>
           </a:p>
         </p:txBody>
@@ -5307,7 +5307,7 @@
                 </a:solidFill>
                 <a:latin typeface="Segoe UI"/>
               </a:rPr>
-              <a:t>82%</a:t>
+              <a:t>95%</a:t>
             </a:r>
           </a:p>
         </p:txBody>
@@ -5341,7 +5341,7 @@
                 </a:solidFill>
                 <a:latin typeface="Segoe UI"/>
               </a:rPr>
-              <a:t>above 200DMA · golden cross (50&gt;200) · MACD bearish</a:t>
+              <a:t>above 200DMA · golden cross (50&gt;200) · MACD bullish</a:t>
             </a:r>
           </a:p>
         </p:txBody>
@@ -5375,7 +5375,7 @@
                 </a:solidFill>
                 <a:latin typeface="Segoe UI"/>
               </a:rPr>
-              <a:t>Apple</a:t>
+              <a:t>NIFTY IT</a:t>
             </a:r>
           </a:p>
         </p:txBody>
@@ -5443,7 +5443,7 @@
                 </a:solidFill>
                 <a:latin typeface="Segoe UI"/>
               </a:rPr>
-              <a:t>93%</a:t>
+              <a:t>82%</a:t>
             </a:r>
           </a:p>
         </p:txBody>
@@ -5579,7 +5579,7 @@
                 </a:solidFill>
                 <a:latin typeface="Segoe UI"/>
               </a:rPr>
-              <a:t>92%</a:t>
+              <a:t>93%</a:t>
             </a:r>
           </a:p>
         </p:txBody>
@@ -5647,7 +5647,7 @@
                 </a:solidFill>
                 <a:latin typeface="Segoe UI"/>
               </a:rPr>
-              <a:t>TCS</a:t>
+              <a:t>Apple</a:t>
             </a:r>
           </a:p>
         </p:txBody>
@@ -5715,7 +5715,7 @@
                 </a:solidFill>
                 <a:latin typeface="Segoe UI"/>
               </a:rPr>
-              <a:t>80%</a:t>
+              <a:t>92%</a:t>
             </a:r>
           </a:p>
         </p:txBody>
@@ -5783,7 +5783,7 @@
                 </a:solidFill>
                 <a:latin typeface="Segoe UI"/>
               </a:rPr>
-              <a:t>US Energy</a:t>
+              <a:t>US Financials</a:t>
             </a:r>
           </a:p>
         </p:txBody>
@@ -5817,7 +5817,7 @@
                 </a:solidFill>
                 <a:latin typeface="Segoe UI"/>
               </a:rPr>
-              <a:t>BUY</a:t>
+              <a:t>STRONG BUY</a:t>
             </a:r>
           </a:p>
         </p:txBody>
@@ -5851,7 +5851,7 @@
                 </a:solidFill>
                 <a:latin typeface="Segoe UI"/>
               </a:rPr>
-              <a:t>93%</a:t>
+              <a:t>80%</a:t>
             </a:r>
           </a:p>
         </p:txBody>
@@ -5885,7 +5885,7 @@
                 </a:solidFill>
                 <a:latin typeface="Segoe UI"/>
               </a:rPr>
-              <a:t>above 200DMA · golden cross (50&gt;200) · MACD bullish</a:t>
+              <a:t>above 200DMA · golden cross (50&gt;200) · MACD bearish</a:t>
             </a:r>
           </a:p>
         </p:txBody>
@@ -5919,7 +5919,7 @@
                 </a:solidFill>
                 <a:latin typeface="Segoe UI"/>
               </a:rPr>
-              <a:t>Crude Oil WTI</a:t>
+              <a:t>US Energy</a:t>
             </a:r>
           </a:p>
         </p:txBody>
@@ -5987,7 +5987,7 @@
                 </a:solidFill>
                 <a:latin typeface="Segoe UI"/>
               </a:rPr>
-              <a:t>71%</a:t>
+              <a:t>93%</a:t>
             </a:r>
           </a:p>
         </p:txBody>
@@ -6021,7 +6021,7 @@
                 </a:solidFill>
                 <a:latin typeface="Segoe UI"/>
               </a:rPr>
-              <a:t>above 200DMA · death cross (50&lt;200) · MACD bullish</a:t>
+              <a:t>above 200DMA · golden cross (50&gt;200) · MACD bullish</a:t>
             </a:r>
           </a:p>
         </p:txBody>
@@ -6055,7 +6055,7 @@
                 </a:solidFill>
                 <a:latin typeface="Segoe UI"/>
               </a:rPr>
-              <a:t>Straits Times</a:t>
+              <a:t>Ethereum</a:t>
             </a:r>
           </a:p>
         </p:txBody>
@@ -6123,7 +6123,7 @@
                 </a:solidFill>
                 <a:latin typeface="Segoe UI"/>
               </a:rPr>
-              <a:t>71%</a:t>
+              <a:t>78%</a:t>
             </a:r>
           </a:p>
         </p:txBody>
@@ -6191,7 +6191,7 @@
                 </a:solidFill>
                 <a:latin typeface="Segoe UI"/>
               </a:rPr>
-              <a:t>Ethereum</a:t>
+              <a:t>Straits Times</a:t>
             </a:r>
           </a:p>
         </p:txBody>
@@ -6259,7 +6259,7 @@
                 </a:solidFill>
                 <a:latin typeface="Segoe UI"/>
               </a:rPr>
-              <a:t>76%</a:t>
+              <a:t>71%</a:t>
             </a:r>
           </a:p>
         </p:txBody>
@@ -6395,7 +6395,7 @@
                 </a:solidFill>
                 <a:latin typeface="Segoe UI"/>
               </a:rPr>
-              <a:t>69%</a:t>
+              <a:t>75%</a:t>
             </a:r>
           </a:p>
         </p:txBody>
@@ -6463,7 +6463,7 @@
                 </a:solidFill>
                 <a:latin typeface="Segoe UI"/>
               </a:rPr>
-              <a:t>Nvidia</a:t>
+              <a:t>S&amp;P 500</a:t>
             </a:r>
           </a:p>
         </p:txBody>
@@ -6531,7 +6531,7 @@
                 </a:solidFill>
                 <a:latin typeface="Segoe UI"/>
               </a:rPr>
-              <a:t>79%</a:t>
+              <a:t>68%</a:t>
             </a:r>
           </a:p>
         </p:txBody>
@@ -6659,7 +6659,7 @@
                 </a:solidFill>
                 <a:latin typeface="Segoe UI"/>
               </a:rPr>
-              <a:t>Base currency INR · USD/INR 94.96</a:t>
+              <a:t>Base currency INR · USD/INR 94.47</a:t>
             </a:r>
           </a:p>
         </p:txBody>
@@ -7067,7 +7067,7 @@
                 </a:solidFill>
                 <a:latin typeface="Segoe UI"/>
               </a:rPr>
-              <a:t>77,093</a:t>
+              <a:t>81,145</a:t>
             </a:r>
           </a:p>
         </p:txBody>
@@ -7101,7 +7101,7 @@
                 </a:solidFill>
                 <a:latin typeface="Segoe UI"/>
               </a:rPr>
-              <a:t>Rs 732,041</a:t>
+              <a:t>Rs 766,614</a:t>
             </a:r>
           </a:p>
         </p:txBody>
@@ -7135,7 +7135,7 @@
                 </a:solidFill>
                 <a:latin typeface="Segoe UI"/>
               </a:rPr>
-              <a:t>Rs 162,310</a:t>
+              <a:t>Rs 199,764</a:t>
             </a:r>
           </a:p>
         </p:txBody>
@@ -7169,7 +7169,7 @@
                 </a:solidFill>
                 <a:latin typeface="Segoe UI"/>
               </a:rPr>
-              <a:t>+28.5%</a:t>
+              <a:t>+35.2%</a:t>
             </a:r>
           </a:p>
         </p:txBody>
@@ -7199,11 +7199,11 @@
             <a:r>
               <a:rPr sz="1000" b="0">
                 <a:solidFill>
-                  <a:srgbClr val="EF4444"/>
-                </a:solidFill>
-                <a:latin typeface="Segoe UI"/>
-              </a:rPr>
-              <a:t>-0.4%</a:t>
+                  <a:srgbClr val="22C55E"/>
+                </a:solidFill>
+                <a:latin typeface="Segoe UI"/>
+              </a:rPr>
+              <a:t>+5.0%</a:t>
             </a:r>
           </a:p>
         </p:txBody>
@@ -7339,7 +7339,7 @@
                 </a:solidFill>
                 <a:latin typeface="Segoe UI"/>
               </a:rPr>
-              <a:t>4,434</a:t>
+              <a:t>4,523</a:t>
             </a:r>
           </a:p>
         </p:txBody>
@@ -7373,7 +7373,7 @@
                 </a:solidFill>
                 <a:latin typeface="Segoe UI"/>
               </a:rPr>
-              <a:t>Rs 421,003</a:t>
+              <a:t>Rs 427,273</a:t>
             </a:r>
           </a:p>
         </p:txBody>
@@ -7407,7 +7407,7 @@
                 </a:solidFill>
                 <a:latin typeface="Segoe UI"/>
               </a:rPr>
-              <a:t>Rs 202,606</a:t>
+              <a:t>Rs 209,980</a:t>
             </a:r>
           </a:p>
         </p:txBody>
@@ -7441,7 +7441,7 @@
                 </a:solidFill>
                 <a:latin typeface="Segoe UI"/>
               </a:rPr>
-              <a:t>+92.8%</a:t>
+              <a:t>+96.6%</a:t>
             </a:r>
           </a:p>
         </p:txBody>
@@ -7645,7 +7645,7 @@
                 </a:solidFill>
                 <a:latin typeface="Segoe UI"/>
               </a:rPr>
-              <a:t>Rs 308,728</a:t>
+              <a:t>Rs 307,006</a:t>
             </a:r>
           </a:p>
         </p:txBody>
@@ -7679,7 +7679,7 @@
                 </a:solidFill>
                 <a:latin typeface="Segoe UI"/>
               </a:rPr>
-              <a:t>Rs 133,061</a:t>
+              <a:t>Rs 132,227</a:t>
             </a:r>
           </a:p>
         </p:txBody>
@@ -7713,7 +7713,7 @@
                 </a:solidFill>
                 <a:latin typeface="Segoe UI"/>
               </a:rPr>
-              <a:t>+75.8%</a:t>
+              <a:t>+75.7%</a:t>
             </a:r>
           </a:p>
         </p:txBody>
@@ -7883,7 +7883,7 @@
                 </a:solidFill>
                 <a:latin typeface="Segoe UI"/>
               </a:rPr>
-              <a:t>217</a:t>
+              <a:t>224</a:t>
             </a:r>
           </a:p>
         </p:txBody>
@@ -7917,7 +7917,7 @@
                 </a:solidFill>
                 <a:latin typeface="Segoe UI"/>
               </a:rPr>
-              <a:t>Rs 165,176</a:t>
+              <a:t>Rs 169,609</a:t>
             </a:r>
           </a:p>
         </p:txBody>
@@ -7951,7 +7951,7 @@
                 </a:solidFill>
                 <a:latin typeface="Segoe UI"/>
               </a:rPr>
-              <a:t>Rs -176,662</a:t>
+              <a:t>Rs -170,501</a:t>
             </a:r>
           </a:p>
         </p:txBody>
@@ -7985,7 +7985,7 @@
                 </a:solidFill>
                 <a:latin typeface="Segoe UI"/>
               </a:rPr>
-              <a:t>-51.7%</a:t>
+              <a:t>-50.1%</a:t>
             </a:r>
           </a:p>
         </p:txBody>
@@ -8155,7 +8155,7 @@
                 </a:solidFill>
                 <a:latin typeface="Segoe UI"/>
               </a:rPr>
-              <a:t>1,140</a:t>
+              <a:t>1,130</a:t>
             </a:r>
           </a:p>
         </p:txBody>
@@ -8189,7 +8189,7 @@
                 </a:solidFill>
                 <a:latin typeface="Segoe UI"/>
               </a:rPr>
-              <a:t>Rs 91,200</a:t>
+              <a:t>Rs 90,424</a:t>
             </a:r>
           </a:p>
         </p:txBody>
@@ -8223,7 +8223,7 @@
                 </a:solidFill>
                 <a:latin typeface="Segoe UI"/>
               </a:rPr>
-              <a:t>Rs -20,800</a:t>
+              <a:t>Rs -21,576</a:t>
             </a:r>
           </a:p>
         </p:txBody>
@@ -8257,7 +8257,7 @@
                 </a:solidFill>
                 <a:latin typeface="Segoe UI"/>
               </a:rPr>
-              <a:t>-18.6%</a:t>
+              <a:t>-19.3%</a:t>
             </a:r>
           </a:p>
         </p:txBody>
@@ -8427,7 +8427,7 @@
                 </a:solidFill>
                 <a:latin typeface="Segoe UI"/>
               </a:rPr>
-              <a:t>1,313</a:t>
+              <a:t>1,302</a:t>
             </a:r>
           </a:p>
         </p:txBody>
@@ -8461,7 +8461,7 @@
                 </a:solidFill>
                 <a:latin typeface="Segoe UI"/>
               </a:rPr>
-              <a:t>Rs 65,655</a:t>
+              <a:t>Rs 65,125</a:t>
             </a:r>
           </a:p>
         </p:txBody>
@@ -8495,7 +8495,7 @@
                 </a:solidFill>
                 <a:latin typeface="Segoe UI"/>
               </a:rPr>
-              <a:t>Rs -56,845</a:t>
+              <a:t>Rs -57,375</a:t>
             </a:r>
           </a:p>
         </p:txBody>
@@ -8529,7 +8529,7 @@
                 </a:solidFill>
                 <a:latin typeface="Segoe UI"/>
               </a:rPr>
-              <a:t>-46.4%</a:t>
+              <a:t>-46.8%</a:t>
             </a:r>
           </a:p>
         </p:txBody>
@@ -8699,7 +8699,7 @@
                 </a:solidFill>
                 <a:latin typeface="Segoe UI"/>
               </a:rPr>
-              <a:t>2,348</a:t>
+              <a:t>2,320</a:t>
             </a:r>
           </a:p>
         </p:txBody>
@@ -8733,7 +8733,7 @@
                 </a:solidFill>
                 <a:latin typeface="Segoe UI"/>
               </a:rPr>
-              <a:t>Rs 58,700</a:t>
+              <a:t>Rs 58,003</a:t>
             </a:r>
           </a:p>
         </p:txBody>
@@ -8767,7 +8767,7 @@
                 </a:solidFill>
                 <a:latin typeface="Segoe UI"/>
               </a:rPr>
-              <a:t>Rs -31,300</a:t>
+              <a:t>Rs -31,997</a:t>
             </a:r>
           </a:p>
         </p:txBody>
@@ -8801,7 +8801,7 @@
                 </a:solidFill>
                 <a:latin typeface="Segoe UI"/>
               </a:rPr>
-              <a:t>-34.8%</a:t>
+              <a:t>-35.5%</a:t>
             </a:r>
           </a:p>
         </p:txBody>
@@ -8971,7 +8971,7 @@
                 </a:solidFill>
                 <a:latin typeface="Segoe UI"/>
               </a:rPr>
-              <a:t>701</a:t>
+              <a:t>707</a:t>
             </a:r>
           </a:p>
         </p:txBody>
@@ -9005,7 +9005,7 @@
                 </a:solidFill>
                 <a:latin typeface="Segoe UI"/>
               </a:rPr>
-              <a:t>Rs 42,048</a:t>
+              <a:t>Rs 42,399</a:t>
             </a:r>
           </a:p>
         </p:txBody>
@@ -9039,7 +9039,7 @@
                 </a:solidFill>
                 <a:latin typeface="Segoe UI"/>
               </a:rPr>
-              <a:t>Rs -49,152</a:t>
+              <a:t>Rs -48,801</a:t>
             </a:r>
           </a:p>
         </p:txBody>
@@ -9073,7 +9073,7 @@
                 </a:solidFill>
                 <a:latin typeface="Segoe UI"/>
               </a:rPr>
-              <a:t>-53.9%</a:t>
+              <a:t>-53.5%</a:t>
             </a:r>
           </a:p>
         </p:txBody>
@@ -9141,7 +9141,7 @@
                 </a:solidFill>
                 <a:latin typeface="Segoe UI"/>
               </a:rPr>
-              <a:t>Total Rs 1,884,552 | P&amp;L Rs 163,218 (+9.5%) | Sharpe -0.0 | Vol 19.19% | VaR95 -1.88%/day</a:t>
+              <a:t>Total Rs 1,926,452 | P&amp;L Rs 211,721 (+12.3%) | Sharpe 0.12 | Vol 19.57% | VaR95 -1.91%/day</a:t>
             </a:r>
           </a:p>
         </p:txBody>
